--- a/samples/VK_WorkSpace_Клиентская_конференция_Шабл__split.pptx
+++ b/samples/VK_WorkSpace_Клиентская_конференция_Шабл__split.pptx
@@ -15,8 +15,6 @@
     <p:sldId id="289" r:id="rId42"/>
     <p:sldId id="290" r:id="rId43"/>
     <p:sldId id="291" r:id="rId44"/>
-    <p:sldId id="292" r:id="rId45"/>
-    <p:sldId id="293" r:id="rId46"/>
   </p:sldIdLst>
   <p:sldSz cy="6858000" cx="12192000"/>
   <p:notesSz cx="6858000" cy="9144000"/>
@@ -303,7 +301,7 @@
               <c:strCache>
                 <c:ptCount val="1"/>
                 <c:pt idx="0">
-                  <c:v>Время</c:v>
+                  <c:v>Время (мин)</c:v>
                 </c:pt>
               </c:strCache>
             </c:strRef>
@@ -324,10 +322,10 @@
               <c:strCache>
                 <c:ptCount val="2"/>
                 <c:pt idx="0">
-                  <c:v>Текущее время</c:v>
+                  <c:v>Ручной</c:v>
                 </c:pt>
                 <c:pt idx="1">
-                  <c:v>Автоматизированное время</c:v>
+                  <c:v>Автоматический</c:v>
                 </c:pt>
               </c:strCache>
             </c:strRef>
@@ -416,7 +414,381 @@
                   </a:defRPr>
                 </a:pPr>
                 <a:r>
-                  <a:t>минут</a:t>
+                  <a:t>мин</a:t>
+                </a:r>
+              </a:p>
+            </c:rich>
+          </c:tx>
+          <c:layout/>
+          <c:overlay val="0"/>
+        </c:title>
+        <c:majorTickMark val="out"/>
+        <c:minorTickMark val="none"/>
+        <c:tickLblPos val="nextTo"/>
+        <c:txPr>
+          <a:bodyPr/>
+          <a:lstStyle/>
+          <a:p>
+            <a:pPr>
+              <a:defRPr sz="1100" b="0">
+                <a:solidFill>
+                  <a:srgbClr val="FFFFFF"/>
+                </a:solidFill>
+                <a:latin typeface="Play"/>
+                <a:ea typeface="Play"/>
+                <a:cs typeface="Play"/>
+              </a:defRPr>
+            </a:pPr>
+          </a:p>
+        </c:txPr>
+        <c:crossAx val="-2068027336"/>
+        <c:crosses val="autoZero"/>
+      </c:valAx>
+    </c:plotArea>
+    <c:dispBlanksAs val="gap"/>
+  </c:chart>
+  <c:txPr>
+    <a:bodyPr/>
+    <a:lstStyle/>
+    <a:p>
+      <a:pPr>
+        <a:defRPr sz="1200" b="0">
+          <a:solidFill>
+            <a:srgbClr val="FFFFFF"/>
+          </a:solidFill>
+          <a:latin typeface="Play"/>
+          <a:ea typeface="Play"/>
+          <a:cs typeface="Play"/>
+        </a:defRPr>
+      </a:pPr>
+      <a:endParaRPr lang="en-US"/>
+    </a:p>
+  </c:txPr>
+  <c:externalData r:id="rId1">
+    <c:autoUpdate val="0"/>
+  </c:externalData>
+</c:chartSpace>
+</file>
+
+<file path=ppt/charts/chart2.xml><?xml version="1.0" encoding="utf-8"?>
+<c:chartSpace xmlns:c="http://schemas.openxmlformats.org/drawingml/2006/chart" xmlns:a="http://schemas.openxmlformats.org/drawingml/2006/main" xmlns:r="http://schemas.openxmlformats.org/officeDocument/2006/relationships">
+  <c:date1904 val="0"/>
+  <c:chart>
+    <c:autoTitleDeleted val="1"/>
+    <c:plotArea>
+      <c:barChart>
+        <c:barDir val="col"/>
+        <c:grouping val="clustered"/>
+        <c:ser>
+          <c:idx val="0"/>
+          <c:order val="0"/>
+          <c:tx>
+            <c:strRef>
+              <c:f>Sheet1!$B$1</c:f>
+              <c:strCache>
+                <c:ptCount val="1"/>
+                <c:pt idx="0">
+                  <c:v>Время (мин)</c:v>
+                </c:pt>
+              </c:strCache>
+            </c:strRef>
+          </c:tx>
+          <c:spPr>
+            <a:solidFill>
+              <a:srgbClr val="0077FF"/>
+            </a:solidFill>
+            <a:ln>
+              <a:solidFill>
+                <a:srgbClr val="0077FF"/>
+              </a:solidFill>
+            </a:ln>
+          </c:spPr>
+          <c:cat>
+            <c:strRef>
+              <c:f>Sheet1!$A$2:$A$3</c:f>
+              <c:strCache>
+                <c:ptCount val="2"/>
+                <c:pt idx="0">
+                  <c:v>Ручной</c:v>
+                </c:pt>
+                <c:pt idx="1">
+                  <c:v>Автоматический</c:v>
+                </c:pt>
+              </c:strCache>
+            </c:strRef>
+          </c:cat>
+          <c:val>
+            <c:numRef>
+              <c:f>Sheet1!$B$2:$B$3</c:f>
+              <c:numCache>
+                <c:formatCode>General</c:formatCode>
+                <c:ptCount val="2"/>
+                <c:pt idx="0">
+                  <c:v>186.0</c:v>
+                </c:pt>
+                <c:pt idx="1">
+                  <c:v>4.0</c:v>
+                </c:pt>
+              </c:numCache>
+            </c:numRef>
+          </c:val>
+        </c:ser>
+        <c:gapWidth val="60"/>
+        <c:axId val="-2068027336"/>
+        <c:axId val="-2113994440"/>
+      </c:barChart>
+      <c:catAx>
+        <c:axId val="-2068027336"/>
+        <c:scaling>
+          <c:orientation val="minMax"/>
+        </c:scaling>
+        <c:delete val="0"/>
+        <c:axPos val="b"/>
+        <c:majorTickMark val="out"/>
+        <c:minorTickMark val="none"/>
+        <c:tickLblPos val="nextTo"/>
+        <c:txPr>
+          <a:bodyPr/>
+          <a:lstStyle/>
+          <a:p>
+            <a:pPr>
+              <a:defRPr sz="1100" b="0">
+                <a:solidFill>
+                  <a:srgbClr val="FFFFFF"/>
+                </a:solidFill>
+                <a:latin typeface="Play"/>
+                <a:ea typeface="Play"/>
+                <a:cs typeface="Play"/>
+              </a:defRPr>
+            </a:pPr>
+          </a:p>
+        </c:txPr>
+        <c:crossAx val="-2113994440"/>
+        <c:crosses val="autoZero"/>
+        <c:auto val="1"/>
+        <c:lblAlgn val="ctr"/>
+        <c:lblOffset val="100"/>
+        <c:noMultiLvlLbl val="0"/>
+      </c:catAx>
+      <c:valAx>
+        <c:axId val="-2113994440"/>
+        <c:scaling/>
+        <c:delete val="0"/>
+        <c:axPos val="l"/>
+        <c:majorGridlines>
+          <c:spPr>
+            <a:ln w="9525">
+              <a:solidFill>
+                <a:srgbClr val="3C3C3C"/>
+              </a:solidFill>
+            </a:ln>
+          </c:spPr>
+        </c:majorGridlines>
+        <c:title>
+          <c:tx>
+            <c:rich>
+              <a:bodyPr/>
+              <a:lstStyle/>
+              <a:p>
+                <a:pPr>
+                  <a:defRPr sz="1100" b="0">
+                    <a:solidFill>
+                      <a:srgbClr val="FFFFFF"/>
+                    </a:solidFill>
+                    <a:latin typeface="Play"/>
+                    <a:ea typeface="Play"/>
+                    <a:cs typeface="Play"/>
+                  </a:defRPr>
+                </a:pPr>
+                <a:r>
+                  <a:t>мин</a:t>
+                </a:r>
+              </a:p>
+            </c:rich>
+          </c:tx>
+          <c:layout/>
+          <c:overlay val="0"/>
+        </c:title>
+        <c:majorTickMark val="out"/>
+        <c:minorTickMark val="none"/>
+        <c:tickLblPos val="nextTo"/>
+        <c:txPr>
+          <a:bodyPr/>
+          <a:lstStyle/>
+          <a:p>
+            <a:pPr>
+              <a:defRPr sz="1100" b="0">
+                <a:solidFill>
+                  <a:srgbClr val="FFFFFF"/>
+                </a:solidFill>
+                <a:latin typeface="Play"/>
+                <a:ea typeface="Play"/>
+                <a:cs typeface="Play"/>
+              </a:defRPr>
+            </a:pPr>
+          </a:p>
+        </c:txPr>
+        <c:crossAx val="-2068027336"/>
+        <c:crosses val="autoZero"/>
+      </c:valAx>
+    </c:plotArea>
+    <c:dispBlanksAs val="gap"/>
+  </c:chart>
+  <c:txPr>
+    <a:bodyPr/>
+    <a:lstStyle/>
+    <a:p>
+      <a:pPr>
+        <a:defRPr sz="1200" b="0">
+          <a:solidFill>
+            <a:srgbClr val="FFFFFF"/>
+          </a:solidFill>
+          <a:latin typeface="Play"/>
+          <a:ea typeface="Play"/>
+          <a:cs typeface="Play"/>
+        </a:defRPr>
+      </a:pPr>
+      <a:endParaRPr lang="en-US"/>
+    </a:p>
+  </c:txPr>
+  <c:externalData r:id="rId1">
+    <c:autoUpdate val="0"/>
+  </c:externalData>
+</c:chartSpace>
+</file>
+
+<file path=ppt/charts/chart3.xml><?xml version="1.0" encoding="utf-8"?>
+<c:chartSpace xmlns:c="http://schemas.openxmlformats.org/drawingml/2006/chart" xmlns:a="http://schemas.openxmlformats.org/drawingml/2006/main" xmlns:r="http://schemas.openxmlformats.org/officeDocument/2006/relationships">
+  <c:date1904 val="0"/>
+  <c:chart>
+    <c:autoTitleDeleted val="1"/>
+    <c:plotArea>
+      <c:barChart>
+        <c:barDir val="col"/>
+        <c:grouping val="clustered"/>
+        <c:ser>
+          <c:idx val="0"/>
+          <c:order val="0"/>
+          <c:tx>
+            <c:strRef>
+              <c:f>Sheet1!$B$1</c:f>
+              <c:strCache>
+                <c:ptCount val="1"/>
+                <c:pt idx="0">
+                  <c:v>Нарушения (колоды)</c:v>
+                </c:pt>
+              </c:strCache>
+            </c:strRef>
+          </c:tx>
+          <c:spPr>
+            <a:solidFill>
+              <a:srgbClr val="0077FF"/>
+            </a:solidFill>
+            <a:ln>
+              <a:solidFill>
+                <a:srgbClr val="0077FF"/>
+              </a:solidFill>
+            </a:ln>
+          </c:spPr>
+          <c:cat>
+            <c:strRef>
+              <c:f>Sheet1!$A$2:$A$3</c:f>
+              <c:strCache>
+                <c:ptCount val="2"/>
+                <c:pt idx="0">
+                  <c:v>Ручной</c:v>
+                </c:pt>
+                <c:pt idx="1">
+                  <c:v>Автоматический</c:v>
+                </c:pt>
+              </c:strCache>
+            </c:strRef>
+          </c:cat>
+          <c:val>
+            <c:numRef>
+              <c:f>Sheet1!$B$2:$B$3</c:f>
+              <c:numCache>
+                <c:formatCode>General</c:formatCode>
+                <c:ptCount val="2"/>
+                <c:pt idx="0">
+                  <c:v>19.0</c:v>
+                </c:pt>
+                <c:pt idx="1">
+                  <c:v>2.0</c:v>
+                </c:pt>
+              </c:numCache>
+            </c:numRef>
+          </c:val>
+        </c:ser>
+        <c:gapWidth val="60"/>
+        <c:axId val="-2068027336"/>
+        <c:axId val="-2113994440"/>
+      </c:barChart>
+      <c:catAx>
+        <c:axId val="-2068027336"/>
+        <c:scaling>
+          <c:orientation val="minMax"/>
+        </c:scaling>
+        <c:delete val="0"/>
+        <c:axPos val="b"/>
+        <c:majorTickMark val="out"/>
+        <c:minorTickMark val="none"/>
+        <c:tickLblPos val="nextTo"/>
+        <c:txPr>
+          <a:bodyPr/>
+          <a:lstStyle/>
+          <a:p>
+            <a:pPr>
+              <a:defRPr sz="1100" b="0">
+                <a:solidFill>
+                  <a:srgbClr val="FFFFFF"/>
+                </a:solidFill>
+                <a:latin typeface="Play"/>
+                <a:ea typeface="Play"/>
+                <a:cs typeface="Play"/>
+              </a:defRPr>
+            </a:pPr>
+          </a:p>
+        </c:txPr>
+        <c:crossAx val="-2113994440"/>
+        <c:crosses val="autoZero"/>
+        <c:auto val="1"/>
+        <c:lblAlgn val="ctr"/>
+        <c:lblOffset val="100"/>
+        <c:noMultiLvlLbl val="0"/>
+      </c:catAx>
+      <c:valAx>
+        <c:axId val="-2113994440"/>
+        <c:scaling/>
+        <c:delete val="0"/>
+        <c:axPos val="l"/>
+        <c:majorGridlines>
+          <c:spPr>
+            <a:ln w="9525">
+              <a:solidFill>
+                <a:srgbClr val="3C3C3C"/>
+              </a:solidFill>
+            </a:ln>
+          </c:spPr>
+        </c:majorGridlines>
+        <c:title>
+          <c:tx>
+            <c:rich>
+              <a:bodyPr/>
+              <a:lstStyle/>
+              <a:p>
+                <a:pPr>
+                  <a:defRPr sz="1100" b="0">
+                    <a:solidFill>
+                      <a:srgbClr val="FFFFFF"/>
+                    </a:solidFill>
+                    <a:latin typeface="Play"/>
+                    <a:ea typeface="Play"/>
+                    <a:cs typeface="Play"/>
+                  </a:defRPr>
+                </a:pPr>
+                <a:r>
+                  <a:t>колоды</a:t>
                 </a:r>
               </a:p>
             </c:rich>
@@ -2102,1006 +2474,6 @@
 </p:notes>
 </file>
 
-<file path=ppt/notesSlides/notesSlide37.xml><?xml version="1.0" encoding="utf-8"?>
-<p:notes xmlns:a="http://schemas.openxmlformats.org/drawingml/2006/main" xmlns:p="http://schemas.openxmlformats.org/presentationml/2006/main" xmlns:r="http://schemas.openxmlformats.org/officeDocument/2006/relationships">
-  <p:cSld>
-    <p:spTree>
-      <p:nvGrpSpPr>
-        <p:cNvPr id="1" name=""/>
-        <p:cNvGrpSpPr/>
-        <p:nvPr/>
-      </p:nvGrpSpPr>
-      <p:grpSpPr>
-        <a:xfrm>
-          <a:off x="0" y="0"/>
-          <a:ext cx="0" cy="0"/>
-          <a:chOff x="0" y="0"/>
-          <a:chExt cx="0" cy="0"/>
-        </a:xfrm>
-      </p:grpSpPr>
-      <p:sp>
-        <p:nvSpPr>
-          <p:cNvPr id="2" name="Slide Image Placeholder 1"/>
-          <p:cNvSpPr>
-            <a:spLocks noGrp="1"/>
-          </p:cNvSpPr>
-          <p:nvPr>
-            <p:ph type="sldImg" idx="3"/>
-          </p:nvPr>
-        </p:nvSpPr>
-        <p:spPr/>
-      </p:sp>
-      <p:sp>
-        <p:nvSpPr>
-          <p:cNvPr id="3" name="Notes Placeholder 2"/>
-          <p:cNvSpPr>
-            <a:spLocks noGrp="1"/>
-          </p:cNvSpPr>
-          <p:nvPr>
-            <p:ph type="body" idx="1"/>
-          </p:nvPr>
-        </p:nvSpPr>
-        <p:spPr/>
-        <p:txBody>
-          <a:bodyPr/>
-          <a:lstStyle/>
-          <a:p/>
-        </p:txBody>
-      </p:sp>
-      <p:sp>
-        <p:nvSpPr>
-          <p:cNvPr id="4" name="Slide Number Placeholder 3"/>
-          <p:cNvSpPr>
-            <a:spLocks noGrp="1"/>
-          </p:cNvSpPr>
-          <p:nvPr>
-            <p:ph type="sldNum" idx="12"/>
-          </p:nvPr>
-        </p:nvSpPr>
-        <p:spPr/>
-      </p:sp>
-    </p:spTree>
-  </p:cSld>
-  <p:clrMapOvr>
-    <a:masterClrMapping/>
-  </p:clrMapOvr>
-</p:notes>
-</file>
-
-<file path=ppt/notesSlides/notesSlide38.xml><?xml version="1.0" encoding="utf-8"?>
-<p:notes xmlns:a="http://schemas.openxmlformats.org/drawingml/2006/main" xmlns:p="http://schemas.openxmlformats.org/presentationml/2006/main" xmlns:r="http://schemas.openxmlformats.org/officeDocument/2006/relationships">
-  <p:cSld>
-    <p:spTree>
-      <p:nvGrpSpPr>
-        <p:cNvPr id="1" name=""/>
-        <p:cNvGrpSpPr/>
-        <p:nvPr/>
-      </p:nvGrpSpPr>
-      <p:grpSpPr>
-        <a:xfrm>
-          <a:off x="0" y="0"/>
-          <a:ext cx="0" cy="0"/>
-          <a:chOff x="0" y="0"/>
-          <a:chExt cx="0" cy="0"/>
-        </a:xfrm>
-      </p:grpSpPr>
-      <p:sp>
-        <p:nvSpPr>
-          <p:cNvPr id="2" name="Slide Image Placeholder 1"/>
-          <p:cNvSpPr>
-            <a:spLocks noGrp="1"/>
-          </p:cNvSpPr>
-          <p:nvPr>
-            <p:ph type="sldImg" idx="3"/>
-          </p:nvPr>
-        </p:nvSpPr>
-        <p:spPr/>
-      </p:sp>
-      <p:sp>
-        <p:nvSpPr>
-          <p:cNvPr id="3" name="Notes Placeholder 2"/>
-          <p:cNvSpPr>
-            <a:spLocks noGrp="1"/>
-          </p:cNvSpPr>
-          <p:nvPr>
-            <p:ph type="body" idx="1"/>
-          </p:nvPr>
-        </p:nvSpPr>
-        <p:spPr/>
-        <p:txBody>
-          <a:bodyPr/>
-          <a:lstStyle/>
-          <a:p/>
-        </p:txBody>
-      </p:sp>
-      <p:sp>
-        <p:nvSpPr>
-          <p:cNvPr id="4" name="Slide Number Placeholder 3"/>
-          <p:cNvSpPr>
-            <a:spLocks noGrp="1"/>
-          </p:cNvSpPr>
-          <p:nvPr>
-            <p:ph type="sldNum" idx="12"/>
-          </p:nvPr>
-        </p:nvSpPr>
-        <p:spPr/>
-      </p:sp>
-    </p:spTree>
-  </p:cSld>
-  <p:clrMapOvr>
-    <a:masterClrMapping/>
-  </p:clrMapOvr>
-</p:notes>
-</file>
-
-<file path=ppt/slideLayouts/slideLayout14.xml><?xml version="1.0" encoding="utf-8"?>
-<p:sldLayout xmlns:a="http://schemas.openxmlformats.org/drawingml/2006/main" xmlns:r="http://schemas.openxmlformats.org/officeDocument/2006/relationships" xmlns:mc="http://schemas.openxmlformats.org/markup-compatibility/2006" xmlns:mv="urn:schemas-microsoft-com:mac:vml" xmlns:p="http://schemas.openxmlformats.org/presentationml/2006/main" xmlns:c="http://schemas.openxmlformats.org/drawingml/2006/chart" xmlns:dgm="http://schemas.openxmlformats.org/drawingml/2006/diagram" xmlns:o="urn:schemas-microsoft-com:office:office" xmlns:v="urn:schemas-microsoft-com:vml" xmlns:pvml="urn:schemas-microsoft-com:office:powerpoint" xmlns:com="http://schemas.openxmlformats.org/drawingml/2006/compatibility" xmlns:p14="http://schemas.microsoft.com/office/powerpoint/2010/main" xmlns:p15="http://schemas.microsoft.com/office/powerpoint/2012/main" xmlns:ahyp="http://schemas.microsoft.com/office/drawing/2018/hyperlinkcolor" matchingName="12_Титульный слайд">
-  <p:cSld name="12_Титульный слайд">
-    <p:bg>
-      <p:bgPr>
-        <a:solidFill>
-          <a:schemeClr val="dk1"/>
-        </a:solidFill>
-      </p:bgPr>
-    </p:bg>
-    <p:spTree>
-      <p:nvGrpSpPr>
-        <p:cNvPr id="326" name="Shape 326"/>
-        <p:cNvGrpSpPr/>
-        <p:nvPr/>
-      </p:nvGrpSpPr>
-      <p:grpSpPr>
-        <a:xfrm>
-          <a:off x="0" y="0"/>
-          <a:ext cx="0" cy="0"/>
-          <a:chOff x="0" y="0"/>
-          <a:chExt cx="0" cy="0"/>
-        </a:xfrm>
-      </p:grpSpPr>
-      <p:pic>
-        <p:nvPicPr>
-          <p:cNvPr descr=" " id="327" name="Google Shape;327;p15"/>
-          <p:cNvPicPr preferRelativeResize="0"/>
-          <p:nvPr/>
-        </p:nvPicPr>
-        <p:blipFill rotWithShape="1">
-          <a:blip r:embed="rId2">
-            <a:alphaModFix/>
-          </a:blip>
-          <a:srcRect b="0" l="0" r="0" t="0"/>
-          <a:stretch/>
-        </p:blipFill>
-        <p:spPr>
-          <a:xfrm>
-            <a:off x="0" y="0"/>
-            <a:ext cx="12191979" cy="6857131"/>
-          </a:xfrm>
-          <a:prstGeom prst="rect">
-            <a:avLst/>
-          </a:prstGeom>
-          <a:noFill/>
-          <a:ln>
-            <a:noFill/>
-          </a:ln>
-        </p:spPr>
-      </p:pic>
-      <p:sp>
-        <p:nvSpPr>
-          <p:cNvPr id="328" name="Google Shape;328;p15"/>
-          <p:cNvSpPr/>
-          <p:nvPr/>
-        </p:nvSpPr>
-        <p:spPr>
-          <a:xfrm>
-            <a:off x="0" y="4499104"/>
-            <a:ext cx="6792686" cy="1661684"/>
-          </a:xfrm>
-          <a:prstGeom prst="rect">
-            <a:avLst/>
-          </a:prstGeom>
-          <a:solidFill>
-            <a:srgbClr val="000000"/>
-          </a:solidFill>
-          <a:ln>
-            <a:noFill/>
-          </a:ln>
-        </p:spPr>
-        <p:txBody>
-          <a:bodyPr anchorCtr="0" anchor="ctr" bIns="45700" lIns="91425" spcFirstLastPara="1" rIns="91425" wrap="square" tIns="45700">
-            <a:noAutofit/>
-          </a:bodyPr>
-          <a:lstStyle/>
-          <a:p>
-            <a:pPr indent="0" lvl="0" marL="0" marR="0" rtl="0" algn="ctr">
-              <a:spcBef>
-                <a:spcPts val="0"/>
-              </a:spcBef>
-              <a:spcAft>
-                <a:spcPts val="0"/>
-              </a:spcAft>
-              <a:buNone/>
-            </a:pPr>
-            <a:r>
-              <a:t/>
-            </a:r>
-            <a:endParaRPr sz="1800">
-              <a:solidFill>
-                <a:schemeClr val="lt1"/>
-              </a:solidFill>
-              <a:latin typeface="Arial"/>
-              <a:ea typeface="Arial"/>
-              <a:cs typeface="Arial"/>
-              <a:sym typeface="Arial"/>
-            </a:endParaRPr>
-          </a:p>
-        </p:txBody>
-      </p:sp>
-      <p:sp>
-        <p:nvSpPr>
-          <p:cNvPr id="329" name="Google Shape;329;p15"/>
-          <p:cNvSpPr/>
-          <p:nvPr/>
-        </p:nvSpPr>
-        <p:spPr>
-          <a:xfrm>
-            <a:off x="1" y="5501389"/>
-            <a:ext cx="4811842" cy="1356609"/>
-          </a:xfrm>
-          <a:prstGeom prst="rect">
-            <a:avLst/>
-          </a:prstGeom>
-          <a:solidFill>
-            <a:srgbClr val="000000"/>
-          </a:solidFill>
-          <a:ln>
-            <a:noFill/>
-          </a:ln>
-        </p:spPr>
-        <p:txBody>
-          <a:bodyPr anchorCtr="0" anchor="ctr" bIns="45700" lIns="91425" spcFirstLastPara="1" rIns="91425" wrap="square" tIns="45700">
-            <a:noAutofit/>
-          </a:bodyPr>
-          <a:lstStyle/>
-          <a:p>
-            <a:pPr indent="0" lvl="0" marL="0" marR="0" rtl="0" algn="ctr">
-              <a:spcBef>
-                <a:spcPts val="0"/>
-              </a:spcBef>
-              <a:spcAft>
-                <a:spcPts val="0"/>
-              </a:spcAft>
-              <a:buNone/>
-            </a:pPr>
-            <a:r>
-              <a:t/>
-            </a:r>
-            <a:endParaRPr sz="1800">
-              <a:solidFill>
-                <a:schemeClr val="lt1"/>
-              </a:solidFill>
-              <a:latin typeface="Arial"/>
-              <a:ea typeface="Arial"/>
-              <a:cs typeface="Arial"/>
-              <a:sym typeface="Arial"/>
-            </a:endParaRPr>
-          </a:p>
-        </p:txBody>
-      </p:sp>
-      <p:grpSp>
-        <p:nvGrpSpPr>
-          <p:cNvPr id="330" name="Google Shape;330;p15"/>
-          <p:cNvGrpSpPr/>
-          <p:nvPr/>
-        </p:nvGrpSpPr>
-        <p:grpSpPr>
-          <a:xfrm>
-            <a:off x="224842" y="-74145"/>
-            <a:ext cx="12188171" cy="64326"/>
-            <a:chOff x="-2" y="-2"/>
-            <a:chExt cx="12188169" cy="64324"/>
-          </a:xfrm>
-        </p:grpSpPr>
-        <p:cxnSp>
-          <p:nvCxnSpPr>
-            <p:cNvPr id="331" name="Google Shape;331;p15"/>
-            <p:cNvCxnSpPr/>
-            <p:nvPr/>
-          </p:nvCxnSpPr>
-          <p:spPr>
-            <a:xfrm flipH="1">
-              <a:off x="-2" y="-2"/>
-              <a:ext cx="7" cy="64324"/>
-            </a:xfrm>
-            <a:prstGeom prst="straightConnector1">
-              <a:avLst/>
-            </a:prstGeom>
-            <a:noFill/>
-            <a:ln cap="flat" cmpd="sng" w="9525">
-              <a:solidFill>
-                <a:srgbClr val="808080"/>
-              </a:solidFill>
-              <a:prstDash val="solid"/>
-              <a:miter lim="8000"/>
-              <a:headEnd len="sm" w="sm" type="none"/>
-              <a:tailEnd len="sm" w="sm" type="none"/>
-            </a:ln>
-          </p:spPr>
-        </p:cxnSp>
-        <p:cxnSp>
-          <p:nvCxnSpPr>
-            <p:cNvPr id="332" name="Google Shape;332;p15"/>
-            <p:cNvCxnSpPr/>
-            <p:nvPr/>
-          </p:nvCxnSpPr>
-          <p:spPr>
-            <a:xfrm>
-              <a:off x="677118" y="-2"/>
-              <a:ext cx="7" cy="64324"/>
-            </a:xfrm>
-            <a:prstGeom prst="straightConnector1">
-              <a:avLst/>
-            </a:prstGeom>
-            <a:noFill/>
-            <a:ln cap="flat" cmpd="sng" w="9525">
-              <a:solidFill>
-                <a:srgbClr val="808080"/>
-              </a:solidFill>
-              <a:prstDash val="solid"/>
-              <a:miter lim="8000"/>
-              <a:headEnd len="sm" w="sm" type="none"/>
-              <a:tailEnd len="sm" w="sm" type="none"/>
-            </a:ln>
-          </p:spPr>
-        </p:cxnSp>
-        <p:cxnSp>
-          <p:nvCxnSpPr>
-            <p:cNvPr id="333" name="Google Shape;333;p15"/>
-            <p:cNvCxnSpPr/>
-            <p:nvPr/>
-          </p:nvCxnSpPr>
-          <p:spPr>
-            <a:xfrm>
-              <a:off x="1354241" y="-2"/>
-              <a:ext cx="7" cy="64324"/>
-            </a:xfrm>
-            <a:prstGeom prst="straightConnector1">
-              <a:avLst/>
-            </a:prstGeom>
-            <a:noFill/>
-            <a:ln cap="flat" cmpd="sng" w="9525">
-              <a:solidFill>
-                <a:srgbClr val="808080"/>
-              </a:solidFill>
-              <a:prstDash val="solid"/>
-              <a:miter lim="8000"/>
-              <a:headEnd len="sm" w="sm" type="none"/>
-              <a:tailEnd len="sm" w="sm" type="none"/>
-            </a:ln>
-          </p:spPr>
-        </p:cxnSp>
-        <p:cxnSp>
-          <p:nvCxnSpPr>
-            <p:cNvPr id="334" name="Google Shape;334;p15"/>
-            <p:cNvCxnSpPr/>
-            <p:nvPr/>
-          </p:nvCxnSpPr>
-          <p:spPr>
-            <a:xfrm>
-              <a:off x="2031360" y="-2"/>
-              <a:ext cx="7" cy="64324"/>
-            </a:xfrm>
-            <a:prstGeom prst="straightConnector1">
-              <a:avLst/>
-            </a:prstGeom>
-            <a:noFill/>
-            <a:ln cap="flat" cmpd="sng" w="9525">
-              <a:solidFill>
-                <a:srgbClr val="808080"/>
-              </a:solidFill>
-              <a:prstDash val="solid"/>
-              <a:miter lim="8000"/>
-              <a:headEnd len="sm" w="sm" type="none"/>
-              <a:tailEnd len="sm" w="sm" type="none"/>
-            </a:ln>
-          </p:spPr>
-        </p:cxnSp>
-        <p:cxnSp>
-          <p:nvCxnSpPr>
-            <p:cNvPr id="335" name="Google Shape;335;p15"/>
-            <p:cNvCxnSpPr/>
-            <p:nvPr/>
-          </p:nvCxnSpPr>
-          <p:spPr>
-            <a:xfrm>
-              <a:off x="2708479" y="-2"/>
-              <a:ext cx="7" cy="64324"/>
-            </a:xfrm>
-            <a:prstGeom prst="straightConnector1">
-              <a:avLst/>
-            </a:prstGeom>
-            <a:noFill/>
-            <a:ln cap="flat" cmpd="sng" w="9525">
-              <a:solidFill>
-                <a:srgbClr val="808080"/>
-              </a:solidFill>
-              <a:prstDash val="solid"/>
-              <a:miter lim="8000"/>
-              <a:headEnd len="sm" w="sm" type="none"/>
-              <a:tailEnd len="sm" w="sm" type="none"/>
-            </a:ln>
-          </p:spPr>
-        </p:cxnSp>
-        <p:cxnSp>
-          <p:nvCxnSpPr>
-            <p:cNvPr id="336" name="Google Shape;336;p15"/>
-            <p:cNvCxnSpPr/>
-            <p:nvPr/>
-          </p:nvCxnSpPr>
-          <p:spPr>
-            <a:xfrm>
-              <a:off x="3385598" y="-2"/>
-              <a:ext cx="7" cy="64324"/>
-            </a:xfrm>
-            <a:prstGeom prst="straightConnector1">
-              <a:avLst/>
-            </a:prstGeom>
-            <a:noFill/>
-            <a:ln cap="flat" cmpd="sng" w="9525">
-              <a:solidFill>
-                <a:srgbClr val="808080"/>
-              </a:solidFill>
-              <a:prstDash val="solid"/>
-              <a:miter lim="8000"/>
-              <a:headEnd len="sm" w="sm" type="none"/>
-              <a:tailEnd len="sm" w="sm" type="none"/>
-            </a:ln>
-          </p:spPr>
-        </p:cxnSp>
-        <p:cxnSp>
-          <p:nvCxnSpPr>
-            <p:cNvPr id="337" name="Google Shape;337;p15"/>
-            <p:cNvCxnSpPr/>
-            <p:nvPr/>
-          </p:nvCxnSpPr>
-          <p:spPr>
-            <a:xfrm>
-              <a:off x="4062717" y="-2"/>
-              <a:ext cx="7" cy="64324"/>
-            </a:xfrm>
-            <a:prstGeom prst="straightConnector1">
-              <a:avLst/>
-            </a:prstGeom>
-            <a:noFill/>
-            <a:ln cap="flat" cmpd="sng" w="9525">
-              <a:solidFill>
-                <a:srgbClr val="808080"/>
-              </a:solidFill>
-              <a:prstDash val="solid"/>
-              <a:miter lim="8000"/>
-              <a:headEnd len="sm" w="sm" type="none"/>
-              <a:tailEnd len="sm" w="sm" type="none"/>
-            </a:ln>
-          </p:spPr>
-        </p:cxnSp>
-        <p:cxnSp>
-          <p:nvCxnSpPr>
-            <p:cNvPr id="338" name="Google Shape;338;p15"/>
-            <p:cNvCxnSpPr/>
-            <p:nvPr/>
-          </p:nvCxnSpPr>
-          <p:spPr>
-            <a:xfrm>
-              <a:off x="4739836" y="-2"/>
-              <a:ext cx="7" cy="64324"/>
-            </a:xfrm>
-            <a:prstGeom prst="straightConnector1">
-              <a:avLst/>
-            </a:prstGeom>
-            <a:noFill/>
-            <a:ln cap="flat" cmpd="sng" w="9525">
-              <a:solidFill>
-                <a:srgbClr val="808080"/>
-              </a:solidFill>
-              <a:prstDash val="solid"/>
-              <a:miter lim="8000"/>
-              <a:headEnd len="sm" w="sm" type="none"/>
-              <a:tailEnd len="sm" w="sm" type="none"/>
-            </a:ln>
-          </p:spPr>
-        </p:cxnSp>
-        <p:cxnSp>
-          <p:nvCxnSpPr>
-            <p:cNvPr id="339" name="Google Shape;339;p15"/>
-            <p:cNvCxnSpPr/>
-            <p:nvPr/>
-          </p:nvCxnSpPr>
-          <p:spPr>
-            <a:xfrm>
-              <a:off x="5416955" y="-2"/>
-              <a:ext cx="7" cy="64324"/>
-            </a:xfrm>
-            <a:prstGeom prst="straightConnector1">
-              <a:avLst/>
-            </a:prstGeom>
-            <a:noFill/>
-            <a:ln cap="flat" cmpd="sng" w="9525">
-              <a:solidFill>
-                <a:srgbClr val="808080"/>
-              </a:solidFill>
-              <a:prstDash val="solid"/>
-              <a:miter lim="8000"/>
-              <a:headEnd len="sm" w="sm" type="none"/>
-              <a:tailEnd len="sm" w="sm" type="none"/>
-            </a:ln>
-          </p:spPr>
-        </p:cxnSp>
-        <p:cxnSp>
-          <p:nvCxnSpPr>
-            <p:cNvPr id="340" name="Google Shape;340;p15"/>
-            <p:cNvCxnSpPr/>
-            <p:nvPr/>
-          </p:nvCxnSpPr>
-          <p:spPr>
-            <a:xfrm>
-              <a:off x="6094077" y="-2"/>
-              <a:ext cx="7" cy="64324"/>
-            </a:xfrm>
-            <a:prstGeom prst="straightConnector1">
-              <a:avLst/>
-            </a:prstGeom>
-            <a:noFill/>
-            <a:ln cap="flat" cmpd="sng" w="9525">
-              <a:solidFill>
-                <a:srgbClr val="808080"/>
-              </a:solidFill>
-              <a:prstDash val="solid"/>
-              <a:miter lim="8000"/>
-              <a:headEnd len="sm" w="sm" type="none"/>
-              <a:tailEnd len="sm" w="sm" type="none"/>
-            </a:ln>
-          </p:spPr>
-        </p:cxnSp>
-        <p:cxnSp>
-          <p:nvCxnSpPr>
-            <p:cNvPr id="341" name="Google Shape;341;p15"/>
-            <p:cNvCxnSpPr/>
-            <p:nvPr/>
-          </p:nvCxnSpPr>
-          <p:spPr>
-            <a:xfrm>
-              <a:off x="6771195" y="-2"/>
-              <a:ext cx="7" cy="64324"/>
-            </a:xfrm>
-            <a:prstGeom prst="straightConnector1">
-              <a:avLst/>
-            </a:prstGeom>
-            <a:noFill/>
-            <a:ln cap="flat" cmpd="sng" w="9525">
-              <a:solidFill>
-                <a:srgbClr val="808080"/>
-              </a:solidFill>
-              <a:prstDash val="solid"/>
-              <a:miter lim="8000"/>
-              <a:headEnd len="sm" w="sm" type="none"/>
-              <a:tailEnd len="sm" w="sm" type="none"/>
-            </a:ln>
-          </p:spPr>
-        </p:cxnSp>
-        <p:cxnSp>
-          <p:nvCxnSpPr>
-            <p:cNvPr id="342" name="Google Shape;342;p15"/>
-            <p:cNvCxnSpPr/>
-            <p:nvPr/>
-          </p:nvCxnSpPr>
-          <p:spPr>
-            <a:xfrm>
-              <a:off x="7448315" y="-2"/>
-              <a:ext cx="7" cy="64324"/>
-            </a:xfrm>
-            <a:prstGeom prst="straightConnector1">
-              <a:avLst/>
-            </a:prstGeom>
-            <a:noFill/>
-            <a:ln cap="flat" cmpd="sng" w="9525">
-              <a:solidFill>
-                <a:srgbClr val="808080"/>
-              </a:solidFill>
-              <a:prstDash val="solid"/>
-              <a:miter lim="8000"/>
-              <a:headEnd len="sm" w="sm" type="none"/>
-              <a:tailEnd len="sm" w="sm" type="none"/>
-            </a:ln>
-          </p:spPr>
-        </p:cxnSp>
-        <p:cxnSp>
-          <p:nvCxnSpPr>
-            <p:cNvPr id="343" name="Google Shape;343;p15"/>
-            <p:cNvCxnSpPr/>
-            <p:nvPr/>
-          </p:nvCxnSpPr>
-          <p:spPr>
-            <a:xfrm>
-              <a:off x="8125435" y="-2"/>
-              <a:ext cx="7" cy="64324"/>
-            </a:xfrm>
-            <a:prstGeom prst="straightConnector1">
-              <a:avLst/>
-            </a:prstGeom>
-            <a:noFill/>
-            <a:ln cap="flat" cmpd="sng" w="9525">
-              <a:solidFill>
-                <a:srgbClr val="808080"/>
-              </a:solidFill>
-              <a:prstDash val="solid"/>
-              <a:miter lim="8000"/>
-              <a:headEnd len="sm" w="sm" type="none"/>
-              <a:tailEnd len="sm" w="sm" type="none"/>
-            </a:ln>
-          </p:spPr>
-        </p:cxnSp>
-        <p:cxnSp>
-          <p:nvCxnSpPr>
-            <p:cNvPr id="344" name="Google Shape;344;p15"/>
-            <p:cNvCxnSpPr/>
-            <p:nvPr/>
-          </p:nvCxnSpPr>
-          <p:spPr>
-            <a:xfrm>
-              <a:off x="8802554" y="-2"/>
-              <a:ext cx="7" cy="64324"/>
-            </a:xfrm>
-            <a:prstGeom prst="straightConnector1">
-              <a:avLst/>
-            </a:prstGeom>
-            <a:noFill/>
-            <a:ln cap="flat" cmpd="sng" w="9525">
-              <a:solidFill>
-                <a:srgbClr val="808080"/>
-              </a:solidFill>
-              <a:prstDash val="solid"/>
-              <a:miter lim="8000"/>
-              <a:headEnd len="sm" w="sm" type="none"/>
-              <a:tailEnd len="sm" w="sm" type="none"/>
-            </a:ln>
-          </p:spPr>
-        </p:cxnSp>
-        <p:cxnSp>
-          <p:nvCxnSpPr>
-            <p:cNvPr id="345" name="Google Shape;345;p15"/>
-            <p:cNvCxnSpPr/>
-            <p:nvPr/>
-          </p:nvCxnSpPr>
-          <p:spPr>
-            <a:xfrm>
-              <a:off x="9479673" y="-2"/>
-              <a:ext cx="7" cy="64324"/>
-            </a:xfrm>
-            <a:prstGeom prst="straightConnector1">
-              <a:avLst/>
-            </a:prstGeom>
-            <a:noFill/>
-            <a:ln cap="flat" cmpd="sng" w="9525">
-              <a:solidFill>
-                <a:srgbClr val="808080"/>
-              </a:solidFill>
-              <a:prstDash val="solid"/>
-              <a:miter lim="8000"/>
-              <a:headEnd len="sm" w="sm" type="none"/>
-              <a:tailEnd len="sm" w="sm" type="none"/>
-            </a:ln>
-          </p:spPr>
-        </p:cxnSp>
-        <p:cxnSp>
-          <p:nvCxnSpPr>
-            <p:cNvPr id="346" name="Google Shape;346;p15"/>
-            <p:cNvCxnSpPr/>
-            <p:nvPr/>
-          </p:nvCxnSpPr>
-          <p:spPr>
-            <a:xfrm>
-              <a:off x="10156792" y="-2"/>
-              <a:ext cx="7" cy="64324"/>
-            </a:xfrm>
-            <a:prstGeom prst="straightConnector1">
-              <a:avLst/>
-            </a:prstGeom>
-            <a:noFill/>
-            <a:ln cap="flat" cmpd="sng" w="9525">
-              <a:solidFill>
-                <a:srgbClr val="808080"/>
-              </a:solidFill>
-              <a:prstDash val="solid"/>
-              <a:miter lim="8000"/>
-              <a:headEnd len="sm" w="sm" type="none"/>
-              <a:tailEnd len="sm" w="sm" type="none"/>
-            </a:ln>
-          </p:spPr>
-        </p:cxnSp>
-        <p:cxnSp>
-          <p:nvCxnSpPr>
-            <p:cNvPr id="347" name="Google Shape;347;p15"/>
-            <p:cNvCxnSpPr/>
-            <p:nvPr/>
-          </p:nvCxnSpPr>
-          <p:spPr>
-            <a:xfrm>
-              <a:off x="10833914" y="-2"/>
-              <a:ext cx="7" cy="64324"/>
-            </a:xfrm>
-            <a:prstGeom prst="straightConnector1">
-              <a:avLst/>
-            </a:prstGeom>
-            <a:noFill/>
-            <a:ln cap="flat" cmpd="sng" w="9525">
-              <a:solidFill>
-                <a:srgbClr val="808080"/>
-              </a:solidFill>
-              <a:prstDash val="solid"/>
-              <a:miter lim="8000"/>
-              <a:headEnd len="sm" w="sm" type="none"/>
-              <a:tailEnd len="sm" w="sm" type="none"/>
-            </a:ln>
-          </p:spPr>
-        </p:cxnSp>
-        <p:cxnSp>
-          <p:nvCxnSpPr>
-            <p:cNvPr id="348" name="Google Shape;348;p15"/>
-            <p:cNvCxnSpPr/>
-            <p:nvPr/>
-          </p:nvCxnSpPr>
-          <p:spPr>
-            <a:xfrm>
-              <a:off x="11511034" y="-2"/>
-              <a:ext cx="7" cy="64324"/>
-            </a:xfrm>
-            <a:prstGeom prst="straightConnector1">
-              <a:avLst/>
-            </a:prstGeom>
-            <a:noFill/>
-            <a:ln cap="flat" cmpd="sng" w="9525">
-              <a:solidFill>
-                <a:srgbClr val="808080"/>
-              </a:solidFill>
-              <a:prstDash val="solid"/>
-              <a:miter lim="8000"/>
-              <a:headEnd len="sm" w="sm" type="none"/>
-              <a:tailEnd len="sm" w="sm" type="none"/>
-            </a:ln>
-          </p:spPr>
-        </p:cxnSp>
-        <p:cxnSp>
-          <p:nvCxnSpPr>
-            <p:cNvPr id="349" name="Google Shape;349;p15"/>
-            <p:cNvCxnSpPr/>
-            <p:nvPr/>
-          </p:nvCxnSpPr>
-          <p:spPr>
-            <a:xfrm>
-              <a:off x="12188160" y="-2"/>
-              <a:ext cx="7" cy="64324"/>
-            </a:xfrm>
-            <a:prstGeom prst="straightConnector1">
-              <a:avLst/>
-            </a:prstGeom>
-            <a:noFill/>
-            <a:ln cap="flat" cmpd="sng" w="9525">
-              <a:solidFill>
-                <a:srgbClr val="808080"/>
-              </a:solidFill>
-              <a:prstDash val="solid"/>
-              <a:miter lim="8000"/>
-              <a:headEnd len="sm" w="sm" type="none"/>
-              <a:tailEnd len="sm" w="sm" type="none"/>
-            </a:ln>
-          </p:spPr>
-        </p:cxnSp>
-      </p:grpSp>
-      <p:sp>
-        <p:nvSpPr>
-          <p:cNvPr id="350" name="Google Shape;350;p15"/>
-          <p:cNvSpPr txBox="1"/>
-          <p:nvPr>
-            <p:ph type="title"/>
-          </p:nvPr>
-        </p:nvSpPr>
-        <p:spPr>
-          <a:xfrm>
-            <a:off x="429253" y="2291422"/>
-            <a:ext cx="7827335" cy="1876890"/>
-          </a:xfrm>
-          <a:prstGeom prst="rect">
-            <a:avLst/>
-          </a:prstGeom>
-          <a:noFill/>
-          <a:ln>
-            <a:noFill/>
-          </a:ln>
-        </p:spPr>
-        <p:txBody>
-          <a:bodyPr anchorCtr="0" anchor="ctr" bIns="0" lIns="0" spcFirstLastPara="1" rIns="0" wrap="square" tIns="0">
-            <a:noAutofit/>
-          </a:bodyPr>
-          <a:lstStyle>
-            <a:lvl1pPr lvl="0" algn="l">
-              <a:lnSpc>
-                <a:spcPct val="90000"/>
-              </a:lnSpc>
-              <a:spcBef>
-                <a:spcPts val="0"/>
-              </a:spcBef>
-              <a:spcAft>
-                <a:spcPts val="0"/>
-              </a:spcAft>
-              <a:buClr>
-                <a:schemeClr val="lt1"/>
-              </a:buClr>
-              <a:buSzPts val="5400"/>
-              <a:buFont typeface="Play"/>
-              <a:buNone/>
-              <a:defRPr b="0" i="0" sz="5400">
-                <a:solidFill>
-                  <a:schemeClr val="lt1"/>
-                </a:solidFill>
-                <a:latin typeface="Play"/>
-                <a:ea typeface="Play"/>
-                <a:cs typeface="Play"/>
-                <a:sym typeface="Play"/>
-              </a:defRPr>
-            </a:lvl1pPr>
-            <a:lvl2pPr lvl="1">
-              <a:spcBef>
-                <a:spcPts val="0"/>
-              </a:spcBef>
-              <a:spcAft>
-                <a:spcPts val="0"/>
-              </a:spcAft>
-              <a:buSzPts val="1400"/>
-              <a:buNone/>
-              <a:defRPr/>
-            </a:lvl2pPr>
-            <a:lvl3pPr lvl="2">
-              <a:spcBef>
-                <a:spcPts val="0"/>
-              </a:spcBef>
-              <a:spcAft>
-                <a:spcPts val="0"/>
-              </a:spcAft>
-              <a:buSzPts val="1400"/>
-              <a:buNone/>
-              <a:defRPr/>
-            </a:lvl3pPr>
-            <a:lvl4pPr lvl="3">
-              <a:spcBef>
-                <a:spcPts val="0"/>
-              </a:spcBef>
-              <a:spcAft>
-                <a:spcPts val="0"/>
-              </a:spcAft>
-              <a:buSzPts val="1400"/>
-              <a:buNone/>
-              <a:defRPr/>
-            </a:lvl4pPr>
-            <a:lvl5pPr lvl="4">
-              <a:spcBef>
-                <a:spcPts val="0"/>
-              </a:spcBef>
-              <a:spcAft>
-                <a:spcPts val="0"/>
-              </a:spcAft>
-              <a:buSzPts val="1400"/>
-              <a:buNone/>
-              <a:defRPr/>
-            </a:lvl5pPr>
-            <a:lvl6pPr lvl="5">
-              <a:spcBef>
-                <a:spcPts val="0"/>
-              </a:spcBef>
-              <a:spcAft>
-                <a:spcPts val="0"/>
-              </a:spcAft>
-              <a:buSzPts val="1400"/>
-              <a:buNone/>
-              <a:defRPr/>
-            </a:lvl6pPr>
-            <a:lvl7pPr lvl="6">
-              <a:spcBef>
-                <a:spcPts val="0"/>
-              </a:spcBef>
-              <a:spcAft>
-                <a:spcPts val="0"/>
-              </a:spcAft>
-              <a:buSzPts val="1400"/>
-              <a:buNone/>
-              <a:defRPr/>
-            </a:lvl7pPr>
-            <a:lvl8pPr lvl="7">
-              <a:spcBef>
-                <a:spcPts val="0"/>
-              </a:spcBef>
-              <a:spcAft>
-                <a:spcPts val="0"/>
-              </a:spcAft>
-              <a:buSzPts val="1400"/>
-              <a:buNone/>
-              <a:defRPr/>
-            </a:lvl8pPr>
-            <a:lvl9pPr lvl="8">
-              <a:spcBef>
-                <a:spcPts val="0"/>
-              </a:spcBef>
-              <a:spcAft>
-                <a:spcPts val="0"/>
-              </a:spcAft>
-              <a:buSzPts val="1400"/>
-              <a:buNone/>
-              <a:defRPr/>
-            </a:lvl9pPr>
-          </a:lstStyle>
-          <a:p/>
-        </p:txBody>
-      </p:sp>
-      <p:pic>
-        <p:nvPicPr>
-          <p:cNvPr id="351" name="Google Shape;351;p15"/>
-          <p:cNvPicPr preferRelativeResize="0"/>
-          <p:nvPr/>
-        </p:nvPicPr>
-        <p:blipFill rotWithShape="1">
-          <a:blip r:embed="rId3">
-            <a:alphaModFix/>
-          </a:blip>
-          <a:srcRect b="0" l="0" r="0" t="0"/>
-          <a:stretch/>
-        </p:blipFill>
-        <p:spPr>
-          <a:xfrm>
-            <a:off x="398723" y="5895936"/>
-            <a:ext cx="3536690" cy="557252"/>
-          </a:xfrm>
-          <a:prstGeom prst="rect">
-            <a:avLst/>
-          </a:prstGeom>
-          <a:noFill/>
-          <a:ln>
-            <a:noFill/>
-          </a:ln>
-        </p:spPr>
-      </p:pic>
-      <p:pic>
-        <p:nvPicPr>
-          <p:cNvPr descr=" " id="352" name="Google Shape;352;p15"/>
-          <p:cNvPicPr preferRelativeResize="0"/>
-          <p:nvPr/>
-        </p:nvPicPr>
-        <p:blipFill rotWithShape="1">
-          <a:blip r:embed="rId4">
-            <a:alphaModFix/>
-          </a:blip>
-          <a:srcRect b="0" l="0" r="0" t="0"/>
-          <a:stretch/>
-        </p:blipFill>
-        <p:spPr>
-          <a:xfrm>
-            <a:off x="10858522" y="6160788"/>
-            <a:ext cx="934755" cy="292400"/>
-          </a:xfrm>
-          <a:prstGeom prst="rect">
-            <a:avLst/>
-          </a:prstGeom>
-          <a:noFill/>
-          <a:ln>
-            <a:noFill/>
-          </a:ln>
-        </p:spPr>
-      </p:pic>
-    </p:spTree>
-  </p:cSld>
-  <p:clrMapOvr>
-    <a:masterClrMapping/>
-  </p:clrMapOvr>
-</p:sldLayout>
-</file>
-
 <file path=ppt/slideLayouts/slideLayout6.xml><?xml version="1.0" encoding="utf-8"?>
 <p:sldLayout xmlns:a="http://schemas.openxmlformats.org/drawingml/2006/main" xmlns:r="http://schemas.openxmlformats.org/officeDocument/2006/relationships" xmlns:mc="http://schemas.openxmlformats.org/markup-compatibility/2006" xmlns:mv="urn:schemas-microsoft-com:mac:vml" xmlns:p="http://schemas.openxmlformats.org/presentationml/2006/main" xmlns:c="http://schemas.openxmlformats.org/drawingml/2006/chart" xmlns:dgm="http://schemas.openxmlformats.org/drawingml/2006/diagram" xmlns:o="urn:schemas-microsoft-com:office:office" xmlns:v="urn:schemas-microsoft-com:vml" xmlns:pvml="urn:schemas-microsoft-com:office:powerpoint" xmlns:com="http://schemas.openxmlformats.org/drawingml/2006/compatibility" xmlns:p14="http://schemas.microsoft.com/office/powerpoint/2010/main" xmlns:p15="http://schemas.microsoft.com/office/powerpoint/2012/main" xmlns:ahyp="http://schemas.microsoft.com/office/drawing/2018/hyperlinkcolor" matchingName="13_Титульный слайд">
   <p:cSld name="13_Титульный слайд">
@@ -6570,7 +5942,6 @@
   <p:sldLayoutIdLst>
     <p:sldLayoutId id="2147483653" r:id="rId7"/>
     <p:sldLayoutId id="2147483655" r:id="rId9"/>
-    <p:sldLayoutId id="2147483661" r:id="rId15"/>
   </p:sldLayoutIdLst>
   <p:hf dt="0" ftr="0" hdr="0" sldNum="0"/>
   <p:txStyles>
@@ -7345,7 +6716,7 @@
         <p:spPr>
           <a:xfrm>
             <a:off x="429280" y="424715"/>
-            <a:ext cx="7827264" cy="1183640"/>
+            <a:ext cx="7827264" cy="1067996"/>
           </a:xfrm>
           <a:prstGeom prst="rect">
             <a:avLst/>
@@ -7362,7 +6733,7 @@
               <a:spcAft>
                 <a:spcPts val="300"/>
               </a:spcAft>
-              <a:defRPr sz="3200">
+              <a:defRPr sz="2800">
                 <a:solidFill>
                   <a:srgbClr val="FFFFFF"/>
                 </a:solidFill>
@@ -7372,7 +6743,7 @@
               </a:defRPr>
             </a:pPr>
             <a:r>
-              <a:rPr sz="3200">
+              <a:rPr sz="2800">
                 <a:solidFill>
                   <a:srgbClr val="FFFFFF"/>
                 </a:solidFill>
@@ -7380,7 +6751,7 @@
                 <a:ea typeface="Play"/>
                 <a:cs typeface="Play"/>
               </a:rPr>
-              <a:t>Автоматическая вёрстка презентаций: ускоряем работу команды</a:t>
+              <a:t>Защита инициативы: сервис автоматической вёрстки презентаций</a:t>
             </a:r>
           </a:p>
         </p:txBody>
@@ -7394,6 +6765,244 @@
 </file>
 
 <file path=ppt/slides/slide31.xml><?xml version="1.0" encoding="utf-8"?>
+<p:sld xmlns:a="http://schemas.openxmlformats.org/drawingml/2006/main" xmlns:p="http://schemas.openxmlformats.org/presentationml/2006/main" xmlns:r="http://schemas.openxmlformats.org/officeDocument/2006/relationships">
+  <p:cSld>
+    <p:spTree>
+      <p:nvGrpSpPr>
+        <p:cNvPr id="1" name=""/>
+        <p:cNvGrpSpPr/>
+        <p:nvPr/>
+      </p:nvGrpSpPr>
+      <p:grpSpPr/>
+      <p:sp>
+        <p:nvSpPr>
+          <p:cNvPr id="2" name="title"/>
+          <p:cNvSpPr txBox="1"/>
+          <p:nvPr/>
+        </p:nvSpPr>
+        <p:spPr>
+          <a:xfrm>
+            <a:off x="429280" y="424715"/>
+            <a:ext cx="7827264" cy="822960"/>
+          </a:xfrm>
+          <a:prstGeom prst="rect">
+            <a:avLst/>
+          </a:prstGeom>
+          <a:noFill/>
+        </p:spPr>
+        <p:txBody>
+          <a:bodyPr wrap="square" lIns="76200" rIns="76200" tIns="50800" bIns="50800">
+            <a:spAutoFit/>
+          </a:bodyPr>
+          <a:lstStyle/>
+          <a:p>
+            <a:pPr algn="l">
+              <a:spcAft>
+                <a:spcPts val="300"/>
+              </a:spcAft>
+              <a:defRPr sz="3200">
+                <a:solidFill>
+                  <a:srgbClr val="FFFFFF"/>
+                </a:solidFill>
+                <a:latin typeface="Play"/>
+                <a:ea typeface="Play"/>
+                <a:cs typeface="Play"/>
+              </a:defRPr>
+            </a:pPr>
+            <a:r>
+              <a:rPr sz="3200">
+                <a:solidFill>
+                  <a:srgbClr val="FFFFFF"/>
+                </a:solidFill>
+                <a:latin typeface="Play"/>
+                <a:ea typeface="Play"/>
+                <a:cs typeface="Play"/>
+              </a:rPr>
+              <a:t>Контекст и возможность</a:t>
+            </a:r>
+          </a:p>
+        </p:txBody>
+      </p:sp>
+      <p:sp>
+        <p:nvSpPr>
+          <p:cNvPr id="3" name="body"/>
+          <p:cNvSpPr txBox="1"/>
+          <p:nvPr/>
+        </p:nvSpPr>
+        <p:spPr>
+          <a:xfrm>
+            <a:off x="429280" y="1592290"/>
+            <a:ext cx="5472562" cy="4181322"/>
+          </a:xfrm>
+          <a:prstGeom prst="rect">
+            <a:avLst/>
+          </a:prstGeom>
+          <a:noFill/>
+        </p:spPr>
+        <p:txBody>
+          <a:bodyPr wrap="square" lIns="76200" rIns="76200" tIns="50800" bIns="50800">
+            <a:spAutoFit/>
+          </a:bodyPr>
+          <a:lstStyle/>
+          <a:p>
+            <a:pPr algn="l">
+              <a:spcAft>
+                <a:spcPts val="300"/>
+              </a:spcAft>
+              <a:defRPr sz="1600">
+                <a:solidFill>
+                  <a:srgbClr val="FFFFFF"/>
+                </a:solidFill>
+                <a:latin typeface="Play"/>
+                <a:ea typeface="Play"/>
+                <a:cs typeface="Play"/>
+              </a:defRPr>
+            </a:pPr>
+            <a:r>
+              <a:rPr sz="1600">
+                <a:solidFill>
+                  <a:srgbClr val="FFFFFF"/>
+                </a:solidFill>
+                <a:latin typeface="Play"/>
+                <a:ea typeface="Play"/>
+                <a:cs typeface="Play"/>
+              </a:rPr>
+              <a:t>• 12‑слайдная колода занимает 186 мин</a:t>
+            </a:r>
+          </a:p>
+          <a:p>
+            <a:pPr algn="l">
+              <a:spcAft>
+                <a:spcPts val="300"/>
+              </a:spcAft>
+              <a:defRPr sz="1600">
+                <a:solidFill>
+                  <a:srgbClr val="FFFFFF"/>
+                </a:solidFill>
+                <a:latin typeface="Play"/>
+                <a:ea typeface="Play"/>
+                <a:cs typeface="Play"/>
+              </a:defRPr>
+            </a:pPr>
+            <a:r>
+              <a:rPr sz="1600">
+                <a:solidFill>
+                  <a:srgbClr val="FFFFFF"/>
+                </a:solidFill>
+                <a:latin typeface="Play"/>
+                <a:ea typeface="Play"/>
+                <a:cs typeface="Play"/>
+              </a:rPr>
+              <a:t>• 74 мин на правки после ревью</a:t>
+            </a:r>
+          </a:p>
+          <a:p>
+            <a:pPr algn="l">
+              <a:spcAft>
+                <a:spcPts val="300"/>
+              </a:spcAft>
+              <a:defRPr sz="1600">
+                <a:solidFill>
+                  <a:srgbClr val="FFFFFF"/>
+                </a:solidFill>
+                <a:latin typeface="Play"/>
+                <a:ea typeface="Play"/>
+                <a:cs typeface="Play"/>
+              </a:defRPr>
+            </a:pPr>
+            <a:r>
+              <a:rPr sz="1600">
+                <a:solidFill>
+                  <a:srgbClr val="FFFFFF"/>
+                </a:solidFill>
+                <a:latin typeface="Play"/>
+                <a:ea typeface="Play"/>
+                <a:cs typeface="Play"/>
+              </a:rPr>
+              <a:t>• 19 из 42 колод нарушают фирменный стиль</a:t>
+            </a:r>
+          </a:p>
+          <a:p>
+            <a:pPr algn="l">
+              <a:spcAft>
+                <a:spcPts val="300"/>
+              </a:spcAft>
+              <a:defRPr sz="1600">
+                <a:solidFill>
+                  <a:srgbClr val="FFFFFF"/>
+                </a:solidFill>
+                <a:latin typeface="Play"/>
+                <a:ea typeface="Play"/>
+                <a:cs typeface="Play"/>
+              </a:defRPr>
+            </a:pPr>
+            <a:r>
+              <a:rPr sz="1600">
+                <a:solidFill>
+                  <a:srgbClr val="FFFFFF"/>
+                </a:solidFill>
+                <a:latin typeface="Play"/>
+                <a:ea typeface="Play"/>
+                <a:cs typeface="Play"/>
+              </a:rPr>
+              <a:t>• 4 чел. закрывают 11 запросов/нед</a:t>
+            </a:r>
+          </a:p>
+          <a:p>
+            <a:pPr algn="l">
+              <a:spcAft>
+                <a:spcPts val="300"/>
+              </a:spcAft>
+              <a:defRPr sz="1600">
+                <a:solidFill>
+                  <a:srgbClr val="FFFFFF"/>
+                </a:solidFill>
+                <a:latin typeface="Play"/>
+                <a:ea typeface="Play"/>
+                <a:cs typeface="Play"/>
+              </a:defRPr>
+            </a:pPr>
+            <a:r>
+              <a:rPr sz="1600">
+                <a:solidFill>
+                  <a:srgbClr val="FFFFFF"/>
+                </a:solidFill>
+                <a:latin typeface="Play"/>
+                <a:ea typeface="Play"/>
+                <a:cs typeface="Play"/>
+              </a:rPr>
+              <a:t>• Средний срок ожидания 6 рабочих дней</a:t>
+            </a:r>
+          </a:p>
+        </p:txBody>
+      </p:sp>
+      <p:graphicFrame>
+        <p:nvGraphicFramePr>
+          <p:cNvPr id="4" name="Chart 3"/>
+          <p:cNvGraphicFramePr>
+            <a:graphicFrameLocks noGrp="1"/>
+          </p:cNvGraphicFramePr>
+          <p:nvPr/>
+        </p:nvGraphicFramePr>
+        <p:xfrm>
+          <a:off x="6267602" y="1592290"/>
+          <a:ext cx="5472562" cy="4181322"/>
+        </p:xfrm>
+        <a:graphic>
+          <a:graphicData uri="http://schemas.openxmlformats.org/drawingml/2006/chart">
+            <c:chart xmlns:c="http://schemas.openxmlformats.org/drawingml/2006/chart" r:id="rId2"/>
+          </a:graphicData>
+        </a:graphic>
+      </p:graphicFrame>
+    </p:spTree>
+  </p:cSld>
+  <p:clrMapOvr>
+    <a:masterClrMapping/>
+  </p:clrMapOvr>
+</p:sld>
+</file>
+
+<file path=ppt/slides/slide32.xml><?xml version="1.0" encoding="utf-8"?>
 <p:sld xmlns:a="http://schemas.openxmlformats.org/drawingml/2006/main" xmlns:p="http://schemas.openxmlformats.org/presentationml/2006/main" xmlns:r="http://schemas.openxmlformats.org/officeDocument/2006/relationships">
   <p:cSld>
     <p:spTree>
@@ -7476,453 +7085,7 @@
         <p:spPr>
           <a:xfrm>
             <a:off x="300817" y="297715"/>
-            <a:ext cx="11566347" cy="4022686"/>
-          </a:xfrm>
-          <a:prstGeom prst="roundRect">
-            <a:avLst/>
-          </a:prstGeom>
-          <a:solidFill>
-            <a:srgbClr val="111111">
-              <a:alpha val="85000"/>
-            </a:srgbClr>
-          </a:solidFill>
-          <a:ln>
-            <a:noFill/>
-          </a:ln>
-          <a:effectLst/>
-        </p:spPr>
-        <p:style>
-          <a:lnRef idx="1">
-            <a:schemeClr val="accent1"/>
-          </a:lnRef>
-          <a:fillRef idx="3">
-            <a:schemeClr val="accent1"/>
-          </a:fillRef>
-          <a:effectRef idx="2">
-            <a:schemeClr val="accent1"/>
-          </a:effectRef>
-          <a:fontRef idx="minor">
-            <a:schemeClr val="lt1"/>
-          </a:fontRef>
-        </p:style>
-        <p:txBody>
-          <a:bodyPr rtlCol="0" anchor="ctr"/>
-          <a:lstStyle/>
-          <a:p>
-            <a:pPr algn="ctr"/>
-          </a:p>
-        </p:txBody>
-      </p:sp>
-      <p:sp>
-        <p:nvSpPr>
-          <p:cNvPr id="681" name="title"/>
-          <p:cNvSpPr txBox="1"/>
-          <p:nvPr/>
-        </p:nvSpPr>
-        <p:spPr>
-          <a:xfrm>
-            <a:off x="427817" y="424715"/>
-            <a:ext cx="7827264" cy="1183640"/>
-          </a:xfrm>
-          <a:prstGeom prst="rect">
-            <a:avLst/>
-          </a:prstGeom>
-          <a:noFill/>
-        </p:spPr>
-        <p:txBody>
-          <a:bodyPr wrap="square" lIns="76200" rIns="76200" tIns="50800" bIns="50800">
-            <a:spAutoFit/>
-          </a:bodyPr>
-          <a:lstStyle/>
-          <a:p>
-            <a:pPr algn="l">
-              <a:spcAft>
-                <a:spcPts val="300"/>
-              </a:spcAft>
-              <a:defRPr sz="3200">
-                <a:solidFill>
-                  <a:srgbClr val="FFFFFF"/>
-                </a:solidFill>
-                <a:latin typeface="Play"/>
-                <a:ea typeface="Play"/>
-                <a:cs typeface="Play"/>
-              </a:defRPr>
-            </a:pPr>
-            <a:r>
-              <a:rPr sz="3200">
-                <a:solidFill>
-                  <a:srgbClr val="FFFFFF"/>
-                </a:solidFill>
-                <a:latin typeface="Play"/>
-                <a:ea typeface="Play"/>
-                <a:cs typeface="Play"/>
-              </a:rPr>
-              <a:t>Текущие затраты времени на создание колод</a:t>
-            </a:r>
-          </a:p>
-        </p:txBody>
-      </p:sp>
-      <p:sp>
-        <p:nvSpPr>
-          <p:cNvPr id="682" name="body"/>
-          <p:cNvSpPr txBox="1"/>
-          <p:nvPr/>
-        </p:nvSpPr>
-        <p:spPr>
-          <a:xfrm>
-            <a:off x="427817" y="2704961"/>
-            <a:ext cx="11312347" cy="1488440"/>
-          </a:xfrm>
-          <a:prstGeom prst="rect">
-            <a:avLst/>
-          </a:prstGeom>
-          <a:noFill/>
-        </p:spPr>
-        <p:txBody>
-          <a:bodyPr wrap="square" lIns="76200" rIns="76200" tIns="50800" bIns="50800">
-            <a:spAutoFit/>
-          </a:bodyPr>
-          <a:lstStyle/>
-          <a:p>
-            <a:pPr algn="l">
-              <a:spcAft>
-                <a:spcPts val="300"/>
-              </a:spcAft>
-              <a:defRPr sz="2800">
-                <a:solidFill>
-                  <a:srgbClr val="FFFFFF"/>
-                </a:solidFill>
-                <a:latin typeface="Play"/>
-                <a:ea typeface="Play"/>
-                <a:cs typeface="Play"/>
-              </a:defRPr>
-            </a:pPr>
-            <a:r>
-              <a:rPr sz="2800">
-                <a:solidFill>
-                  <a:srgbClr val="FFFFFF"/>
-                </a:solidFill>
-                <a:latin typeface="Play"/>
-                <a:ea typeface="Play"/>
-                <a:cs typeface="Play"/>
-              </a:rPr>
-              <a:t>• 42 колоды за Q1 2026: 186 минут на 12 слайдов</a:t>
-            </a:r>
-          </a:p>
-          <a:p>
-            <a:pPr algn="l">
-              <a:spcAft>
-                <a:spcPts val="300"/>
-              </a:spcAft>
-              <a:defRPr sz="2800">
-                <a:solidFill>
-                  <a:srgbClr val="FFFFFF"/>
-                </a:solidFill>
-                <a:latin typeface="Play"/>
-                <a:ea typeface="Play"/>
-                <a:cs typeface="Play"/>
-              </a:defRPr>
-            </a:pPr>
-            <a:r>
-              <a:rPr sz="2800">
-                <a:solidFill>
-                  <a:srgbClr val="FFFFFF"/>
-                </a:solidFill>
-                <a:latin typeface="Play"/>
-                <a:ea typeface="Play"/>
-                <a:cs typeface="Play"/>
-              </a:rPr>
-              <a:t>• 74 минуты на правки после ревью</a:t>
-            </a:r>
-          </a:p>
-          <a:p>
-            <a:pPr algn="l">
-              <a:spcAft>
-                <a:spcPts val="300"/>
-              </a:spcAft>
-              <a:defRPr sz="2800">
-                <a:solidFill>
-                  <a:srgbClr val="FFFFFF"/>
-                </a:solidFill>
-                <a:latin typeface="Play"/>
-                <a:ea typeface="Play"/>
-                <a:cs typeface="Play"/>
-              </a:defRPr>
-            </a:pPr>
-            <a:r>
-              <a:rPr sz="2800">
-                <a:solidFill>
-                  <a:srgbClr val="FFFFFF"/>
-                </a:solidFill>
-                <a:latin typeface="Play"/>
-                <a:ea typeface="Play"/>
-                <a:cs typeface="Play"/>
-              </a:rPr>
-              <a:t>• 19 колод нарушили фирменный стиль</a:t>
-            </a:r>
-          </a:p>
-        </p:txBody>
-      </p:sp>
-    </p:spTree>
-  </p:cSld>
-  <p:clrMapOvr>
-    <a:masterClrMapping/>
-  </p:clrMapOvr>
-</p:sld>
-</file>
-
-<file path=ppt/slides/slide32.xml><?xml version="1.0" encoding="utf-8"?>
-<p:sld xmlns:a="http://schemas.openxmlformats.org/drawingml/2006/main" xmlns:p="http://schemas.openxmlformats.org/presentationml/2006/main" xmlns:r="http://schemas.openxmlformats.org/officeDocument/2006/relationships">
-  <p:cSld>
-    <p:spTree>
-      <p:nvGrpSpPr>
-        <p:cNvPr id="1" name=""/>
-        <p:cNvGrpSpPr/>
-        <p:nvPr/>
-      </p:nvGrpSpPr>
-      <p:grpSpPr/>
-      <p:sp>
-        <p:nvSpPr>
-          <p:cNvPr id="2" name="title"/>
-          <p:cNvSpPr txBox="1"/>
-          <p:nvPr/>
-        </p:nvSpPr>
-        <p:spPr>
-          <a:xfrm>
-            <a:off x="429280" y="424715"/>
-            <a:ext cx="7827264" cy="822960"/>
-          </a:xfrm>
-          <a:prstGeom prst="rect">
-            <a:avLst/>
-          </a:prstGeom>
-          <a:noFill/>
-        </p:spPr>
-        <p:txBody>
-          <a:bodyPr wrap="square" lIns="76200" rIns="76200" tIns="50800" bIns="50800">
-            <a:spAutoFit/>
-          </a:bodyPr>
-          <a:lstStyle/>
-          <a:p>
-            <a:pPr algn="l">
-              <a:spcAft>
-                <a:spcPts val="300"/>
-              </a:spcAft>
-              <a:defRPr sz="3200">
-                <a:solidFill>
-                  <a:srgbClr val="FFFFFF"/>
-                </a:solidFill>
-                <a:latin typeface="Play"/>
-                <a:ea typeface="Play"/>
-                <a:cs typeface="Play"/>
-              </a:defRPr>
-            </a:pPr>
-            <a:r>
-              <a:rPr sz="3200">
-                <a:solidFill>
-                  <a:srgbClr val="FFFFFF"/>
-                </a:solidFill>
-                <a:latin typeface="Play"/>
-                <a:ea typeface="Play"/>
-                <a:cs typeface="Play"/>
-              </a:rPr>
-              <a:t>Проблемы дизайна и ожидания</a:t>
-            </a:r>
-          </a:p>
-        </p:txBody>
-      </p:sp>
-      <p:sp>
-        <p:nvSpPr>
-          <p:cNvPr id="3" name="body"/>
-          <p:cNvSpPr txBox="1"/>
-          <p:nvPr/>
-        </p:nvSpPr>
-        <p:spPr>
-          <a:xfrm>
-            <a:off x="429280" y="2335824"/>
-            <a:ext cx="11310884" cy="1950720"/>
-          </a:xfrm>
-          <a:prstGeom prst="rect">
-            <a:avLst/>
-          </a:prstGeom>
-          <a:noFill/>
-        </p:spPr>
-        <p:txBody>
-          <a:bodyPr wrap="square" lIns="76200" rIns="76200" tIns="50800" bIns="50800">
-            <a:spAutoFit/>
-          </a:bodyPr>
-          <a:lstStyle/>
-          <a:p>
-            <a:pPr algn="l">
-              <a:spcAft>
-                <a:spcPts val="300"/>
-              </a:spcAft>
-              <a:defRPr sz="2800">
-                <a:solidFill>
-                  <a:srgbClr val="FFFFFF"/>
-                </a:solidFill>
-                <a:latin typeface="Play"/>
-                <a:ea typeface="Play"/>
-                <a:cs typeface="Play"/>
-              </a:defRPr>
-            </a:pPr>
-            <a:r>
-              <a:rPr sz="2800">
-                <a:solidFill>
-                  <a:srgbClr val="FFFFFF"/>
-                </a:solidFill>
-                <a:latin typeface="Play"/>
-                <a:ea typeface="Play"/>
-                <a:cs typeface="Play"/>
-              </a:rPr>
-              <a:t>• Дизайн-отдел из 4 человек закрывает 11 запросов/неделю из 27</a:t>
-            </a:r>
-          </a:p>
-          <a:p>
-            <a:pPr algn="l">
-              <a:spcAft>
-                <a:spcPts val="300"/>
-              </a:spcAft>
-              <a:defRPr sz="2800">
-                <a:solidFill>
-                  <a:srgbClr val="FFFFFF"/>
-                </a:solidFill>
-                <a:latin typeface="Play"/>
-                <a:ea typeface="Play"/>
-                <a:cs typeface="Play"/>
-              </a:defRPr>
-            </a:pPr>
-            <a:r>
-              <a:rPr sz="2800">
-                <a:solidFill>
-                  <a:srgbClr val="FFFFFF"/>
-                </a:solidFill>
-                <a:latin typeface="Play"/>
-                <a:ea typeface="Play"/>
-                <a:cs typeface="Play"/>
-              </a:rPr>
-              <a:t>• Средний срок ожидания 6 рабочих дней</a:t>
-            </a:r>
-          </a:p>
-          <a:p>
-            <a:pPr algn="l">
-              <a:spcAft>
-                <a:spcPts val="300"/>
-              </a:spcAft>
-              <a:defRPr sz="2800">
-                <a:solidFill>
-                  <a:srgbClr val="FFFFFF"/>
-                </a:solidFill>
-                <a:latin typeface="Play"/>
-                <a:ea typeface="Play"/>
-                <a:cs typeface="Play"/>
-              </a:defRPr>
-            </a:pPr>
-            <a:r>
-              <a:rPr sz="2800">
-                <a:solidFill>
-                  <a:srgbClr val="FFFFFF"/>
-                </a:solidFill>
-                <a:latin typeface="Play"/>
-                <a:ea typeface="Play"/>
-                <a:cs typeface="Play"/>
-              </a:rPr>
-              <a:t>• 19 колод с нарушением стиля</a:t>
-            </a:r>
-          </a:p>
-        </p:txBody>
-      </p:sp>
-    </p:spTree>
-  </p:cSld>
-  <p:clrMapOvr>
-    <a:masterClrMapping/>
-  </p:clrMapOvr>
-</p:sld>
-</file>
-
-<file path=ppt/slides/slide33.xml><?xml version="1.0" encoding="utf-8"?>
-<p:sld xmlns:a="http://schemas.openxmlformats.org/drawingml/2006/main" xmlns:p="http://schemas.openxmlformats.org/presentationml/2006/main" xmlns:r="http://schemas.openxmlformats.org/officeDocument/2006/relationships">
-  <p:cSld>
-    <p:spTree>
-      <p:nvGrpSpPr>
-        <p:cNvPr id="1" name=""/>
-        <p:cNvGrpSpPr/>
-        <p:nvPr/>
-      </p:nvGrpSpPr>
-      <p:grpSpPr/>
-      <p:sp>
-        <p:nvSpPr>
-          <p:cNvPr id="679" name="Google Shape;679;p31"/>
-          <p:cNvSpPr/>
-          <p:nvPr/>
-        </p:nvSpPr>
-        <p:spPr>
-          <a:xfrm>
-            <a:off x="0" y="4748271"/>
-            <a:ext cx="12192000" cy="2109730"/>
-          </a:xfrm>
-          <a:prstGeom prst="rect">
-            <a:avLst/>
-          </a:prstGeom>
-          <a:gradFill>
-            <a:gsLst>
-              <a:gs pos="0">
-                <a:srgbClr val="0077FF">
-                  <a:alpha val="61961"/>
-                </a:srgbClr>
-              </a:gs>
-              <a:gs pos="99000">
-                <a:srgbClr val="00AEE8"/>
-              </a:gs>
-              <a:gs pos="100000">
-                <a:srgbClr val="00AEE8"/>
-              </a:gs>
-            </a:gsLst>
-            <a:lin ang="14400000" scaled="0"/>
-          </a:gradFill>
-          <a:ln>
-            <a:noFill/>
-          </a:ln>
-        </p:spPr>
-        <p:txBody>
-          <a:bodyPr anchorCtr="0" anchor="ctr" bIns="0" lIns="108000" spcFirstLastPara="1" rIns="91425" wrap="square" tIns="0">
-            <a:noAutofit/>
-          </a:bodyPr>
-          <a:lstStyle/>
-          <a:p>
-            <a:pPr indent="0" lvl="0" marL="0" marR="0" rtl="0" algn="l">
-              <a:spcBef>
-                <a:spcPts val="0"/>
-              </a:spcBef>
-              <a:spcAft>
-                <a:spcPts val="0"/>
-              </a:spcAft>
-              <a:buNone/>
-            </a:pPr>
-            <a:r>
-              <a:t/>
-            </a:r>
-            <a:endParaRPr sz="1100">
-              <a:solidFill>
-                <a:schemeClr val="lt1"/>
-              </a:solidFill>
-              <a:latin typeface="Play"/>
-              <a:ea typeface="Play"/>
-              <a:cs typeface="Play"/>
-              <a:sym typeface="Play"/>
-            </a:endParaRPr>
-          </a:p>
-        </p:txBody>
-      </p:sp>
-      <p:sp>
-        <p:nvSpPr>
-          <p:cNvPr id="680" name="Rounded Rectangle 679"/>
-          <p:cNvSpPr/>
-          <p:nvPr/>
-        </p:nvSpPr>
-        <p:spPr>
-          <a:xfrm>
-            <a:off x="300817" y="297715"/>
-            <a:ext cx="11566347" cy="4022686"/>
+            <a:ext cx="11566347" cy="5758505"/>
           </a:xfrm>
           <a:prstGeom prst="roundRect">
             <a:avLst/>
@@ -8003,7 +7166,7 @@
                 <a:ea typeface="Play"/>
                 <a:cs typeface="Play"/>
               </a:rPr>
-              <a:t>Сервис автоматической вёрстки</a:t>
+              <a:t>Предложение</a:t>
             </a:r>
           </a:p>
         </p:txBody>
@@ -8016,8 +7179,8 @@
         </p:nvSpPr>
         <p:spPr>
           <a:xfrm>
-            <a:off x="427817" y="2704961"/>
-            <a:ext cx="11312347" cy="1488440"/>
+            <a:off x="427817" y="1837052"/>
+            <a:ext cx="5473293" cy="4092168"/>
           </a:xfrm>
           <a:prstGeom prst="rect">
             <a:avLst/>
@@ -8034,7 +7197,7 @@
               <a:spcAft>
                 <a:spcPts val="300"/>
               </a:spcAft>
-              <a:defRPr sz="2800">
+              <a:defRPr sz="1800">
                 <a:solidFill>
                   <a:srgbClr val="FFFFFF"/>
                 </a:solidFill>
@@ -8044,7 +7207,7 @@
               </a:defRPr>
             </a:pPr>
             <a:r>
-              <a:rPr sz="2800">
+              <a:rPr sz="1800">
                 <a:solidFill>
                   <a:srgbClr val="FFFFFF"/>
                 </a:solidFill>
@@ -8052,7 +7215,7 @@
                 <a:ea typeface="Play"/>
                 <a:cs typeface="Play"/>
               </a:rPr>
-              <a:t>• Принимает шаблон pptx и материалы</a:t>
+              <a:t>• Сервис принимает pptx, документы, таблицы, заметки</a:t>
             </a:r>
           </a:p>
           <a:p>
@@ -8060,7 +7223,7 @@
               <a:spcAft>
                 <a:spcPts val="300"/>
               </a:spcAft>
-              <a:defRPr sz="2800">
+              <a:defRPr sz="1800">
                 <a:solidFill>
                   <a:srgbClr val="FFFFFF"/>
                 </a:solidFill>
@@ -8070,7 +7233,7 @@
               </a:defRPr>
             </a:pPr>
             <a:r>
-              <a:rPr sz="2800">
+              <a:rPr sz="1800">
                 <a:solidFill>
                   <a:srgbClr val="FFFFFF"/>
                 </a:solidFill>
@@ -8078,7 +7241,7 @@
                 <a:ea typeface="Play"/>
                 <a:cs typeface="Play"/>
               </a:rPr>
-              <a:t>• Автоматически формирует план колоды и вёрстку</a:t>
+              <a:t>• Автоматически строит дизайн‑систему и план колоды</a:t>
             </a:r>
           </a:p>
           <a:p>
@@ -8086,7 +7249,7 @@
               <a:spcAft>
                 <a:spcPts val="300"/>
               </a:spcAft>
-              <a:defRPr sz="2800">
+              <a:defRPr sz="1800">
                 <a:solidFill>
                   <a:srgbClr val="FFFFFF"/>
                 </a:solidFill>
@@ -8096,7 +7259,7 @@
               </a:defRPr>
             </a:pPr>
             <a:r>
-              <a:rPr sz="2800">
+              <a:rPr sz="1800">
                 <a:solidFill>
                   <a:srgbClr val="FFFFFF"/>
                 </a:solidFill>
@@ -8104,7 +7267,411 @@
                 <a:ea typeface="Play"/>
                 <a:cs typeface="Play"/>
               </a:rPr>
-              <a:t>• Экспорт в pptx, pdf, html</a:t>
+              <a:t>• Экспорт в pptx, pdf, html с редактируемыми слайдами</a:t>
+            </a:r>
+          </a:p>
+          <a:p>
+            <a:pPr algn="l">
+              <a:spcAft>
+                <a:spcPts val="300"/>
+              </a:spcAft>
+              <a:defRPr sz="1800">
+                <a:solidFill>
+                  <a:srgbClr val="FFFFFF"/>
+                </a:solidFill>
+                <a:latin typeface="Play"/>
+                <a:ea typeface="Play"/>
+                <a:cs typeface="Play"/>
+              </a:defRPr>
+            </a:pPr>
+            <a:r>
+              <a:rPr sz="1800">
+                <a:solidFill>
+                  <a:srgbClr val="FFFFFF"/>
+                </a:solidFill>
+                <a:latin typeface="Play"/>
+                <a:ea typeface="Play"/>
+                <a:cs typeface="Play"/>
+              </a:rPr>
+              <a:t>• Аудит качества проверяет стиль и данные до выдачи</a:t>
+            </a:r>
+          </a:p>
+        </p:txBody>
+      </p:sp>
+      <p:sp>
+        <p:nvSpPr>
+          <p:cNvPr id="683" name="Pentagon 682"/>
+          <p:cNvSpPr/>
+          <p:nvPr/>
+        </p:nvSpPr>
+        <p:spPr>
+          <a:xfrm>
+            <a:off x="6266870" y="3617316"/>
+            <a:ext cx="857482" cy="531639"/>
+          </a:xfrm>
+          <a:prstGeom prst="homePlate">
+            <a:avLst/>
+          </a:prstGeom>
+          <a:solidFill>
+            <a:srgbClr val="0077FF"/>
+          </a:solidFill>
+          <a:ln>
+            <a:noFill/>
+          </a:ln>
+        </p:spPr>
+        <p:style>
+          <a:lnRef idx="1">
+            <a:schemeClr val="accent1"/>
+          </a:lnRef>
+          <a:fillRef idx="3">
+            <a:schemeClr val="accent1"/>
+          </a:fillRef>
+          <a:effectRef idx="2">
+            <a:schemeClr val="accent1"/>
+          </a:effectRef>
+          <a:fontRef idx="minor">
+            <a:schemeClr val="lt1"/>
+          </a:fontRef>
+        </p:style>
+        <p:txBody>
+          <a:bodyPr rtlCol="0" anchor="ctr" wrap="square" lIns="12700" rIns="12700" tIns="12700" bIns="12700"/>
+          <a:lstStyle/>
+          <a:p>
+            <a:pPr algn="ctr">
+              <a:defRPr sz="600" b="0">
+                <a:solidFill>
+                  <a:srgbClr val="FFFFFF"/>
+                </a:solidFill>
+                <a:latin typeface="Play"/>
+                <a:ea typeface="Play"/>
+                <a:cs typeface="Play"/>
+              </a:defRPr>
+            </a:pPr>
+            <a:r>
+              <a:rPr sz="600" b="0">
+                <a:solidFill>
+                  <a:srgbClr val="FFFFFF"/>
+                </a:solidFill>
+                <a:latin typeface="Play"/>
+                <a:ea typeface="Play"/>
+                <a:cs typeface="Play"/>
+              </a:rPr>
+              <a:t>Загрузка шаблона</a:t>
+            </a:r>
+          </a:p>
+        </p:txBody>
+      </p:sp>
+      <p:sp>
+        <p:nvSpPr>
+          <p:cNvPr id="684" name="Chevron 683"/>
+          <p:cNvSpPr/>
+          <p:nvPr/>
+        </p:nvSpPr>
+        <p:spPr>
+          <a:xfrm>
+            <a:off x="7190032" y="3617316"/>
+            <a:ext cx="857482" cy="531639"/>
+          </a:xfrm>
+          <a:prstGeom prst="chevron">
+            <a:avLst/>
+          </a:prstGeom>
+          <a:solidFill>
+            <a:srgbClr val="0077FF"/>
+          </a:solidFill>
+          <a:ln>
+            <a:noFill/>
+          </a:ln>
+        </p:spPr>
+        <p:style>
+          <a:lnRef idx="1">
+            <a:schemeClr val="accent1"/>
+          </a:lnRef>
+          <a:fillRef idx="3">
+            <a:schemeClr val="accent1"/>
+          </a:fillRef>
+          <a:effectRef idx="2">
+            <a:schemeClr val="accent1"/>
+          </a:effectRef>
+          <a:fontRef idx="minor">
+            <a:schemeClr val="lt1"/>
+          </a:fontRef>
+        </p:style>
+        <p:txBody>
+          <a:bodyPr rtlCol="0" anchor="ctr" wrap="square" lIns="12700" rIns="12700" tIns="12700" bIns="12700"/>
+          <a:lstStyle/>
+          <a:p>
+            <a:pPr algn="ctr">
+              <a:defRPr sz="600" b="0">
+                <a:solidFill>
+                  <a:srgbClr val="FFFFFF"/>
+                </a:solidFill>
+                <a:latin typeface="Play"/>
+                <a:ea typeface="Play"/>
+                <a:cs typeface="Play"/>
+              </a:defRPr>
+            </a:pPr>
+            <a:r>
+              <a:rPr sz="600" b="0">
+                <a:solidFill>
+                  <a:srgbClr val="FFFFFF"/>
+                </a:solidFill>
+                <a:latin typeface="Play"/>
+                <a:ea typeface="Play"/>
+                <a:cs typeface="Play"/>
+              </a:rPr>
+              <a:t>Разбор дизайн‑системы</a:t>
+            </a:r>
+          </a:p>
+        </p:txBody>
+      </p:sp>
+      <p:sp>
+        <p:nvSpPr>
+          <p:cNvPr id="685" name="Chevron 684"/>
+          <p:cNvSpPr/>
+          <p:nvPr/>
+        </p:nvSpPr>
+        <p:spPr>
+          <a:xfrm>
+            <a:off x="8113194" y="3617316"/>
+            <a:ext cx="857482" cy="531639"/>
+          </a:xfrm>
+          <a:prstGeom prst="chevron">
+            <a:avLst/>
+          </a:prstGeom>
+          <a:solidFill>
+            <a:srgbClr val="0077FF"/>
+          </a:solidFill>
+          <a:ln>
+            <a:noFill/>
+          </a:ln>
+        </p:spPr>
+        <p:style>
+          <a:lnRef idx="1">
+            <a:schemeClr val="accent1"/>
+          </a:lnRef>
+          <a:fillRef idx="3">
+            <a:schemeClr val="accent1"/>
+          </a:fillRef>
+          <a:effectRef idx="2">
+            <a:schemeClr val="accent1"/>
+          </a:effectRef>
+          <a:fontRef idx="minor">
+            <a:schemeClr val="lt1"/>
+          </a:fontRef>
+        </p:style>
+        <p:txBody>
+          <a:bodyPr rtlCol="0" anchor="ctr" wrap="square" lIns="12700" rIns="12700" tIns="12700" bIns="12700"/>
+          <a:lstStyle/>
+          <a:p>
+            <a:pPr algn="ctr">
+              <a:defRPr sz="600" b="0">
+                <a:solidFill>
+                  <a:srgbClr val="FFFFFF"/>
+                </a:solidFill>
+                <a:latin typeface="Play"/>
+                <a:ea typeface="Play"/>
+                <a:cs typeface="Play"/>
+              </a:defRPr>
+            </a:pPr>
+            <a:r>
+              <a:rPr sz="600" b="0">
+                <a:solidFill>
+                  <a:srgbClr val="FFFFFF"/>
+                </a:solidFill>
+                <a:latin typeface="Play"/>
+                <a:ea typeface="Play"/>
+                <a:cs typeface="Play"/>
+              </a:rPr>
+              <a:t>Построение плана колоды</a:t>
+            </a:r>
+          </a:p>
+        </p:txBody>
+      </p:sp>
+      <p:sp>
+        <p:nvSpPr>
+          <p:cNvPr id="686" name="Chevron 685"/>
+          <p:cNvSpPr/>
+          <p:nvPr/>
+        </p:nvSpPr>
+        <p:spPr>
+          <a:xfrm>
+            <a:off x="9036356" y="3617316"/>
+            <a:ext cx="857482" cy="531639"/>
+          </a:xfrm>
+          <a:prstGeom prst="chevron">
+            <a:avLst/>
+          </a:prstGeom>
+          <a:solidFill>
+            <a:srgbClr val="0077FF"/>
+          </a:solidFill>
+          <a:ln>
+            <a:noFill/>
+          </a:ln>
+        </p:spPr>
+        <p:style>
+          <a:lnRef idx="1">
+            <a:schemeClr val="accent1"/>
+          </a:lnRef>
+          <a:fillRef idx="3">
+            <a:schemeClr val="accent1"/>
+          </a:fillRef>
+          <a:effectRef idx="2">
+            <a:schemeClr val="accent1"/>
+          </a:effectRef>
+          <a:fontRef idx="minor">
+            <a:schemeClr val="lt1"/>
+          </a:fontRef>
+        </p:style>
+        <p:txBody>
+          <a:bodyPr rtlCol="0" anchor="ctr" wrap="square" lIns="12700" rIns="12700" tIns="12700" bIns="12700"/>
+          <a:lstStyle/>
+          <a:p>
+            <a:pPr algn="ctr">
+              <a:defRPr sz="600" b="0">
+                <a:solidFill>
+                  <a:srgbClr val="FFFFFF"/>
+                </a:solidFill>
+                <a:latin typeface="Play"/>
+                <a:ea typeface="Play"/>
+                <a:cs typeface="Play"/>
+              </a:defRPr>
+            </a:pPr>
+            <a:r>
+              <a:rPr sz="600" b="0">
+                <a:solidFill>
+                  <a:srgbClr val="FFFFFF"/>
+                </a:solidFill>
+                <a:latin typeface="Play"/>
+                <a:ea typeface="Play"/>
+                <a:cs typeface="Play"/>
+              </a:rPr>
+              <a:t>Авто‑верстка</a:t>
+            </a:r>
+          </a:p>
+        </p:txBody>
+      </p:sp>
+      <p:sp>
+        <p:nvSpPr>
+          <p:cNvPr id="687" name="Chevron 686"/>
+          <p:cNvSpPr/>
+          <p:nvPr/>
+        </p:nvSpPr>
+        <p:spPr>
+          <a:xfrm>
+            <a:off x="9959518" y="3617316"/>
+            <a:ext cx="857482" cy="531639"/>
+          </a:xfrm>
+          <a:prstGeom prst="chevron">
+            <a:avLst/>
+          </a:prstGeom>
+          <a:solidFill>
+            <a:srgbClr val="0077FF"/>
+          </a:solidFill>
+          <a:ln>
+            <a:noFill/>
+          </a:ln>
+        </p:spPr>
+        <p:style>
+          <a:lnRef idx="1">
+            <a:schemeClr val="accent1"/>
+          </a:lnRef>
+          <a:fillRef idx="3">
+            <a:schemeClr val="accent1"/>
+          </a:fillRef>
+          <a:effectRef idx="2">
+            <a:schemeClr val="accent1"/>
+          </a:effectRef>
+          <a:fontRef idx="minor">
+            <a:schemeClr val="lt1"/>
+          </a:fontRef>
+        </p:style>
+        <p:txBody>
+          <a:bodyPr rtlCol="0" anchor="ctr" wrap="square" lIns="12700" rIns="12700" tIns="12700" bIns="12700"/>
+          <a:lstStyle/>
+          <a:p>
+            <a:pPr algn="ctr">
+              <a:defRPr sz="600" b="0">
+                <a:solidFill>
+                  <a:srgbClr val="FFFFFF"/>
+                </a:solidFill>
+                <a:latin typeface="Play"/>
+                <a:ea typeface="Play"/>
+                <a:cs typeface="Play"/>
+              </a:defRPr>
+            </a:pPr>
+            <a:r>
+              <a:rPr sz="600" b="0">
+                <a:solidFill>
+                  <a:srgbClr val="FFFFFF"/>
+                </a:solidFill>
+                <a:latin typeface="Play"/>
+                <a:ea typeface="Play"/>
+                <a:cs typeface="Play"/>
+              </a:rPr>
+              <a:t>Аудит качества</a:t>
+            </a:r>
+          </a:p>
+        </p:txBody>
+      </p:sp>
+      <p:sp>
+        <p:nvSpPr>
+          <p:cNvPr id="688" name="Chevron 687"/>
+          <p:cNvSpPr/>
+          <p:nvPr/>
+        </p:nvSpPr>
+        <p:spPr>
+          <a:xfrm>
+            <a:off x="10882680" y="3617316"/>
+            <a:ext cx="857482" cy="531639"/>
+          </a:xfrm>
+          <a:prstGeom prst="chevron">
+            <a:avLst/>
+          </a:prstGeom>
+          <a:solidFill>
+            <a:srgbClr val="0077FF"/>
+          </a:solidFill>
+          <a:ln>
+            <a:noFill/>
+          </a:ln>
+        </p:spPr>
+        <p:style>
+          <a:lnRef idx="1">
+            <a:schemeClr val="accent1"/>
+          </a:lnRef>
+          <a:fillRef idx="3">
+            <a:schemeClr val="accent1"/>
+          </a:fillRef>
+          <a:effectRef idx="2">
+            <a:schemeClr val="accent1"/>
+          </a:effectRef>
+          <a:fontRef idx="minor">
+            <a:schemeClr val="lt1"/>
+          </a:fontRef>
+        </p:style>
+        <p:txBody>
+          <a:bodyPr rtlCol="0" anchor="ctr" wrap="square" lIns="12700" rIns="12700" tIns="12700" bIns="12700"/>
+          <a:lstStyle/>
+          <a:p>
+            <a:pPr algn="ctr">
+              <a:defRPr sz="600" b="0">
+                <a:solidFill>
+                  <a:srgbClr val="FFFFFF"/>
+                </a:solidFill>
+                <a:latin typeface="Play"/>
+                <a:ea typeface="Play"/>
+                <a:cs typeface="Play"/>
+              </a:defRPr>
+            </a:pPr>
+            <a:r>
+              <a:rPr sz="600" b="0">
+                <a:solidFill>
+                  <a:srgbClr val="FFFFFF"/>
+                </a:solidFill>
+                <a:latin typeface="Play"/>
+                <a:ea typeface="Play"/>
+                <a:cs typeface="Play"/>
+              </a:rPr>
+              <a:t>Экспорт результата</a:t>
             </a:r>
           </a:p>
         </p:txBody>
@@ -8117,7 +7684,7 @@
 </p:sld>
 </file>
 
-<file path=ppt/slides/slide34.xml><?xml version="1.0" encoding="utf-8"?>
+<file path=ppt/slides/slide33.xml><?xml version="1.0" encoding="utf-8"?>
 <p:sld xmlns:a="http://schemas.openxmlformats.org/drawingml/2006/main" xmlns:p="http://schemas.openxmlformats.org/presentationml/2006/main" xmlns:r="http://schemas.openxmlformats.org/officeDocument/2006/relationships">
   <p:cSld>
     <p:spTree>
@@ -8127,117 +7694,6 @@
         <p:nvPr/>
       </p:nvGrpSpPr>
       <p:grpSpPr/>
-      <p:grpSp>
-        <p:nvGrpSpPr>
-          <p:cNvPr id="617" name="Google Shape;617;p28"/>
-          <p:cNvGrpSpPr/>
-          <p:nvPr/>
-        </p:nvGrpSpPr>
-        <p:grpSpPr>
-          <a:xfrm>
-            <a:off x="427865" y="1988423"/>
-            <a:ext cx="476638" cy="474884"/>
-            <a:chOff x="427865" y="2634106"/>
-            <a:chExt cx="476638" cy="474884"/>
-          </a:xfrm>
-        </p:grpSpPr>
-        <p:sp>
-          <p:nvSpPr>
-            <p:cNvPr id="618" name="Google Shape;618;p28"/>
-            <p:cNvSpPr/>
-            <p:nvPr/>
-          </p:nvSpPr>
-          <p:spPr>
-            <a:xfrm>
-              <a:off x="427865" y="2634106"/>
-              <a:ext cx="476638" cy="474884"/>
-            </a:xfrm>
-            <a:prstGeom prst="roundRect">
-              <a:avLst>
-                <a:gd fmla="val 30745" name="adj"/>
-              </a:avLst>
-            </a:prstGeom>
-            <a:gradFill>
-              <a:gsLst>
-                <a:gs pos="0">
-                  <a:srgbClr val="00AEE8"/>
-                </a:gs>
-                <a:gs pos="100000">
-                  <a:srgbClr val="0077FF"/>
-                </a:gs>
-              </a:gsLst>
-              <a:lin ang="8100000" scaled="0"/>
-            </a:gradFill>
-            <a:ln>
-              <a:noFill/>
-            </a:ln>
-          </p:spPr>
-          <p:txBody>
-            <a:bodyPr anchorCtr="0" anchor="ctr" bIns="45700" lIns="36000" spcFirstLastPara="1" rIns="36000" wrap="square" tIns="45700">
-              <a:noAutofit/>
-            </a:bodyPr>
-            <a:lstStyle/>
-            <a:p>
-              <a:pPr indent="0" lvl="0" marL="0" marR="0" rtl="0" algn="ctr">
-                <a:lnSpc>
-                  <a:spcPct val="100000"/>
-                </a:lnSpc>
-                <a:spcBef>
-                  <a:spcPts val="0"/>
-                </a:spcBef>
-                <a:spcAft>
-                  <a:spcPts val="0"/>
-                </a:spcAft>
-                <a:buClr>
-                  <a:srgbClr val="000000"/>
-                </a:buClr>
-                <a:buSzPts val="1200"/>
-                <a:buFont typeface="Arial"/>
-                <a:buNone/>
-              </a:pPr>
-              <a:r>
-                <a:t/>
-              </a:r>
-              <a:endParaRPr sz="1400" u="none" cap="none" strike="noStrike">
-                <a:solidFill>
-                  <a:srgbClr val="00D3E3"/>
-                </a:solidFill>
-                <a:latin typeface="Play"/>
-                <a:ea typeface="Play"/>
-                <a:cs typeface="Play"/>
-                <a:sym typeface="Play"/>
-              </a:endParaRPr>
-            </a:p>
-          </p:txBody>
-        </p:sp>
-        <p:pic>
-          <p:nvPicPr>
-            <p:cNvPr id="619" name="Google Shape;619;p28"/>
-            <p:cNvPicPr preferRelativeResize="0"/>
-            <p:nvPr/>
-          </p:nvPicPr>
-          <p:blipFill rotWithShape="1">
-            <a:blip r:embed="rId2">
-              <a:alphaModFix/>
-            </a:blip>
-            <a:srcRect b="0" l="0" r="0" t="0"/>
-            <a:stretch/>
-          </p:blipFill>
-          <p:spPr>
-            <a:xfrm>
-              <a:off x="558184" y="2763548"/>
-              <a:ext cx="216000" cy="216000"/>
-            </a:xfrm>
-            <a:prstGeom prst="rect">
-              <a:avLst/>
-            </a:prstGeom>
-            <a:noFill/>
-            <a:ln>
-              <a:noFill/>
-            </a:ln>
-          </p:spPr>
-        </p:pic>
-      </p:grpSp>
       <p:pic>
         <p:nvPicPr>
           <p:cNvPr id="620" name="Google Shape;620;p28"/>
@@ -8292,342 +7748,9 @@
           </a:ln>
         </p:spPr>
       </p:pic>
-      <p:grpSp>
-        <p:nvGrpSpPr>
-          <p:cNvPr id="633" name="Google Shape;633;p28"/>
-          <p:cNvGrpSpPr/>
-          <p:nvPr/>
-        </p:nvGrpSpPr>
-        <p:grpSpPr>
-          <a:xfrm>
-            <a:off x="3323465" y="1988423"/>
-            <a:ext cx="476638" cy="474884"/>
-            <a:chOff x="427865" y="2634106"/>
-            <a:chExt cx="476638" cy="474884"/>
-          </a:xfrm>
-        </p:grpSpPr>
-        <p:sp>
-          <p:nvSpPr>
-            <p:cNvPr id="634" name="Google Shape;634;p28"/>
-            <p:cNvSpPr/>
-            <p:nvPr/>
-          </p:nvSpPr>
-          <p:spPr>
-            <a:xfrm>
-              <a:off x="427865" y="2634106"/>
-              <a:ext cx="476638" cy="474884"/>
-            </a:xfrm>
-            <a:prstGeom prst="roundRect">
-              <a:avLst>
-                <a:gd fmla="val 30745" name="adj"/>
-              </a:avLst>
-            </a:prstGeom>
-            <a:gradFill>
-              <a:gsLst>
-                <a:gs pos="0">
-                  <a:srgbClr val="00AEE8"/>
-                </a:gs>
-                <a:gs pos="100000">
-                  <a:srgbClr val="0077FF"/>
-                </a:gs>
-              </a:gsLst>
-              <a:lin ang="8100000" scaled="0"/>
-            </a:gradFill>
-            <a:ln>
-              <a:noFill/>
-            </a:ln>
-          </p:spPr>
-          <p:txBody>
-            <a:bodyPr anchorCtr="0" anchor="ctr" bIns="45700" lIns="36000" spcFirstLastPara="1" rIns="36000" wrap="square" tIns="45700">
-              <a:noAutofit/>
-            </a:bodyPr>
-            <a:lstStyle/>
-            <a:p>
-              <a:pPr indent="0" lvl="0" marL="0" marR="0" rtl="0" algn="ctr">
-                <a:lnSpc>
-                  <a:spcPct val="100000"/>
-                </a:lnSpc>
-                <a:spcBef>
-                  <a:spcPts val="0"/>
-                </a:spcBef>
-                <a:spcAft>
-                  <a:spcPts val="0"/>
-                </a:spcAft>
-                <a:buClr>
-                  <a:srgbClr val="000000"/>
-                </a:buClr>
-                <a:buSzPts val="1200"/>
-                <a:buFont typeface="Arial"/>
-                <a:buNone/>
-              </a:pPr>
-              <a:r>
-                <a:t/>
-              </a:r>
-              <a:endParaRPr sz="1400" u="none" cap="none" strike="noStrike">
-                <a:solidFill>
-                  <a:srgbClr val="00D3E3"/>
-                </a:solidFill>
-                <a:latin typeface="Play"/>
-                <a:ea typeface="Play"/>
-                <a:cs typeface="Play"/>
-                <a:sym typeface="Play"/>
-              </a:endParaRPr>
-            </a:p>
-          </p:txBody>
-        </p:sp>
-        <p:pic>
-          <p:nvPicPr>
-            <p:cNvPr id="635" name="Google Shape;635;p28"/>
-            <p:cNvPicPr preferRelativeResize="0"/>
-            <p:nvPr/>
-          </p:nvPicPr>
-          <p:blipFill rotWithShape="1">
-            <a:blip r:embed="rId2">
-              <a:alphaModFix/>
-            </a:blip>
-            <a:srcRect b="0" l="0" r="0" t="0"/>
-            <a:stretch/>
-          </p:blipFill>
-          <p:spPr>
-            <a:xfrm>
-              <a:off x="558184" y="2763548"/>
-              <a:ext cx="216000" cy="216000"/>
-            </a:xfrm>
-            <a:prstGeom prst="rect">
-              <a:avLst/>
-            </a:prstGeom>
-            <a:noFill/>
-            <a:ln>
-              <a:noFill/>
-            </a:ln>
-          </p:spPr>
-        </p:pic>
-      </p:grpSp>
-      <p:grpSp>
-        <p:nvGrpSpPr>
-          <p:cNvPr id="636" name="Google Shape;636;p28"/>
-          <p:cNvGrpSpPr/>
-          <p:nvPr/>
-        </p:nvGrpSpPr>
-        <p:grpSpPr>
-          <a:xfrm>
-            <a:off x="6094374" y="1988423"/>
-            <a:ext cx="476638" cy="474884"/>
-            <a:chOff x="427865" y="2634106"/>
-            <a:chExt cx="476638" cy="474884"/>
-          </a:xfrm>
-        </p:grpSpPr>
-        <p:sp>
-          <p:nvSpPr>
-            <p:cNvPr id="637" name="Google Shape;637;p28"/>
-            <p:cNvSpPr/>
-            <p:nvPr/>
-          </p:nvSpPr>
-          <p:spPr>
-            <a:xfrm>
-              <a:off x="427865" y="2634106"/>
-              <a:ext cx="476638" cy="474884"/>
-            </a:xfrm>
-            <a:prstGeom prst="roundRect">
-              <a:avLst>
-                <a:gd fmla="val 30745" name="adj"/>
-              </a:avLst>
-            </a:prstGeom>
-            <a:gradFill>
-              <a:gsLst>
-                <a:gs pos="0">
-                  <a:srgbClr val="00AEE8"/>
-                </a:gs>
-                <a:gs pos="100000">
-                  <a:srgbClr val="0077FF"/>
-                </a:gs>
-              </a:gsLst>
-              <a:lin ang="8100000" scaled="0"/>
-            </a:gradFill>
-            <a:ln>
-              <a:noFill/>
-            </a:ln>
-          </p:spPr>
-          <p:txBody>
-            <a:bodyPr anchorCtr="0" anchor="ctr" bIns="45700" lIns="36000" spcFirstLastPara="1" rIns="36000" wrap="square" tIns="45700">
-              <a:noAutofit/>
-            </a:bodyPr>
-            <a:lstStyle/>
-            <a:p>
-              <a:pPr indent="0" lvl="0" marL="0" marR="0" rtl="0" algn="ctr">
-                <a:lnSpc>
-                  <a:spcPct val="100000"/>
-                </a:lnSpc>
-                <a:spcBef>
-                  <a:spcPts val="0"/>
-                </a:spcBef>
-                <a:spcAft>
-                  <a:spcPts val="0"/>
-                </a:spcAft>
-                <a:buClr>
-                  <a:srgbClr val="000000"/>
-                </a:buClr>
-                <a:buSzPts val="1200"/>
-                <a:buFont typeface="Arial"/>
-                <a:buNone/>
-              </a:pPr>
-              <a:r>
-                <a:t/>
-              </a:r>
-              <a:endParaRPr sz="1400" u="none" cap="none" strike="noStrike">
-                <a:solidFill>
-                  <a:srgbClr val="00D3E3"/>
-                </a:solidFill>
-                <a:latin typeface="Play"/>
-                <a:ea typeface="Play"/>
-                <a:cs typeface="Play"/>
-                <a:sym typeface="Play"/>
-              </a:endParaRPr>
-            </a:p>
-          </p:txBody>
-        </p:sp>
-        <p:pic>
-          <p:nvPicPr>
-            <p:cNvPr id="638" name="Google Shape;638;p28"/>
-            <p:cNvPicPr preferRelativeResize="0"/>
-            <p:nvPr/>
-          </p:nvPicPr>
-          <p:blipFill rotWithShape="1">
-            <a:blip r:embed="rId2">
-              <a:alphaModFix/>
-            </a:blip>
-            <a:srcRect b="0" l="0" r="0" t="0"/>
-            <a:stretch/>
-          </p:blipFill>
-          <p:spPr>
-            <a:xfrm>
-              <a:off x="558184" y="2763548"/>
-              <a:ext cx="216000" cy="216000"/>
-            </a:xfrm>
-            <a:prstGeom prst="rect">
-              <a:avLst/>
-            </a:prstGeom>
-            <a:noFill/>
-            <a:ln>
-              <a:noFill/>
-            </a:ln>
-          </p:spPr>
-        </p:pic>
-      </p:grpSp>
-      <p:grpSp>
-        <p:nvGrpSpPr>
-          <p:cNvPr id="639" name="Google Shape;639;p28"/>
-          <p:cNvGrpSpPr/>
-          <p:nvPr/>
-        </p:nvGrpSpPr>
-        <p:grpSpPr>
-          <a:xfrm>
-            <a:off x="8989974" y="1988423"/>
-            <a:ext cx="476638" cy="474884"/>
-            <a:chOff x="427865" y="2634106"/>
-            <a:chExt cx="476638" cy="474884"/>
-          </a:xfrm>
-        </p:grpSpPr>
-        <p:sp>
-          <p:nvSpPr>
-            <p:cNvPr id="640" name="Google Shape;640;p28"/>
-            <p:cNvSpPr/>
-            <p:nvPr/>
-          </p:nvSpPr>
-          <p:spPr>
-            <a:xfrm>
-              <a:off x="427865" y="2634106"/>
-              <a:ext cx="476638" cy="474884"/>
-            </a:xfrm>
-            <a:prstGeom prst="roundRect">
-              <a:avLst>
-                <a:gd fmla="val 30745" name="adj"/>
-              </a:avLst>
-            </a:prstGeom>
-            <a:gradFill>
-              <a:gsLst>
-                <a:gs pos="0">
-                  <a:srgbClr val="00AEE8"/>
-                </a:gs>
-                <a:gs pos="100000">
-                  <a:srgbClr val="0077FF"/>
-                </a:gs>
-              </a:gsLst>
-              <a:lin ang="8100000" scaled="0"/>
-            </a:gradFill>
-            <a:ln>
-              <a:noFill/>
-            </a:ln>
-          </p:spPr>
-          <p:txBody>
-            <a:bodyPr anchorCtr="0" anchor="ctr" bIns="45700" lIns="36000" spcFirstLastPara="1" rIns="36000" wrap="square" tIns="45700">
-              <a:noAutofit/>
-            </a:bodyPr>
-            <a:lstStyle/>
-            <a:p>
-              <a:pPr indent="0" lvl="0" marL="0" marR="0" rtl="0" algn="ctr">
-                <a:lnSpc>
-                  <a:spcPct val="100000"/>
-                </a:lnSpc>
-                <a:spcBef>
-                  <a:spcPts val="0"/>
-                </a:spcBef>
-                <a:spcAft>
-                  <a:spcPts val="0"/>
-                </a:spcAft>
-                <a:buClr>
-                  <a:srgbClr val="000000"/>
-                </a:buClr>
-                <a:buSzPts val="1200"/>
-                <a:buFont typeface="Arial"/>
-                <a:buNone/>
-              </a:pPr>
-              <a:r>
-                <a:t/>
-              </a:r>
-              <a:endParaRPr sz="1400" u="none" cap="none" strike="noStrike">
-                <a:solidFill>
-                  <a:srgbClr val="00D3E3"/>
-                </a:solidFill>
-                <a:latin typeface="Play"/>
-                <a:ea typeface="Play"/>
-                <a:cs typeface="Play"/>
-                <a:sym typeface="Play"/>
-              </a:endParaRPr>
-            </a:p>
-          </p:txBody>
-        </p:sp>
-        <p:pic>
-          <p:nvPicPr>
-            <p:cNvPr id="641" name="Google Shape;641;p28"/>
-            <p:cNvPicPr preferRelativeResize="0"/>
-            <p:nvPr/>
-          </p:nvPicPr>
-          <p:blipFill rotWithShape="1">
-            <a:blip r:embed="rId2">
-              <a:alphaModFix/>
-            </a:blip>
-            <a:srcRect b="0" l="0" r="0" t="0"/>
-            <a:stretch/>
-          </p:blipFill>
-          <p:spPr>
-            <a:xfrm>
-              <a:off x="558184" y="2763548"/>
-              <a:ext cx="216000" cy="216000"/>
-            </a:xfrm>
-            <a:prstGeom prst="rect">
-              <a:avLst/>
-            </a:prstGeom>
-            <a:noFill/>
-            <a:ln>
-              <a:noFill/>
-            </a:ln>
-          </p:spPr>
-        </p:pic>
-      </p:grpSp>
       <p:sp>
         <p:nvSpPr>
-          <p:cNvPr id="642" name="title"/>
+          <p:cNvPr id="622" name="title"/>
           <p:cNvSpPr txBox="1"/>
           <p:nvPr/>
         </p:nvSpPr>
@@ -8669,21 +7792,21 @@
                 <a:ea typeface="Play"/>
                 <a:cs typeface="Play"/>
               </a:rPr>
-              <a:t>Качество и аудит</a:t>
+              <a:t>Ожидаемый эффект – Время</a:t>
             </a:r>
           </a:p>
         </p:txBody>
       </p:sp>
       <p:sp>
         <p:nvSpPr>
-          <p:cNvPr id="643" name="body"/>
+          <p:cNvPr id="623" name="body"/>
           <p:cNvSpPr txBox="1"/>
           <p:nvPr/>
         </p:nvSpPr>
         <p:spPr>
           <a:xfrm>
-            <a:off x="429280" y="2310261"/>
-            <a:ext cx="11310884" cy="1488440"/>
+            <a:off x="429280" y="1504165"/>
+            <a:ext cx="5472562" cy="3906728"/>
           </a:xfrm>
           <a:prstGeom prst="rect">
             <a:avLst/>
@@ -8700,7 +7823,7 @@
               <a:spcAft>
                 <a:spcPts val="300"/>
               </a:spcAft>
-              <a:defRPr sz="2800">
+              <a:defRPr sz="2000">
                 <a:solidFill>
                   <a:srgbClr val="FFFFFF"/>
                 </a:solidFill>
@@ -8710,7 +7833,7 @@
               </a:defRPr>
             </a:pPr>
             <a:r>
-              <a:rPr sz="2800">
+              <a:rPr sz="2000">
                 <a:solidFill>
                   <a:srgbClr val="FFFFFF"/>
                 </a:solidFill>
@@ -8718,7 +7841,7 @@
                 <a:ea typeface="Play"/>
                 <a:cs typeface="Play"/>
               </a:rPr>
-              <a:t>• Аудит качества до публикации</a:t>
+              <a:t>• Время сборки колоды 12 слайдов сократилось с 186 до 4 мин</a:t>
             </a:r>
           </a:p>
           <a:p>
@@ -8726,7 +7849,7 @@
               <a:spcAft>
                 <a:spcPts val="300"/>
               </a:spcAft>
-              <a:defRPr sz="2800">
+              <a:defRPr sz="2000">
                 <a:solidFill>
                   <a:srgbClr val="FFFFFF"/>
                 </a:solidFill>
@@ -8736,7 +7859,7 @@
               </a:defRPr>
             </a:pPr>
             <a:r>
-              <a:rPr sz="2800">
+              <a:rPr sz="2000">
                 <a:solidFill>
                   <a:srgbClr val="FFFFFF"/>
                 </a:solidFill>
@@ -8744,37 +7867,29 @@
                 <a:ea typeface="Play"/>
                 <a:cs typeface="Play"/>
               </a:rPr>
-              <a:t>• Автоматические правки нарушений стиля</a:t>
-            </a:r>
-          </a:p>
-          <a:p>
-            <a:pPr algn="l">
-              <a:spcAft>
-                <a:spcPts val="300"/>
-              </a:spcAft>
-              <a:defRPr sz="2800">
-                <a:solidFill>
-                  <a:srgbClr val="FFFFFF"/>
-                </a:solidFill>
-                <a:latin typeface="Play"/>
-                <a:ea typeface="Play"/>
-                <a:cs typeface="Play"/>
-              </a:defRPr>
-            </a:pPr>
-            <a:r>
-              <a:rPr sz="2800">
-                <a:solidFill>
-                  <a:srgbClr val="FFFFFF"/>
-                </a:solidFill>
-                <a:latin typeface="Play"/>
-                <a:ea typeface="Play"/>
-                <a:cs typeface="Play"/>
-              </a:rPr>
-              <a:t>• Слайды остаются редактируемыми</a:t>
+              <a:t>• Первый готовый вариант доступен за 1 день вместо 6</a:t>
             </a:r>
           </a:p>
         </p:txBody>
       </p:sp>
+      <p:graphicFrame>
+        <p:nvGraphicFramePr>
+          <p:cNvPr id="624" name="Chart 623"/>
+          <p:cNvGraphicFramePr>
+            <a:graphicFrameLocks noGrp="1"/>
+          </p:cNvGraphicFramePr>
+          <p:nvPr/>
+        </p:nvGraphicFramePr>
+        <p:xfrm>
+          <a:off x="6267602" y="1504165"/>
+          <a:ext cx="5472562" cy="3906728"/>
+        </p:xfrm>
+        <a:graphic>
+          <a:graphicData uri="http://schemas.openxmlformats.org/drawingml/2006/chart">
+            <c:chart xmlns:c="http://schemas.openxmlformats.org/drawingml/2006/chart" r:id="rId5"/>
+          </a:graphicData>
+        </a:graphic>
+      </p:graphicFrame>
     </p:spTree>
   </p:cSld>
   <p:clrMapOvr>
@@ -8783,7 +7898,7 @@
 </p:sld>
 </file>
 
-<file path=ppt/slides/slide35.xml><?xml version="1.0" encoding="utf-8"?>
+<file path=ppt/slides/slide34.xml><?xml version="1.0" encoding="utf-8"?>
 <p:sld xmlns:a="http://schemas.openxmlformats.org/drawingml/2006/main" xmlns:p="http://schemas.openxmlformats.org/presentationml/2006/main" xmlns:r="http://schemas.openxmlformats.org/officeDocument/2006/relationships">
   <p:cSld>
     <p:spTree>
@@ -8837,7 +7952,7 @@
                 <a:ea typeface="Play"/>
                 <a:cs typeface="Play"/>
               </a:rPr>
-              <a:t>Эффект пилота</a:t>
+              <a:t>Ожидаемый эффект – Нарушения</a:t>
             </a:r>
           </a:p>
         </p:txBody>
@@ -8886,7 +8001,7 @@
                 <a:ea typeface="Play"/>
                 <a:cs typeface="Play"/>
               </a:rPr>
-              <a:t>• Средняя сборка 4 минуты вместо 186</a:t>
+              <a:t>• Нарушений фирменного стиля в пилоте – 2 из 68 колод</a:t>
             </a:r>
           </a:p>
           <a:p>
@@ -8912,59 +8027,7 @@
                 <a:ea typeface="Play"/>
                 <a:cs typeface="Play"/>
               </a:rPr>
-              <a:t>• Время до первой версии сократилось с 6 дней до 1</a:t>
-            </a:r>
-          </a:p>
-          <a:p>
-            <a:pPr algn="l">
-              <a:spcAft>
-                <a:spcPts val="300"/>
-              </a:spcAft>
-              <a:defRPr sz="1600">
-                <a:solidFill>
-                  <a:srgbClr val="FFFFFF"/>
-                </a:solidFill>
-                <a:latin typeface="Play"/>
-                <a:ea typeface="Play"/>
-                <a:cs typeface="Play"/>
-              </a:defRPr>
-            </a:pPr>
-            <a:r>
-              <a:rPr sz="1600">
-                <a:solidFill>
-                  <a:srgbClr val="FFFFFF"/>
-                </a:solidFill>
-                <a:latin typeface="Play"/>
-                <a:ea typeface="Play"/>
-                <a:cs typeface="Play"/>
-              </a:rPr>
-              <a:t>• Нарушений стиля 2 из 68</a:t>
-            </a:r>
-          </a:p>
-          <a:p>
-            <a:pPr algn="l">
-              <a:spcAft>
-                <a:spcPts val="300"/>
-              </a:spcAft>
-              <a:defRPr sz="1600">
-                <a:solidFill>
-                  <a:srgbClr val="FFFFFF"/>
-                </a:solidFill>
-                <a:latin typeface="Play"/>
-                <a:ea typeface="Play"/>
-                <a:cs typeface="Play"/>
-              </a:defRPr>
-            </a:pPr>
-            <a:r>
-              <a:rPr sz="1600">
-                <a:solidFill>
-                  <a:srgbClr val="FFFFFF"/>
-                </a:solidFill>
-                <a:latin typeface="Play"/>
-                <a:ea typeface="Play"/>
-                <a:cs typeface="Play"/>
-              </a:rPr>
-              <a:t>• Дизайнеры закрыли 38 запросов вместо 11</a:t>
+              <a:t>• Все нарушения автоматически исправлены аудитором</a:t>
             </a:r>
           </a:p>
         </p:txBody>
@@ -8995,7 +8058,7 @@
 </p:sld>
 </file>
 
-<file path=ppt/slides/slide36.xml><?xml version="1.0" encoding="utf-8"?>
+<file path=ppt/slides/slide35.xml><?xml version="1.0" encoding="utf-8"?>
 <p:sld xmlns:a="http://schemas.openxmlformats.org/drawingml/2006/main" xmlns:p="http://schemas.openxmlformats.org/presentationml/2006/main" xmlns:r="http://schemas.openxmlformats.org/officeDocument/2006/relationships">
   <p:cSld>
     <p:spTree>
@@ -9007,91 +8070,226 @@
       <p:grpSpPr/>
       <p:sp>
         <p:nvSpPr>
-          <p:cNvPr id="679" name="Google Shape;679;p31"/>
+          <p:cNvPr id="2" name="title"/>
+          <p:cNvSpPr txBox="1"/>
+          <p:nvPr/>
+        </p:nvSpPr>
+        <p:spPr>
+          <a:xfrm>
+            <a:off x="429280" y="424715"/>
+            <a:ext cx="7827264" cy="1183640"/>
+          </a:xfrm>
+          <a:prstGeom prst="rect">
+            <a:avLst/>
+          </a:prstGeom>
+          <a:noFill/>
+        </p:spPr>
+        <p:txBody>
+          <a:bodyPr wrap="square" lIns="76200" rIns="76200" tIns="50800" bIns="50800">
+            <a:spAutoFit/>
+          </a:bodyPr>
+          <a:lstStyle/>
+          <a:p>
+            <a:pPr algn="l">
+              <a:spcAft>
+                <a:spcPts val="300"/>
+              </a:spcAft>
+              <a:defRPr sz="3200">
+                <a:solidFill>
+                  <a:srgbClr val="FFFFFF"/>
+                </a:solidFill>
+                <a:latin typeface="Play"/>
+                <a:ea typeface="Play"/>
+                <a:cs typeface="Play"/>
+              </a:defRPr>
+            </a:pPr>
+            <a:r>
+              <a:rPr sz="3200">
+                <a:solidFill>
+                  <a:srgbClr val="FFFFFF"/>
+                </a:solidFill>
+                <a:latin typeface="Play"/>
+                <a:ea typeface="Play"/>
+                <a:cs typeface="Play"/>
+              </a:rPr>
+              <a:t>Что потребуется: ресурсы и сроки</a:t>
+            </a:r>
+          </a:p>
+        </p:txBody>
+      </p:sp>
+      <p:sp>
+        <p:nvSpPr>
+          <p:cNvPr id="3" name="body"/>
+          <p:cNvSpPr txBox="1"/>
+          <p:nvPr/>
+        </p:nvSpPr>
+        <p:spPr>
+          <a:xfrm>
+            <a:off x="429280" y="1745515"/>
+            <a:ext cx="5472562" cy="3672235"/>
+          </a:xfrm>
+          <a:prstGeom prst="rect">
+            <a:avLst/>
+          </a:prstGeom>
+          <a:noFill/>
+        </p:spPr>
+        <p:txBody>
+          <a:bodyPr wrap="square" lIns="76200" rIns="76200" tIns="50800" bIns="50800">
+            <a:spAutoFit/>
+          </a:bodyPr>
+          <a:lstStyle/>
+          <a:p>
+            <a:pPr algn="l">
+              <a:spcAft>
+                <a:spcPts val="300"/>
+              </a:spcAft>
+              <a:defRPr sz="1800">
+                <a:solidFill>
+                  <a:srgbClr val="FFFFFF"/>
+                </a:solidFill>
+                <a:latin typeface="Play"/>
+                <a:ea typeface="Play"/>
+                <a:cs typeface="Play"/>
+              </a:defRPr>
+            </a:pPr>
+            <a:r>
+              <a:rPr sz="1800">
+                <a:solidFill>
+                  <a:srgbClr val="FFFFFF"/>
+                </a:solidFill>
+                <a:latin typeface="Play"/>
+                <a:ea typeface="Play"/>
+                <a:cs typeface="Play"/>
+              </a:rPr>
+              <a:t>• Сервис работает на 2 vCPU / 2 GB RAM</a:t>
+            </a:r>
+          </a:p>
+          <a:p>
+            <a:pPr algn="l">
+              <a:spcAft>
+                <a:spcPts val="300"/>
+              </a:spcAft>
+              <a:defRPr sz="1800">
+                <a:solidFill>
+                  <a:srgbClr val="FFFFFF"/>
+                </a:solidFill>
+                <a:latin typeface="Play"/>
+                <a:ea typeface="Play"/>
+                <a:cs typeface="Play"/>
+              </a:defRPr>
+            </a:pPr>
+            <a:r>
+              <a:rPr sz="1800">
+                <a:solidFill>
+                  <a:srgbClr val="FFFFFF"/>
+                </a:solidFill>
+                <a:latin typeface="Play"/>
+                <a:ea typeface="Play"/>
+                <a:cs typeface="Play"/>
+              </a:rPr>
+              <a:t>• Инференс за 6 недель пилота – 1 400 руб</a:t>
+            </a:r>
+          </a:p>
+          <a:p>
+            <a:pPr algn="l">
+              <a:spcAft>
+                <a:spcPts val="300"/>
+              </a:spcAft>
+              <a:defRPr sz="1800">
+                <a:solidFill>
+                  <a:srgbClr val="FFFFFF"/>
+                </a:solidFill>
+                <a:latin typeface="Play"/>
+                <a:ea typeface="Play"/>
+                <a:cs typeface="Play"/>
+              </a:defRPr>
+            </a:pPr>
+            <a:r>
+              <a:rPr sz="1800">
+                <a:solidFill>
+                  <a:srgbClr val="FFFFFF"/>
+                </a:solidFill>
+                <a:latin typeface="Play"/>
+                <a:ea typeface="Play"/>
+                <a:cs typeface="Play"/>
+              </a:rPr>
+              <a:t>• 3 квартал 2026: подключение 4 команд</a:t>
+            </a:r>
+          </a:p>
+          <a:p>
+            <a:pPr algn="l">
+              <a:spcAft>
+                <a:spcPts val="300"/>
+              </a:spcAft>
+              <a:defRPr sz="1800">
+                <a:solidFill>
+                  <a:srgbClr val="FFFFFF"/>
+                </a:solidFill>
+                <a:latin typeface="Play"/>
+                <a:ea typeface="Play"/>
+                <a:cs typeface="Play"/>
+              </a:defRPr>
+            </a:pPr>
+            <a:r>
+              <a:rPr sz="1800">
+                <a:solidFill>
+                  <a:srgbClr val="FFFFFF"/>
+                </a:solidFill>
+                <a:latin typeface="Play"/>
+                <a:ea typeface="Play"/>
+                <a:cs typeface="Play"/>
+              </a:rPr>
+              <a:t>• 4 квартал 2026: доступ для всей компании</a:t>
+            </a:r>
+          </a:p>
+          <a:p>
+            <a:pPr algn="l">
+              <a:spcAft>
+                <a:spcPts val="300"/>
+              </a:spcAft>
+              <a:defRPr sz="1800">
+                <a:solidFill>
+                  <a:srgbClr val="FFFFFF"/>
+                </a:solidFill>
+                <a:latin typeface="Play"/>
+                <a:ea typeface="Play"/>
+                <a:cs typeface="Play"/>
+              </a:defRPr>
+            </a:pPr>
+            <a:r>
+              <a:rPr sz="1800">
+                <a:solidFill>
+                  <a:srgbClr val="FFFFFF"/>
+                </a:solidFill>
+                <a:latin typeface="Play"/>
+                <a:ea typeface="Play"/>
+                <a:cs typeface="Play"/>
+              </a:rPr>
+              <a:t>• 1 квартал 2027: генерация иллюстраций</a:t>
+            </a:r>
+          </a:p>
+        </p:txBody>
+      </p:sp>
+      <p:sp>
+        <p:nvSpPr>
+          <p:cNvPr id="4" name="Rectangle 3"/>
           <p:cNvSpPr/>
           <p:nvPr/>
         </p:nvSpPr>
         <p:spPr>
           <a:xfrm>
-            <a:off x="0" y="4748271"/>
-            <a:ext cx="12192000" cy="2109730"/>
+            <a:off x="6267602" y="3434743"/>
+            <a:ext cx="5472562" cy="110167"/>
           </a:xfrm>
           <a:prstGeom prst="rect">
             <a:avLst/>
           </a:prstGeom>
-          <a:gradFill>
-            <a:gsLst>
-              <a:gs pos="0">
-                <a:srgbClr val="0077FF">
-                  <a:alpha val="61961"/>
-                </a:srgbClr>
-              </a:gs>
-              <a:gs pos="99000">
-                <a:srgbClr val="00AEE8"/>
-              </a:gs>
-              <a:gs pos="100000">
-                <a:srgbClr val="00AEE8"/>
-              </a:gs>
-            </a:gsLst>
-            <a:lin ang="14400000" scaled="0"/>
-          </a:gradFill>
-          <a:ln>
-            <a:noFill/>
-          </a:ln>
-        </p:spPr>
-        <p:txBody>
-          <a:bodyPr anchorCtr="0" anchor="ctr" bIns="0" lIns="108000" spcFirstLastPara="1" rIns="91425" wrap="square" tIns="0">
-            <a:noAutofit/>
-          </a:bodyPr>
-          <a:lstStyle/>
-          <a:p>
-            <a:pPr indent="0" lvl="0" marL="0" marR="0" rtl="0" algn="l">
-              <a:spcBef>
-                <a:spcPts val="0"/>
-              </a:spcBef>
-              <a:spcAft>
-                <a:spcPts val="0"/>
-              </a:spcAft>
-              <a:buNone/>
-            </a:pPr>
-            <a:r>
-              <a:t/>
-            </a:r>
-            <a:endParaRPr sz="1100">
-              <a:solidFill>
-                <a:schemeClr val="lt1"/>
-              </a:solidFill>
-              <a:latin typeface="Play"/>
-              <a:ea typeface="Play"/>
-              <a:cs typeface="Play"/>
-              <a:sym typeface="Play"/>
-            </a:endParaRPr>
-          </a:p>
-        </p:txBody>
-      </p:sp>
-      <p:sp>
-        <p:nvSpPr>
-          <p:cNvPr id="680" name="Rounded Rectangle 679"/>
-          <p:cNvSpPr/>
-          <p:nvPr/>
-        </p:nvSpPr>
-        <p:spPr>
-          <a:xfrm>
-            <a:off x="300817" y="297715"/>
-            <a:ext cx="11566347" cy="4330872"/>
-          </a:xfrm>
-          <a:prstGeom prst="roundRect">
-            <a:avLst/>
-          </a:prstGeom>
           <a:solidFill>
-            <a:srgbClr val="111111">
-              <a:alpha val="85000"/>
-            </a:srgbClr>
+            <a:srgbClr val="0077FF"/>
           </a:solidFill>
           <a:ln>
             <a:noFill/>
           </a:ln>
-          <a:effectLst/>
         </p:spPr>
         <p:style>
           <a:lnRef idx="1">
@@ -9117,14 +8315,57 @@
       </p:sp>
       <p:sp>
         <p:nvSpPr>
-          <p:cNvPr id="681" name="title"/>
+          <p:cNvPr id="5" name="Oval 4"/>
+          <p:cNvSpPr/>
+          <p:nvPr/>
+        </p:nvSpPr>
+        <p:spPr>
+          <a:xfrm>
+            <a:off x="6906067" y="3216198"/>
+            <a:ext cx="547256" cy="547256"/>
+          </a:xfrm>
+          <a:prstGeom prst="ellipse">
+            <a:avLst/>
+          </a:prstGeom>
+          <a:solidFill>
+            <a:srgbClr val="0077FF"/>
+          </a:solidFill>
+          <a:ln>
+            <a:noFill/>
+          </a:ln>
+        </p:spPr>
+        <p:style>
+          <a:lnRef idx="1">
+            <a:schemeClr val="accent1"/>
+          </a:lnRef>
+          <a:fillRef idx="3">
+            <a:schemeClr val="accent1"/>
+          </a:fillRef>
+          <a:effectRef idx="2">
+            <a:schemeClr val="accent1"/>
+          </a:effectRef>
+          <a:fontRef idx="minor">
+            <a:schemeClr val="lt1"/>
+          </a:fontRef>
+        </p:style>
+        <p:txBody>
+          <a:bodyPr rtlCol="0" anchor="ctr"/>
+          <a:lstStyle/>
+          <a:p>
+            <a:pPr algn="ctr"/>
+          </a:p>
+        </p:txBody>
+      </p:sp>
+      <p:sp>
+        <p:nvSpPr>
+          <p:cNvPr id="6" name="TextBox 5"/>
           <p:cNvSpPr txBox="1"/>
           <p:nvPr/>
         </p:nvSpPr>
         <p:spPr>
           <a:xfrm>
-            <a:off x="427817" y="424715"/>
-            <a:ext cx="7827264" cy="822960"/>
+            <a:off x="6267602" y="1745515"/>
+            <a:ext cx="1824187" cy="1395449"/>
           </a:xfrm>
           <a:prstGeom prst="rect">
             <a:avLst/>
@@ -9132,16 +8373,13 @@
           <a:noFill/>
         </p:spPr>
         <p:txBody>
-          <a:bodyPr wrap="square" lIns="76200" rIns="76200" tIns="50800" bIns="50800">
+          <a:bodyPr wrap="square">
             <a:spAutoFit/>
           </a:bodyPr>
           <a:lstStyle/>
           <a:p>
-            <a:pPr algn="l">
-              <a:spcAft>
-                <a:spcPts val="300"/>
-              </a:spcAft>
-              <a:defRPr sz="3200">
+            <a:pPr algn="ctr">
+              <a:defRPr sz="1200" b="0">
                 <a:solidFill>
                   <a:srgbClr val="FFFFFF"/>
                 </a:solidFill>
@@ -9151,7 +8389,7 @@
               </a:defRPr>
             </a:pPr>
             <a:r>
-              <a:rPr sz="3200">
+              <a:rPr sz="1200" b="0">
                 <a:solidFill>
                   <a:srgbClr val="FFFFFF"/>
                 </a:solidFill>
@@ -9159,21 +8397,64 @@
                 <a:ea typeface="Play"/>
                 <a:cs typeface="Play"/>
               </a:rPr>
-              <a:t>Ресурсы и сроки</a:t>
+              <a:t>3 квартал 2026: подключение 4 команд</a:t>
             </a:r>
           </a:p>
         </p:txBody>
       </p:sp>
       <p:sp>
         <p:nvSpPr>
-          <p:cNvPr id="682" name="body"/>
+          <p:cNvPr id="7" name="Oval 6"/>
+          <p:cNvSpPr/>
+          <p:nvPr/>
+        </p:nvSpPr>
+        <p:spPr>
+          <a:xfrm>
+            <a:off x="8730254" y="3216198"/>
+            <a:ext cx="547256" cy="547256"/>
+          </a:xfrm>
+          <a:prstGeom prst="ellipse">
+            <a:avLst/>
+          </a:prstGeom>
+          <a:solidFill>
+            <a:srgbClr val="0077FF"/>
+          </a:solidFill>
+          <a:ln>
+            <a:noFill/>
+          </a:ln>
+        </p:spPr>
+        <p:style>
+          <a:lnRef idx="1">
+            <a:schemeClr val="accent1"/>
+          </a:lnRef>
+          <a:fillRef idx="3">
+            <a:schemeClr val="accent1"/>
+          </a:fillRef>
+          <a:effectRef idx="2">
+            <a:schemeClr val="accent1"/>
+          </a:effectRef>
+          <a:fontRef idx="minor">
+            <a:schemeClr val="lt1"/>
+          </a:fontRef>
+        </p:style>
+        <p:txBody>
+          <a:bodyPr rtlCol="0" anchor="ctr"/>
+          <a:lstStyle/>
+          <a:p>
+            <a:pPr algn="ctr"/>
+          </a:p>
+        </p:txBody>
+      </p:sp>
+      <p:sp>
+        <p:nvSpPr>
+          <p:cNvPr id="8" name="TextBox 7"/>
           <p:cNvSpPr txBox="1"/>
           <p:nvPr/>
         </p:nvSpPr>
         <p:spPr>
           <a:xfrm>
-            <a:off x="427817" y="2550868"/>
-            <a:ext cx="11312347" cy="1950720"/>
+            <a:off x="8091789" y="3981999"/>
+            <a:ext cx="1824187" cy="1395449"/>
           </a:xfrm>
           <a:prstGeom prst="rect">
             <a:avLst/>
@@ -9181,16 +8462,13 @@
           <a:noFill/>
         </p:spPr>
         <p:txBody>
-          <a:bodyPr wrap="square" lIns="76200" rIns="76200" tIns="50800" bIns="50800">
+          <a:bodyPr wrap="square">
             <a:spAutoFit/>
           </a:bodyPr>
           <a:lstStyle/>
           <a:p>
-            <a:pPr algn="l">
-              <a:spcAft>
-                <a:spcPts val="300"/>
-              </a:spcAft>
-              <a:defRPr sz="2800">
+            <a:pPr algn="ctr">
+              <a:defRPr sz="1200" b="0">
                 <a:solidFill>
                   <a:srgbClr val="FFFFFF"/>
                 </a:solidFill>
@@ -9200,7 +8478,7 @@
               </a:defRPr>
             </a:pPr>
             <a:r>
-              <a:rPr sz="2800">
+              <a:rPr sz="1200" b="0">
                 <a:solidFill>
                   <a:srgbClr val="FFFFFF"/>
                 </a:solidFill>
@@ -9208,15 +8486,78 @@
                 <a:ea typeface="Play"/>
                 <a:cs typeface="Play"/>
               </a:rPr>
-              <a:t>• Сервис работает на 2 vCPU / 2 GB RAM</a:t>
+              <a:t>4 квартал 2026: доступ для всей компании</a:t>
             </a:r>
           </a:p>
+        </p:txBody>
+      </p:sp>
+      <p:sp>
+        <p:nvSpPr>
+          <p:cNvPr id="9" name="Oval 8"/>
+          <p:cNvSpPr/>
+          <p:nvPr/>
+        </p:nvSpPr>
+        <p:spPr>
+          <a:xfrm>
+            <a:off x="10554442" y="3216198"/>
+            <a:ext cx="547256" cy="547256"/>
+          </a:xfrm>
+          <a:prstGeom prst="ellipse">
+            <a:avLst/>
+          </a:prstGeom>
+          <a:solidFill>
+            <a:srgbClr val="0077FF"/>
+          </a:solidFill>
+          <a:ln>
+            <a:noFill/>
+          </a:ln>
+        </p:spPr>
+        <p:style>
+          <a:lnRef idx="1">
+            <a:schemeClr val="accent1"/>
+          </a:lnRef>
+          <a:fillRef idx="3">
+            <a:schemeClr val="accent1"/>
+          </a:fillRef>
+          <a:effectRef idx="2">
+            <a:schemeClr val="accent1"/>
+          </a:effectRef>
+          <a:fontRef idx="minor">
+            <a:schemeClr val="lt1"/>
+          </a:fontRef>
+        </p:style>
+        <p:txBody>
+          <a:bodyPr rtlCol="0" anchor="ctr"/>
+          <a:lstStyle/>
           <a:p>
-            <a:pPr algn="l">
-              <a:spcAft>
-                <a:spcPts val="300"/>
-              </a:spcAft>
-              <a:defRPr sz="2800">
+            <a:pPr algn="ctr"/>
+          </a:p>
+        </p:txBody>
+      </p:sp>
+      <p:sp>
+        <p:nvSpPr>
+          <p:cNvPr id="10" name="TextBox 9"/>
+          <p:cNvSpPr txBox="1"/>
+          <p:nvPr/>
+        </p:nvSpPr>
+        <p:spPr>
+          <a:xfrm>
+            <a:off x="9915976" y="1745515"/>
+            <a:ext cx="1824187" cy="1395449"/>
+          </a:xfrm>
+          <a:prstGeom prst="rect">
+            <a:avLst/>
+          </a:prstGeom>
+          <a:noFill/>
+        </p:spPr>
+        <p:txBody>
+          <a:bodyPr wrap="square">
+            <a:spAutoFit/>
+          </a:bodyPr>
+          <a:lstStyle/>
+          <a:p>
+            <a:pPr algn="ctr">
+              <a:defRPr sz="1200" b="0">
                 <a:solidFill>
                   <a:srgbClr val="FFFFFF"/>
                 </a:solidFill>
@@ -9226,7 +8567,7 @@
               </a:defRPr>
             </a:pPr>
             <a:r>
-              <a:rPr sz="2800">
+              <a:rPr sz="1200" b="0">
                 <a:solidFill>
                   <a:srgbClr val="FFFFFF"/>
                 </a:solidFill>
@@ -9234,33 +8575,7 @@
                 <a:ea typeface="Play"/>
                 <a:cs typeface="Play"/>
               </a:rPr>
-              <a:t>• Стоимость инференса 1 400 рублей за 6 недель</a:t>
-            </a:r>
-          </a:p>
-          <a:p>
-            <a:pPr algn="l">
-              <a:spcAft>
-                <a:spcPts val="300"/>
-              </a:spcAft>
-              <a:defRPr sz="2800">
-                <a:solidFill>
-                  <a:srgbClr val="FFFFFF"/>
-                </a:solidFill>
-                <a:latin typeface="Play"/>
-                <a:ea typeface="Play"/>
-                <a:cs typeface="Play"/>
-              </a:defRPr>
-            </a:pPr>
-            <a:r>
-              <a:rPr sz="2800">
-                <a:solidFill>
-                  <a:srgbClr val="FFFFFF"/>
-                </a:solidFill>
-                <a:latin typeface="Play"/>
-                <a:ea typeface="Play"/>
-                <a:cs typeface="Play"/>
-              </a:rPr>
-              <a:t>• План: Q3 2026 подключение 4 команд, Q4 2026 доступ для всей компании</a:t>
+              <a:t>1 квартал 2027: генерация иллюстраций</a:t>
             </a:r>
           </a:p>
         </p:txBody>
@@ -9273,7 +8588,7 @@
 </p:sld>
 </file>
 
-<file path=ppt/slides/slide37.xml><?xml version="1.0" encoding="utf-8"?>
+<file path=ppt/slides/slide36.xml><?xml version="1.0" encoding="utf-8"?>
 <p:sld xmlns:a="http://schemas.openxmlformats.org/drawingml/2006/main" xmlns:p="http://schemas.openxmlformats.org/presentationml/2006/main" xmlns:r="http://schemas.openxmlformats.org/officeDocument/2006/relationships">
   <p:cSld>
     <p:spTree>
@@ -9340,8 +8655,8 @@
         </p:nvSpPr>
         <p:spPr>
           <a:xfrm>
-            <a:off x="429280" y="2489917"/>
-            <a:ext cx="11310884" cy="1488440"/>
+            <a:off x="429280" y="1592290"/>
+            <a:ext cx="5472562" cy="4181322"/>
           </a:xfrm>
           <a:prstGeom prst="rect">
             <a:avLst/>
@@ -9358,7 +8673,7 @@
               <a:spcAft>
                 <a:spcPts val="300"/>
               </a:spcAft>
-              <a:defRPr sz="2800">
+              <a:defRPr sz="1600">
                 <a:solidFill>
                   <a:srgbClr val="FFFFFF"/>
                 </a:solidFill>
@@ -9368,7 +8683,7 @@
               </a:defRPr>
             </a:pPr>
             <a:r>
-              <a:rPr sz="2800">
+              <a:rPr sz="1600">
                 <a:solidFill>
                   <a:srgbClr val="FFFFFF"/>
                 </a:solidFill>
@@ -9376,7 +8691,7 @@
                 <a:ea typeface="Play"/>
                 <a:cs typeface="Play"/>
               </a:rPr>
-              <a:t>• 6 недель на 2 командах, 68 презентаций</a:t>
+              <a:t>• 6 недель, 2 команды, 68 презентаций</a:t>
             </a:r>
           </a:p>
           <a:p>
@@ -9384,7 +8699,7 @@
               <a:spcAft>
                 <a:spcPts val="300"/>
               </a:spcAft>
-              <a:defRPr sz="2800">
+              <a:defRPr sz="1600">
                 <a:solidFill>
                   <a:srgbClr val="FFFFFF"/>
                 </a:solidFill>
@@ -9394,7 +8709,7 @@
               </a:defRPr>
             </a:pPr>
             <a:r>
-              <a:rPr sz="2800">
+              <a:rPr sz="1600">
                 <a:solidFill>
                   <a:srgbClr val="FFFFFF"/>
                 </a:solidFill>
@@ -9402,7 +8717,7 @@
                 <a:ea typeface="Play"/>
                 <a:cs typeface="Play"/>
               </a:rPr>
-              <a:t>• План колоды из 12 слайдов</a:t>
+              <a:t>• Время сборки 4 мин, 38 запросов закрыто</a:t>
             </a:r>
           </a:p>
           <a:p>
@@ -9410,7 +8725,7 @@
               <a:spcAft>
                 <a:spcPts val="300"/>
               </a:spcAft>
-              <a:defRPr sz="2800">
+              <a:defRPr sz="1600">
                 <a:solidFill>
                   <a:srgbClr val="FFFFFF"/>
                 </a:solidFill>
@@ -9420,7 +8735,7 @@
               </a:defRPr>
             </a:pPr>
             <a:r>
-              <a:rPr sz="2800">
+              <a:rPr sz="1600">
                 <a:solidFill>
                   <a:srgbClr val="FFFFFF"/>
                 </a:solidFill>
@@ -9428,225 +8743,438 @@
                 <a:ea typeface="Play"/>
                 <a:cs typeface="Play"/>
               </a:rPr>
-              <a:t>• Автоматический аудит</a:t>
+              <a:t>• Нарушений – 2 из 68</a:t>
             </a:r>
           </a:p>
         </p:txBody>
       </p:sp>
-    </p:spTree>
-  </p:cSld>
-  <p:clrMapOvr>
-    <a:masterClrMapping/>
-  </p:clrMapOvr>
-</p:sld>
-</file>
-
-<file path=ppt/slides/slide38.xml><?xml version="1.0" encoding="utf-8"?>
-<p:sld xmlns:a="http://schemas.openxmlformats.org/drawingml/2006/main" xmlns:p="http://schemas.openxmlformats.org/presentationml/2006/main" xmlns:r="http://schemas.openxmlformats.org/officeDocument/2006/relationships">
-  <p:cSld>
-    <p:spTree>
-      <p:nvGrpSpPr>
-        <p:cNvPr id="1" name=""/>
-        <p:cNvGrpSpPr/>
-        <p:nvPr/>
-      </p:nvGrpSpPr>
-      <p:grpSpPr/>
-      <p:sp>
-        <p:nvSpPr>
-          <p:cNvPr id="2" name="Rounded Rectangle 1"/>
-          <p:cNvSpPr/>
+      <p:graphicFrame>
+        <p:nvGraphicFramePr>
+          <p:cNvPr id="4" name="Table 3"/>
+          <p:cNvGraphicFramePr>
+            <a:graphicFrameLocks noGrp="1"/>
+          </p:cNvGraphicFramePr>
           <p:nvPr/>
-        </p:nvSpPr>
-        <p:spPr>
-          <a:xfrm>
-            <a:off x="302280" y="2164394"/>
-            <a:ext cx="11564884" cy="2901949"/>
-          </a:xfrm>
-          <a:prstGeom prst="roundRect">
-            <a:avLst/>
-          </a:prstGeom>
-          <a:solidFill>
-            <a:srgbClr val="111111">
-              <a:alpha val="85000"/>
-            </a:srgbClr>
-          </a:solidFill>
-          <a:ln>
-            <a:noFill/>
-          </a:ln>
-          <a:effectLst/>
-        </p:spPr>
-        <p:style>
-          <a:lnRef idx="1">
-            <a:schemeClr val="accent1"/>
-          </a:lnRef>
-          <a:fillRef idx="3">
-            <a:schemeClr val="accent1"/>
-          </a:fillRef>
-          <a:effectRef idx="2">
-            <a:schemeClr val="accent1"/>
-          </a:effectRef>
-          <a:fontRef idx="minor">
-            <a:schemeClr val="lt1"/>
-          </a:fontRef>
-        </p:style>
-        <p:txBody>
-          <a:bodyPr rtlCol="0" anchor="ctr"/>
-          <a:lstStyle/>
-          <a:p>
-            <a:pPr algn="ctr"/>
-          </a:p>
-        </p:txBody>
-      </p:sp>
-      <p:sp>
-        <p:nvSpPr>
-          <p:cNvPr id="3" name="title"/>
-          <p:cNvSpPr txBox="1"/>
-          <p:nvPr/>
-        </p:nvSpPr>
-        <p:spPr>
-          <a:xfrm>
-            <a:off x="429280" y="2291394"/>
-            <a:ext cx="7827385" cy="919480"/>
-          </a:xfrm>
-          <a:prstGeom prst="rect">
-            <a:avLst/>
-          </a:prstGeom>
-          <a:noFill/>
-        </p:spPr>
-        <p:txBody>
-          <a:bodyPr wrap="square" lIns="76200" rIns="76200" tIns="50800" bIns="50800">
-            <a:spAutoFit/>
-          </a:bodyPr>
-          <a:lstStyle/>
-          <a:p>
-            <a:pPr algn="l">
-              <a:spcAft>
-                <a:spcPts val="300"/>
-              </a:spcAft>
-              <a:defRPr sz="4800">
-                <a:solidFill>
-                  <a:srgbClr val="FFFFFF"/>
-                </a:solidFill>
-                <a:latin typeface="Play"/>
-                <a:ea typeface="Play"/>
-                <a:cs typeface="Play"/>
-              </a:defRPr>
-            </a:pPr>
-            <a:r>
-              <a:rPr sz="4800">
-                <a:solidFill>
-                  <a:srgbClr val="FFFFFF"/>
-                </a:solidFill>
-                <a:latin typeface="Play"/>
-                <a:ea typeface="Play"/>
-                <a:cs typeface="Play"/>
-              </a:rPr>
-              <a:t>Что мы просим решить</a:t>
-            </a:r>
-          </a:p>
-        </p:txBody>
-      </p:sp>
-      <p:sp>
-        <p:nvSpPr>
-          <p:cNvPr id="4" name="body"/>
-          <p:cNvSpPr txBox="1"/>
-          <p:nvPr/>
-        </p:nvSpPr>
-        <p:spPr>
-          <a:xfrm>
-            <a:off x="429280" y="3450904"/>
-            <a:ext cx="11310884" cy="2446975"/>
-          </a:xfrm>
-          <a:prstGeom prst="rect">
-            <a:avLst/>
-          </a:prstGeom>
-          <a:noFill/>
-        </p:spPr>
-        <p:txBody>
-          <a:bodyPr wrap="square" lIns="76200" rIns="76200" tIns="50800" bIns="50800">
-            <a:spAutoFit/>
-          </a:bodyPr>
-          <a:lstStyle/>
-          <a:p>
-            <a:pPr algn="l">
-              <a:spcAft>
-                <a:spcPts val="300"/>
-              </a:spcAft>
-              <a:defRPr sz="2800" b="1">
-                <a:solidFill>
-                  <a:srgbClr val="FFFFFF"/>
-                </a:solidFill>
-                <a:latin typeface="Play"/>
-                <a:ea typeface="Play"/>
-                <a:cs typeface="Play"/>
-              </a:defRPr>
-            </a:pPr>
-            <a:r>
-              <a:rPr sz="2800" b="1">
-                <a:solidFill>
-                  <a:srgbClr val="FFFFFF"/>
-                </a:solidFill>
-                <a:latin typeface="Play"/>
-                <a:ea typeface="Play"/>
-                <a:cs typeface="Play"/>
-              </a:rPr>
-              <a:t>• Одобрить запуск сервиса на всю компанию</a:t>
-            </a:r>
-          </a:p>
-          <a:p>
-            <a:pPr algn="l">
-              <a:spcAft>
-                <a:spcPts val="300"/>
-              </a:spcAft>
-              <a:defRPr sz="2800" b="1">
-                <a:solidFill>
-                  <a:srgbClr val="FFFFFF"/>
-                </a:solidFill>
-                <a:latin typeface="Play"/>
-                <a:ea typeface="Play"/>
-                <a:cs typeface="Play"/>
-              </a:defRPr>
-            </a:pPr>
-            <a:r>
-              <a:rPr sz="2800" b="1">
-                <a:solidFill>
-                  <a:srgbClr val="FFFFFF"/>
-                </a:solidFill>
-                <a:latin typeface="Play"/>
-                <a:ea typeface="Play"/>
-                <a:cs typeface="Play"/>
-              </a:rPr>
-              <a:t>• Предоставить ресурсы для масштабирования</a:t>
-            </a:r>
-          </a:p>
-          <a:p>
-            <a:pPr algn="l">
-              <a:spcAft>
-                <a:spcPts val="300"/>
-              </a:spcAft>
-              <a:defRPr sz="2800" b="1">
-                <a:solidFill>
-                  <a:srgbClr val="FFFFFF"/>
-                </a:solidFill>
-                <a:latin typeface="Play"/>
-                <a:ea typeface="Play"/>
-                <a:cs typeface="Play"/>
-              </a:defRPr>
-            </a:pPr>
-            <a:r>
-              <a:rPr sz="2800" b="1">
-                <a:solidFill>
-                  <a:srgbClr val="FFFFFF"/>
-                </a:solidFill>
-                <a:latin typeface="Play"/>
-                <a:ea typeface="Play"/>
-                <a:cs typeface="Play"/>
-              </a:rPr>
-              <a:t>• Поддержать интеграцию с хранилищем документов</a:t>
-            </a:r>
-          </a:p>
-        </p:txBody>
-      </p:sp>
+        </p:nvGraphicFramePr>
+        <p:xfrm>
+          <a:off x="6267602" y="1592290"/>
+          <a:ext cx="5472562" cy="4181322"/>
+        </p:xfrm>
+        <a:graphic>
+          <a:graphicData uri="http://schemas.openxmlformats.org/drawingml/2006/table">
+            <a:tbl>
+              <a:tblPr firstRow="1" bandRow="1">
+                <a:tableStyleId>{5C22544A-7EE6-4342-B048-85BDC9FD1C3A}</a:tableStyleId>
+              </a:tblPr>
+              <a:tblGrid>
+                <a:gridCol w="1824187"/>
+                <a:gridCol w="1824187"/>
+                <a:gridCol w="1824188"/>
+              </a:tblGrid>
+              <a:tr h="836264">
+                <a:tc>
+                  <a:txBody>
+                    <a:bodyPr/>
+                    <a:lstStyle/>
+                    <a:p>
+                      <a:pPr>
+                        <a:defRPr sz="1300" b="1">
+                          <a:solidFill>
+                            <a:srgbClr val="FFFFFF"/>
+                          </a:solidFill>
+                          <a:latin typeface="Play"/>
+                          <a:ea typeface="Play"/>
+                          <a:cs typeface="Play"/>
+                        </a:defRPr>
+                      </a:pPr>
+                      <a:r>
+                        <a:t>Метрика</a:t>
+                      </a:r>
+                    </a:p>
+                  </a:txBody>
+                  <a:tcPr>
+                    <a:solidFill>
+                      <a:srgbClr val="0077FF"/>
+                    </a:solidFill>
+                  </a:tcPr>
+                </a:tc>
+                <a:tc>
+                  <a:txBody>
+                    <a:bodyPr/>
+                    <a:lstStyle/>
+                    <a:p>
+                      <a:pPr>
+                        <a:defRPr sz="1300" b="1">
+                          <a:solidFill>
+                            <a:srgbClr val="FFFFFF"/>
+                          </a:solidFill>
+                          <a:latin typeface="Play"/>
+                          <a:ea typeface="Play"/>
+                          <a:cs typeface="Play"/>
+                        </a:defRPr>
+                      </a:pPr>
+                      <a:r>
+                        <a:t>Ручной</a:t>
+                      </a:r>
+                    </a:p>
+                  </a:txBody>
+                  <a:tcPr>
+                    <a:solidFill>
+                      <a:srgbClr val="0077FF"/>
+                    </a:solidFill>
+                  </a:tcPr>
+                </a:tc>
+                <a:tc>
+                  <a:txBody>
+                    <a:bodyPr/>
+                    <a:lstStyle/>
+                    <a:p>
+                      <a:pPr>
+                        <a:defRPr sz="1300" b="1">
+                          <a:solidFill>
+                            <a:srgbClr val="FFFFFF"/>
+                          </a:solidFill>
+                          <a:latin typeface="Play"/>
+                          <a:ea typeface="Play"/>
+                          <a:cs typeface="Play"/>
+                        </a:defRPr>
+                      </a:pPr>
+                      <a:r>
+                        <a:t>Пилот</a:t>
+                      </a:r>
+                    </a:p>
+                  </a:txBody>
+                  <a:tcPr>
+                    <a:solidFill>
+                      <a:srgbClr val="0077FF"/>
+                    </a:solidFill>
+                  </a:tcPr>
+                </a:tc>
+              </a:tr>
+              <a:tr h="836264">
+                <a:tc>
+                  <a:txBody>
+                    <a:bodyPr/>
+                    <a:lstStyle/>
+                    <a:p>
+                      <a:pPr>
+                        <a:defRPr sz="1300" b="0">
+                          <a:solidFill>
+                            <a:srgbClr val="FFFFFF"/>
+                          </a:solidFill>
+                          <a:latin typeface="Play"/>
+                          <a:ea typeface="Play"/>
+                          <a:cs typeface="Play"/>
+                        </a:defRPr>
+                      </a:pPr>
+                      <a:r>
+                        <a:t>Кол-во презентаций</a:t>
+                      </a:r>
+                    </a:p>
+                  </a:txBody>
+                  <a:tcPr>
+                    <a:solidFill>
+                      <a:srgbClr val="111111"/>
+                    </a:solidFill>
+                  </a:tcPr>
+                </a:tc>
+                <a:tc>
+                  <a:txBody>
+                    <a:bodyPr/>
+                    <a:lstStyle/>
+                    <a:p>
+                      <a:pPr>
+                        <a:defRPr sz="1300" b="0">
+                          <a:solidFill>
+                            <a:srgbClr val="FFFFFF"/>
+                          </a:solidFill>
+                          <a:latin typeface="Play"/>
+                          <a:ea typeface="Play"/>
+                          <a:cs typeface="Play"/>
+                        </a:defRPr>
+                      </a:pPr>
+                      <a:r>
+                        <a:t>42</a:t>
+                      </a:r>
+                    </a:p>
+                  </a:txBody>
+                  <a:tcPr>
+                    <a:solidFill>
+                      <a:srgbClr val="111111"/>
+                    </a:solidFill>
+                  </a:tcPr>
+                </a:tc>
+                <a:tc>
+                  <a:txBody>
+                    <a:bodyPr/>
+                    <a:lstStyle/>
+                    <a:p>
+                      <a:pPr>
+                        <a:defRPr sz="1300" b="0">
+                          <a:solidFill>
+                            <a:srgbClr val="FFFFFF"/>
+                          </a:solidFill>
+                          <a:latin typeface="Play"/>
+                          <a:ea typeface="Play"/>
+                          <a:cs typeface="Play"/>
+                        </a:defRPr>
+                      </a:pPr>
+                      <a:r>
+                        <a:t>68</a:t>
+                      </a:r>
+                    </a:p>
+                  </a:txBody>
+                  <a:tcPr>
+                    <a:solidFill>
+                      <a:srgbClr val="111111"/>
+                    </a:solidFill>
+                  </a:tcPr>
+                </a:tc>
+              </a:tr>
+              <a:tr h="836264">
+                <a:tc>
+                  <a:txBody>
+                    <a:bodyPr/>
+                    <a:lstStyle/>
+                    <a:p>
+                      <a:pPr>
+                        <a:defRPr sz="1300" b="0">
+                          <a:solidFill>
+                            <a:srgbClr val="FFFFFF"/>
+                          </a:solidFill>
+                          <a:latin typeface="Play"/>
+                          <a:ea typeface="Play"/>
+                          <a:cs typeface="Play"/>
+                        </a:defRPr>
+                      </a:pPr>
+                      <a:r>
+                        <a:t>Время сборки (мин)</a:t>
+                      </a:r>
+                    </a:p>
+                  </a:txBody>
+                  <a:tcPr>
+                    <a:solidFill>
+                      <a:srgbClr val="111111"/>
+                    </a:solidFill>
+                  </a:tcPr>
+                </a:tc>
+                <a:tc>
+                  <a:txBody>
+                    <a:bodyPr/>
+                    <a:lstStyle/>
+                    <a:p>
+                      <a:pPr>
+                        <a:defRPr sz="1300" b="0">
+                          <a:solidFill>
+                            <a:srgbClr val="FFFFFF"/>
+                          </a:solidFill>
+                          <a:latin typeface="Play"/>
+                          <a:ea typeface="Play"/>
+                          <a:cs typeface="Play"/>
+                        </a:defRPr>
+                      </a:pPr>
+                      <a:r>
+                        <a:t>186</a:t>
+                      </a:r>
+                    </a:p>
+                  </a:txBody>
+                  <a:tcPr>
+                    <a:solidFill>
+                      <a:srgbClr val="111111"/>
+                    </a:solidFill>
+                  </a:tcPr>
+                </a:tc>
+                <a:tc>
+                  <a:txBody>
+                    <a:bodyPr/>
+                    <a:lstStyle/>
+                    <a:p>
+                      <a:pPr>
+                        <a:defRPr sz="1300" b="0">
+                          <a:solidFill>
+                            <a:srgbClr val="FFFFFF"/>
+                          </a:solidFill>
+                          <a:latin typeface="Play"/>
+                          <a:ea typeface="Play"/>
+                          <a:cs typeface="Play"/>
+                        </a:defRPr>
+                      </a:pPr>
+                      <a:r>
+                        <a:t>4</a:t>
+                      </a:r>
+                    </a:p>
+                  </a:txBody>
+                  <a:tcPr>
+                    <a:solidFill>
+                      <a:srgbClr val="111111"/>
+                    </a:solidFill>
+                  </a:tcPr>
+                </a:tc>
+              </a:tr>
+              <a:tr h="836264">
+                <a:tc>
+                  <a:txBody>
+                    <a:bodyPr/>
+                    <a:lstStyle/>
+                    <a:p>
+                      <a:pPr>
+                        <a:defRPr sz="1300" b="0">
+                          <a:solidFill>
+                            <a:srgbClr val="FFFFFF"/>
+                          </a:solidFill>
+                          <a:latin typeface="Play"/>
+                          <a:ea typeface="Play"/>
+                          <a:cs typeface="Play"/>
+                        </a:defRPr>
+                      </a:pPr>
+                      <a:r>
+                        <a:t>Запросы на вёрстку/нед</a:t>
+                      </a:r>
+                    </a:p>
+                  </a:txBody>
+                  <a:tcPr>
+                    <a:solidFill>
+                      <a:srgbClr val="111111"/>
+                    </a:solidFill>
+                  </a:tcPr>
+                </a:tc>
+                <a:tc>
+                  <a:txBody>
+                    <a:bodyPr/>
+                    <a:lstStyle/>
+                    <a:p>
+                      <a:pPr>
+                        <a:defRPr sz="1300" b="0">
+                          <a:solidFill>
+                            <a:srgbClr val="FFFFFF"/>
+                          </a:solidFill>
+                          <a:latin typeface="Play"/>
+                          <a:ea typeface="Play"/>
+                          <a:cs typeface="Play"/>
+                        </a:defRPr>
+                      </a:pPr>
+                      <a:r>
+                        <a:t>11</a:t>
+                      </a:r>
+                    </a:p>
+                  </a:txBody>
+                  <a:tcPr>
+                    <a:solidFill>
+                      <a:srgbClr val="111111"/>
+                    </a:solidFill>
+                  </a:tcPr>
+                </a:tc>
+                <a:tc>
+                  <a:txBody>
+                    <a:bodyPr/>
+                    <a:lstStyle/>
+                    <a:p>
+                      <a:pPr>
+                        <a:defRPr sz="1300" b="0">
+                          <a:solidFill>
+                            <a:srgbClr val="FFFFFF"/>
+                          </a:solidFill>
+                          <a:latin typeface="Play"/>
+                          <a:ea typeface="Play"/>
+                          <a:cs typeface="Play"/>
+                        </a:defRPr>
+                      </a:pPr>
+                      <a:r>
+                        <a:t>38</a:t>
+                      </a:r>
+                    </a:p>
+                  </a:txBody>
+                  <a:tcPr>
+                    <a:solidFill>
+                      <a:srgbClr val="111111"/>
+                    </a:solidFill>
+                  </a:tcPr>
+                </a:tc>
+              </a:tr>
+              <a:tr h="836266">
+                <a:tc>
+                  <a:txBody>
+                    <a:bodyPr/>
+                    <a:lstStyle/>
+                    <a:p>
+                      <a:pPr>
+                        <a:defRPr sz="1300" b="0">
+                          <a:solidFill>
+                            <a:srgbClr val="FFFFFF"/>
+                          </a:solidFill>
+                          <a:latin typeface="Play"/>
+                          <a:ea typeface="Play"/>
+                          <a:cs typeface="Play"/>
+                        </a:defRPr>
+                      </a:pPr>
+                      <a:r>
+                        <a:t>Нарушения стиля</a:t>
+                      </a:r>
+                    </a:p>
+                  </a:txBody>
+                  <a:tcPr>
+                    <a:solidFill>
+                      <a:srgbClr val="111111"/>
+                    </a:solidFill>
+                  </a:tcPr>
+                </a:tc>
+                <a:tc>
+                  <a:txBody>
+                    <a:bodyPr/>
+                    <a:lstStyle/>
+                    <a:p>
+                      <a:pPr>
+                        <a:defRPr sz="1300" b="0">
+                          <a:solidFill>
+                            <a:srgbClr val="FFFFFF"/>
+                          </a:solidFill>
+                          <a:latin typeface="Play"/>
+                          <a:ea typeface="Play"/>
+                          <a:cs typeface="Play"/>
+                        </a:defRPr>
+                      </a:pPr>
+                      <a:r>
+                        <a:t>19</a:t>
+                      </a:r>
+                    </a:p>
+                  </a:txBody>
+                  <a:tcPr>
+                    <a:solidFill>
+                      <a:srgbClr val="111111"/>
+                    </a:solidFill>
+                  </a:tcPr>
+                </a:tc>
+                <a:tc>
+                  <a:txBody>
+                    <a:bodyPr/>
+                    <a:lstStyle/>
+                    <a:p>
+                      <a:pPr>
+                        <a:defRPr sz="1300" b="0">
+                          <a:solidFill>
+                            <a:srgbClr val="FFFFFF"/>
+                          </a:solidFill>
+                          <a:latin typeface="Play"/>
+                          <a:ea typeface="Play"/>
+                          <a:cs typeface="Play"/>
+                        </a:defRPr>
+                      </a:pPr>
+                      <a:r>
+                        <a:t>2</a:t>
+                      </a:r>
+                    </a:p>
+                  </a:txBody>
+                  <a:tcPr>
+                    <a:solidFill>
+                      <a:srgbClr val="111111"/>
+                    </a:solidFill>
+                  </a:tcPr>
+                </a:tc>
+              </a:tr>
+            </a:tbl>
+          </a:graphicData>
+        </a:graphic>
+      </p:graphicFrame>
     </p:spTree>
   </p:cSld>
   <p:clrMapOvr>

--- a/samples/VK_WorkSpace_Клиентская_конференция_Шабл__split.pptx
+++ b/samples/VK_WorkSpace_Клиентская_конференция_Шабл__split.pptx
@@ -15,6 +15,9 @@
     <p:sldId id="289" r:id="rId42"/>
     <p:sldId id="290" r:id="rId43"/>
     <p:sldId id="291" r:id="rId44"/>
+    <p:sldId id="292" r:id="rId45"/>
+    <p:sldId id="293" r:id="rId46"/>
+    <p:sldId id="294" r:id="rId47"/>
   </p:sldIdLst>
   <p:sldSz cy="6858000" cx="12192000"/>
   <p:notesSz cx="6858000" cy="9144000"/>
@@ -281,567 +284,6 @@
     </p:ext>
   </p:extLst>
 </p:presentation>
-</file>
-
-<file path=ppt/charts/chart1.xml><?xml version="1.0" encoding="utf-8"?>
-<c:chartSpace xmlns:c="http://schemas.openxmlformats.org/drawingml/2006/chart" xmlns:a="http://schemas.openxmlformats.org/drawingml/2006/main" xmlns:r="http://schemas.openxmlformats.org/officeDocument/2006/relationships">
-  <c:date1904 val="0"/>
-  <c:chart>
-    <c:autoTitleDeleted val="1"/>
-    <c:plotArea>
-      <c:barChart>
-        <c:barDir val="col"/>
-        <c:grouping val="clustered"/>
-        <c:ser>
-          <c:idx val="0"/>
-          <c:order val="0"/>
-          <c:tx>
-            <c:strRef>
-              <c:f>Sheet1!$B$1</c:f>
-              <c:strCache>
-                <c:ptCount val="1"/>
-                <c:pt idx="0">
-                  <c:v>Время (мин)</c:v>
-                </c:pt>
-              </c:strCache>
-            </c:strRef>
-          </c:tx>
-          <c:spPr>
-            <a:solidFill>
-              <a:srgbClr val="0077FF"/>
-            </a:solidFill>
-            <a:ln>
-              <a:solidFill>
-                <a:srgbClr val="0077FF"/>
-              </a:solidFill>
-            </a:ln>
-          </c:spPr>
-          <c:cat>
-            <c:strRef>
-              <c:f>Sheet1!$A$2:$A$3</c:f>
-              <c:strCache>
-                <c:ptCount val="2"/>
-                <c:pt idx="0">
-                  <c:v>Ручной</c:v>
-                </c:pt>
-                <c:pt idx="1">
-                  <c:v>Автоматический</c:v>
-                </c:pt>
-              </c:strCache>
-            </c:strRef>
-          </c:cat>
-          <c:val>
-            <c:numRef>
-              <c:f>Sheet1!$B$2:$B$3</c:f>
-              <c:numCache>
-                <c:formatCode>General</c:formatCode>
-                <c:ptCount val="2"/>
-                <c:pt idx="0">
-                  <c:v>186.0</c:v>
-                </c:pt>
-                <c:pt idx="1">
-                  <c:v>4.0</c:v>
-                </c:pt>
-              </c:numCache>
-            </c:numRef>
-          </c:val>
-        </c:ser>
-        <c:gapWidth val="60"/>
-        <c:axId val="-2068027336"/>
-        <c:axId val="-2113994440"/>
-      </c:barChart>
-      <c:catAx>
-        <c:axId val="-2068027336"/>
-        <c:scaling>
-          <c:orientation val="minMax"/>
-        </c:scaling>
-        <c:delete val="0"/>
-        <c:axPos val="b"/>
-        <c:majorTickMark val="out"/>
-        <c:minorTickMark val="none"/>
-        <c:tickLblPos val="nextTo"/>
-        <c:txPr>
-          <a:bodyPr/>
-          <a:lstStyle/>
-          <a:p>
-            <a:pPr>
-              <a:defRPr sz="1100" b="0">
-                <a:solidFill>
-                  <a:srgbClr val="FFFFFF"/>
-                </a:solidFill>
-                <a:latin typeface="Play"/>
-                <a:ea typeface="Play"/>
-                <a:cs typeface="Play"/>
-              </a:defRPr>
-            </a:pPr>
-          </a:p>
-        </c:txPr>
-        <c:crossAx val="-2113994440"/>
-        <c:crosses val="autoZero"/>
-        <c:auto val="1"/>
-        <c:lblAlgn val="ctr"/>
-        <c:lblOffset val="100"/>
-        <c:noMultiLvlLbl val="0"/>
-      </c:catAx>
-      <c:valAx>
-        <c:axId val="-2113994440"/>
-        <c:scaling/>
-        <c:delete val="0"/>
-        <c:axPos val="l"/>
-        <c:majorGridlines>
-          <c:spPr>
-            <a:ln w="9525">
-              <a:solidFill>
-                <a:srgbClr val="3C3C3C"/>
-              </a:solidFill>
-            </a:ln>
-          </c:spPr>
-        </c:majorGridlines>
-        <c:title>
-          <c:tx>
-            <c:rich>
-              <a:bodyPr/>
-              <a:lstStyle/>
-              <a:p>
-                <a:pPr>
-                  <a:defRPr sz="1100" b="0">
-                    <a:solidFill>
-                      <a:srgbClr val="FFFFFF"/>
-                    </a:solidFill>
-                    <a:latin typeface="Play"/>
-                    <a:ea typeface="Play"/>
-                    <a:cs typeface="Play"/>
-                  </a:defRPr>
-                </a:pPr>
-                <a:r>
-                  <a:t>мин</a:t>
-                </a:r>
-              </a:p>
-            </c:rich>
-          </c:tx>
-          <c:layout/>
-          <c:overlay val="0"/>
-        </c:title>
-        <c:majorTickMark val="out"/>
-        <c:minorTickMark val="none"/>
-        <c:tickLblPos val="nextTo"/>
-        <c:txPr>
-          <a:bodyPr/>
-          <a:lstStyle/>
-          <a:p>
-            <a:pPr>
-              <a:defRPr sz="1100" b="0">
-                <a:solidFill>
-                  <a:srgbClr val="FFFFFF"/>
-                </a:solidFill>
-                <a:latin typeface="Play"/>
-                <a:ea typeface="Play"/>
-                <a:cs typeface="Play"/>
-              </a:defRPr>
-            </a:pPr>
-          </a:p>
-        </c:txPr>
-        <c:crossAx val="-2068027336"/>
-        <c:crosses val="autoZero"/>
-      </c:valAx>
-    </c:plotArea>
-    <c:dispBlanksAs val="gap"/>
-  </c:chart>
-  <c:txPr>
-    <a:bodyPr/>
-    <a:lstStyle/>
-    <a:p>
-      <a:pPr>
-        <a:defRPr sz="1200" b="0">
-          <a:solidFill>
-            <a:srgbClr val="FFFFFF"/>
-          </a:solidFill>
-          <a:latin typeface="Play"/>
-          <a:ea typeface="Play"/>
-          <a:cs typeface="Play"/>
-        </a:defRPr>
-      </a:pPr>
-      <a:endParaRPr lang="en-US"/>
-    </a:p>
-  </c:txPr>
-  <c:externalData r:id="rId1">
-    <c:autoUpdate val="0"/>
-  </c:externalData>
-</c:chartSpace>
-</file>
-
-<file path=ppt/charts/chart2.xml><?xml version="1.0" encoding="utf-8"?>
-<c:chartSpace xmlns:c="http://schemas.openxmlformats.org/drawingml/2006/chart" xmlns:a="http://schemas.openxmlformats.org/drawingml/2006/main" xmlns:r="http://schemas.openxmlformats.org/officeDocument/2006/relationships">
-  <c:date1904 val="0"/>
-  <c:chart>
-    <c:autoTitleDeleted val="1"/>
-    <c:plotArea>
-      <c:barChart>
-        <c:barDir val="col"/>
-        <c:grouping val="clustered"/>
-        <c:ser>
-          <c:idx val="0"/>
-          <c:order val="0"/>
-          <c:tx>
-            <c:strRef>
-              <c:f>Sheet1!$B$1</c:f>
-              <c:strCache>
-                <c:ptCount val="1"/>
-                <c:pt idx="0">
-                  <c:v>Время (мин)</c:v>
-                </c:pt>
-              </c:strCache>
-            </c:strRef>
-          </c:tx>
-          <c:spPr>
-            <a:solidFill>
-              <a:srgbClr val="0077FF"/>
-            </a:solidFill>
-            <a:ln>
-              <a:solidFill>
-                <a:srgbClr val="0077FF"/>
-              </a:solidFill>
-            </a:ln>
-          </c:spPr>
-          <c:cat>
-            <c:strRef>
-              <c:f>Sheet1!$A$2:$A$3</c:f>
-              <c:strCache>
-                <c:ptCount val="2"/>
-                <c:pt idx="0">
-                  <c:v>Ручной</c:v>
-                </c:pt>
-                <c:pt idx="1">
-                  <c:v>Автоматический</c:v>
-                </c:pt>
-              </c:strCache>
-            </c:strRef>
-          </c:cat>
-          <c:val>
-            <c:numRef>
-              <c:f>Sheet1!$B$2:$B$3</c:f>
-              <c:numCache>
-                <c:formatCode>General</c:formatCode>
-                <c:ptCount val="2"/>
-                <c:pt idx="0">
-                  <c:v>186.0</c:v>
-                </c:pt>
-                <c:pt idx="1">
-                  <c:v>4.0</c:v>
-                </c:pt>
-              </c:numCache>
-            </c:numRef>
-          </c:val>
-        </c:ser>
-        <c:gapWidth val="60"/>
-        <c:axId val="-2068027336"/>
-        <c:axId val="-2113994440"/>
-      </c:barChart>
-      <c:catAx>
-        <c:axId val="-2068027336"/>
-        <c:scaling>
-          <c:orientation val="minMax"/>
-        </c:scaling>
-        <c:delete val="0"/>
-        <c:axPos val="b"/>
-        <c:majorTickMark val="out"/>
-        <c:minorTickMark val="none"/>
-        <c:tickLblPos val="nextTo"/>
-        <c:txPr>
-          <a:bodyPr/>
-          <a:lstStyle/>
-          <a:p>
-            <a:pPr>
-              <a:defRPr sz="1100" b="0">
-                <a:solidFill>
-                  <a:srgbClr val="FFFFFF"/>
-                </a:solidFill>
-                <a:latin typeface="Play"/>
-                <a:ea typeface="Play"/>
-                <a:cs typeface="Play"/>
-              </a:defRPr>
-            </a:pPr>
-          </a:p>
-        </c:txPr>
-        <c:crossAx val="-2113994440"/>
-        <c:crosses val="autoZero"/>
-        <c:auto val="1"/>
-        <c:lblAlgn val="ctr"/>
-        <c:lblOffset val="100"/>
-        <c:noMultiLvlLbl val="0"/>
-      </c:catAx>
-      <c:valAx>
-        <c:axId val="-2113994440"/>
-        <c:scaling/>
-        <c:delete val="0"/>
-        <c:axPos val="l"/>
-        <c:majorGridlines>
-          <c:spPr>
-            <a:ln w="9525">
-              <a:solidFill>
-                <a:srgbClr val="3C3C3C"/>
-              </a:solidFill>
-            </a:ln>
-          </c:spPr>
-        </c:majorGridlines>
-        <c:title>
-          <c:tx>
-            <c:rich>
-              <a:bodyPr/>
-              <a:lstStyle/>
-              <a:p>
-                <a:pPr>
-                  <a:defRPr sz="1100" b="0">
-                    <a:solidFill>
-                      <a:srgbClr val="FFFFFF"/>
-                    </a:solidFill>
-                    <a:latin typeface="Play"/>
-                    <a:ea typeface="Play"/>
-                    <a:cs typeface="Play"/>
-                  </a:defRPr>
-                </a:pPr>
-                <a:r>
-                  <a:t>мин</a:t>
-                </a:r>
-              </a:p>
-            </c:rich>
-          </c:tx>
-          <c:layout/>
-          <c:overlay val="0"/>
-        </c:title>
-        <c:majorTickMark val="out"/>
-        <c:minorTickMark val="none"/>
-        <c:tickLblPos val="nextTo"/>
-        <c:txPr>
-          <a:bodyPr/>
-          <a:lstStyle/>
-          <a:p>
-            <a:pPr>
-              <a:defRPr sz="1100" b="0">
-                <a:solidFill>
-                  <a:srgbClr val="FFFFFF"/>
-                </a:solidFill>
-                <a:latin typeface="Play"/>
-                <a:ea typeface="Play"/>
-                <a:cs typeface="Play"/>
-              </a:defRPr>
-            </a:pPr>
-          </a:p>
-        </c:txPr>
-        <c:crossAx val="-2068027336"/>
-        <c:crosses val="autoZero"/>
-      </c:valAx>
-    </c:plotArea>
-    <c:dispBlanksAs val="gap"/>
-  </c:chart>
-  <c:txPr>
-    <a:bodyPr/>
-    <a:lstStyle/>
-    <a:p>
-      <a:pPr>
-        <a:defRPr sz="1200" b="0">
-          <a:solidFill>
-            <a:srgbClr val="FFFFFF"/>
-          </a:solidFill>
-          <a:latin typeface="Play"/>
-          <a:ea typeface="Play"/>
-          <a:cs typeface="Play"/>
-        </a:defRPr>
-      </a:pPr>
-      <a:endParaRPr lang="en-US"/>
-    </a:p>
-  </c:txPr>
-  <c:externalData r:id="rId1">
-    <c:autoUpdate val="0"/>
-  </c:externalData>
-</c:chartSpace>
-</file>
-
-<file path=ppt/charts/chart3.xml><?xml version="1.0" encoding="utf-8"?>
-<c:chartSpace xmlns:c="http://schemas.openxmlformats.org/drawingml/2006/chart" xmlns:a="http://schemas.openxmlformats.org/drawingml/2006/main" xmlns:r="http://schemas.openxmlformats.org/officeDocument/2006/relationships">
-  <c:date1904 val="0"/>
-  <c:chart>
-    <c:autoTitleDeleted val="1"/>
-    <c:plotArea>
-      <c:barChart>
-        <c:barDir val="col"/>
-        <c:grouping val="clustered"/>
-        <c:ser>
-          <c:idx val="0"/>
-          <c:order val="0"/>
-          <c:tx>
-            <c:strRef>
-              <c:f>Sheet1!$B$1</c:f>
-              <c:strCache>
-                <c:ptCount val="1"/>
-                <c:pt idx="0">
-                  <c:v>Нарушения (колоды)</c:v>
-                </c:pt>
-              </c:strCache>
-            </c:strRef>
-          </c:tx>
-          <c:spPr>
-            <a:solidFill>
-              <a:srgbClr val="0077FF"/>
-            </a:solidFill>
-            <a:ln>
-              <a:solidFill>
-                <a:srgbClr val="0077FF"/>
-              </a:solidFill>
-            </a:ln>
-          </c:spPr>
-          <c:cat>
-            <c:strRef>
-              <c:f>Sheet1!$A$2:$A$3</c:f>
-              <c:strCache>
-                <c:ptCount val="2"/>
-                <c:pt idx="0">
-                  <c:v>Ручной</c:v>
-                </c:pt>
-                <c:pt idx="1">
-                  <c:v>Автоматический</c:v>
-                </c:pt>
-              </c:strCache>
-            </c:strRef>
-          </c:cat>
-          <c:val>
-            <c:numRef>
-              <c:f>Sheet1!$B$2:$B$3</c:f>
-              <c:numCache>
-                <c:formatCode>General</c:formatCode>
-                <c:ptCount val="2"/>
-                <c:pt idx="0">
-                  <c:v>19.0</c:v>
-                </c:pt>
-                <c:pt idx="1">
-                  <c:v>2.0</c:v>
-                </c:pt>
-              </c:numCache>
-            </c:numRef>
-          </c:val>
-        </c:ser>
-        <c:gapWidth val="60"/>
-        <c:axId val="-2068027336"/>
-        <c:axId val="-2113994440"/>
-      </c:barChart>
-      <c:catAx>
-        <c:axId val="-2068027336"/>
-        <c:scaling>
-          <c:orientation val="minMax"/>
-        </c:scaling>
-        <c:delete val="0"/>
-        <c:axPos val="b"/>
-        <c:majorTickMark val="out"/>
-        <c:minorTickMark val="none"/>
-        <c:tickLblPos val="nextTo"/>
-        <c:txPr>
-          <a:bodyPr/>
-          <a:lstStyle/>
-          <a:p>
-            <a:pPr>
-              <a:defRPr sz="1100" b="0">
-                <a:solidFill>
-                  <a:srgbClr val="FFFFFF"/>
-                </a:solidFill>
-                <a:latin typeface="Play"/>
-                <a:ea typeface="Play"/>
-                <a:cs typeface="Play"/>
-              </a:defRPr>
-            </a:pPr>
-          </a:p>
-        </c:txPr>
-        <c:crossAx val="-2113994440"/>
-        <c:crosses val="autoZero"/>
-        <c:auto val="1"/>
-        <c:lblAlgn val="ctr"/>
-        <c:lblOffset val="100"/>
-        <c:noMultiLvlLbl val="0"/>
-      </c:catAx>
-      <c:valAx>
-        <c:axId val="-2113994440"/>
-        <c:scaling/>
-        <c:delete val="0"/>
-        <c:axPos val="l"/>
-        <c:majorGridlines>
-          <c:spPr>
-            <a:ln w="9525">
-              <a:solidFill>
-                <a:srgbClr val="3C3C3C"/>
-              </a:solidFill>
-            </a:ln>
-          </c:spPr>
-        </c:majorGridlines>
-        <c:title>
-          <c:tx>
-            <c:rich>
-              <a:bodyPr/>
-              <a:lstStyle/>
-              <a:p>
-                <a:pPr>
-                  <a:defRPr sz="1100" b="0">
-                    <a:solidFill>
-                      <a:srgbClr val="FFFFFF"/>
-                    </a:solidFill>
-                    <a:latin typeface="Play"/>
-                    <a:ea typeface="Play"/>
-                    <a:cs typeface="Play"/>
-                  </a:defRPr>
-                </a:pPr>
-                <a:r>
-                  <a:t>колоды</a:t>
-                </a:r>
-              </a:p>
-            </c:rich>
-          </c:tx>
-          <c:layout/>
-          <c:overlay val="0"/>
-        </c:title>
-        <c:majorTickMark val="out"/>
-        <c:minorTickMark val="none"/>
-        <c:tickLblPos val="nextTo"/>
-        <c:txPr>
-          <a:bodyPr/>
-          <a:lstStyle/>
-          <a:p>
-            <a:pPr>
-              <a:defRPr sz="1100" b="0">
-                <a:solidFill>
-                  <a:srgbClr val="FFFFFF"/>
-                </a:solidFill>
-                <a:latin typeface="Play"/>
-                <a:ea typeface="Play"/>
-                <a:cs typeface="Play"/>
-              </a:defRPr>
-            </a:pPr>
-          </a:p>
-        </c:txPr>
-        <c:crossAx val="-2068027336"/>
-        <c:crosses val="autoZero"/>
-      </c:valAx>
-    </c:plotArea>
-    <c:dispBlanksAs val="gap"/>
-  </c:chart>
-  <c:txPr>
-    <a:bodyPr/>
-    <a:lstStyle/>
-    <a:p>
-      <a:pPr>
-        <a:defRPr sz="1200" b="0">
-          <a:solidFill>
-            <a:srgbClr val="FFFFFF"/>
-          </a:solidFill>
-          <a:latin typeface="Play"/>
-          <a:ea typeface="Play"/>
-          <a:cs typeface="Play"/>
-        </a:defRPr>
-      </a:pPr>
-      <a:endParaRPr lang="en-US"/>
-    </a:p>
-  </c:txPr>
-  <c:externalData r:id="rId1">
-    <c:autoUpdate val="0"/>
-  </c:externalData>
-</c:chartSpace>
 </file>
 
 <file path=ppt/notesMasters/notesMaster1.xml><?xml version="1.0" encoding="utf-8"?>
@@ -2409,6 +1851,204 @@
 </file>
 
 <file path=ppt/notesSlides/notesSlide36.xml><?xml version="1.0" encoding="utf-8"?>
+<p:notes xmlns:a="http://schemas.openxmlformats.org/drawingml/2006/main" xmlns:p="http://schemas.openxmlformats.org/presentationml/2006/main" xmlns:r="http://schemas.openxmlformats.org/officeDocument/2006/relationships">
+  <p:cSld>
+    <p:spTree>
+      <p:nvGrpSpPr>
+        <p:cNvPr id="1" name=""/>
+        <p:cNvGrpSpPr/>
+        <p:nvPr/>
+      </p:nvGrpSpPr>
+      <p:grpSpPr>
+        <a:xfrm>
+          <a:off x="0" y="0"/>
+          <a:ext cx="0" cy="0"/>
+          <a:chOff x="0" y="0"/>
+          <a:chExt cx="0" cy="0"/>
+        </a:xfrm>
+      </p:grpSpPr>
+      <p:sp>
+        <p:nvSpPr>
+          <p:cNvPr id="2" name="Slide Image Placeholder 1"/>
+          <p:cNvSpPr>
+            <a:spLocks noGrp="1"/>
+          </p:cNvSpPr>
+          <p:nvPr>
+            <p:ph type="sldImg" idx="3"/>
+          </p:nvPr>
+        </p:nvSpPr>
+        <p:spPr/>
+      </p:sp>
+      <p:sp>
+        <p:nvSpPr>
+          <p:cNvPr id="3" name="Notes Placeholder 2"/>
+          <p:cNvSpPr>
+            <a:spLocks noGrp="1"/>
+          </p:cNvSpPr>
+          <p:nvPr>
+            <p:ph type="body" idx="1"/>
+          </p:nvPr>
+        </p:nvSpPr>
+        <p:spPr/>
+        <p:txBody>
+          <a:bodyPr/>
+          <a:lstStyle/>
+          <a:p/>
+        </p:txBody>
+      </p:sp>
+      <p:sp>
+        <p:nvSpPr>
+          <p:cNvPr id="4" name="Slide Number Placeholder 3"/>
+          <p:cNvSpPr>
+            <a:spLocks noGrp="1"/>
+          </p:cNvSpPr>
+          <p:nvPr>
+            <p:ph type="sldNum" idx="12"/>
+          </p:nvPr>
+        </p:nvSpPr>
+        <p:spPr/>
+      </p:sp>
+    </p:spTree>
+  </p:cSld>
+  <p:clrMapOvr>
+    <a:masterClrMapping/>
+  </p:clrMapOvr>
+</p:notes>
+</file>
+
+<file path=ppt/notesSlides/notesSlide37.xml><?xml version="1.0" encoding="utf-8"?>
+<p:notes xmlns:a="http://schemas.openxmlformats.org/drawingml/2006/main" xmlns:p="http://schemas.openxmlformats.org/presentationml/2006/main" xmlns:r="http://schemas.openxmlformats.org/officeDocument/2006/relationships">
+  <p:cSld>
+    <p:spTree>
+      <p:nvGrpSpPr>
+        <p:cNvPr id="1" name=""/>
+        <p:cNvGrpSpPr/>
+        <p:nvPr/>
+      </p:nvGrpSpPr>
+      <p:grpSpPr>
+        <a:xfrm>
+          <a:off x="0" y="0"/>
+          <a:ext cx="0" cy="0"/>
+          <a:chOff x="0" y="0"/>
+          <a:chExt cx="0" cy="0"/>
+        </a:xfrm>
+      </p:grpSpPr>
+      <p:sp>
+        <p:nvSpPr>
+          <p:cNvPr id="2" name="Slide Image Placeholder 1"/>
+          <p:cNvSpPr>
+            <a:spLocks noGrp="1"/>
+          </p:cNvSpPr>
+          <p:nvPr>
+            <p:ph type="sldImg" idx="3"/>
+          </p:nvPr>
+        </p:nvSpPr>
+        <p:spPr/>
+      </p:sp>
+      <p:sp>
+        <p:nvSpPr>
+          <p:cNvPr id="3" name="Notes Placeholder 2"/>
+          <p:cNvSpPr>
+            <a:spLocks noGrp="1"/>
+          </p:cNvSpPr>
+          <p:nvPr>
+            <p:ph type="body" idx="1"/>
+          </p:nvPr>
+        </p:nvSpPr>
+        <p:spPr/>
+        <p:txBody>
+          <a:bodyPr/>
+          <a:lstStyle/>
+          <a:p/>
+        </p:txBody>
+      </p:sp>
+      <p:sp>
+        <p:nvSpPr>
+          <p:cNvPr id="4" name="Slide Number Placeholder 3"/>
+          <p:cNvSpPr>
+            <a:spLocks noGrp="1"/>
+          </p:cNvSpPr>
+          <p:nvPr>
+            <p:ph type="sldNum" idx="12"/>
+          </p:nvPr>
+        </p:nvSpPr>
+        <p:spPr/>
+      </p:sp>
+    </p:spTree>
+  </p:cSld>
+  <p:clrMapOvr>
+    <a:masterClrMapping/>
+  </p:clrMapOvr>
+</p:notes>
+</file>
+
+<file path=ppt/notesSlides/notesSlide38.xml><?xml version="1.0" encoding="utf-8"?>
+<p:notes xmlns:a="http://schemas.openxmlformats.org/drawingml/2006/main" xmlns:p="http://schemas.openxmlformats.org/presentationml/2006/main" xmlns:r="http://schemas.openxmlformats.org/officeDocument/2006/relationships">
+  <p:cSld>
+    <p:spTree>
+      <p:nvGrpSpPr>
+        <p:cNvPr id="1" name=""/>
+        <p:cNvGrpSpPr/>
+        <p:nvPr/>
+      </p:nvGrpSpPr>
+      <p:grpSpPr>
+        <a:xfrm>
+          <a:off x="0" y="0"/>
+          <a:ext cx="0" cy="0"/>
+          <a:chOff x="0" y="0"/>
+          <a:chExt cx="0" cy="0"/>
+        </a:xfrm>
+      </p:grpSpPr>
+      <p:sp>
+        <p:nvSpPr>
+          <p:cNvPr id="2" name="Slide Image Placeholder 1"/>
+          <p:cNvSpPr>
+            <a:spLocks noGrp="1"/>
+          </p:cNvSpPr>
+          <p:nvPr>
+            <p:ph type="sldImg" idx="3"/>
+          </p:nvPr>
+        </p:nvSpPr>
+        <p:spPr/>
+      </p:sp>
+      <p:sp>
+        <p:nvSpPr>
+          <p:cNvPr id="3" name="Notes Placeholder 2"/>
+          <p:cNvSpPr>
+            <a:spLocks noGrp="1"/>
+          </p:cNvSpPr>
+          <p:nvPr>
+            <p:ph type="body" idx="1"/>
+          </p:nvPr>
+        </p:nvSpPr>
+        <p:spPr/>
+        <p:txBody>
+          <a:bodyPr/>
+          <a:lstStyle/>
+          <a:p/>
+        </p:txBody>
+      </p:sp>
+      <p:sp>
+        <p:nvSpPr>
+          <p:cNvPr id="4" name="Slide Number Placeholder 3"/>
+          <p:cNvSpPr>
+            <a:spLocks noGrp="1"/>
+          </p:cNvSpPr>
+          <p:nvPr>
+            <p:ph type="sldNum" idx="12"/>
+          </p:nvPr>
+        </p:nvSpPr>
+        <p:spPr/>
+      </p:sp>
+    </p:spTree>
+  </p:cSld>
+  <p:clrMapOvr>
+    <a:masterClrMapping/>
+  </p:clrMapOvr>
+</p:notes>
+</file>
+
+<file path=ppt/notesSlides/notesSlide39.xml><?xml version="1.0" encoding="utf-8"?>
 <p:notes xmlns:a="http://schemas.openxmlformats.org/drawingml/2006/main" xmlns:p="http://schemas.openxmlformats.org/presentationml/2006/main" xmlns:r="http://schemas.openxmlformats.org/officeDocument/2006/relationships">
   <p:cSld>
     <p:spTree>
@@ -6751,7 +6391,7 @@
                 <a:ea typeface="Play"/>
                 <a:cs typeface="Play"/>
               </a:rPr>
-              <a:t>Защита инициативы: сервис автоматической вёрстки презентаций</a:t>
+              <a:t>Автоматическая вёрстка презентаций</a:t>
             </a:r>
           </a:p>
         </p:txBody>
@@ -6867,7 +6507,7 @@
                 <a:ea typeface="Play"/>
                 <a:cs typeface="Play"/>
               </a:rPr>
-              <a:t>• 12‑слайдная колода занимает 186 мин</a:t>
+              <a:t>• 42 колоды, 186 мин сборки</a:t>
             </a:r>
           </a:p>
           <a:p>
@@ -6893,7 +6533,7 @@
                 <a:ea typeface="Play"/>
                 <a:cs typeface="Play"/>
               </a:rPr>
-              <a:t>• 74 мин на правки после ревью</a:t>
+              <a:t>• 74 мин правок</a:t>
             </a:r>
           </a:p>
           <a:p>
@@ -6919,7 +6559,7 @@
                 <a:ea typeface="Play"/>
                 <a:cs typeface="Play"/>
               </a:rPr>
-              <a:t>• 19 из 42 колод нарушают фирменный стиль</a:t>
+              <a:t>• 19 нарушений фирменного стиля</a:t>
             </a:r>
           </a:p>
           <a:p>
@@ -6945,40 +6585,14 @@
                 <a:ea typeface="Play"/>
                 <a:cs typeface="Play"/>
               </a:rPr>
-              <a:t>• 4 чел. закрывают 11 запросов/нед</a:t>
-            </a:r>
-          </a:p>
-          <a:p>
-            <a:pPr algn="l">
-              <a:spcAft>
-                <a:spcPts val="300"/>
-              </a:spcAft>
-              <a:defRPr sz="1600">
-                <a:solidFill>
-                  <a:srgbClr val="FFFFFF"/>
-                </a:solidFill>
-                <a:latin typeface="Play"/>
-                <a:ea typeface="Play"/>
-                <a:cs typeface="Play"/>
-              </a:defRPr>
-            </a:pPr>
-            <a:r>
-              <a:rPr sz="1600">
-                <a:solidFill>
-                  <a:srgbClr val="FFFFFF"/>
-                </a:solidFill>
-                <a:latin typeface="Play"/>
-                <a:ea typeface="Play"/>
-                <a:cs typeface="Play"/>
-              </a:rPr>
-              <a:t>• Средний срок ожидания 6 рабочих дней</a:t>
+              <a:t>• 4 человека, 11 запросов/нед, 6 дней ожидания</a:t>
             </a:r>
           </a:p>
         </p:txBody>
       </p:sp>
       <p:graphicFrame>
         <p:nvGraphicFramePr>
-          <p:cNvPr id="4" name="Chart 3"/>
+          <p:cNvPr id="4" name="Table 3"/>
           <p:cNvGraphicFramePr>
             <a:graphicFrameLocks noGrp="1"/>
           </p:cNvGraphicFramePr>
@@ -6989,8 +6603,340 @@
           <a:ext cx="5472562" cy="4181322"/>
         </p:xfrm>
         <a:graphic>
-          <a:graphicData uri="http://schemas.openxmlformats.org/drawingml/2006/chart">
-            <c:chart xmlns:c="http://schemas.openxmlformats.org/drawingml/2006/chart" r:id="rId2"/>
+          <a:graphicData uri="http://schemas.openxmlformats.org/drawingml/2006/table">
+            <a:tbl>
+              <a:tblPr firstRow="1" bandRow="1">
+                <a:tableStyleId>{5C22544A-7EE6-4342-B048-85BDC9FD1C3A}</a:tableStyleId>
+              </a:tblPr>
+              <a:tblGrid>
+                <a:gridCol w="2736281"/>
+                <a:gridCol w="2736281"/>
+              </a:tblGrid>
+              <a:tr h="696887">
+                <a:tc>
+                  <a:txBody>
+                    <a:bodyPr/>
+                    <a:lstStyle/>
+                    <a:p>
+                      <a:pPr>
+                        <a:defRPr sz="1300" b="1">
+                          <a:solidFill>
+                            <a:srgbClr val="FFFFFF"/>
+                          </a:solidFill>
+                          <a:latin typeface="Play"/>
+                          <a:ea typeface="Play"/>
+                          <a:cs typeface="Play"/>
+                        </a:defRPr>
+                      </a:pPr>
+                      <a:r>
+                        <a:t>Показатель</a:t>
+                      </a:r>
+                    </a:p>
+                  </a:txBody>
+                  <a:tcPr>
+                    <a:solidFill>
+                      <a:srgbClr val="0077FF"/>
+                    </a:solidFill>
+                  </a:tcPr>
+                </a:tc>
+                <a:tc>
+                  <a:txBody>
+                    <a:bodyPr/>
+                    <a:lstStyle/>
+                    <a:p>
+                      <a:pPr>
+                        <a:defRPr sz="1300" b="1">
+                          <a:solidFill>
+                            <a:srgbClr val="FFFFFF"/>
+                          </a:solidFill>
+                          <a:latin typeface="Play"/>
+                          <a:ea typeface="Play"/>
+                          <a:cs typeface="Play"/>
+                        </a:defRPr>
+                      </a:pPr>
+                      <a:r>
+                        <a:t>Значение</a:t>
+                      </a:r>
+                    </a:p>
+                  </a:txBody>
+                  <a:tcPr>
+                    <a:solidFill>
+                      <a:srgbClr val="0077FF"/>
+                    </a:solidFill>
+                  </a:tcPr>
+                </a:tc>
+              </a:tr>
+              <a:tr h="696887">
+                <a:tc>
+                  <a:txBody>
+                    <a:bodyPr/>
+                    <a:lstStyle/>
+                    <a:p>
+                      <a:pPr>
+                        <a:defRPr sz="1300" b="0">
+                          <a:solidFill>
+                            <a:srgbClr val="FFFFFF"/>
+                          </a:solidFill>
+                          <a:latin typeface="Play"/>
+                          <a:ea typeface="Play"/>
+                          <a:cs typeface="Play"/>
+                        </a:defRPr>
+                      </a:pPr>
+                      <a:r>
+                        <a:t>Сборка</a:t>
+                      </a:r>
+                    </a:p>
+                  </a:txBody>
+                  <a:tcPr>
+                    <a:solidFill>
+                      <a:srgbClr val="111111"/>
+                    </a:solidFill>
+                  </a:tcPr>
+                </a:tc>
+                <a:tc>
+                  <a:txBody>
+                    <a:bodyPr/>
+                    <a:lstStyle/>
+                    <a:p>
+                      <a:pPr>
+                        <a:defRPr sz="1300" b="0">
+                          <a:solidFill>
+                            <a:srgbClr val="FFFFFF"/>
+                          </a:solidFill>
+                          <a:latin typeface="Play"/>
+                          <a:ea typeface="Play"/>
+                          <a:cs typeface="Play"/>
+                        </a:defRPr>
+                      </a:pPr>
+                      <a:r>
+                        <a:t>186 мин</a:t>
+                      </a:r>
+                    </a:p>
+                  </a:txBody>
+                  <a:tcPr>
+                    <a:solidFill>
+                      <a:srgbClr val="111111"/>
+                    </a:solidFill>
+                  </a:tcPr>
+                </a:tc>
+              </a:tr>
+              <a:tr h="696887">
+                <a:tc>
+                  <a:txBody>
+                    <a:bodyPr/>
+                    <a:lstStyle/>
+                    <a:p>
+                      <a:pPr>
+                        <a:defRPr sz="1300" b="0">
+                          <a:solidFill>
+                            <a:srgbClr val="FFFFFF"/>
+                          </a:solidFill>
+                          <a:latin typeface="Play"/>
+                          <a:ea typeface="Play"/>
+                          <a:cs typeface="Play"/>
+                        </a:defRPr>
+                      </a:pPr>
+                      <a:r>
+                        <a:t>Правки</a:t>
+                      </a:r>
+                    </a:p>
+                  </a:txBody>
+                  <a:tcPr>
+                    <a:solidFill>
+                      <a:srgbClr val="111111"/>
+                    </a:solidFill>
+                  </a:tcPr>
+                </a:tc>
+                <a:tc>
+                  <a:txBody>
+                    <a:bodyPr/>
+                    <a:lstStyle/>
+                    <a:p>
+                      <a:pPr>
+                        <a:defRPr sz="1300" b="0">
+                          <a:solidFill>
+                            <a:srgbClr val="FFFFFF"/>
+                          </a:solidFill>
+                          <a:latin typeface="Play"/>
+                          <a:ea typeface="Play"/>
+                          <a:cs typeface="Play"/>
+                        </a:defRPr>
+                      </a:pPr>
+                      <a:r>
+                        <a:t>74 мин</a:t>
+                      </a:r>
+                    </a:p>
+                  </a:txBody>
+                  <a:tcPr>
+                    <a:solidFill>
+                      <a:srgbClr val="111111"/>
+                    </a:solidFill>
+                  </a:tcPr>
+                </a:tc>
+              </a:tr>
+              <a:tr h="696887">
+                <a:tc>
+                  <a:txBody>
+                    <a:bodyPr/>
+                    <a:lstStyle/>
+                    <a:p>
+                      <a:pPr>
+                        <a:defRPr sz="1300" b="0">
+                          <a:solidFill>
+                            <a:srgbClr val="FFFFFF"/>
+                          </a:solidFill>
+                          <a:latin typeface="Play"/>
+                          <a:ea typeface="Play"/>
+                          <a:cs typeface="Play"/>
+                        </a:defRPr>
+                      </a:pPr>
+                      <a:r>
+                        <a:t>Нарушения</a:t>
+                      </a:r>
+                    </a:p>
+                  </a:txBody>
+                  <a:tcPr>
+                    <a:solidFill>
+                      <a:srgbClr val="111111"/>
+                    </a:solidFill>
+                  </a:tcPr>
+                </a:tc>
+                <a:tc>
+                  <a:txBody>
+                    <a:bodyPr/>
+                    <a:lstStyle/>
+                    <a:p>
+                      <a:pPr>
+                        <a:defRPr sz="1300" b="0">
+                          <a:solidFill>
+                            <a:srgbClr val="FFFFFF"/>
+                          </a:solidFill>
+                          <a:latin typeface="Play"/>
+                          <a:ea typeface="Play"/>
+                          <a:cs typeface="Play"/>
+                        </a:defRPr>
+                      </a:pPr>
+                      <a:r>
+                        <a:t>19 из 42</a:t>
+                      </a:r>
+                    </a:p>
+                  </a:txBody>
+                  <a:tcPr>
+                    <a:solidFill>
+                      <a:srgbClr val="111111"/>
+                    </a:solidFill>
+                  </a:tcPr>
+                </a:tc>
+              </a:tr>
+              <a:tr h="696887">
+                <a:tc>
+                  <a:txBody>
+                    <a:bodyPr/>
+                    <a:lstStyle/>
+                    <a:p>
+                      <a:pPr>
+                        <a:defRPr sz="1300" b="0">
+                          <a:solidFill>
+                            <a:srgbClr val="FFFFFF"/>
+                          </a:solidFill>
+                          <a:latin typeface="Play"/>
+                          <a:ea typeface="Play"/>
+                          <a:cs typeface="Play"/>
+                        </a:defRPr>
+                      </a:pPr>
+                      <a:r>
+                        <a:t>Запросы</a:t>
+                      </a:r>
+                    </a:p>
+                  </a:txBody>
+                  <a:tcPr>
+                    <a:solidFill>
+                      <a:srgbClr val="111111"/>
+                    </a:solidFill>
+                  </a:tcPr>
+                </a:tc>
+                <a:tc>
+                  <a:txBody>
+                    <a:bodyPr/>
+                    <a:lstStyle/>
+                    <a:p>
+                      <a:pPr>
+                        <a:defRPr sz="1300" b="0">
+                          <a:solidFill>
+                            <a:srgbClr val="FFFFFF"/>
+                          </a:solidFill>
+                          <a:latin typeface="Play"/>
+                          <a:ea typeface="Play"/>
+                          <a:cs typeface="Play"/>
+                        </a:defRPr>
+                      </a:pPr>
+                      <a:r>
+                        <a:t>11/нед</a:t>
+                      </a:r>
+                    </a:p>
+                  </a:txBody>
+                  <a:tcPr>
+                    <a:solidFill>
+                      <a:srgbClr val="111111"/>
+                    </a:solidFill>
+                  </a:tcPr>
+                </a:tc>
+              </a:tr>
+              <a:tr h="696887">
+                <a:tc>
+                  <a:txBody>
+                    <a:bodyPr/>
+                    <a:lstStyle/>
+                    <a:p>
+                      <a:pPr>
+                        <a:defRPr sz="1300" b="0">
+                          <a:solidFill>
+                            <a:srgbClr val="FFFFFF"/>
+                          </a:solidFill>
+                          <a:latin typeface="Play"/>
+                          <a:ea typeface="Play"/>
+                          <a:cs typeface="Play"/>
+                        </a:defRPr>
+                      </a:pPr>
+                      <a:r>
+                        <a:t>Ожидание</a:t>
+                      </a:r>
+                    </a:p>
+                  </a:txBody>
+                  <a:tcPr>
+                    <a:solidFill>
+                      <a:srgbClr val="111111"/>
+                    </a:solidFill>
+                  </a:tcPr>
+                </a:tc>
+                <a:tc>
+                  <a:txBody>
+                    <a:bodyPr/>
+                    <a:lstStyle/>
+                    <a:p>
+                      <a:pPr>
+                        <a:defRPr sz="1300" b="0">
+                          <a:solidFill>
+                            <a:srgbClr val="FFFFFF"/>
+                          </a:solidFill>
+                          <a:latin typeface="Play"/>
+                          <a:ea typeface="Play"/>
+                          <a:cs typeface="Play"/>
+                        </a:defRPr>
+                      </a:pPr>
+                      <a:r>
+                        <a:t>6 дней</a:t>
+                      </a:r>
+                    </a:p>
+                  </a:txBody>
+                  <a:tcPr>
+                    <a:solidFill>
+                      <a:srgbClr val="111111"/>
+                    </a:solidFill>
+                  </a:tcPr>
+                </a:tc>
+              </a:tr>
+            </a:tbl>
           </a:graphicData>
         </a:graphic>
       </p:graphicFrame>
@@ -7197,7 +7143,7 @@
               <a:spcAft>
                 <a:spcPts val="300"/>
               </a:spcAft>
-              <a:defRPr sz="1800">
+              <a:defRPr sz="1600">
                 <a:solidFill>
                   <a:srgbClr val="FFFFFF"/>
                 </a:solidFill>
@@ -7207,7 +7153,7 @@
               </a:defRPr>
             </a:pPr>
             <a:r>
-              <a:rPr sz="1800">
+              <a:rPr sz="1600">
                 <a:solidFill>
                   <a:srgbClr val="FFFFFF"/>
                 </a:solidFill>
@@ -7215,7 +7161,7 @@
                 <a:ea typeface="Play"/>
                 <a:cs typeface="Play"/>
               </a:rPr>
-              <a:t>• Сервис принимает pptx, документы, таблицы, заметки</a:t>
+              <a:t>• Сервис принимает pptx, материалы, применяет дизайн‑систему</a:t>
             </a:r>
           </a:p>
           <a:p>
@@ -7223,7 +7169,7 @@
               <a:spcAft>
                 <a:spcPts val="300"/>
               </a:spcAft>
-              <a:defRPr sz="1800">
+              <a:defRPr sz="1600">
                 <a:solidFill>
                   <a:srgbClr val="FFFFFF"/>
                 </a:solidFill>
@@ -7233,7 +7179,7 @@
               </a:defRPr>
             </a:pPr>
             <a:r>
-              <a:rPr sz="1800">
+              <a:rPr sz="1600">
                 <a:solidFill>
                   <a:srgbClr val="FFFFFF"/>
                 </a:solidFill>
@@ -7241,7 +7187,7 @@
                 <a:ea typeface="Play"/>
                 <a:cs typeface="Play"/>
               </a:rPr>
-              <a:t>• Автоматически строит дизайн‑систему и план колоды</a:t>
+              <a:t>• Экспорт в pptx, pdf, html, слайды редактируемы</a:t>
             </a:r>
           </a:p>
           <a:p>
@@ -7249,7 +7195,7 @@
               <a:spcAft>
                 <a:spcPts val="300"/>
               </a:spcAft>
-              <a:defRPr sz="1800">
+              <a:defRPr sz="1600">
                 <a:solidFill>
                   <a:srgbClr val="FFFFFF"/>
                 </a:solidFill>
@@ -7259,7 +7205,7 @@
               </a:defRPr>
             </a:pPr>
             <a:r>
-              <a:rPr sz="1800">
+              <a:rPr sz="1600">
                 <a:solidFill>
                   <a:srgbClr val="FFFFFF"/>
                 </a:solidFill>
@@ -7267,33 +7213,7 @@
                 <a:ea typeface="Play"/>
                 <a:cs typeface="Play"/>
               </a:rPr>
-              <a:t>• Экспорт в pptx, pdf, html с редактируемыми слайдами</a:t>
-            </a:r>
-          </a:p>
-          <a:p>
-            <a:pPr algn="l">
-              <a:spcAft>
-                <a:spcPts val="300"/>
-              </a:spcAft>
-              <a:defRPr sz="1800">
-                <a:solidFill>
-                  <a:srgbClr val="FFFFFF"/>
-                </a:solidFill>
-                <a:latin typeface="Play"/>
-                <a:ea typeface="Play"/>
-                <a:cs typeface="Play"/>
-              </a:defRPr>
-            </a:pPr>
-            <a:r>
-              <a:rPr sz="1800">
-                <a:solidFill>
-                  <a:srgbClr val="FFFFFF"/>
-                </a:solidFill>
-                <a:latin typeface="Play"/>
-                <a:ea typeface="Play"/>
-                <a:cs typeface="Play"/>
-              </a:rPr>
-              <a:t>• Аудит качества проверяет стиль и данные до выдачи</a:t>
+              <a:t>• Аудит качества устраняет нарушения стиля</a:t>
             </a:r>
           </a:p>
         </p:txBody>
@@ -7306,8 +7226,8 @@
         </p:nvSpPr>
         <p:spPr>
           <a:xfrm>
-            <a:off x="6266870" y="3617316"/>
-            <a:ext cx="857482" cy="531639"/>
+            <a:off x="6266870" y="1894342"/>
+            <a:ext cx="5473293" cy="703852"/>
           </a:xfrm>
           <a:prstGeom prst="homePlate">
             <a:avLst/>
@@ -7338,7 +7258,7 @@
           <a:lstStyle/>
           <a:p>
             <a:pPr algn="ctr">
-              <a:defRPr sz="600" b="0">
+              <a:defRPr sz="1400" b="0">
                 <a:solidFill>
                   <a:srgbClr val="FFFFFF"/>
                 </a:solidFill>
@@ -7348,7 +7268,7 @@
               </a:defRPr>
             </a:pPr>
             <a:r>
-              <a:rPr sz="600" b="0">
+              <a:rPr sz="1400" b="0">
                 <a:solidFill>
                   <a:srgbClr val="FFFFFF"/>
                 </a:solidFill>
@@ -7356,7 +7276,7 @@
                 <a:ea typeface="Play"/>
                 <a:cs typeface="Play"/>
               </a:rPr>
-              <a:t>Загрузка шаблона</a:t>
+              <a:t>Шаблон</a:t>
             </a:r>
           </a:p>
         </p:txBody>
@@ -7369,8 +7289,8 @@
         </p:nvSpPr>
         <p:spPr>
           <a:xfrm>
-            <a:off x="7190032" y="3617316"/>
-            <a:ext cx="857482" cy="531639"/>
+            <a:off x="6266870" y="2712775"/>
+            <a:ext cx="5473293" cy="703852"/>
           </a:xfrm>
           <a:prstGeom prst="chevron">
             <a:avLst/>
@@ -7401,7 +7321,7 @@
           <a:lstStyle/>
           <a:p>
             <a:pPr algn="ctr">
-              <a:defRPr sz="600" b="0">
+              <a:defRPr sz="1400" b="0">
                 <a:solidFill>
                   <a:srgbClr val="FFFFFF"/>
                 </a:solidFill>
@@ -7411,7 +7331,7 @@
               </a:defRPr>
             </a:pPr>
             <a:r>
-              <a:rPr sz="600" b="0">
+              <a:rPr sz="1400" b="0">
                 <a:solidFill>
                   <a:srgbClr val="FFFFFF"/>
                 </a:solidFill>
@@ -7419,7 +7339,7 @@
                 <a:ea typeface="Play"/>
                 <a:cs typeface="Play"/>
               </a:rPr>
-              <a:t>Разбор дизайн‑системы</a:t>
+              <a:t>План колоды</a:t>
             </a:r>
           </a:p>
         </p:txBody>
@@ -7432,8 +7352,8 @@
         </p:nvSpPr>
         <p:spPr>
           <a:xfrm>
-            <a:off x="8113194" y="3617316"/>
-            <a:ext cx="857482" cy="531639"/>
+            <a:off x="6266870" y="3531209"/>
+            <a:ext cx="5473293" cy="703852"/>
           </a:xfrm>
           <a:prstGeom prst="chevron">
             <a:avLst/>
@@ -7464,7 +7384,7 @@
           <a:lstStyle/>
           <a:p>
             <a:pPr algn="ctr">
-              <a:defRPr sz="600" b="0">
+              <a:defRPr sz="1400" b="0">
                 <a:solidFill>
                   <a:srgbClr val="FFFFFF"/>
                 </a:solidFill>
@@ -7474,7 +7394,7 @@
               </a:defRPr>
             </a:pPr>
             <a:r>
-              <a:rPr sz="600" b="0">
+              <a:rPr sz="1400" b="0">
                 <a:solidFill>
                   <a:srgbClr val="FFFFFF"/>
                 </a:solidFill>
@@ -7482,7 +7402,7 @@
                 <a:ea typeface="Play"/>
                 <a:cs typeface="Play"/>
               </a:rPr>
-              <a:t>Построение плана колоды</a:t>
+              <a:t>Вёрстка</a:t>
             </a:r>
           </a:p>
         </p:txBody>
@@ -7495,8 +7415,8 @@
         </p:nvSpPr>
         <p:spPr>
           <a:xfrm>
-            <a:off x="9036356" y="3617316"/>
-            <a:ext cx="857482" cy="531639"/>
+            <a:off x="6266870" y="4349643"/>
+            <a:ext cx="5473293" cy="703852"/>
           </a:xfrm>
           <a:prstGeom prst="chevron">
             <a:avLst/>
@@ -7527,7 +7447,7 @@
           <a:lstStyle/>
           <a:p>
             <a:pPr algn="ctr">
-              <a:defRPr sz="600" b="0">
+              <a:defRPr sz="1400" b="0">
                 <a:solidFill>
                   <a:srgbClr val="FFFFFF"/>
                 </a:solidFill>
@@ -7537,7 +7457,7 @@
               </a:defRPr>
             </a:pPr>
             <a:r>
-              <a:rPr sz="600" b="0">
+              <a:rPr sz="1400" b="0">
                 <a:solidFill>
                   <a:srgbClr val="FFFFFF"/>
                 </a:solidFill>
@@ -7545,7 +7465,7 @@
                 <a:ea typeface="Play"/>
                 <a:cs typeface="Play"/>
               </a:rPr>
-              <a:t>Авто‑верстка</a:t>
+              <a:t>Аудит</a:t>
             </a:r>
           </a:p>
         </p:txBody>
@@ -7558,8 +7478,8 @@
         </p:nvSpPr>
         <p:spPr>
           <a:xfrm>
-            <a:off x="9959518" y="3617316"/>
-            <a:ext cx="857482" cy="531639"/>
+            <a:off x="6266870" y="5168076"/>
+            <a:ext cx="5473293" cy="703852"/>
           </a:xfrm>
           <a:prstGeom prst="chevron">
             <a:avLst/>
@@ -7590,7 +7510,7 @@
           <a:lstStyle/>
           <a:p>
             <a:pPr algn="ctr">
-              <a:defRPr sz="600" b="0">
+              <a:defRPr sz="1400" b="0">
                 <a:solidFill>
                   <a:srgbClr val="FFFFFF"/>
                 </a:solidFill>
@@ -7600,7 +7520,7 @@
               </a:defRPr>
             </a:pPr>
             <a:r>
-              <a:rPr sz="600" b="0">
+              <a:rPr sz="1400" b="0">
                 <a:solidFill>
                   <a:srgbClr val="FFFFFF"/>
                 </a:solidFill>
@@ -7608,70 +7528,7 @@
                 <a:ea typeface="Play"/>
                 <a:cs typeface="Play"/>
               </a:rPr>
-              <a:t>Аудит качества</a:t>
-            </a:r>
-          </a:p>
-        </p:txBody>
-      </p:sp>
-      <p:sp>
-        <p:nvSpPr>
-          <p:cNvPr id="688" name="Chevron 687"/>
-          <p:cNvSpPr/>
-          <p:nvPr/>
-        </p:nvSpPr>
-        <p:spPr>
-          <a:xfrm>
-            <a:off x="10882680" y="3617316"/>
-            <a:ext cx="857482" cy="531639"/>
-          </a:xfrm>
-          <a:prstGeom prst="chevron">
-            <a:avLst/>
-          </a:prstGeom>
-          <a:solidFill>
-            <a:srgbClr val="0077FF"/>
-          </a:solidFill>
-          <a:ln>
-            <a:noFill/>
-          </a:ln>
-        </p:spPr>
-        <p:style>
-          <a:lnRef idx="1">
-            <a:schemeClr val="accent1"/>
-          </a:lnRef>
-          <a:fillRef idx="3">
-            <a:schemeClr val="accent1"/>
-          </a:fillRef>
-          <a:effectRef idx="2">
-            <a:schemeClr val="accent1"/>
-          </a:effectRef>
-          <a:fontRef idx="minor">
-            <a:schemeClr val="lt1"/>
-          </a:fontRef>
-        </p:style>
-        <p:txBody>
-          <a:bodyPr rtlCol="0" anchor="ctr" wrap="square" lIns="12700" rIns="12700" tIns="12700" bIns="12700"/>
-          <a:lstStyle/>
-          <a:p>
-            <a:pPr algn="ctr">
-              <a:defRPr sz="600" b="0">
-                <a:solidFill>
-                  <a:srgbClr val="FFFFFF"/>
-                </a:solidFill>
-                <a:latin typeface="Play"/>
-                <a:ea typeface="Play"/>
-                <a:cs typeface="Play"/>
-              </a:defRPr>
-            </a:pPr>
-            <a:r>
-              <a:rPr sz="600" b="0">
-                <a:solidFill>
-                  <a:srgbClr val="FFFFFF"/>
-                </a:solidFill>
-                <a:latin typeface="Play"/>
-                <a:ea typeface="Play"/>
-                <a:cs typeface="Play"/>
-              </a:rPr>
-              <a:t>Экспорт результата</a:t>
+              <a:t>Экспорт</a:t>
             </a:r>
           </a:p>
         </p:txBody>
@@ -7792,7 +7649,7 @@
                 <a:ea typeface="Play"/>
                 <a:cs typeface="Play"/>
               </a:rPr>
-              <a:t>Ожидаемый эффект – Время</a:t>
+              <a:t>План пилота</a:t>
             </a:r>
           </a:p>
         </p:txBody>
@@ -7805,8 +7662,8 @@
         </p:nvSpPr>
         <p:spPr>
           <a:xfrm>
-            <a:off x="429280" y="1504165"/>
-            <a:ext cx="5472562" cy="3906728"/>
+            <a:off x="429280" y="2310261"/>
+            <a:ext cx="11310884" cy="1488440"/>
           </a:xfrm>
           <a:prstGeom prst="rect">
             <a:avLst/>
@@ -7823,7 +7680,7 @@
               <a:spcAft>
                 <a:spcPts val="300"/>
               </a:spcAft>
-              <a:defRPr sz="2000">
+              <a:defRPr sz="2800">
                 <a:solidFill>
                   <a:srgbClr val="FFFFFF"/>
                 </a:solidFill>
@@ -7833,7 +7690,7 @@
               </a:defRPr>
             </a:pPr>
             <a:r>
-              <a:rPr sz="2000">
+              <a:rPr sz="2800">
                 <a:solidFill>
                   <a:srgbClr val="FFFFFF"/>
                 </a:solidFill>
@@ -7841,7 +7698,7 @@
                 <a:ea typeface="Play"/>
                 <a:cs typeface="Play"/>
               </a:rPr>
-              <a:t>• Время сборки колоды 12 слайдов сократилось с 186 до 4 мин</a:t>
+              <a:t>• 6 недель</a:t>
             </a:r>
           </a:p>
           <a:p>
@@ -7849,7 +7706,7 @@
               <a:spcAft>
                 <a:spcPts val="300"/>
               </a:spcAft>
-              <a:defRPr sz="2000">
+              <a:defRPr sz="2800">
                 <a:solidFill>
                   <a:srgbClr val="FFFFFF"/>
                 </a:solidFill>
@@ -7859,7 +7716,7 @@
               </a:defRPr>
             </a:pPr>
             <a:r>
-              <a:rPr sz="2000">
+              <a:rPr sz="2800">
                 <a:solidFill>
                   <a:srgbClr val="FFFFFF"/>
                 </a:solidFill>
@@ -7867,29 +7724,37 @@
                 <a:ea typeface="Play"/>
                 <a:cs typeface="Play"/>
               </a:rPr>
-              <a:t>• Первый готовый вариант доступен за 1 день вместо 6</a:t>
+              <a:t>• 2 команды</a:t>
+            </a:r>
+          </a:p>
+          <a:p>
+            <a:pPr algn="l">
+              <a:spcAft>
+                <a:spcPts val="300"/>
+              </a:spcAft>
+              <a:defRPr sz="2800">
+                <a:solidFill>
+                  <a:srgbClr val="FFFFFF"/>
+                </a:solidFill>
+                <a:latin typeface="Play"/>
+                <a:ea typeface="Play"/>
+                <a:cs typeface="Play"/>
+              </a:defRPr>
+            </a:pPr>
+            <a:r>
+              <a:rPr sz="2800">
+                <a:solidFill>
+                  <a:srgbClr val="FFFFFF"/>
+                </a:solidFill>
+                <a:latin typeface="Play"/>
+                <a:ea typeface="Play"/>
+                <a:cs typeface="Play"/>
+              </a:rPr>
+              <a:t>• 68 презентаций</a:t>
             </a:r>
           </a:p>
         </p:txBody>
       </p:sp>
-      <p:graphicFrame>
-        <p:nvGraphicFramePr>
-          <p:cNvPr id="624" name="Chart 623"/>
-          <p:cNvGraphicFramePr>
-            <a:graphicFrameLocks noGrp="1"/>
-          </p:cNvGraphicFramePr>
-          <p:nvPr/>
-        </p:nvGraphicFramePr>
-        <p:xfrm>
-          <a:off x="6267602" y="1504165"/>
-          <a:ext cx="5472562" cy="3906728"/>
-        </p:xfrm>
-        <a:graphic>
-          <a:graphicData uri="http://schemas.openxmlformats.org/drawingml/2006/chart">
-            <c:chart xmlns:c="http://schemas.openxmlformats.org/drawingml/2006/chart" r:id="rId5"/>
-          </a:graphicData>
-        </a:graphic>
-      </p:graphicFrame>
     </p:spTree>
   </p:cSld>
   <p:clrMapOvr>
@@ -7952,7 +7817,7 @@
                 <a:ea typeface="Play"/>
                 <a:cs typeface="Play"/>
               </a:rPr>
-              <a:t>Ожидаемый эффект – Нарушения</a:t>
+              <a:t>Результаты пилота</a:t>
             </a:r>
           </a:p>
         </p:txBody>
@@ -8001,7 +7866,7 @@
                 <a:ea typeface="Play"/>
                 <a:cs typeface="Play"/>
               </a:rPr>
-              <a:t>• Нарушений фирменного стиля в пилоте – 2 из 68 колод</a:t>
+              <a:t>• Сборка 4 мин вместо 186</a:t>
             </a:r>
           </a:p>
           <a:p>
@@ -8027,14 +7892,66 @@
                 <a:ea typeface="Play"/>
                 <a:cs typeface="Play"/>
               </a:rPr>
-              <a:t>• Все нарушения автоматически исправлены аудитором</a:t>
+              <a:t>• 1 день до первой версии вместо 6</a:t>
+            </a:r>
+          </a:p>
+          <a:p>
+            <a:pPr algn="l">
+              <a:spcAft>
+                <a:spcPts val="300"/>
+              </a:spcAft>
+              <a:defRPr sz="1600">
+                <a:solidFill>
+                  <a:srgbClr val="FFFFFF"/>
+                </a:solidFill>
+                <a:latin typeface="Play"/>
+                <a:ea typeface="Play"/>
+                <a:cs typeface="Play"/>
+              </a:defRPr>
+            </a:pPr>
+            <a:r>
+              <a:rPr sz="1600">
+                <a:solidFill>
+                  <a:srgbClr val="FFFFFF"/>
+                </a:solidFill>
+                <a:latin typeface="Play"/>
+                <a:ea typeface="Play"/>
+                <a:cs typeface="Play"/>
+              </a:rPr>
+              <a:t>• 2 нарушения из 68 вместо 19</a:t>
+            </a:r>
+          </a:p>
+          <a:p>
+            <a:pPr algn="l">
+              <a:spcAft>
+                <a:spcPts val="300"/>
+              </a:spcAft>
+              <a:defRPr sz="1600">
+                <a:solidFill>
+                  <a:srgbClr val="FFFFFF"/>
+                </a:solidFill>
+                <a:latin typeface="Play"/>
+                <a:ea typeface="Play"/>
+                <a:cs typeface="Play"/>
+              </a:defRPr>
+            </a:pPr>
+            <a:r>
+              <a:rPr sz="1600">
+                <a:solidFill>
+                  <a:srgbClr val="FFFFFF"/>
+                </a:solidFill>
+                <a:latin typeface="Play"/>
+                <a:ea typeface="Play"/>
+                <a:cs typeface="Play"/>
+              </a:rPr>
+              <a:t>• 38 запросов вместо 11</a:t>
             </a:r>
           </a:p>
         </p:txBody>
       </p:sp>
       <p:graphicFrame>
         <p:nvGraphicFramePr>
-          <p:cNvPr id="4" name="Chart 3"/>
+          <p:cNvPr id="4" name="Table 3"/>
           <p:cNvGraphicFramePr>
             <a:graphicFrameLocks noGrp="1"/>
           </p:cNvGraphicFramePr>
@@ -8045,8 +7962,417 @@
           <a:ext cx="5472562" cy="4014604"/>
         </p:xfrm>
         <a:graphic>
-          <a:graphicData uri="http://schemas.openxmlformats.org/drawingml/2006/chart">
-            <c:chart xmlns:c="http://schemas.openxmlformats.org/drawingml/2006/chart" r:id="rId4"/>
+          <a:graphicData uri="http://schemas.openxmlformats.org/drawingml/2006/table">
+            <a:tbl>
+              <a:tblPr firstRow="1" bandRow="1">
+                <a:tableStyleId>{5C22544A-7EE6-4342-B048-85BDC9FD1C3A}</a:tableStyleId>
+              </a:tblPr>
+              <a:tblGrid>
+                <a:gridCol w="1824187"/>
+                <a:gridCol w="1824187"/>
+                <a:gridCol w="1824188"/>
+              </a:tblGrid>
+              <a:tr h="802920">
+                <a:tc>
+                  <a:txBody>
+                    <a:bodyPr/>
+                    <a:lstStyle/>
+                    <a:p>
+                      <a:pPr>
+                        <a:defRPr sz="1300" b="1">
+                          <a:solidFill>
+                            <a:srgbClr val="FFFFFF"/>
+                          </a:solidFill>
+                          <a:latin typeface="Play"/>
+                          <a:ea typeface="Play"/>
+                          <a:cs typeface="Play"/>
+                        </a:defRPr>
+                      </a:pPr>
+                      <a:r>
+                        <a:t>Показатель</a:t>
+                      </a:r>
+                    </a:p>
+                  </a:txBody>
+                  <a:tcPr>
+                    <a:solidFill>
+                      <a:srgbClr val="0077FF"/>
+                    </a:solidFill>
+                  </a:tcPr>
+                </a:tc>
+                <a:tc>
+                  <a:txBody>
+                    <a:bodyPr/>
+                    <a:lstStyle/>
+                    <a:p>
+                      <a:pPr>
+                        <a:defRPr sz="1300" b="1">
+                          <a:solidFill>
+                            <a:srgbClr val="FFFFFF"/>
+                          </a:solidFill>
+                          <a:latin typeface="Play"/>
+                          <a:ea typeface="Play"/>
+                          <a:cs typeface="Play"/>
+                        </a:defRPr>
+                      </a:pPr>
+                      <a:r>
+                        <a:t>До пилота</a:t>
+                      </a:r>
+                    </a:p>
+                  </a:txBody>
+                  <a:tcPr>
+                    <a:solidFill>
+                      <a:srgbClr val="0077FF"/>
+                    </a:solidFill>
+                  </a:tcPr>
+                </a:tc>
+                <a:tc>
+                  <a:txBody>
+                    <a:bodyPr/>
+                    <a:lstStyle/>
+                    <a:p>
+                      <a:pPr>
+                        <a:defRPr sz="1300" b="1">
+                          <a:solidFill>
+                            <a:srgbClr val="FFFFFF"/>
+                          </a:solidFill>
+                          <a:latin typeface="Play"/>
+                          <a:ea typeface="Play"/>
+                          <a:cs typeface="Play"/>
+                        </a:defRPr>
+                      </a:pPr>
+                      <a:r>
+                        <a:t>После пилота</a:t>
+                      </a:r>
+                    </a:p>
+                  </a:txBody>
+                  <a:tcPr>
+                    <a:solidFill>
+                      <a:srgbClr val="0077FF"/>
+                    </a:solidFill>
+                  </a:tcPr>
+                </a:tc>
+              </a:tr>
+              <a:tr h="802920">
+                <a:tc>
+                  <a:txBody>
+                    <a:bodyPr/>
+                    <a:lstStyle/>
+                    <a:p>
+                      <a:pPr>
+                        <a:defRPr sz="1300" b="0">
+                          <a:solidFill>
+                            <a:srgbClr val="FFFFFF"/>
+                          </a:solidFill>
+                          <a:latin typeface="Play"/>
+                          <a:ea typeface="Play"/>
+                          <a:cs typeface="Play"/>
+                        </a:defRPr>
+                      </a:pPr>
+                      <a:r>
+                        <a:t>Сборка</a:t>
+                      </a:r>
+                    </a:p>
+                  </a:txBody>
+                  <a:tcPr>
+                    <a:solidFill>
+                      <a:srgbClr val="111111"/>
+                    </a:solidFill>
+                  </a:tcPr>
+                </a:tc>
+                <a:tc>
+                  <a:txBody>
+                    <a:bodyPr/>
+                    <a:lstStyle/>
+                    <a:p>
+                      <a:pPr>
+                        <a:defRPr sz="1300" b="0">
+                          <a:solidFill>
+                            <a:srgbClr val="FFFFFF"/>
+                          </a:solidFill>
+                          <a:latin typeface="Play"/>
+                          <a:ea typeface="Play"/>
+                          <a:cs typeface="Play"/>
+                        </a:defRPr>
+                      </a:pPr>
+                      <a:r>
+                        <a:t>186 мин</a:t>
+                      </a:r>
+                    </a:p>
+                  </a:txBody>
+                  <a:tcPr>
+                    <a:solidFill>
+                      <a:srgbClr val="111111"/>
+                    </a:solidFill>
+                  </a:tcPr>
+                </a:tc>
+                <a:tc>
+                  <a:txBody>
+                    <a:bodyPr/>
+                    <a:lstStyle/>
+                    <a:p>
+                      <a:pPr>
+                        <a:defRPr sz="1300" b="0">
+                          <a:solidFill>
+                            <a:srgbClr val="FFFFFF"/>
+                          </a:solidFill>
+                          <a:latin typeface="Play"/>
+                          <a:ea typeface="Play"/>
+                          <a:cs typeface="Play"/>
+                        </a:defRPr>
+                      </a:pPr>
+                      <a:r>
+                        <a:t>4 мин</a:t>
+                      </a:r>
+                    </a:p>
+                  </a:txBody>
+                  <a:tcPr>
+                    <a:solidFill>
+                      <a:srgbClr val="111111"/>
+                    </a:solidFill>
+                  </a:tcPr>
+                </a:tc>
+              </a:tr>
+              <a:tr h="802920">
+                <a:tc>
+                  <a:txBody>
+                    <a:bodyPr/>
+                    <a:lstStyle/>
+                    <a:p>
+                      <a:pPr>
+                        <a:defRPr sz="1300" b="0">
+                          <a:solidFill>
+                            <a:srgbClr val="FFFFFF"/>
+                          </a:solidFill>
+                          <a:latin typeface="Play"/>
+                          <a:ea typeface="Play"/>
+                          <a:cs typeface="Play"/>
+                        </a:defRPr>
+                      </a:pPr>
+                      <a:r>
+                        <a:t>Время до первой версии</a:t>
+                      </a:r>
+                    </a:p>
+                  </a:txBody>
+                  <a:tcPr>
+                    <a:solidFill>
+                      <a:srgbClr val="111111"/>
+                    </a:solidFill>
+                  </a:tcPr>
+                </a:tc>
+                <a:tc>
+                  <a:txBody>
+                    <a:bodyPr/>
+                    <a:lstStyle/>
+                    <a:p>
+                      <a:pPr>
+                        <a:defRPr sz="1300" b="0">
+                          <a:solidFill>
+                            <a:srgbClr val="FFFFFF"/>
+                          </a:solidFill>
+                          <a:latin typeface="Play"/>
+                          <a:ea typeface="Play"/>
+                          <a:cs typeface="Play"/>
+                        </a:defRPr>
+                      </a:pPr>
+                      <a:r>
+                        <a:t>6 дней</a:t>
+                      </a:r>
+                    </a:p>
+                  </a:txBody>
+                  <a:tcPr>
+                    <a:solidFill>
+                      <a:srgbClr val="111111"/>
+                    </a:solidFill>
+                  </a:tcPr>
+                </a:tc>
+                <a:tc>
+                  <a:txBody>
+                    <a:bodyPr/>
+                    <a:lstStyle/>
+                    <a:p>
+                      <a:pPr>
+                        <a:defRPr sz="1300" b="0">
+                          <a:solidFill>
+                            <a:srgbClr val="FFFFFF"/>
+                          </a:solidFill>
+                          <a:latin typeface="Play"/>
+                          <a:ea typeface="Play"/>
+                          <a:cs typeface="Play"/>
+                        </a:defRPr>
+                      </a:pPr>
+                      <a:r>
+                        <a:t>1 день</a:t>
+                      </a:r>
+                    </a:p>
+                  </a:txBody>
+                  <a:tcPr>
+                    <a:solidFill>
+                      <a:srgbClr val="111111"/>
+                    </a:solidFill>
+                  </a:tcPr>
+                </a:tc>
+              </a:tr>
+              <a:tr h="802920">
+                <a:tc>
+                  <a:txBody>
+                    <a:bodyPr/>
+                    <a:lstStyle/>
+                    <a:p>
+                      <a:pPr>
+                        <a:defRPr sz="1300" b="0">
+                          <a:solidFill>
+                            <a:srgbClr val="FFFFFF"/>
+                          </a:solidFill>
+                          <a:latin typeface="Play"/>
+                          <a:ea typeface="Play"/>
+                          <a:cs typeface="Play"/>
+                        </a:defRPr>
+                      </a:pPr>
+                      <a:r>
+                        <a:t>Нарушения</a:t>
+                      </a:r>
+                    </a:p>
+                  </a:txBody>
+                  <a:tcPr>
+                    <a:solidFill>
+                      <a:srgbClr val="111111"/>
+                    </a:solidFill>
+                  </a:tcPr>
+                </a:tc>
+                <a:tc>
+                  <a:txBody>
+                    <a:bodyPr/>
+                    <a:lstStyle/>
+                    <a:p>
+                      <a:pPr>
+                        <a:defRPr sz="1300" b="0">
+                          <a:solidFill>
+                            <a:srgbClr val="FFFFFF"/>
+                          </a:solidFill>
+                          <a:latin typeface="Play"/>
+                          <a:ea typeface="Play"/>
+                          <a:cs typeface="Play"/>
+                        </a:defRPr>
+                      </a:pPr>
+                      <a:r>
+                        <a:t>19 из 42</a:t>
+                      </a:r>
+                    </a:p>
+                  </a:txBody>
+                  <a:tcPr>
+                    <a:solidFill>
+                      <a:srgbClr val="111111"/>
+                    </a:solidFill>
+                  </a:tcPr>
+                </a:tc>
+                <a:tc>
+                  <a:txBody>
+                    <a:bodyPr/>
+                    <a:lstStyle/>
+                    <a:p>
+                      <a:pPr>
+                        <a:defRPr sz="1300" b="0">
+                          <a:solidFill>
+                            <a:srgbClr val="FFFFFF"/>
+                          </a:solidFill>
+                          <a:latin typeface="Play"/>
+                          <a:ea typeface="Play"/>
+                          <a:cs typeface="Play"/>
+                        </a:defRPr>
+                      </a:pPr>
+                      <a:r>
+                        <a:t>2 из 68</a:t>
+                      </a:r>
+                    </a:p>
+                  </a:txBody>
+                  <a:tcPr>
+                    <a:solidFill>
+                      <a:srgbClr val="111111"/>
+                    </a:solidFill>
+                  </a:tcPr>
+                </a:tc>
+              </a:tr>
+              <a:tr h="802924">
+                <a:tc>
+                  <a:txBody>
+                    <a:bodyPr/>
+                    <a:lstStyle/>
+                    <a:p>
+                      <a:pPr>
+                        <a:defRPr sz="1300" b="0">
+                          <a:solidFill>
+                            <a:srgbClr val="FFFFFF"/>
+                          </a:solidFill>
+                          <a:latin typeface="Play"/>
+                          <a:ea typeface="Play"/>
+                          <a:cs typeface="Play"/>
+                        </a:defRPr>
+                      </a:pPr>
+                      <a:r>
+                        <a:t>Запросы</a:t>
+                      </a:r>
+                    </a:p>
+                  </a:txBody>
+                  <a:tcPr>
+                    <a:solidFill>
+                      <a:srgbClr val="111111"/>
+                    </a:solidFill>
+                  </a:tcPr>
+                </a:tc>
+                <a:tc>
+                  <a:txBody>
+                    <a:bodyPr/>
+                    <a:lstStyle/>
+                    <a:p>
+                      <a:pPr>
+                        <a:defRPr sz="1300" b="0">
+                          <a:solidFill>
+                            <a:srgbClr val="FFFFFF"/>
+                          </a:solidFill>
+                          <a:latin typeface="Play"/>
+                          <a:ea typeface="Play"/>
+                          <a:cs typeface="Play"/>
+                        </a:defRPr>
+                      </a:pPr>
+                      <a:r>
+                        <a:t>11/нед</a:t>
+                      </a:r>
+                    </a:p>
+                  </a:txBody>
+                  <a:tcPr>
+                    <a:solidFill>
+                      <a:srgbClr val="111111"/>
+                    </a:solidFill>
+                  </a:tcPr>
+                </a:tc>
+                <a:tc>
+                  <a:txBody>
+                    <a:bodyPr/>
+                    <a:lstStyle/>
+                    <a:p>
+                      <a:pPr>
+                        <a:defRPr sz="1300" b="0">
+                          <a:solidFill>
+                            <a:srgbClr val="FFFFFF"/>
+                          </a:solidFill>
+                          <a:latin typeface="Play"/>
+                          <a:ea typeface="Play"/>
+                          <a:cs typeface="Play"/>
+                        </a:defRPr>
+                      </a:pPr>
+                      <a:r>
+                        <a:t>38/нед</a:t>
+                      </a:r>
+                    </a:p>
+                  </a:txBody>
+                  <a:tcPr>
+                    <a:solidFill>
+                      <a:srgbClr val="111111"/>
+                    </a:solidFill>
+                  </a:tcPr>
+                </a:tc>
+              </a:tr>
+            </a:tbl>
           </a:graphicData>
         </a:graphic>
       </p:graphicFrame>
@@ -8059,6 +8385,223 @@
 </file>
 
 <file path=ppt/slides/slide35.xml><?xml version="1.0" encoding="utf-8"?>
+<p:sld xmlns:a="http://schemas.openxmlformats.org/drawingml/2006/main" xmlns:p="http://schemas.openxmlformats.org/presentationml/2006/main" xmlns:r="http://schemas.openxmlformats.org/officeDocument/2006/relationships">
+  <p:cSld>
+    <p:spTree>
+      <p:nvGrpSpPr>
+        <p:cNvPr id="1" name=""/>
+        <p:cNvGrpSpPr/>
+        <p:nvPr/>
+      </p:nvGrpSpPr>
+      <p:grpSpPr/>
+      <p:sp>
+        <p:nvSpPr>
+          <p:cNvPr id="2" name="title"/>
+          <p:cNvSpPr txBox="1"/>
+          <p:nvPr/>
+        </p:nvSpPr>
+        <p:spPr>
+          <a:xfrm>
+            <a:off x="429280" y="424715"/>
+            <a:ext cx="7827264" cy="822960"/>
+          </a:xfrm>
+          <a:prstGeom prst="rect">
+            <a:avLst/>
+          </a:prstGeom>
+          <a:noFill/>
+        </p:spPr>
+        <p:txBody>
+          <a:bodyPr wrap="square" lIns="76200" rIns="76200" tIns="50800" bIns="50800">
+            <a:spAutoFit/>
+          </a:bodyPr>
+          <a:lstStyle/>
+          <a:p>
+            <a:pPr algn="l">
+              <a:spcAft>
+                <a:spcPts val="300"/>
+              </a:spcAft>
+              <a:defRPr sz="3200">
+                <a:solidFill>
+                  <a:srgbClr val="FFFFFF"/>
+                </a:solidFill>
+                <a:latin typeface="Play"/>
+                <a:ea typeface="Play"/>
+                <a:cs typeface="Play"/>
+              </a:defRPr>
+            </a:pPr>
+            <a:r>
+              <a:rPr sz="3200">
+                <a:solidFill>
+                  <a:srgbClr val="FFFFFF"/>
+                </a:solidFill>
+                <a:latin typeface="Play"/>
+                <a:ea typeface="Play"/>
+                <a:cs typeface="Play"/>
+              </a:rPr>
+              <a:t>Ожидаемый эффект</a:t>
+            </a:r>
+          </a:p>
+        </p:txBody>
+      </p:sp>
+      <p:sp>
+        <p:nvSpPr>
+          <p:cNvPr id="3" name="body_left"/>
+          <p:cNvSpPr txBox="1"/>
+          <p:nvPr/>
+        </p:nvSpPr>
+        <p:spPr>
+          <a:xfrm>
+            <a:off x="429280" y="2489917"/>
+            <a:ext cx="5472562" cy="1488440"/>
+          </a:xfrm>
+          <a:prstGeom prst="rect">
+            <a:avLst/>
+          </a:prstGeom>
+          <a:noFill/>
+        </p:spPr>
+        <p:txBody>
+          <a:bodyPr wrap="square" lIns="76200" rIns="76200" tIns="50800" bIns="50800">
+            <a:spAutoFit/>
+          </a:bodyPr>
+          <a:lstStyle/>
+          <a:p>
+            <a:pPr algn="l">
+              <a:spcAft>
+                <a:spcPts val="300"/>
+              </a:spcAft>
+              <a:defRPr sz="2800">
+                <a:solidFill>
+                  <a:srgbClr val="FFFFFF"/>
+                </a:solidFill>
+                <a:latin typeface="Play"/>
+                <a:ea typeface="Play"/>
+                <a:cs typeface="Play"/>
+              </a:defRPr>
+            </a:pPr>
+            <a:r>
+              <a:rPr sz="2800">
+                <a:solidFill>
+                  <a:srgbClr val="FFFFFF"/>
+                </a:solidFill>
+                <a:latin typeface="Play"/>
+                <a:ea typeface="Play"/>
+                <a:cs typeface="Play"/>
+              </a:rPr>
+              <a:t>• Сборка 4 мин вместо 186</a:t>
+            </a:r>
+          </a:p>
+          <a:p>
+            <a:pPr algn="l">
+              <a:spcAft>
+                <a:spcPts val="300"/>
+              </a:spcAft>
+              <a:defRPr sz="2800">
+                <a:solidFill>
+                  <a:srgbClr val="FFFFFF"/>
+                </a:solidFill>
+                <a:latin typeface="Play"/>
+                <a:ea typeface="Play"/>
+                <a:cs typeface="Play"/>
+              </a:defRPr>
+            </a:pPr>
+            <a:r>
+              <a:rPr sz="2800">
+                <a:solidFill>
+                  <a:srgbClr val="FFFFFF"/>
+                </a:solidFill>
+                <a:latin typeface="Play"/>
+                <a:ea typeface="Play"/>
+                <a:cs typeface="Play"/>
+              </a:rPr>
+              <a:t>• 1 день до первой версии вместо 6</a:t>
+            </a:r>
+          </a:p>
+        </p:txBody>
+      </p:sp>
+      <p:sp>
+        <p:nvSpPr>
+          <p:cNvPr id="4" name="body_right"/>
+          <p:cNvSpPr txBox="1"/>
+          <p:nvPr/>
+        </p:nvSpPr>
+        <p:spPr>
+          <a:xfrm>
+            <a:off x="6267602" y="2489917"/>
+            <a:ext cx="5472562" cy="1026160"/>
+          </a:xfrm>
+          <a:prstGeom prst="rect">
+            <a:avLst/>
+          </a:prstGeom>
+          <a:noFill/>
+        </p:spPr>
+        <p:txBody>
+          <a:bodyPr wrap="square" lIns="76200" rIns="76200" tIns="50800" bIns="50800">
+            <a:spAutoFit/>
+          </a:bodyPr>
+          <a:lstStyle/>
+          <a:p>
+            <a:pPr algn="l">
+              <a:spcAft>
+                <a:spcPts val="300"/>
+              </a:spcAft>
+              <a:defRPr sz="2800">
+                <a:solidFill>
+                  <a:srgbClr val="FFFFFF"/>
+                </a:solidFill>
+                <a:latin typeface="Play"/>
+                <a:ea typeface="Play"/>
+                <a:cs typeface="Play"/>
+              </a:defRPr>
+            </a:pPr>
+            <a:r>
+              <a:rPr sz="2800">
+                <a:solidFill>
+                  <a:srgbClr val="FFFFFF"/>
+                </a:solidFill>
+                <a:latin typeface="Play"/>
+                <a:ea typeface="Play"/>
+                <a:cs typeface="Play"/>
+              </a:rPr>
+              <a:t>• 2 нарушения вместо 19</a:t>
+            </a:r>
+          </a:p>
+          <a:p>
+            <a:pPr algn="l">
+              <a:spcAft>
+                <a:spcPts val="300"/>
+              </a:spcAft>
+              <a:defRPr sz="2800">
+                <a:solidFill>
+                  <a:srgbClr val="FFFFFF"/>
+                </a:solidFill>
+                <a:latin typeface="Play"/>
+                <a:ea typeface="Play"/>
+                <a:cs typeface="Play"/>
+              </a:defRPr>
+            </a:pPr>
+            <a:r>
+              <a:rPr sz="2800">
+                <a:solidFill>
+                  <a:srgbClr val="FFFFFF"/>
+                </a:solidFill>
+                <a:latin typeface="Play"/>
+                <a:ea typeface="Play"/>
+                <a:cs typeface="Play"/>
+              </a:rPr>
+              <a:t>• 38 запросов вместо 11</a:t>
+            </a:r>
+          </a:p>
+        </p:txBody>
+      </p:sp>
+    </p:spTree>
+  </p:cSld>
+  <p:clrMapOvr>
+    <a:masterClrMapping/>
+  </p:clrMapOvr>
+</p:sld>
+</file>
+
+<file path=ppt/slides/slide36.xml><?xml version="1.0" encoding="utf-8"?>
 <p:sld xmlns:a="http://schemas.openxmlformats.org/drawingml/2006/main" xmlns:p="http://schemas.openxmlformats.org/presentationml/2006/main" xmlns:r="http://schemas.openxmlformats.org/officeDocument/2006/relationships">
   <p:cSld>
     <p:spTree>
@@ -8143,7 +8686,7 @@
               <a:spcAft>
                 <a:spcPts val="300"/>
               </a:spcAft>
-              <a:defRPr sz="1800">
+              <a:defRPr sz="1600">
                 <a:solidFill>
                   <a:srgbClr val="FFFFFF"/>
                 </a:solidFill>
@@ -8153,7 +8696,7 @@
               </a:defRPr>
             </a:pPr>
             <a:r>
-              <a:rPr sz="1800">
+              <a:rPr sz="1600">
                 <a:solidFill>
                   <a:srgbClr val="FFFFFF"/>
                 </a:solidFill>
@@ -8161,7 +8704,7 @@
                 <a:ea typeface="Play"/>
                 <a:cs typeface="Play"/>
               </a:rPr>
-              <a:t>• Сервис работает на 2 vCPU / 2 GB RAM</a:t>
+              <a:t>• 2 vCPU / 2 ГБ RAM</a:t>
             </a:r>
           </a:p>
           <a:p>
@@ -8169,7 +8712,7 @@
               <a:spcAft>
                 <a:spcPts val="300"/>
               </a:spcAft>
-              <a:defRPr sz="1800">
+              <a:defRPr sz="1600">
                 <a:solidFill>
                   <a:srgbClr val="FFFFFF"/>
                 </a:solidFill>
@@ -8179,7 +8722,7 @@
               </a:defRPr>
             </a:pPr>
             <a:r>
-              <a:rPr sz="1800">
+              <a:rPr sz="1600">
                 <a:solidFill>
                   <a:srgbClr val="FFFFFF"/>
                 </a:solidFill>
@@ -8187,7 +8730,7 @@
                 <a:ea typeface="Play"/>
                 <a:cs typeface="Play"/>
               </a:rPr>
-              <a:t>• Инференс за 6 недель пилота – 1 400 руб</a:t>
+              <a:t>• 1 400 руб инференс</a:t>
             </a:r>
           </a:p>
           <a:p>
@@ -8195,7 +8738,7 @@
               <a:spcAft>
                 <a:spcPts val="300"/>
               </a:spcAft>
-              <a:defRPr sz="1800">
+              <a:defRPr sz="1600">
                 <a:solidFill>
                   <a:srgbClr val="FFFFFF"/>
                 </a:solidFill>
@@ -8205,7 +8748,7 @@
               </a:defRPr>
             </a:pPr>
             <a:r>
-              <a:rPr sz="1800">
+              <a:rPr sz="1600">
                 <a:solidFill>
                   <a:srgbClr val="FFFFFF"/>
                 </a:solidFill>
@@ -8213,7 +8756,7 @@
                 <a:ea typeface="Play"/>
                 <a:cs typeface="Play"/>
               </a:rPr>
-              <a:t>• 3 квартал 2026: подключение 4 команд</a:t>
+              <a:t>• Gpt-oss-20b, OpenAI‑совместим</a:t>
             </a:r>
           </a:p>
           <a:p>
@@ -8221,7 +8764,7 @@
               <a:spcAft>
                 <a:spcPts val="300"/>
               </a:spcAft>
-              <a:defRPr sz="1800">
+              <a:defRPr sz="1600">
                 <a:solidFill>
                   <a:srgbClr val="FFFFFF"/>
                 </a:solidFill>
@@ -8231,7 +8774,7 @@
               </a:defRPr>
             </a:pPr>
             <a:r>
-              <a:rPr sz="1800">
+              <a:rPr sz="1600">
                 <a:solidFill>
                   <a:srgbClr val="FFFFFF"/>
                 </a:solidFill>
@@ -8239,33 +8782,7 @@
                 <a:ea typeface="Play"/>
                 <a:cs typeface="Play"/>
               </a:rPr>
-              <a:t>• 4 квартал 2026: доступ для всей компании</a:t>
-            </a:r>
-          </a:p>
-          <a:p>
-            <a:pPr algn="l">
-              <a:spcAft>
-                <a:spcPts val="300"/>
-              </a:spcAft>
-              <a:defRPr sz="1800">
-                <a:solidFill>
-                  <a:srgbClr val="FFFFFF"/>
-                </a:solidFill>
-                <a:latin typeface="Play"/>
-                <a:ea typeface="Play"/>
-                <a:cs typeface="Play"/>
-              </a:defRPr>
-            </a:pPr>
-            <a:r>
-              <a:rPr sz="1800">
-                <a:solidFill>
-                  <a:srgbClr val="FFFFFF"/>
-                </a:solidFill>
-                <a:latin typeface="Play"/>
-                <a:ea typeface="Play"/>
-                <a:cs typeface="Play"/>
-              </a:rPr>
-              <a:t>• 1 квартал 2027: генерация иллюстраций</a:t>
+              <a:t>• Дизайн‑отдел 4 человека</a:t>
             </a:r>
           </a:p>
         </p:txBody>
@@ -8365,7 +8882,7 @@
         <p:spPr>
           <a:xfrm>
             <a:off x="6267602" y="1745515"/>
-            <a:ext cx="1824187" cy="1395449"/>
+            <a:ext cx="2736281" cy="1395449"/>
           </a:xfrm>
           <a:prstGeom prst="rect">
             <a:avLst/>
@@ -8373,13 +8890,13 @@
           <a:noFill/>
         </p:spPr>
         <p:txBody>
-          <a:bodyPr wrap="square">
+          <a:bodyPr wrap="square" lIns="12700" rIns="12700" tIns="12700" bIns="12700">
             <a:spAutoFit/>
           </a:bodyPr>
           <a:lstStyle/>
           <a:p>
             <a:pPr algn="ctr">
-              <a:defRPr sz="1200" b="0">
+              <a:defRPr sz="1400" b="0">
                 <a:solidFill>
                   <a:srgbClr val="FFFFFF"/>
                 </a:solidFill>
@@ -8389,7 +8906,7 @@
               </a:defRPr>
             </a:pPr>
             <a:r>
-              <a:rPr sz="1200" b="0">
+              <a:rPr sz="1400" b="0">
                 <a:solidFill>
                   <a:srgbClr val="FFFFFF"/>
                 </a:solidFill>
@@ -8397,7 +8914,7 @@
                 <a:ea typeface="Play"/>
                 <a:cs typeface="Play"/>
               </a:rPr>
-              <a:t>3 квартал 2026: подключение 4 команд</a:t>
+              <a:t>Третий квартал 2026</a:t>
             </a:r>
           </a:p>
         </p:txBody>
@@ -8453,8 +8970,8 @@
         </p:nvSpPr>
         <p:spPr>
           <a:xfrm>
-            <a:off x="8091789" y="3981999"/>
-            <a:ext cx="1824187" cy="1395449"/>
+            <a:off x="7635742" y="3981999"/>
+            <a:ext cx="2736281" cy="1395449"/>
           </a:xfrm>
           <a:prstGeom prst="rect">
             <a:avLst/>
@@ -8462,13 +8979,13 @@
           <a:noFill/>
         </p:spPr>
         <p:txBody>
-          <a:bodyPr wrap="square">
+          <a:bodyPr wrap="square" lIns="12700" rIns="12700" tIns="12700" bIns="12700">
             <a:spAutoFit/>
           </a:bodyPr>
           <a:lstStyle/>
           <a:p>
             <a:pPr algn="ctr">
-              <a:defRPr sz="1200" b="0">
+              <a:defRPr sz="1400" b="0">
                 <a:solidFill>
                   <a:srgbClr val="FFFFFF"/>
                 </a:solidFill>
@@ -8478,7 +8995,7 @@
               </a:defRPr>
             </a:pPr>
             <a:r>
-              <a:rPr sz="1200" b="0">
+              <a:rPr sz="1400" b="0">
                 <a:solidFill>
                   <a:srgbClr val="FFFFFF"/>
                 </a:solidFill>
@@ -8486,7 +9003,7 @@
                 <a:ea typeface="Play"/>
                 <a:cs typeface="Play"/>
               </a:rPr>
-              <a:t>4 квартал 2026: доступ для всей компании</a:t>
+              <a:t>Четвёртый квартал 2026</a:t>
             </a:r>
           </a:p>
         </p:txBody>
@@ -8542,8 +9059,8 @@
         </p:nvSpPr>
         <p:spPr>
           <a:xfrm>
-            <a:off x="9915976" y="1745515"/>
-            <a:ext cx="1824187" cy="1395449"/>
+            <a:off x="9003883" y="1745515"/>
+            <a:ext cx="2736281" cy="1395449"/>
           </a:xfrm>
           <a:prstGeom prst="rect">
             <a:avLst/>
@@ -8551,13 +9068,13 @@
           <a:noFill/>
         </p:spPr>
         <p:txBody>
-          <a:bodyPr wrap="square">
+          <a:bodyPr wrap="square" lIns="12700" rIns="12700" tIns="12700" bIns="12700">
             <a:spAutoFit/>
           </a:bodyPr>
           <a:lstStyle/>
           <a:p>
             <a:pPr algn="ctr">
-              <a:defRPr sz="1200" b="0">
+              <a:defRPr sz="1400" b="0">
                 <a:solidFill>
                   <a:srgbClr val="FFFFFF"/>
                 </a:solidFill>
@@ -8567,7 +9084,7 @@
               </a:defRPr>
             </a:pPr>
             <a:r>
-              <a:rPr sz="1200" b="0">
+              <a:rPr sz="1400" b="0">
                 <a:solidFill>
                   <a:srgbClr val="FFFFFF"/>
                 </a:solidFill>
@@ -8575,7 +9092,7 @@
                 <a:ea typeface="Play"/>
                 <a:cs typeface="Play"/>
               </a:rPr>
-              <a:t>1 квартал 2027: генерация иллюстраций</a:t>
+              <a:t>Первый квартал 2027</a:t>
             </a:r>
           </a:p>
         </p:txBody>
@@ -8588,7 +9105,507 @@
 </p:sld>
 </file>
 
-<file path=ppt/slides/slide36.xml><?xml version="1.0" encoding="utf-8"?>
+<file path=ppt/slides/slide37.xml><?xml version="1.0" encoding="utf-8"?>
+<p:sld xmlns:a="http://schemas.openxmlformats.org/drawingml/2006/main" xmlns:p="http://schemas.openxmlformats.org/presentationml/2006/main" xmlns:r="http://schemas.openxmlformats.org/officeDocument/2006/relationships">
+  <p:cSld>
+    <p:spTree>
+      <p:nvGrpSpPr>
+        <p:cNvPr id="1" name=""/>
+        <p:cNvGrpSpPr/>
+        <p:nvPr/>
+      </p:nvGrpSpPr>
+      <p:grpSpPr/>
+      <p:sp>
+        <p:nvSpPr>
+          <p:cNvPr id="679" name="Google Shape;679;p31"/>
+          <p:cNvSpPr/>
+          <p:nvPr/>
+        </p:nvSpPr>
+        <p:spPr>
+          <a:xfrm>
+            <a:off x="0" y="4748271"/>
+            <a:ext cx="12192000" cy="2109730"/>
+          </a:xfrm>
+          <a:prstGeom prst="rect">
+            <a:avLst/>
+          </a:prstGeom>
+          <a:gradFill>
+            <a:gsLst>
+              <a:gs pos="0">
+                <a:srgbClr val="0077FF">
+                  <a:alpha val="61961"/>
+                </a:srgbClr>
+              </a:gs>
+              <a:gs pos="99000">
+                <a:srgbClr val="00AEE8"/>
+              </a:gs>
+              <a:gs pos="100000">
+                <a:srgbClr val="00AEE8"/>
+              </a:gs>
+            </a:gsLst>
+            <a:lin ang="14400000" scaled="0"/>
+          </a:gradFill>
+          <a:ln>
+            <a:noFill/>
+          </a:ln>
+        </p:spPr>
+        <p:txBody>
+          <a:bodyPr anchorCtr="0" anchor="ctr" bIns="0" lIns="108000" spcFirstLastPara="1" rIns="91425" wrap="square" tIns="0">
+            <a:noAutofit/>
+          </a:bodyPr>
+          <a:lstStyle/>
+          <a:p>
+            <a:pPr indent="0" lvl="0" marL="0" marR="0" rtl="0" algn="l">
+              <a:spcBef>
+                <a:spcPts val="0"/>
+              </a:spcBef>
+              <a:spcAft>
+                <a:spcPts val="0"/>
+              </a:spcAft>
+              <a:buNone/>
+            </a:pPr>
+            <a:r>
+              <a:t/>
+            </a:r>
+            <a:endParaRPr sz="1100">
+              <a:solidFill>
+                <a:schemeClr val="lt1"/>
+              </a:solidFill>
+              <a:latin typeface="Play"/>
+              <a:ea typeface="Play"/>
+              <a:cs typeface="Play"/>
+              <a:sym typeface="Play"/>
+            </a:endParaRPr>
+          </a:p>
+        </p:txBody>
+      </p:sp>
+      <p:sp>
+        <p:nvSpPr>
+          <p:cNvPr id="680" name="Rounded Rectangle 679"/>
+          <p:cNvSpPr/>
+          <p:nvPr/>
+        </p:nvSpPr>
+        <p:spPr>
+          <a:xfrm>
+            <a:off x="300817" y="297715"/>
+            <a:ext cx="11566347" cy="4022686"/>
+          </a:xfrm>
+          <a:prstGeom prst="roundRect">
+            <a:avLst/>
+          </a:prstGeom>
+          <a:solidFill>
+            <a:srgbClr val="111111">
+              <a:alpha val="85000"/>
+            </a:srgbClr>
+          </a:solidFill>
+          <a:ln>
+            <a:noFill/>
+          </a:ln>
+          <a:effectLst/>
+        </p:spPr>
+        <p:style>
+          <a:lnRef idx="1">
+            <a:schemeClr val="accent1"/>
+          </a:lnRef>
+          <a:fillRef idx="3">
+            <a:schemeClr val="accent1"/>
+          </a:fillRef>
+          <a:effectRef idx="2">
+            <a:schemeClr val="accent1"/>
+          </a:effectRef>
+          <a:fontRef idx="minor">
+            <a:schemeClr val="lt1"/>
+          </a:fontRef>
+        </p:style>
+        <p:txBody>
+          <a:bodyPr rtlCol="0" anchor="ctr"/>
+          <a:lstStyle/>
+          <a:p>
+            <a:pPr algn="ctr"/>
+          </a:p>
+        </p:txBody>
+      </p:sp>
+      <p:sp>
+        <p:nvSpPr>
+          <p:cNvPr id="681" name="title"/>
+          <p:cNvSpPr txBox="1"/>
+          <p:nvPr/>
+        </p:nvSpPr>
+        <p:spPr>
+          <a:xfrm>
+            <a:off x="427817" y="424715"/>
+            <a:ext cx="7827264" cy="822960"/>
+          </a:xfrm>
+          <a:prstGeom prst="rect">
+            <a:avLst/>
+          </a:prstGeom>
+          <a:noFill/>
+        </p:spPr>
+        <p:txBody>
+          <a:bodyPr wrap="square" lIns="76200" rIns="76200" tIns="50800" bIns="50800">
+            <a:spAutoFit/>
+          </a:bodyPr>
+          <a:lstStyle/>
+          <a:p>
+            <a:pPr algn="l">
+              <a:spcAft>
+                <a:spcPts val="300"/>
+              </a:spcAft>
+              <a:defRPr sz="3200">
+                <a:solidFill>
+                  <a:srgbClr val="FFFFFF"/>
+                </a:solidFill>
+                <a:latin typeface="Play"/>
+                <a:ea typeface="Play"/>
+                <a:cs typeface="Play"/>
+              </a:defRPr>
+            </a:pPr>
+            <a:r>
+              <a:rPr sz="3200">
+                <a:solidFill>
+                  <a:srgbClr val="FFFFFF"/>
+                </a:solidFill>
+                <a:latin typeface="Play"/>
+                <a:ea typeface="Play"/>
+                <a:cs typeface="Play"/>
+              </a:rPr>
+              <a:t>Что мы просим решить</a:t>
+            </a:r>
+          </a:p>
+        </p:txBody>
+      </p:sp>
+      <p:sp>
+        <p:nvSpPr>
+          <p:cNvPr id="682" name="body"/>
+          <p:cNvSpPr txBox="1"/>
+          <p:nvPr/>
+        </p:nvSpPr>
+        <p:spPr>
+          <a:xfrm>
+            <a:off x="427817" y="2704961"/>
+            <a:ext cx="11312347" cy="1488440"/>
+          </a:xfrm>
+          <a:prstGeom prst="rect">
+            <a:avLst/>
+          </a:prstGeom>
+          <a:noFill/>
+        </p:spPr>
+        <p:txBody>
+          <a:bodyPr wrap="square" lIns="76200" rIns="76200" tIns="50800" bIns="50800">
+            <a:spAutoFit/>
+          </a:bodyPr>
+          <a:lstStyle/>
+          <a:p>
+            <a:pPr algn="l">
+              <a:spcAft>
+                <a:spcPts val="300"/>
+              </a:spcAft>
+              <a:defRPr sz="2800">
+                <a:solidFill>
+                  <a:srgbClr val="FFFFFF"/>
+                </a:solidFill>
+                <a:latin typeface="Play"/>
+                <a:ea typeface="Play"/>
+                <a:cs typeface="Play"/>
+              </a:defRPr>
+            </a:pPr>
+            <a:r>
+              <a:rPr sz="2800">
+                <a:solidFill>
+                  <a:srgbClr val="FFFFFF"/>
+                </a:solidFill>
+                <a:latin typeface="Play"/>
+                <a:ea typeface="Play"/>
+                <a:cs typeface="Play"/>
+              </a:rPr>
+              <a:t>• Запуск на всю компанию</a:t>
+            </a:r>
+          </a:p>
+          <a:p>
+            <a:pPr algn="l">
+              <a:spcAft>
+                <a:spcPts val="300"/>
+              </a:spcAft>
+              <a:defRPr sz="2800">
+                <a:solidFill>
+                  <a:srgbClr val="FFFFFF"/>
+                </a:solidFill>
+                <a:latin typeface="Play"/>
+                <a:ea typeface="Play"/>
+                <a:cs typeface="Play"/>
+              </a:defRPr>
+            </a:pPr>
+            <a:r>
+              <a:rPr sz="2800">
+                <a:solidFill>
+                  <a:srgbClr val="FFFFFF"/>
+                </a:solidFill>
+                <a:latin typeface="Play"/>
+                <a:ea typeface="Play"/>
+                <a:cs typeface="Play"/>
+              </a:rPr>
+              <a:t>• Бюджет на расширение инфраструктуры</a:t>
+            </a:r>
+          </a:p>
+          <a:p>
+            <a:pPr algn="l">
+              <a:spcAft>
+                <a:spcPts val="300"/>
+              </a:spcAft>
+              <a:defRPr sz="2800">
+                <a:solidFill>
+                  <a:srgbClr val="FFFFFF"/>
+                </a:solidFill>
+                <a:latin typeface="Play"/>
+                <a:ea typeface="Play"/>
+                <a:cs typeface="Play"/>
+              </a:defRPr>
+            </a:pPr>
+            <a:r>
+              <a:rPr sz="2800">
+                <a:solidFill>
+                  <a:srgbClr val="FFFFFF"/>
+                </a:solidFill>
+                <a:latin typeface="Play"/>
+                <a:ea typeface="Play"/>
+                <a:cs typeface="Play"/>
+              </a:rPr>
+              <a:t>• Назначение ответственных за интеграцию</a:t>
+            </a:r>
+          </a:p>
+        </p:txBody>
+      </p:sp>
+    </p:spTree>
+  </p:cSld>
+  <p:clrMapOvr>
+    <a:masterClrMapping/>
+  </p:clrMapOvr>
+</p:sld>
+</file>
+
+<file path=ppt/slides/slide38.xml><?xml version="1.0" encoding="utf-8"?>
+<p:sld xmlns:a="http://schemas.openxmlformats.org/drawingml/2006/main" xmlns:p="http://schemas.openxmlformats.org/presentationml/2006/main" xmlns:r="http://schemas.openxmlformats.org/officeDocument/2006/relationships">
+  <p:cSld>
+    <p:spTree>
+      <p:nvGrpSpPr>
+        <p:cNvPr id="1" name=""/>
+        <p:cNvGrpSpPr/>
+        <p:nvPr/>
+      </p:nvGrpSpPr>
+      <p:grpSpPr/>
+      <p:pic>
+        <p:nvPicPr>
+          <p:cNvPr id="620" name="Google Shape;620;p28"/>
+          <p:cNvPicPr preferRelativeResize="0"/>
+          <p:nvPr/>
+        </p:nvPicPr>
+        <p:blipFill rotWithShape="1">
+          <a:blip r:embed="rId3">
+            <a:alphaModFix/>
+          </a:blip>
+          <a:srcRect b="0" l="0" r="0" t="0"/>
+          <a:stretch/>
+        </p:blipFill>
+        <p:spPr>
+          <a:xfrm>
+            <a:off x="398723" y="6160516"/>
+            <a:ext cx="1857481" cy="292671"/>
+          </a:xfrm>
+          <a:prstGeom prst="rect">
+            <a:avLst/>
+          </a:prstGeom>
+          <a:noFill/>
+          <a:ln>
+            <a:noFill/>
+          </a:ln>
+        </p:spPr>
+      </p:pic>
+      <p:pic>
+        <p:nvPicPr>
+          <p:cNvPr descr=" " id="621" name="Google Shape;621;p28"/>
+          <p:cNvPicPr preferRelativeResize="0"/>
+          <p:nvPr/>
+        </p:nvPicPr>
+        <p:blipFill rotWithShape="1">
+          <a:blip r:embed="rId4">
+            <a:alphaModFix/>
+          </a:blip>
+          <a:srcRect b="0" l="0" r="0" t="0"/>
+          <a:stretch/>
+        </p:blipFill>
+        <p:spPr>
+          <a:xfrm>
+            <a:off x="11093496" y="6238282"/>
+            <a:ext cx="690517" cy="216000"/>
+          </a:xfrm>
+          <a:prstGeom prst="rect">
+            <a:avLst/>
+          </a:prstGeom>
+          <a:noFill/>
+          <a:ln>
+            <a:noFill/>
+          </a:ln>
+        </p:spPr>
+      </p:pic>
+      <p:sp>
+        <p:nvSpPr>
+          <p:cNvPr id="622" name="title"/>
+          <p:cNvSpPr txBox="1"/>
+          <p:nvPr/>
+        </p:nvSpPr>
+        <p:spPr>
+          <a:xfrm>
+            <a:off x="429280" y="424715"/>
+            <a:ext cx="7827264" cy="822960"/>
+          </a:xfrm>
+          <a:prstGeom prst="rect">
+            <a:avLst/>
+          </a:prstGeom>
+          <a:noFill/>
+        </p:spPr>
+        <p:txBody>
+          <a:bodyPr wrap="square" lIns="76200" rIns="76200" tIns="50800" bIns="50800">
+            <a:spAutoFit/>
+          </a:bodyPr>
+          <a:lstStyle/>
+          <a:p>
+            <a:pPr algn="l">
+              <a:spcAft>
+                <a:spcPts val="300"/>
+              </a:spcAft>
+              <a:defRPr sz="3200">
+                <a:solidFill>
+                  <a:srgbClr val="FFFFFF"/>
+                </a:solidFill>
+                <a:latin typeface="Play"/>
+                <a:ea typeface="Play"/>
+                <a:cs typeface="Play"/>
+              </a:defRPr>
+            </a:pPr>
+            <a:r>
+              <a:rPr sz="3200">
+                <a:solidFill>
+                  <a:srgbClr val="FFFFFF"/>
+                </a:solidFill>
+                <a:latin typeface="Play"/>
+                <a:ea typeface="Play"/>
+                <a:cs typeface="Play"/>
+              </a:rPr>
+              <a:t>Риски</a:t>
+            </a:r>
+          </a:p>
+        </p:txBody>
+      </p:sp>
+      <p:sp>
+        <p:nvSpPr>
+          <p:cNvPr id="623" name="body"/>
+          <p:cNvSpPr txBox="1"/>
+          <p:nvPr/>
+        </p:nvSpPr>
+        <p:spPr>
+          <a:xfrm>
+            <a:off x="429280" y="2310261"/>
+            <a:ext cx="11310884" cy="1488440"/>
+          </a:xfrm>
+          <a:prstGeom prst="rect">
+            <a:avLst/>
+          </a:prstGeom>
+          <a:noFill/>
+        </p:spPr>
+        <p:txBody>
+          <a:bodyPr wrap="square" lIns="76200" rIns="76200" tIns="50800" bIns="50800">
+            <a:spAutoFit/>
+          </a:bodyPr>
+          <a:lstStyle/>
+          <a:p>
+            <a:pPr algn="l">
+              <a:spcAft>
+                <a:spcPts val="300"/>
+              </a:spcAft>
+              <a:defRPr sz="2800">
+                <a:solidFill>
+                  <a:srgbClr val="FFFFFF"/>
+                </a:solidFill>
+                <a:latin typeface="Play"/>
+                <a:ea typeface="Play"/>
+                <a:cs typeface="Play"/>
+              </a:defRPr>
+            </a:pPr>
+            <a:r>
+              <a:rPr sz="2800">
+                <a:solidFill>
+                  <a:srgbClr val="FFFFFF"/>
+                </a:solidFill>
+                <a:latin typeface="Play"/>
+                <a:ea typeface="Play"/>
+                <a:cs typeface="Play"/>
+              </a:rPr>
+              <a:t>• Слабая модель может выдумать цифры</a:t>
+            </a:r>
+          </a:p>
+          <a:p>
+            <a:pPr algn="l">
+              <a:spcAft>
+                <a:spcPts val="300"/>
+              </a:spcAft>
+              <a:defRPr sz="2800">
+                <a:solidFill>
+                  <a:srgbClr val="FFFFFF"/>
+                </a:solidFill>
+                <a:latin typeface="Play"/>
+                <a:ea typeface="Play"/>
+                <a:cs typeface="Play"/>
+              </a:defRPr>
+            </a:pPr>
+            <a:r>
+              <a:rPr sz="2800">
+                <a:solidFill>
+                  <a:srgbClr val="FFFFFF"/>
+                </a:solidFill>
+                <a:latin typeface="Play"/>
+                <a:ea typeface="Play"/>
+                <a:cs typeface="Play"/>
+              </a:rPr>
+              <a:t>• Плохой шаблон может привести к некорректной вёрстке</a:t>
+            </a:r>
+          </a:p>
+          <a:p>
+            <a:pPr algn="l">
+              <a:spcAft>
+                <a:spcPts val="300"/>
+              </a:spcAft>
+              <a:defRPr sz="2800">
+                <a:solidFill>
+                  <a:srgbClr val="FFFFFF"/>
+                </a:solidFill>
+                <a:latin typeface="Play"/>
+                <a:ea typeface="Play"/>
+                <a:cs typeface="Play"/>
+              </a:defRPr>
+            </a:pPr>
+            <a:r>
+              <a:rPr sz="2800">
+                <a:solidFill>
+                  <a:srgbClr val="FFFFFF"/>
+                </a:solidFill>
+                <a:latin typeface="Play"/>
+                <a:ea typeface="Play"/>
+                <a:cs typeface="Play"/>
+              </a:rPr>
+              <a:t>• Нагрузка &gt;20 задач требует внешней очереди</a:t>
+            </a:r>
+          </a:p>
+        </p:txBody>
+      </p:sp>
+    </p:spTree>
+  </p:cSld>
+  <p:clrMapOvr>
+    <a:masterClrMapping/>
+  </p:clrMapOvr>
+</p:sld>
+</file>
+
+<file path=ppt/slides/slide39.xml><?xml version="1.0" encoding="utf-8"?>
 <p:sld xmlns:a="http://schemas.openxmlformats.org/drawingml/2006/main" xmlns:p="http://schemas.openxmlformats.org/presentationml/2006/main" xmlns:r="http://schemas.openxmlformats.org/officeDocument/2006/relationships">
   <p:cSld>
     <p:spTree>
@@ -8642,7 +9659,7 @@
                 <a:ea typeface="Play"/>
                 <a:cs typeface="Play"/>
               </a:rPr>
-              <a:t>План пилота</a:t>
+              <a:t>Команда</a:t>
             </a:r>
           </a:p>
         </p:txBody>
@@ -8655,8 +9672,8 @@
         </p:nvSpPr>
         <p:spPr>
           <a:xfrm>
-            <a:off x="429280" y="1592290"/>
-            <a:ext cx="5472562" cy="4181322"/>
+            <a:off x="429280" y="1492575"/>
+            <a:ext cx="5472562" cy="4014604"/>
           </a:xfrm>
           <a:prstGeom prst="rect">
             <a:avLst/>
@@ -8691,7 +9708,7 @@
                 <a:ea typeface="Play"/>
                 <a:cs typeface="Play"/>
               </a:rPr>
-              <a:t>• 6 недель, 2 команды, 68 презентаций</a:t>
+              <a:t>• Дизайн‑отдел 4 человека, 11 запросов/нед, 6 дней ожидания</a:t>
             </a:r>
           </a:p>
           <a:p>
@@ -8717,33 +9734,7 @@
                 <a:ea typeface="Play"/>
                 <a:cs typeface="Play"/>
               </a:rPr>
-              <a:t>• Время сборки 4 мин, 38 запросов закрыто</a:t>
-            </a:r>
-          </a:p>
-          <a:p>
-            <a:pPr algn="l">
-              <a:spcAft>
-                <a:spcPts val="300"/>
-              </a:spcAft>
-              <a:defRPr sz="1600">
-                <a:solidFill>
-                  <a:srgbClr val="FFFFFF"/>
-                </a:solidFill>
-                <a:latin typeface="Play"/>
-                <a:ea typeface="Play"/>
-                <a:cs typeface="Play"/>
-              </a:defRPr>
-            </a:pPr>
-            <a:r>
-              <a:rPr sz="1600">
-                <a:solidFill>
-                  <a:srgbClr val="FFFFFF"/>
-                </a:solidFill>
-                <a:latin typeface="Play"/>
-                <a:ea typeface="Play"/>
-                <a:cs typeface="Play"/>
-              </a:rPr>
-              <a:t>• Нарушений – 2 из 68</a:t>
+              <a:t>• Пилотные команды 2, 68 презентаций</a:t>
             </a:r>
           </a:p>
         </p:txBody>
@@ -8757,8 +9748,8 @@
           <p:nvPr/>
         </p:nvGraphicFramePr>
         <p:xfrm>
-          <a:off x="6267602" y="1592290"/>
-          <a:ext cx="5472562" cy="4181322"/>
+          <a:off x="6267602" y="1492575"/>
+          <a:ext cx="5472562" cy="4014604"/>
         </p:xfrm>
         <a:graphic>
           <a:graphicData uri="http://schemas.openxmlformats.org/drawingml/2006/table">
@@ -8767,11 +9758,10 @@
                 <a:tableStyleId>{5C22544A-7EE6-4342-B048-85BDC9FD1C3A}</a:tableStyleId>
               </a:tblPr>
               <a:tblGrid>
-                <a:gridCol w="1824187"/>
-                <a:gridCol w="1824187"/>
-                <a:gridCol w="1824188"/>
+                <a:gridCol w="2736281"/>
+                <a:gridCol w="2736281"/>
               </a:tblGrid>
-              <a:tr h="836264">
+              <a:tr h="669100">
                 <a:tc>
                   <a:txBody>
                     <a:bodyPr/>
@@ -8788,7 +9778,7 @@
                         </a:defRPr>
                       </a:pPr>
                       <a:r>
-                        <a:t>Метрика</a:t>
+                        <a:t>Роль</a:t>
                       </a:r>
                     </a:p>
                   </a:txBody>
@@ -8814,33 +9804,7 @@
                         </a:defRPr>
                       </a:pPr>
                       <a:r>
-                        <a:t>Ручной</a:t>
-                      </a:r>
-                    </a:p>
-                  </a:txBody>
-                  <a:tcPr>
-                    <a:solidFill>
-                      <a:srgbClr val="0077FF"/>
-                    </a:solidFill>
-                  </a:tcPr>
-                </a:tc>
-                <a:tc>
-                  <a:txBody>
-                    <a:bodyPr/>
-                    <a:lstStyle/>
-                    <a:p>
-                      <a:pPr>
-                        <a:defRPr sz="1300" b="1">
-                          <a:solidFill>
-                            <a:srgbClr val="FFFFFF"/>
-                          </a:solidFill>
-                          <a:latin typeface="Play"/>
-                          <a:ea typeface="Play"/>
-                          <a:cs typeface="Play"/>
-                        </a:defRPr>
-                      </a:pPr>
-                      <a:r>
-                        <a:t>Пилот</a:t>
+                        <a:t>Количество</a:t>
                       </a:r>
                     </a:p>
                   </a:txBody>
@@ -8851,7 +9815,7 @@
                   </a:tcPr>
                 </a:tc>
               </a:tr>
-              <a:tr h="836264">
+              <a:tr h="669100">
                 <a:tc>
                   <a:txBody>
                     <a:bodyPr/>
@@ -8868,7 +9832,7 @@
                         </a:defRPr>
                       </a:pPr>
                       <a:r>
-                        <a:t>Кол-во презентаций</a:t>
+                        <a:t>Дизайн‑отдел</a:t>
                       </a:r>
                     </a:p>
                   </a:txBody>
@@ -8894,7 +9858,197 @@
                         </a:defRPr>
                       </a:pPr>
                       <a:r>
-                        <a:t>42</a:t>
+                        <a:t>4 человека</a:t>
+                      </a:r>
+                    </a:p>
+                  </a:txBody>
+                  <a:tcPr>
+                    <a:solidFill>
+                      <a:srgbClr val="111111"/>
+                    </a:solidFill>
+                  </a:tcPr>
+                </a:tc>
+              </a:tr>
+              <a:tr h="669100">
+                <a:tc>
+                  <a:txBody>
+                    <a:bodyPr/>
+                    <a:lstStyle/>
+                    <a:p>
+                      <a:pPr>
+                        <a:defRPr sz="1300" b="0">
+                          <a:solidFill>
+                            <a:srgbClr val="FFFFFF"/>
+                          </a:solidFill>
+                          <a:latin typeface="Play"/>
+                          <a:ea typeface="Play"/>
+                          <a:cs typeface="Play"/>
+                        </a:defRPr>
+                      </a:pPr>
+                      <a:r>
+                        <a:t>Запросы</a:t>
+                      </a:r>
+                    </a:p>
+                  </a:txBody>
+                  <a:tcPr>
+                    <a:solidFill>
+                      <a:srgbClr val="111111"/>
+                    </a:solidFill>
+                  </a:tcPr>
+                </a:tc>
+                <a:tc>
+                  <a:txBody>
+                    <a:bodyPr/>
+                    <a:lstStyle/>
+                    <a:p>
+                      <a:pPr>
+                        <a:defRPr sz="1300" b="0">
+                          <a:solidFill>
+                            <a:srgbClr val="FFFFFF"/>
+                          </a:solidFill>
+                          <a:latin typeface="Play"/>
+                          <a:ea typeface="Play"/>
+                          <a:cs typeface="Play"/>
+                        </a:defRPr>
+                      </a:pPr>
+                      <a:r>
+                        <a:t>11/нед</a:t>
+                      </a:r>
+                    </a:p>
+                  </a:txBody>
+                  <a:tcPr>
+                    <a:solidFill>
+                      <a:srgbClr val="111111"/>
+                    </a:solidFill>
+                  </a:tcPr>
+                </a:tc>
+              </a:tr>
+              <a:tr h="669100">
+                <a:tc>
+                  <a:txBody>
+                    <a:bodyPr/>
+                    <a:lstStyle/>
+                    <a:p>
+                      <a:pPr>
+                        <a:defRPr sz="1300" b="0">
+                          <a:solidFill>
+                            <a:srgbClr val="FFFFFF"/>
+                          </a:solidFill>
+                          <a:latin typeface="Play"/>
+                          <a:ea typeface="Play"/>
+                          <a:cs typeface="Play"/>
+                        </a:defRPr>
+                      </a:pPr>
+                      <a:r>
+                        <a:t>Ожидание</a:t>
+                      </a:r>
+                    </a:p>
+                  </a:txBody>
+                  <a:tcPr>
+                    <a:solidFill>
+                      <a:srgbClr val="111111"/>
+                    </a:solidFill>
+                  </a:tcPr>
+                </a:tc>
+                <a:tc>
+                  <a:txBody>
+                    <a:bodyPr/>
+                    <a:lstStyle/>
+                    <a:p>
+                      <a:pPr>
+                        <a:defRPr sz="1300" b="0">
+                          <a:solidFill>
+                            <a:srgbClr val="FFFFFF"/>
+                          </a:solidFill>
+                          <a:latin typeface="Play"/>
+                          <a:ea typeface="Play"/>
+                          <a:cs typeface="Play"/>
+                        </a:defRPr>
+                      </a:pPr>
+                      <a:r>
+                        <a:t>6 дней</a:t>
+                      </a:r>
+                    </a:p>
+                  </a:txBody>
+                  <a:tcPr>
+                    <a:solidFill>
+                      <a:srgbClr val="111111"/>
+                    </a:solidFill>
+                  </a:tcPr>
+                </a:tc>
+              </a:tr>
+              <a:tr h="669100">
+                <a:tc>
+                  <a:txBody>
+                    <a:bodyPr/>
+                    <a:lstStyle/>
+                    <a:p>
+                      <a:pPr>
+                        <a:defRPr sz="1300" b="0">
+                          <a:solidFill>
+                            <a:srgbClr val="FFFFFF"/>
+                          </a:solidFill>
+                          <a:latin typeface="Play"/>
+                          <a:ea typeface="Play"/>
+                          <a:cs typeface="Play"/>
+                        </a:defRPr>
+                      </a:pPr>
+                      <a:r>
+                        <a:t>Пилотные команды</a:t>
+                      </a:r>
+                    </a:p>
+                  </a:txBody>
+                  <a:tcPr>
+                    <a:solidFill>
+                      <a:srgbClr val="111111"/>
+                    </a:solidFill>
+                  </a:tcPr>
+                </a:tc>
+                <a:tc>
+                  <a:txBody>
+                    <a:bodyPr/>
+                    <a:lstStyle/>
+                    <a:p>
+                      <a:pPr>
+                        <a:defRPr sz="1300" b="0">
+                          <a:solidFill>
+                            <a:srgbClr val="FFFFFF"/>
+                          </a:solidFill>
+                          <a:latin typeface="Play"/>
+                          <a:ea typeface="Play"/>
+                          <a:cs typeface="Play"/>
+                        </a:defRPr>
+                      </a:pPr>
+                      <a:r>
+                        <a:t>2</a:t>
+                      </a:r>
+                    </a:p>
+                  </a:txBody>
+                  <a:tcPr>
+                    <a:solidFill>
+                      <a:srgbClr val="111111"/>
+                    </a:solidFill>
+                  </a:tcPr>
+                </a:tc>
+              </a:tr>
+              <a:tr h="669104">
+                <a:tc>
+                  <a:txBody>
+                    <a:bodyPr/>
+                    <a:lstStyle/>
+                    <a:p>
+                      <a:pPr>
+                        <a:defRPr sz="1300" b="0">
+                          <a:solidFill>
+                            <a:srgbClr val="FFFFFF"/>
+                          </a:solidFill>
+                          <a:latin typeface="Play"/>
+                          <a:ea typeface="Play"/>
+                          <a:cs typeface="Play"/>
+                        </a:defRPr>
+                      </a:pPr>
+                      <a:r>
+                        <a:t>Презентации</a:t>
                       </a:r>
                     </a:p>
                   </a:txBody>
@@ -8921,246 +10075,6 @@
                       </a:pPr>
                       <a:r>
                         <a:t>68</a:t>
-                      </a:r>
-                    </a:p>
-                  </a:txBody>
-                  <a:tcPr>
-                    <a:solidFill>
-                      <a:srgbClr val="111111"/>
-                    </a:solidFill>
-                  </a:tcPr>
-                </a:tc>
-              </a:tr>
-              <a:tr h="836264">
-                <a:tc>
-                  <a:txBody>
-                    <a:bodyPr/>
-                    <a:lstStyle/>
-                    <a:p>
-                      <a:pPr>
-                        <a:defRPr sz="1300" b="0">
-                          <a:solidFill>
-                            <a:srgbClr val="FFFFFF"/>
-                          </a:solidFill>
-                          <a:latin typeface="Play"/>
-                          <a:ea typeface="Play"/>
-                          <a:cs typeface="Play"/>
-                        </a:defRPr>
-                      </a:pPr>
-                      <a:r>
-                        <a:t>Время сборки (мин)</a:t>
-                      </a:r>
-                    </a:p>
-                  </a:txBody>
-                  <a:tcPr>
-                    <a:solidFill>
-                      <a:srgbClr val="111111"/>
-                    </a:solidFill>
-                  </a:tcPr>
-                </a:tc>
-                <a:tc>
-                  <a:txBody>
-                    <a:bodyPr/>
-                    <a:lstStyle/>
-                    <a:p>
-                      <a:pPr>
-                        <a:defRPr sz="1300" b="0">
-                          <a:solidFill>
-                            <a:srgbClr val="FFFFFF"/>
-                          </a:solidFill>
-                          <a:latin typeface="Play"/>
-                          <a:ea typeface="Play"/>
-                          <a:cs typeface="Play"/>
-                        </a:defRPr>
-                      </a:pPr>
-                      <a:r>
-                        <a:t>186</a:t>
-                      </a:r>
-                    </a:p>
-                  </a:txBody>
-                  <a:tcPr>
-                    <a:solidFill>
-                      <a:srgbClr val="111111"/>
-                    </a:solidFill>
-                  </a:tcPr>
-                </a:tc>
-                <a:tc>
-                  <a:txBody>
-                    <a:bodyPr/>
-                    <a:lstStyle/>
-                    <a:p>
-                      <a:pPr>
-                        <a:defRPr sz="1300" b="0">
-                          <a:solidFill>
-                            <a:srgbClr val="FFFFFF"/>
-                          </a:solidFill>
-                          <a:latin typeface="Play"/>
-                          <a:ea typeface="Play"/>
-                          <a:cs typeface="Play"/>
-                        </a:defRPr>
-                      </a:pPr>
-                      <a:r>
-                        <a:t>4</a:t>
-                      </a:r>
-                    </a:p>
-                  </a:txBody>
-                  <a:tcPr>
-                    <a:solidFill>
-                      <a:srgbClr val="111111"/>
-                    </a:solidFill>
-                  </a:tcPr>
-                </a:tc>
-              </a:tr>
-              <a:tr h="836264">
-                <a:tc>
-                  <a:txBody>
-                    <a:bodyPr/>
-                    <a:lstStyle/>
-                    <a:p>
-                      <a:pPr>
-                        <a:defRPr sz="1300" b="0">
-                          <a:solidFill>
-                            <a:srgbClr val="FFFFFF"/>
-                          </a:solidFill>
-                          <a:latin typeface="Play"/>
-                          <a:ea typeface="Play"/>
-                          <a:cs typeface="Play"/>
-                        </a:defRPr>
-                      </a:pPr>
-                      <a:r>
-                        <a:t>Запросы на вёрстку/нед</a:t>
-                      </a:r>
-                    </a:p>
-                  </a:txBody>
-                  <a:tcPr>
-                    <a:solidFill>
-                      <a:srgbClr val="111111"/>
-                    </a:solidFill>
-                  </a:tcPr>
-                </a:tc>
-                <a:tc>
-                  <a:txBody>
-                    <a:bodyPr/>
-                    <a:lstStyle/>
-                    <a:p>
-                      <a:pPr>
-                        <a:defRPr sz="1300" b="0">
-                          <a:solidFill>
-                            <a:srgbClr val="FFFFFF"/>
-                          </a:solidFill>
-                          <a:latin typeface="Play"/>
-                          <a:ea typeface="Play"/>
-                          <a:cs typeface="Play"/>
-                        </a:defRPr>
-                      </a:pPr>
-                      <a:r>
-                        <a:t>11</a:t>
-                      </a:r>
-                    </a:p>
-                  </a:txBody>
-                  <a:tcPr>
-                    <a:solidFill>
-                      <a:srgbClr val="111111"/>
-                    </a:solidFill>
-                  </a:tcPr>
-                </a:tc>
-                <a:tc>
-                  <a:txBody>
-                    <a:bodyPr/>
-                    <a:lstStyle/>
-                    <a:p>
-                      <a:pPr>
-                        <a:defRPr sz="1300" b="0">
-                          <a:solidFill>
-                            <a:srgbClr val="FFFFFF"/>
-                          </a:solidFill>
-                          <a:latin typeface="Play"/>
-                          <a:ea typeface="Play"/>
-                          <a:cs typeface="Play"/>
-                        </a:defRPr>
-                      </a:pPr>
-                      <a:r>
-                        <a:t>38</a:t>
-                      </a:r>
-                    </a:p>
-                  </a:txBody>
-                  <a:tcPr>
-                    <a:solidFill>
-                      <a:srgbClr val="111111"/>
-                    </a:solidFill>
-                  </a:tcPr>
-                </a:tc>
-              </a:tr>
-              <a:tr h="836266">
-                <a:tc>
-                  <a:txBody>
-                    <a:bodyPr/>
-                    <a:lstStyle/>
-                    <a:p>
-                      <a:pPr>
-                        <a:defRPr sz="1300" b="0">
-                          <a:solidFill>
-                            <a:srgbClr val="FFFFFF"/>
-                          </a:solidFill>
-                          <a:latin typeface="Play"/>
-                          <a:ea typeface="Play"/>
-                          <a:cs typeface="Play"/>
-                        </a:defRPr>
-                      </a:pPr>
-                      <a:r>
-                        <a:t>Нарушения стиля</a:t>
-                      </a:r>
-                    </a:p>
-                  </a:txBody>
-                  <a:tcPr>
-                    <a:solidFill>
-                      <a:srgbClr val="111111"/>
-                    </a:solidFill>
-                  </a:tcPr>
-                </a:tc>
-                <a:tc>
-                  <a:txBody>
-                    <a:bodyPr/>
-                    <a:lstStyle/>
-                    <a:p>
-                      <a:pPr>
-                        <a:defRPr sz="1300" b="0">
-                          <a:solidFill>
-                            <a:srgbClr val="FFFFFF"/>
-                          </a:solidFill>
-                          <a:latin typeface="Play"/>
-                          <a:ea typeface="Play"/>
-                          <a:cs typeface="Play"/>
-                        </a:defRPr>
-                      </a:pPr>
-                      <a:r>
-                        <a:t>19</a:t>
-                      </a:r>
-                    </a:p>
-                  </a:txBody>
-                  <a:tcPr>
-                    <a:solidFill>
-                      <a:srgbClr val="111111"/>
-                    </a:solidFill>
-                  </a:tcPr>
-                </a:tc>
-                <a:tc>
-                  <a:txBody>
-                    <a:bodyPr/>
-                    <a:lstStyle/>
-                    <a:p>
-                      <a:pPr>
-                        <a:defRPr sz="1300" b="0">
-                          <a:solidFill>
-                            <a:srgbClr val="FFFFFF"/>
-                          </a:solidFill>
-                          <a:latin typeface="Play"/>
-                          <a:ea typeface="Play"/>
-                          <a:cs typeface="Play"/>
-                        </a:defRPr>
-                      </a:pPr>
-                      <a:r>
-                        <a:t>2</a:t>
                       </a:r>
                     </a:p>
                   </a:txBody>

--- a/samples/VK_WorkSpace_Клиентская_конференция_Шабл__split.pptx
+++ b/samples/VK_WorkSpace_Клиентская_конференция_Шабл__split.pptx
@@ -284,6 +284,220 @@
     </p:ext>
   </p:extLst>
 </p:presentation>
+</file>
+
+<file path=ppt/charts/chart1.xml><?xml version="1.0" encoding="utf-8"?>
+<c:chartSpace xmlns:c="http://schemas.openxmlformats.org/drawingml/2006/chart" xmlns:a="http://schemas.openxmlformats.org/drawingml/2006/main" xmlns:r="http://schemas.openxmlformats.org/officeDocument/2006/relationships">
+  <c:date1904 val="0"/>
+  <c:chart>
+    <c:autoTitleDeleted val="1"/>
+    <c:plotArea>
+      <c:barChart>
+        <c:barDir val="col"/>
+        <c:grouping val="clustered"/>
+        <c:ser>
+          <c:idx val="0"/>
+          <c:order val="0"/>
+          <c:tx>
+            <c:strRef>
+              <c:f>Sheet1!$B$1</c:f>
+              <c:strCache>
+                <c:ptCount val="1"/>
+                <c:pt idx="0">
+                  <c:v>Время</c:v>
+                </c:pt>
+              </c:strCache>
+            </c:strRef>
+          </c:tx>
+          <c:spPr>
+            <a:solidFill>
+              <a:srgbClr val="0077FF"/>
+            </a:solidFill>
+            <a:ln>
+              <a:solidFill>
+                <a:srgbClr val="0077FF"/>
+              </a:solidFill>
+            </a:ln>
+          </c:spPr>
+          <c:cat>
+            <c:strRef>
+              <c:f>Sheet1!$A$2:$A$3</c:f>
+              <c:strCache>
+                <c:ptCount val="2"/>
+                <c:pt idx="0">
+                  <c:v>Текущая сборка</c:v>
+                </c:pt>
+                <c:pt idx="1">
+                  <c:v>Пилот</c:v>
+                </c:pt>
+              </c:strCache>
+            </c:strRef>
+          </c:cat>
+          <c:val>
+            <c:numRef>
+              <c:f>Sheet1!$B$2:$B$3</c:f>
+              <c:numCache>
+                <c:formatCode>General</c:formatCode>
+                <c:ptCount val="2"/>
+                <c:pt idx="0">
+                  <c:v>186.0</c:v>
+                </c:pt>
+                <c:pt idx="1">
+                  <c:v>4.0</c:v>
+                </c:pt>
+              </c:numCache>
+            </c:numRef>
+          </c:val>
+        </c:ser>
+        <c:dLbls>
+          <c:numFmt formatCode="0&quot; минут&quot;" sourceLinked="0"/>
+          <c:txPr>
+            <a:bodyPr wrap="none"/>
+            <a:lstStyle/>
+            <a:p>
+              <a:pPr>
+                <a:defRPr sz="1100" b="0">
+                  <a:solidFill>
+                    <a:srgbClr val="FFFFFF"/>
+                  </a:solidFill>
+                  <a:latin typeface="Play"/>
+                  <a:ea typeface="Play"/>
+                  <a:cs typeface="Play"/>
+                </a:defRPr>
+              </a:pPr>
+            </a:p>
+          </c:txPr>
+          <c:dLblPos val="outEnd"/>
+          <c:showLegendKey val="0"/>
+          <c:showVal val="1"/>
+          <c:showCatName val="0"/>
+          <c:showSerName val="0"/>
+          <c:showPercent val="0"/>
+          <c:showBubbleSize val="0"/>
+          <c:showLeaderLines val="1"/>
+        </c:dLbls>
+        <c:gapWidth val="60"/>
+        <c:axId val="-2068027336"/>
+        <c:axId val="-2113994440"/>
+      </c:barChart>
+      <c:catAx>
+        <c:axId val="-2068027336"/>
+        <c:scaling>
+          <c:orientation val="minMax"/>
+        </c:scaling>
+        <c:delete val="0"/>
+        <c:axPos val="b"/>
+        <c:majorTickMark val="out"/>
+        <c:minorTickMark val="none"/>
+        <c:tickLblPos val="nextTo"/>
+        <c:txPr>
+          <a:bodyPr/>
+          <a:lstStyle/>
+          <a:p>
+            <a:pPr>
+              <a:defRPr sz="1100" b="0">
+                <a:solidFill>
+                  <a:srgbClr val="FFFFFF"/>
+                </a:solidFill>
+                <a:latin typeface="Play"/>
+                <a:ea typeface="Play"/>
+                <a:cs typeface="Play"/>
+              </a:defRPr>
+            </a:pPr>
+          </a:p>
+        </c:txPr>
+        <c:crossAx val="-2113994440"/>
+        <c:crosses val="autoZero"/>
+        <c:auto val="1"/>
+        <c:lblAlgn val="ctr"/>
+        <c:lblOffset val="100"/>
+        <c:noMultiLvlLbl val="0"/>
+      </c:catAx>
+      <c:valAx>
+        <c:axId val="-2113994440"/>
+        <c:scaling/>
+        <c:delete val="0"/>
+        <c:axPos val="l"/>
+        <c:majorGridlines>
+          <c:spPr>
+            <a:ln w="9525">
+              <a:solidFill>
+                <a:srgbClr val="3C3C3C"/>
+              </a:solidFill>
+            </a:ln>
+          </c:spPr>
+        </c:majorGridlines>
+        <c:title>
+          <c:tx>
+            <c:rich>
+              <a:bodyPr rot="0" vert="horz"/>
+              <a:lstStyle/>
+              <a:p>
+                <a:pPr>
+                  <a:defRPr sz="1100" b="0">
+                    <a:solidFill>
+                      <a:srgbClr val="FFFFFF"/>
+                    </a:solidFill>
+                    <a:latin typeface="Play"/>
+                    <a:ea typeface="Play"/>
+                    <a:cs typeface="Play"/>
+                  </a:defRPr>
+                </a:pPr>
+                <a:r>
+                  <a:t>Время, минут</a:t>
+                </a:r>
+              </a:p>
+            </c:rich>
+          </c:tx>
+          <c:layout/>
+          <c:overlay val="0"/>
+        </c:title>
+        <c:majorTickMark val="out"/>
+        <c:minorTickMark val="none"/>
+        <c:tickLblPos val="nextTo"/>
+        <c:txPr>
+          <a:bodyPr/>
+          <a:lstStyle/>
+          <a:p>
+            <a:pPr>
+              <a:defRPr sz="1100" b="0">
+                <a:solidFill>
+                  <a:srgbClr val="FFFFFF"/>
+                </a:solidFill>
+                <a:latin typeface="Play"/>
+                <a:ea typeface="Play"/>
+                <a:cs typeface="Play"/>
+              </a:defRPr>
+            </a:pPr>
+          </a:p>
+        </c:txPr>
+        <c:crossAx val="-2068027336"/>
+        <c:crosses val="autoZero"/>
+      </c:valAx>
+    </c:plotArea>
+    <c:dispBlanksAs val="gap"/>
+  </c:chart>
+  <c:txPr>
+    <a:bodyPr/>
+    <a:lstStyle/>
+    <a:p>
+      <a:pPr>
+        <a:defRPr sz="1200" b="0">
+          <a:solidFill>
+            <a:srgbClr val="FFFFFF"/>
+          </a:solidFill>
+          <a:latin typeface="Play"/>
+          <a:ea typeface="Play"/>
+          <a:cs typeface="Play"/>
+        </a:defRPr>
+      </a:pPr>
+      <a:endParaRPr lang="en-US"/>
+    </a:p>
+  </c:txPr>
+  <c:externalData r:id="rId1">
+    <c:autoUpdate val="0"/>
+  </c:externalData>
+</c:chartSpace>
 </file>
 
 <file path=ppt/notesMasters/notesMaster1.xml><?xml version="1.0" encoding="utf-8"?>
@@ -6391,7 +6605,7 @@
                 <a:ea typeface="Play"/>
                 <a:cs typeface="Play"/>
               </a:rPr>
-              <a:t>Автоматическая вёрстка презентаций</a:t>
+              <a:t>Защита инициативы: сервис автоматической вёрстки презентаций</a:t>
             </a:r>
           </a:p>
         </p:txBody>
@@ -6405,550 +6619,6 @@
 </file>
 
 <file path=ppt/slides/slide31.xml><?xml version="1.0" encoding="utf-8"?>
-<p:sld xmlns:a="http://schemas.openxmlformats.org/drawingml/2006/main" xmlns:p="http://schemas.openxmlformats.org/presentationml/2006/main" xmlns:r="http://schemas.openxmlformats.org/officeDocument/2006/relationships">
-  <p:cSld>
-    <p:spTree>
-      <p:nvGrpSpPr>
-        <p:cNvPr id="1" name=""/>
-        <p:cNvGrpSpPr/>
-        <p:nvPr/>
-      </p:nvGrpSpPr>
-      <p:grpSpPr/>
-      <p:sp>
-        <p:nvSpPr>
-          <p:cNvPr id="2" name="title"/>
-          <p:cNvSpPr txBox="1"/>
-          <p:nvPr/>
-        </p:nvSpPr>
-        <p:spPr>
-          <a:xfrm>
-            <a:off x="429280" y="424715"/>
-            <a:ext cx="7827264" cy="822960"/>
-          </a:xfrm>
-          <a:prstGeom prst="rect">
-            <a:avLst/>
-          </a:prstGeom>
-          <a:noFill/>
-        </p:spPr>
-        <p:txBody>
-          <a:bodyPr wrap="square" lIns="76200" rIns="76200" tIns="50800" bIns="50800">
-            <a:spAutoFit/>
-          </a:bodyPr>
-          <a:lstStyle/>
-          <a:p>
-            <a:pPr algn="l">
-              <a:spcAft>
-                <a:spcPts val="300"/>
-              </a:spcAft>
-              <a:defRPr sz="3200">
-                <a:solidFill>
-                  <a:srgbClr val="FFFFFF"/>
-                </a:solidFill>
-                <a:latin typeface="Play"/>
-                <a:ea typeface="Play"/>
-                <a:cs typeface="Play"/>
-              </a:defRPr>
-            </a:pPr>
-            <a:r>
-              <a:rPr sz="3200">
-                <a:solidFill>
-                  <a:srgbClr val="FFFFFF"/>
-                </a:solidFill>
-                <a:latin typeface="Play"/>
-                <a:ea typeface="Play"/>
-                <a:cs typeface="Play"/>
-              </a:rPr>
-              <a:t>Контекст и возможность</a:t>
-            </a:r>
-          </a:p>
-        </p:txBody>
-      </p:sp>
-      <p:sp>
-        <p:nvSpPr>
-          <p:cNvPr id="3" name="body"/>
-          <p:cNvSpPr txBox="1"/>
-          <p:nvPr/>
-        </p:nvSpPr>
-        <p:spPr>
-          <a:xfrm>
-            <a:off x="429280" y="1592290"/>
-            <a:ext cx="5472562" cy="4181322"/>
-          </a:xfrm>
-          <a:prstGeom prst="rect">
-            <a:avLst/>
-          </a:prstGeom>
-          <a:noFill/>
-        </p:spPr>
-        <p:txBody>
-          <a:bodyPr wrap="square" lIns="76200" rIns="76200" tIns="50800" bIns="50800">
-            <a:spAutoFit/>
-          </a:bodyPr>
-          <a:lstStyle/>
-          <a:p>
-            <a:pPr algn="l">
-              <a:spcAft>
-                <a:spcPts val="300"/>
-              </a:spcAft>
-              <a:defRPr sz="1600">
-                <a:solidFill>
-                  <a:srgbClr val="FFFFFF"/>
-                </a:solidFill>
-                <a:latin typeface="Play"/>
-                <a:ea typeface="Play"/>
-                <a:cs typeface="Play"/>
-              </a:defRPr>
-            </a:pPr>
-            <a:r>
-              <a:rPr sz="1600">
-                <a:solidFill>
-                  <a:srgbClr val="FFFFFF"/>
-                </a:solidFill>
-                <a:latin typeface="Play"/>
-                <a:ea typeface="Play"/>
-                <a:cs typeface="Play"/>
-              </a:rPr>
-              <a:t>• 42 колоды, 186 мин сборки</a:t>
-            </a:r>
-          </a:p>
-          <a:p>
-            <a:pPr algn="l">
-              <a:spcAft>
-                <a:spcPts val="300"/>
-              </a:spcAft>
-              <a:defRPr sz="1600">
-                <a:solidFill>
-                  <a:srgbClr val="FFFFFF"/>
-                </a:solidFill>
-                <a:latin typeface="Play"/>
-                <a:ea typeface="Play"/>
-                <a:cs typeface="Play"/>
-              </a:defRPr>
-            </a:pPr>
-            <a:r>
-              <a:rPr sz="1600">
-                <a:solidFill>
-                  <a:srgbClr val="FFFFFF"/>
-                </a:solidFill>
-                <a:latin typeface="Play"/>
-                <a:ea typeface="Play"/>
-                <a:cs typeface="Play"/>
-              </a:rPr>
-              <a:t>• 74 мин правок</a:t>
-            </a:r>
-          </a:p>
-          <a:p>
-            <a:pPr algn="l">
-              <a:spcAft>
-                <a:spcPts val="300"/>
-              </a:spcAft>
-              <a:defRPr sz="1600">
-                <a:solidFill>
-                  <a:srgbClr val="FFFFFF"/>
-                </a:solidFill>
-                <a:latin typeface="Play"/>
-                <a:ea typeface="Play"/>
-                <a:cs typeface="Play"/>
-              </a:defRPr>
-            </a:pPr>
-            <a:r>
-              <a:rPr sz="1600">
-                <a:solidFill>
-                  <a:srgbClr val="FFFFFF"/>
-                </a:solidFill>
-                <a:latin typeface="Play"/>
-                <a:ea typeface="Play"/>
-                <a:cs typeface="Play"/>
-              </a:rPr>
-              <a:t>• 19 нарушений фирменного стиля</a:t>
-            </a:r>
-          </a:p>
-          <a:p>
-            <a:pPr algn="l">
-              <a:spcAft>
-                <a:spcPts val="300"/>
-              </a:spcAft>
-              <a:defRPr sz="1600">
-                <a:solidFill>
-                  <a:srgbClr val="FFFFFF"/>
-                </a:solidFill>
-                <a:latin typeface="Play"/>
-                <a:ea typeface="Play"/>
-                <a:cs typeface="Play"/>
-              </a:defRPr>
-            </a:pPr>
-            <a:r>
-              <a:rPr sz="1600">
-                <a:solidFill>
-                  <a:srgbClr val="FFFFFF"/>
-                </a:solidFill>
-                <a:latin typeface="Play"/>
-                <a:ea typeface="Play"/>
-                <a:cs typeface="Play"/>
-              </a:rPr>
-              <a:t>• 4 человека, 11 запросов/нед, 6 дней ожидания</a:t>
-            </a:r>
-          </a:p>
-        </p:txBody>
-      </p:sp>
-      <p:graphicFrame>
-        <p:nvGraphicFramePr>
-          <p:cNvPr id="4" name="Table 3"/>
-          <p:cNvGraphicFramePr>
-            <a:graphicFrameLocks noGrp="1"/>
-          </p:cNvGraphicFramePr>
-          <p:nvPr/>
-        </p:nvGraphicFramePr>
-        <p:xfrm>
-          <a:off x="6267602" y="1592290"/>
-          <a:ext cx="5472562" cy="4181322"/>
-        </p:xfrm>
-        <a:graphic>
-          <a:graphicData uri="http://schemas.openxmlformats.org/drawingml/2006/table">
-            <a:tbl>
-              <a:tblPr firstRow="1" bandRow="1">
-                <a:tableStyleId>{5C22544A-7EE6-4342-B048-85BDC9FD1C3A}</a:tableStyleId>
-              </a:tblPr>
-              <a:tblGrid>
-                <a:gridCol w="2736281"/>
-                <a:gridCol w="2736281"/>
-              </a:tblGrid>
-              <a:tr h="696887">
-                <a:tc>
-                  <a:txBody>
-                    <a:bodyPr/>
-                    <a:lstStyle/>
-                    <a:p>
-                      <a:pPr>
-                        <a:defRPr sz="1300" b="1">
-                          <a:solidFill>
-                            <a:srgbClr val="FFFFFF"/>
-                          </a:solidFill>
-                          <a:latin typeface="Play"/>
-                          <a:ea typeface="Play"/>
-                          <a:cs typeface="Play"/>
-                        </a:defRPr>
-                      </a:pPr>
-                      <a:r>
-                        <a:t>Показатель</a:t>
-                      </a:r>
-                    </a:p>
-                  </a:txBody>
-                  <a:tcPr>
-                    <a:solidFill>
-                      <a:srgbClr val="0077FF"/>
-                    </a:solidFill>
-                  </a:tcPr>
-                </a:tc>
-                <a:tc>
-                  <a:txBody>
-                    <a:bodyPr/>
-                    <a:lstStyle/>
-                    <a:p>
-                      <a:pPr>
-                        <a:defRPr sz="1300" b="1">
-                          <a:solidFill>
-                            <a:srgbClr val="FFFFFF"/>
-                          </a:solidFill>
-                          <a:latin typeface="Play"/>
-                          <a:ea typeface="Play"/>
-                          <a:cs typeface="Play"/>
-                        </a:defRPr>
-                      </a:pPr>
-                      <a:r>
-                        <a:t>Значение</a:t>
-                      </a:r>
-                    </a:p>
-                  </a:txBody>
-                  <a:tcPr>
-                    <a:solidFill>
-                      <a:srgbClr val="0077FF"/>
-                    </a:solidFill>
-                  </a:tcPr>
-                </a:tc>
-              </a:tr>
-              <a:tr h="696887">
-                <a:tc>
-                  <a:txBody>
-                    <a:bodyPr/>
-                    <a:lstStyle/>
-                    <a:p>
-                      <a:pPr>
-                        <a:defRPr sz="1300" b="0">
-                          <a:solidFill>
-                            <a:srgbClr val="FFFFFF"/>
-                          </a:solidFill>
-                          <a:latin typeface="Play"/>
-                          <a:ea typeface="Play"/>
-                          <a:cs typeface="Play"/>
-                        </a:defRPr>
-                      </a:pPr>
-                      <a:r>
-                        <a:t>Сборка</a:t>
-                      </a:r>
-                    </a:p>
-                  </a:txBody>
-                  <a:tcPr>
-                    <a:solidFill>
-                      <a:srgbClr val="111111"/>
-                    </a:solidFill>
-                  </a:tcPr>
-                </a:tc>
-                <a:tc>
-                  <a:txBody>
-                    <a:bodyPr/>
-                    <a:lstStyle/>
-                    <a:p>
-                      <a:pPr>
-                        <a:defRPr sz="1300" b="0">
-                          <a:solidFill>
-                            <a:srgbClr val="FFFFFF"/>
-                          </a:solidFill>
-                          <a:latin typeface="Play"/>
-                          <a:ea typeface="Play"/>
-                          <a:cs typeface="Play"/>
-                        </a:defRPr>
-                      </a:pPr>
-                      <a:r>
-                        <a:t>186 мин</a:t>
-                      </a:r>
-                    </a:p>
-                  </a:txBody>
-                  <a:tcPr>
-                    <a:solidFill>
-                      <a:srgbClr val="111111"/>
-                    </a:solidFill>
-                  </a:tcPr>
-                </a:tc>
-              </a:tr>
-              <a:tr h="696887">
-                <a:tc>
-                  <a:txBody>
-                    <a:bodyPr/>
-                    <a:lstStyle/>
-                    <a:p>
-                      <a:pPr>
-                        <a:defRPr sz="1300" b="0">
-                          <a:solidFill>
-                            <a:srgbClr val="FFFFFF"/>
-                          </a:solidFill>
-                          <a:latin typeface="Play"/>
-                          <a:ea typeface="Play"/>
-                          <a:cs typeface="Play"/>
-                        </a:defRPr>
-                      </a:pPr>
-                      <a:r>
-                        <a:t>Правки</a:t>
-                      </a:r>
-                    </a:p>
-                  </a:txBody>
-                  <a:tcPr>
-                    <a:solidFill>
-                      <a:srgbClr val="111111"/>
-                    </a:solidFill>
-                  </a:tcPr>
-                </a:tc>
-                <a:tc>
-                  <a:txBody>
-                    <a:bodyPr/>
-                    <a:lstStyle/>
-                    <a:p>
-                      <a:pPr>
-                        <a:defRPr sz="1300" b="0">
-                          <a:solidFill>
-                            <a:srgbClr val="FFFFFF"/>
-                          </a:solidFill>
-                          <a:latin typeface="Play"/>
-                          <a:ea typeface="Play"/>
-                          <a:cs typeface="Play"/>
-                        </a:defRPr>
-                      </a:pPr>
-                      <a:r>
-                        <a:t>74 мин</a:t>
-                      </a:r>
-                    </a:p>
-                  </a:txBody>
-                  <a:tcPr>
-                    <a:solidFill>
-                      <a:srgbClr val="111111"/>
-                    </a:solidFill>
-                  </a:tcPr>
-                </a:tc>
-              </a:tr>
-              <a:tr h="696887">
-                <a:tc>
-                  <a:txBody>
-                    <a:bodyPr/>
-                    <a:lstStyle/>
-                    <a:p>
-                      <a:pPr>
-                        <a:defRPr sz="1300" b="0">
-                          <a:solidFill>
-                            <a:srgbClr val="FFFFFF"/>
-                          </a:solidFill>
-                          <a:latin typeface="Play"/>
-                          <a:ea typeface="Play"/>
-                          <a:cs typeface="Play"/>
-                        </a:defRPr>
-                      </a:pPr>
-                      <a:r>
-                        <a:t>Нарушения</a:t>
-                      </a:r>
-                    </a:p>
-                  </a:txBody>
-                  <a:tcPr>
-                    <a:solidFill>
-                      <a:srgbClr val="111111"/>
-                    </a:solidFill>
-                  </a:tcPr>
-                </a:tc>
-                <a:tc>
-                  <a:txBody>
-                    <a:bodyPr/>
-                    <a:lstStyle/>
-                    <a:p>
-                      <a:pPr>
-                        <a:defRPr sz="1300" b="0">
-                          <a:solidFill>
-                            <a:srgbClr val="FFFFFF"/>
-                          </a:solidFill>
-                          <a:latin typeface="Play"/>
-                          <a:ea typeface="Play"/>
-                          <a:cs typeface="Play"/>
-                        </a:defRPr>
-                      </a:pPr>
-                      <a:r>
-                        <a:t>19 из 42</a:t>
-                      </a:r>
-                    </a:p>
-                  </a:txBody>
-                  <a:tcPr>
-                    <a:solidFill>
-                      <a:srgbClr val="111111"/>
-                    </a:solidFill>
-                  </a:tcPr>
-                </a:tc>
-              </a:tr>
-              <a:tr h="696887">
-                <a:tc>
-                  <a:txBody>
-                    <a:bodyPr/>
-                    <a:lstStyle/>
-                    <a:p>
-                      <a:pPr>
-                        <a:defRPr sz="1300" b="0">
-                          <a:solidFill>
-                            <a:srgbClr val="FFFFFF"/>
-                          </a:solidFill>
-                          <a:latin typeface="Play"/>
-                          <a:ea typeface="Play"/>
-                          <a:cs typeface="Play"/>
-                        </a:defRPr>
-                      </a:pPr>
-                      <a:r>
-                        <a:t>Запросы</a:t>
-                      </a:r>
-                    </a:p>
-                  </a:txBody>
-                  <a:tcPr>
-                    <a:solidFill>
-                      <a:srgbClr val="111111"/>
-                    </a:solidFill>
-                  </a:tcPr>
-                </a:tc>
-                <a:tc>
-                  <a:txBody>
-                    <a:bodyPr/>
-                    <a:lstStyle/>
-                    <a:p>
-                      <a:pPr>
-                        <a:defRPr sz="1300" b="0">
-                          <a:solidFill>
-                            <a:srgbClr val="FFFFFF"/>
-                          </a:solidFill>
-                          <a:latin typeface="Play"/>
-                          <a:ea typeface="Play"/>
-                          <a:cs typeface="Play"/>
-                        </a:defRPr>
-                      </a:pPr>
-                      <a:r>
-                        <a:t>11/нед</a:t>
-                      </a:r>
-                    </a:p>
-                  </a:txBody>
-                  <a:tcPr>
-                    <a:solidFill>
-                      <a:srgbClr val="111111"/>
-                    </a:solidFill>
-                  </a:tcPr>
-                </a:tc>
-              </a:tr>
-              <a:tr h="696887">
-                <a:tc>
-                  <a:txBody>
-                    <a:bodyPr/>
-                    <a:lstStyle/>
-                    <a:p>
-                      <a:pPr>
-                        <a:defRPr sz="1300" b="0">
-                          <a:solidFill>
-                            <a:srgbClr val="FFFFFF"/>
-                          </a:solidFill>
-                          <a:latin typeface="Play"/>
-                          <a:ea typeface="Play"/>
-                          <a:cs typeface="Play"/>
-                        </a:defRPr>
-                      </a:pPr>
-                      <a:r>
-                        <a:t>Ожидание</a:t>
-                      </a:r>
-                    </a:p>
-                  </a:txBody>
-                  <a:tcPr>
-                    <a:solidFill>
-                      <a:srgbClr val="111111"/>
-                    </a:solidFill>
-                  </a:tcPr>
-                </a:tc>
-                <a:tc>
-                  <a:txBody>
-                    <a:bodyPr/>
-                    <a:lstStyle/>
-                    <a:p>
-                      <a:pPr>
-                        <a:defRPr sz="1300" b="0">
-                          <a:solidFill>
-                            <a:srgbClr val="FFFFFF"/>
-                          </a:solidFill>
-                          <a:latin typeface="Play"/>
-                          <a:ea typeface="Play"/>
-                          <a:cs typeface="Play"/>
-                        </a:defRPr>
-                      </a:pPr>
-                      <a:r>
-                        <a:t>6 дней</a:t>
-                      </a:r>
-                    </a:p>
-                  </a:txBody>
-                  <a:tcPr>
-                    <a:solidFill>
-                      <a:srgbClr val="111111"/>
-                    </a:solidFill>
-                  </a:tcPr>
-                </a:tc>
-              </a:tr>
-            </a:tbl>
-          </a:graphicData>
-        </a:graphic>
-      </p:graphicFrame>
-    </p:spTree>
-  </p:cSld>
-  <p:clrMapOvr>
-    <a:masterClrMapping/>
-  </p:clrMapOvr>
-</p:sld>
-</file>
-
-<file path=ppt/slides/slide32.xml><?xml version="1.0" encoding="utf-8"?>
 <p:sld xmlns:a="http://schemas.openxmlformats.org/drawingml/2006/main" xmlns:p="http://schemas.openxmlformats.org/presentationml/2006/main" xmlns:r="http://schemas.openxmlformats.org/officeDocument/2006/relationships">
   <p:cSld>
     <p:spTree>
@@ -7031,7 +6701,7 @@
         <p:spPr>
           <a:xfrm>
             <a:off x="300817" y="297715"/>
-            <a:ext cx="11566347" cy="5758505"/>
+            <a:ext cx="11566347" cy="4022686"/>
           </a:xfrm>
           <a:prstGeom prst="roundRect">
             <a:avLst/>
@@ -7112,7 +6782,7 @@
                 <a:ea typeface="Play"/>
                 <a:cs typeface="Play"/>
               </a:rPr>
-              <a:t>Предложение</a:t>
+              <a:t>Контекст и возможность</a:t>
             </a:r>
           </a:p>
         </p:txBody>
@@ -7125,8 +6795,8 @@
         </p:nvSpPr>
         <p:spPr>
           <a:xfrm>
-            <a:off x="427817" y="1837052"/>
-            <a:ext cx="5473293" cy="4092168"/>
+            <a:off x="427817" y="2704961"/>
+            <a:ext cx="11312347" cy="1488440"/>
           </a:xfrm>
           <a:prstGeom prst="rect">
             <a:avLst/>
@@ -7143,7 +6813,7 @@
               <a:spcAft>
                 <a:spcPts val="300"/>
               </a:spcAft>
-              <a:defRPr sz="1600">
+              <a:defRPr sz="2800">
                 <a:solidFill>
                   <a:srgbClr val="FFFFFF"/>
                 </a:solidFill>
@@ -7153,7 +6823,7 @@
               </a:defRPr>
             </a:pPr>
             <a:r>
-              <a:rPr sz="1600">
+              <a:rPr sz="2800">
                 <a:solidFill>
                   <a:srgbClr val="FFFFFF"/>
                 </a:solidFill>
@@ -7161,7 +6831,7 @@
                 <a:ea typeface="Play"/>
                 <a:cs typeface="Play"/>
               </a:rPr>
-              <a:t>• Сервис принимает pptx, материалы, применяет дизайн‑систему</a:t>
+              <a:t>• 42 колоды, 12 слайдов, 186 минут сборки</a:t>
             </a:r>
           </a:p>
           <a:p>
@@ -7169,7 +6839,7 @@
               <a:spcAft>
                 <a:spcPts val="300"/>
               </a:spcAft>
-              <a:defRPr sz="1600">
+              <a:defRPr sz="2800">
                 <a:solidFill>
                   <a:srgbClr val="FFFFFF"/>
                 </a:solidFill>
@@ -7179,7 +6849,7 @@
               </a:defRPr>
             </a:pPr>
             <a:r>
-              <a:rPr sz="1600">
+              <a:rPr sz="2800">
                 <a:solidFill>
                   <a:srgbClr val="FFFFFF"/>
                 </a:solidFill>
@@ -7187,7 +6857,7 @@
                 <a:ea typeface="Play"/>
                 <a:cs typeface="Play"/>
               </a:rPr>
-              <a:t>• Экспорт в pptx, pdf, html, слайды редактируемы</a:t>
+              <a:t>• 74 минуты правки, 19 нарушений фирменного стиля</a:t>
             </a:r>
           </a:p>
           <a:p>
@@ -7195,7 +6865,7 @@
               <a:spcAft>
                 <a:spcPts val="300"/>
               </a:spcAft>
-              <a:defRPr sz="1600">
+              <a:defRPr sz="2800">
                 <a:solidFill>
                   <a:srgbClr val="FFFFFF"/>
                 </a:solidFill>
@@ -7205,7 +6875,7 @@
               </a:defRPr>
             </a:pPr>
             <a:r>
-              <a:rPr sz="1600">
+              <a:rPr sz="2800">
                 <a:solidFill>
                   <a:srgbClr val="FFFFFF"/>
                 </a:solidFill>
@@ -7213,52 +6883,105 @@
                 <a:ea typeface="Play"/>
                 <a:cs typeface="Play"/>
               </a:rPr>
-              <a:t>• Аудит качества устраняет нарушения стиля</a:t>
+              <a:t>• 4 дизайнера, 11 запросов/неделя, 6 дней ожидания</a:t>
+            </a:r>
+          </a:p>
+        </p:txBody>
+      </p:sp>
+    </p:spTree>
+  </p:cSld>
+  <p:clrMapOvr>
+    <a:masterClrMapping/>
+  </p:clrMapOvr>
+</p:sld>
+</file>
+
+<file path=ppt/slides/slide32.xml><?xml version="1.0" encoding="utf-8"?>
+<p:sld xmlns:a="http://schemas.openxmlformats.org/drawingml/2006/main" xmlns:p="http://schemas.openxmlformats.org/presentationml/2006/main" xmlns:r="http://schemas.openxmlformats.org/officeDocument/2006/relationships">
+  <p:cSld>
+    <p:spTree>
+      <p:nvGrpSpPr>
+        <p:cNvPr id="1" name=""/>
+        <p:cNvGrpSpPr/>
+        <p:nvPr/>
+      </p:nvGrpSpPr>
+      <p:grpSpPr/>
+      <p:sp>
+        <p:nvSpPr>
+          <p:cNvPr id="2" name="title"/>
+          <p:cNvSpPr txBox="1"/>
+          <p:nvPr/>
+        </p:nvSpPr>
+        <p:spPr>
+          <a:xfrm>
+            <a:off x="429280" y="424715"/>
+            <a:ext cx="7827264" cy="822960"/>
+          </a:xfrm>
+          <a:prstGeom prst="rect">
+            <a:avLst/>
+          </a:prstGeom>
+          <a:noFill/>
+        </p:spPr>
+        <p:txBody>
+          <a:bodyPr wrap="square" lIns="76200" rIns="76200" tIns="50800" bIns="50800">
+            <a:spAutoFit/>
+          </a:bodyPr>
+          <a:lstStyle/>
+          <a:p>
+            <a:pPr algn="l">
+              <a:spcAft>
+                <a:spcPts val="300"/>
+              </a:spcAft>
+              <a:defRPr sz="3200">
+                <a:solidFill>
+                  <a:srgbClr val="FFFFFF"/>
+                </a:solidFill>
+                <a:latin typeface="Play"/>
+                <a:ea typeface="Play"/>
+                <a:cs typeface="Play"/>
+              </a:defRPr>
+            </a:pPr>
+            <a:r>
+              <a:rPr sz="3200">
+                <a:solidFill>
+                  <a:srgbClr val="FFFFFF"/>
+                </a:solidFill>
+                <a:latin typeface="Play"/>
+                <a:ea typeface="Play"/>
+                <a:cs typeface="Play"/>
+              </a:rPr>
+              <a:t>Предложение</a:t>
             </a:r>
           </a:p>
         </p:txBody>
       </p:sp>
       <p:sp>
         <p:nvSpPr>
-          <p:cNvPr id="683" name="Pentagon 682"/>
-          <p:cNvSpPr/>
+          <p:cNvPr id="3" name="body"/>
+          <p:cNvSpPr txBox="1"/>
           <p:nvPr/>
         </p:nvSpPr>
         <p:spPr>
           <a:xfrm>
-            <a:off x="6266870" y="1894342"/>
-            <a:ext cx="5473293" cy="703852"/>
+            <a:off x="429280" y="2489917"/>
+            <a:ext cx="11310884" cy="1488440"/>
           </a:xfrm>
-          <a:prstGeom prst="homePlate">
+          <a:prstGeom prst="rect">
             <a:avLst/>
           </a:prstGeom>
-          <a:solidFill>
-            <a:srgbClr val="0077FF"/>
-          </a:solidFill>
-          <a:ln>
-            <a:noFill/>
-          </a:ln>
+          <a:noFill/>
         </p:spPr>
-        <p:style>
-          <a:lnRef idx="1">
-            <a:schemeClr val="accent1"/>
-          </a:lnRef>
-          <a:fillRef idx="3">
-            <a:schemeClr val="accent1"/>
-          </a:fillRef>
-          <a:effectRef idx="2">
-            <a:schemeClr val="accent1"/>
-          </a:effectRef>
-          <a:fontRef idx="minor">
-            <a:schemeClr val="lt1"/>
-          </a:fontRef>
-        </p:style>
         <p:txBody>
-          <a:bodyPr rtlCol="0" anchor="ctr" wrap="square" lIns="12700" rIns="12700" tIns="12700" bIns="12700"/>
+          <a:bodyPr wrap="square" lIns="76200" rIns="76200" tIns="50800" bIns="50800">
+            <a:spAutoFit/>
+          </a:bodyPr>
           <a:lstStyle/>
           <a:p>
-            <a:pPr algn="ctr">
-              <a:defRPr sz="1400" b="0">
+            <a:pPr algn="l">
+              <a:spcAft>
+                <a:spcPts val="300"/>
+              </a:spcAft>
+              <a:defRPr sz="2800">
                 <a:solidFill>
                   <a:srgbClr val="FFFFFF"/>
                 </a:solidFill>
@@ -7268,7 +6991,7 @@
               </a:defRPr>
             </a:pPr>
             <a:r>
-              <a:rPr sz="1400" b="0">
+              <a:rPr sz="2800">
                 <a:solidFill>
                   <a:srgbClr val="FFFFFF"/>
                 </a:solidFill>
@@ -7276,52 +6999,15 @@
                 <a:ea typeface="Play"/>
                 <a:cs typeface="Play"/>
               </a:rPr>
-              <a:t>Шаблон</a:t>
+              <a:t>• Сервис принимает шаблон pptx и материалы</a:t>
             </a:r>
           </a:p>
-        </p:txBody>
-      </p:sp>
-      <p:sp>
-        <p:nvSpPr>
-          <p:cNvPr id="684" name="Chevron 683"/>
-          <p:cNvSpPr/>
-          <p:nvPr/>
-        </p:nvSpPr>
-        <p:spPr>
-          <a:xfrm>
-            <a:off x="6266870" y="2712775"/>
-            <a:ext cx="5473293" cy="703852"/>
-          </a:xfrm>
-          <a:prstGeom prst="chevron">
-            <a:avLst/>
-          </a:prstGeom>
-          <a:solidFill>
-            <a:srgbClr val="0077FF"/>
-          </a:solidFill>
-          <a:ln>
-            <a:noFill/>
-          </a:ln>
-        </p:spPr>
-        <p:style>
-          <a:lnRef idx="1">
-            <a:schemeClr val="accent1"/>
-          </a:lnRef>
-          <a:fillRef idx="3">
-            <a:schemeClr val="accent1"/>
-          </a:fillRef>
-          <a:effectRef idx="2">
-            <a:schemeClr val="accent1"/>
-          </a:effectRef>
-          <a:fontRef idx="minor">
-            <a:schemeClr val="lt1"/>
-          </a:fontRef>
-        </p:style>
-        <p:txBody>
-          <a:bodyPr rtlCol="0" anchor="ctr" wrap="square" lIns="12700" rIns="12700" tIns="12700" bIns="12700"/>
-          <a:lstStyle/>
           <a:p>
-            <a:pPr algn="ctr">
-              <a:defRPr sz="1400" b="0">
+            <a:pPr algn="l">
+              <a:spcAft>
+                <a:spcPts val="300"/>
+              </a:spcAft>
+              <a:defRPr sz="2800">
                 <a:solidFill>
                   <a:srgbClr val="FFFFFF"/>
                 </a:solidFill>
@@ -7331,7 +7017,7 @@
               </a:defRPr>
             </a:pPr>
             <a:r>
-              <a:rPr sz="1400" b="0">
+              <a:rPr sz="2800">
                 <a:solidFill>
                   <a:srgbClr val="FFFFFF"/>
                 </a:solidFill>
@@ -7339,52 +7025,15 @@
                 <a:ea typeface="Play"/>
                 <a:cs typeface="Play"/>
               </a:rPr>
-              <a:t>План колоды</a:t>
+              <a:t>• Генерирует колоду, экспортирует pptx/pdf/html</a:t>
             </a:r>
           </a:p>
-        </p:txBody>
-      </p:sp>
-      <p:sp>
-        <p:nvSpPr>
-          <p:cNvPr id="685" name="Chevron 684"/>
-          <p:cNvSpPr/>
-          <p:nvPr/>
-        </p:nvSpPr>
-        <p:spPr>
-          <a:xfrm>
-            <a:off x="6266870" y="3531209"/>
-            <a:ext cx="5473293" cy="703852"/>
-          </a:xfrm>
-          <a:prstGeom prst="chevron">
-            <a:avLst/>
-          </a:prstGeom>
-          <a:solidFill>
-            <a:srgbClr val="0077FF"/>
-          </a:solidFill>
-          <a:ln>
-            <a:noFill/>
-          </a:ln>
-        </p:spPr>
-        <p:style>
-          <a:lnRef idx="1">
-            <a:schemeClr val="accent1"/>
-          </a:lnRef>
-          <a:fillRef idx="3">
-            <a:schemeClr val="accent1"/>
-          </a:fillRef>
-          <a:effectRef idx="2">
-            <a:schemeClr val="accent1"/>
-          </a:effectRef>
-          <a:fontRef idx="minor">
-            <a:schemeClr val="lt1"/>
-          </a:fontRef>
-        </p:style>
-        <p:txBody>
-          <a:bodyPr rtlCol="0" anchor="ctr" wrap="square" lIns="12700" rIns="12700" tIns="12700" bIns="12700"/>
-          <a:lstStyle/>
           <a:p>
-            <a:pPr algn="ctr">
-              <a:defRPr sz="1400" b="0">
+            <a:pPr algn="l">
+              <a:spcAft>
+                <a:spcPts val="300"/>
+              </a:spcAft>
+              <a:defRPr sz="2800">
                 <a:solidFill>
                   <a:srgbClr val="FFFFFF"/>
                 </a:solidFill>
@@ -7394,7 +7043,7 @@
               </a:defRPr>
             </a:pPr>
             <a:r>
-              <a:rPr sz="1400" b="0">
+              <a:rPr sz="2800">
                 <a:solidFill>
                   <a:srgbClr val="FFFFFF"/>
                 </a:solidFill>
@@ -7402,133 +7051,7 @@
                 <a:ea typeface="Play"/>
                 <a:cs typeface="Play"/>
               </a:rPr>
-              <a:t>Вёрстка</a:t>
-            </a:r>
-          </a:p>
-        </p:txBody>
-      </p:sp>
-      <p:sp>
-        <p:nvSpPr>
-          <p:cNvPr id="686" name="Chevron 685"/>
-          <p:cNvSpPr/>
-          <p:nvPr/>
-        </p:nvSpPr>
-        <p:spPr>
-          <a:xfrm>
-            <a:off x="6266870" y="4349643"/>
-            <a:ext cx="5473293" cy="703852"/>
-          </a:xfrm>
-          <a:prstGeom prst="chevron">
-            <a:avLst/>
-          </a:prstGeom>
-          <a:solidFill>
-            <a:srgbClr val="0077FF"/>
-          </a:solidFill>
-          <a:ln>
-            <a:noFill/>
-          </a:ln>
-        </p:spPr>
-        <p:style>
-          <a:lnRef idx="1">
-            <a:schemeClr val="accent1"/>
-          </a:lnRef>
-          <a:fillRef idx="3">
-            <a:schemeClr val="accent1"/>
-          </a:fillRef>
-          <a:effectRef idx="2">
-            <a:schemeClr val="accent1"/>
-          </a:effectRef>
-          <a:fontRef idx="minor">
-            <a:schemeClr val="lt1"/>
-          </a:fontRef>
-        </p:style>
-        <p:txBody>
-          <a:bodyPr rtlCol="0" anchor="ctr" wrap="square" lIns="12700" rIns="12700" tIns="12700" bIns="12700"/>
-          <a:lstStyle/>
-          <a:p>
-            <a:pPr algn="ctr">
-              <a:defRPr sz="1400" b="0">
-                <a:solidFill>
-                  <a:srgbClr val="FFFFFF"/>
-                </a:solidFill>
-                <a:latin typeface="Play"/>
-                <a:ea typeface="Play"/>
-                <a:cs typeface="Play"/>
-              </a:defRPr>
-            </a:pPr>
-            <a:r>
-              <a:rPr sz="1400" b="0">
-                <a:solidFill>
-                  <a:srgbClr val="FFFFFF"/>
-                </a:solidFill>
-                <a:latin typeface="Play"/>
-                <a:ea typeface="Play"/>
-                <a:cs typeface="Play"/>
-              </a:rPr>
-              <a:t>Аудит</a:t>
-            </a:r>
-          </a:p>
-        </p:txBody>
-      </p:sp>
-      <p:sp>
-        <p:nvSpPr>
-          <p:cNvPr id="687" name="Chevron 686"/>
-          <p:cNvSpPr/>
-          <p:nvPr/>
-        </p:nvSpPr>
-        <p:spPr>
-          <a:xfrm>
-            <a:off x="6266870" y="5168076"/>
-            <a:ext cx="5473293" cy="703852"/>
-          </a:xfrm>
-          <a:prstGeom prst="chevron">
-            <a:avLst/>
-          </a:prstGeom>
-          <a:solidFill>
-            <a:srgbClr val="0077FF"/>
-          </a:solidFill>
-          <a:ln>
-            <a:noFill/>
-          </a:ln>
-        </p:spPr>
-        <p:style>
-          <a:lnRef idx="1">
-            <a:schemeClr val="accent1"/>
-          </a:lnRef>
-          <a:fillRef idx="3">
-            <a:schemeClr val="accent1"/>
-          </a:fillRef>
-          <a:effectRef idx="2">
-            <a:schemeClr val="accent1"/>
-          </a:effectRef>
-          <a:fontRef idx="minor">
-            <a:schemeClr val="lt1"/>
-          </a:fontRef>
-        </p:style>
-        <p:txBody>
-          <a:bodyPr rtlCol="0" anchor="ctr" wrap="square" lIns="12700" rIns="12700" tIns="12700" bIns="12700"/>
-          <a:lstStyle/>
-          <a:p>
-            <a:pPr algn="ctr">
-              <a:defRPr sz="1400" b="0">
-                <a:solidFill>
-                  <a:srgbClr val="FFFFFF"/>
-                </a:solidFill>
-                <a:latin typeface="Play"/>
-                <a:ea typeface="Play"/>
-                <a:cs typeface="Play"/>
-              </a:defRPr>
-            </a:pPr>
-            <a:r>
-              <a:rPr sz="1400" b="0">
-                <a:solidFill>
-                  <a:srgbClr val="FFFFFF"/>
-                </a:solidFill>
-                <a:latin typeface="Play"/>
-                <a:ea typeface="Play"/>
-                <a:cs typeface="Play"/>
-              </a:rPr>
-              <a:t>Экспорт</a:t>
+              <a:t>• Автоматический аудит исправляет нарушения стиля</a:t>
             </a:r>
           </a:p>
         </p:txBody>
@@ -7649,21 +7172,21 @@
                 <a:ea typeface="Play"/>
                 <a:cs typeface="Play"/>
               </a:rPr>
-              <a:t>План пилота</a:t>
+              <a:t>Ожидаемый эффект</a:t>
             </a:r>
           </a:p>
         </p:txBody>
       </p:sp>
       <p:sp>
         <p:nvSpPr>
-          <p:cNvPr id="623" name="body"/>
+          <p:cNvPr id="623" name="body_left"/>
           <p:cNvSpPr txBox="1"/>
           <p:nvPr/>
         </p:nvSpPr>
         <p:spPr>
           <a:xfrm>
-            <a:off x="429280" y="2310261"/>
-            <a:ext cx="11310884" cy="1488440"/>
+            <a:off x="429280" y="2156167"/>
+            <a:ext cx="5472562" cy="1950720"/>
           </a:xfrm>
           <a:prstGeom prst="rect">
             <a:avLst/>
@@ -7698,7 +7221,7 @@
                 <a:ea typeface="Play"/>
                 <a:cs typeface="Play"/>
               </a:rPr>
-              <a:t>• 6 недель</a:t>
+              <a:t>• Сборка 4 минуты вместо 186</a:t>
             </a:r>
           </a:p>
           <a:p>
@@ -7724,9 +7247,32 @@
                 <a:ea typeface="Play"/>
                 <a:cs typeface="Play"/>
               </a:rPr>
-              <a:t>• 2 команды</a:t>
+              <a:t>• Время до первой версии 1 день вместо 6</a:t>
             </a:r>
           </a:p>
+        </p:txBody>
+      </p:sp>
+      <p:sp>
+        <p:nvSpPr>
+          <p:cNvPr id="624" name="body_right"/>
+          <p:cNvSpPr txBox="1"/>
+          <p:nvPr/>
+        </p:nvSpPr>
+        <p:spPr>
+          <a:xfrm>
+            <a:off x="6267602" y="2156167"/>
+            <a:ext cx="5472562" cy="1950720"/>
+          </a:xfrm>
+          <a:prstGeom prst="rect">
+            <a:avLst/>
+          </a:prstGeom>
+          <a:noFill/>
+        </p:spPr>
+        <p:txBody>
+          <a:bodyPr wrap="square" lIns="76200" rIns="76200" tIns="50800" bIns="50800">
+            <a:spAutoFit/>
+          </a:bodyPr>
+          <a:lstStyle/>
           <a:p>
             <a:pPr algn="l">
               <a:spcAft>
@@ -7750,7 +7296,33 @@
                 <a:ea typeface="Play"/>
                 <a:cs typeface="Play"/>
               </a:rPr>
-              <a:t>• 68 презентаций</a:t>
+              <a:t>• Нарушений 2 из 68, все исправлены</a:t>
+            </a:r>
+          </a:p>
+          <a:p>
+            <a:pPr algn="l">
+              <a:spcAft>
+                <a:spcPts val="300"/>
+              </a:spcAft>
+              <a:defRPr sz="2800">
+                <a:solidFill>
+                  <a:srgbClr val="FFFFFF"/>
+                </a:solidFill>
+                <a:latin typeface="Play"/>
+                <a:ea typeface="Play"/>
+                <a:cs typeface="Play"/>
+              </a:defRPr>
+            </a:pPr>
+            <a:r>
+              <a:rPr sz="2800">
+                <a:solidFill>
+                  <a:srgbClr val="FFFFFF"/>
+                </a:solidFill>
+                <a:latin typeface="Play"/>
+                <a:ea typeface="Play"/>
+                <a:cs typeface="Play"/>
+              </a:rPr>
+              <a:t>• Дизайнеры закрыли 38 запросов вместо 11</a:t>
             </a:r>
           </a:p>
         </p:txBody>
@@ -7817,21 +7389,57 @@
                 <a:ea typeface="Play"/>
                 <a:cs typeface="Play"/>
               </a:rPr>
-              <a:t>Результаты пилота</a:t>
+              <a:t>Время сборки колоды</a:t>
             </a:r>
           </a:p>
         </p:txBody>
       </p:sp>
+      <p:graphicFrame>
+        <p:nvGraphicFramePr>
+          <p:cNvPr id="3" name="Chart 2"/>
+          <p:cNvGraphicFramePr>
+            <a:graphicFrameLocks noGrp="1"/>
+          </p:cNvGraphicFramePr>
+          <p:nvPr/>
+        </p:nvGraphicFramePr>
+        <p:xfrm>
+          <a:off x="6267602" y="1492575"/>
+          <a:ext cx="5472562" cy="4014604"/>
+        </p:xfrm>
+        <a:graphic>
+          <a:graphicData uri="http://schemas.openxmlformats.org/drawingml/2006/chart">
+            <c:chart xmlns:c="http://schemas.openxmlformats.org/drawingml/2006/chart" r:id="rId4"/>
+          </a:graphicData>
+        </a:graphic>
+      </p:graphicFrame>
+    </p:spTree>
+  </p:cSld>
+  <p:clrMapOvr>
+    <a:masterClrMapping/>
+  </p:clrMapOvr>
+</p:sld>
+</file>
+
+<file path=ppt/slides/slide35.xml><?xml version="1.0" encoding="utf-8"?>
+<p:sld xmlns:a="http://schemas.openxmlformats.org/drawingml/2006/main" xmlns:p="http://schemas.openxmlformats.org/presentationml/2006/main" xmlns:r="http://schemas.openxmlformats.org/officeDocument/2006/relationships">
+  <p:cSld>
+    <p:spTree>
+      <p:nvGrpSpPr>
+        <p:cNvPr id="1" name=""/>
+        <p:cNvGrpSpPr/>
+        <p:nvPr/>
+      </p:nvGrpSpPr>
+      <p:grpSpPr/>
       <p:sp>
         <p:nvSpPr>
-          <p:cNvPr id="3" name="body"/>
+          <p:cNvPr id="2" name="title"/>
           <p:cNvSpPr txBox="1"/>
           <p:nvPr/>
         </p:nvSpPr>
         <p:spPr>
           <a:xfrm>
-            <a:off x="429280" y="1492575"/>
-            <a:ext cx="5472562" cy="4014604"/>
+            <a:off x="429280" y="424715"/>
+            <a:ext cx="7827264" cy="822960"/>
           </a:xfrm>
           <a:prstGeom prst="rect">
             <a:avLst/>
@@ -7848,7 +7456,7 @@
               <a:spcAft>
                 <a:spcPts val="300"/>
               </a:spcAft>
-              <a:defRPr sz="1600">
+              <a:defRPr sz="3200">
                 <a:solidFill>
                   <a:srgbClr val="FFFFFF"/>
                 </a:solidFill>
@@ -7858,7 +7466,7 @@
               </a:defRPr>
             </a:pPr>
             <a:r>
-              <a:rPr sz="1600">
+              <a:rPr sz="3200">
                 <a:solidFill>
                   <a:srgbClr val="FFFFFF"/>
                 </a:solidFill>
@@ -7866,100 +7474,22 @@
                 <a:ea typeface="Play"/>
                 <a:cs typeface="Play"/>
               </a:rPr>
-              <a:t>• Сборка 4 мин вместо 186</a:t>
-            </a:r>
-          </a:p>
-          <a:p>
-            <a:pPr algn="l">
-              <a:spcAft>
-                <a:spcPts val="300"/>
-              </a:spcAft>
-              <a:defRPr sz="1600">
-                <a:solidFill>
-                  <a:srgbClr val="FFFFFF"/>
-                </a:solidFill>
-                <a:latin typeface="Play"/>
-                <a:ea typeface="Play"/>
-                <a:cs typeface="Play"/>
-              </a:defRPr>
-            </a:pPr>
-            <a:r>
-              <a:rPr sz="1600">
-                <a:solidFill>
-                  <a:srgbClr val="FFFFFF"/>
-                </a:solidFill>
-                <a:latin typeface="Play"/>
-                <a:ea typeface="Play"/>
-                <a:cs typeface="Play"/>
-              </a:rPr>
-              <a:t>• 1 день до первой версии вместо 6</a:t>
-            </a:r>
-          </a:p>
-          <a:p>
-            <a:pPr algn="l">
-              <a:spcAft>
-                <a:spcPts val="300"/>
-              </a:spcAft>
-              <a:defRPr sz="1600">
-                <a:solidFill>
-                  <a:srgbClr val="FFFFFF"/>
-                </a:solidFill>
-                <a:latin typeface="Play"/>
-                <a:ea typeface="Play"/>
-                <a:cs typeface="Play"/>
-              </a:defRPr>
-            </a:pPr>
-            <a:r>
-              <a:rPr sz="1600">
-                <a:solidFill>
-                  <a:srgbClr val="FFFFFF"/>
-                </a:solidFill>
-                <a:latin typeface="Play"/>
-                <a:ea typeface="Play"/>
-                <a:cs typeface="Play"/>
-              </a:rPr>
-              <a:t>• 2 нарушения из 68 вместо 19</a:t>
-            </a:r>
-          </a:p>
-          <a:p>
-            <a:pPr algn="l">
-              <a:spcAft>
-                <a:spcPts val="300"/>
-              </a:spcAft>
-              <a:defRPr sz="1600">
-                <a:solidFill>
-                  <a:srgbClr val="FFFFFF"/>
-                </a:solidFill>
-                <a:latin typeface="Play"/>
-                <a:ea typeface="Play"/>
-                <a:cs typeface="Play"/>
-              </a:defRPr>
-            </a:pPr>
-            <a:r>
-              <a:rPr sz="1600">
-                <a:solidFill>
-                  <a:srgbClr val="FFFFFF"/>
-                </a:solidFill>
-                <a:latin typeface="Play"/>
-                <a:ea typeface="Play"/>
-                <a:cs typeface="Play"/>
-              </a:rPr>
-              <a:t>• 38 запросов вместо 11</a:t>
+              <a:t>Нарушения фирменного стиля</a:t>
             </a:r>
           </a:p>
         </p:txBody>
       </p:sp>
       <p:graphicFrame>
         <p:nvGraphicFramePr>
-          <p:cNvPr id="4" name="Table 3"/>
+          <p:cNvPr id="3" name="Table 2"/>
           <p:cNvGraphicFramePr>
             <a:graphicFrameLocks noGrp="1"/>
           </p:cNvGraphicFramePr>
           <p:nvPr/>
         </p:nvGraphicFramePr>
         <p:xfrm>
-          <a:off x="6267602" y="1492575"/>
-          <a:ext cx="5472562" cy="4014604"/>
+          <a:off x="6267602" y="1664162"/>
+          <a:ext cx="5472562" cy="3753589"/>
         </p:xfrm>
         <a:graphic>
           <a:graphicData uri="http://schemas.openxmlformats.org/drawingml/2006/table">
@@ -7972,7 +7502,7 @@
                 <a:gridCol w="1824187"/>
                 <a:gridCol w="1824188"/>
               </a:tblGrid>
-              <a:tr h="802920">
+              <a:tr h="1876794">
                 <a:tc>
                   <a:txBody>
                     <a:bodyPr/>
@@ -8015,7 +7545,7 @@
                         </a:defRPr>
                       </a:pPr>
                       <a:r>
-                        <a:t>До пилота</a:t>
+                        <a:t>Текущие</a:t>
                       </a:r>
                     </a:p>
                   </a:txBody>
@@ -8041,7 +7571,7 @@
                         </a:defRPr>
                       </a:pPr>
                       <a:r>
-                        <a:t>После пилота</a:t>
+                        <a:t>Пилот</a:t>
                       </a:r>
                     </a:p>
                   </a:txBody>
@@ -8052,7 +7582,7 @@
                   </a:tcPr>
                 </a:tc>
               </a:tr>
-              <a:tr h="802920">
+              <a:tr h="1876795">
                 <a:tc>
                   <a:txBody>
                     <a:bodyPr/>
@@ -8069,167 +7599,7 @@
                         </a:defRPr>
                       </a:pPr>
                       <a:r>
-                        <a:t>Сборка</a:t>
-                      </a:r>
-                    </a:p>
-                  </a:txBody>
-                  <a:tcPr>
-                    <a:solidFill>
-                      <a:srgbClr val="111111"/>
-                    </a:solidFill>
-                  </a:tcPr>
-                </a:tc>
-                <a:tc>
-                  <a:txBody>
-                    <a:bodyPr/>
-                    <a:lstStyle/>
-                    <a:p>
-                      <a:pPr>
-                        <a:defRPr sz="1300" b="0">
-                          <a:solidFill>
-                            <a:srgbClr val="FFFFFF"/>
-                          </a:solidFill>
-                          <a:latin typeface="Play"/>
-                          <a:ea typeface="Play"/>
-                          <a:cs typeface="Play"/>
-                        </a:defRPr>
-                      </a:pPr>
-                      <a:r>
-                        <a:t>186 мин</a:t>
-                      </a:r>
-                    </a:p>
-                  </a:txBody>
-                  <a:tcPr>
-                    <a:solidFill>
-                      <a:srgbClr val="111111"/>
-                    </a:solidFill>
-                  </a:tcPr>
-                </a:tc>
-                <a:tc>
-                  <a:txBody>
-                    <a:bodyPr/>
-                    <a:lstStyle/>
-                    <a:p>
-                      <a:pPr>
-                        <a:defRPr sz="1300" b="0">
-                          <a:solidFill>
-                            <a:srgbClr val="FFFFFF"/>
-                          </a:solidFill>
-                          <a:latin typeface="Play"/>
-                          <a:ea typeface="Play"/>
-                          <a:cs typeface="Play"/>
-                        </a:defRPr>
-                      </a:pPr>
-                      <a:r>
-                        <a:t>4 мин</a:t>
-                      </a:r>
-                    </a:p>
-                  </a:txBody>
-                  <a:tcPr>
-                    <a:solidFill>
-                      <a:srgbClr val="111111"/>
-                    </a:solidFill>
-                  </a:tcPr>
-                </a:tc>
-              </a:tr>
-              <a:tr h="802920">
-                <a:tc>
-                  <a:txBody>
-                    <a:bodyPr/>
-                    <a:lstStyle/>
-                    <a:p>
-                      <a:pPr>
-                        <a:defRPr sz="1300" b="0">
-                          <a:solidFill>
-                            <a:srgbClr val="FFFFFF"/>
-                          </a:solidFill>
-                          <a:latin typeface="Play"/>
-                          <a:ea typeface="Play"/>
-                          <a:cs typeface="Play"/>
-                        </a:defRPr>
-                      </a:pPr>
-                      <a:r>
-                        <a:t>Время до первой версии</a:t>
-                      </a:r>
-                    </a:p>
-                  </a:txBody>
-                  <a:tcPr>
-                    <a:solidFill>
-                      <a:srgbClr val="111111"/>
-                    </a:solidFill>
-                  </a:tcPr>
-                </a:tc>
-                <a:tc>
-                  <a:txBody>
-                    <a:bodyPr/>
-                    <a:lstStyle/>
-                    <a:p>
-                      <a:pPr>
-                        <a:defRPr sz="1300" b="0">
-                          <a:solidFill>
-                            <a:srgbClr val="FFFFFF"/>
-                          </a:solidFill>
-                          <a:latin typeface="Play"/>
-                          <a:ea typeface="Play"/>
-                          <a:cs typeface="Play"/>
-                        </a:defRPr>
-                      </a:pPr>
-                      <a:r>
-                        <a:t>6 дней</a:t>
-                      </a:r>
-                    </a:p>
-                  </a:txBody>
-                  <a:tcPr>
-                    <a:solidFill>
-                      <a:srgbClr val="111111"/>
-                    </a:solidFill>
-                  </a:tcPr>
-                </a:tc>
-                <a:tc>
-                  <a:txBody>
-                    <a:bodyPr/>
-                    <a:lstStyle/>
-                    <a:p>
-                      <a:pPr>
-                        <a:defRPr sz="1300" b="0">
-                          <a:solidFill>
-                            <a:srgbClr val="FFFFFF"/>
-                          </a:solidFill>
-                          <a:latin typeface="Play"/>
-                          <a:ea typeface="Play"/>
-                          <a:cs typeface="Play"/>
-                        </a:defRPr>
-                      </a:pPr>
-                      <a:r>
-                        <a:t>1 день</a:t>
-                      </a:r>
-                    </a:p>
-                  </a:txBody>
-                  <a:tcPr>
-                    <a:solidFill>
-                      <a:srgbClr val="111111"/>
-                    </a:solidFill>
-                  </a:tcPr>
-                </a:tc>
-              </a:tr>
-              <a:tr h="802920">
-                <a:tc>
-                  <a:txBody>
-                    <a:bodyPr/>
-                    <a:lstStyle/>
-                    <a:p>
-                      <a:pPr>
-                        <a:defRPr sz="1300" b="0">
-                          <a:solidFill>
-                            <a:srgbClr val="FFFFFF"/>
-                          </a:solidFill>
-                          <a:latin typeface="Play"/>
-                          <a:ea typeface="Play"/>
-                          <a:cs typeface="Play"/>
-                        </a:defRPr>
-                      </a:pPr>
-                      <a:r>
-                        <a:t>Нарушения</a:t>
+                        <a:t>Нарушения фирменного стиля</a:t>
                       </a:r>
                     </a:p>
                   </a:txBody>
@@ -8292,86 +7662,6 @@
                   </a:tcPr>
                 </a:tc>
               </a:tr>
-              <a:tr h="802924">
-                <a:tc>
-                  <a:txBody>
-                    <a:bodyPr/>
-                    <a:lstStyle/>
-                    <a:p>
-                      <a:pPr>
-                        <a:defRPr sz="1300" b="0">
-                          <a:solidFill>
-                            <a:srgbClr val="FFFFFF"/>
-                          </a:solidFill>
-                          <a:latin typeface="Play"/>
-                          <a:ea typeface="Play"/>
-                          <a:cs typeface="Play"/>
-                        </a:defRPr>
-                      </a:pPr>
-                      <a:r>
-                        <a:t>Запросы</a:t>
-                      </a:r>
-                    </a:p>
-                  </a:txBody>
-                  <a:tcPr>
-                    <a:solidFill>
-                      <a:srgbClr val="111111"/>
-                    </a:solidFill>
-                  </a:tcPr>
-                </a:tc>
-                <a:tc>
-                  <a:txBody>
-                    <a:bodyPr/>
-                    <a:lstStyle/>
-                    <a:p>
-                      <a:pPr>
-                        <a:defRPr sz="1300" b="0">
-                          <a:solidFill>
-                            <a:srgbClr val="FFFFFF"/>
-                          </a:solidFill>
-                          <a:latin typeface="Play"/>
-                          <a:ea typeface="Play"/>
-                          <a:cs typeface="Play"/>
-                        </a:defRPr>
-                      </a:pPr>
-                      <a:r>
-                        <a:t>11/нед</a:t>
-                      </a:r>
-                    </a:p>
-                  </a:txBody>
-                  <a:tcPr>
-                    <a:solidFill>
-                      <a:srgbClr val="111111"/>
-                    </a:solidFill>
-                  </a:tcPr>
-                </a:tc>
-                <a:tc>
-                  <a:txBody>
-                    <a:bodyPr/>
-                    <a:lstStyle/>
-                    <a:p>
-                      <a:pPr>
-                        <a:defRPr sz="1300" b="0">
-                          <a:solidFill>
-                            <a:srgbClr val="FFFFFF"/>
-                          </a:solidFill>
-                          <a:latin typeface="Play"/>
-                          <a:ea typeface="Play"/>
-                          <a:cs typeface="Play"/>
-                        </a:defRPr>
-                      </a:pPr>
-                      <a:r>
-                        <a:t>38/нед</a:t>
-                      </a:r>
-                    </a:p>
-                  </a:txBody>
-                  <a:tcPr>
-                    <a:solidFill>
-                      <a:srgbClr val="111111"/>
-                    </a:solidFill>
-                  </a:tcPr>
-                </a:tc>
-              </a:tr>
             </a:tbl>
           </a:graphicData>
         </a:graphic>
@@ -8384,7 +7674,7 @@
 </p:sld>
 </file>
 
-<file path=ppt/slides/slide35.xml><?xml version="1.0" encoding="utf-8"?>
+<file path=ppt/slides/slide36.xml><?xml version="1.0" encoding="utf-8"?>
 <p:sld xmlns:a="http://schemas.openxmlformats.org/drawingml/2006/main" xmlns:p="http://schemas.openxmlformats.org/presentationml/2006/main" xmlns:r="http://schemas.openxmlformats.org/officeDocument/2006/relationships">
   <p:cSld>
     <p:spTree>
@@ -8438,665 +7728,198 @@
                 <a:ea typeface="Play"/>
                 <a:cs typeface="Play"/>
               </a:rPr>
-              <a:t>Ожидаемый эффект</a:t>
+              <a:t>Нагрузка дизайнеров</a:t>
             </a:r>
           </a:p>
         </p:txBody>
       </p:sp>
-      <p:sp>
-        <p:nvSpPr>
-          <p:cNvPr id="3" name="body_left"/>
-          <p:cNvSpPr txBox="1"/>
+      <p:graphicFrame>
+        <p:nvGraphicFramePr>
+          <p:cNvPr id="3" name="Table 2"/>
+          <p:cNvGraphicFramePr>
+            <a:graphicFrameLocks noGrp="1"/>
+          </p:cNvGraphicFramePr>
           <p:nvPr/>
-        </p:nvSpPr>
-        <p:spPr>
-          <a:xfrm>
-            <a:off x="429280" y="2489917"/>
-            <a:ext cx="5472562" cy="1488440"/>
-          </a:xfrm>
-          <a:prstGeom prst="rect">
-            <a:avLst/>
-          </a:prstGeom>
-          <a:noFill/>
-        </p:spPr>
-        <p:txBody>
-          <a:bodyPr wrap="square" lIns="76200" rIns="76200" tIns="50800" bIns="50800">
-            <a:spAutoFit/>
-          </a:bodyPr>
-          <a:lstStyle/>
-          <a:p>
-            <a:pPr algn="l">
-              <a:spcAft>
-                <a:spcPts val="300"/>
-              </a:spcAft>
-              <a:defRPr sz="2800">
-                <a:solidFill>
-                  <a:srgbClr val="FFFFFF"/>
-                </a:solidFill>
-                <a:latin typeface="Play"/>
-                <a:ea typeface="Play"/>
-                <a:cs typeface="Play"/>
-              </a:defRPr>
-            </a:pPr>
-            <a:r>
-              <a:rPr sz="2800">
-                <a:solidFill>
-                  <a:srgbClr val="FFFFFF"/>
-                </a:solidFill>
-                <a:latin typeface="Play"/>
-                <a:ea typeface="Play"/>
-                <a:cs typeface="Play"/>
-              </a:rPr>
-              <a:t>• Сборка 4 мин вместо 186</a:t>
-            </a:r>
-          </a:p>
-          <a:p>
-            <a:pPr algn="l">
-              <a:spcAft>
-                <a:spcPts val="300"/>
-              </a:spcAft>
-              <a:defRPr sz="2800">
-                <a:solidFill>
-                  <a:srgbClr val="FFFFFF"/>
-                </a:solidFill>
-                <a:latin typeface="Play"/>
-                <a:ea typeface="Play"/>
-                <a:cs typeface="Play"/>
-              </a:defRPr>
-            </a:pPr>
-            <a:r>
-              <a:rPr sz="2800">
-                <a:solidFill>
-                  <a:srgbClr val="FFFFFF"/>
-                </a:solidFill>
-                <a:latin typeface="Play"/>
-                <a:ea typeface="Play"/>
-                <a:cs typeface="Play"/>
-              </a:rPr>
-              <a:t>• 1 день до первой версии вместо 6</a:t>
-            </a:r>
-          </a:p>
-        </p:txBody>
-      </p:sp>
-      <p:sp>
-        <p:nvSpPr>
-          <p:cNvPr id="4" name="body_right"/>
-          <p:cNvSpPr txBox="1"/>
-          <p:nvPr/>
-        </p:nvSpPr>
-        <p:spPr>
-          <a:xfrm>
-            <a:off x="6267602" y="2489917"/>
-            <a:ext cx="5472562" cy="1026160"/>
-          </a:xfrm>
-          <a:prstGeom prst="rect">
-            <a:avLst/>
-          </a:prstGeom>
-          <a:noFill/>
-        </p:spPr>
-        <p:txBody>
-          <a:bodyPr wrap="square" lIns="76200" rIns="76200" tIns="50800" bIns="50800">
-            <a:spAutoFit/>
-          </a:bodyPr>
-          <a:lstStyle/>
-          <a:p>
-            <a:pPr algn="l">
-              <a:spcAft>
-                <a:spcPts val="300"/>
-              </a:spcAft>
-              <a:defRPr sz="2800">
-                <a:solidFill>
-                  <a:srgbClr val="FFFFFF"/>
-                </a:solidFill>
-                <a:latin typeface="Play"/>
-                <a:ea typeface="Play"/>
-                <a:cs typeface="Play"/>
-              </a:defRPr>
-            </a:pPr>
-            <a:r>
-              <a:rPr sz="2800">
-                <a:solidFill>
-                  <a:srgbClr val="FFFFFF"/>
-                </a:solidFill>
-                <a:latin typeface="Play"/>
-                <a:ea typeface="Play"/>
-                <a:cs typeface="Play"/>
-              </a:rPr>
-              <a:t>• 2 нарушения вместо 19</a:t>
-            </a:r>
-          </a:p>
-          <a:p>
-            <a:pPr algn="l">
-              <a:spcAft>
-                <a:spcPts val="300"/>
-              </a:spcAft>
-              <a:defRPr sz="2800">
-                <a:solidFill>
-                  <a:srgbClr val="FFFFFF"/>
-                </a:solidFill>
-                <a:latin typeface="Play"/>
-                <a:ea typeface="Play"/>
-                <a:cs typeface="Play"/>
-              </a:defRPr>
-            </a:pPr>
-            <a:r>
-              <a:rPr sz="2800">
-                <a:solidFill>
-                  <a:srgbClr val="FFFFFF"/>
-                </a:solidFill>
-                <a:latin typeface="Play"/>
-                <a:ea typeface="Play"/>
-                <a:cs typeface="Play"/>
-              </a:rPr>
-              <a:t>• 38 запросов вместо 11</a:t>
-            </a:r>
-          </a:p>
-        </p:txBody>
-      </p:sp>
-    </p:spTree>
-  </p:cSld>
-  <p:clrMapOvr>
-    <a:masterClrMapping/>
-  </p:clrMapOvr>
-</p:sld>
-</file>
-
-<file path=ppt/slides/slide36.xml><?xml version="1.0" encoding="utf-8"?>
-<p:sld xmlns:a="http://schemas.openxmlformats.org/drawingml/2006/main" xmlns:p="http://schemas.openxmlformats.org/presentationml/2006/main" xmlns:r="http://schemas.openxmlformats.org/officeDocument/2006/relationships">
-  <p:cSld>
-    <p:spTree>
-      <p:nvGrpSpPr>
-        <p:cNvPr id="1" name=""/>
-        <p:cNvGrpSpPr/>
-        <p:nvPr/>
-      </p:nvGrpSpPr>
-      <p:grpSpPr/>
-      <p:sp>
-        <p:nvSpPr>
-          <p:cNvPr id="2" name="title"/>
-          <p:cNvSpPr txBox="1"/>
-          <p:nvPr/>
-        </p:nvSpPr>
-        <p:spPr>
-          <a:xfrm>
-            <a:off x="429280" y="424715"/>
-            <a:ext cx="7827264" cy="1183640"/>
-          </a:xfrm>
-          <a:prstGeom prst="rect">
-            <a:avLst/>
-          </a:prstGeom>
-          <a:noFill/>
-        </p:spPr>
-        <p:txBody>
-          <a:bodyPr wrap="square" lIns="76200" rIns="76200" tIns="50800" bIns="50800">
-            <a:spAutoFit/>
-          </a:bodyPr>
-          <a:lstStyle/>
-          <a:p>
-            <a:pPr algn="l">
-              <a:spcAft>
-                <a:spcPts val="300"/>
-              </a:spcAft>
-              <a:defRPr sz="3200">
-                <a:solidFill>
-                  <a:srgbClr val="FFFFFF"/>
-                </a:solidFill>
-                <a:latin typeface="Play"/>
-                <a:ea typeface="Play"/>
-                <a:cs typeface="Play"/>
-              </a:defRPr>
-            </a:pPr>
-            <a:r>
-              <a:rPr sz="3200">
-                <a:solidFill>
-                  <a:srgbClr val="FFFFFF"/>
-                </a:solidFill>
-                <a:latin typeface="Play"/>
-                <a:ea typeface="Play"/>
-                <a:cs typeface="Play"/>
-              </a:rPr>
-              <a:t>Что потребуется: ресурсы и сроки</a:t>
-            </a:r>
-          </a:p>
-        </p:txBody>
-      </p:sp>
-      <p:sp>
-        <p:nvSpPr>
-          <p:cNvPr id="3" name="body"/>
-          <p:cNvSpPr txBox="1"/>
-          <p:nvPr/>
-        </p:nvSpPr>
-        <p:spPr>
-          <a:xfrm>
-            <a:off x="429280" y="1745515"/>
-            <a:ext cx="5472562" cy="3672235"/>
-          </a:xfrm>
-          <a:prstGeom prst="rect">
-            <a:avLst/>
-          </a:prstGeom>
-          <a:noFill/>
-        </p:spPr>
-        <p:txBody>
-          <a:bodyPr wrap="square" lIns="76200" rIns="76200" tIns="50800" bIns="50800">
-            <a:spAutoFit/>
-          </a:bodyPr>
-          <a:lstStyle/>
-          <a:p>
-            <a:pPr algn="l">
-              <a:spcAft>
-                <a:spcPts val="300"/>
-              </a:spcAft>
-              <a:defRPr sz="1600">
-                <a:solidFill>
-                  <a:srgbClr val="FFFFFF"/>
-                </a:solidFill>
-                <a:latin typeface="Play"/>
-                <a:ea typeface="Play"/>
-                <a:cs typeface="Play"/>
-              </a:defRPr>
-            </a:pPr>
-            <a:r>
-              <a:rPr sz="1600">
-                <a:solidFill>
-                  <a:srgbClr val="FFFFFF"/>
-                </a:solidFill>
-                <a:latin typeface="Play"/>
-                <a:ea typeface="Play"/>
-                <a:cs typeface="Play"/>
-              </a:rPr>
-              <a:t>• 2 vCPU / 2 ГБ RAM</a:t>
-            </a:r>
-          </a:p>
-          <a:p>
-            <a:pPr algn="l">
-              <a:spcAft>
-                <a:spcPts val="300"/>
-              </a:spcAft>
-              <a:defRPr sz="1600">
-                <a:solidFill>
-                  <a:srgbClr val="FFFFFF"/>
-                </a:solidFill>
-                <a:latin typeface="Play"/>
-                <a:ea typeface="Play"/>
-                <a:cs typeface="Play"/>
-              </a:defRPr>
-            </a:pPr>
-            <a:r>
-              <a:rPr sz="1600">
-                <a:solidFill>
-                  <a:srgbClr val="FFFFFF"/>
-                </a:solidFill>
-                <a:latin typeface="Play"/>
-                <a:ea typeface="Play"/>
-                <a:cs typeface="Play"/>
-              </a:rPr>
-              <a:t>• 1 400 руб инференс</a:t>
-            </a:r>
-          </a:p>
-          <a:p>
-            <a:pPr algn="l">
-              <a:spcAft>
-                <a:spcPts val="300"/>
-              </a:spcAft>
-              <a:defRPr sz="1600">
-                <a:solidFill>
-                  <a:srgbClr val="FFFFFF"/>
-                </a:solidFill>
-                <a:latin typeface="Play"/>
-                <a:ea typeface="Play"/>
-                <a:cs typeface="Play"/>
-              </a:defRPr>
-            </a:pPr>
-            <a:r>
-              <a:rPr sz="1600">
-                <a:solidFill>
-                  <a:srgbClr val="FFFFFF"/>
-                </a:solidFill>
-                <a:latin typeface="Play"/>
-                <a:ea typeface="Play"/>
-                <a:cs typeface="Play"/>
-              </a:rPr>
-              <a:t>• Gpt-oss-20b, OpenAI‑совместим</a:t>
-            </a:r>
-          </a:p>
-          <a:p>
-            <a:pPr algn="l">
-              <a:spcAft>
-                <a:spcPts val="300"/>
-              </a:spcAft>
-              <a:defRPr sz="1600">
-                <a:solidFill>
-                  <a:srgbClr val="FFFFFF"/>
-                </a:solidFill>
-                <a:latin typeface="Play"/>
-                <a:ea typeface="Play"/>
-                <a:cs typeface="Play"/>
-              </a:defRPr>
-            </a:pPr>
-            <a:r>
-              <a:rPr sz="1600">
-                <a:solidFill>
-                  <a:srgbClr val="FFFFFF"/>
-                </a:solidFill>
-                <a:latin typeface="Play"/>
-                <a:ea typeface="Play"/>
-                <a:cs typeface="Play"/>
-              </a:rPr>
-              <a:t>• Дизайн‑отдел 4 человека</a:t>
-            </a:r>
-          </a:p>
-        </p:txBody>
-      </p:sp>
-      <p:sp>
-        <p:nvSpPr>
-          <p:cNvPr id="4" name="Rectangle 3"/>
-          <p:cNvSpPr/>
-          <p:nvPr/>
-        </p:nvSpPr>
-        <p:spPr>
-          <a:xfrm>
-            <a:off x="6267602" y="3434743"/>
-            <a:ext cx="5472562" cy="110167"/>
-          </a:xfrm>
-          <a:prstGeom prst="rect">
-            <a:avLst/>
-          </a:prstGeom>
-          <a:solidFill>
-            <a:srgbClr val="0077FF"/>
-          </a:solidFill>
-          <a:ln>
-            <a:noFill/>
-          </a:ln>
-        </p:spPr>
-        <p:style>
-          <a:lnRef idx="1">
-            <a:schemeClr val="accent1"/>
-          </a:lnRef>
-          <a:fillRef idx="3">
-            <a:schemeClr val="accent1"/>
-          </a:fillRef>
-          <a:effectRef idx="2">
-            <a:schemeClr val="accent1"/>
-          </a:effectRef>
-          <a:fontRef idx="minor">
-            <a:schemeClr val="lt1"/>
-          </a:fontRef>
-        </p:style>
-        <p:txBody>
-          <a:bodyPr rtlCol="0" anchor="ctr"/>
-          <a:lstStyle/>
-          <a:p>
-            <a:pPr algn="ctr"/>
-          </a:p>
-        </p:txBody>
-      </p:sp>
-      <p:sp>
-        <p:nvSpPr>
-          <p:cNvPr id="5" name="Oval 4"/>
-          <p:cNvSpPr/>
-          <p:nvPr/>
-        </p:nvSpPr>
-        <p:spPr>
-          <a:xfrm>
-            <a:off x="6906067" y="3216198"/>
-            <a:ext cx="547256" cy="547256"/>
-          </a:xfrm>
-          <a:prstGeom prst="ellipse">
-            <a:avLst/>
-          </a:prstGeom>
-          <a:solidFill>
-            <a:srgbClr val="0077FF"/>
-          </a:solidFill>
-          <a:ln>
-            <a:noFill/>
-          </a:ln>
-        </p:spPr>
-        <p:style>
-          <a:lnRef idx="1">
-            <a:schemeClr val="accent1"/>
-          </a:lnRef>
-          <a:fillRef idx="3">
-            <a:schemeClr val="accent1"/>
-          </a:fillRef>
-          <a:effectRef idx="2">
-            <a:schemeClr val="accent1"/>
-          </a:effectRef>
-          <a:fontRef idx="minor">
-            <a:schemeClr val="lt1"/>
-          </a:fontRef>
-        </p:style>
-        <p:txBody>
-          <a:bodyPr rtlCol="0" anchor="ctr"/>
-          <a:lstStyle/>
-          <a:p>
-            <a:pPr algn="ctr"/>
-          </a:p>
-        </p:txBody>
-      </p:sp>
-      <p:sp>
-        <p:nvSpPr>
-          <p:cNvPr id="6" name="TextBox 5"/>
-          <p:cNvSpPr txBox="1"/>
-          <p:nvPr/>
-        </p:nvSpPr>
-        <p:spPr>
-          <a:xfrm>
-            <a:off x="6267602" y="1745515"/>
-            <a:ext cx="2736281" cy="1395449"/>
-          </a:xfrm>
-          <a:prstGeom prst="rect">
-            <a:avLst/>
-          </a:prstGeom>
-          <a:noFill/>
-        </p:spPr>
-        <p:txBody>
-          <a:bodyPr wrap="square" lIns="12700" rIns="12700" tIns="12700" bIns="12700">
-            <a:spAutoFit/>
-          </a:bodyPr>
-          <a:lstStyle/>
-          <a:p>
-            <a:pPr algn="ctr">
-              <a:defRPr sz="1400" b="0">
-                <a:solidFill>
-                  <a:srgbClr val="FFFFFF"/>
-                </a:solidFill>
-                <a:latin typeface="Play"/>
-                <a:ea typeface="Play"/>
-                <a:cs typeface="Play"/>
-              </a:defRPr>
-            </a:pPr>
-            <a:r>
-              <a:rPr sz="1400" b="0">
-                <a:solidFill>
-                  <a:srgbClr val="FFFFFF"/>
-                </a:solidFill>
-                <a:latin typeface="Play"/>
-                <a:ea typeface="Play"/>
-                <a:cs typeface="Play"/>
-              </a:rPr>
-              <a:t>Третий квартал 2026</a:t>
-            </a:r>
-          </a:p>
-        </p:txBody>
-      </p:sp>
-      <p:sp>
-        <p:nvSpPr>
-          <p:cNvPr id="7" name="Oval 6"/>
-          <p:cNvSpPr/>
-          <p:nvPr/>
-        </p:nvSpPr>
-        <p:spPr>
-          <a:xfrm>
-            <a:off x="8730254" y="3216198"/>
-            <a:ext cx="547256" cy="547256"/>
-          </a:xfrm>
-          <a:prstGeom prst="ellipse">
-            <a:avLst/>
-          </a:prstGeom>
-          <a:solidFill>
-            <a:srgbClr val="0077FF"/>
-          </a:solidFill>
-          <a:ln>
-            <a:noFill/>
-          </a:ln>
-        </p:spPr>
-        <p:style>
-          <a:lnRef idx="1">
-            <a:schemeClr val="accent1"/>
-          </a:lnRef>
-          <a:fillRef idx="3">
-            <a:schemeClr val="accent1"/>
-          </a:fillRef>
-          <a:effectRef idx="2">
-            <a:schemeClr val="accent1"/>
-          </a:effectRef>
-          <a:fontRef idx="minor">
-            <a:schemeClr val="lt1"/>
-          </a:fontRef>
-        </p:style>
-        <p:txBody>
-          <a:bodyPr rtlCol="0" anchor="ctr"/>
-          <a:lstStyle/>
-          <a:p>
-            <a:pPr algn="ctr"/>
-          </a:p>
-        </p:txBody>
-      </p:sp>
-      <p:sp>
-        <p:nvSpPr>
-          <p:cNvPr id="8" name="TextBox 7"/>
-          <p:cNvSpPr txBox="1"/>
-          <p:nvPr/>
-        </p:nvSpPr>
-        <p:spPr>
-          <a:xfrm>
-            <a:off x="7635742" y="3981999"/>
-            <a:ext cx="2736281" cy="1395449"/>
-          </a:xfrm>
-          <a:prstGeom prst="rect">
-            <a:avLst/>
-          </a:prstGeom>
-          <a:noFill/>
-        </p:spPr>
-        <p:txBody>
-          <a:bodyPr wrap="square" lIns="12700" rIns="12700" tIns="12700" bIns="12700">
-            <a:spAutoFit/>
-          </a:bodyPr>
-          <a:lstStyle/>
-          <a:p>
-            <a:pPr algn="ctr">
-              <a:defRPr sz="1400" b="0">
-                <a:solidFill>
-                  <a:srgbClr val="FFFFFF"/>
-                </a:solidFill>
-                <a:latin typeface="Play"/>
-                <a:ea typeface="Play"/>
-                <a:cs typeface="Play"/>
-              </a:defRPr>
-            </a:pPr>
-            <a:r>
-              <a:rPr sz="1400" b="0">
-                <a:solidFill>
-                  <a:srgbClr val="FFFFFF"/>
-                </a:solidFill>
-                <a:latin typeface="Play"/>
-                <a:ea typeface="Play"/>
-                <a:cs typeface="Play"/>
-              </a:rPr>
-              <a:t>Четвёртый квартал 2026</a:t>
-            </a:r>
-          </a:p>
-        </p:txBody>
-      </p:sp>
-      <p:sp>
-        <p:nvSpPr>
-          <p:cNvPr id="9" name="Oval 8"/>
-          <p:cNvSpPr/>
-          <p:nvPr/>
-        </p:nvSpPr>
-        <p:spPr>
-          <a:xfrm>
-            <a:off x="10554442" y="3216198"/>
-            <a:ext cx="547256" cy="547256"/>
-          </a:xfrm>
-          <a:prstGeom prst="ellipse">
-            <a:avLst/>
-          </a:prstGeom>
-          <a:solidFill>
-            <a:srgbClr val="0077FF"/>
-          </a:solidFill>
-          <a:ln>
-            <a:noFill/>
-          </a:ln>
-        </p:spPr>
-        <p:style>
-          <a:lnRef idx="1">
-            <a:schemeClr val="accent1"/>
-          </a:lnRef>
-          <a:fillRef idx="3">
-            <a:schemeClr val="accent1"/>
-          </a:fillRef>
-          <a:effectRef idx="2">
-            <a:schemeClr val="accent1"/>
-          </a:effectRef>
-          <a:fontRef idx="minor">
-            <a:schemeClr val="lt1"/>
-          </a:fontRef>
-        </p:style>
-        <p:txBody>
-          <a:bodyPr rtlCol="0" anchor="ctr"/>
-          <a:lstStyle/>
-          <a:p>
-            <a:pPr algn="ctr"/>
-          </a:p>
-        </p:txBody>
-      </p:sp>
-      <p:sp>
-        <p:nvSpPr>
-          <p:cNvPr id="10" name="TextBox 9"/>
-          <p:cNvSpPr txBox="1"/>
-          <p:nvPr/>
-        </p:nvSpPr>
-        <p:spPr>
-          <a:xfrm>
-            <a:off x="9003883" y="1745515"/>
-            <a:ext cx="2736281" cy="1395449"/>
-          </a:xfrm>
-          <a:prstGeom prst="rect">
-            <a:avLst/>
-          </a:prstGeom>
-          <a:noFill/>
-        </p:spPr>
-        <p:txBody>
-          <a:bodyPr wrap="square" lIns="12700" rIns="12700" tIns="12700" bIns="12700">
-            <a:spAutoFit/>
-          </a:bodyPr>
-          <a:lstStyle/>
-          <a:p>
-            <a:pPr algn="ctr">
-              <a:defRPr sz="1400" b="0">
-                <a:solidFill>
-                  <a:srgbClr val="FFFFFF"/>
-                </a:solidFill>
-                <a:latin typeface="Play"/>
-                <a:ea typeface="Play"/>
-                <a:cs typeface="Play"/>
-              </a:defRPr>
-            </a:pPr>
-            <a:r>
-              <a:rPr sz="1400" b="0">
-                <a:solidFill>
-                  <a:srgbClr val="FFFFFF"/>
-                </a:solidFill>
-                <a:latin typeface="Play"/>
-                <a:ea typeface="Play"/>
-                <a:cs typeface="Play"/>
-              </a:rPr>
-              <a:t>Первый квартал 2027</a:t>
-            </a:r>
-          </a:p>
-        </p:txBody>
-      </p:sp>
+        </p:nvGraphicFramePr>
+        <p:xfrm>
+          <a:off x="6267602" y="1592290"/>
+          <a:ext cx="5472562" cy="4181322"/>
+        </p:xfrm>
+        <a:graphic>
+          <a:graphicData uri="http://schemas.openxmlformats.org/drawingml/2006/table">
+            <a:tbl>
+              <a:tblPr firstRow="1" bandRow="1">
+                <a:tableStyleId>{5C22544A-7EE6-4342-B048-85BDC9FD1C3A}</a:tableStyleId>
+              </a:tblPr>
+              <a:tblGrid>
+                <a:gridCol w="1824187"/>
+                <a:gridCol w="1824187"/>
+                <a:gridCol w="1824188"/>
+              </a:tblGrid>
+              <a:tr h="2090661">
+                <a:tc>
+                  <a:txBody>
+                    <a:bodyPr/>
+                    <a:lstStyle/>
+                    <a:p>
+                      <a:pPr>
+                        <a:defRPr sz="1300" b="1">
+                          <a:solidFill>
+                            <a:srgbClr val="FFFFFF"/>
+                          </a:solidFill>
+                          <a:latin typeface="Play"/>
+                          <a:ea typeface="Play"/>
+                          <a:cs typeface="Play"/>
+                        </a:defRPr>
+                      </a:pPr>
+                      <a:r>
+                        <a:t>Показатель</a:t>
+                      </a:r>
+                    </a:p>
+                  </a:txBody>
+                  <a:tcPr>
+                    <a:solidFill>
+                      <a:srgbClr val="0077FF"/>
+                    </a:solidFill>
+                  </a:tcPr>
+                </a:tc>
+                <a:tc>
+                  <a:txBody>
+                    <a:bodyPr/>
+                    <a:lstStyle/>
+                    <a:p>
+                      <a:pPr>
+                        <a:defRPr sz="1300" b="1">
+                          <a:solidFill>
+                            <a:srgbClr val="FFFFFF"/>
+                          </a:solidFill>
+                          <a:latin typeface="Play"/>
+                          <a:ea typeface="Play"/>
+                          <a:cs typeface="Play"/>
+                        </a:defRPr>
+                      </a:pPr>
+                      <a:r>
+                        <a:t>Текущая</a:t>
+                      </a:r>
+                    </a:p>
+                  </a:txBody>
+                  <a:tcPr>
+                    <a:solidFill>
+                      <a:srgbClr val="0077FF"/>
+                    </a:solidFill>
+                  </a:tcPr>
+                </a:tc>
+                <a:tc>
+                  <a:txBody>
+                    <a:bodyPr/>
+                    <a:lstStyle/>
+                    <a:p>
+                      <a:pPr>
+                        <a:defRPr sz="1300" b="1">
+                          <a:solidFill>
+                            <a:srgbClr val="FFFFFF"/>
+                          </a:solidFill>
+                          <a:latin typeface="Play"/>
+                          <a:ea typeface="Play"/>
+                          <a:cs typeface="Play"/>
+                        </a:defRPr>
+                      </a:pPr>
+                      <a:r>
+                        <a:t>Пилот</a:t>
+                      </a:r>
+                    </a:p>
+                  </a:txBody>
+                  <a:tcPr>
+                    <a:solidFill>
+                      <a:srgbClr val="0077FF"/>
+                    </a:solidFill>
+                  </a:tcPr>
+                </a:tc>
+              </a:tr>
+              <a:tr h="2090661">
+                <a:tc>
+                  <a:txBody>
+                    <a:bodyPr/>
+                    <a:lstStyle/>
+                    <a:p>
+                      <a:pPr>
+                        <a:defRPr sz="1300" b="0">
+                          <a:solidFill>
+                            <a:srgbClr val="FFFFFF"/>
+                          </a:solidFill>
+                          <a:latin typeface="Play"/>
+                          <a:ea typeface="Play"/>
+                          <a:cs typeface="Play"/>
+                        </a:defRPr>
+                      </a:pPr>
+                      <a:r>
+                        <a:t>Запросов/неделя</a:t>
+                      </a:r>
+                    </a:p>
+                  </a:txBody>
+                  <a:tcPr>
+                    <a:solidFill>
+                      <a:srgbClr val="111111"/>
+                    </a:solidFill>
+                  </a:tcPr>
+                </a:tc>
+                <a:tc>
+                  <a:txBody>
+                    <a:bodyPr/>
+                    <a:lstStyle/>
+                    <a:p>
+                      <a:pPr>
+                        <a:defRPr sz="1300" b="0">
+                          <a:solidFill>
+                            <a:srgbClr val="FFFFFF"/>
+                          </a:solidFill>
+                          <a:latin typeface="Play"/>
+                          <a:ea typeface="Play"/>
+                          <a:cs typeface="Play"/>
+                        </a:defRPr>
+                      </a:pPr>
+                      <a:r>
+                        <a:t>11</a:t>
+                      </a:r>
+                    </a:p>
+                  </a:txBody>
+                  <a:tcPr>
+                    <a:solidFill>
+                      <a:srgbClr val="111111"/>
+                    </a:solidFill>
+                  </a:tcPr>
+                </a:tc>
+                <a:tc>
+                  <a:txBody>
+                    <a:bodyPr/>
+                    <a:lstStyle/>
+                    <a:p>
+                      <a:pPr>
+                        <a:defRPr sz="1300" b="0">
+                          <a:solidFill>
+                            <a:srgbClr val="FFFFFF"/>
+                          </a:solidFill>
+                          <a:latin typeface="Play"/>
+                          <a:ea typeface="Play"/>
+                          <a:cs typeface="Play"/>
+                        </a:defRPr>
+                      </a:pPr>
+                      <a:r>
+                        <a:t>38</a:t>
+                      </a:r>
+                    </a:p>
+                  </a:txBody>
+                  <a:tcPr>
+                    <a:solidFill>
+                      <a:srgbClr val="111111"/>
+                    </a:solidFill>
+                  </a:tcPr>
+                </a:tc>
+              </a:tr>
+            </a:tbl>
+          </a:graphicData>
+        </a:graphic>
+      </p:graphicFrame>
     </p:spTree>
   </p:cSld>
   <p:clrMapOvr>
@@ -9269,7 +8092,7 @@
                 <a:ea typeface="Play"/>
                 <a:cs typeface="Play"/>
               </a:rPr>
-              <a:t>Что мы просим решить</a:t>
+              <a:t>Ресурсы и сроки</a:t>
             </a:r>
           </a:p>
         </p:txBody>
@@ -9318,7 +8141,7 @@
                 <a:ea typeface="Play"/>
                 <a:cs typeface="Play"/>
               </a:rPr>
-              <a:t>• Запуск на всю компанию</a:t>
+              <a:t>• 2 vCPU / 2 GB RAM</a:t>
             </a:r>
           </a:p>
           <a:p>
@@ -9344,7 +8167,7 @@
                 <a:ea typeface="Play"/>
                 <a:cs typeface="Play"/>
               </a:rPr>
-              <a:t>• Бюджет на расширение инфраструктуры</a:t>
+              <a:t>• 1 400 рублей за 6 недель пилота</a:t>
             </a:r>
           </a:p>
           <a:p>
@@ -9370,7 +8193,7 @@
                 <a:ea typeface="Play"/>
                 <a:cs typeface="Play"/>
               </a:rPr>
-              <a:t>• Назначение ответственных за интеграцию</a:t>
+              <a:t>• 6 недель пилота, 2 команды, 68 презентаций</a:t>
             </a:r>
           </a:p>
         </p:txBody>
@@ -9491,7 +8314,7 @@
                 <a:ea typeface="Play"/>
                 <a:cs typeface="Play"/>
               </a:rPr>
-              <a:t>Риски</a:t>
+              <a:t>Что мы просим решить</a:t>
             </a:r>
           </a:p>
         </p:txBody>
@@ -9540,7 +8363,7 @@
                 <a:ea typeface="Play"/>
                 <a:cs typeface="Play"/>
               </a:rPr>
-              <a:t>• Слабая модель может выдумать цифры</a:t>
+              <a:t>• Запуск сервиса на всю компанию</a:t>
             </a:r>
           </a:p>
           <a:p>
@@ -9566,7 +8389,7 @@
                 <a:ea typeface="Play"/>
                 <a:cs typeface="Play"/>
               </a:rPr>
-              <a:t>• Плохой шаблон может привести к некорректной вёрстке</a:t>
+              <a:t>• Интеграция с корпоративным хранилищем</a:t>
             </a:r>
           </a:p>
           <a:p>
@@ -9592,7 +8415,7 @@
                 <a:ea typeface="Play"/>
                 <a:cs typeface="Play"/>
               </a:rPr>
-              <a:t>• Нагрузка &gt;20 задач требует внешней очереди</a:t>
+              <a:t>• Поддержка 20 одновременных задач</a:t>
             </a:r>
           </a:p>
         </p:txBody>
@@ -9659,21 +8482,107 @@
                 <a:ea typeface="Play"/>
                 <a:cs typeface="Play"/>
               </a:rPr>
-              <a:t>Команда</a:t>
+              <a:t>План запуска</a:t>
             </a:r>
           </a:p>
         </p:txBody>
       </p:sp>
       <p:sp>
         <p:nvSpPr>
-          <p:cNvPr id="3" name="body"/>
+          <p:cNvPr id="3" name="Rectangle 2"/>
+          <p:cNvSpPr/>
+          <p:nvPr/>
+        </p:nvSpPr>
+        <p:spPr>
+          <a:xfrm>
+            <a:off x="6267602" y="3339292"/>
+            <a:ext cx="5472562" cy="120438"/>
+          </a:xfrm>
+          <a:prstGeom prst="rect">
+            <a:avLst/>
+          </a:prstGeom>
+          <a:solidFill>
+            <a:srgbClr val="0077FF"/>
+          </a:solidFill>
+          <a:ln>
+            <a:noFill/>
+          </a:ln>
+        </p:spPr>
+        <p:style>
+          <a:lnRef idx="1">
+            <a:schemeClr val="accent1"/>
+          </a:lnRef>
+          <a:fillRef idx="3">
+            <a:schemeClr val="accent1"/>
+          </a:fillRef>
+          <a:effectRef idx="2">
+            <a:schemeClr val="accent1"/>
+          </a:effectRef>
+          <a:fontRef idx="minor">
+            <a:schemeClr val="lt1"/>
+          </a:fontRef>
+        </p:style>
+        <p:txBody>
+          <a:bodyPr rtlCol="0" anchor="ctr"/>
+          <a:lstStyle/>
+          <a:p>
+            <a:pPr algn="ctr"/>
+          </a:p>
+        </p:txBody>
+      </p:sp>
+      <p:sp>
+        <p:nvSpPr>
+          <p:cNvPr id="4" name="Oval 3"/>
+          <p:cNvSpPr/>
+          <p:nvPr/>
+        </p:nvSpPr>
+        <p:spPr>
+          <a:xfrm>
+            <a:off x="6906067" y="3125883"/>
+            <a:ext cx="547256" cy="547256"/>
+          </a:xfrm>
+          <a:prstGeom prst="ellipse">
+            <a:avLst/>
+          </a:prstGeom>
+          <a:solidFill>
+            <a:srgbClr val="0077FF"/>
+          </a:solidFill>
+          <a:ln>
+            <a:noFill/>
+          </a:ln>
+        </p:spPr>
+        <p:style>
+          <a:lnRef idx="1">
+            <a:schemeClr val="accent1"/>
+          </a:lnRef>
+          <a:fillRef idx="3">
+            <a:schemeClr val="accent1"/>
+          </a:fillRef>
+          <a:effectRef idx="2">
+            <a:schemeClr val="accent1"/>
+          </a:effectRef>
+          <a:fontRef idx="minor">
+            <a:schemeClr val="lt1"/>
+          </a:fontRef>
+        </p:style>
+        <p:txBody>
+          <a:bodyPr rtlCol="0" anchor="ctr"/>
+          <a:lstStyle/>
+          <a:p>
+            <a:pPr algn="ctr"/>
+          </a:p>
+        </p:txBody>
+      </p:sp>
+      <p:sp>
+        <p:nvSpPr>
+          <p:cNvPr id="5" name="TextBox 4"/>
           <p:cNvSpPr txBox="1"/>
           <p:nvPr/>
         </p:nvSpPr>
         <p:spPr>
           <a:xfrm>
-            <a:off x="429280" y="1492575"/>
-            <a:ext cx="5472562" cy="4014604"/>
+            <a:off x="6267602" y="1492575"/>
+            <a:ext cx="2736281" cy="1525549"/>
           </a:xfrm>
           <a:prstGeom prst="rect">
             <a:avLst/>
@@ -9681,16 +8590,13 @@
           <a:noFill/>
         </p:spPr>
         <p:txBody>
-          <a:bodyPr wrap="square" lIns="76200" rIns="76200" tIns="50800" bIns="50800">
+          <a:bodyPr wrap="square" lIns="12700" rIns="12700" tIns="12700" bIns="12700">
             <a:spAutoFit/>
           </a:bodyPr>
           <a:lstStyle/>
           <a:p>
-            <a:pPr algn="l">
-              <a:spcAft>
-                <a:spcPts val="300"/>
-              </a:spcAft>
-              <a:defRPr sz="1600">
+            <a:pPr algn="ctr">
+              <a:defRPr sz="1400" b="0">
                 <a:solidFill>
                   <a:srgbClr val="FFFFFF"/>
                 </a:solidFill>
@@ -9700,7 +8606,7 @@
               </a:defRPr>
             </a:pPr>
             <a:r>
-              <a:rPr sz="1600">
+              <a:rPr sz="1400" b="0">
                 <a:solidFill>
                   <a:srgbClr val="FFFFFF"/>
                 </a:solidFill>
@@ -9708,15 +8614,78 @@
                 <a:ea typeface="Play"/>
                 <a:cs typeface="Play"/>
               </a:rPr>
-              <a:t>• Дизайн‑отдел 4 человека, 11 запросов/нед, 6 дней ожидания</a:t>
+              <a:t>Третий квартал 2026: подключение 4 команд</a:t>
             </a:r>
           </a:p>
+        </p:txBody>
+      </p:sp>
+      <p:sp>
+        <p:nvSpPr>
+          <p:cNvPr id="6" name="Oval 5"/>
+          <p:cNvSpPr/>
+          <p:nvPr/>
+        </p:nvSpPr>
+        <p:spPr>
+          <a:xfrm>
+            <a:off x="8730254" y="3125883"/>
+            <a:ext cx="547256" cy="547256"/>
+          </a:xfrm>
+          <a:prstGeom prst="ellipse">
+            <a:avLst/>
+          </a:prstGeom>
+          <a:solidFill>
+            <a:srgbClr val="0077FF"/>
+          </a:solidFill>
+          <a:ln>
+            <a:noFill/>
+          </a:ln>
+        </p:spPr>
+        <p:style>
+          <a:lnRef idx="1">
+            <a:schemeClr val="accent1"/>
+          </a:lnRef>
+          <a:fillRef idx="3">
+            <a:schemeClr val="accent1"/>
+          </a:fillRef>
+          <a:effectRef idx="2">
+            <a:schemeClr val="accent1"/>
+          </a:effectRef>
+          <a:fontRef idx="minor">
+            <a:schemeClr val="lt1"/>
+          </a:fontRef>
+        </p:style>
+        <p:txBody>
+          <a:bodyPr rtlCol="0" anchor="ctr"/>
+          <a:lstStyle/>
           <a:p>
-            <a:pPr algn="l">
-              <a:spcAft>
-                <a:spcPts val="300"/>
-              </a:spcAft>
-              <a:defRPr sz="1600">
+            <a:pPr algn="ctr"/>
+          </a:p>
+        </p:txBody>
+      </p:sp>
+      <p:sp>
+        <p:nvSpPr>
+          <p:cNvPr id="7" name="TextBox 6"/>
+          <p:cNvSpPr txBox="1"/>
+          <p:nvPr/>
+        </p:nvSpPr>
+        <p:spPr>
+          <a:xfrm>
+            <a:off x="7635742" y="3886549"/>
+            <a:ext cx="2736281" cy="1525549"/>
+          </a:xfrm>
+          <a:prstGeom prst="rect">
+            <a:avLst/>
+          </a:prstGeom>
+          <a:noFill/>
+        </p:spPr>
+        <p:txBody>
+          <a:bodyPr wrap="square" lIns="12700" rIns="12700" tIns="12700" bIns="12700">
+            <a:spAutoFit/>
+          </a:bodyPr>
+          <a:lstStyle/>
+          <a:p>
+            <a:pPr algn="ctr">
+              <a:defRPr sz="1400" b="0">
                 <a:solidFill>
                   <a:srgbClr val="FFFFFF"/>
                 </a:solidFill>
@@ -9726,7 +8695,7 @@
               </a:defRPr>
             </a:pPr>
             <a:r>
-              <a:rPr sz="1600">
+              <a:rPr sz="1400" b="0">
                 <a:solidFill>
                   <a:srgbClr val="FFFFFF"/>
                 </a:solidFill>
@@ -9734,361 +8703,100 @@
                 <a:ea typeface="Play"/>
                 <a:cs typeface="Play"/>
               </a:rPr>
-              <a:t>• Пилотные команды 2, 68 презентаций</a:t>
+              <a:t>Четвёртый квартал 2026: доступ для всей компании</a:t>
             </a:r>
           </a:p>
         </p:txBody>
       </p:sp>
-      <p:graphicFrame>
-        <p:nvGraphicFramePr>
-          <p:cNvPr id="4" name="Table 3"/>
-          <p:cNvGraphicFramePr>
-            <a:graphicFrameLocks noGrp="1"/>
-          </p:cNvGraphicFramePr>
+      <p:sp>
+        <p:nvSpPr>
+          <p:cNvPr id="8" name="Oval 7"/>
+          <p:cNvSpPr/>
           <p:nvPr/>
-        </p:nvGraphicFramePr>
-        <p:xfrm>
-          <a:off x="6267602" y="1492575"/>
-          <a:ext cx="5472562" cy="4014604"/>
-        </p:xfrm>
-        <a:graphic>
-          <a:graphicData uri="http://schemas.openxmlformats.org/drawingml/2006/table">
-            <a:tbl>
-              <a:tblPr firstRow="1" bandRow="1">
-                <a:tableStyleId>{5C22544A-7EE6-4342-B048-85BDC9FD1C3A}</a:tableStyleId>
-              </a:tblPr>
-              <a:tblGrid>
-                <a:gridCol w="2736281"/>
-                <a:gridCol w="2736281"/>
-              </a:tblGrid>
-              <a:tr h="669100">
-                <a:tc>
-                  <a:txBody>
-                    <a:bodyPr/>
-                    <a:lstStyle/>
-                    <a:p>
-                      <a:pPr>
-                        <a:defRPr sz="1300" b="1">
-                          <a:solidFill>
-                            <a:srgbClr val="FFFFFF"/>
-                          </a:solidFill>
-                          <a:latin typeface="Play"/>
-                          <a:ea typeface="Play"/>
-                          <a:cs typeface="Play"/>
-                        </a:defRPr>
-                      </a:pPr>
-                      <a:r>
-                        <a:t>Роль</a:t>
-                      </a:r>
-                    </a:p>
-                  </a:txBody>
-                  <a:tcPr>
-                    <a:solidFill>
-                      <a:srgbClr val="0077FF"/>
-                    </a:solidFill>
-                  </a:tcPr>
-                </a:tc>
-                <a:tc>
-                  <a:txBody>
-                    <a:bodyPr/>
-                    <a:lstStyle/>
-                    <a:p>
-                      <a:pPr>
-                        <a:defRPr sz="1300" b="1">
-                          <a:solidFill>
-                            <a:srgbClr val="FFFFFF"/>
-                          </a:solidFill>
-                          <a:latin typeface="Play"/>
-                          <a:ea typeface="Play"/>
-                          <a:cs typeface="Play"/>
-                        </a:defRPr>
-                      </a:pPr>
-                      <a:r>
-                        <a:t>Количество</a:t>
-                      </a:r>
-                    </a:p>
-                  </a:txBody>
-                  <a:tcPr>
-                    <a:solidFill>
-                      <a:srgbClr val="0077FF"/>
-                    </a:solidFill>
-                  </a:tcPr>
-                </a:tc>
-              </a:tr>
-              <a:tr h="669100">
-                <a:tc>
-                  <a:txBody>
-                    <a:bodyPr/>
-                    <a:lstStyle/>
-                    <a:p>
-                      <a:pPr>
-                        <a:defRPr sz="1300" b="0">
-                          <a:solidFill>
-                            <a:srgbClr val="FFFFFF"/>
-                          </a:solidFill>
-                          <a:latin typeface="Play"/>
-                          <a:ea typeface="Play"/>
-                          <a:cs typeface="Play"/>
-                        </a:defRPr>
-                      </a:pPr>
-                      <a:r>
-                        <a:t>Дизайн‑отдел</a:t>
-                      </a:r>
-                    </a:p>
-                  </a:txBody>
-                  <a:tcPr>
-                    <a:solidFill>
-                      <a:srgbClr val="111111"/>
-                    </a:solidFill>
-                  </a:tcPr>
-                </a:tc>
-                <a:tc>
-                  <a:txBody>
-                    <a:bodyPr/>
-                    <a:lstStyle/>
-                    <a:p>
-                      <a:pPr>
-                        <a:defRPr sz="1300" b="0">
-                          <a:solidFill>
-                            <a:srgbClr val="FFFFFF"/>
-                          </a:solidFill>
-                          <a:latin typeface="Play"/>
-                          <a:ea typeface="Play"/>
-                          <a:cs typeface="Play"/>
-                        </a:defRPr>
-                      </a:pPr>
-                      <a:r>
-                        <a:t>4 человека</a:t>
-                      </a:r>
-                    </a:p>
-                  </a:txBody>
-                  <a:tcPr>
-                    <a:solidFill>
-                      <a:srgbClr val="111111"/>
-                    </a:solidFill>
-                  </a:tcPr>
-                </a:tc>
-              </a:tr>
-              <a:tr h="669100">
-                <a:tc>
-                  <a:txBody>
-                    <a:bodyPr/>
-                    <a:lstStyle/>
-                    <a:p>
-                      <a:pPr>
-                        <a:defRPr sz="1300" b="0">
-                          <a:solidFill>
-                            <a:srgbClr val="FFFFFF"/>
-                          </a:solidFill>
-                          <a:latin typeface="Play"/>
-                          <a:ea typeface="Play"/>
-                          <a:cs typeface="Play"/>
-                        </a:defRPr>
-                      </a:pPr>
-                      <a:r>
-                        <a:t>Запросы</a:t>
-                      </a:r>
-                    </a:p>
-                  </a:txBody>
-                  <a:tcPr>
-                    <a:solidFill>
-                      <a:srgbClr val="111111"/>
-                    </a:solidFill>
-                  </a:tcPr>
-                </a:tc>
-                <a:tc>
-                  <a:txBody>
-                    <a:bodyPr/>
-                    <a:lstStyle/>
-                    <a:p>
-                      <a:pPr>
-                        <a:defRPr sz="1300" b="0">
-                          <a:solidFill>
-                            <a:srgbClr val="FFFFFF"/>
-                          </a:solidFill>
-                          <a:latin typeface="Play"/>
-                          <a:ea typeface="Play"/>
-                          <a:cs typeface="Play"/>
-                        </a:defRPr>
-                      </a:pPr>
-                      <a:r>
-                        <a:t>11/нед</a:t>
-                      </a:r>
-                    </a:p>
-                  </a:txBody>
-                  <a:tcPr>
-                    <a:solidFill>
-                      <a:srgbClr val="111111"/>
-                    </a:solidFill>
-                  </a:tcPr>
-                </a:tc>
-              </a:tr>
-              <a:tr h="669100">
-                <a:tc>
-                  <a:txBody>
-                    <a:bodyPr/>
-                    <a:lstStyle/>
-                    <a:p>
-                      <a:pPr>
-                        <a:defRPr sz="1300" b="0">
-                          <a:solidFill>
-                            <a:srgbClr val="FFFFFF"/>
-                          </a:solidFill>
-                          <a:latin typeface="Play"/>
-                          <a:ea typeface="Play"/>
-                          <a:cs typeface="Play"/>
-                        </a:defRPr>
-                      </a:pPr>
-                      <a:r>
-                        <a:t>Ожидание</a:t>
-                      </a:r>
-                    </a:p>
-                  </a:txBody>
-                  <a:tcPr>
-                    <a:solidFill>
-                      <a:srgbClr val="111111"/>
-                    </a:solidFill>
-                  </a:tcPr>
-                </a:tc>
-                <a:tc>
-                  <a:txBody>
-                    <a:bodyPr/>
-                    <a:lstStyle/>
-                    <a:p>
-                      <a:pPr>
-                        <a:defRPr sz="1300" b="0">
-                          <a:solidFill>
-                            <a:srgbClr val="FFFFFF"/>
-                          </a:solidFill>
-                          <a:latin typeface="Play"/>
-                          <a:ea typeface="Play"/>
-                          <a:cs typeface="Play"/>
-                        </a:defRPr>
-                      </a:pPr>
-                      <a:r>
-                        <a:t>6 дней</a:t>
-                      </a:r>
-                    </a:p>
-                  </a:txBody>
-                  <a:tcPr>
-                    <a:solidFill>
-                      <a:srgbClr val="111111"/>
-                    </a:solidFill>
-                  </a:tcPr>
-                </a:tc>
-              </a:tr>
-              <a:tr h="669100">
-                <a:tc>
-                  <a:txBody>
-                    <a:bodyPr/>
-                    <a:lstStyle/>
-                    <a:p>
-                      <a:pPr>
-                        <a:defRPr sz="1300" b="0">
-                          <a:solidFill>
-                            <a:srgbClr val="FFFFFF"/>
-                          </a:solidFill>
-                          <a:latin typeface="Play"/>
-                          <a:ea typeface="Play"/>
-                          <a:cs typeface="Play"/>
-                        </a:defRPr>
-                      </a:pPr>
-                      <a:r>
-                        <a:t>Пилотные команды</a:t>
-                      </a:r>
-                    </a:p>
-                  </a:txBody>
-                  <a:tcPr>
-                    <a:solidFill>
-                      <a:srgbClr val="111111"/>
-                    </a:solidFill>
-                  </a:tcPr>
-                </a:tc>
-                <a:tc>
-                  <a:txBody>
-                    <a:bodyPr/>
-                    <a:lstStyle/>
-                    <a:p>
-                      <a:pPr>
-                        <a:defRPr sz="1300" b="0">
-                          <a:solidFill>
-                            <a:srgbClr val="FFFFFF"/>
-                          </a:solidFill>
-                          <a:latin typeface="Play"/>
-                          <a:ea typeface="Play"/>
-                          <a:cs typeface="Play"/>
-                        </a:defRPr>
-                      </a:pPr>
-                      <a:r>
-                        <a:t>2</a:t>
-                      </a:r>
-                    </a:p>
-                  </a:txBody>
-                  <a:tcPr>
-                    <a:solidFill>
-                      <a:srgbClr val="111111"/>
-                    </a:solidFill>
-                  </a:tcPr>
-                </a:tc>
-              </a:tr>
-              <a:tr h="669104">
-                <a:tc>
-                  <a:txBody>
-                    <a:bodyPr/>
-                    <a:lstStyle/>
-                    <a:p>
-                      <a:pPr>
-                        <a:defRPr sz="1300" b="0">
-                          <a:solidFill>
-                            <a:srgbClr val="FFFFFF"/>
-                          </a:solidFill>
-                          <a:latin typeface="Play"/>
-                          <a:ea typeface="Play"/>
-                          <a:cs typeface="Play"/>
-                        </a:defRPr>
-                      </a:pPr>
-                      <a:r>
-                        <a:t>Презентации</a:t>
-                      </a:r>
-                    </a:p>
-                  </a:txBody>
-                  <a:tcPr>
-                    <a:solidFill>
-                      <a:srgbClr val="111111"/>
-                    </a:solidFill>
-                  </a:tcPr>
-                </a:tc>
-                <a:tc>
-                  <a:txBody>
-                    <a:bodyPr/>
-                    <a:lstStyle/>
-                    <a:p>
-                      <a:pPr>
-                        <a:defRPr sz="1300" b="0">
-                          <a:solidFill>
-                            <a:srgbClr val="FFFFFF"/>
-                          </a:solidFill>
-                          <a:latin typeface="Play"/>
-                          <a:ea typeface="Play"/>
-                          <a:cs typeface="Play"/>
-                        </a:defRPr>
-                      </a:pPr>
-                      <a:r>
-                        <a:t>68</a:t>
-                      </a:r>
-                    </a:p>
-                  </a:txBody>
-                  <a:tcPr>
-                    <a:solidFill>
-                      <a:srgbClr val="111111"/>
-                    </a:solidFill>
-                  </a:tcPr>
-                </a:tc>
-              </a:tr>
-            </a:tbl>
-          </a:graphicData>
-        </a:graphic>
-      </p:graphicFrame>
+        </p:nvSpPr>
+        <p:spPr>
+          <a:xfrm>
+            <a:off x="10554442" y="3125883"/>
+            <a:ext cx="547256" cy="547256"/>
+          </a:xfrm>
+          <a:prstGeom prst="ellipse">
+            <a:avLst/>
+          </a:prstGeom>
+          <a:solidFill>
+            <a:srgbClr val="0077FF"/>
+          </a:solidFill>
+          <a:ln>
+            <a:noFill/>
+          </a:ln>
+        </p:spPr>
+        <p:style>
+          <a:lnRef idx="1">
+            <a:schemeClr val="accent1"/>
+          </a:lnRef>
+          <a:fillRef idx="3">
+            <a:schemeClr val="accent1"/>
+          </a:fillRef>
+          <a:effectRef idx="2">
+            <a:schemeClr val="accent1"/>
+          </a:effectRef>
+          <a:fontRef idx="minor">
+            <a:schemeClr val="lt1"/>
+          </a:fontRef>
+        </p:style>
+        <p:txBody>
+          <a:bodyPr rtlCol="0" anchor="ctr"/>
+          <a:lstStyle/>
+          <a:p>
+            <a:pPr algn="ctr"/>
+          </a:p>
+        </p:txBody>
+      </p:sp>
+      <p:sp>
+        <p:nvSpPr>
+          <p:cNvPr id="9" name="TextBox 8"/>
+          <p:cNvSpPr txBox="1"/>
+          <p:nvPr/>
+        </p:nvSpPr>
+        <p:spPr>
+          <a:xfrm>
+            <a:off x="9003883" y="1492575"/>
+            <a:ext cx="2736281" cy="1525549"/>
+          </a:xfrm>
+          <a:prstGeom prst="rect">
+            <a:avLst/>
+          </a:prstGeom>
+          <a:noFill/>
+        </p:spPr>
+        <p:txBody>
+          <a:bodyPr wrap="square" lIns="12700" rIns="12700" tIns="12700" bIns="12700">
+            <a:spAutoFit/>
+          </a:bodyPr>
+          <a:lstStyle/>
+          <a:p>
+            <a:pPr algn="ctr">
+              <a:defRPr sz="1400" b="0">
+                <a:solidFill>
+                  <a:srgbClr val="FFFFFF"/>
+                </a:solidFill>
+                <a:latin typeface="Play"/>
+                <a:ea typeface="Play"/>
+                <a:cs typeface="Play"/>
+              </a:defRPr>
+            </a:pPr>
+            <a:r>
+              <a:rPr sz="1400" b="0">
+                <a:solidFill>
+                  <a:srgbClr val="FFFFFF"/>
+                </a:solidFill>
+                <a:latin typeface="Play"/>
+                <a:ea typeface="Play"/>
+                <a:cs typeface="Play"/>
+              </a:rPr>
+              <a:t>Первый квартал 2027: генерация иллюстраций</a:t>
+            </a:r>
+          </a:p>
+        </p:txBody>
+      </p:sp>
     </p:spTree>
   </p:cSld>
   <p:clrMapOvr>

--- a/samples/VK_WorkSpace_Клиентская_конференция_Шабл__split.pptx
+++ b/samples/VK_WorkSpace_Клиентская_конференция_Шабл__split.pptx
@@ -304,7 +304,7 @@
               <c:strCache>
                 <c:ptCount val="1"/>
                 <c:pt idx="0">
-                  <c:v>Время</c:v>
+                  <c:v>Текущее</c:v>
                 </c:pt>
               </c:strCache>
             </c:strRef>
@@ -321,36 +321,42 @@
           </c:spPr>
           <c:cat>
             <c:strRef>
-              <c:f>Sheet1!$A$2:$A$3</c:f>
+              <c:f>Sheet1!$A$2:$A$4</c:f>
               <c:strCache>
-                <c:ptCount val="2"/>
+                <c:ptCount val="3"/>
                 <c:pt idx="0">
-                  <c:v>Текущая сборка</c:v>
+                  <c:v>Сборка</c:v>
                 </c:pt>
                 <c:pt idx="1">
-                  <c:v>Пилот</c:v>
+                  <c:v>Правки</c:v>
+                </c:pt>
+                <c:pt idx="2">
+                  <c:v>Ожидание</c:v>
                 </c:pt>
               </c:strCache>
             </c:strRef>
           </c:cat>
           <c:val>
             <c:numRef>
-              <c:f>Sheet1!$B$2:$B$3</c:f>
+              <c:f>Sheet1!$B$2:$B$4</c:f>
               <c:numCache>
                 <c:formatCode>General</c:formatCode>
-                <c:ptCount val="2"/>
+                <c:ptCount val="3"/>
                 <c:pt idx="0">
                   <c:v>186.0</c:v>
                 </c:pt>
                 <c:pt idx="1">
-                  <c:v>4.0</c:v>
+                  <c:v>74.0</c:v>
+                </c:pt>
+                <c:pt idx="2">
+                  <c:v>6.0</c:v>
                 </c:pt>
               </c:numCache>
             </c:numRef>
           </c:val>
         </c:ser>
         <c:dLbls>
-          <c:numFmt formatCode="0&quot; минут&quot;" sourceLinked="0"/>
+          <c:numFmt formatCode="0&quot; мин&quot;" sourceLinked="0"/>
           <c:txPr>
             <a:bodyPr wrap="none"/>
             <a:lstStyle/>
@@ -444,7 +450,7 @@
                   </a:defRPr>
                 </a:pPr>
                 <a:r>
-                  <a:t>Время, минут</a:t>
+                  <a:t>Текущее, мин</a:t>
                 </a:r>
               </a:p>
             </c:rich>
@@ -475,6 +481,277 @@
         <c:crosses val="autoZero"/>
       </c:valAx>
     </c:plotArea>
+    <c:dispBlanksAs val="gap"/>
+  </c:chart>
+  <c:txPr>
+    <a:bodyPr/>
+    <a:lstStyle/>
+    <a:p>
+      <a:pPr>
+        <a:defRPr sz="1200" b="0">
+          <a:solidFill>
+            <a:srgbClr val="FFFFFF"/>
+          </a:solidFill>
+          <a:latin typeface="Play"/>
+          <a:ea typeface="Play"/>
+          <a:cs typeface="Play"/>
+        </a:defRPr>
+      </a:pPr>
+      <a:endParaRPr lang="en-US"/>
+    </a:p>
+  </c:txPr>
+  <c:externalData r:id="rId1">
+    <c:autoUpdate val="0"/>
+  </c:externalData>
+</c:chartSpace>
+</file>
+
+<file path=ppt/charts/chart2.xml><?xml version="1.0" encoding="utf-8"?>
+<c:chartSpace xmlns:c="http://schemas.openxmlformats.org/drawingml/2006/chart" xmlns:a="http://schemas.openxmlformats.org/drawingml/2006/main" xmlns:r="http://schemas.openxmlformats.org/officeDocument/2006/relationships">
+  <c:date1904 val="0"/>
+  <c:chart>
+    <c:autoTitleDeleted val="1"/>
+    <c:plotArea>
+      <c:barChart>
+        <c:barDir val="col"/>
+        <c:grouping val="clustered"/>
+        <c:ser>
+          <c:idx val="0"/>
+          <c:order val="0"/>
+          <c:tx>
+            <c:strRef>
+              <c:f>Sheet1!$B$1</c:f>
+              <c:strCache>
+                <c:ptCount val="1"/>
+                <c:pt idx="0">
+                  <c:v>До</c:v>
+                </c:pt>
+              </c:strCache>
+            </c:strRef>
+          </c:tx>
+          <c:spPr>
+            <a:solidFill>
+              <a:srgbClr val="0077FF"/>
+            </a:solidFill>
+            <a:ln>
+              <a:solidFill>
+                <a:srgbClr val="0077FF"/>
+              </a:solidFill>
+            </a:ln>
+          </c:spPr>
+          <c:cat>
+            <c:strRef>
+              <c:f>Sheet1!$A$2:$A$5</c:f>
+              <c:strCache>
+                <c:ptCount val="4"/>
+                <c:pt idx="0">
+                  <c:v>Время сборки</c:v>
+                </c:pt>
+                <c:pt idx="1">
+                  <c:v>Время до первой версии</c:v>
+                </c:pt>
+                <c:pt idx="2">
+                  <c:v>Нарушения стиля</c:v>
+                </c:pt>
+                <c:pt idx="3">
+                  <c:v>Запросы закрыты</c:v>
+                </c:pt>
+              </c:strCache>
+            </c:strRef>
+          </c:cat>
+          <c:val>
+            <c:numRef>
+              <c:f>Sheet1!$B$2:$B$5</c:f>
+              <c:numCache>
+                <c:formatCode>General</c:formatCode>
+                <c:ptCount val="4"/>
+                <c:pt idx="0">
+                  <c:v>186.0</c:v>
+                </c:pt>
+                <c:pt idx="1">
+                  <c:v>6.0</c:v>
+                </c:pt>
+                <c:pt idx="2">
+                  <c:v>19.0</c:v>
+                </c:pt>
+                <c:pt idx="3">
+                  <c:v>11.0</c:v>
+                </c:pt>
+              </c:numCache>
+            </c:numRef>
+          </c:val>
+        </c:ser>
+        <c:ser>
+          <c:idx val="1"/>
+          <c:order val="1"/>
+          <c:tx>
+            <c:strRef>
+              <c:f>Sheet1!$C$1</c:f>
+              <c:strCache>
+                <c:ptCount val="1"/>
+                <c:pt idx="0">
+                  <c:v>После</c:v>
+                </c:pt>
+              </c:strCache>
+            </c:strRef>
+          </c:tx>
+          <c:spPr>
+            <a:solidFill>
+              <a:srgbClr val="6DBCFF"/>
+            </a:solidFill>
+            <a:ln>
+              <a:solidFill>
+                <a:srgbClr val="6DBCFF"/>
+              </a:solidFill>
+            </a:ln>
+          </c:spPr>
+          <c:cat>
+            <c:strRef>
+              <c:f>Sheet1!$A$2:$A$5</c:f>
+              <c:strCache>
+                <c:ptCount val="4"/>
+                <c:pt idx="0">
+                  <c:v>Время сборки</c:v>
+                </c:pt>
+                <c:pt idx="1">
+                  <c:v>Время до первой версии</c:v>
+                </c:pt>
+                <c:pt idx="2">
+                  <c:v>Нарушения стиля</c:v>
+                </c:pt>
+                <c:pt idx="3">
+                  <c:v>Запросы закрыты</c:v>
+                </c:pt>
+              </c:strCache>
+            </c:strRef>
+          </c:cat>
+          <c:val>
+            <c:numRef>
+              <c:f>Sheet1!$C$2:$C$5</c:f>
+              <c:numCache>
+                <c:formatCode>General</c:formatCode>
+                <c:ptCount val="4"/>
+                <c:pt idx="0">
+                  <c:v>4.0</c:v>
+                </c:pt>
+                <c:pt idx="1">
+                  <c:v>1.0</c:v>
+                </c:pt>
+                <c:pt idx="2">
+                  <c:v>2.0</c:v>
+                </c:pt>
+                <c:pt idx="3">
+                  <c:v>38.0</c:v>
+                </c:pt>
+              </c:numCache>
+            </c:numRef>
+          </c:val>
+        </c:ser>
+        <c:dLbls>
+          <c:numFmt formatCode="0" sourceLinked="0"/>
+          <c:txPr>
+            <a:bodyPr wrap="none"/>
+            <a:lstStyle/>
+            <a:p>
+              <a:pPr>
+                <a:defRPr sz="1100" b="0">
+                  <a:solidFill>
+                    <a:srgbClr val="FFFFFF"/>
+                  </a:solidFill>
+                  <a:latin typeface="Play"/>
+                  <a:ea typeface="Play"/>
+                  <a:cs typeface="Play"/>
+                </a:defRPr>
+              </a:pPr>
+            </a:p>
+          </c:txPr>
+          <c:dLblPos val="outEnd"/>
+          <c:showLegendKey val="0"/>
+          <c:showVal val="1"/>
+          <c:showCatName val="0"/>
+          <c:showSerName val="0"/>
+          <c:showPercent val="0"/>
+          <c:showBubbleSize val="0"/>
+          <c:showLeaderLines val="1"/>
+        </c:dLbls>
+        <c:gapWidth val="60"/>
+        <c:axId val="-2068027336"/>
+        <c:axId val="-2113994440"/>
+      </c:barChart>
+      <c:catAx>
+        <c:axId val="-2068027336"/>
+        <c:scaling>
+          <c:orientation val="minMax"/>
+        </c:scaling>
+        <c:delete val="0"/>
+        <c:axPos val="b"/>
+        <c:majorTickMark val="out"/>
+        <c:minorTickMark val="none"/>
+        <c:tickLblPos val="nextTo"/>
+        <c:txPr>
+          <a:bodyPr/>
+          <a:lstStyle/>
+          <a:p>
+            <a:pPr>
+              <a:defRPr sz="1100" b="0">
+                <a:solidFill>
+                  <a:srgbClr val="FFFFFF"/>
+                </a:solidFill>
+                <a:latin typeface="Play"/>
+                <a:ea typeface="Play"/>
+                <a:cs typeface="Play"/>
+              </a:defRPr>
+            </a:pPr>
+          </a:p>
+        </c:txPr>
+        <c:crossAx val="-2113994440"/>
+        <c:crosses val="autoZero"/>
+        <c:auto val="1"/>
+        <c:lblAlgn val="ctr"/>
+        <c:lblOffset val="100"/>
+        <c:noMultiLvlLbl val="0"/>
+      </c:catAx>
+      <c:valAx>
+        <c:axId val="-2113994440"/>
+        <c:scaling/>
+        <c:delete val="0"/>
+        <c:axPos val="l"/>
+        <c:majorGridlines>
+          <c:spPr>
+            <a:ln w="9525">
+              <a:solidFill>
+                <a:srgbClr val="3C3C3C"/>
+              </a:solidFill>
+            </a:ln>
+          </c:spPr>
+        </c:majorGridlines>
+        <c:majorTickMark val="out"/>
+        <c:minorTickMark val="none"/>
+        <c:tickLblPos val="nextTo"/>
+        <c:txPr>
+          <a:bodyPr/>
+          <a:lstStyle/>
+          <a:p>
+            <a:pPr>
+              <a:defRPr sz="1100" b="0">
+                <a:solidFill>
+                  <a:srgbClr val="FFFFFF"/>
+                </a:solidFill>
+                <a:latin typeface="Play"/>
+                <a:ea typeface="Play"/>
+                <a:cs typeface="Play"/>
+              </a:defRPr>
+            </a:pPr>
+          </a:p>
+        </c:txPr>
+        <c:crossAx val="-2068027336"/>
+        <c:crosses val="autoZero"/>
+      </c:valAx>
+    </c:plotArea>
+    <c:legend>
+      <c:legendPos val="b"/>
+      <c:overlay val="0"/>
+    </c:legend>
     <c:dispBlanksAs val="gap"/>
   </c:chart>
   <c:txPr>
@@ -2328,6 +2605,2607 @@
 </p:notes>
 </file>
 
+<file path=ppt/slideLayouts/slideLayout1.xml><?xml version="1.0" encoding="utf-8"?>
+<p:sldLayout xmlns:a="http://schemas.openxmlformats.org/drawingml/2006/main" xmlns:r="http://schemas.openxmlformats.org/officeDocument/2006/relationships" xmlns:mc="http://schemas.openxmlformats.org/markup-compatibility/2006" xmlns:mv="urn:schemas-microsoft-com:mac:vml" xmlns:p="http://schemas.openxmlformats.org/presentationml/2006/main" xmlns:c="http://schemas.openxmlformats.org/drawingml/2006/chart" xmlns:dgm="http://schemas.openxmlformats.org/drawingml/2006/diagram" xmlns:o="urn:schemas-microsoft-com:office:office" xmlns:v="urn:schemas-microsoft-com:vml" xmlns:pvml="urn:schemas-microsoft-com:office:powerpoint" xmlns:com="http://schemas.openxmlformats.org/drawingml/2006/compatibility" xmlns:p14="http://schemas.microsoft.com/office/powerpoint/2010/main" xmlns:p15="http://schemas.microsoft.com/office/powerpoint/2012/main" xmlns:ahyp="http://schemas.microsoft.com/office/drawing/2018/hyperlinkcolor" matchingName="7_Титульный слайд">
+  <p:cSld name="7_Титульный слайд">
+    <p:bg>
+      <p:bgPr>
+        <a:solidFill>
+          <a:schemeClr val="dk1"/>
+        </a:solidFill>
+      </p:bgPr>
+    </p:bg>
+    <p:spTree>
+      <p:nvGrpSpPr>
+        <p:cNvPr id="54" name="Shape 54"/>
+        <p:cNvGrpSpPr/>
+        <p:nvPr/>
+      </p:nvGrpSpPr>
+      <p:grpSpPr>
+        <a:xfrm>
+          <a:off x="0" y="0"/>
+          <a:ext cx="0" cy="0"/>
+          <a:chOff x="0" y="0"/>
+          <a:chExt cx="0" cy="0"/>
+        </a:xfrm>
+      </p:grpSpPr>
+      <p:grpSp>
+        <p:nvGrpSpPr>
+          <p:cNvPr id="55" name="Google Shape;55;p2"/>
+          <p:cNvGrpSpPr/>
+          <p:nvPr/>
+        </p:nvGrpSpPr>
+        <p:grpSpPr>
+          <a:xfrm>
+            <a:off x="224842" y="-74145"/>
+            <a:ext cx="12188171" cy="64326"/>
+            <a:chOff x="-2" y="-2"/>
+            <a:chExt cx="12188169" cy="64324"/>
+          </a:xfrm>
+        </p:grpSpPr>
+        <p:cxnSp>
+          <p:nvCxnSpPr>
+            <p:cNvPr id="56" name="Google Shape;56;p2"/>
+            <p:cNvCxnSpPr/>
+            <p:nvPr/>
+          </p:nvCxnSpPr>
+          <p:spPr>
+            <a:xfrm flipH="1">
+              <a:off x="-2" y="-2"/>
+              <a:ext cx="7" cy="64324"/>
+            </a:xfrm>
+            <a:prstGeom prst="straightConnector1">
+              <a:avLst/>
+            </a:prstGeom>
+            <a:noFill/>
+            <a:ln cap="flat" cmpd="sng" w="9525">
+              <a:solidFill>
+                <a:srgbClr val="808080"/>
+              </a:solidFill>
+              <a:prstDash val="solid"/>
+              <a:miter lim="8000"/>
+              <a:headEnd len="sm" w="sm" type="none"/>
+              <a:tailEnd len="sm" w="sm" type="none"/>
+            </a:ln>
+          </p:spPr>
+        </p:cxnSp>
+        <p:cxnSp>
+          <p:nvCxnSpPr>
+            <p:cNvPr id="57" name="Google Shape;57;p2"/>
+            <p:cNvCxnSpPr/>
+            <p:nvPr/>
+          </p:nvCxnSpPr>
+          <p:spPr>
+            <a:xfrm>
+              <a:off x="677118" y="-2"/>
+              <a:ext cx="7" cy="64324"/>
+            </a:xfrm>
+            <a:prstGeom prst="straightConnector1">
+              <a:avLst/>
+            </a:prstGeom>
+            <a:noFill/>
+            <a:ln cap="flat" cmpd="sng" w="9525">
+              <a:solidFill>
+                <a:srgbClr val="808080"/>
+              </a:solidFill>
+              <a:prstDash val="solid"/>
+              <a:miter lim="8000"/>
+              <a:headEnd len="sm" w="sm" type="none"/>
+              <a:tailEnd len="sm" w="sm" type="none"/>
+            </a:ln>
+          </p:spPr>
+        </p:cxnSp>
+        <p:cxnSp>
+          <p:nvCxnSpPr>
+            <p:cNvPr id="58" name="Google Shape;58;p2"/>
+            <p:cNvCxnSpPr/>
+            <p:nvPr/>
+          </p:nvCxnSpPr>
+          <p:spPr>
+            <a:xfrm>
+              <a:off x="1354241" y="-2"/>
+              <a:ext cx="7" cy="64324"/>
+            </a:xfrm>
+            <a:prstGeom prst="straightConnector1">
+              <a:avLst/>
+            </a:prstGeom>
+            <a:noFill/>
+            <a:ln cap="flat" cmpd="sng" w="9525">
+              <a:solidFill>
+                <a:srgbClr val="808080"/>
+              </a:solidFill>
+              <a:prstDash val="solid"/>
+              <a:miter lim="8000"/>
+              <a:headEnd len="sm" w="sm" type="none"/>
+              <a:tailEnd len="sm" w="sm" type="none"/>
+            </a:ln>
+          </p:spPr>
+        </p:cxnSp>
+        <p:cxnSp>
+          <p:nvCxnSpPr>
+            <p:cNvPr id="59" name="Google Shape;59;p2"/>
+            <p:cNvCxnSpPr/>
+            <p:nvPr/>
+          </p:nvCxnSpPr>
+          <p:spPr>
+            <a:xfrm>
+              <a:off x="2031360" y="-2"/>
+              <a:ext cx="7" cy="64324"/>
+            </a:xfrm>
+            <a:prstGeom prst="straightConnector1">
+              <a:avLst/>
+            </a:prstGeom>
+            <a:noFill/>
+            <a:ln cap="flat" cmpd="sng" w="9525">
+              <a:solidFill>
+                <a:srgbClr val="808080"/>
+              </a:solidFill>
+              <a:prstDash val="solid"/>
+              <a:miter lim="8000"/>
+              <a:headEnd len="sm" w="sm" type="none"/>
+              <a:tailEnd len="sm" w="sm" type="none"/>
+            </a:ln>
+          </p:spPr>
+        </p:cxnSp>
+        <p:cxnSp>
+          <p:nvCxnSpPr>
+            <p:cNvPr id="60" name="Google Shape;60;p2"/>
+            <p:cNvCxnSpPr/>
+            <p:nvPr/>
+          </p:nvCxnSpPr>
+          <p:spPr>
+            <a:xfrm>
+              <a:off x="2708479" y="-2"/>
+              <a:ext cx="7" cy="64324"/>
+            </a:xfrm>
+            <a:prstGeom prst="straightConnector1">
+              <a:avLst/>
+            </a:prstGeom>
+            <a:noFill/>
+            <a:ln cap="flat" cmpd="sng" w="9525">
+              <a:solidFill>
+                <a:srgbClr val="808080"/>
+              </a:solidFill>
+              <a:prstDash val="solid"/>
+              <a:miter lim="8000"/>
+              <a:headEnd len="sm" w="sm" type="none"/>
+              <a:tailEnd len="sm" w="sm" type="none"/>
+            </a:ln>
+          </p:spPr>
+        </p:cxnSp>
+        <p:cxnSp>
+          <p:nvCxnSpPr>
+            <p:cNvPr id="61" name="Google Shape;61;p2"/>
+            <p:cNvCxnSpPr/>
+            <p:nvPr/>
+          </p:nvCxnSpPr>
+          <p:spPr>
+            <a:xfrm>
+              <a:off x="3385598" y="-2"/>
+              <a:ext cx="7" cy="64324"/>
+            </a:xfrm>
+            <a:prstGeom prst="straightConnector1">
+              <a:avLst/>
+            </a:prstGeom>
+            <a:noFill/>
+            <a:ln cap="flat" cmpd="sng" w="9525">
+              <a:solidFill>
+                <a:srgbClr val="808080"/>
+              </a:solidFill>
+              <a:prstDash val="solid"/>
+              <a:miter lim="8000"/>
+              <a:headEnd len="sm" w="sm" type="none"/>
+              <a:tailEnd len="sm" w="sm" type="none"/>
+            </a:ln>
+          </p:spPr>
+        </p:cxnSp>
+        <p:cxnSp>
+          <p:nvCxnSpPr>
+            <p:cNvPr id="62" name="Google Shape;62;p2"/>
+            <p:cNvCxnSpPr/>
+            <p:nvPr/>
+          </p:nvCxnSpPr>
+          <p:spPr>
+            <a:xfrm>
+              <a:off x="4062717" y="-2"/>
+              <a:ext cx="7" cy="64324"/>
+            </a:xfrm>
+            <a:prstGeom prst="straightConnector1">
+              <a:avLst/>
+            </a:prstGeom>
+            <a:noFill/>
+            <a:ln cap="flat" cmpd="sng" w="9525">
+              <a:solidFill>
+                <a:srgbClr val="808080"/>
+              </a:solidFill>
+              <a:prstDash val="solid"/>
+              <a:miter lim="8000"/>
+              <a:headEnd len="sm" w="sm" type="none"/>
+              <a:tailEnd len="sm" w="sm" type="none"/>
+            </a:ln>
+          </p:spPr>
+        </p:cxnSp>
+        <p:cxnSp>
+          <p:nvCxnSpPr>
+            <p:cNvPr id="63" name="Google Shape;63;p2"/>
+            <p:cNvCxnSpPr/>
+            <p:nvPr/>
+          </p:nvCxnSpPr>
+          <p:spPr>
+            <a:xfrm>
+              <a:off x="4739836" y="-2"/>
+              <a:ext cx="7" cy="64324"/>
+            </a:xfrm>
+            <a:prstGeom prst="straightConnector1">
+              <a:avLst/>
+            </a:prstGeom>
+            <a:noFill/>
+            <a:ln cap="flat" cmpd="sng" w="9525">
+              <a:solidFill>
+                <a:srgbClr val="808080"/>
+              </a:solidFill>
+              <a:prstDash val="solid"/>
+              <a:miter lim="8000"/>
+              <a:headEnd len="sm" w="sm" type="none"/>
+              <a:tailEnd len="sm" w="sm" type="none"/>
+            </a:ln>
+          </p:spPr>
+        </p:cxnSp>
+        <p:cxnSp>
+          <p:nvCxnSpPr>
+            <p:cNvPr id="64" name="Google Shape;64;p2"/>
+            <p:cNvCxnSpPr/>
+            <p:nvPr/>
+          </p:nvCxnSpPr>
+          <p:spPr>
+            <a:xfrm>
+              <a:off x="5416955" y="-2"/>
+              <a:ext cx="7" cy="64324"/>
+            </a:xfrm>
+            <a:prstGeom prst="straightConnector1">
+              <a:avLst/>
+            </a:prstGeom>
+            <a:noFill/>
+            <a:ln cap="flat" cmpd="sng" w="9525">
+              <a:solidFill>
+                <a:srgbClr val="808080"/>
+              </a:solidFill>
+              <a:prstDash val="solid"/>
+              <a:miter lim="8000"/>
+              <a:headEnd len="sm" w="sm" type="none"/>
+              <a:tailEnd len="sm" w="sm" type="none"/>
+            </a:ln>
+          </p:spPr>
+        </p:cxnSp>
+        <p:cxnSp>
+          <p:nvCxnSpPr>
+            <p:cNvPr id="65" name="Google Shape;65;p2"/>
+            <p:cNvCxnSpPr/>
+            <p:nvPr/>
+          </p:nvCxnSpPr>
+          <p:spPr>
+            <a:xfrm>
+              <a:off x="6094077" y="-2"/>
+              <a:ext cx="7" cy="64324"/>
+            </a:xfrm>
+            <a:prstGeom prst="straightConnector1">
+              <a:avLst/>
+            </a:prstGeom>
+            <a:noFill/>
+            <a:ln cap="flat" cmpd="sng" w="9525">
+              <a:solidFill>
+                <a:srgbClr val="808080"/>
+              </a:solidFill>
+              <a:prstDash val="solid"/>
+              <a:miter lim="8000"/>
+              <a:headEnd len="sm" w="sm" type="none"/>
+              <a:tailEnd len="sm" w="sm" type="none"/>
+            </a:ln>
+          </p:spPr>
+        </p:cxnSp>
+        <p:cxnSp>
+          <p:nvCxnSpPr>
+            <p:cNvPr id="66" name="Google Shape;66;p2"/>
+            <p:cNvCxnSpPr/>
+            <p:nvPr/>
+          </p:nvCxnSpPr>
+          <p:spPr>
+            <a:xfrm>
+              <a:off x="6771195" y="-2"/>
+              <a:ext cx="7" cy="64324"/>
+            </a:xfrm>
+            <a:prstGeom prst="straightConnector1">
+              <a:avLst/>
+            </a:prstGeom>
+            <a:noFill/>
+            <a:ln cap="flat" cmpd="sng" w="9525">
+              <a:solidFill>
+                <a:srgbClr val="808080"/>
+              </a:solidFill>
+              <a:prstDash val="solid"/>
+              <a:miter lim="8000"/>
+              <a:headEnd len="sm" w="sm" type="none"/>
+              <a:tailEnd len="sm" w="sm" type="none"/>
+            </a:ln>
+          </p:spPr>
+        </p:cxnSp>
+        <p:cxnSp>
+          <p:nvCxnSpPr>
+            <p:cNvPr id="67" name="Google Shape;67;p2"/>
+            <p:cNvCxnSpPr/>
+            <p:nvPr/>
+          </p:nvCxnSpPr>
+          <p:spPr>
+            <a:xfrm>
+              <a:off x="7448315" y="-2"/>
+              <a:ext cx="7" cy="64324"/>
+            </a:xfrm>
+            <a:prstGeom prst="straightConnector1">
+              <a:avLst/>
+            </a:prstGeom>
+            <a:noFill/>
+            <a:ln cap="flat" cmpd="sng" w="9525">
+              <a:solidFill>
+                <a:srgbClr val="808080"/>
+              </a:solidFill>
+              <a:prstDash val="solid"/>
+              <a:miter lim="8000"/>
+              <a:headEnd len="sm" w="sm" type="none"/>
+              <a:tailEnd len="sm" w="sm" type="none"/>
+            </a:ln>
+          </p:spPr>
+        </p:cxnSp>
+        <p:cxnSp>
+          <p:nvCxnSpPr>
+            <p:cNvPr id="68" name="Google Shape;68;p2"/>
+            <p:cNvCxnSpPr/>
+            <p:nvPr/>
+          </p:nvCxnSpPr>
+          <p:spPr>
+            <a:xfrm>
+              <a:off x="8125435" y="-2"/>
+              <a:ext cx="7" cy="64324"/>
+            </a:xfrm>
+            <a:prstGeom prst="straightConnector1">
+              <a:avLst/>
+            </a:prstGeom>
+            <a:noFill/>
+            <a:ln cap="flat" cmpd="sng" w="9525">
+              <a:solidFill>
+                <a:srgbClr val="808080"/>
+              </a:solidFill>
+              <a:prstDash val="solid"/>
+              <a:miter lim="8000"/>
+              <a:headEnd len="sm" w="sm" type="none"/>
+              <a:tailEnd len="sm" w="sm" type="none"/>
+            </a:ln>
+          </p:spPr>
+        </p:cxnSp>
+        <p:cxnSp>
+          <p:nvCxnSpPr>
+            <p:cNvPr id="69" name="Google Shape;69;p2"/>
+            <p:cNvCxnSpPr/>
+            <p:nvPr/>
+          </p:nvCxnSpPr>
+          <p:spPr>
+            <a:xfrm>
+              <a:off x="8802554" y="-2"/>
+              <a:ext cx="7" cy="64324"/>
+            </a:xfrm>
+            <a:prstGeom prst="straightConnector1">
+              <a:avLst/>
+            </a:prstGeom>
+            <a:noFill/>
+            <a:ln cap="flat" cmpd="sng" w="9525">
+              <a:solidFill>
+                <a:srgbClr val="808080"/>
+              </a:solidFill>
+              <a:prstDash val="solid"/>
+              <a:miter lim="8000"/>
+              <a:headEnd len="sm" w="sm" type="none"/>
+              <a:tailEnd len="sm" w="sm" type="none"/>
+            </a:ln>
+          </p:spPr>
+        </p:cxnSp>
+        <p:cxnSp>
+          <p:nvCxnSpPr>
+            <p:cNvPr id="70" name="Google Shape;70;p2"/>
+            <p:cNvCxnSpPr/>
+            <p:nvPr/>
+          </p:nvCxnSpPr>
+          <p:spPr>
+            <a:xfrm>
+              <a:off x="9479673" y="-2"/>
+              <a:ext cx="7" cy="64324"/>
+            </a:xfrm>
+            <a:prstGeom prst="straightConnector1">
+              <a:avLst/>
+            </a:prstGeom>
+            <a:noFill/>
+            <a:ln cap="flat" cmpd="sng" w="9525">
+              <a:solidFill>
+                <a:srgbClr val="808080"/>
+              </a:solidFill>
+              <a:prstDash val="solid"/>
+              <a:miter lim="8000"/>
+              <a:headEnd len="sm" w="sm" type="none"/>
+              <a:tailEnd len="sm" w="sm" type="none"/>
+            </a:ln>
+          </p:spPr>
+        </p:cxnSp>
+        <p:cxnSp>
+          <p:nvCxnSpPr>
+            <p:cNvPr id="71" name="Google Shape;71;p2"/>
+            <p:cNvCxnSpPr/>
+            <p:nvPr/>
+          </p:nvCxnSpPr>
+          <p:spPr>
+            <a:xfrm>
+              <a:off x="10156792" y="-2"/>
+              <a:ext cx="7" cy="64324"/>
+            </a:xfrm>
+            <a:prstGeom prst="straightConnector1">
+              <a:avLst/>
+            </a:prstGeom>
+            <a:noFill/>
+            <a:ln cap="flat" cmpd="sng" w="9525">
+              <a:solidFill>
+                <a:srgbClr val="808080"/>
+              </a:solidFill>
+              <a:prstDash val="solid"/>
+              <a:miter lim="8000"/>
+              <a:headEnd len="sm" w="sm" type="none"/>
+              <a:tailEnd len="sm" w="sm" type="none"/>
+            </a:ln>
+          </p:spPr>
+        </p:cxnSp>
+        <p:cxnSp>
+          <p:nvCxnSpPr>
+            <p:cNvPr id="72" name="Google Shape;72;p2"/>
+            <p:cNvCxnSpPr/>
+            <p:nvPr/>
+          </p:nvCxnSpPr>
+          <p:spPr>
+            <a:xfrm>
+              <a:off x="10833914" y="-2"/>
+              <a:ext cx="7" cy="64324"/>
+            </a:xfrm>
+            <a:prstGeom prst="straightConnector1">
+              <a:avLst/>
+            </a:prstGeom>
+            <a:noFill/>
+            <a:ln cap="flat" cmpd="sng" w="9525">
+              <a:solidFill>
+                <a:srgbClr val="808080"/>
+              </a:solidFill>
+              <a:prstDash val="solid"/>
+              <a:miter lim="8000"/>
+              <a:headEnd len="sm" w="sm" type="none"/>
+              <a:tailEnd len="sm" w="sm" type="none"/>
+            </a:ln>
+          </p:spPr>
+        </p:cxnSp>
+        <p:cxnSp>
+          <p:nvCxnSpPr>
+            <p:cNvPr id="73" name="Google Shape;73;p2"/>
+            <p:cNvCxnSpPr/>
+            <p:nvPr/>
+          </p:nvCxnSpPr>
+          <p:spPr>
+            <a:xfrm>
+              <a:off x="11511034" y="-2"/>
+              <a:ext cx="7" cy="64324"/>
+            </a:xfrm>
+            <a:prstGeom prst="straightConnector1">
+              <a:avLst/>
+            </a:prstGeom>
+            <a:noFill/>
+            <a:ln cap="flat" cmpd="sng" w="9525">
+              <a:solidFill>
+                <a:srgbClr val="808080"/>
+              </a:solidFill>
+              <a:prstDash val="solid"/>
+              <a:miter lim="8000"/>
+              <a:headEnd len="sm" w="sm" type="none"/>
+              <a:tailEnd len="sm" w="sm" type="none"/>
+            </a:ln>
+          </p:spPr>
+        </p:cxnSp>
+        <p:cxnSp>
+          <p:nvCxnSpPr>
+            <p:cNvPr id="74" name="Google Shape;74;p2"/>
+            <p:cNvCxnSpPr/>
+            <p:nvPr/>
+          </p:nvCxnSpPr>
+          <p:spPr>
+            <a:xfrm>
+              <a:off x="12188160" y="-2"/>
+              <a:ext cx="7" cy="64324"/>
+            </a:xfrm>
+            <a:prstGeom prst="straightConnector1">
+              <a:avLst/>
+            </a:prstGeom>
+            <a:noFill/>
+            <a:ln cap="flat" cmpd="sng" w="9525">
+              <a:solidFill>
+                <a:srgbClr val="808080"/>
+              </a:solidFill>
+              <a:prstDash val="solid"/>
+              <a:miter lim="8000"/>
+              <a:headEnd len="sm" w="sm" type="none"/>
+              <a:tailEnd len="sm" w="sm" type="none"/>
+            </a:ln>
+          </p:spPr>
+        </p:cxnSp>
+      </p:grpSp>
+      <p:sp>
+        <p:nvSpPr>
+          <p:cNvPr id="75" name="Google Shape;75;p2"/>
+          <p:cNvSpPr txBox="1"/>
+          <p:nvPr>
+            <p:ph type="title"/>
+          </p:nvPr>
+        </p:nvSpPr>
+        <p:spPr>
+          <a:xfrm>
+            <a:off x="429253" y="2546255"/>
+            <a:ext cx="7827335" cy="1876890"/>
+          </a:xfrm>
+          <a:prstGeom prst="rect">
+            <a:avLst/>
+          </a:prstGeom>
+          <a:noFill/>
+          <a:ln>
+            <a:noFill/>
+          </a:ln>
+        </p:spPr>
+        <p:txBody>
+          <a:bodyPr anchorCtr="0" anchor="ctr" bIns="0" lIns="0" spcFirstLastPara="1" rIns="0" wrap="square" tIns="0">
+            <a:noAutofit/>
+          </a:bodyPr>
+          <a:lstStyle>
+            <a:lvl1pPr lvl="0" algn="l">
+              <a:lnSpc>
+                <a:spcPct val="90000"/>
+              </a:lnSpc>
+              <a:spcBef>
+                <a:spcPts val="0"/>
+              </a:spcBef>
+              <a:spcAft>
+                <a:spcPts val="0"/>
+              </a:spcAft>
+              <a:buClr>
+                <a:schemeClr val="lt1"/>
+              </a:buClr>
+              <a:buSzPts val="3600"/>
+              <a:buFont typeface="Play"/>
+              <a:buNone/>
+              <a:defRPr b="0" i="0" sz="3600">
+                <a:solidFill>
+                  <a:schemeClr val="lt1"/>
+                </a:solidFill>
+                <a:latin typeface="Play"/>
+                <a:ea typeface="Play"/>
+                <a:cs typeface="Play"/>
+                <a:sym typeface="Play"/>
+              </a:defRPr>
+            </a:lvl1pPr>
+            <a:lvl2pPr lvl="1">
+              <a:spcBef>
+                <a:spcPts val="0"/>
+              </a:spcBef>
+              <a:spcAft>
+                <a:spcPts val="0"/>
+              </a:spcAft>
+              <a:buSzPts val="1400"/>
+              <a:buNone/>
+              <a:defRPr/>
+            </a:lvl2pPr>
+            <a:lvl3pPr lvl="2">
+              <a:spcBef>
+                <a:spcPts val="0"/>
+              </a:spcBef>
+              <a:spcAft>
+                <a:spcPts val="0"/>
+              </a:spcAft>
+              <a:buSzPts val="1400"/>
+              <a:buNone/>
+              <a:defRPr/>
+            </a:lvl3pPr>
+            <a:lvl4pPr lvl="3">
+              <a:spcBef>
+                <a:spcPts val="0"/>
+              </a:spcBef>
+              <a:spcAft>
+                <a:spcPts val="0"/>
+              </a:spcAft>
+              <a:buSzPts val="1400"/>
+              <a:buNone/>
+              <a:defRPr/>
+            </a:lvl4pPr>
+            <a:lvl5pPr lvl="4">
+              <a:spcBef>
+                <a:spcPts val="0"/>
+              </a:spcBef>
+              <a:spcAft>
+                <a:spcPts val="0"/>
+              </a:spcAft>
+              <a:buSzPts val="1400"/>
+              <a:buNone/>
+              <a:defRPr/>
+            </a:lvl5pPr>
+            <a:lvl6pPr lvl="5">
+              <a:spcBef>
+                <a:spcPts val="0"/>
+              </a:spcBef>
+              <a:spcAft>
+                <a:spcPts val="0"/>
+              </a:spcAft>
+              <a:buSzPts val="1400"/>
+              <a:buNone/>
+              <a:defRPr/>
+            </a:lvl6pPr>
+            <a:lvl7pPr lvl="6">
+              <a:spcBef>
+                <a:spcPts val="0"/>
+              </a:spcBef>
+              <a:spcAft>
+                <a:spcPts val="0"/>
+              </a:spcAft>
+              <a:buSzPts val="1400"/>
+              <a:buNone/>
+              <a:defRPr/>
+            </a:lvl7pPr>
+            <a:lvl8pPr lvl="7">
+              <a:spcBef>
+                <a:spcPts val="0"/>
+              </a:spcBef>
+              <a:spcAft>
+                <a:spcPts val="0"/>
+              </a:spcAft>
+              <a:buSzPts val="1400"/>
+              <a:buNone/>
+              <a:defRPr/>
+            </a:lvl8pPr>
+            <a:lvl9pPr lvl="8">
+              <a:spcBef>
+                <a:spcPts val="0"/>
+              </a:spcBef>
+              <a:spcAft>
+                <a:spcPts val="0"/>
+              </a:spcAft>
+              <a:buSzPts val="1400"/>
+              <a:buNone/>
+              <a:defRPr/>
+            </a:lvl9pPr>
+          </a:lstStyle>
+          <a:p/>
+        </p:txBody>
+      </p:sp>
+      <p:grpSp>
+        <p:nvGrpSpPr>
+          <p:cNvPr id="76" name="Google Shape;76;p2"/>
+          <p:cNvGrpSpPr/>
+          <p:nvPr/>
+        </p:nvGrpSpPr>
+        <p:grpSpPr>
+          <a:xfrm>
+            <a:off x="1" y="6350"/>
+            <a:ext cx="12192792" cy="6851649"/>
+            <a:chOff x="0" y="6350"/>
+            <a:chExt cx="24396891" cy="13709651"/>
+          </a:xfrm>
+        </p:grpSpPr>
+        <p:pic>
+          <p:nvPicPr>
+            <p:cNvPr id="77" name="Google Shape;77;p2"/>
+            <p:cNvPicPr preferRelativeResize="0"/>
+            <p:nvPr/>
+          </p:nvPicPr>
+          <p:blipFill rotWithShape="1">
+            <a:blip r:embed="rId2">
+              <a:alphaModFix/>
+            </a:blip>
+            <a:srcRect b="0" l="0" r="50023" t="80662"/>
+            <a:stretch/>
+          </p:blipFill>
+          <p:spPr>
+            <a:xfrm>
+              <a:off x="1587" y="11064874"/>
+              <a:ext cx="12192000" cy="2651125"/>
+            </a:xfrm>
+            <a:prstGeom prst="rect">
+              <a:avLst/>
+            </a:prstGeom>
+            <a:noFill/>
+            <a:ln>
+              <a:noFill/>
+            </a:ln>
+          </p:spPr>
+        </p:pic>
+        <p:sp>
+          <p:nvSpPr>
+            <p:cNvPr id="78" name="Google Shape;78;p2"/>
+            <p:cNvSpPr/>
+            <p:nvPr/>
+          </p:nvSpPr>
+          <p:spPr>
+            <a:xfrm>
+              <a:off x="0" y="10657492"/>
+              <a:ext cx="8335061" cy="3058509"/>
+            </a:xfrm>
+            <a:prstGeom prst="rect">
+              <a:avLst/>
+            </a:prstGeom>
+            <a:solidFill>
+              <a:srgbClr val="000000"/>
+            </a:solidFill>
+            <a:ln>
+              <a:noFill/>
+            </a:ln>
+          </p:spPr>
+          <p:txBody>
+            <a:bodyPr anchorCtr="0" anchor="ctr" bIns="45700" lIns="91425" spcFirstLastPara="1" rIns="91425" wrap="square" tIns="45700">
+              <a:noAutofit/>
+            </a:bodyPr>
+            <a:lstStyle/>
+            <a:p>
+              <a:pPr indent="0" lvl="0" marL="0" marR="0" rtl="0" algn="ctr">
+                <a:spcBef>
+                  <a:spcPts val="0"/>
+                </a:spcBef>
+                <a:spcAft>
+                  <a:spcPts val="0"/>
+                </a:spcAft>
+                <a:buNone/>
+              </a:pPr>
+              <a:r>
+                <a:t/>
+              </a:r>
+              <a:endParaRPr b="0" i="0" sz="1800" u="none" cap="none" strike="noStrike">
+                <a:solidFill>
+                  <a:schemeClr val="lt1"/>
+                </a:solidFill>
+                <a:latin typeface="Arial"/>
+                <a:ea typeface="Arial"/>
+                <a:cs typeface="Arial"/>
+                <a:sym typeface="Arial"/>
+              </a:endParaRPr>
+            </a:p>
+          </p:txBody>
+        </p:sp>
+        <p:pic>
+          <p:nvPicPr>
+            <p:cNvPr id="79" name="Google Shape;79;p2"/>
+            <p:cNvPicPr preferRelativeResize="0"/>
+            <p:nvPr/>
+          </p:nvPicPr>
+          <p:blipFill rotWithShape="1">
+            <a:blip r:embed="rId2">
+              <a:alphaModFix/>
+            </a:blip>
+            <a:srcRect b="0" l="52729" r="0" t="82751"/>
+            <a:stretch/>
+          </p:blipFill>
+          <p:spPr>
+            <a:xfrm>
+              <a:off x="12853797" y="11351172"/>
+              <a:ext cx="11531791" cy="2364828"/>
+            </a:xfrm>
+            <a:prstGeom prst="rect">
+              <a:avLst/>
+            </a:prstGeom>
+            <a:noFill/>
+            <a:ln>
+              <a:noFill/>
+            </a:ln>
+          </p:spPr>
+        </p:pic>
+        <p:pic>
+          <p:nvPicPr>
+            <p:cNvPr id="80" name="Google Shape;80;p2"/>
+            <p:cNvPicPr preferRelativeResize="0"/>
+            <p:nvPr/>
+          </p:nvPicPr>
+          <p:blipFill rotWithShape="1">
+            <a:blip r:embed="rId2">
+              <a:alphaModFix/>
+            </a:blip>
+            <a:srcRect b="76357" l="52729" r="0" t="0"/>
+            <a:stretch/>
+          </p:blipFill>
+          <p:spPr>
+            <a:xfrm>
+              <a:off x="12865099" y="6350"/>
+              <a:ext cx="11531792" cy="3241347"/>
+            </a:xfrm>
+            <a:prstGeom prst="rect">
+              <a:avLst/>
+            </a:prstGeom>
+            <a:noFill/>
+            <a:ln>
+              <a:noFill/>
+            </a:ln>
+          </p:spPr>
+        </p:pic>
+        <p:pic>
+          <p:nvPicPr>
+            <p:cNvPr id="81" name="Google Shape;81;p2"/>
+            <p:cNvPicPr preferRelativeResize="0"/>
+            <p:nvPr/>
+          </p:nvPicPr>
+          <p:blipFill rotWithShape="1">
+            <a:blip r:embed="rId2">
+              <a:alphaModFix/>
+            </a:blip>
+            <a:srcRect b="69917" l="0" r="47271" t="0"/>
+            <a:stretch/>
+          </p:blipFill>
+          <p:spPr>
+            <a:xfrm>
+              <a:off x="1587" y="6350"/>
+              <a:ext cx="12863512" cy="4124216"/>
+            </a:xfrm>
+            <a:prstGeom prst="rect">
+              <a:avLst/>
+            </a:prstGeom>
+            <a:noFill/>
+            <a:ln>
+              <a:noFill/>
+            </a:ln>
+          </p:spPr>
+        </p:pic>
+      </p:grpSp>
+      <p:pic>
+        <p:nvPicPr>
+          <p:cNvPr id="82" name="Google Shape;82;p2"/>
+          <p:cNvPicPr preferRelativeResize="0"/>
+          <p:nvPr/>
+        </p:nvPicPr>
+        <p:blipFill rotWithShape="1">
+          <a:blip r:embed="rId3">
+            <a:alphaModFix/>
+          </a:blip>
+          <a:srcRect b="0" l="0" r="0" t="0"/>
+          <a:stretch/>
+        </p:blipFill>
+        <p:spPr>
+          <a:xfrm>
+            <a:off x="398723" y="6035040"/>
+            <a:ext cx="2653844" cy="418148"/>
+          </a:xfrm>
+          <a:prstGeom prst="rect">
+            <a:avLst/>
+          </a:prstGeom>
+          <a:noFill/>
+          <a:ln>
+            <a:noFill/>
+          </a:ln>
+        </p:spPr>
+      </p:pic>
+      <p:pic>
+        <p:nvPicPr>
+          <p:cNvPr descr=" " id="83" name="Google Shape;83;p2"/>
+          <p:cNvPicPr preferRelativeResize="0"/>
+          <p:nvPr/>
+        </p:nvPicPr>
+        <p:blipFill rotWithShape="1">
+          <a:blip r:embed="rId4">
+            <a:alphaModFix/>
+          </a:blip>
+          <a:srcRect b="0" l="0" r="0" t="0"/>
+          <a:stretch/>
+        </p:blipFill>
+        <p:spPr>
+          <a:xfrm>
+            <a:off x="10858522" y="6160788"/>
+            <a:ext cx="934755" cy="292400"/>
+          </a:xfrm>
+          <a:prstGeom prst="rect">
+            <a:avLst/>
+          </a:prstGeom>
+          <a:noFill/>
+          <a:ln>
+            <a:noFill/>
+          </a:ln>
+        </p:spPr>
+      </p:pic>
+    </p:spTree>
+  </p:cSld>
+  <p:clrMapOvr>
+    <a:masterClrMapping/>
+  </p:clrMapOvr>
+</p:sldLayout>
+</file>
+
+<file path=ppt/slideLayouts/slideLayout14.xml><?xml version="1.0" encoding="utf-8"?>
+<p:sldLayout xmlns:a="http://schemas.openxmlformats.org/drawingml/2006/main" xmlns:r="http://schemas.openxmlformats.org/officeDocument/2006/relationships" xmlns:mc="http://schemas.openxmlformats.org/markup-compatibility/2006" xmlns:mv="urn:schemas-microsoft-com:mac:vml" xmlns:p="http://schemas.openxmlformats.org/presentationml/2006/main" xmlns:c="http://schemas.openxmlformats.org/drawingml/2006/chart" xmlns:dgm="http://schemas.openxmlformats.org/drawingml/2006/diagram" xmlns:o="urn:schemas-microsoft-com:office:office" xmlns:v="urn:schemas-microsoft-com:vml" xmlns:pvml="urn:schemas-microsoft-com:office:powerpoint" xmlns:com="http://schemas.openxmlformats.org/drawingml/2006/compatibility" xmlns:p14="http://schemas.microsoft.com/office/powerpoint/2010/main" xmlns:p15="http://schemas.microsoft.com/office/powerpoint/2012/main" xmlns:ahyp="http://schemas.microsoft.com/office/drawing/2018/hyperlinkcolor" matchingName="12_Титульный слайд">
+  <p:cSld name="12_Титульный слайд">
+    <p:bg>
+      <p:bgPr>
+        <a:solidFill>
+          <a:schemeClr val="dk1"/>
+        </a:solidFill>
+      </p:bgPr>
+    </p:bg>
+    <p:spTree>
+      <p:nvGrpSpPr>
+        <p:cNvPr id="326" name="Shape 326"/>
+        <p:cNvGrpSpPr/>
+        <p:nvPr/>
+      </p:nvGrpSpPr>
+      <p:grpSpPr>
+        <a:xfrm>
+          <a:off x="0" y="0"/>
+          <a:ext cx="0" cy="0"/>
+          <a:chOff x="0" y="0"/>
+          <a:chExt cx="0" cy="0"/>
+        </a:xfrm>
+      </p:grpSpPr>
+      <p:pic>
+        <p:nvPicPr>
+          <p:cNvPr descr=" " id="327" name="Google Shape;327;p15"/>
+          <p:cNvPicPr preferRelativeResize="0"/>
+          <p:nvPr/>
+        </p:nvPicPr>
+        <p:blipFill rotWithShape="1">
+          <a:blip r:embed="rId2">
+            <a:alphaModFix/>
+          </a:blip>
+          <a:srcRect b="0" l="0" r="0" t="0"/>
+          <a:stretch/>
+        </p:blipFill>
+        <p:spPr>
+          <a:xfrm>
+            <a:off x="0" y="0"/>
+            <a:ext cx="12191979" cy="6857131"/>
+          </a:xfrm>
+          <a:prstGeom prst="rect">
+            <a:avLst/>
+          </a:prstGeom>
+          <a:noFill/>
+          <a:ln>
+            <a:noFill/>
+          </a:ln>
+        </p:spPr>
+      </p:pic>
+      <p:sp>
+        <p:nvSpPr>
+          <p:cNvPr id="328" name="Google Shape;328;p15"/>
+          <p:cNvSpPr/>
+          <p:nvPr/>
+        </p:nvSpPr>
+        <p:spPr>
+          <a:xfrm>
+            <a:off x="0" y="4499104"/>
+            <a:ext cx="6792686" cy="1661684"/>
+          </a:xfrm>
+          <a:prstGeom prst="rect">
+            <a:avLst/>
+          </a:prstGeom>
+          <a:solidFill>
+            <a:srgbClr val="000000"/>
+          </a:solidFill>
+          <a:ln>
+            <a:noFill/>
+          </a:ln>
+        </p:spPr>
+        <p:txBody>
+          <a:bodyPr anchorCtr="0" anchor="ctr" bIns="45700" lIns="91425" spcFirstLastPara="1" rIns="91425" wrap="square" tIns="45700">
+            <a:noAutofit/>
+          </a:bodyPr>
+          <a:lstStyle/>
+          <a:p>
+            <a:pPr indent="0" lvl="0" marL="0" marR="0" rtl="0" algn="ctr">
+              <a:spcBef>
+                <a:spcPts val="0"/>
+              </a:spcBef>
+              <a:spcAft>
+                <a:spcPts val="0"/>
+              </a:spcAft>
+              <a:buNone/>
+            </a:pPr>
+            <a:r>
+              <a:t/>
+            </a:r>
+            <a:endParaRPr sz="1800">
+              <a:solidFill>
+                <a:schemeClr val="lt1"/>
+              </a:solidFill>
+              <a:latin typeface="Arial"/>
+              <a:ea typeface="Arial"/>
+              <a:cs typeface="Arial"/>
+              <a:sym typeface="Arial"/>
+            </a:endParaRPr>
+          </a:p>
+        </p:txBody>
+      </p:sp>
+      <p:sp>
+        <p:nvSpPr>
+          <p:cNvPr id="329" name="Google Shape;329;p15"/>
+          <p:cNvSpPr/>
+          <p:nvPr/>
+        </p:nvSpPr>
+        <p:spPr>
+          <a:xfrm>
+            <a:off x="1" y="5501389"/>
+            <a:ext cx="4811842" cy="1356609"/>
+          </a:xfrm>
+          <a:prstGeom prst="rect">
+            <a:avLst/>
+          </a:prstGeom>
+          <a:solidFill>
+            <a:srgbClr val="000000"/>
+          </a:solidFill>
+          <a:ln>
+            <a:noFill/>
+          </a:ln>
+        </p:spPr>
+        <p:txBody>
+          <a:bodyPr anchorCtr="0" anchor="ctr" bIns="45700" lIns="91425" spcFirstLastPara="1" rIns="91425" wrap="square" tIns="45700">
+            <a:noAutofit/>
+          </a:bodyPr>
+          <a:lstStyle/>
+          <a:p>
+            <a:pPr indent="0" lvl="0" marL="0" marR="0" rtl="0" algn="ctr">
+              <a:spcBef>
+                <a:spcPts val="0"/>
+              </a:spcBef>
+              <a:spcAft>
+                <a:spcPts val="0"/>
+              </a:spcAft>
+              <a:buNone/>
+            </a:pPr>
+            <a:r>
+              <a:t/>
+            </a:r>
+            <a:endParaRPr sz="1800">
+              <a:solidFill>
+                <a:schemeClr val="lt1"/>
+              </a:solidFill>
+              <a:latin typeface="Arial"/>
+              <a:ea typeface="Arial"/>
+              <a:cs typeface="Arial"/>
+              <a:sym typeface="Arial"/>
+            </a:endParaRPr>
+          </a:p>
+        </p:txBody>
+      </p:sp>
+      <p:grpSp>
+        <p:nvGrpSpPr>
+          <p:cNvPr id="330" name="Google Shape;330;p15"/>
+          <p:cNvGrpSpPr/>
+          <p:nvPr/>
+        </p:nvGrpSpPr>
+        <p:grpSpPr>
+          <a:xfrm>
+            <a:off x="224842" y="-74145"/>
+            <a:ext cx="12188171" cy="64326"/>
+            <a:chOff x="-2" y="-2"/>
+            <a:chExt cx="12188169" cy="64324"/>
+          </a:xfrm>
+        </p:grpSpPr>
+        <p:cxnSp>
+          <p:nvCxnSpPr>
+            <p:cNvPr id="331" name="Google Shape;331;p15"/>
+            <p:cNvCxnSpPr/>
+            <p:nvPr/>
+          </p:nvCxnSpPr>
+          <p:spPr>
+            <a:xfrm flipH="1">
+              <a:off x="-2" y="-2"/>
+              <a:ext cx="7" cy="64324"/>
+            </a:xfrm>
+            <a:prstGeom prst="straightConnector1">
+              <a:avLst/>
+            </a:prstGeom>
+            <a:noFill/>
+            <a:ln cap="flat" cmpd="sng" w="9525">
+              <a:solidFill>
+                <a:srgbClr val="808080"/>
+              </a:solidFill>
+              <a:prstDash val="solid"/>
+              <a:miter lim="8000"/>
+              <a:headEnd len="sm" w="sm" type="none"/>
+              <a:tailEnd len="sm" w="sm" type="none"/>
+            </a:ln>
+          </p:spPr>
+        </p:cxnSp>
+        <p:cxnSp>
+          <p:nvCxnSpPr>
+            <p:cNvPr id="332" name="Google Shape;332;p15"/>
+            <p:cNvCxnSpPr/>
+            <p:nvPr/>
+          </p:nvCxnSpPr>
+          <p:spPr>
+            <a:xfrm>
+              <a:off x="677118" y="-2"/>
+              <a:ext cx="7" cy="64324"/>
+            </a:xfrm>
+            <a:prstGeom prst="straightConnector1">
+              <a:avLst/>
+            </a:prstGeom>
+            <a:noFill/>
+            <a:ln cap="flat" cmpd="sng" w="9525">
+              <a:solidFill>
+                <a:srgbClr val="808080"/>
+              </a:solidFill>
+              <a:prstDash val="solid"/>
+              <a:miter lim="8000"/>
+              <a:headEnd len="sm" w="sm" type="none"/>
+              <a:tailEnd len="sm" w="sm" type="none"/>
+            </a:ln>
+          </p:spPr>
+        </p:cxnSp>
+        <p:cxnSp>
+          <p:nvCxnSpPr>
+            <p:cNvPr id="333" name="Google Shape;333;p15"/>
+            <p:cNvCxnSpPr/>
+            <p:nvPr/>
+          </p:nvCxnSpPr>
+          <p:spPr>
+            <a:xfrm>
+              <a:off x="1354241" y="-2"/>
+              <a:ext cx="7" cy="64324"/>
+            </a:xfrm>
+            <a:prstGeom prst="straightConnector1">
+              <a:avLst/>
+            </a:prstGeom>
+            <a:noFill/>
+            <a:ln cap="flat" cmpd="sng" w="9525">
+              <a:solidFill>
+                <a:srgbClr val="808080"/>
+              </a:solidFill>
+              <a:prstDash val="solid"/>
+              <a:miter lim="8000"/>
+              <a:headEnd len="sm" w="sm" type="none"/>
+              <a:tailEnd len="sm" w="sm" type="none"/>
+            </a:ln>
+          </p:spPr>
+        </p:cxnSp>
+        <p:cxnSp>
+          <p:nvCxnSpPr>
+            <p:cNvPr id="334" name="Google Shape;334;p15"/>
+            <p:cNvCxnSpPr/>
+            <p:nvPr/>
+          </p:nvCxnSpPr>
+          <p:spPr>
+            <a:xfrm>
+              <a:off x="2031360" y="-2"/>
+              <a:ext cx="7" cy="64324"/>
+            </a:xfrm>
+            <a:prstGeom prst="straightConnector1">
+              <a:avLst/>
+            </a:prstGeom>
+            <a:noFill/>
+            <a:ln cap="flat" cmpd="sng" w="9525">
+              <a:solidFill>
+                <a:srgbClr val="808080"/>
+              </a:solidFill>
+              <a:prstDash val="solid"/>
+              <a:miter lim="8000"/>
+              <a:headEnd len="sm" w="sm" type="none"/>
+              <a:tailEnd len="sm" w="sm" type="none"/>
+            </a:ln>
+          </p:spPr>
+        </p:cxnSp>
+        <p:cxnSp>
+          <p:nvCxnSpPr>
+            <p:cNvPr id="335" name="Google Shape;335;p15"/>
+            <p:cNvCxnSpPr/>
+            <p:nvPr/>
+          </p:nvCxnSpPr>
+          <p:spPr>
+            <a:xfrm>
+              <a:off x="2708479" y="-2"/>
+              <a:ext cx="7" cy="64324"/>
+            </a:xfrm>
+            <a:prstGeom prst="straightConnector1">
+              <a:avLst/>
+            </a:prstGeom>
+            <a:noFill/>
+            <a:ln cap="flat" cmpd="sng" w="9525">
+              <a:solidFill>
+                <a:srgbClr val="808080"/>
+              </a:solidFill>
+              <a:prstDash val="solid"/>
+              <a:miter lim="8000"/>
+              <a:headEnd len="sm" w="sm" type="none"/>
+              <a:tailEnd len="sm" w="sm" type="none"/>
+            </a:ln>
+          </p:spPr>
+        </p:cxnSp>
+        <p:cxnSp>
+          <p:nvCxnSpPr>
+            <p:cNvPr id="336" name="Google Shape;336;p15"/>
+            <p:cNvCxnSpPr/>
+            <p:nvPr/>
+          </p:nvCxnSpPr>
+          <p:spPr>
+            <a:xfrm>
+              <a:off x="3385598" y="-2"/>
+              <a:ext cx="7" cy="64324"/>
+            </a:xfrm>
+            <a:prstGeom prst="straightConnector1">
+              <a:avLst/>
+            </a:prstGeom>
+            <a:noFill/>
+            <a:ln cap="flat" cmpd="sng" w="9525">
+              <a:solidFill>
+                <a:srgbClr val="808080"/>
+              </a:solidFill>
+              <a:prstDash val="solid"/>
+              <a:miter lim="8000"/>
+              <a:headEnd len="sm" w="sm" type="none"/>
+              <a:tailEnd len="sm" w="sm" type="none"/>
+            </a:ln>
+          </p:spPr>
+        </p:cxnSp>
+        <p:cxnSp>
+          <p:nvCxnSpPr>
+            <p:cNvPr id="337" name="Google Shape;337;p15"/>
+            <p:cNvCxnSpPr/>
+            <p:nvPr/>
+          </p:nvCxnSpPr>
+          <p:spPr>
+            <a:xfrm>
+              <a:off x="4062717" y="-2"/>
+              <a:ext cx="7" cy="64324"/>
+            </a:xfrm>
+            <a:prstGeom prst="straightConnector1">
+              <a:avLst/>
+            </a:prstGeom>
+            <a:noFill/>
+            <a:ln cap="flat" cmpd="sng" w="9525">
+              <a:solidFill>
+                <a:srgbClr val="808080"/>
+              </a:solidFill>
+              <a:prstDash val="solid"/>
+              <a:miter lim="8000"/>
+              <a:headEnd len="sm" w="sm" type="none"/>
+              <a:tailEnd len="sm" w="sm" type="none"/>
+            </a:ln>
+          </p:spPr>
+        </p:cxnSp>
+        <p:cxnSp>
+          <p:nvCxnSpPr>
+            <p:cNvPr id="338" name="Google Shape;338;p15"/>
+            <p:cNvCxnSpPr/>
+            <p:nvPr/>
+          </p:nvCxnSpPr>
+          <p:spPr>
+            <a:xfrm>
+              <a:off x="4739836" y="-2"/>
+              <a:ext cx="7" cy="64324"/>
+            </a:xfrm>
+            <a:prstGeom prst="straightConnector1">
+              <a:avLst/>
+            </a:prstGeom>
+            <a:noFill/>
+            <a:ln cap="flat" cmpd="sng" w="9525">
+              <a:solidFill>
+                <a:srgbClr val="808080"/>
+              </a:solidFill>
+              <a:prstDash val="solid"/>
+              <a:miter lim="8000"/>
+              <a:headEnd len="sm" w="sm" type="none"/>
+              <a:tailEnd len="sm" w="sm" type="none"/>
+            </a:ln>
+          </p:spPr>
+        </p:cxnSp>
+        <p:cxnSp>
+          <p:nvCxnSpPr>
+            <p:cNvPr id="339" name="Google Shape;339;p15"/>
+            <p:cNvCxnSpPr/>
+            <p:nvPr/>
+          </p:nvCxnSpPr>
+          <p:spPr>
+            <a:xfrm>
+              <a:off x="5416955" y="-2"/>
+              <a:ext cx="7" cy="64324"/>
+            </a:xfrm>
+            <a:prstGeom prst="straightConnector1">
+              <a:avLst/>
+            </a:prstGeom>
+            <a:noFill/>
+            <a:ln cap="flat" cmpd="sng" w="9525">
+              <a:solidFill>
+                <a:srgbClr val="808080"/>
+              </a:solidFill>
+              <a:prstDash val="solid"/>
+              <a:miter lim="8000"/>
+              <a:headEnd len="sm" w="sm" type="none"/>
+              <a:tailEnd len="sm" w="sm" type="none"/>
+            </a:ln>
+          </p:spPr>
+        </p:cxnSp>
+        <p:cxnSp>
+          <p:nvCxnSpPr>
+            <p:cNvPr id="340" name="Google Shape;340;p15"/>
+            <p:cNvCxnSpPr/>
+            <p:nvPr/>
+          </p:nvCxnSpPr>
+          <p:spPr>
+            <a:xfrm>
+              <a:off x="6094077" y="-2"/>
+              <a:ext cx="7" cy="64324"/>
+            </a:xfrm>
+            <a:prstGeom prst="straightConnector1">
+              <a:avLst/>
+            </a:prstGeom>
+            <a:noFill/>
+            <a:ln cap="flat" cmpd="sng" w="9525">
+              <a:solidFill>
+                <a:srgbClr val="808080"/>
+              </a:solidFill>
+              <a:prstDash val="solid"/>
+              <a:miter lim="8000"/>
+              <a:headEnd len="sm" w="sm" type="none"/>
+              <a:tailEnd len="sm" w="sm" type="none"/>
+            </a:ln>
+          </p:spPr>
+        </p:cxnSp>
+        <p:cxnSp>
+          <p:nvCxnSpPr>
+            <p:cNvPr id="341" name="Google Shape;341;p15"/>
+            <p:cNvCxnSpPr/>
+            <p:nvPr/>
+          </p:nvCxnSpPr>
+          <p:spPr>
+            <a:xfrm>
+              <a:off x="6771195" y="-2"/>
+              <a:ext cx="7" cy="64324"/>
+            </a:xfrm>
+            <a:prstGeom prst="straightConnector1">
+              <a:avLst/>
+            </a:prstGeom>
+            <a:noFill/>
+            <a:ln cap="flat" cmpd="sng" w="9525">
+              <a:solidFill>
+                <a:srgbClr val="808080"/>
+              </a:solidFill>
+              <a:prstDash val="solid"/>
+              <a:miter lim="8000"/>
+              <a:headEnd len="sm" w="sm" type="none"/>
+              <a:tailEnd len="sm" w="sm" type="none"/>
+            </a:ln>
+          </p:spPr>
+        </p:cxnSp>
+        <p:cxnSp>
+          <p:nvCxnSpPr>
+            <p:cNvPr id="342" name="Google Shape;342;p15"/>
+            <p:cNvCxnSpPr/>
+            <p:nvPr/>
+          </p:nvCxnSpPr>
+          <p:spPr>
+            <a:xfrm>
+              <a:off x="7448315" y="-2"/>
+              <a:ext cx="7" cy="64324"/>
+            </a:xfrm>
+            <a:prstGeom prst="straightConnector1">
+              <a:avLst/>
+            </a:prstGeom>
+            <a:noFill/>
+            <a:ln cap="flat" cmpd="sng" w="9525">
+              <a:solidFill>
+                <a:srgbClr val="808080"/>
+              </a:solidFill>
+              <a:prstDash val="solid"/>
+              <a:miter lim="8000"/>
+              <a:headEnd len="sm" w="sm" type="none"/>
+              <a:tailEnd len="sm" w="sm" type="none"/>
+            </a:ln>
+          </p:spPr>
+        </p:cxnSp>
+        <p:cxnSp>
+          <p:nvCxnSpPr>
+            <p:cNvPr id="343" name="Google Shape;343;p15"/>
+            <p:cNvCxnSpPr/>
+            <p:nvPr/>
+          </p:nvCxnSpPr>
+          <p:spPr>
+            <a:xfrm>
+              <a:off x="8125435" y="-2"/>
+              <a:ext cx="7" cy="64324"/>
+            </a:xfrm>
+            <a:prstGeom prst="straightConnector1">
+              <a:avLst/>
+            </a:prstGeom>
+            <a:noFill/>
+            <a:ln cap="flat" cmpd="sng" w="9525">
+              <a:solidFill>
+                <a:srgbClr val="808080"/>
+              </a:solidFill>
+              <a:prstDash val="solid"/>
+              <a:miter lim="8000"/>
+              <a:headEnd len="sm" w="sm" type="none"/>
+              <a:tailEnd len="sm" w="sm" type="none"/>
+            </a:ln>
+          </p:spPr>
+        </p:cxnSp>
+        <p:cxnSp>
+          <p:nvCxnSpPr>
+            <p:cNvPr id="344" name="Google Shape;344;p15"/>
+            <p:cNvCxnSpPr/>
+            <p:nvPr/>
+          </p:nvCxnSpPr>
+          <p:spPr>
+            <a:xfrm>
+              <a:off x="8802554" y="-2"/>
+              <a:ext cx="7" cy="64324"/>
+            </a:xfrm>
+            <a:prstGeom prst="straightConnector1">
+              <a:avLst/>
+            </a:prstGeom>
+            <a:noFill/>
+            <a:ln cap="flat" cmpd="sng" w="9525">
+              <a:solidFill>
+                <a:srgbClr val="808080"/>
+              </a:solidFill>
+              <a:prstDash val="solid"/>
+              <a:miter lim="8000"/>
+              <a:headEnd len="sm" w="sm" type="none"/>
+              <a:tailEnd len="sm" w="sm" type="none"/>
+            </a:ln>
+          </p:spPr>
+        </p:cxnSp>
+        <p:cxnSp>
+          <p:nvCxnSpPr>
+            <p:cNvPr id="345" name="Google Shape;345;p15"/>
+            <p:cNvCxnSpPr/>
+            <p:nvPr/>
+          </p:nvCxnSpPr>
+          <p:spPr>
+            <a:xfrm>
+              <a:off x="9479673" y="-2"/>
+              <a:ext cx="7" cy="64324"/>
+            </a:xfrm>
+            <a:prstGeom prst="straightConnector1">
+              <a:avLst/>
+            </a:prstGeom>
+            <a:noFill/>
+            <a:ln cap="flat" cmpd="sng" w="9525">
+              <a:solidFill>
+                <a:srgbClr val="808080"/>
+              </a:solidFill>
+              <a:prstDash val="solid"/>
+              <a:miter lim="8000"/>
+              <a:headEnd len="sm" w="sm" type="none"/>
+              <a:tailEnd len="sm" w="sm" type="none"/>
+            </a:ln>
+          </p:spPr>
+        </p:cxnSp>
+        <p:cxnSp>
+          <p:nvCxnSpPr>
+            <p:cNvPr id="346" name="Google Shape;346;p15"/>
+            <p:cNvCxnSpPr/>
+            <p:nvPr/>
+          </p:nvCxnSpPr>
+          <p:spPr>
+            <a:xfrm>
+              <a:off x="10156792" y="-2"/>
+              <a:ext cx="7" cy="64324"/>
+            </a:xfrm>
+            <a:prstGeom prst="straightConnector1">
+              <a:avLst/>
+            </a:prstGeom>
+            <a:noFill/>
+            <a:ln cap="flat" cmpd="sng" w="9525">
+              <a:solidFill>
+                <a:srgbClr val="808080"/>
+              </a:solidFill>
+              <a:prstDash val="solid"/>
+              <a:miter lim="8000"/>
+              <a:headEnd len="sm" w="sm" type="none"/>
+              <a:tailEnd len="sm" w="sm" type="none"/>
+            </a:ln>
+          </p:spPr>
+        </p:cxnSp>
+        <p:cxnSp>
+          <p:nvCxnSpPr>
+            <p:cNvPr id="347" name="Google Shape;347;p15"/>
+            <p:cNvCxnSpPr/>
+            <p:nvPr/>
+          </p:nvCxnSpPr>
+          <p:spPr>
+            <a:xfrm>
+              <a:off x="10833914" y="-2"/>
+              <a:ext cx="7" cy="64324"/>
+            </a:xfrm>
+            <a:prstGeom prst="straightConnector1">
+              <a:avLst/>
+            </a:prstGeom>
+            <a:noFill/>
+            <a:ln cap="flat" cmpd="sng" w="9525">
+              <a:solidFill>
+                <a:srgbClr val="808080"/>
+              </a:solidFill>
+              <a:prstDash val="solid"/>
+              <a:miter lim="8000"/>
+              <a:headEnd len="sm" w="sm" type="none"/>
+              <a:tailEnd len="sm" w="sm" type="none"/>
+            </a:ln>
+          </p:spPr>
+        </p:cxnSp>
+        <p:cxnSp>
+          <p:nvCxnSpPr>
+            <p:cNvPr id="348" name="Google Shape;348;p15"/>
+            <p:cNvCxnSpPr/>
+            <p:nvPr/>
+          </p:nvCxnSpPr>
+          <p:spPr>
+            <a:xfrm>
+              <a:off x="11511034" y="-2"/>
+              <a:ext cx="7" cy="64324"/>
+            </a:xfrm>
+            <a:prstGeom prst="straightConnector1">
+              <a:avLst/>
+            </a:prstGeom>
+            <a:noFill/>
+            <a:ln cap="flat" cmpd="sng" w="9525">
+              <a:solidFill>
+                <a:srgbClr val="808080"/>
+              </a:solidFill>
+              <a:prstDash val="solid"/>
+              <a:miter lim="8000"/>
+              <a:headEnd len="sm" w="sm" type="none"/>
+              <a:tailEnd len="sm" w="sm" type="none"/>
+            </a:ln>
+          </p:spPr>
+        </p:cxnSp>
+        <p:cxnSp>
+          <p:nvCxnSpPr>
+            <p:cNvPr id="349" name="Google Shape;349;p15"/>
+            <p:cNvCxnSpPr/>
+            <p:nvPr/>
+          </p:nvCxnSpPr>
+          <p:spPr>
+            <a:xfrm>
+              <a:off x="12188160" y="-2"/>
+              <a:ext cx="7" cy="64324"/>
+            </a:xfrm>
+            <a:prstGeom prst="straightConnector1">
+              <a:avLst/>
+            </a:prstGeom>
+            <a:noFill/>
+            <a:ln cap="flat" cmpd="sng" w="9525">
+              <a:solidFill>
+                <a:srgbClr val="808080"/>
+              </a:solidFill>
+              <a:prstDash val="solid"/>
+              <a:miter lim="8000"/>
+              <a:headEnd len="sm" w="sm" type="none"/>
+              <a:tailEnd len="sm" w="sm" type="none"/>
+            </a:ln>
+          </p:spPr>
+        </p:cxnSp>
+      </p:grpSp>
+      <p:sp>
+        <p:nvSpPr>
+          <p:cNvPr id="350" name="Google Shape;350;p15"/>
+          <p:cNvSpPr txBox="1"/>
+          <p:nvPr>
+            <p:ph type="title"/>
+          </p:nvPr>
+        </p:nvSpPr>
+        <p:spPr>
+          <a:xfrm>
+            <a:off x="429253" y="2291422"/>
+            <a:ext cx="7827335" cy="1876890"/>
+          </a:xfrm>
+          <a:prstGeom prst="rect">
+            <a:avLst/>
+          </a:prstGeom>
+          <a:noFill/>
+          <a:ln>
+            <a:noFill/>
+          </a:ln>
+        </p:spPr>
+        <p:txBody>
+          <a:bodyPr anchorCtr="0" anchor="ctr" bIns="0" lIns="0" spcFirstLastPara="1" rIns="0" wrap="square" tIns="0">
+            <a:noAutofit/>
+          </a:bodyPr>
+          <a:lstStyle>
+            <a:lvl1pPr lvl="0" algn="l">
+              <a:lnSpc>
+                <a:spcPct val="90000"/>
+              </a:lnSpc>
+              <a:spcBef>
+                <a:spcPts val="0"/>
+              </a:spcBef>
+              <a:spcAft>
+                <a:spcPts val="0"/>
+              </a:spcAft>
+              <a:buClr>
+                <a:schemeClr val="lt1"/>
+              </a:buClr>
+              <a:buSzPts val="5400"/>
+              <a:buFont typeface="Play"/>
+              <a:buNone/>
+              <a:defRPr b="0" i="0" sz="5400">
+                <a:solidFill>
+                  <a:schemeClr val="lt1"/>
+                </a:solidFill>
+                <a:latin typeface="Play"/>
+                <a:ea typeface="Play"/>
+                <a:cs typeface="Play"/>
+                <a:sym typeface="Play"/>
+              </a:defRPr>
+            </a:lvl1pPr>
+            <a:lvl2pPr lvl="1">
+              <a:spcBef>
+                <a:spcPts val="0"/>
+              </a:spcBef>
+              <a:spcAft>
+                <a:spcPts val="0"/>
+              </a:spcAft>
+              <a:buSzPts val="1400"/>
+              <a:buNone/>
+              <a:defRPr/>
+            </a:lvl2pPr>
+            <a:lvl3pPr lvl="2">
+              <a:spcBef>
+                <a:spcPts val="0"/>
+              </a:spcBef>
+              <a:spcAft>
+                <a:spcPts val="0"/>
+              </a:spcAft>
+              <a:buSzPts val="1400"/>
+              <a:buNone/>
+              <a:defRPr/>
+            </a:lvl3pPr>
+            <a:lvl4pPr lvl="3">
+              <a:spcBef>
+                <a:spcPts val="0"/>
+              </a:spcBef>
+              <a:spcAft>
+                <a:spcPts val="0"/>
+              </a:spcAft>
+              <a:buSzPts val="1400"/>
+              <a:buNone/>
+              <a:defRPr/>
+            </a:lvl4pPr>
+            <a:lvl5pPr lvl="4">
+              <a:spcBef>
+                <a:spcPts val="0"/>
+              </a:spcBef>
+              <a:spcAft>
+                <a:spcPts val="0"/>
+              </a:spcAft>
+              <a:buSzPts val="1400"/>
+              <a:buNone/>
+              <a:defRPr/>
+            </a:lvl5pPr>
+            <a:lvl6pPr lvl="5">
+              <a:spcBef>
+                <a:spcPts val="0"/>
+              </a:spcBef>
+              <a:spcAft>
+                <a:spcPts val="0"/>
+              </a:spcAft>
+              <a:buSzPts val="1400"/>
+              <a:buNone/>
+              <a:defRPr/>
+            </a:lvl6pPr>
+            <a:lvl7pPr lvl="6">
+              <a:spcBef>
+                <a:spcPts val="0"/>
+              </a:spcBef>
+              <a:spcAft>
+                <a:spcPts val="0"/>
+              </a:spcAft>
+              <a:buSzPts val="1400"/>
+              <a:buNone/>
+              <a:defRPr/>
+            </a:lvl7pPr>
+            <a:lvl8pPr lvl="7">
+              <a:spcBef>
+                <a:spcPts val="0"/>
+              </a:spcBef>
+              <a:spcAft>
+                <a:spcPts val="0"/>
+              </a:spcAft>
+              <a:buSzPts val="1400"/>
+              <a:buNone/>
+              <a:defRPr/>
+            </a:lvl8pPr>
+            <a:lvl9pPr lvl="8">
+              <a:spcBef>
+                <a:spcPts val="0"/>
+              </a:spcBef>
+              <a:spcAft>
+                <a:spcPts val="0"/>
+              </a:spcAft>
+              <a:buSzPts val="1400"/>
+              <a:buNone/>
+              <a:defRPr/>
+            </a:lvl9pPr>
+          </a:lstStyle>
+          <a:p/>
+        </p:txBody>
+      </p:sp>
+      <p:pic>
+        <p:nvPicPr>
+          <p:cNvPr id="351" name="Google Shape;351;p15"/>
+          <p:cNvPicPr preferRelativeResize="0"/>
+          <p:nvPr/>
+        </p:nvPicPr>
+        <p:blipFill rotWithShape="1">
+          <a:blip r:embed="rId3">
+            <a:alphaModFix/>
+          </a:blip>
+          <a:srcRect b="0" l="0" r="0" t="0"/>
+          <a:stretch/>
+        </p:blipFill>
+        <p:spPr>
+          <a:xfrm>
+            <a:off x="398723" y="5895936"/>
+            <a:ext cx="3536690" cy="557252"/>
+          </a:xfrm>
+          <a:prstGeom prst="rect">
+            <a:avLst/>
+          </a:prstGeom>
+          <a:noFill/>
+          <a:ln>
+            <a:noFill/>
+          </a:ln>
+        </p:spPr>
+      </p:pic>
+      <p:pic>
+        <p:nvPicPr>
+          <p:cNvPr descr=" " id="352" name="Google Shape;352;p15"/>
+          <p:cNvPicPr preferRelativeResize="0"/>
+          <p:nvPr/>
+        </p:nvPicPr>
+        <p:blipFill rotWithShape="1">
+          <a:blip r:embed="rId4">
+            <a:alphaModFix/>
+          </a:blip>
+          <a:srcRect b="0" l="0" r="0" t="0"/>
+          <a:stretch/>
+        </p:blipFill>
+        <p:spPr>
+          <a:xfrm>
+            <a:off x="10858522" y="6160788"/>
+            <a:ext cx="934755" cy="292400"/>
+          </a:xfrm>
+          <a:prstGeom prst="rect">
+            <a:avLst/>
+          </a:prstGeom>
+          <a:noFill/>
+          <a:ln>
+            <a:noFill/>
+          </a:ln>
+        </p:spPr>
+      </p:pic>
+    </p:spTree>
+  </p:cSld>
+  <p:clrMapOvr>
+    <a:masterClrMapping/>
+  </p:clrMapOvr>
+</p:sldLayout>
+</file>
+
+<file path=ppt/slideLayouts/slideLayout5.xml><?xml version="1.0" encoding="utf-8"?>
+<p:sldLayout xmlns:a="http://schemas.openxmlformats.org/drawingml/2006/main" xmlns:r="http://schemas.openxmlformats.org/officeDocument/2006/relationships" xmlns:mc="http://schemas.openxmlformats.org/markup-compatibility/2006" xmlns:mv="urn:schemas-microsoft-com:mac:vml" xmlns:p="http://schemas.openxmlformats.org/presentationml/2006/main" xmlns:c="http://schemas.openxmlformats.org/drawingml/2006/chart" xmlns:dgm="http://schemas.openxmlformats.org/drawingml/2006/diagram" xmlns:o="urn:schemas-microsoft-com:office:office" xmlns:v="urn:schemas-microsoft-com:vml" xmlns:pvml="urn:schemas-microsoft-com:office:powerpoint" xmlns:com="http://schemas.openxmlformats.org/drawingml/2006/compatibility" xmlns:p14="http://schemas.microsoft.com/office/powerpoint/2010/main" xmlns:p15="http://schemas.microsoft.com/office/powerpoint/2012/main" xmlns:ahyp="http://schemas.microsoft.com/office/drawing/2018/hyperlinkcolor" matchingName="15_Титульный слайд">
+  <p:cSld name="15_Титульный слайд">
+    <p:bg>
+      <p:bgPr>
+        <a:solidFill>
+          <a:schemeClr val="dk1"/>
+        </a:solidFill>
+      </p:bgPr>
+    </p:bg>
+    <p:spTree>
+      <p:nvGrpSpPr>
+        <p:cNvPr id="147" name="Shape 147"/>
+        <p:cNvGrpSpPr/>
+        <p:nvPr/>
+      </p:nvGrpSpPr>
+      <p:grpSpPr>
+        <a:xfrm>
+          <a:off x="0" y="0"/>
+          <a:ext cx="0" cy="0"/>
+          <a:chOff x="0" y="0"/>
+          <a:chExt cx="0" cy="0"/>
+        </a:xfrm>
+      </p:grpSpPr>
+      <p:pic>
+        <p:nvPicPr>
+          <p:cNvPr descr=" " id="148" name="Google Shape;148;p6"/>
+          <p:cNvPicPr preferRelativeResize="0"/>
+          <p:nvPr/>
+        </p:nvPicPr>
+        <p:blipFill rotWithShape="1">
+          <a:blip r:embed="rId2">
+            <a:alphaModFix/>
+          </a:blip>
+          <a:srcRect b="0" l="0" r="0" t="0"/>
+          <a:stretch/>
+        </p:blipFill>
+        <p:spPr>
+          <a:xfrm>
+            <a:off x="0" y="6393786"/>
+            <a:ext cx="4655279" cy="464214"/>
+          </a:xfrm>
+          <a:prstGeom prst="rect">
+            <a:avLst/>
+          </a:prstGeom>
+          <a:noFill/>
+          <a:ln>
+            <a:noFill/>
+          </a:ln>
+        </p:spPr>
+      </p:pic>
+      <p:pic>
+        <p:nvPicPr>
+          <p:cNvPr descr=" " id="149" name="Google Shape;149;p6"/>
+          <p:cNvPicPr preferRelativeResize="0"/>
+          <p:nvPr/>
+        </p:nvPicPr>
+        <p:blipFill rotWithShape="1">
+          <a:blip r:embed="rId3">
+            <a:alphaModFix/>
+          </a:blip>
+          <a:srcRect b="0" l="0" r="0" t="0"/>
+          <a:stretch/>
+        </p:blipFill>
+        <p:spPr>
+          <a:xfrm>
+            <a:off x="10431600" y="0"/>
+            <a:ext cx="1760400" cy="2431278"/>
+          </a:xfrm>
+          <a:prstGeom prst="rect">
+            <a:avLst/>
+          </a:prstGeom>
+          <a:noFill/>
+          <a:ln>
+            <a:noFill/>
+          </a:ln>
+        </p:spPr>
+      </p:pic>
+      <p:pic>
+        <p:nvPicPr>
+          <p:cNvPr descr=" " id="150" name="Google Shape;150;p6"/>
+          <p:cNvPicPr preferRelativeResize="0"/>
+          <p:nvPr/>
+        </p:nvPicPr>
+        <p:blipFill rotWithShape="1">
+          <a:blip r:embed="rId4">
+            <a:alphaModFix/>
+          </a:blip>
+          <a:srcRect b="0" l="0" r="0" t="0"/>
+          <a:stretch/>
+        </p:blipFill>
+        <p:spPr>
+          <a:xfrm>
+            <a:off x="9331498" y="6290333"/>
+            <a:ext cx="2860502" cy="567667"/>
+          </a:xfrm>
+          <a:prstGeom prst="rect">
+            <a:avLst/>
+          </a:prstGeom>
+          <a:noFill/>
+          <a:ln>
+            <a:noFill/>
+          </a:ln>
+        </p:spPr>
+      </p:pic>
+      <p:grpSp>
+        <p:nvGrpSpPr>
+          <p:cNvPr id="151" name="Google Shape;151;p6"/>
+          <p:cNvGrpSpPr/>
+          <p:nvPr/>
+        </p:nvGrpSpPr>
+        <p:grpSpPr>
+          <a:xfrm>
+            <a:off x="224842" y="-74145"/>
+            <a:ext cx="12188171" cy="64326"/>
+            <a:chOff x="-2" y="-2"/>
+            <a:chExt cx="12188169" cy="64324"/>
+          </a:xfrm>
+        </p:grpSpPr>
+        <p:cxnSp>
+          <p:nvCxnSpPr>
+            <p:cNvPr id="152" name="Google Shape;152;p6"/>
+            <p:cNvCxnSpPr/>
+            <p:nvPr/>
+          </p:nvCxnSpPr>
+          <p:spPr>
+            <a:xfrm flipH="1">
+              <a:off x="-2" y="-2"/>
+              <a:ext cx="7" cy="64324"/>
+            </a:xfrm>
+            <a:prstGeom prst="straightConnector1">
+              <a:avLst/>
+            </a:prstGeom>
+            <a:noFill/>
+            <a:ln cap="flat" cmpd="sng" w="9525">
+              <a:solidFill>
+                <a:srgbClr val="808080"/>
+              </a:solidFill>
+              <a:prstDash val="solid"/>
+              <a:miter lim="8000"/>
+              <a:headEnd len="sm" w="sm" type="none"/>
+              <a:tailEnd len="sm" w="sm" type="none"/>
+            </a:ln>
+          </p:spPr>
+        </p:cxnSp>
+        <p:cxnSp>
+          <p:nvCxnSpPr>
+            <p:cNvPr id="153" name="Google Shape;153;p6"/>
+            <p:cNvCxnSpPr/>
+            <p:nvPr/>
+          </p:nvCxnSpPr>
+          <p:spPr>
+            <a:xfrm>
+              <a:off x="677118" y="-2"/>
+              <a:ext cx="7" cy="64324"/>
+            </a:xfrm>
+            <a:prstGeom prst="straightConnector1">
+              <a:avLst/>
+            </a:prstGeom>
+            <a:noFill/>
+            <a:ln cap="flat" cmpd="sng" w="9525">
+              <a:solidFill>
+                <a:srgbClr val="808080"/>
+              </a:solidFill>
+              <a:prstDash val="solid"/>
+              <a:miter lim="8000"/>
+              <a:headEnd len="sm" w="sm" type="none"/>
+              <a:tailEnd len="sm" w="sm" type="none"/>
+            </a:ln>
+          </p:spPr>
+        </p:cxnSp>
+        <p:cxnSp>
+          <p:nvCxnSpPr>
+            <p:cNvPr id="154" name="Google Shape;154;p6"/>
+            <p:cNvCxnSpPr/>
+            <p:nvPr/>
+          </p:nvCxnSpPr>
+          <p:spPr>
+            <a:xfrm>
+              <a:off x="1354241" y="-2"/>
+              <a:ext cx="7" cy="64324"/>
+            </a:xfrm>
+            <a:prstGeom prst="straightConnector1">
+              <a:avLst/>
+            </a:prstGeom>
+            <a:noFill/>
+            <a:ln cap="flat" cmpd="sng" w="9525">
+              <a:solidFill>
+                <a:srgbClr val="808080"/>
+              </a:solidFill>
+              <a:prstDash val="solid"/>
+              <a:miter lim="8000"/>
+              <a:headEnd len="sm" w="sm" type="none"/>
+              <a:tailEnd len="sm" w="sm" type="none"/>
+            </a:ln>
+          </p:spPr>
+        </p:cxnSp>
+        <p:cxnSp>
+          <p:nvCxnSpPr>
+            <p:cNvPr id="155" name="Google Shape;155;p6"/>
+            <p:cNvCxnSpPr/>
+            <p:nvPr/>
+          </p:nvCxnSpPr>
+          <p:spPr>
+            <a:xfrm>
+              <a:off x="2031360" y="-2"/>
+              <a:ext cx="7" cy="64324"/>
+            </a:xfrm>
+            <a:prstGeom prst="straightConnector1">
+              <a:avLst/>
+            </a:prstGeom>
+            <a:noFill/>
+            <a:ln cap="flat" cmpd="sng" w="9525">
+              <a:solidFill>
+                <a:srgbClr val="808080"/>
+              </a:solidFill>
+              <a:prstDash val="solid"/>
+              <a:miter lim="8000"/>
+              <a:headEnd len="sm" w="sm" type="none"/>
+              <a:tailEnd len="sm" w="sm" type="none"/>
+            </a:ln>
+          </p:spPr>
+        </p:cxnSp>
+        <p:cxnSp>
+          <p:nvCxnSpPr>
+            <p:cNvPr id="156" name="Google Shape;156;p6"/>
+            <p:cNvCxnSpPr/>
+            <p:nvPr/>
+          </p:nvCxnSpPr>
+          <p:spPr>
+            <a:xfrm>
+              <a:off x="2708479" y="-2"/>
+              <a:ext cx="7" cy="64324"/>
+            </a:xfrm>
+            <a:prstGeom prst="straightConnector1">
+              <a:avLst/>
+            </a:prstGeom>
+            <a:noFill/>
+            <a:ln cap="flat" cmpd="sng" w="9525">
+              <a:solidFill>
+                <a:srgbClr val="808080"/>
+              </a:solidFill>
+              <a:prstDash val="solid"/>
+              <a:miter lim="8000"/>
+              <a:headEnd len="sm" w="sm" type="none"/>
+              <a:tailEnd len="sm" w="sm" type="none"/>
+            </a:ln>
+          </p:spPr>
+        </p:cxnSp>
+        <p:cxnSp>
+          <p:nvCxnSpPr>
+            <p:cNvPr id="157" name="Google Shape;157;p6"/>
+            <p:cNvCxnSpPr/>
+            <p:nvPr/>
+          </p:nvCxnSpPr>
+          <p:spPr>
+            <a:xfrm>
+              <a:off x="3385598" y="-2"/>
+              <a:ext cx="7" cy="64324"/>
+            </a:xfrm>
+            <a:prstGeom prst="straightConnector1">
+              <a:avLst/>
+            </a:prstGeom>
+            <a:noFill/>
+            <a:ln cap="flat" cmpd="sng" w="9525">
+              <a:solidFill>
+                <a:srgbClr val="808080"/>
+              </a:solidFill>
+              <a:prstDash val="solid"/>
+              <a:miter lim="8000"/>
+              <a:headEnd len="sm" w="sm" type="none"/>
+              <a:tailEnd len="sm" w="sm" type="none"/>
+            </a:ln>
+          </p:spPr>
+        </p:cxnSp>
+        <p:cxnSp>
+          <p:nvCxnSpPr>
+            <p:cNvPr id="158" name="Google Shape;158;p6"/>
+            <p:cNvCxnSpPr/>
+            <p:nvPr/>
+          </p:nvCxnSpPr>
+          <p:spPr>
+            <a:xfrm>
+              <a:off x="4062717" y="-2"/>
+              <a:ext cx="7" cy="64324"/>
+            </a:xfrm>
+            <a:prstGeom prst="straightConnector1">
+              <a:avLst/>
+            </a:prstGeom>
+            <a:noFill/>
+            <a:ln cap="flat" cmpd="sng" w="9525">
+              <a:solidFill>
+                <a:srgbClr val="808080"/>
+              </a:solidFill>
+              <a:prstDash val="solid"/>
+              <a:miter lim="8000"/>
+              <a:headEnd len="sm" w="sm" type="none"/>
+              <a:tailEnd len="sm" w="sm" type="none"/>
+            </a:ln>
+          </p:spPr>
+        </p:cxnSp>
+        <p:cxnSp>
+          <p:nvCxnSpPr>
+            <p:cNvPr id="159" name="Google Shape;159;p6"/>
+            <p:cNvCxnSpPr/>
+            <p:nvPr/>
+          </p:nvCxnSpPr>
+          <p:spPr>
+            <a:xfrm>
+              <a:off x="4739836" y="-2"/>
+              <a:ext cx="7" cy="64324"/>
+            </a:xfrm>
+            <a:prstGeom prst="straightConnector1">
+              <a:avLst/>
+            </a:prstGeom>
+            <a:noFill/>
+            <a:ln cap="flat" cmpd="sng" w="9525">
+              <a:solidFill>
+                <a:srgbClr val="808080"/>
+              </a:solidFill>
+              <a:prstDash val="solid"/>
+              <a:miter lim="8000"/>
+              <a:headEnd len="sm" w="sm" type="none"/>
+              <a:tailEnd len="sm" w="sm" type="none"/>
+            </a:ln>
+          </p:spPr>
+        </p:cxnSp>
+        <p:cxnSp>
+          <p:nvCxnSpPr>
+            <p:cNvPr id="160" name="Google Shape;160;p6"/>
+            <p:cNvCxnSpPr/>
+            <p:nvPr/>
+          </p:nvCxnSpPr>
+          <p:spPr>
+            <a:xfrm>
+              <a:off x="5416955" y="-2"/>
+              <a:ext cx="7" cy="64324"/>
+            </a:xfrm>
+            <a:prstGeom prst="straightConnector1">
+              <a:avLst/>
+            </a:prstGeom>
+            <a:noFill/>
+            <a:ln cap="flat" cmpd="sng" w="9525">
+              <a:solidFill>
+                <a:srgbClr val="808080"/>
+              </a:solidFill>
+              <a:prstDash val="solid"/>
+              <a:miter lim="8000"/>
+              <a:headEnd len="sm" w="sm" type="none"/>
+              <a:tailEnd len="sm" w="sm" type="none"/>
+            </a:ln>
+          </p:spPr>
+        </p:cxnSp>
+        <p:cxnSp>
+          <p:nvCxnSpPr>
+            <p:cNvPr id="161" name="Google Shape;161;p6"/>
+            <p:cNvCxnSpPr/>
+            <p:nvPr/>
+          </p:nvCxnSpPr>
+          <p:spPr>
+            <a:xfrm>
+              <a:off x="6094077" y="-2"/>
+              <a:ext cx="7" cy="64324"/>
+            </a:xfrm>
+            <a:prstGeom prst="straightConnector1">
+              <a:avLst/>
+            </a:prstGeom>
+            <a:noFill/>
+            <a:ln cap="flat" cmpd="sng" w="9525">
+              <a:solidFill>
+                <a:srgbClr val="808080"/>
+              </a:solidFill>
+              <a:prstDash val="solid"/>
+              <a:miter lim="8000"/>
+              <a:headEnd len="sm" w="sm" type="none"/>
+              <a:tailEnd len="sm" w="sm" type="none"/>
+            </a:ln>
+          </p:spPr>
+        </p:cxnSp>
+        <p:cxnSp>
+          <p:nvCxnSpPr>
+            <p:cNvPr id="162" name="Google Shape;162;p6"/>
+            <p:cNvCxnSpPr/>
+            <p:nvPr/>
+          </p:nvCxnSpPr>
+          <p:spPr>
+            <a:xfrm>
+              <a:off x="6771195" y="-2"/>
+              <a:ext cx="7" cy="64324"/>
+            </a:xfrm>
+            <a:prstGeom prst="straightConnector1">
+              <a:avLst/>
+            </a:prstGeom>
+            <a:noFill/>
+            <a:ln cap="flat" cmpd="sng" w="9525">
+              <a:solidFill>
+                <a:srgbClr val="808080"/>
+              </a:solidFill>
+              <a:prstDash val="solid"/>
+              <a:miter lim="8000"/>
+              <a:headEnd len="sm" w="sm" type="none"/>
+              <a:tailEnd len="sm" w="sm" type="none"/>
+            </a:ln>
+          </p:spPr>
+        </p:cxnSp>
+        <p:cxnSp>
+          <p:nvCxnSpPr>
+            <p:cNvPr id="163" name="Google Shape;163;p6"/>
+            <p:cNvCxnSpPr/>
+            <p:nvPr/>
+          </p:nvCxnSpPr>
+          <p:spPr>
+            <a:xfrm>
+              <a:off x="7448315" y="-2"/>
+              <a:ext cx="7" cy="64324"/>
+            </a:xfrm>
+            <a:prstGeom prst="straightConnector1">
+              <a:avLst/>
+            </a:prstGeom>
+            <a:noFill/>
+            <a:ln cap="flat" cmpd="sng" w="9525">
+              <a:solidFill>
+                <a:srgbClr val="808080"/>
+              </a:solidFill>
+              <a:prstDash val="solid"/>
+              <a:miter lim="8000"/>
+              <a:headEnd len="sm" w="sm" type="none"/>
+              <a:tailEnd len="sm" w="sm" type="none"/>
+            </a:ln>
+          </p:spPr>
+        </p:cxnSp>
+        <p:cxnSp>
+          <p:nvCxnSpPr>
+            <p:cNvPr id="164" name="Google Shape;164;p6"/>
+            <p:cNvCxnSpPr/>
+            <p:nvPr/>
+          </p:nvCxnSpPr>
+          <p:spPr>
+            <a:xfrm>
+              <a:off x="8125435" y="-2"/>
+              <a:ext cx="7" cy="64324"/>
+            </a:xfrm>
+            <a:prstGeom prst="straightConnector1">
+              <a:avLst/>
+            </a:prstGeom>
+            <a:noFill/>
+            <a:ln cap="flat" cmpd="sng" w="9525">
+              <a:solidFill>
+                <a:srgbClr val="808080"/>
+              </a:solidFill>
+              <a:prstDash val="solid"/>
+              <a:miter lim="8000"/>
+              <a:headEnd len="sm" w="sm" type="none"/>
+              <a:tailEnd len="sm" w="sm" type="none"/>
+            </a:ln>
+          </p:spPr>
+        </p:cxnSp>
+        <p:cxnSp>
+          <p:nvCxnSpPr>
+            <p:cNvPr id="165" name="Google Shape;165;p6"/>
+            <p:cNvCxnSpPr/>
+            <p:nvPr/>
+          </p:nvCxnSpPr>
+          <p:spPr>
+            <a:xfrm>
+              <a:off x="8802554" y="-2"/>
+              <a:ext cx="7" cy="64324"/>
+            </a:xfrm>
+            <a:prstGeom prst="straightConnector1">
+              <a:avLst/>
+            </a:prstGeom>
+            <a:noFill/>
+            <a:ln cap="flat" cmpd="sng" w="9525">
+              <a:solidFill>
+                <a:srgbClr val="808080"/>
+              </a:solidFill>
+              <a:prstDash val="solid"/>
+              <a:miter lim="8000"/>
+              <a:headEnd len="sm" w="sm" type="none"/>
+              <a:tailEnd len="sm" w="sm" type="none"/>
+            </a:ln>
+          </p:spPr>
+        </p:cxnSp>
+        <p:cxnSp>
+          <p:nvCxnSpPr>
+            <p:cNvPr id="166" name="Google Shape;166;p6"/>
+            <p:cNvCxnSpPr/>
+            <p:nvPr/>
+          </p:nvCxnSpPr>
+          <p:spPr>
+            <a:xfrm>
+              <a:off x="9479673" y="-2"/>
+              <a:ext cx="7" cy="64324"/>
+            </a:xfrm>
+            <a:prstGeom prst="straightConnector1">
+              <a:avLst/>
+            </a:prstGeom>
+            <a:noFill/>
+            <a:ln cap="flat" cmpd="sng" w="9525">
+              <a:solidFill>
+                <a:srgbClr val="808080"/>
+              </a:solidFill>
+              <a:prstDash val="solid"/>
+              <a:miter lim="8000"/>
+              <a:headEnd len="sm" w="sm" type="none"/>
+              <a:tailEnd len="sm" w="sm" type="none"/>
+            </a:ln>
+          </p:spPr>
+        </p:cxnSp>
+        <p:cxnSp>
+          <p:nvCxnSpPr>
+            <p:cNvPr id="167" name="Google Shape;167;p6"/>
+            <p:cNvCxnSpPr/>
+            <p:nvPr/>
+          </p:nvCxnSpPr>
+          <p:spPr>
+            <a:xfrm>
+              <a:off x="10156792" y="-2"/>
+              <a:ext cx="7" cy="64324"/>
+            </a:xfrm>
+            <a:prstGeom prst="straightConnector1">
+              <a:avLst/>
+            </a:prstGeom>
+            <a:noFill/>
+            <a:ln cap="flat" cmpd="sng" w="9525">
+              <a:solidFill>
+                <a:srgbClr val="808080"/>
+              </a:solidFill>
+              <a:prstDash val="solid"/>
+              <a:miter lim="8000"/>
+              <a:headEnd len="sm" w="sm" type="none"/>
+              <a:tailEnd len="sm" w="sm" type="none"/>
+            </a:ln>
+          </p:spPr>
+        </p:cxnSp>
+        <p:cxnSp>
+          <p:nvCxnSpPr>
+            <p:cNvPr id="168" name="Google Shape;168;p6"/>
+            <p:cNvCxnSpPr/>
+            <p:nvPr/>
+          </p:nvCxnSpPr>
+          <p:spPr>
+            <a:xfrm>
+              <a:off x="10833914" y="-2"/>
+              <a:ext cx="7" cy="64324"/>
+            </a:xfrm>
+            <a:prstGeom prst="straightConnector1">
+              <a:avLst/>
+            </a:prstGeom>
+            <a:noFill/>
+            <a:ln cap="flat" cmpd="sng" w="9525">
+              <a:solidFill>
+                <a:srgbClr val="808080"/>
+              </a:solidFill>
+              <a:prstDash val="solid"/>
+              <a:miter lim="8000"/>
+              <a:headEnd len="sm" w="sm" type="none"/>
+              <a:tailEnd len="sm" w="sm" type="none"/>
+            </a:ln>
+          </p:spPr>
+        </p:cxnSp>
+        <p:cxnSp>
+          <p:nvCxnSpPr>
+            <p:cNvPr id="169" name="Google Shape;169;p6"/>
+            <p:cNvCxnSpPr/>
+            <p:nvPr/>
+          </p:nvCxnSpPr>
+          <p:spPr>
+            <a:xfrm>
+              <a:off x="11511034" y="-2"/>
+              <a:ext cx="7" cy="64324"/>
+            </a:xfrm>
+            <a:prstGeom prst="straightConnector1">
+              <a:avLst/>
+            </a:prstGeom>
+            <a:noFill/>
+            <a:ln cap="flat" cmpd="sng" w="9525">
+              <a:solidFill>
+                <a:srgbClr val="808080"/>
+              </a:solidFill>
+              <a:prstDash val="solid"/>
+              <a:miter lim="8000"/>
+              <a:headEnd len="sm" w="sm" type="none"/>
+              <a:tailEnd len="sm" w="sm" type="none"/>
+            </a:ln>
+          </p:spPr>
+        </p:cxnSp>
+        <p:cxnSp>
+          <p:nvCxnSpPr>
+            <p:cNvPr id="170" name="Google Shape;170;p6"/>
+            <p:cNvCxnSpPr/>
+            <p:nvPr/>
+          </p:nvCxnSpPr>
+          <p:spPr>
+            <a:xfrm>
+              <a:off x="12188160" y="-2"/>
+              <a:ext cx="7" cy="64324"/>
+            </a:xfrm>
+            <a:prstGeom prst="straightConnector1">
+              <a:avLst/>
+            </a:prstGeom>
+            <a:noFill/>
+            <a:ln cap="flat" cmpd="sng" w="9525">
+              <a:solidFill>
+                <a:srgbClr val="808080"/>
+              </a:solidFill>
+              <a:prstDash val="solid"/>
+              <a:miter lim="8000"/>
+              <a:headEnd len="sm" w="sm" type="none"/>
+              <a:tailEnd len="sm" w="sm" type="none"/>
+            </a:ln>
+          </p:spPr>
+        </p:cxnSp>
+      </p:grpSp>
+      <p:sp>
+        <p:nvSpPr>
+          <p:cNvPr id="171" name="Google Shape;171;p6"/>
+          <p:cNvSpPr txBox="1"/>
+          <p:nvPr>
+            <p:ph type="title"/>
+          </p:nvPr>
+        </p:nvSpPr>
+        <p:spPr>
+          <a:xfrm>
+            <a:off x="429253" y="424691"/>
+            <a:ext cx="7827311" cy="1167572"/>
+          </a:xfrm>
+          <a:prstGeom prst="rect">
+            <a:avLst/>
+          </a:prstGeom>
+          <a:noFill/>
+          <a:ln>
+            <a:noFill/>
+          </a:ln>
+        </p:spPr>
+        <p:txBody>
+          <a:bodyPr anchorCtr="0" anchor="t" bIns="0" lIns="0" spcFirstLastPara="1" rIns="0" wrap="square" tIns="0">
+            <a:noAutofit/>
+          </a:bodyPr>
+          <a:lstStyle>
+            <a:lvl1pPr lvl="0" algn="l">
+              <a:lnSpc>
+                <a:spcPct val="90000"/>
+              </a:lnSpc>
+              <a:spcBef>
+                <a:spcPts val="0"/>
+              </a:spcBef>
+              <a:spcAft>
+                <a:spcPts val="0"/>
+              </a:spcAft>
+              <a:buClr>
+                <a:schemeClr val="lt1"/>
+              </a:buClr>
+              <a:buSzPts val="3600"/>
+              <a:buFont typeface="Play"/>
+              <a:buNone/>
+              <a:defRPr b="0" i="0" sz="3600">
+                <a:solidFill>
+                  <a:schemeClr val="lt1"/>
+                </a:solidFill>
+                <a:latin typeface="Play"/>
+                <a:ea typeface="Play"/>
+                <a:cs typeface="Play"/>
+                <a:sym typeface="Play"/>
+              </a:defRPr>
+            </a:lvl1pPr>
+            <a:lvl2pPr lvl="1">
+              <a:spcBef>
+                <a:spcPts val="0"/>
+              </a:spcBef>
+              <a:spcAft>
+                <a:spcPts val="0"/>
+              </a:spcAft>
+              <a:buSzPts val="1400"/>
+              <a:buNone/>
+              <a:defRPr/>
+            </a:lvl2pPr>
+            <a:lvl3pPr lvl="2">
+              <a:spcBef>
+                <a:spcPts val="0"/>
+              </a:spcBef>
+              <a:spcAft>
+                <a:spcPts val="0"/>
+              </a:spcAft>
+              <a:buSzPts val="1400"/>
+              <a:buNone/>
+              <a:defRPr/>
+            </a:lvl3pPr>
+            <a:lvl4pPr lvl="3">
+              <a:spcBef>
+                <a:spcPts val="0"/>
+              </a:spcBef>
+              <a:spcAft>
+                <a:spcPts val="0"/>
+              </a:spcAft>
+              <a:buSzPts val="1400"/>
+              <a:buNone/>
+              <a:defRPr/>
+            </a:lvl4pPr>
+            <a:lvl5pPr lvl="4">
+              <a:spcBef>
+                <a:spcPts val="0"/>
+              </a:spcBef>
+              <a:spcAft>
+                <a:spcPts val="0"/>
+              </a:spcAft>
+              <a:buSzPts val="1400"/>
+              <a:buNone/>
+              <a:defRPr/>
+            </a:lvl5pPr>
+            <a:lvl6pPr lvl="5">
+              <a:spcBef>
+                <a:spcPts val="0"/>
+              </a:spcBef>
+              <a:spcAft>
+                <a:spcPts val="0"/>
+              </a:spcAft>
+              <a:buSzPts val="1400"/>
+              <a:buNone/>
+              <a:defRPr/>
+            </a:lvl6pPr>
+            <a:lvl7pPr lvl="6">
+              <a:spcBef>
+                <a:spcPts val="0"/>
+              </a:spcBef>
+              <a:spcAft>
+                <a:spcPts val="0"/>
+              </a:spcAft>
+              <a:buSzPts val="1400"/>
+              <a:buNone/>
+              <a:defRPr/>
+            </a:lvl7pPr>
+            <a:lvl8pPr lvl="7">
+              <a:spcBef>
+                <a:spcPts val="0"/>
+              </a:spcBef>
+              <a:spcAft>
+                <a:spcPts val="0"/>
+              </a:spcAft>
+              <a:buSzPts val="1400"/>
+              <a:buNone/>
+              <a:defRPr/>
+            </a:lvl8pPr>
+            <a:lvl9pPr lvl="8">
+              <a:spcBef>
+                <a:spcPts val="0"/>
+              </a:spcBef>
+              <a:spcAft>
+                <a:spcPts val="0"/>
+              </a:spcAft>
+              <a:buSzPts val="1400"/>
+              <a:buNone/>
+              <a:defRPr/>
+            </a:lvl9pPr>
+          </a:lstStyle>
+          <a:p/>
+        </p:txBody>
+      </p:sp>
+      <p:pic>
+        <p:nvPicPr>
+          <p:cNvPr id="172" name="Google Shape;172;p6"/>
+          <p:cNvPicPr preferRelativeResize="0"/>
+          <p:nvPr/>
+        </p:nvPicPr>
+        <p:blipFill rotWithShape="1">
+          <a:blip r:embed="rId5">
+            <a:alphaModFix/>
+          </a:blip>
+          <a:srcRect b="0" l="0" r="0" t="0"/>
+          <a:stretch/>
+        </p:blipFill>
+        <p:spPr>
+          <a:xfrm>
+            <a:off x="398723" y="6160516"/>
+            <a:ext cx="1857481" cy="292671"/>
+          </a:xfrm>
+          <a:prstGeom prst="rect">
+            <a:avLst/>
+          </a:prstGeom>
+          <a:noFill/>
+          <a:ln>
+            <a:noFill/>
+          </a:ln>
+        </p:spPr>
+      </p:pic>
+      <p:pic>
+        <p:nvPicPr>
+          <p:cNvPr descr=" " id="173" name="Google Shape;173;p6"/>
+          <p:cNvPicPr preferRelativeResize="0"/>
+          <p:nvPr/>
+        </p:nvPicPr>
+        <p:blipFill rotWithShape="1">
+          <a:blip r:embed="rId6">
+            <a:alphaModFix/>
+          </a:blip>
+          <a:srcRect b="0" l="0" r="0" t="0"/>
+          <a:stretch/>
+        </p:blipFill>
+        <p:spPr>
+          <a:xfrm>
+            <a:off x="11093496" y="6238282"/>
+            <a:ext cx="690517" cy="216000"/>
+          </a:xfrm>
+          <a:prstGeom prst="rect">
+            <a:avLst/>
+          </a:prstGeom>
+          <a:noFill/>
+          <a:ln>
+            <a:noFill/>
+          </a:ln>
+        </p:spPr>
+      </p:pic>
+    </p:spTree>
+  </p:cSld>
+  <p:clrMapOvr>
+    <a:masterClrMapping/>
+  </p:clrMapOvr>
+</p:sldLayout>
+</file>
+
 <file path=ppt/slideLayouts/slideLayout6.xml><?xml version="1.0" encoding="utf-8"?>
 <p:sldLayout xmlns:a="http://schemas.openxmlformats.org/drawingml/2006/main" xmlns:r="http://schemas.openxmlformats.org/officeDocument/2006/relationships" xmlns:mc="http://schemas.openxmlformats.org/markup-compatibility/2006" xmlns:mv="urn:schemas-microsoft-com:mac:vml" xmlns:p="http://schemas.openxmlformats.org/presentationml/2006/main" xmlns:c="http://schemas.openxmlformats.org/drawingml/2006/chart" xmlns:dgm="http://schemas.openxmlformats.org/drawingml/2006/diagram" xmlns:o="urn:schemas-microsoft-com:office:office" xmlns:v="urn:schemas-microsoft-com:vml" xmlns:pvml="urn:schemas-microsoft-com:office:powerpoint" xmlns:com="http://schemas.openxmlformats.org/drawingml/2006/compatibility" xmlns:p14="http://schemas.microsoft.com/office/powerpoint/2010/main" xmlns:p15="http://schemas.microsoft.com/office/powerpoint/2012/main" xmlns:ahyp="http://schemas.microsoft.com/office/drawing/2018/hyperlinkcolor" matchingName="13_Титульный слайд">
   <p:cSld name="13_Титульный слайд">
@@ -4104,6 +6982,799 @@
           </a:p>
         </p:txBody>
       </p:sp>
+    </p:spTree>
+  </p:cSld>
+  <p:clrMapOvr>
+    <a:masterClrMapping/>
+  </p:clrMapOvr>
+</p:sldLayout>
+</file>
+
+<file path=ppt/slideLayouts/slideLayout9.xml><?xml version="1.0" encoding="utf-8"?>
+<p:sldLayout xmlns:a="http://schemas.openxmlformats.org/drawingml/2006/main" xmlns:r="http://schemas.openxmlformats.org/officeDocument/2006/relationships" xmlns:mc="http://schemas.openxmlformats.org/markup-compatibility/2006" xmlns:mv="urn:schemas-microsoft-com:mac:vml" xmlns:p="http://schemas.openxmlformats.org/presentationml/2006/main" xmlns:c="http://schemas.openxmlformats.org/drawingml/2006/chart" xmlns:dgm="http://schemas.openxmlformats.org/drawingml/2006/diagram" xmlns:o="urn:schemas-microsoft-com:office:office" xmlns:v="urn:schemas-microsoft-com:vml" xmlns:pvml="urn:schemas-microsoft-com:office:powerpoint" xmlns:com="http://schemas.openxmlformats.org/drawingml/2006/compatibility" xmlns:p14="http://schemas.microsoft.com/office/powerpoint/2010/main" xmlns:p15="http://schemas.microsoft.com/office/powerpoint/2012/main" xmlns:ahyp="http://schemas.microsoft.com/office/drawing/2018/hyperlinkcolor" matchingName="14_Титульный слайд">
+  <p:cSld name="14_Титульный слайд">
+    <p:bg>
+      <p:bgPr>
+        <a:solidFill>
+          <a:schemeClr val="dk1"/>
+        </a:solidFill>
+      </p:bgPr>
+    </p:bg>
+    <p:spTree>
+      <p:nvGrpSpPr>
+        <p:cNvPr id="234" name="Shape 234"/>
+        <p:cNvGrpSpPr/>
+        <p:nvPr/>
+      </p:nvGrpSpPr>
+      <p:grpSpPr>
+        <a:xfrm>
+          <a:off x="0" y="0"/>
+          <a:ext cx="0" cy="0"/>
+          <a:chOff x="0" y="0"/>
+          <a:chExt cx="0" cy="0"/>
+        </a:xfrm>
+      </p:grpSpPr>
+      <p:pic>
+        <p:nvPicPr>
+          <p:cNvPr descr=" " id="235" name="Google Shape;235;p10"/>
+          <p:cNvPicPr preferRelativeResize="0"/>
+          <p:nvPr/>
+        </p:nvPicPr>
+        <p:blipFill rotWithShape="1">
+          <a:blip r:embed="rId2">
+            <a:alphaModFix/>
+          </a:blip>
+          <a:srcRect b="0" l="0" r="0" t="0"/>
+          <a:stretch/>
+        </p:blipFill>
+        <p:spPr>
+          <a:xfrm>
+            <a:off x="6096000" y="5844358"/>
+            <a:ext cx="6096000" cy="1013642"/>
+          </a:xfrm>
+          <a:prstGeom prst="rect">
+            <a:avLst/>
+          </a:prstGeom>
+          <a:noFill/>
+          <a:ln>
+            <a:noFill/>
+          </a:ln>
+        </p:spPr>
+      </p:pic>
+      <p:grpSp>
+        <p:nvGrpSpPr>
+          <p:cNvPr id="236" name="Google Shape;236;p10"/>
+          <p:cNvGrpSpPr/>
+          <p:nvPr/>
+        </p:nvGrpSpPr>
+        <p:grpSpPr>
+          <a:xfrm>
+            <a:off x="224842" y="-74145"/>
+            <a:ext cx="12188171" cy="64326"/>
+            <a:chOff x="-2" y="-2"/>
+            <a:chExt cx="12188169" cy="64324"/>
+          </a:xfrm>
+        </p:grpSpPr>
+        <p:cxnSp>
+          <p:nvCxnSpPr>
+            <p:cNvPr id="237" name="Google Shape;237;p10"/>
+            <p:cNvCxnSpPr/>
+            <p:nvPr/>
+          </p:nvCxnSpPr>
+          <p:spPr>
+            <a:xfrm flipH="1">
+              <a:off x="-2" y="-2"/>
+              <a:ext cx="7" cy="64324"/>
+            </a:xfrm>
+            <a:prstGeom prst="straightConnector1">
+              <a:avLst/>
+            </a:prstGeom>
+            <a:noFill/>
+            <a:ln cap="flat" cmpd="sng" w="9525">
+              <a:solidFill>
+                <a:srgbClr val="808080"/>
+              </a:solidFill>
+              <a:prstDash val="solid"/>
+              <a:miter lim="8000"/>
+              <a:headEnd len="sm" w="sm" type="none"/>
+              <a:tailEnd len="sm" w="sm" type="none"/>
+            </a:ln>
+          </p:spPr>
+        </p:cxnSp>
+        <p:cxnSp>
+          <p:nvCxnSpPr>
+            <p:cNvPr id="238" name="Google Shape;238;p10"/>
+            <p:cNvCxnSpPr/>
+            <p:nvPr/>
+          </p:nvCxnSpPr>
+          <p:spPr>
+            <a:xfrm>
+              <a:off x="677118" y="-2"/>
+              <a:ext cx="7" cy="64324"/>
+            </a:xfrm>
+            <a:prstGeom prst="straightConnector1">
+              <a:avLst/>
+            </a:prstGeom>
+            <a:noFill/>
+            <a:ln cap="flat" cmpd="sng" w="9525">
+              <a:solidFill>
+                <a:srgbClr val="808080"/>
+              </a:solidFill>
+              <a:prstDash val="solid"/>
+              <a:miter lim="8000"/>
+              <a:headEnd len="sm" w="sm" type="none"/>
+              <a:tailEnd len="sm" w="sm" type="none"/>
+            </a:ln>
+          </p:spPr>
+        </p:cxnSp>
+        <p:cxnSp>
+          <p:nvCxnSpPr>
+            <p:cNvPr id="239" name="Google Shape;239;p10"/>
+            <p:cNvCxnSpPr/>
+            <p:nvPr/>
+          </p:nvCxnSpPr>
+          <p:spPr>
+            <a:xfrm>
+              <a:off x="1354241" y="-2"/>
+              <a:ext cx="7" cy="64324"/>
+            </a:xfrm>
+            <a:prstGeom prst="straightConnector1">
+              <a:avLst/>
+            </a:prstGeom>
+            <a:noFill/>
+            <a:ln cap="flat" cmpd="sng" w="9525">
+              <a:solidFill>
+                <a:srgbClr val="808080"/>
+              </a:solidFill>
+              <a:prstDash val="solid"/>
+              <a:miter lim="8000"/>
+              <a:headEnd len="sm" w="sm" type="none"/>
+              <a:tailEnd len="sm" w="sm" type="none"/>
+            </a:ln>
+          </p:spPr>
+        </p:cxnSp>
+        <p:cxnSp>
+          <p:nvCxnSpPr>
+            <p:cNvPr id="240" name="Google Shape;240;p10"/>
+            <p:cNvCxnSpPr/>
+            <p:nvPr/>
+          </p:nvCxnSpPr>
+          <p:spPr>
+            <a:xfrm>
+              <a:off x="2031360" y="-2"/>
+              <a:ext cx="7" cy="64324"/>
+            </a:xfrm>
+            <a:prstGeom prst="straightConnector1">
+              <a:avLst/>
+            </a:prstGeom>
+            <a:noFill/>
+            <a:ln cap="flat" cmpd="sng" w="9525">
+              <a:solidFill>
+                <a:srgbClr val="808080"/>
+              </a:solidFill>
+              <a:prstDash val="solid"/>
+              <a:miter lim="8000"/>
+              <a:headEnd len="sm" w="sm" type="none"/>
+              <a:tailEnd len="sm" w="sm" type="none"/>
+            </a:ln>
+          </p:spPr>
+        </p:cxnSp>
+        <p:cxnSp>
+          <p:nvCxnSpPr>
+            <p:cNvPr id="241" name="Google Shape;241;p10"/>
+            <p:cNvCxnSpPr/>
+            <p:nvPr/>
+          </p:nvCxnSpPr>
+          <p:spPr>
+            <a:xfrm>
+              <a:off x="2708479" y="-2"/>
+              <a:ext cx="7" cy="64324"/>
+            </a:xfrm>
+            <a:prstGeom prst="straightConnector1">
+              <a:avLst/>
+            </a:prstGeom>
+            <a:noFill/>
+            <a:ln cap="flat" cmpd="sng" w="9525">
+              <a:solidFill>
+                <a:srgbClr val="808080"/>
+              </a:solidFill>
+              <a:prstDash val="solid"/>
+              <a:miter lim="8000"/>
+              <a:headEnd len="sm" w="sm" type="none"/>
+              <a:tailEnd len="sm" w="sm" type="none"/>
+            </a:ln>
+          </p:spPr>
+        </p:cxnSp>
+        <p:cxnSp>
+          <p:nvCxnSpPr>
+            <p:cNvPr id="242" name="Google Shape;242;p10"/>
+            <p:cNvCxnSpPr/>
+            <p:nvPr/>
+          </p:nvCxnSpPr>
+          <p:spPr>
+            <a:xfrm>
+              <a:off x="3385598" y="-2"/>
+              <a:ext cx="7" cy="64324"/>
+            </a:xfrm>
+            <a:prstGeom prst="straightConnector1">
+              <a:avLst/>
+            </a:prstGeom>
+            <a:noFill/>
+            <a:ln cap="flat" cmpd="sng" w="9525">
+              <a:solidFill>
+                <a:srgbClr val="808080"/>
+              </a:solidFill>
+              <a:prstDash val="solid"/>
+              <a:miter lim="8000"/>
+              <a:headEnd len="sm" w="sm" type="none"/>
+              <a:tailEnd len="sm" w="sm" type="none"/>
+            </a:ln>
+          </p:spPr>
+        </p:cxnSp>
+        <p:cxnSp>
+          <p:nvCxnSpPr>
+            <p:cNvPr id="243" name="Google Shape;243;p10"/>
+            <p:cNvCxnSpPr/>
+            <p:nvPr/>
+          </p:nvCxnSpPr>
+          <p:spPr>
+            <a:xfrm>
+              <a:off x="4062717" y="-2"/>
+              <a:ext cx="7" cy="64324"/>
+            </a:xfrm>
+            <a:prstGeom prst="straightConnector1">
+              <a:avLst/>
+            </a:prstGeom>
+            <a:noFill/>
+            <a:ln cap="flat" cmpd="sng" w="9525">
+              <a:solidFill>
+                <a:srgbClr val="808080"/>
+              </a:solidFill>
+              <a:prstDash val="solid"/>
+              <a:miter lim="8000"/>
+              <a:headEnd len="sm" w="sm" type="none"/>
+              <a:tailEnd len="sm" w="sm" type="none"/>
+            </a:ln>
+          </p:spPr>
+        </p:cxnSp>
+        <p:cxnSp>
+          <p:nvCxnSpPr>
+            <p:cNvPr id="244" name="Google Shape;244;p10"/>
+            <p:cNvCxnSpPr/>
+            <p:nvPr/>
+          </p:nvCxnSpPr>
+          <p:spPr>
+            <a:xfrm>
+              <a:off x="4739836" y="-2"/>
+              <a:ext cx="7" cy="64324"/>
+            </a:xfrm>
+            <a:prstGeom prst="straightConnector1">
+              <a:avLst/>
+            </a:prstGeom>
+            <a:noFill/>
+            <a:ln cap="flat" cmpd="sng" w="9525">
+              <a:solidFill>
+                <a:srgbClr val="808080"/>
+              </a:solidFill>
+              <a:prstDash val="solid"/>
+              <a:miter lim="8000"/>
+              <a:headEnd len="sm" w="sm" type="none"/>
+              <a:tailEnd len="sm" w="sm" type="none"/>
+            </a:ln>
+          </p:spPr>
+        </p:cxnSp>
+        <p:cxnSp>
+          <p:nvCxnSpPr>
+            <p:cNvPr id="245" name="Google Shape;245;p10"/>
+            <p:cNvCxnSpPr/>
+            <p:nvPr/>
+          </p:nvCxnSpPr>
+          <p:spPr>
+            <a:xfrm>
+              <a:off x="5416955" y="-2"/>
+              <a:ext cx="7" cy="64324"/>
+            </a:xfrm>
+            <a:prstGeom prst="straightConnector1">
+              <a:avLst/>
+            </a:prstGeom>
+            <a:noFill/>
+            <a:ln cap="flat" cmpd="sng" w="9525">
+              <a:solidFill>
+                <a:srgbClr val="808080"/>
+              </a:solidFill>
+              <a:prstDash val="solid"/>
+              <a:miter lim="8000"/>
+              <a:headEnd len="sm" w="sm" type="none"/>
+              <a:tailEnd len="sm" w="sm" type="none"/>
+            </a:ln>
+          </p:spPr>
+        </p:cxnSp>
+        <p:cxnSp>
+          <p:nvCxnSpPr>
+            <p:cNvPr id="246" name="Google Shape;246;p10"/>
+            <p:cNvCxnSpPr/>
+            <p:nvPr/>
+          </p:nvCxnSpPr>
+          <p:spPr>
+            <a:xfrm>
+              <a:off x="6094077" y="-2"/>
+              <a:ext cx="7" cy="64324"/>
+            </a:xfrm>
+            <a:prstGeom prst="straightConnector1">
+              <a:avLst/>
+            </a:prstGeom>
+            <a:noFill/>
+            <a:ln cap="flat" cmpd="sng" w="9525">
+              <a:solidFill>
+                <a:srgbClr val="808080"/>
+              </a:solidFill>
+              <a:prstDash val="solid"/>
+              <a:miter lim="8000"/>
+              <a:headEnd len="sm" w="sm" type="none"/>
+              <a:tailEnd len="sm" w="sm" type="none"/>
+            </a:ln>
+          </p:spPr>
+        </p:cxnSp>
+        <p:cxnSp>
+          <p:nvCxnSpPr>
+            <p:cNvPr id="247" name="Google Shape;247;p10"/>
+            <p:cNvCxnSpPr/>
+            <p:nvPr/>
+          </p:nvCxnSpPr>
+          <p:spPr>
+            <a:xfrm>
+              <a:off x="6771195" y="-2"/>
+              <a:ext cx="7" cy="64324"/>
+            </a:xfrm>
+            <a:prstGeom prst="straightConnector1">
+              <a:avLst/>
+            </a:prstGeom>
+            <a:noFill/>
+            <a:ln cap="flat" cmpd="sng" w="9525">
+              <a:solidFill>
+                <a:srgbClr val="808080"/>
+              </a:solidFill>
+              <a:prstDash val="solid"/>
+              <a:miter lim="8000"/>
+              <a:headEnd len="sm" w="sm" type="none"/>
+              <a:tailEnd len="sm" w="sm" type="none"/>
+            </a:ln>
+          </p:spPr>
+        </p:cxnSp>
+        <p:cxnSp>
+          <p:nvCxnSpPr>
+            <p:cNvPr id="248" name="Google Shape;248;p10"/>
+            <p:cNvCxnSpPr/>
+            <p:nvPr/>
+          </p:nvCxnSpPr>
+          <p:spPr>
+            <a:xfrm>
+              <a:off x="7448315" y="-2"/>
+              <a:ext cx="7" cy="64324"/>
+            </a:xfrm>
+            <a:prstGeom prst="straightConnector1">
+              <a:avLst/>
+            </a:prstGeom>
+            <a:noFill/>
+            <a:ln cap="flat" cmpd="sng" w="9525">
+              <a:solidFill>
+                <a:srgbClr val="808080"/>
+              </a:solidFill>
+              <a:prstDash val="solid"/>
+              <a:miter lim="8000"/>
+              <a:headEnd len="sm" w="sm" type="none"/>
+              <a:tailEnd len="sm" w="sm" type="none"/>
+            </a:ln>
+          </p:spPr>
+        </p:cxnSp>
+        <p:cxnSp>
+          <p:nvCxnSpPr>
+            <p:cNvPr id="249" name="Google Shape;249;p10"/>
+            <p:cNvCxnSpPr/>
+            <p:nvPr/>
+          </p:nvCxnSpPr>
+          <p:spPr>
+            <a:xfrm>
+              <a:off x="8125435" y="-2"/>
+              <a:ext cx="7" cy="64324"/>
+            </a:xfrm>
+            <a:prstGeom prst="straightConnector1">
+              <a:avLst/>
+            </a:prstGeom>
+            <a:noFill/>
+            <a:ln cap="flat" cmpd="sng" w="9525">
+              <a:solidFill>
+                <a:srgbClr val="808080"/>
+              </a:solidFill>
+              <a:prstDash val="solid"/>
+              <a:miter lim="8000"/>
+              <a:headEnd len="sm" w="sm" type="none"/>
+              <a:tailEnd len="sm" w="sm" type="none"/>
+            </a:ln>
+          </p:spPr>
+        </p:cxnSp>
+        <p:cxnSp>
+          <p:nvCxnSpPr>
+            <p:cNvPr id="250" name="Google Shape;250;p10"/>
+            <p:cNvCxnSpPr/>
+            <p:nvPr/>
+          </p:nvCxnSpPr>
+          <p:spPr>
+            <a:xfrm>
+              <a:off x="8802554" y="-2"/>
+              <a:ext cx="7" cy="64324"/>
+            </a:xfrm>
+            <a:prstGeom prst="straightConnector1">
+              <a:avLst/>
+            </a:prstGeom>
+            <a:noFill/>
+            <a:ln cap="flat" cmpd="sng" w="9525">
+              <a:solidFill>
+                <a:srgbClr val="808080"/>
+              </a:solidFill>
+              <a:prstDash val="solid"/>
+              <a:miter lim="8000"/>
+              <a:headEnd len="sm" w="sm" type="none"/>
+              <a:tailEnd len="sm" w="sm" type="none"/>
+            </a:ln>
+          </p:spPr>
+        </p:cxnSp>
+        <p:cxnSp>
+          <p:nvCxnSpPr>
+            <p:cNvPr id="251" name="Google Shape;251;p10"/>
+            <p:cNvCxnSpPr/>
+            <p:nvPr/>
+          </p:nvCxnSpPr>
+          <p:spPr>
+            <a:xfrm>
+              <a:off x="9479673" y="-2"/>
+              <a:ext cx="7" cy="64324"/>
+            </a:xfrm>
+            <a:prstGeom prst="straightConnector1">
+              <a:avLst/>
+            </a:prstGeom>
+            <a:noFill/>
+            <a:ln cap="flat" cmpd="sng" w="9525">
+              <a:solidFill>
+                <a:srgbClr val="808080"/>
+              </a:solidFill>
+              <a:prstDash val="solid"/>
+              <a:miter lim="8000"/>
+              <a:headEnd len="sm" w="sm" type="none"/>
+              <a:tailEnd len="sm" w="sm" type="none"/>
+            </a:ln>
+          </p:spPr>
+        </p:cxnSp>
+        <p:cxnSp>
+          <p:nvCxnSpPr>
+            <p:cNvPr id="252" name="Google Shape;252;p10"/>
+            <p:cNvCxnSpPr/>
+            <p:nvPr/>
+          </p:nvCxnSpPr>
+          <p:spPr>
+            <a:xfrm>
+              <a:off x="10156792" y="-2"/>
+              <a:ext cx="7" cy="64324"/>
+            </a:xfrm>
+            <a:prstGeom prst="straightConnector1">
+              <a:avLst/>
+            </a:prstGeom>
+            <a:noFill/>
+            <a:ln cap="flat" cmpd="sng" w="9525">
+              <a:solidFill>
+                <a:srgbClr val="808080"/>
+              </a:solidFill>
+              <a:prstDash val="solid"/>
+              <a:miter lim="8000"/>
+              <a:headEnd len="sm" w="sm" type="none"/>
+              <a:tailEnd len="sm" w="sm" type="none"/>
+            </a:ln>
+          </p:spPr>
+        </p:cxnSp>
+        <p:cxnSp>
+          <p:nvCxnSpPr>
+            <p:cNvPr id="253" name="Google Shape;253;p10"/>
+            <p:cNvCxnSpPr/>
+            <p:nvPr/>
+          </p:nvCxnSpPr>
+          <p:spPr>
+            <a:xfrm>
+              <a:off x="10833914" y="-2"/>
+              <a:ext cx="7" cy="64324"/>
+            </a:xfrm>
+            <a:prstGeom prst="straightConnector1">
+              <a:avLst/>
+            </a:prstGeom>
+            <a:noFill/>
+            <a:ln cap="flat" cmpd="sng" w="9525">
+              <a:solidFill>
+                <a:srgbClr val="808080"/>
+              </a:solidFill>
+              <a:prstDash val="solid"/>
+              <a:miter lim="8000"/>
+              <a:headEnd len="sm" w="sm" type="none"/>
+              <a:tailEnd len="sm" w="sm" type="none"/>
+            </a:ln>
+          </p:spPr>
+        </p:cxnSp>
+        <p:cxnSp>
+          <p:nvCxnSpPr>
+            <p:cNvPr id="254" name="Google Shape;254;p10"/>
+            <p:cNvCxnSpPr/>
+            <p:nvPr/>
+          </p:nvCxnSpPr>
+          <p:spPr>
+            <a:xfrm>
+              <a:off x="11511034" y="-2"/>
+              <a:ext cx="7" cy="64324"/>
+            </a:xfrm>
+            <a:prstGeom prst="straightConnector1">
+              <a:avLst/>
+            </a:prstGeom>
+            <a:noFill/>
+            <a:ln cap="flat" cmpd="sng" w="9525">
+              <a:solidFill>
+                <a:srgbClr val="808080"/>
+              </a:solidFill>
+              <a:prstDash val="solid"/>
+              <a:miter lim="8000"/>
+              <a:headEnd len="sm" w="sm" type="none"/>
+              <a:tailEnd len="sm" w="sm" type="none"/>
+            </a:ln>
+          </p:spPr>
+        </p:cxnSp>
+        <p:cxnSp>
+          <p:nvCxnSpPr>
+            <p:cNvPr id="255" name="Google Shape;255;p10"/>
+            <p:cNvCxnSpPr/>
+            <p:nvPr/>
+          </p:nvCxnSpPr>
+          <p:spPr>
+            <a:xfrm>
+              <a:off x="12188160" y="-2"/>
+              <a:ext cx="7" cy="64324"/>
+            </a:xfrm>
+            <a:prstGeom prst="straightConnector1">
+              <a:avLst/>
+            </a:prstGeom>
+            <a:noFill/>
+            <a:ln cap="flat" cmpd="sng" w="9525">
+              <a:solidFill>
+                <a:srgbClr val="808080"/>
+              </a:solidFill>
+              <a:prstDash val="solid"/>
+              <a:miter lim="8000"/>
+              <a:headEnd len="sm" w="sm" type="none"/>
+              <a:tailEnd len="sm" w="sm" type="none"/>
+            </a:ln>
+          </p:spPr>
+        </p:cxnSp>
+      </p:grpSp>
+      <p:sp>
+        <p:nvSpPr>
+          <p:cNvPr id="256" name="Google Shape;256;p10"/>
+          <p:cNvSpPr txBox="1"/>
+          <p:nvPr>
+            <p:ph type="title"/>
+          </p:nvPr>
+        </p:nvSpPr>
+        <p:spPr>
+          <a:xfrm>
+            <a:off x="429253" y="424691"/>
+            <a:ext cx="7827311" cy="1167572"/>
+          </a:xfrm>
+          <a:prstGeom prst="rect">
+            <a:avLst/>
+          </a:prstGeom>
+          <a:noFill/>
+          <a:ln>
+            <a:noFill/>
+          </a:ln>
+        </p:spPr>
+        <p:txBody>
+          <a:bodyPr anchorCtr="0" anchor="t" bIns="0" lIns="0" spcFirstLastPara="1" rIns="0" wrap="square" tIns="0">
+            <a:noAutofit/>
+          </a:bodyPr>
+          <a:lstStyle>
+            <a:lvl1pPr lvl="0" algn="l">
+              <a:lnSpc>
+                <a:spcPct val="90000"/>
+              </a:lnSpc>
+              <a:spcBef>
+                <a:spcPts val="0"/>
+              </a:spcBef>
+              <a:spcAft>
+                <a:spcPts val="0"/>
+              </a:spcAft>
+              <a:buClr>
+                <a:schemeClr val="lt1"/>
+              </a:buClr>
+              <a:buSzPts val="3600"/>
+              <a:buFont typeface="Play"/>
+              <a:buNone/>
+              <a:defRPr b="0" i="0" sz="3600">
+                <a:solidFill>
+                  <a:schemeClr val="lt1"/>
+                </a:solidFill>
+                <a:latin typeface="Play"/>
+                <a:ea typeface="Play"/>
+                <a:cs typeface="Play"/>
+                <a:sym typeface="Play"/>
+              </a:defRPr>
+            </a:lvl1pPr>
+            <a:lvl2pPr lvl="1">
+              <a:spcBef>
+                <a:spcPts val="0"/>
+              </a:spcBef>
+              <a:spcAft>
+                <a:spcPts val="0"/>
+              </a:spcAft>
+              <a:buSzPts val="1400"/>
+              <a:buNone/>
+              <a:defRPr/>
+            </a:lvl2pPr>
+            <a:lvl3pPr lvl="2">
+              <a:spcBef>
+                <a:spcPts val="0"/>
+              </a:spcBef>
+              <a:spcAft>
+                <a:spcPts val="0"/>
+              </a:spcAft>
+              <a:buSzPts val="1400"/>
+              <a:buNone/>
+              <a:defRPr/>
+            </a:lvl3pPr>
+            <a:lvl4pPr lvl="3">
+              <a:spcBef>
+                <a:spcPts val="0"/>
+              </a:spcBef>
+              <a:spcAft>
+                <a:spcPts val="0"/>
+              </a:spcAft>
+              <a:buSzPts val="1400"/>
+              <a:buNone/>
+              <a:defRPr/>
+            </a:lvl4pPr>
+            <a:lvl5pPr lvl="4">
+              <a:spcBef>
+                <a:spcPts val="0"/>
+              </a:spcBef>
+              <a:spcAft>
+                <a:spcPts val="0"/>
+              </a:spcAft>
+              <a:buSzPts val="1400"/>
+              <a:buNone/>
+              <a:defRPr/>
+            </a:lvl5pPr>
+            <a:lvl6pPr lvl="5">
+              <a:spcBef>
+                <a:spcPts val="0"/>
+              </a:spcBef>
+              <a:spcAft>
+                <a:spcPts val="0"/>
+              </a:spcAft>
+              <a:buSzPts val="1400"/>
+              <a:buNone/>
+              <a:defRPr/>
+            </a:lvl6pPr>
+            <a:lvl7pPr lvl="6">
+              <a:spcBef>
+                <a:spcPts val="0"/>
+              </a:spcBef>
+              <a:spcAft>
+                <a:spcPts val="0"/>
+              </a:spcAft>
+              <a:buSzPts val="1400"/>
+              <a:buNone/>
+              <a:defRPr/>
+            </a:lvl7pPr>
+            <a:lvl8pPr lvl="7">
+              <a:spcBef>
+                <a:spcPts val="0"/>
+              </a:spcBef>
+              <a:spcAft>
+                <a:spcPts val="0"/>
+              </a:spcAft>
+              <a:buSzPts val="1400"/>
+              <a:buNone/>
+              <a:defRPr/>
+            </a:lvl8pPr>
+            <a:lvl9pPr lvl="8">
+              <a:spcBef>
+                <a:spcPts val="0"/>
+              </a:spcBef>
+              <a:spcAft>
+                <a:spcPts val="0"/>
+              </a:spcAft>
+              <a:buSzPts val="1400"/>
+              <a:buNone/>
+              <a:defRPr/>
+            </a:lvl9pPr>
+          </a:lstStyle>
+          <a:p/>
+        </p:txBody>
+      </p:sp>
+      <p:pic>
+        <p:nvPicPr>
+          <p:cNvPr id="257" name="Google Shape;257;p10"/>
+          <p:cNvPicPr preferRelativeResize="0"/>
+          <p:nvPr/>
+        </p:nvPicPr>
+        <p:blipFill rotWithShape="1">
+          <a:blip r:embed="rId3">
+            <a:alphaModFix/>
+          </a:blip>
+          <a:srcRect b="0" l="0" r="0" t="0"/>
+          <a:stretch/>
+        </p:blipFill>
+        <p:spPr>
+          <a:xfrm>
+            <a:off x="398723" y="6160516"/>
+            <a:ext cx="1857481" cy="292671"/>
+          </a:xfrm>
+          <a:prstGeom prst="rect">
+            <a:avLst/>
+          </a:prstGeom>
+          <a:noFill/>
+          <a:ln>
+            <a:noFill/>
+          </a:ln>
+        </p:spPr>
+      </p:pic>
+      <p:pic>
+        <p:nvPicPr>
+          <p:cNvPr descr=" " id="258" name="Google Shape;258;p10"/>
+          <p:cNvPicPr preferRelativeResize="0"/>
+          <p:nvPr/>
+        </p:nvPicPr>
+        <p:blipFill rotWithShape="1">
+          <a:blip r:embed="rId4">
+            <a:alphaModFix/>
+          </a:blip>
+          <a:srcRect b="0" l="0" r="0" t="0"/>
+          <a:stretch/>
+        </p:blipFill>
+        <p:spPr>
+          <a:xfrm>
+            <a:off x="10866292" y="0"/>
+            <a:ext cx="1325708" cy="3723972"/>
+          </a:xfrm>
+          <a:prstGeom prst="rect">
+            <a:avLst/>
+          </a:prstGeom>
+          <a:noFill/>
+          <a:ln>
+            <a:noFill/>
+          </a:ln>
+        </p:spPr>
+      </p:pic>
+      <p:pic>
+        <p:nvPicPr>
+          <p:cNvPr descr=" " id="259" name="Google Shape;259;p10"/>
+          <p:cNvPicPr preferRelativeResize="0"/>
+          <p:nvPr/>
+        </p:nvPicPr>
+        <p:blipFill rotWithShape="1">
+          <a:blip r:embed="rId5">
+            <a:alphaModFix/>
+          </a:blip>
+          <a:srcRect b="0" l="0" r="0" t="0"/>
+          <a:stretch/>
+        </p:blipFill>
+        <p:spPr>
+          <a:xfrm>
+            <a:off x="11093496" y="6238282"/>
+            <a:ext cx="690517" cy="216000"/>
+          </a:xfrm>
+          <a:prstGeom prst="rect">
+            <a:avLst/>
+          </a:prstGeom>
+          <a:noFill/>
+          <a:ln>
+            <a:noFill/>
+          </a:ln>
+        </p:spPr>
+      </p:pic>
     </p:spTree>
   </p:cSld>
   <p:clrMapOvr>
@@ -5794,8 +9465,12 @@
   </p:cSld>
   <p:clrMap accent1="accent1" accent2="accent2" accent3="accent3" accent4="accent4" accent5="accent5" accent6="accent6" bg1="lt1" bg2="dk2" tx1="dk1" tx2="lt2" folHlink="folHlink" hlink="hlink"/>
   <p:sldLayoutIdLst>
+    <p:sldLayoutId id="2147483648" r:id="rId2"/>
+    <p:sldLayoutId id="2147483652" r:id="rId6"/>
     <p:sldLayoutId id="2147483653" r:id="rId7"/>
     <p:sldLayoutId id="2147483655" r:id="rId9"/>
+    <p:sldLayoutId id="2147483656" r:id="rId10"/>
+    <p:sldLayoutId id="2147483661" r:id="rId15"/>
   </p:sldLayoutIdLst>
   <p:hf dt="0" ftr="0" hdr="0" sldNum="0"/>
   <p:txStyles>
@@ -6563,14 +10238,65 @@
       <p:grpSpPr/>
       <p:sp>
         <p:nvSpPr>
-          <p:cNvPr id="2" name="title"/>
+          <p:cNvPr id="382" name="Google Shape;382;p17"/>
+          <p:cNvSpPr/>
+          <p:nvPr/>
+        </p:nvSpPr>
+        <p:spPr>
+          <a:xfrm>
+            <a:off x="429254" y="4682210"/>
+            <a:ext cx="834282" cy="834282"/>
+          </a:xfrm>
+          <a:prstGeom prst="ellipse">
+            <a:avLst/>
+          </a:prstGeom>
+          <a:solidFill>
+            <a:srgbClr val="5A6775"/>
+          </a:solidFill>
+          <a:ln>
+            <a:noFill/>
+          </a:ln>
+        </p:spPr>
+        <p:txBody>
+          <a:bodyPr anchorCtr="0" anchor="ctr" bIns="45700" lIns="91425" spcFirstLastPara="1" rIns="91425" wrap="square" tIns="45700">
+            <a:noAutofit/>
+          </a:bodyPr>
+          <a:lstStyle/>
+          <a:p>
+            <a:pPr indent="0" lvl="0" marL="0" marR="0" rtl="0" algn="ctr">
+              <a:spcBef>
+                <a:spcPts val="0"/>
+              </a:spcBef>
+              <a:spcAft>
+                <a:spcPts val="0"/>
+              </a:spcAft>
+              <a:buNone/>
+            </a:pPr>
+            <a:r>
+              <a:t/>
+            </a:r>
+            <a:endParaRPr b="0" i="0" sz="1800" u="none" cap="none" strike="noStrike">
+              <a:solidFill>
+                <a:schemeClr val="lt1"/>
+              </a:solidFill>
+              <a:latin typeface="Arial"/>
+              <a:ea typeface="Arial"/>
+              <a:cs typeface="Arial"/>
+              <a:sym typeface="Arial"/>
+            </a:endParaRPr>
+          </a:p>
+        </p:txBody>
+      </p:sp>
+      <p:sp>
+        <p:nvSpPr>
+          <p:cNvPr id="383" name="title"/>
           <p:cNvSpPr txBox="1"/>
           <p:nvPr/>
         </p:nvSpPr>
         <p:spPr>
           <a:xfrm>
-            <a:off x="429280" y="424715"/>
-            <a:ext cx="7827264" cy="1067996"/>
+            <a:off x="429280" y="2490551"/>
+            <a:ext cx="7827385" cy="1876897"/>
           </a:xfrm>
           <a:prstGeom prst="rect">
             <a:avLst/>
@@ -6587,7 +10313,7 @@
               <a:spcAft>
                 <a:spcPts val="300"/>
               </a:spcAft>
-              <a:defRPr sz="2800">
+              <a:defRPr sz="5400" b="0">
                 <a:solidFill>
                   <a:srgbClr val="FFFFFF"/>
                 </a:solidFill>
@@ -6597,7 +10323,7 @@
               </a:defRPr>
             </a:pPr>
             <a:r>
-              <a:rPr sz="2800">
+              <a:rPr sz="5400" b="0">
                 <a:solidFill>
                   <a:srgbClr val="FFFFFF"/>
                 </a:solidFill>
@@ -6605,7 +10331,7 @@
                 <a:ea typeface="Play"/>
                 <a:cs typeface="Play"/>
               </a:rPr>
-              <a:t>Защита инициативы: сервис автоматической вёрстки презентаций</a:t>
+              <a:t>Защита инициативы</a:t>
             </a:r>
           </a:p>
         </p:txBody>
@@ -6619,6 +10345,546 @@
 </file>
 
 <file path=ppt/slides/slide31.xml><?xml version="1.0" encoding="utf-8"?>
+<p:sld xmlns:a="http://schemas.openxmlformats.org/drawingml/2006/main" xmlns:p="http://schemas.openxmlformats.org/presentationml/2006/main" xmlns:r="http://schemas.openxmlformats.org/officeDocument/2006/relationships">
+  <p:cSld>
+    <p:spTree>
+      <p:nvGrpSpPr>
+        <p:cNvPr id="1" name=""/>
+        <p:cNvGrpSpPr/>
+        <p:nvPr/>
+      </p:nvGrpSpPr>
+      <p:grpSpPr/>
+      <p:sp>
+        <p:nvSpPr>
+          <p:cNvPr id="2" name="title"/>
+          <p:cNvSpPr txBox="1"/>
+          <p:nvPr/>
+        </p:nvSpPr>
+        <p:spPr>
+          <a:xfrm>
+            <a:off x="429280" y="424715"/>
+            <a:ext cx="7827264" cy="822960"/>
+          </a:xfrm>
+          <a:prstGeom prst="rect">
+            <a:avLst/>
+          </a:prstGeom>
+          <a:noFill/>
+        </p:spPr>
+        <p:txBody>
+          <a:bodyPr wrap="square" lIns="76200" rIns="76200" tIns="50800" bIns="50800">
+            <a:spAutoFit/>
+          </a:bodyPr>
+          <a:lstStyle/>
+          <a:p>
+            <a:pPr algn="l">
+              <a:spcAft>
+                <a:spcPts val="300"/>
+              </a:spcAft>
+              <a:defRPr sz="3200">
+                <a:solidFill>
+                  <a:srgbClr val="FFFFFF"/>
+                </a:solidFill>
+                <a:latin typeface="Play"/>
+                <a:ea typeface="Play"/>
+                <a:cs typeface="Play"/>
+              </a:defRPr>
+            </a:pPr>
+            <a:r>
+              <a:rPr sz="3200">
+                <a:solidFill>
+                  <a:srgbClr val="FFFFFF"/>
+                </a:solidFill>
+                <a:latin typeface="Play"/>
+                <a:ea typeface="Play"/>
+                <a:cs typeface="Play"/>
+              </a:rPr>
+              <a:t>Контекст и возможность</a:t>
+            </a:r>
+          </a:p>
+        </p:txBody>
+      </p:sp>
+      <p:sp>
+        <p:nvSpPr>
+          <p:cNvPr id="3" name="body"/>
+          <p:cNvSpPr txBox="1"/>
+          <p:nvPr/>
+        </p:nvSpPr>
+        <p:spPr>
+          <a:xfrm>
+            <a:off x="429280" y="1664162"/>
+            <a:ext cx="5472562" cy="3753589"/>
+          </a:xfrm>
+          <a:prstGeom prst="rect">
+            <a:avLst/>
+          </a:prstGeom>
+          <a:noFill/>
+        </p:spPr>
+        <p:txBody>
+          <a:bodyPr wrap="square" lIns="76200" rIns="76200" tIns="50800" bIns="50800">
+            <a:spAutoFit/>
+          </a:bodyPr>
+          <a:lstStyle/>
+          <a:p>
+            <a:pPr algn="l">
+              <a:spcAft>
+                <a:spcPts val="300"/>
+              </a:spcAft>
+              <a:defRPr sz="1600">
+                <a:solidFill>
+                  <a:srgbClr val="FFFFFF"/>
+                </a:solidFill>
+                <a:latin typeface="Play"/>
+                <a:ea typeface="Play"/>
+                <a:cs typeface="Play"/>
+              </a:defRPr>
+            </a:pPr>
+            <a:r>
+              <a:rPr sz="1600">
+                <a:solidFill>
+                  <a:srgbClr val="FFFFFF"/>
+                </a:solidFill>
+                <a:latin typeface="Play"/>
+                <a:ea typeface="Play"/>
+                <a:cs typeface="Play"/>
+              </a:rPr>
+              <a:t>• Сборка 12-слайдной колоды занимает 186 мин</a:t>
+            </a:r>
+          </a:p>
+          <a:p>
+            <a:pPr algn="l">
+              <a:spcAft>
+                <a:spcPts val="300"/>
+              </a:spcAft>
+              <a:defRPr sz="1600">
+                <a:solidFill>
+                  <a:srgbClr val="FFFFFF"/>
+                </a:solidFill>
+                <a:latin typeface="Play"/>
+                <a:ea typeface="Play"/>
+                <a:cs typeface="Play"/>
+              </a:defRPr>
+            </a:pPr>
+            <a:r>
+              <a:rPr sz="1600">
+                <a:solidFill>
+                  <a:srgbClr val="FFFFFF"/>
+                </a:solidFill>
+                <a:latin typeface="Play"/>
+                <a:ea typeface="Play"/>
+                <a:cs typeface="Play"/>
+              </a:rPr>
+              <a:t>• Правки после ревью добавляют 74 мин</a:t>
+            </a:r>
+          </a:p>
+          <a:p>
+            <a:pPr algn="l">
+              <a:spcAft>
+                <a:spcPts val="300"/>
+              </a:spcAft>
+              <a:defRPr sz="1600">
+                <a:solidFill>
+                  <a:srgbClr val="FFFFFF"/>
+                </a:solidFill>
+                <a:latin typeface="Play"/>
+                <a:ea typeface="Play"/>
+                <a:cs typeface="Play"/>
+              </a:defRPr>
+            </a:pPr>
+            <a:r>
+              <a:rPr sz="1600">
+                <a:solidFill>
+                  <a:srgbClr val="FFFFFF"/>
+                </a:solidFill>
+                <a:latin typeface="Play"/>
+                <a:ea typeface="Play"/>
+                <a:cs typeface="Play"/>
+              </a:rPr>
+              <a:t>• Средний срок ожидания 6 дней</a:t>
+            </a:r>
+          </a:p>
+        </p:txBody>
+      </p:sp>
+      <p:graphicFrame>
+        <p:nvGraphicFramePr>
+          <p:cNvPr id="4" name="Chart 3"/>
+          <p:cNvGraphicFramePr>
+            <a:graphicFrameLocks noGrp="1"/>
+          </p:cNvGraphicFramePr>
+          <p:nvPr/>
+        </p:nvGraphicFramePr>
+        <p:xfrm>
+          <a:off x="6267602" y="1664162"/>
+          <a:ext cx="5472562" cy="3753589"/>
+        </p:xfrm>
+        <a:graphic>
+          <a:graphicData uri="http://schemas.openxmlformats.org/drawingml/2006/chart">
+            <c:chart xmlns:c="http://schemas.openxmlformats.org/drawingml/2006/chart" r:id="rId2"/>
+          </a:graphicData>
+        </a:graphic>
+      </p:graphicFrame>
+    </p:spTree>
+  </p:cSld>
+  <p:clrMapOvr>
+    <a:masterClrMapping/>
+  </p:clrMapOvr>
+</p:sld>
+</file>
+
+<file path=ppt/slides/slide32.xml><?xml version="1.0" encoding="utf-8"?>
+<p:sld xmlns:a="http://schemas.openxmlformats.org/drawingml/2006/main" xmlns:p="http://schemas.openxmlformats.org/presentationml/2006/main" xmlns:r="http://schemas.openxmlformats.org/officeDocument/2006/relationships">
+  <p:cSld>
+    <p:spTree>
+      <p:nvGrpSpPr>
+        <p:cNvPr id="1" name=""/>
+        <p:cNvGrpSpPr/>
+        <p:nvPr/>
+      </p:nvGrpSpPr>
+      <p:grpSpPr/>
+      <p:sp>
+        <p:nvSpPr>
+          <p:cNvPr id="2" name="title"/>
+          <p:cNvSpPr txBox="1"/>
+          <p:nvPr/>
+        </p:nvSpPr>
+        <p:spPr>
+          <a:xfrm>
+            <a:off x="429280" y="424715"/>
+            <a:ext cx="7827264" cy="647052"/>
+          </a:xfrm>
+          <a:prstGeom prst="rect">
+            <a:avLst/>
+          </a:prstGeom>
+          <a:noFill/>
+        </p:spPr>
+        <p:txBody>
+          <a:bodyPr wrap="square" lIns="76200" rIns="76200" tIns="50800" bIns="50800">
+            <a:spAutoFit/>
+          </a:bodyPr>
+          <a:lstStyle/>
+          <a:p>
+            <a:pPr algn="l">
+              <a:spcAft>
+                <a:spcPts val="300"/>
+              </a:spcAft>
+              <a:defRPr sz="2800">
+                <a:solidFill>
+                  <a:srgbClr val="FFFFFF"/>
+                </a:solidFill>
+                <a:latin typeface="Play"/>
+                <a:ea typeface="Play"/>
+                <a:cs typeface="Play"/>
+              </a:defRPr>
+            </a:pPr>
+            <a:r>
+              <a:rPr sz="2800">
+                <a:solidFill>
+                  <a:srgbClr val="FFFFFF"/>
+                </a:solidFill>
+                <a:latin typeface="Play"/>
+                <a:ea typeface="Play"/>
+                <a:cs typeface="Play"/>
+              </a:rPr>
+              <a:t>Текущая нагрузка дизайна</a:t>
+            </a:r>
+          </a:p>
+        </p:txBody>
+      </p:sp>
+      <p:sp>
+        <p:nvSpPr>
+          <p:cNvPr id="3" name="body"/>
+          <p:cNvSpPr txBox="1"/>
+          <p:nvPr/>
+        </p:nvSpPr>
+        <p:spPr>
+          <a:xfrm>
+            <a:off x="429280" y="3826832"/>
+            <a:ext cx="11310884" cy="1026160"/>
+          </a:xfrm>
+          <a:prstGeom prst="rect">
+            <a:avLst/>
+          </a:prstGeom>
+          <a:noFill/>
+        </p:spPr>
+        <p:txBody>
+          <a:bodyPr wrap="square" lIns="76200" rIns="76200" tIns="50800" bIns="50800">
+            <a:spAutoFit/>
+          </a:bodyPr>
+          <a:lstStyle/>
+          <a:p>
+            <a:pPr algn="l">
+              <a:spcAft>
+                <a:spcPts val="300"/>
+              </a:spcAft>
+              <a:defRPr sz="2800">
+                <a:solidFill>
+                  <a:srgbClr val="FFFFFF"/>
+                </a:solidFill>
+                <a:latin typeface="Play"/>
+                <a:ea typeface="Play"/>
+                <a:cs typeface="Play"/>
+              </a:defRPr>
+            </a:pPr>
+            <a:r>
+              <a:rPr sz="2800">
+                <a:solidFill>
+                  <a:srgbClr val="FFFFFF"/>
+                </a:solidFill>
+                <a:latin typeface="Play"/>
+                <a:ea typeface="Play"/>
+                <a:cs typeface="Play"/>
+              </a:rPr>
+              <a:t>• Дизайн-отдел закрывает 11 запросов в неделю из 27</a:t>
+            </a:r>
+          </a:p>
+          <a:p>
+            <a:pPr algn="l">
+              <a:spcAft>
+                <a:spcPts val="300"/>
+              </a:spcAft>
+              <a:defRPr sz="2800">
+                <a:solidFill>
+                  <a:srgbClr val="FFFFFF"/>
+                </a:solidFill>
+                <a:latin typeface="Play"/>
+                <a:ea typeface="Play"/>
+                <a:cs typeface="Play"/>
+              </a:defRPr>
+            </a:pPr>
+            <a:r>
+              <a:rPr sz="2800">
+                <a:solidFill>
+                  <a:srgbClr val="FFFFFF"/>
+                </a:solidFill>
+                <a:latin typeface="Play"/>
+                <a:ea typeface="Play"/>
+                <a:cs typeface="Play"/>
+              </a:rPr>
+              <a:t>• Средний срок ожидания 6 дней</a:t>
+            </a:r>
+          </a:p>
+        </p:txBody>
+      </p:sp>
+    </p:spTree>
+  </p:cSld>
+  <p:clrMapOvr>
+    <a:masterClrMapping/>
+  </p:clrMapOvr>
+</p:sld>
+</file>
+
+<file path=ppt/slides/slide33.xml><?xml version="1.0" encoding="utf-8"?>
+<p:sld xmlns:a="http://schemas.openxmlformats.org/drawingml/2006/main" xmlns:p="http://schemas.openxmlformats.org/presentationml/2006/main" xmlns:r="http://schemas.openxmlformats.org/officeDocument/2006/relationships">
+  <p:cSld>
+    <p:spTree>
+      <p:nvGrpSpPr>
+        <p:cNvPr id="1" name=""/>
+        <p:cNvGrpSpPr/>
+        <p:nvPr/>
+      </p:nvGrpSpPr>
+      <p:grpSpPr/>
+      <p:sp>
+        <p:nvSpPr>
+          <p:cNvPr id="2" name="title"/>
+          <p:cNvSpPr txBox="1"/>
+          <p:nvPr/>
+        </p:nvSpPr>
+        <p:spPr>
+          <a:xfrm>
+            <a:off x="429280" y="424715"/>
+            <a:ext cx="7827264" cy="822960"/>
+          </a:xfrm>
+          <a:prstGeom prst="rect">
+            <a:avLst/>
+          </a:prstGeom>
+          <a:noFill/>
+        </p:spPr>
+        <p:txBody>
+          <a:bodyPr wrap="square" lIns="76200" rIns="76200" tIns="50800" bIns="50800">
+            <a:spAutoFit/>
+          </a:bodyPr>
+          <a:lstStyle/>
+          <a:p>
+            <a:pPr algn="l">
+              <a:spcAft>
+                <a:spcPts val="300"/>
+              </a:spcAft>
+              <a:defRPr sz="3200">
+                <a:solidFill>
+                  <a:srgbClr val="FFFFFF"/>
+                </a:solidFill>
+                <a:latin typeface="Play"/>
+                <a:ea typeface="Play"/>
+                <a:cs typeface="Play"/>
+              </a:defRPr>
+            </a:pPr>
+            <a:r>
+              <a:rPr sz="3200">
+                <a:solidFill>
+                  <a:srgbClr val="FFFFFF"/>
+                </a:solidFill>
+                <a:latin typeface="Play"/>
+                <a:ea typeface="Play"/>
+                <a:cs typeface="Play"/>
+              </a:rPr>
+              <a:t>Ожидаемый эффект пилота</a:t>
+            </a:r>
+          </a:p>
+        </p:txBody>
+      </p:sp>
+      <p:sp>
+        <p:nvSpPr>
+          <p:cNvPr id="3" name="body"/>
+          <p:cNvSpPr txBox="1"/>
+          <p:nvPr/>
+        </p:nvSpPr>
+        <p:spPr>
+          <a:xfrm>
+            <a:off x="429280" y="1592290"/>
+            <a:ext cx="5472562" cy="4181322"/>
+          </a:xfrm>
+          <a:prstGeom prst="rect">
+            <a:avLst/>
+          </a:prstGeom>
+          <a:noFill/>
+        </p:spPr>
+        <p:txBody>
+          <a:bodyPr wrap="square" lIns="76200" rIns="76200" tIns="50800" bIns="50800">
+            <a:spAutoFit/>
+          </a:bodyPr>
+          <a:lstStyle/>
+          <a:p>
+            <a:pPr algn="l">
+              <a:spcAft>
+                <a:spcPts val="300"/>
+              </a:spcAft>
+              <a:defRPr sz="1600">
+                <a:solidFill>
+                  <a:srgbClr val="FFFFFF"/>
+                </a:solidFill>
+                <a:latin typeface="Play"/>
+                <a:ea typeface="Play"/>
+                <a:cs typeface="Play"/>
+              </a:defRPr>
+            </a:pPr>
+            <a:r>
+              <a:rPr sz="1600">
+                <a:solidFill>
+                  <a:srgbClr val="FFFFFF"/>
+                </a:solidFill>
+                <a:latin typeface="Play"/>
+                <a:ea typeface="Play"/>
+                <a:cs typeface="Play"/>
+              </a:rPr>
+              <a:t>• Средняя сборка колоды 12 слайдов — 4 мин вместо 186</a:t>
+            </a:r>
+          </a:p>
+          <a:p>
+            <a:pPr algn="l">
+              <a:spcAft>
+                <a:spcPts val="300"/>
+              </a:spcAft>
+              <a:defRPr sz="1600">
+                <a:solidFill>
+                  <a:srgbClr val="FFFFFF"/>
+                </a:solidFill>
+                <a:latin typeface="Play"/>
+                <a:ea typeface="Play"/>
+                <a:cs typeface="Play"/>
+              </a:defRPr>
+            </a:pPr>
+            <a:r>
+              <a:rPr sz="1600">
+                <a:solidFill>
+                  <a:srgbClr val="FFFFFF"/>
+                </a:solidFill>
+                <a:latin typeface="Play"/>
+                <a:ea typeface="Play"/>
+                <a:cs typeface="Play"/>
+              </a:rPr>
+              <a:t>• Время до первой версии сократилось с 6 дней до 1</a:t>
+            </a:r>
+          </a:p>
+          <a:p>
+            <a:pPr algn="l">
+              <a:spcAft>
+                <a:spcPts val="300"/>
+              </a:spcAft>
+              <a:defRPr sz="1600">
+                <a:solidFill>
+                  <a:srgbClr val="FFFFFF"/>
+                </a:solidFill>
+                <a:latin typeface="Play"/>
+                <a:ea typeface="Play"/>
+                <a:cs typeface="Play"/>
+              </a:defRPr>
+            </a:pPr>
+            <a:r>
+              <a:rPr sz="1600">
+                <a:solidFill>
+                  <a:srgbClr val="FFFFFF"/>
+                </a:solidFill>
+                <a:latin typeface="Play"/>
+                <a:ea typeface="Play"/>
+                <a:cs typeface="Play"/>
+              </a:rPr>
+              <a:t>• Нарушений стиля 2 из 68, исправлены автоматически</a:t>
+            </a:r>
+          </a:p>
+          <a:p>
+            <a:pPr algn="l">
+              <a:spcAft>
+                <a:spcPts val="300"/>
+              </a:spcAft>
+              <a:defRPr sz="1600">
+                <a:solidFill>
+                  <a:srgbClr val="FFFFFF"/>
+                </a:solidFill>
+                <a:latin typeface="Play"/>
+                <a:ea typeface="Play"/>
+                <a:cs typeface="Play"/>
+              </a:defRPr>
+            </a:pPr>
+            <a:r>
+              <a:rPr sz="1600">
+                <a:solidFill>
+                  <a:srgbClr val="FFFFFF"/>
+                </a:solidFill>
+                <a:latin typeface="Play"/>
+                <a:ea typeface="Play"/>
+                <a:cs typeface="Play"/>
+              </a:rPr>
+              <a:t>• Дизайнеры закрыли 38 запросов вместо 11</a:t>
+            </a:r>
+          </a:p>
+        </p:txBody>
+      </p:sp>
+      <p:graphicFrame>
+        <p:nvGraphicFramePr>
+          <p:cNvPr id="4" name="Chart 3"/>
+          <p:cNvGraphicFramePr>
+            <a:graphicFrameLocks noGrp="1"/>
+          </p:cNvGraphicFramePr>
+          <p:nvPr/>
+        </p:nvGraphicFramePr>
+        <p:xfrm>
+          <a:off x="6267602" y="1592290"/>
+          <a:ext cx="5472562" cy="4181322"/>
+        </p:xfrm>
+        <a:graphic>
+          <a:graphicData uri="http://schemas.openxmlformats.org/drawingml/2006/chart">
+            <c:chart xmlns:c="http://schemas.openxmlformats.org/drawingml/2006/chart" r:id="rId2"/>
+          </a:graphicData>
+        </a:graphic>
+      </p:graphicFrame>
+    </p:spTree>
+  </p:cSld>
+  <p:clrMapOvr>
+    <a:masterClrMapping/>
+  </p:clrMapOvr>
+</p:sld>
+</file>
+
+<file path=ppt/slides/slide34.xml><?xml version="1.0" encoding="utf-8"?>
 <p:sld xmlns:a="http://schemas.openxmlformats.org/drawingml/2006/main" xmlns:p="http://schemas.openxmlformats.org/presentationml/2006/main" xmlns:r="http://schemas.openxmlformats.org/officeDocument/2006/relationships">
   <p:cSld>
     <p:spTree>
@@ -6701,7 +10967,763 @@
         <p:spPr>
           <a:xfrm>
             <a:off x="300817" y="297715"/>
-            <a:ext cx="11566347" cy="4022686"/>
+            <a:ext cx="11566347" cy="5758505"/>
+          </a:xfrm>
+          <a:prstGeom prst="roundRect">
+            <a:avLst/>
+          </a:prstGeom>
+          <a:solidFill>
+            <a:srgbClr val="111111">
+              <a:alpha val="85000"/>
+            </a:srgbClr>
+          </a:solidFill>
+          <a:ln>
+            <a:noFill/>
+          </a:ln>
+          <a:effectLst/>
+        </p:spPr>
+        <p:style>
+          <a:lnRef idx="1">
+            <a:schemeClr val="accent1"/>
+          </a:lnRef>
+          <a:fillRef idx="3">
+            <a:schemeClr val="accent1"/>
+          </a:fillRef>
+          <a:effectRef idx="2">
+            <a:schemeClr val="accent1"/>
+          </a:effectRef>
+          <a:fontRef idx="minor">
+            <a:schemeClr val="lt1"/>
+          </a:fontRef>
+        </p:style>
+        <p:txBody>
+          <a:bodyPr rtlCol="0" anchor="ctr"/>
+          <a:lstStyle/>
+          <a:p>
+            <a:pPr algn="ctr"/>
+          </a:p>
+        </p:txBody>
+      </p:sp>
+      <p:sp>
+        <p:nvSpPr>
+          <p:cNvPr id="681" name="title"/>
+          <p:cNvSpPr txBox="1"/>
+          <p:nvPr/>
+        </p:nvSpPr>
+        <p:spPr>
+          <a:xfrm>
+            <a:off x="427817" y="424715"/>
+            <a:ext cx="7827264" cy="1183640"/>
+          </a:xfrm>
+          <a:prstGeom prst="rect">
+            <a:avLst/>
+          </a:prstGeom>
+          <a:noFill/>
+        </p:spPr>
+        <p:txBody>
+          <a:bodyPr wrap="square" lIns="76200" rIns="76200" tIns="50800" bIns="50800">
+            <a:spAutoFit/>
+          </a:bodyPr>
+          <a:lstStyle/>
+          <a:p>
+            <a:pPr algn="l">
+              <a:spcAft>
+                <a:spcPts val="300"/>
+              </a:spcAft>
+              <a:defRPr sz="3200">
+                <a:solidFill>
+                  <a:srgbClr val="FFFFFF"/>
+                </a:solidFill>
+                <a:latin typeface="Play"/>
+                <a:ea typeface="Play"/>
+                <a:cs typeface="Play"/>
+              </a:defRPr>
+            </a:pPr>
+            <a:r>
+              <a:rPr sz="3200">
+                <a:solidFill>
+                  <a:srgbClr val="FFFFFF"/>
+                </a:solidFill>
+                <a:latin typeface="Play"/>
+                <a:ea typeface="Play"/>
+                <a:cs typeface="Play"/>
+              </a:rPr>
+              <a:t>Что потребуется: ресурсы и сроки</a:t>
+            </a:r>
+          </a:p>
+        </p:txBody>
+      </p:sp>
+      <p:sp>
+        <p:nvSpPr>
+          <p:cNvPr id="682" name="body"/>
+          <p:cNvSpPr txBox="1"/>
+          <p:nvPr/>
+        </p:nvSpPr>
+        <p:spPr>
+          <a:xfrm>
+            <a:off x="427817" y="1837052"/>
+            <a:ext cx="5473293" cy="4092168"/>
+          </a:xfrm>
+          <a:prstGeom prst="rect">
+            <a:avLst/>
+          </a:prstGeom>
+          <a:noFill/>
+        </p:spPr>
+        <p:txBody>
+          <a:bodyPr wrap="square" lIns="76200" rIns="76200" tIns="50800" bIns="50800">
+            <a:spAutoFit/>
+          </a:bodyPr>
+          <a:lstStyle/>
+          <a:p>
+            <a:pPr algn="l">
+              <a:spcAft>
+                <a:spcPts val="300"/>
+              </a:spcAft>
+              <a:defRPr sz="1600">
+                <a:solidFill>
+                  <a:srgbClr val="FFFFFF"/>
+                </a:solidFill>
+                <a:latin typeface="Play"/>
+                <a:ea typeface="Play"/>
+                <a:cs typeface="Play"/>
+              </a:defRPr>
+            </a:pPr>
+            <a:r>
+              <a:rPr sz="1600">
+                <a:solidFill>
+                  <a:srgbClr val="FFFFFF"/>
+                </a:solidFill>
+                <a:latin typeface="Play"/>
+                <a:ea typeface="Play"/>
+                <a:cs typeface="Play"/>
+              </a:rPr>
+              <a:t>• Сервис работает на 2 vCPU / 2 ГБ RAM</a:t>
+            </a:r>
+          </a:p>
+          <a:p>
+            <a:pPr algn="l">
+              <a:spcAft>
+                <a:spcPts val="300"/>
+              </a:spcAft>
+              <a:defRPr sz="1600">
+                <a:solidFill>
+                  <a:srgbClr val="FFFFFF"/>
+                </a:solidFill>
+                <a:latin typeface="Play"/>
+                <a:ea typeface="Play"/>
+                <a:cs typeface="Play"/>
+              </a:defRPr>
+            </a:pPr>
+            <a:r>
+              <a:rPr sz="1600">
+                <a:solidFill>
+                  <a:srgbClr val="FFFFFF"/>
+                </a:solidFill>
+                <a:latin typeface="Play"/>
+                <a:ea typeface="Play"/>
+                <a:cs typeface="Play"/>
+              </a:rPr>
+              <a:t>• Инференс за 6 недель 1 400 руб</a:t>
+            </a:r>
+          </a:p>
+          <a:p>
+            <a:pPr algn="l">
+              <a:spcAft>
+                <a:spcPts val="300"/>
+              </a:spcAft>
+              <a:defRPr sz="1600">
+                <a:solidFill>
+                  <a:srgbClr val="FFFFFF"/>
+                </a:solidFill>
+                <a:latin typeface="Play"/>
+                <a:ea typeface="Play"/>
+                <a:cs typeface="Play"/>
+              </a:defRPr>
+            </a:pPr>
+            <a:r>
+              <a:rPr sz="1600">
+                <a:solidFill>
+                  <a:srgbClr val="FFFFFF"/>
+                </a:solidFill>
+                <a:latin typeface="Play"/>
+                <a:ea typeface="Play"/>
+                <a:cs typeface="Play"/>
+              </a:rPr>
+              <a:t>• Модель gpt-oss-20b подключается по OpenAI-совместимому протоколу</a:t>
+            </a:r>
+          </a:p>
+        </p:txBody>
+      </p:sp>
+      <p:sp>
+        <p:nvSpPr>
+          <p:cNvPr id="683" name="Rectangle 682"/>
+          <p:cNvSpPr/>
+          <p:nvPr/>
+        </p:nvSpPr>
+        <p:spPr>
+          <a:xfrm>
+            <a:off x="6266870" y="3719449"/>
+            <a:ext cx="5473293" cy="122765"/>
+          </a:xfrm>
+          <a:prstGeom prst="rect">
+            <a:avLst/>
+          </a:prstGeom>
+          <a:solidFill>
+            <a:srgbClr val="0077FF"/>
+          </a:solidFill>
+          <a:ln>
+            <a:noFill/>
+          </a:ln>
+        </p:spPr>
+        <p:style>
+          <a:lnRef idx="1">
+            <a:schemeClr val="accent1"/>
+          </a:lnRef>
+          <a:fillRef idx="3">
+            <a:schemeClr val="accent1"/>
+          </a:fillRef>
+          <a:effectRef idx="2">
+            <a:schemeClr val="accent1"/>
+          </a:effectRef>
+          <a:fontRef idx="minor">
+            <a:schemeClr val="lt1"/>
+          </a:fontRef>
+        </p:style>
+        <p:txBody>
+          <a:bodyPr rtlCol="0" anchor="ctr"/>
+          <a:lstStyle/>
+          <a:p>
+            <a:pPr algn="ctr"/>
+          </a:p>
+        </p:txBody>
+      </p:sp>
+      <p:sp>
+        <p:nvSpPr>
+          <p:cNvPr id="684" name="Oval 683"/>
+          <p:cNvSpPr/>
+          <p:nvPr/>
+        </p:nvSpPr>
+        <p:spPr>
+          <a:xfrm>
+            <a:off x="6905420" y="3507167"/>
+            <a:ext cx="547329" cy="547329"/>
+          </a:xfrm>
+          <a:prstGeom prst="ellipse">
+            <a:avLst/>
+          </a:prstGeom>
+          <a:solidFill>
+            <a:srgbClr val="0077FF"/>
+          </a:solidFill>
+          <a:ln>
+            <a:noFill/>
+          </a:ln>
+        </p:spPr>
+        <p:style>
+          <a:lnRef idx="1">
+            <a:schemeClr val="accent1"/>
+          </a:lnRef>
+          <a:fillRef idx="3">
+            <a:schemeClr val="accent1"/>
+          </a:fillRef>
+          <a:effectRef idx="2">
+            <a:schemeClr val="accent1"/>
+          </a:effectRef>
+          <a:fontRef idx="minor">
+            <a:schemeClr val="lt1"/>
+          </a:fontRef>
+        </p:style>
+        <p:txBody>
+          <a:bodyPr rtlCol="0" anchor="ctr"/>
+          <a:lstStyle/>
+          <a:p>
+            <a:pPr algn="ctr"/>
+          </a:p>
+        </p:txBody>
+      </p:sp>
+      <p:sp>
+        <p:nvSpPr>
+          <p:cNvPr id="685" name="TextBox 684"/>
+          <p:cNvSpPr txBox="1"/>
+          <p:nvPr/>
+        </p:nvSpPr>
+        <p:spPr>
+          <a:xfrm>
+            <a:off x="6266870" y="1837052"/>
+            <a:ext cx="2736646" cy="1555023"/>
+          </a:xfrm>
+          <a:prstGeom prst="rect">
+            <a:avLst/>
+          </a:prstGeom>
+          <a:noFill/>
+        </p:spPr>
+        <p:txBody>
+          <a:bodyPr wrap="square" lIns="12700" rIns="12700" tIns="12700" bIns="12700">
+            <a:spAutoFit/>
+          </a:bodyPr>
+          <a:lstStyle/>
+          <a:p>
+            <a:pPr algn="ctr">
+              <a:defRPr sz="1400" b="0">
+                <a:solidFill>
+                  <a:srgbClr val="FFFFFF"/>
+                </a:solidFill>
+                <a:latin typeface="Play"/>
+                <a:ea typeface="Play"/>
+                <a:cs typeface="Play"/>
+              </a:defRPr>
+            </a:pPr>
+            <a:r>
+              <a:rPr sz="1400" b="0">
+                <a:solidFill>
+                  <a:srgbClr val="FFFFFF"/>
+                </a:solidFill>
+                <a:latin typeface="Play"/>
+                <a:ea typeface="Play"/>
+                <a:cs typeface="Play"/>
+              </a:rPr>
+              <a:t>Третий квартал 2026 подключение 4 команд</a:t>
+            </a:r>
+          </a:p>
+        </p:txBody>
+      </p:sp>
+      <p:sp>
+        <p:nvSpPr>
+          <p:cNvPr id="686" name="Oval 685"/>
+          <p:cNvSpPr/>
+          <p:nvPr/>
+        </p:nvSpPr>
+        <p:spPr>
+          <a:xfrm>
+            <a:off x="8729851" y="3507167"/>
+            <a:ext cx="547329" cy="547329"/>
+          </a:xfrm>
+          <a:prstGeom prst="ellipse">
+            <a:avLst/>
+          </a:prstGeom>
+          <a:solidFill>
+            <a:srgbClr val="0077FF"/>
+          </a:solidFill>
+          <a:ln>
+            <a:noFill/>
+          </a:ln>
+        </p:spPr>
+        <p:style>
+          <a:lnRef idx="1">
+            <a:schemeClr val="accent1"/>
+          </a:lnRef>
+          <a:fillRef idx="3">
+            <a:schemeClr val="accent1"/>
+          </a:fillRef>
+          <a:effectRef idx="2">
+            <a:schemeClr val="accent1"/>
+          </a:effectRef>
+          <a:fontRef idx="minor">
+            <a:schemeClr val="lt1"/>
+          </a:fontRef>
+        </p:style>
+        <p:txBody>
+          <a:bodyPr rtlCol="0" anchor="ctr"/>
+          <a:lstStyle/>
+          <a:p>
+            <a:pPr algn="ctr"/>
+          </a:p>
+        </p:txBody>
+      </p:sp>
+      <p:sp>
+        <p:nvSpPr>
+          <p:cNvPr id="687" name="TextBox 686"/>
+          <p:cNvSpPr txBox="1"/>
+          <p:nvPr/>
+        </p:nvSpPr>
+        <p:spPr>
+          <a:xfrm>
+            <a:off x="7635193" y="4266778"/>
+            <a:ext cx="2736646" cy="1555023"/>
+          </a:xfrm>
+          <a:prstGeom prst="rect">
+            <a:avLst/>
+          </a:prstGeom>
+          <a:noFill/>
+        </p:spPr>
+        <p:txBody>
+          <a:bodyPr wrap="square" lIns="12700" rIns="12700" tIns="12700" bIns="12700">
+            <a:spAutoFit/>
+          </a:bodyPr>
+          <a:lstStyle/>
+          <a:p>
+            <a:pPr algn="ctr">
+              <a:defRPr sz="1400" b="0">
+                <a:solidFill>
+                  <a:srgbClr val="FFFFFF"/>
+                </a:solidFill>
+                <a:latin typeface="Play"/>
+                <a:ea typeface="Play"/>
+                <a:cs typeface="Play"/>
+              </a:defRPr>
+            </a:pPr>
+            <a:r>
+              <a:rPr sz="1400" b="0">
+                <a:solidFill>
+                  <a:srgbClr val="FFFFFF"/>
+                </a:solidFill>
+                <a:latin typeface="Play"/>
+                <a:ea typeface="Play"/>
+                <a:cs typeface="Play"/>
+              </a:rPr>
+              <a:t>Четвёртый квартал 2026 доступ для всей компании</a:t>
+            </a:r>
+          </a:p>
+        </p:txBody>
+      </p:sp>
+      <p:sp>
+        <p:nvSpPr>
+          <p:cNvPr id="688" name="Oval 687"/>
+          <p:cNvSpPr/>
+          <p:nvPr/>
+        </p:nvSpPr>
+        <p:spPr>
+          <a:xfrm>
+            <a:off x="10554282" y="3507167"/>
+            <a:ext cx="547329" cy="547329"/>
+          </a:xfrm>
+          <a:prstGeom prst="ellipse">
+            <a:avLst/>
+          </a:prstGeom>
+          <a:solidFill>
+            <a:srgbClr val="0077FF"/>
+          </a:solidFill>
+          <a:ln>
+            <a:noFill/>
+          </a:ln>
+        </p:spPr>
+        <p:style>
+          <a:lnRef idx="1">
+            <a:schemeClr val="accent1"/>
+          </a:lnRef>
+          <a:fillRef idx="3">
+            <a:schemeClr val="accent1"/>
+          </a:fillRef>
+          <a:effectRef idx="2">
+            <a:schemeClr val="accent1"/>
+          </a:effectRef>
+          <a:fontRef idx="minor">
+            <a:schemeClr val="lt1"/>
+          </a:fontRef>
+        </p:style>
+        <p:txBody>
+          <a:bodyPr rtlCol="0" anchor="ctr"/>
+          <a:lstStyle/>
+          <a:p>
+            <a:pPr algn="ctr"/>
+          </a:p>
+        </p:txBody>
+      </p:sp>
+      <p:sp>
+        <p:nvSpPr>
+          <p:cNvPr id="689" name="TextBox 688"/>
+          <p:cNvSpPr txBox="1"/>
+          <p:nvPr/>
+        </p:nvSpPr>
+        <p:spPr>
+          <a:xfrm>
+            <a:off x="9003516" y="1837052"/>
+            <a:ext cx="2736646" cy="1555023"/>
+          </a:xfrm>
+          <a:prstGeom prst="rect">
+            <a:avLst/>
+          </a:prstGeom>
+          <a:noFill/>
+        </p:spPr>
+        <p:txBody>
+          <a:bodyPr wrap="square" lIns="12700" rIns="12700" tIns="12700" bIns="12700">
+            <a:spAutoFit/>
+          </a:bodyPr>
+          <a:lstStyle/>
+          <a:p>
+            <a:pPr algn="ctr">
+              <a:defRPr sz="1400" b="0">
+                <a:solidFill>
+                  <a:srgbClr val="FFFFFF"/>
+                </a:solidFill>
+                <a:latin typeface="Play"/>
+                <a:ea typeface="Play"/>
+                <a:cs typeface="Play"/>
+              </a:defRPr>
+            </a:pPr>
+            <a:r>
+              <a:rPr sz="1400" b="0">
+                <a:solidFill>
+                  <a:srgbClr val="FFFFFF"/>
+                </a:solidFill>
+                <a:latin typeface="Play"/>
+                <a:ea typeface="Play"/>
+                <a:cs typeface="Play"/>
+              </a:rPr>
+              <a:t>Первый квартал 2027 генерация иллюстраций</a:t>
+            </a:r>
+          </a:p>
+        </p:txBody>
+      </p:sp>
+    </p:spTree>
+  </p:cSld>
+  <p:clrMapOvr>
+    <a:masterClrMapping/>
+  </p:clrMapOvr>
+</p:sld>
+</file>
+
+<file path=ppt/slides/slide35.xml><?xml version="1.0" encoding="utf-8"?>
+<p:sld xmlns:a="http://schemas.openxmlformats.org/drawingml/2006/main" xmlns:p="http://schemas.openxmlformats.org/presentationml/2006/main" xmlns:r="http://schemas.openxmlformats.org/officeDocument/2006/relationships">
+  <p:cSld>
+    <p:spTree>
+      <p:nvGrpSpPr>
+        <p:cNvPr id="1" name=""/>
+        <p:cNvGrpSpPr/>
+        <p:nvPr/>
+      </p:nvGrpSpPr>
+      <p:grpSpPr/>
+      <p:sp>
+        <p:nvSpPr>
+          <p:cNvPr id="2" name="title"/>
+          <p:cNvSpPr txBox="1"/>
+          <p:nvPr/>
+        </p:nvSpPr>
+        <p:spPr>
+          <a:xfrm>
+            <a:off x="429280" y="424715"/>
+            <a:ext cx="7827264" cy="822960"/>
+          </a:xfrm>
+          <a:prstGeom prst="rect">
+            <a:avLst/>
+          </a:prstGeom>
+          <a:noFill/>
+        </p:spPr>
+        <p:txBody>
+          <a:bodyPr wrap="square" lIns="76200" rIns="76200" tIns="50800" bIns="50800">
+            <a:spAutoFit/>
+          </a:bodyPr>
+          <a:lstStyle/>
+          <a:p>
+            <a:pPr algn="l">
+              <a:spcAft>
+                <a:spcPts val="300"/>
+              </a:spcAft>
+              <a:defRPr sz="3200">
+                <a:solidFill>
+                  <a:srgbClr val="FFFFFF"/>
+                </a:solidFill>
+                <a:latin typeface="Play"/>
+                <a:ea typeface="Play"/>
+                <a:cs typeface="Play"/>
+              </a:defRPr>
+            </a:pPr>
+            <a:r>
+              <a:rPr sz="3200">
+                <a:solidFill>
+                  <a:srgbClr val="FFFFFF"/>
+                </a:solidFill>
+                <a:latin typeface="Play"/>
+                <a:ea typeface="Play"/>
+                <a:cs typeface="Play"/>
+              </a:rPr>
+              <a:t>Риски</a:t>
+            </a:r>
+          </a:p>
+        </p:txBody>
+      </p:sp>
+      <p:sp>
+        <p:nvSpPr>
+          <p:cNvPr id="3" name="body"/>
+          <p:cNvSpPr txBox="1"/>
+          <p:nvPr/>
+        </p:nvSpPr>
+        <p:spPr>
+          <a:xfrm>
+            <a:off x="429280" y="1666494"/>
+            <a:ext cx="11310884" cy="3525012"/>
+          </a:xfrm>
+          <a:prstGeom prst="rect">
+            <a:avLst/>
+          </a:prstGeom>
+          <a:noFill/>
+        </p:spPr>
+        <p:txBody>
+          <a:bodyPr wrap="square" lIns="76200" rIns="76200" tIns="50800" bIns="50800">
+            <a:spAutoFit/>
+          </a:bodyPr>
+          <a:lstStyle/>
+          <a:p>
+            <a:pPr algn="l">
+              <a:spcAft>
+                <a:spcPts val="300"/>
+              </a:spcAft>
+              <a:defRPr sz="2800">
+                <a:solidFill>
+                  <a:srgbClr val="FFFFFF"/>
+                </a:solidFill>
+                <a:latin typeface="Play"/>
+                <a:ea typeface="Play"/>
+                <a:cs typeface="Play"/>
+              </a:defRPr>
+            </a:pPr>
+            <a:r>
+              <a:rPr sz="2800">
+                <a:solidFill>
+                  <a:srgbClr val="FFFFFF"/>
+                </a:solidFill>
+                <a:latin typeface="Play"/>
+                <a:ea typeface="Play"/>
+                <a:cs typeface="Play"/>
+              </a:rPr>
+              <a:t>• Слабая модель может выдумать цифру, аудит проверяет каждое число</a:t>
+            </a:r>
+          </a:p>
+          <a:p>
+            <a:pPr algn="l">
+              <a:spcAft>
+                <a:spcPts val="300"/>
+              </a:spcAft>
+              <a:defRPr sz="2800">
+                <a:solidFill>
+                  <a:srgbClr val="FFFFFF"/>
+                </a:solidFill>
+                <a:latin typeface="Play"/>
+                <a:ea typeface="Play"/>
+                <a:cs typeface="Play"/>
+              </a:defRPr>
+            </a:pPr>
+            <a:r>
+              <a:rPr sz="2800">
+                <a:solidFill>
+                  <a:srgbClr val="FFFFFF"/>
+                </a:solidFill>
+                <a:latin typeface="Play"/>
+                <a:ea typeface="Play"/>
+                <a:cs typeface="Play"/>
+              </a:rPr>
+              <a:t>• Незнакомый шаблон может быть плохо сделанным, сервис использует рабочую область</a:t>
+            </a:r>
+          </a:p>
+          <a:p>
+            <a:pPr algn="l">
+              <a:spcAft>
+                <a:spcPts val="300"/>
+              </a:spcAft>
+              <a:defRPr sz="2800">
+                <a:solidFill>
+                  <a:srgbClr val="FFFFFF"/>
+                </a:solidFill>
+                <a:latin typeface="Play"/>
+                <a:ea typeface="Play"/>
+                <a:cs typeface="Play"/>
+              </a:defRPr>
+            </a:pPr>
+            <a:r>
+              <a:rPr sz="2800">
+                <a:solidFill>
+                  <a:srgbClr val="FFFFFF"/>
+                </a:solidFill>
+                <a:latin typeface="Play"/>
+                <a:ea typeface="Play"/>
+                <a:cs typeface="Play"/>
+              </a:rPr>
+              <a:t>• Нагрузка выше 20 задач требует внешней очереди</a:t>
+            </a:r>
+          </a:p>
+        </p:txBody>
+      </p:sp>
+    </p:spTree>
+  </p:cSld>
+  <p:clrMapOvr>
+    <a:masterClrMapping/>
+  </p:clrMapOvr>
+</p:sld>
+</file>
+
+<file path=ppt/slides/slide36.xml><?xml version="1.0" encoding="utf-8"?>
+<p:sld xmlns:a="http://schemas.openxmlformats.org/drawingml/2006/main" xmlns:p="http://schemas.openxmlformats.org/presentationml/2006/main" xmlns:r="http://schemas.openxmlformats.org/officeDocument/2006/relationships">
+  <p:cSld>
+    <p:spTree>
+      <p:nvGrpSpPr>
+        <p:cNvPr id="1" name=""/>
+        <p:cNvGrpSpPr/>
+        <p:nvPr/>
+      </p:nvGrpSpPr>
+      <p:grpSpPr/>
+      <p:sp>
+        <p:nvSpPr>
+          <p:cNvPr id="679" name="Google Shape;679;p31"/>
+          <p:cNvSpPr/>
+          <p:nvPr/>
+        </p:nvSpPr>
+        <p:spPr>
+          <a:xfrm>
+            <a:off x="0" y="4748271"/>
+            <a:ext cx="12192000" cy="2109730"/>
+          </a:xfrm>
+          <a:prstGeom prst="rect">
+            <a:avLst/>
+          </a:prstGeom>
+          <a:gradFill>
+            <a:gsLst>
+              <a:gs pos="0">
+                <a:srgbClr val="0077FF">
+                  <a:alpha val="61961"/>
+                </a:srgbClr>
+              </a:gs>
+              <a:gs pos="99000">
+                <a:srgbClr val="00AEE8"/>
+              </a:gs>
+              <a:gs pos="100000">
+                <a:srgbClr val="00AEE8"/>
+              </a:gs>
+            </a:gsLst>
+            <a:lin ang="14400000" scaled="0"/>
+          </a:gradFill>
+          <a:ln>
+            <a:noFill/>
+          </a:ln>
+        </p:spPr>
+        <p:txBody>
+          <a:bodyPr anchorCtr="0" anchor="ctr" bIns="0" lIns="108000" spcFirstLastPara="1" rIns="91425" wrap="square" tIns="0">
+            <a:noAutofit/>
+          </a:bodyPr>
+          <a:lstStyle/>
+          <a:p>
+            <a:pPr indent="0" lvl="0" marL="0" marR="0" rtl="0" algn="l">
+              <a:spcBef>
+                <a:spcPts val="0"/>
+              </a:spcBef>
+              <a:spcAft>
+                <a:spcPts val="0"/>
+              </a:spcAft>
+              <a:buNone/>
+            </a:pPr>
+            <a:r>
+              <a:t/>
+            </a:r>
+            <a:endParaRPr sz="1100">
+              <a:solidFill>
+                <a:schemeClr val="lt1"/>
+              </a:solidFill>
+              <a:latin typeface="Play"/>
+              <a:ea typeface="Play"/>
+              <a:cs typeface="Play"/>
+              <a:sym typeface="Play"/>
+            </a:endParaRPr>
+          </a:p>
+        </p:txBody>
+      </p:sp>
+      <p:sp>
+        <p:nvSpPr>
+          <p:cNvPr id="680" name="Rounded Rectangle 679"/>
+          <p:cNvSpPr/>
+          <p:nvPr/>
+        </p:nvSpPr>
+        <p:spPr>
+          <a:xfrm>
+            <a:off x="300817" y="297715"/>
+            <a:ext cx="11566347" cy="4079336"/>
           </a:xfrm>
           <a:prstGeom prst="roundRect">
             <a:avLst/>
@@ -6782,7 +11804,7 @@
                 <a:ea typeface="Play"/>
                 <a:cs typeface="Play"/>
               </a:rPr>
-              <a:t>Контекст и возможность</a:t>
+              <a:t>План пилота</a:t>
             </a:r>
           </a:p>
         </p:txBody>
@@ -6795,8 +11817,8 @@
         </p:nvSpPr>
         <p:spPr>
           <a:xfrm>
-            <a:off x="427817" y="2704961"/>
-            <a:ext cx="11312347" cy="1488440"/>
+            <a:off x="427817" y="1837052"/>
+            <a:ext cx="11312347" cy="4092168"/>
           </a:xfrm>
           <a:prstGeom prst="rect">
             <a:avLst/>
@@ -6831,7 +11853,7 @@
                 <a:ea typeface="Play"/>
                 <a:cs typeface="Play"/>
               </a:rPr>
-              <a:t>• 42 колоды, 12 слайдов, 186 минут сборки</a:t>
+              <a:t>• Третий квартал 2026 подключение 4 команд, домен и HTTPS</a:t>
             </a:r>
           </a:p>
           <a:p>
@@ -6857,7 +11879,7 @@
                 <a:ea typeface="Play"/>
                 <a:cs typeface="Play"/>
               </a:rPr>
-              <a:t>• 74 минуты правки, 19 нарушений фирменного стиля</a:t>
+              <a:t>• Четвёртый квартал 2026 доступ для всей компании, интеграция с хранилищем</a:t>
             </a:r>
           </a:p>
           <a:p>
@@ -6883,7 +11905,7 @@
                 <a:ea typeface="Play"/>
                 <a:cs typeface="Play"/>
               </a:rPr>
-              <a:t>• 4 дизайнера, 11 запросов/неделя, 6 дней ожидания</a:t>
+              <a:t>• Первый квартал 2027 генерация иллюстраций под стиль шаблона</a:t>
             </a:r>
           </a:p>
         </p:txBody>
@@ -6896,7 +11918,7 @@
 </p:sld>
 </file>
 
-<file path=ppt/slides/slide32.xml><?xml version="1.0" encoding="utf-8"?>
+<file path=ppt/slides/slide37.xml><?xml version="1.0" encoding="utf-8"?>
 <p:sld xmlns:a="http://schemas.openxmlformats.org/drawingml/2006/main" xmlns:p="http://schemas.openxmlformats.org/presentationml/2006/main" xmlns:r="http://schemas.openxmlformats.org/officeDocument/2006/relationships">
   <p:cSld>
     <p:spTree>
@@ -6950,7 +11972,7 @@
                 <a:ea typeface="Play"/>
                 <a:cs typeface="Play"/>
               </a:rPr>
-              <a:t>Предложение</a:t>
+              <a:t>Пилотные результаты</a:t>
             </a:r>
           </a:p>
         </p:txBody>
@@ -6963,8 +11985,8 @@
         </p:nvSpPr>
         <p:spPr>
           <a:xfrm>
-            <a:off x="429280" y="2489917"/>
-            <a:ext cx="11310884" cy="1488440"/>
+            <a:off x="429280" y="1666494"/>
+            <a:ext cx="11310884" cy="3525012"/>
           </a:xfrm>
           <a:prstGeom prst="rect">
             <a:avLst/>
@@ -6999,7 +12021,7 @@
                 <a:ea typeface="Play"/>
                 <a:cs typeface="Play"/>
               </a:rPr>
-              <a:t>• Сервис принимает шаблон pptx и материалы</a:t>
+              <a:t>• Пилот шёл 6 недель на двух командах, собрал 68 презентаций</a:t>
             </a:r>
           </a:p>
           <a:p>
@@ -7025,7 +12047,7 @@
                 <a:ea typeface="Play"/>
                 <a:cs typeface="Play"/>
               </a:rPr>
-              <a:t>• Генерирует колоду, экспортирует pptx/pdf/html</a:t>
+              <a:t>• Сервис ускорил сборку с 186 до 4 мин</a:t>
             </a:r>
           </a:p>
           <a:p>
@@ -7051,7 +12073,7 @@
                 <a:ea typeface="Play"/>
                 <a:cs typeface="Play"/>
               </a:rPr>
-              <a:t>• Автоматический аудит исправляет нарушения стиля</a:t>
+              <a:t>• Нарушения стиля 2 из 68, исправлены автоматически</a:t>
             </a:r>
           </a:p>
         </p:txBody>
@@ -7064,871 +12086,7 @@
 </p:sld>
 </file>
 
-<file path=ppt/slides/slide33.xml><?xml version="1.0" encoding="utf-8"?>
-<p:sld xmlns:a="http://schemas.openxmlformats.org/drawingml/2006/main" xmlns:p="http://schemas.openxmlformats.org/presentationml/2006/main" xmlns:r="http://schemas.openxmlformats.org/officeDocument/2006/relationships">
-  <p:cSld>
-    <p:spTree>
-      <p:nvGrpSpPr>
-        <p:cNvPr id="1" name=""/>
-        <p:cNvGrpSpPr/>
-        <p:nvPr/>
-      </p:nvGrpSpPr>
-      <p:grpSpPr/>
-      <p:pic>
-        <p:nvPicPr>
-          <p:cNvPr id="620" name="Google Shape;620;p28"/>
-          <p:cNvPicPr preferRelativeResize="0"/>
-          <p:nvPr/>
-        </p:nvPicPr>
-        <p:blipFill rotWithShape="1">
-          <a:blip r:embed="rId3">
-            <a:alphaModFix/>
-          </a:blip>
-          <a:srcRect b="0" l="0" r="0" t="0"/>
-          <a:stretch/>
-        </p:blipFill>
-        <p:spPr>
-          <a:xfrm>
-            <a:off x="398723" y="6160516"/>
-            <a:ext cx="1857481" cy="292671"/>
-          </a:xfrm>
-          <a:prstGeom prst="rect">
-            <a:avLst/>
-          </a:prstGeom>
-          <a:noFill/>
-          <a:ln>
-            <a:noFill/>
-          </a:ln>
-        </p:spPr>
-      </p:pic>
-      <p:pic>
-        <p:nvPicPr>
-          <p:cNvPr descr=" " id="621" name="Google Shape;621;p28"/>
-          <p:cNvPicPr preferRelativeResize="0"/>
-          <p:nvPr/>
-        </p:nvPicPr>
-        <p:blipFill rotWithShape="1">
-          <a:blip r:embed="rId4">
-            <a:alphaModFix/>
-          </a:blip>
-          <a:srcRect b="0" l="0" r="0" t="0"/>
-          <a:stretch/>
-        </p:blipFill>
-        <p:spPr>
-          <a:xfrm>
-            <a:off x="11093496" y="6238282"/>
-            <a:ext cx="690517" cy="216000"/>
-          </a:xfrm>
-          <a:prstGeom prst="rect">
-            <a:avLst/>
-          </a:prstGeom>
-          <a:noFill/>
-          <a:ln>
-            <a:noFill/>
-          </a:ln>
-        </p:spPr>
-      </p:pic>
-      <p:sp>
-        <p:nvSpPr>
-          <p:cNvPr id="622" name="title"/>
-          <p:cNvSpPr txBox="1"/>
-          <p:nvPr/>
-        </p:nvSpPr>
-        <p:spPr>
-          <a:xfrm>
-            <a:off x="429280" y="424715"/>
-            <a:ext cx="7827264" cy="822960"/>
-          </a:xfrm>
-          <a:prstGeom prst="rect">
-            <a:avLst/>
-          </a:prstGeom>
-          <a:noFill/>
-        </p:spPr>
-        <p:txBody>
-          <a:bodyPr wrap="square" lIns="76200" rIns="76200" tIns="50800" bIns="50800">
-            <a:spAutoFit/>
-          </a:bodyPr>
-          <a:lstStyle/>
-          <a:p>
-            <a:pPr algn="l">
-              <a:spcAft>
-                <a:spcPts val="300"/>
-              </a:spcAft>
-              <a:defRPr sz="3200">
-                <a:solidFill>
-                  <a:srgbClr val="FFFFFF"/>
-                </a:solidFill>
-                <a:latin typeface="Play"/>
-                <a:ea typeface="Play"/>
-                <a:cs typeface="Play"/>
-              </a:defRPr>
-            </a:pPr>
-            <a:r>
-              <a:rPr sz="3200">
-                <a:solidFill>
-                  <a:srgbClr val="FFFFFF"/>
-                </a:solidFill>
-                <a:latin typeface="Play"/>
-                <a:ea typeface="Play"/>
-                <a:cs typeface="Play"/>
-              </a:rPr>
-              <a:t>Ожидаемый эффект</a:t>
-            </a:r>
-          </a:p>
-        </p:txBody>
-      </p:sp>
-      <p:sp>
-        <p:nvSpPr>
-          <p:cNvPr id="623" name="body_left"/>
-          <p:cNvSpPr txBox="1"/>
-          <p:nvPr/>
-        </p:nvSpPr>
-        <p:spPr>
-          <a:xfrm>
-            <a:off x="429280" y="2156167"/>
-            <a:ext cx="5472562" cy="1950720"/>
-          </a:xfrm>
-          <a:prstGeom prst="rect">
-            <a:avLst/>
-          </a:prstGeom>
-          <a:noFill/>
-        </p:spPr>
-        <p:txBody>
-          <a:bodyPr wrap="square" lIns="76200" rIns="76200" tIns="50800" bIns="50800">
-            <a:spAutoFit/>
-          </a:bodyPr>
-          <a:lstStyle/>
-          <a:p>
-            <a:pPr algn="l">
-              <a:spcAft>
-                <a:spcPts val="300"/>
-              </a:spcAft>
-              <a:defRPr sz="2800">
-                <a:solidFill>
-                  <a:srgbClr val="FFFFFF"/>
-                </a:solidFill>
-                <a:latin typeface="Play"/>
-                <a:ea typeface="Play"/>
-                <a:cs typeface="Play"/>
-              </a:defRPr>
-            </a:pPr>
-            <a:r>
-              <a:rPr sz="2800">
-                <a:solidFill>
-                  <a:srgbClr val="FFFFFF"/>
-                </a:solidFill>
-                <a:latin typeface="Play"/>
-                <a:ea typeface="Play"/>
-                <a:cs typeface="Play"/>
-              </a:rPr>
-              <a:t>• Сборка 4 минуты вместо 186</a:t>
-            </a:r>
-          </a:p>
-          <a:p>
-            <a:pPr algn="l">
-              <a:spcAft>
-                <a:spcPts val="300"/>
-              </a:spcAft>
-              <a:defRPr sz="2800">
-                <a:solidFill>
-                  <a:srgbClr val="FFFFFF"/>
-                </a:solidFill>
-                <a:latin typeface="Play"/>
-                <a:ea typeface="Play"/>
-                <a:cs typeface="Play"/>
-              </a:defRPr>
-            </a:pPr>
-            <a:r>
-              <a:rPr sz="2800">
-                <a:solidFill>
-                  <a:srgbClr val="FFFFFF"/>
-                </a:solidFill>
-                <a:latin typeface="Play"/>
-                <a:ea typeface="Play"/>
-                <a:cs typeface="Play"/>
-              </a:rPr>
-              <a:t>• Время до первой версии 1 день вместо 6</a:t>
-            </a:r>
-          </a:p>
-        </p:txBody>
-      </p:sp>
-      <p:sp>
-        <p:nvSpPr>
-          <p:cNvPr id="624" name="body_right"/>
-          <p:cNvSpPr txBox="1"/>
-          <p:nvPr/>
-        </p:nvSpPr>
-        <p:spPr>
-          <a:xfrm>
-            <a:off x="6267602" y="2156167"/>
-            <a:ext cx="5472562" cy="1950720"/>
-          </a:xfrm>
-          <a:prstGeom prst="rect">
-            <a:avLst/>
-          </a:prstGeom>
-          <a:noFill/>
-        </p:spPr>
-        <p:txBody>
-          <a:bodyPr wrap="square" lIns="76200" rIns="76200" tIns="50800" bIns="50800">
-            <a:spAutoFit/>
-          </a:bodyPr>
-          <a:lstStyle/>
-          <a:p>
-            <a:pPr algn="l">
-              <a:spcAft>
-                <a:spcPts val="300"/>
-              </a:spcAft>
-              <a:defRPr sz="2800">
-                <a:solidFill>
-                  <a:srgbClr val="FFFFFF"/>
-                </a:solidFill>
-                <a:latin typeface="Play"/>
-                <a:ea typeface="Play"/>
-                <a:cs typeface="Play"/>
-              </a:defRPr>
-            </a:pPr>
-            <a:r>
-              <a:rPr sz="2800">
-                <a:solidFill>
-                  <a:srgbClr val="FFFFFF"/>
-                </a:solidFill>
-                <a:latin typeface="Play"/>
-                <a:ea typeface="Play"/>
-                <a:cs typeface="Play"/>
-              </a:rPr>
-              <a:t>• Нарушений 2 из 68, все исправлены</a:t>
-            </a:r>
-          </a:p>
-          <a:p>
-            <a:pPr algn="l">
-              <a:spcAft>
-                <a:spcPts val="300"/>
-              </a:spcAft>
-              <a:defRPr sz="2800">
-                <a:solidFill>
-                  <a:srgbClr val="FFFFFF"/>
-                </a:solidFill>
-                <a:latin typeface="Play"/>
-                <a:ea typeface="Play"/>
-                <a:cs typeface="Play"/>
-              </a:defRPr>
-            </a:pPr>
-            <a:r>
-              <a:rPr sz="2800">
-                <a:solidFill>
-                  <a:srgbClr val="FFFFFF"/>
-                </a:solidFill>
-                <a:latin typeface="Play"/>
-                <a:ea typeface="Play"/>
-                <a:cs typeface="Play"/>
-              </a:rPr>
-              <a:t>• Дизайнеры закрыли 38 запросов вместо 11</a:t>
-            </a:r>
-          </a:p>
-        </p:txBody>
-      </p:sp>
-    </p:spTree>
-  </p:cSld>
-  <p:clrMapOvr>
-    <a:masterClrMapping/>
-  </p:clrMapOvr>
-</p:sld>
-</file>
-
-<file path=ppt/slides/slide34.xml><?xml version="1.0" encoding="utf-8"?>
-<p:sld xmlns:a="http://schemas.openxmlformats.org/drawingml/2006/main" xmlns:p="http://schemas.openxmlformats.org/presentationml/2006/main" xmlns:r="http://schemas.openxmlformats.org/officeDocument/2006/relationships">
-  <p:cSld>
-    <p:spTree>
-      <p:nvGrpSpPr>
-        <p:cNvPr id="1" name=""/>
-        <p:cNvGrpSpPr/>
-        <p:nvPr/>
-      </p:nvGrpSpPr>
-      <p:grpSpPr/>
-      <p:sp>
-        <p:nvSpPr>
-          <p:cNvPr id="2" name="title"/>
-          <p:cNvSpPr txBox="1"/>
-          <p:nvPr/>
-        </p:nvSpPr>
-        <p:spPr>
-          <a:xfrm>
-            <a:off x="429280" y="424715"/>
-            <a:ext cx="7827264" cy="822960"/>
-          </a:xfrm>
-          <a:prstGeom prst="rect">
-            <a:avLst/>
-          </a:prstGeom>
-          <a:noFill/>
-        </p:spPr>
-        <p:txBody>
-          <a:bodyPr wrap="square" lIns="76200" rIns="76200" tIns="50800" bIns="50800">
-            <a:spAutoFit/>
-          </a:bodyPr>
-          <a:lstStyle/>
-          <a:p>
-            <a:pPr algn="l">
-              <a:spcAft>
-                <a:spcPts val="300"/>
-              </a:spcAft>
-              <a:defRPr sz="3200">
-                <a:solidFill>
-                  <a:srgbClr val="FFFFFF"/>
-                </a:solidFill>
-                <a:latin typeface="Play"/>
-                <a:ea typeface="Play"/>
-                <a:cs typeface="Play"/>
-              </a:defRPr>
-            </a:pPr>
-            <a:r>
-              <a:rPr sz="3200">
-                <a:solidFill>
-                  <a:srgbClr val="FFFFFF"/>
-                </a:solidFill>
-                <a:latin typeface="Play"/>
-                <a:ea typeface="Play"/>
-                <a:cs typeface="Play"/>
-              </a:rPr>
-              <a:t>Время сборки колоды</a:t>
-            </a:r>
-          </a:p>
-        </p:txBody>
-      </p:sp>
-      <p:graphicFrame>
-        <p:nvGraphicFramePr>
-          <p:cNvPr id="3" name="Chart 2"/>
-          <p:cNvGraphicFramePr>
-            <a:graphicFrameLocks noGrp="1"/>
-          </p:cNvGraphicFramePr>
-          <p:nvPr/>
-        </p:nvGraphicFramePr>
-        <p:xfrm>
-          <a:off x="6267602" y="1492575"/>
-          <a:ext cx="5472562" cy="4014604"/>
-        </p:xfrm>
-        <a:graphic>
-          <a:graphicData uri="http://schemas.openxmlformats.org/drawingml/2006/chart">
-            <c:chart xmlns:c="http://schemas.openxmlformats.org/drawingml/2006/chart" r:id="rId4"/>
-          </a:graphicData>
-        </a:graphic>
-      </p:graphicFrame>
-    </p:spTree>
-  </p:cSld>
-  <p:clrMapOvr>
-    <a:masterClrMapping/>
-  </p:clrMapOvr>
-</p:sld>
-</file>
-
-<file path=ppt/slides/slide35.xml><?xml version="1.0" encoding="utf-8"?>
-<p:sld xmlns:a="http://schemas.openxmlformats.org/drawingml/2006/main" xmlns:p="http://schemas.openxmlformats.org/presentationml/2006/main" xmlns:r="http://schemas.openxmlformats.org/officeDocument/2006/relationships">
-  <p:cSld>
-    <p:spTree>
-      <p:nvGrpSpPr>
-        <p:cNvPr id="1" name=""/>
-        <p:cNvGrpSpPr/>
-        <p:nvPr/>
-      </p:nvGrpSpPr>
-      <p:grpSpPr/>
-      <p:sp>
-        <p:nvSpPr>
-          <p:cNvPr id="2" name="title"/>
-          <p:cNvSpPr txBox="1"/>
-          <p:nvPr/>
-        </p:nvSpPr>
-        <p:spPr>
-          <a:xfrm>
-            <a:off x="429280" y="424715"/>
-            <a:ext cx="7827264" cy="822960"/>
-          </a:xfrm>
-          <a:prstGeom prst="rect">
-            <a:avLst/>
-          </a:prstGeom>
-          <a:noFill/>
-        </p:spPr>
-        <p:txBody>
-          <a:bodyPr wrap="square" lIns="76200" rIns="76200" tIns="50800" bIns="50800">
-            <a:spAutoFit/>
-          </a:bodyPr>
-          <a:lstStyle/>
-          <a:p>
-            <a:pPr algn="l">
-              <a:spcAft>
-                <a:spcPts val="300"/>
-              </a:spcAft>
-              <a:defRPr sz="3200">
-                <a:solidFill>
-                  <a:srgbClr val="FFFFFF"/>
-                </a:solidFill>
-                <a:latin typeface="Play"/>
-                <a:ea typeface="Play"/>
-                <a:cs typeface="Play"/>
-              </a:defRPr>
-            </a:pPr>
-            <a:r>
-              <a:rPr sz="3200">
-                <a:solidFill>
-                  <a:srgbClr val="FFFFFF"/>
-                </a:solidFill>
-                <a:latin typeface="Play"/>
-                <a:ea typeface="Play"/>
-                <a:cs typeface="Play"/>
-              </a:rPr>
-              <a:t>Нарушения фирменного стиля</a:t>
-            </a:r>
-          </a:p>
-        </p:txBody>
-      </p:sp>
-      <p:graphicFrame>
-        <p:nvGraphicFramePr>
-          <p:cNvPr id="3" name="Table 2"/>
-          <p:cNvGraphicFramePr>
-            <a:graphicFrameLocks noGrp="1"/>
-          </p:cNvGraphicFramePr>
-          <p:nvPr/>
-        </p:nvGraphicFramePr>
-        <p:xfrm>
-          <a:off x="6267602" y="1664162"/>
-          <a:ext cx="5472562" cy="3753589"/>
-        </p:xfrm>
-        <a:graphic>
-          <a:graphicData uri="http://schemas.openxmlformats.org/drawingml/2006/table">
-            <a:tbl>
-              <a:tblPr firstRow="1" bandRow="1">
-                <a:tableStyleId>{5C22544A-7EE6-4342-B048-85BDC9FD1C3A}</a:tableStyleId>
-              </a:tblPr>
-              <a:tblGrid>
-                <a:gridCol w="1824187"/>
-                <a:gridCol w="1824187"/>
-                <a:gridCol w="1824188"/>
-              </a:tblGrid>
-              <a:tr h="1876794">
-                <a:tc>
-                  <a:txBody>
-                    <a:bodyPr/>
-                    <a:lstStyle/>
-                    <a:p>
-                      <a:pPr>
-                        <a:defRPr sz="1300" b="1">
-                          <a:solidFill>
-                            <a:srgbClr val="FFFFFF"/>
-                          </a:solidFill>
-                          <a:latin typeface="Play"/>
-                          <a:ea typeface="Play"/>
-                          <a:cs typeface="Play"/>
-                        </a:defRPr>
-                      </a:pPr>
-                      <a:r>
-                        <a:t>Показатель</a:t>
-                      </a:r>
-                    </a:p>
-                  </a:txBody>
-                  <a:tcPr>
-                    <a:solidFill>
-                      <a:srgbClr val="0077FF"/>
-                    </a:solidFill>
-                  </a:tcPr>
-                </a:tc>
-                <a:tc>
-                  <a:txBody>
-                    <a:bodyPr/>
-                    <a:lstStyle/>
-                    <a:p>
-                      <a:pPr>
-                        <a:defRPr sz="1300" b="1">
-                          <a:solidFill>
-                            <a:srgbClr val="FFFFFF"/>
-                          </a:solidFill>
-                          <a:latin typeface="Play"/>
-                          <a:ea typeface="Play"/>
-                          <a:cs typeface="Play"/>
-                        </a:defRPr>
-                      </a:pPr>
-                      <a:r>
-                        <a:t>Текущие</a:t>
-                      </a:r>
-                    </a:p>
-                  </a:txBody>
-                  <a:tcPr>
-                    <a:solidFill>
-                      <a:srgbClr val="0077FF"/>
-                    </a:solidFill>
-                  </a:tcPr>
-                </a:tc>
-                <a:tc>
-                  <a:txBody>
-                    <a:bodyPr/>
-                    <a:lstStyle/>
-                    <a:p>
-                      <a:pPr>
-                        <a:defRPr sz="1300" b="1">
-                          <a:solidFill>
-                            <a:srgbClr val="FFFFFF"/>
-                          </a:solidFill>
-                          <a:latin typeface="Play"/>
-                          <a:ea typeface="Play"/>
-                          <a:cs typeface="Play"/>
-                        </a:defRPr>
-                      </a:pPr>
-                      <a:r>
-                        <a:t>Пилот</a:t>
-                      </a:r>
-                    </a:p>
-                  </a:txBody>
-                  <a:tcPr>
-                    <a:solidFill>
-                      <a:srgbClr val="0077FF"/>
-                    </a:solidFill>
-                  </a:tcPr>
-                </a:tc>
-              </a:tr>
-              <a:tr h="1876795">
-                <a:tc>
-                  <a:txBody>
-                    <a:bodyPr/>
-                    <a:lstStyle/>
-                    <a:p>
-                      <a:pPr>
-                        <a:defRPr sz="1300" b="0">
-                          <a:solidFill>
-                            <a:srgbClr val="FFFFFF"/>
-                          </a:solidFill>
-                          <a:latin typeface="Play"/>
-                          <a:ea typeface="Play"/>
-                          <a:cs typeface="Play"/>
-                        </a:defRPr>
-                      </a:pPr>
-                      <a:r>
-                        <a:t>Нарушения фирменного стиля</a:t>
-                      </a:r>
-                    </a:p>
-                  </a:txBody>
-                  <a:tcPr>
-                    <a:solidFill>
-                      <a:srgbClr val="111111"/>
-                    </a:solidFill>
-                  </a:tcPr>
-                </a:tc>
-                <a:tc>
-                  <a:txBody>
-                    <a:bodyPr/>
-                    <a:lstStyle/>
-                    <a:p>
-                      <a:pPr>
-                        <a:defRPr sz="1300" b="0">
-                          <a:solidFill>
-                            <a:srgbClr val="FFFFFF"/>
-                          </a:solidFill>
-                          <a:latin typeface="Play"/>
-                          <a:ea typeface="Play"/>
-                          <a:cs typeface="Play"/>
-                        </a:defRPr>
-                      </a:pPr>
-                      <a:r>
-                        <a:t>19 из 42</a:t>
-                      </a:r>
-                    </a:p>
-                  </a:txBody>
-                  <a:tcPr>
-                    <a:solidFill>
-                      <a:srgbClr val="111111"/>
-                    </a:solidFill>
-                  </a:tcPr>
-                </a:tc>
-                <a:tc>
-                  <a:txBody>
-                    <a:bodyPr/>
-                    <a:lstStyle/>
-                    <a:p>
-                      <a:pPr>
-                        <a:defRPr sz="1300" b="0">
-                          <a:solidFill>
-                            <a:srgbClr val="FFFFFF"/>
-                          </a:solidFill>
-                          <a:latin typeface="Play"/>
-                          <a:ea typeface="Play"/>
-                          <a:cs typeface="Play"/>
-                        </a:defRPr>
-                      </a:pPr>
-                      <a:r>
-                        <a:t>2 из 68</a:t>
-                      </a:r>
-                    </a:p>
-                  </a:txBody>
-                  <a:tcPr>
-                    <a:solidFill>
-                      <a:srgbClr val="111111"/>
-                    </a:solidFill>
-                  </a:tcPr>
-                </a:tc>
-              </a:tr>
-            </a:tbl>
-          </a:graphicData>
-        </a:graphic>
-      </p:graphicFrame>
-    </p:spTree>
-  </p:cSld>
-  <p:clrMapOvr>
-    <a:masterClrMapping/>
-  </p:clrMapOvr>
-</p:sld>
-</file>
-
-<file path=ppt/slides/slide36.xml><?xml version="1.0" encoding="utf-8"?>
-<p:sld xmlns:a="http://schemas.openxmlformats.org/drawingml/2006/main" xmlns:p="http://schemas.openxmlformats.org/presentationml/2006/main" xmlns:r="http://schemas.openxmlformats.org/officeDocument/2006/relationships">
-  <p:cSld>
-    <p:spTree>
-      <p:nvGrpSpPr>
-        <p:cNvPr id="1" name=""/>
-        <p:cNvGrpSpPr/>
-        <p:nvPr/>
-      </p:nvGrpSpPr>
-      <p:grpSpPr/>
-      <p:sp>
-        <p:nvSpPr>
-          <p:cNvPr id="2" name="title"/>
-          <p:cNvSpPr txBox="1"/>
-          <p:nvPr/>
-        </p:nvSpPr>
-        <p:spPr>
-          <a:xfrm>
-            <a:off x="429280" y="424715"/>
-            <a:ext cx="7827264" cy="822960"/>
-          </a:xfrm>
-          <a:prstGeom prst="rect">
-            <a:avLst/>
-          </a:prstGeom>
-          <a:noFill/>
-        </p:spPr>
-        <p:txBody>
-          <a:bodyPr wrap="square" lIns="76200" rIns="76200" tIns="50800" bIns="50800">
-            <a:spAutoFit/>
-          </a:bodyPr>
-          <a:lstStyle/>
-          <a:p>
-            <a:pPr algn="l">
-              <a:spcAft>
-                <a:spcPts val="300"/>
-              </a:spcAft>
-              <a:defRPr sz="3200">
-                <a:solidFill>
-                  <a:srgbClr val="FFFFFF"/>
-                </a:solidFill>
-                <a:latin typeface="Play"/>
-                <a:ea typeface="Play"/>
-                <a:cs typeface="Play"/>
-              </a:defRPr>
-            </a:pPr>
-            <a:r>
-              <a:rPr sz="3200">
-                <a:solidFill>
-                  <a:srgbClr val="FFFFFF"/>
-                </a:solidFill>
-                <a:latin typeface="Play"/>
-                <a:ea typeface="Play"/>
-                <a:cs typeface="Play"/>
-              </a:rPr>
-              <a:t>Нагрузка дизайнеров</a:t>
-            </a:r>
-          </a:p>
-        </p:txBody>
-      </p:sp>
-      <p:graphicFrame>
-        <p:nvGraphicFramePr>
-          <p:cNvPr id="3" name="Table 2"/>
-          <p:cNvGraphicFramePr>
-            <a:graphicFrameLocks noGrp="1"/>
-          </p:cNvGraphicFramePr>
-          <p:nvPr/>
-        </p:nvGraphicFramePr>
-        <p:xfrm>
-          <a:off x="6267602" y="1592290"/>
-          <a:ext cx="5472562" cy="4181322"/>
-        </p:xfrm>
-        <a:graphic>
-          <a:graphicData uri="http://schemas.openxmlformats.org/drawingml/2006/table">
-            <a:tbl>
-              <a:tblPr firstRow="1" bandRow="1">
-                <a:tableStyleId>{5C22544A-7EE6-4342-B048-85BDC9FD1C3A}</a:tableStyleId>
-              </a:tblPr>
-              <a:tblGrid>
-                <a:gridCol w="1824187"/>
-                <a:gridCol w="1824187"/>
-                <a:gridCol w="1824188"/>
-              </a:tblGrid>
-              <a:tr h="2090661">
-                <a:tc>
-                  <a:txBody>
-                    <a:bodyPr/>
-                    <a:lstStyle/>
-                    <a:p>
-                      <a:pPr>
-                        <a:defRPr sz="1300" b="1">
-                          <a:solidFill>
-                            <a:srgbClr val="FFFFFF"/>
-                          </a:solidFill>
-                          <a:latin typeface="Play"/>
-                          <a:ea typeface="Play"/>
-                          <a:cs typeface="Play"/>
-                        </a:defRPr>
-                      </a:pPr>
-                      <a:r>
-                        <a:t>Показатель</a:t>
-                      </a:r>
-                    </a:p>
-                  </a:txBody>
-                  <a:tcPr>
-                    <a:solidFill>
-                      <a:srgbClr val="0077FF"/>
-                    </a:solidFill>
-                  </a:tcPr>
-                </a:tc>
-                <a:tc>
-                  <a:txBody>
-                    <a:bodyPr/>
-                    <a:lstStyle/>
-                    <a:p>
-                      <a:pPr>
-                        <a:defRPr sz="1300" b="1">
-                          <a:solidFill>
-                            <a:srgbClr val="FFFFFF"/>
-                          </a:solidFill>
-                          <a:latin typeface="Play"/>
-                          <a:ea typeface="Play"/>
-                          <a:cs typeface="Play"/>
-                        </a:defRPr>
-                      </a:pPr>
-                      <a:r>
-                        <a:t>Текущая</a:t>
-                      </a:r>
-                    </a:p>
-                  </a:txBody>
-                  <a:tcPr>
-                    <a:solidFill>
-                      <a:srgbClr val="0077FF"/>
-                    </a:solidFill>
-                  </a:tcPr>
-                </a:tc>
-                <a:tc>
-                  <a:txBody>
-                    <a:bodyPr/>
-                    <a:lstStyle/>
-                    <a:p>
-                      <a:pPr>
-                        <a:defRPr sz="1300" b="1">
-                          <a:solidFill>
-                            <a:srgbClr val="FFFFFF"/>
-                          </a:solidFill>
-                          <a:latin typeface="Play"/>
-                          <a:ea typeface="Play"/>
-                          <a:cs typeface="Play"/>
-                        </a:defRPr>
-                      </a:pPr>
-                      <a:r>
-                        <a:t>Пилот</a:t>
-                      </a:r>
-                    </a:p>
-                  </a:txBody>
-                  <a:tcPr>
-                    <a:solidFill>
-                      <a:srgbClr val="0077FF"/>
-                    </a:solidFill>
-                  </a:tcPr>
-                </a:tc>
-              </a:tr>
-              <a:tr h="2090661">
-                <a:tc>
-                  <a:txBody>
-                    <a:bodyPr/>
-                    <a:lstStyle/>
-                    <a:p>
-                      <a:pPr>
-                        <a:defRPr sz="1300" b="0">
-                          <a:solidFill>
-                            <a:srgbClr val="FFFFFF"/>
-                          </a:solidFill>
-                          <a:latin typeface="Play"/>
-                          <a:ea typeface="Play"/>
-                          <a:cs typeface="Play"/>
-                        </a:defRPr>
-                      </a:pPr>
-                      <a:r>
-                        <a:t>Запросов/неделя</a:t>
-                      </a:r>
-                    </a:p>
-                  </a:txBody>
-                  <a:tcPr>
-                    <a:solidFill>
-                      <a:srgbClr val="111111"/>
-                    </a:solidFill>
-                  </a:tcPr>
-                </a:tc>
-                <a:tc>
-                  <a:txBody>
-                    <a:bodyPr/>
-                    <a:lstStyle/>
-                    <a:p>
-                      <a:pPr>
-                        <a:defRPr sz="1300" b="0">
-                          <a:solidFill>
-                            <a:srgbClr val="FFFFFF"/>
-                          </a:solidFill>
-                          <a:latin typeface="Play"/>
-                          <a:ea typeface="Play"/>
-                          <a:cs typeface="Play"/>
-                        </a:defRPr>
-                      </a:pPr>
-                      <a:r>
-                        <a:t>11</a:t>
-                      </a:r>
-                    </a:p>
-                  </a:txBody>
-                  <a:tcPr>
-                    <a:solidFill>
-                      <a:srgbClr val="111111"/>
-                    </a:solidFill>
-                  </a:tcPr>
-                </a:tc>
-                <a:tc>
-                  <a:txBody>
-                    <a:bodyPr/>
-                    <a:lstStyle/>
-                    <a:p>
-                      <a:pPr>
-                        <a:defRPr sz="1300" b="0">
-                          <a:solidFill>
-                            <a:srgbClr val="FFFFFF"/>
-                          </a:solidFill>
-                          <a:latin typeface="Play"/>
-                          <a:ea typeface="Play"/>
-                          <a:cs typeface="Play"/>
-                        </a:defRPr>
-                      </a:pPr>
-                      <a:r>
-                        <a:t>38</a:t>
-                      </a:r>
-                    </a:p>
-                  </a:txBody>
-                  <a:tcPr>
-                    <a:solidFill>
-                      <a:srgbClr val="111111"/>
-                    </a:solidFill>
-                  </a:tcPr>
-                </a:tc>
-              </a:tr>
-            </a:tbl>
-          </a:graphicData>
-        </a:graphic>
-      </p:graphicFrame>
-    </p:spTree>
-  </p:cSld>
-  <p:clrMapOvr>
-    <a:masterClrMapping/>
-  </p:clrMapOvr>
-</p:sld>
-</file>
-
-<file path=ppt/slides/slide37.xml><?xml version="1.0" encoding="utf-8"?>
+<file path=ppt/slides/slide38.xml><?xml version="1.0" encoding="utf-8"?>
 <p:sld xmlns:a="http://schemas.openxmlformats.org/drawingml/2006/main" xmlns:p="http://schemas.openxmlformats.org/presentationml/2006/main" xmlns:r="http://schemas.openxmlformats.org/officeDocument/2006/relationships">
   <p:cSld>
     <p:spTree>
@@ -8092,7 +12250,7 @@
                 <a:ea typeface="Play"/>
                 <a:cs typeface="Play"/>
               </a:rPr>
-              <a:t>Ресурсы и сроки</a:t>
+              <a:t>Показатели после пилота</a:t>
             </a:r>
           </a:p>
         </p:txBody>
@@ -8141,7 +12299,7 @@
                 <a:ea typeface="Play"/>
                 <a:cs typeface="Play"/>
               </a:rPr>
-              <a:t>• 2 vCPU / 2 GB RAM</a:t>
+              <a:t>• Запросы закрыты 38 вместо 11, рутина ушла в сервис</a:t>
             </a:r>
           </a:p>
           <a:p>
@@ -8167,7 +12325,7 @@
                 <a:ea typeface="Play"/>
                 <a:cs typeface="Play"/>
               </a:rPr>
-              <a:t>• 1 400 рублей за 6 недель пилота</a:t>
+              <a:t>• Время до первой версии сократилось с 6 дней до 1</a:t>
             </a:r>
           </a:p>
           <a:p>
@@ -8193,229 +12351,7 @@
                 <a:ea typeface="Play"/>
                 <a:cs typeface="Play"/>
               </a:rPr>
-              <a:t>• 6 недель пилота, 2 команды, 68 презентаций</a:t>
-            </a:r>
-          </a:p>
-        </p:txBody>
-      </p:sp>
-    </p:spTree>
-  </p:cSld>
-  <p:clrMapOvr>
-    <a:masterClrMapping/>
-  </p:clrMapOvr>
-</p:sld>
-</file>
-
-<file path=ppt/slides/slide38.xml><?xml version="1.0" encoding="utf-8"?>
-<p:sld xmlns:a="http://schemas.openxmlformats.org/drawingml/2006/main" xmlns:p="http://schemas.openxmlformats.org/presentationml/2006/main" xmlns:r="http://schemas.openxmlformats.org/officeDocument/2006/relationships">
-  <p:cSld>
-    <p:spTree>
-      <p:nvGrpSpPr>
-        <p:cNvPr id="1" name=""/>
-        <p:cNvGrpSpPr/>
-        <p:nvPr/>
-      </p:nvGrpSpPr>
-      <p:grpSpPr/>
-      <p:pic>
-        <p:nvPicPr>
-          <p:cNvPr id="620" name="Google Shape;620;p28"/>
-          <p:cNvPicPr preferRelativeResize="0"/>
-          <p:nvPr/>
-        </p:nvPicPr>
-        <p:blipFill rotWithShape="1">
-          <a:blip r:embed="rId3">
-            <a:alphaModFix/>
-          </a:blip>
-          <a:srcRect b="0" l="0" r="0" t="0"/>
-          <a:stretch/>
-        </p:blipFill>
-        <p:spPr>
-          <a:xfrm>
-            <a:off x="398723" y="6160516"/>
-            <a:ext cx="1857481" cy="292671"/>
-          </a:xfrm>
-          <a:prstGeom prst="rect">
-            <a:avLst/>
-          </a:prstGeom>
-          <a:noFill/>
-          <a:ln>
-            <a:noFill/>
-          </a:ln>
-        </p:spPr>
-      </p:pic>
-      <p:pic>
-        <p:nvPicPr>
-          <p:cNvPr descr=" " id="621" name="Google Shape;621;p28"/>
-          <p:cNvPicPr preferRelativeResize="0"/>
-          <p:nvPr/>
-        </p:nvPicPr>
-        <p:blipFill rotWithShape="1">
-          <a:blip r:embed="rId4">
-            <a:alphaModFix/>
-          </a:blip>
-          <a:srcRect b="0" l="0" r="0" t="0"/>
-          <a:stretch/>
-        </p:blipFill>
-        <p:spPr>
-          <a:xfrm>
-            <a:off x="11093496" y="6238282"/>
-            <a:ext cx="690517" cy="216000"/>
-          </a:xfrm>
-          <a:prstGeom prst="rect">
-            <a:avLst/>
-          </a:prstGeom>
-          <a:noFill/>
-          <a:ln>
-            <a:noFill/>
-          </a:ln>
-        </p:spPr>
-      </p:pic>
-      <p:sp>
-        <p:nvSpPr>
-          <p:cNvPr id="622" name="title"/>
-          <p:cNvSpPr txBox="1"/>
-          <p:nvPr/>
-        </p:nvSpPr>
-        <p:spPr>
-          <a:xfrm>
-            <a:off x="429280" y="424715"/>
-            <a:ext cx="7827264" cy="822960"/>
-          </a:xfrm>
-          <a:prstGeom prst="rect">
-            <a:avLst/>
-          </a:prstGeom>
-          <a:noFill/>
-        </p:spPr>
-        <p:txBody>
-          <a:bodyPr wrap="square" lIns="76200" rIns="76200" tIns="50800" bIns="50800">
-            <a:spAutoFit/>
-          </a:bodyPr>
-          <a:lstStyle/>
-          <a:p>
-            <a:pPr algn="l">
-              <a:spcAft>
-                <a:spcPts val="300"/>
-              </a:spcAft>
-              <a:defRPr sz="3200">
-                <a:solidFill>
-                  <a:srgbClr val="FFFFFF"/>
-                </a:solidFill>
-                <a:latin typeface="Play"/>
-                <a:ea typeface="Play"/>
-                <a:cs typeface="Play"/>
-              </a:defRPr>
-            </a:pPr>
-            <a:r>
-              <a:rPr sz="3200">
-                <a:solidFill>
-                  <a:srgbClr val="FFFFFF"/>
-                </a:solidFill>
-                <a:latin typeface="Play"/>
-                <a:ea typeface="Play"/>
-                <a:cs typeface="Play"/>
-              </a:rPr>
-              <a:t>Что мы просим решить</a:t>
-            </a:r>
-          </a:p>
-        </p:txBody>
-      </p:sp>
-      <p:sp>
-        <p:nvSpPr>
-          <p:cNvPr id="623" name="body"/>
-          <p:cNvSpPr txBox="1"/>
-          <p:nvPr/>
-        </p:nvSpPr>
-        <p:spPr>
-          <a:xfrm>
-            <a:off x="429280" y="2310261"/>
-            <a:ext cx="11310884" cy="1488440"/>
-          </a:xfrm>
-          <a:prstGeom prst="rect">
-            <a:avLst/>
-          </a:prstGeom>
-          <a:noFill/>
-        </p:spPr>
-        <p:txBody>
-          <a:bodyPr wrap="square" lIns="76200" rIns="76200" tIns="50800" bIns="50800">
-            <a:spAutoFit/>
-          </a:bodyPr>
-          <a:lstStyle/>
-          <a:p>
-            <a:pPr algn="l">
-              <a:spcAft>
-                <a:spcPts val="300"/>
-              </a:spcAft>
-              <a:defRPr sz="2800">
-                <a:solidFill>
-                  <a:srgbClr val="FFFFFF"/>
-                </a:solidFill>
-                <a:latin typeface="Play"/>
-                <a:ea typeface="Play"/>
-                <a:cs typeface="Play"/>
-              </a:defRPr>
-            </a:pPr>
-            <a:r>
-              <a:rPr sz="2800">
-                <a:solidFill>
-                  <a:srgbClr val="FFFFFF"/>
-                </a:solidFill>
-                <a:latin typeface="Play"/>
-                <a:ea typeface="Play"/>
-                <a:cs typeface="Play"/>
-              </a:rPr>
-              <a:t>• Запуск сервиса на всю компанию</a:t>
-            </a:r>
-          </a:p>
-          <a:p>
-            <a:pPr algn="l">
-              <a:spcAft>
-                <a:spcPts val="300"/>
-              </a:spcAft>
-              <a:defRPr sz="2800">
-                <a:solidFill>
-                  <a:srgbClr val="FFFFFF"/>
-                </a:solidFill>
-                <a:latin typeface="Play"/>
-                <a:ea typeface="Play"/>
-                <a:cs typeface="Play"/>
-              </a:defRPr>
-            </a:pPr>
-            <a:r>
-              <a:rPr sz="2800">
-                <a:solidFill>
-                  <a:srgbClr val="FFFFFF"/>
-                </a:solidFill>
-                <a:latin typeface="Play"/>
-                <a:ea typeface="Play"/>
-                <a:cs typeface="Play"/>
-              </a:rPr>
-              <a:t>• Интеграция с корпоративным хранилищем</a:t>
-            </a:r>
-          </a:p>
-          <a:p>
-            <a:pPr algn="l">
-              <a:spcAft>
-                <a:spcPts val="300"/>
-              </a:spcAft>
-              <a:defRPr sz="2800">
-                <a:solidFill>
-                  <a:srgbClr val="FFFFFF"/>
-                </a:solidFill>
-                <a:latin typeface="Play"/>
-                <a:ea typeface="Play"/>
-                <a:cs typeface="Play"/>
-              </a:defRPr>
-            </a:pPr>
-            <a:r>
-              <a:rPr sz="2800">
-                <a:solidFill>
-                  <a:srgbClr val="FFFFFF"/>
-                </a:solidFill>
-                <a:latin typeface="Play"/>
-                <a:ea typeface="Play"/>
-                <a:cs typeface="Play"/>
-              </a:rPr>
-              <a:t>• Поддержка 20 одновременных задач</a:t>
+              <a:t>• Сервис работает на 2 vCPU / 2 ГБ RAM</a:t>
             </a:r>
           </a:p>
         </p:txBody>
@@ -8440,73 +12376,129 @@
       <p:grpSpPr/>
       <p:sp>
         <p:nvSpPr>
-          <p:cNvPr id="2" name="title"/>
-          <p:cNvSpPr txBox="1"/>
+          <p:cNvPr id="881" name="Google Shape;881;p45"/>
+          <p:cNvSpPr/>
           <p:nvPr/>
         </p:nvSpPr>
         <p:spPr>
           <a:xfrm>
-            <a:off x="429280" y="424715"/>
-            <a:ext cx="7827264" cy="822960"/>
+            <a:off x="429254" y="4567907"/>
+            <a:ext cx="834282" cy="834282"/>
           </a:xfrm>
-          <a:prstGeom prst="rect">
+          <a:prstGeom prst="ellipse">
             <a:avLst/>
           </a:prstGeom>
-          <a:noFill/>
+          <a:solidFill>
+            <a:srgbClr val="5A6775"/>
+          </a:solidFill>
+          <a:ln>
+            <a:noFill/>
+          </a:ln>
         </p:spPr>
         <p:txBody>
-          <a:bodyPr wrap="square" lIns="76200" rIns="76200" tIns="50800" bIns="50800">
-            <a:spAutoFit/>
+          <a:bodyPr anchorCtr="0" anchor="ctr" bIns="45700" lIns="91425" spcFirstLastPara="1" rIns="91425" wrap="square" tIns="45700">
+            <a:noAutofit/>
           </a:bodyPr>
           <a:lstStyle/>
           <a:p>
-            <a:pPr algn="l">
-              <a:spcAft>
-                <a:spcPts val="300"/>
-              </a:spcAft>
-              <a:defRPr sz="3200">
-                <a:solidFill>
-                  <a:srgbClr val="FFFFFF"/>
-                </a:solidFill>
-                <a:latin typeface="Play"/>
-                <a:ea typeface="Play"/>
-                <a:cs typeface="Play"/>
-              </a:defRPr>
+            <a:pPr indent="0" lvl="0" marL="0" marR="0" rtl="0" algn="ctr">
+              <a:spcBef>
+                <a:spcPts val="0"/>
+              </a:spcBef>
+              <a:spcAft>
+                <a:spcPts val="0"/>
+              </a:spcAft>
+              <a:buNone/>
             </a:pPr>
             <a:r>
-              <a:rPr sz="3200">
-                <a:solidFill>
-                  <a:srgbClr val="FFFFFF"/>
-                </a:solidFill>
-                <a:latin typeface="Play"/>
-                <a:ea typeface="Play"/>
-                <a:cs typeface="Play"/>
-              </a:rPr>
-              <a:t>План запуска</a:t>
+              <a:t/>
             </a:r>
+            <a:endParaRPr sz="1800">
+              <a:solidFill>
+                <a:schemeClr val="lt1"/>
+              </a:solidFill>
+              <a:latin typeface="Arial"/>
+              <a:ea typeface="Arial"/>
+              <a:cs typeface="Arial"/>
+              <a:sym typeface="Arial"/>
+            </a:endParaRPr>
           </a:p>
         </p:txBody>
       </p:sp>
       <p:sp>
         <p:nvSpPr>
-          <p:cNvPr id="3" name="Rectangle 2"/>
+          <p:cNvPr id="883" name="Google Shape;883;p45"/>
           <p:cNvSpPr/>
           <p:nvPr/>
         </p:nvSpPr>
         <p:spPr>
           <a:xfrm>
-            <a:off x="6267602" y="3339292"/>
-            <a:ext cx="5472562" cy="120438"/>
+            <a:off x="3499026" y="4567907"/>
+            <a:ext cx="834282" cy="834282"/>
           </a:xfrm>
-          <a:prstGeom prst="rect">
+          <a:prstGeom prst="ellipse">
             <a:avLst/>
           </a:prstGeom>
           <a:solidFill>
-            <a:srgbClr val="0077FF"/>
+            <a:srgbClr val="5A6775"/>
           </a:solidFill>
           <a:ln>
             <a:noFill/>
           </a:ln>
+        </p:spPr>
+        <p:txBody>
+          <a:bodyPr anchorCtr="0" anchor="ctr" bIns="45700" lIns="91425" spcFirstLastPara="1" rIns="91425" wrap="square" tIns="45700">
+            <a:noAutofit/>
+          </a:bodyPr>
+          <a:lstStyle/>
+          <a:p>
+            <a:pPr indent="0" lvl="0" marL="0" marR="0" rtl="0" algn="ctr">
+              <a:spcBef>
+                <a:spcPts val="0"/>
+              </a:spcBef>
+              <a:spcAft>
+                <a:spcPts val="0"/>
+              </a:spcAft>
+              <a:buNone/>
+            </a:pPr>
+            <a:r>
+              <a:t/>
+            </a:r>
+            <a:endParaRPr sz="1800">
+              <a:solidFill>
+                <a:schemeClr val="lt1"/>
+              </a:solidFill>
+              <a:latin typeface="Arial"/>
+              <a:ea typeface="Arial"/>
+              <a:cs typeface="Arial"/>
+              <a:sym typeface="Arial"/>
+            </a:endParaRPr>
+          </a:p>
+        </p:txBody>
+      </p:sp>
+      <p:sp>
+        <p:nvSpPr>
+          <p:cNvPr id="884" name="Rounded Rectangle 883"/>
+          <p:cNvSpPr/>
+          <p:nvPr/>
+        </p:nvSpPr>
+        <p:spPr>
+          <a:xfrm>
+            <a:off x="300817" y="297715"/>
+            <a:ext cx="11566347" cy="3377993"/>
+          </a:xfrm>
+          <a:prstGeom prst="roundRect">
+            <a:avLst/>
+          </a:prstGeom>
+          <a:solidFill>
+            <a:srgbClr val="111111">
+              <a:alpha val="85000"/>
+            </a:srgbClr>
+          </a:solidFill>
+          <a:ln>
+            <a:noFill/>
+          </a:ln>
+          <a:effectLst/>
         </p:spPr>
         <p:style>
           <a:lnRef idx="1">
@@ -8532,57 +12524,14 @@
       </p:sp>
       <p:sp>
         <p:nvSpPr>
-          <p:cNvPr id="4" name="Oval 3"/>
-          <p:cNvSpPr/>
-          <p:nvPr/>
-        </p:nvSpPr>
-        <p:spPr>
-          <a:xfrm>
-            <a:off x="6906067" y="3125883"/>
-            <a:ext cx="547256" cy="547256"/>
-          </a:xfrm>
-          <a:prstGeom prst="ellipse">
-            <a:avLst/>
-          </a:prstGeom>
-          <a:solidFill>
-            <a:srgbClr val="0077FF"/>
-          </a:solidFill>
-          <a:ln>
-            <a:noFill/>
-          </a:ln>
-        </p:spPr>
-        <p:style>
-          <a:lnRef idx="1">
-            <a:schemeClr val="accent1"/>
-          </a:lnRef>
-          <a:fillRef idx="3">
-            <a:schemeClr val="accent1"/>
-          </a:fillRef>
-          <a:effectRef idx="2">
-            <a:schemeClr val="accent1"/>
-          </a:effectRef>
-          <a:fontRef idx="minor">
-            <a:schemeClr val="lt1"/>
-          </a:fontRef>
-        </p:style>
-        <p:txBody>
-          <a:bodyPr rtlCol="0" anchor="ctr"/>
-          <a:lstStyle/>
-          <a:p>
-            <a:pPr algn="ctr"/>
-          </a:p>
-        </p:txBody>
-      </p:sp>
-      <p:sp>
-        <p:nvSpPr>
-          <p:cNvPr id="5" name="TextBox 4"/>
+          <p:cNvPr id="885" name="title"/>
           <p:cNvSpPr txBox="1"/>
           <p:nvPr/>
         </p:nvSpPr>
         <p:spPr>
           <a:xfrm>
-            <a:off x="6267602" y="1492575"/>
-            <a:ext cx="2736281" cy="1525549"/>
+            <a:off x="427817" y="424715"/>
+            <a:ext cx="11312347" cy="1018540"/>
           </a:xfrm>
           <a:prstGeom prst="rect">
             <a:avLst/>
@@ -8590,13 +12539,16 @@
           <a:noFill/>
         </p:spPr>
         <p:txBody>
-          <a:bodyPr wrap="square" lIns="12700" rIns="12700" tIns="12700" bIns="12700">
+          <a:bodyPr wrap="square" lIns="76200" rIns="76200" tIns="50800" bIns="50800">
             <a:spAutoFit/>
           </a:bodyPr>
           <a:lstStyle/>
           <a:p>
-            <a:pPr algn="ctr">
-              <a:defRPr sz="1400" b="0">
+            <a:pPr algn="l">
+              <a:spcAft>
+                <a:spcPts val="300"/>
+              </a:spcAft>
+              <a:defRPr sz="5400">
                 <a:solidFill>
                   <a:srgbClr val="FFFFFF"/>
                 </a:solidFill>
@@ -8606,7 +12558,7 @@
               </a:defRPr>
             </a:pPr>
             <a:r>
-              <a:rPr sz="1400" b="0">
+              <a:rPr sz="5400">
                 <a:solidFill>
                   <a:srgbClr val="FFFFFF"/>
                 </a:solidFill>
@@ -8614,64 +12566,21 @@
                 <a:ea typeface="Play"/>
                 <a:cs typeface="Play"/>
               </a:rPr>
-              <a:t>Третий квартал 2026: подключение 4 команд</a:t>
+              <a:t>Что мы просим решить</a:t>
             </a:r>
           </a:p>
         </p:txBody>
       </p:sp>
       <p:sp>
         <p:nvSpPr>
-          <p:cNvPr id="6" name="Oval 5"/>
-          <p:cNvSpPr/>
-          <p:nvPr/>
-        </p:nvSpPr>
-        <p:spPr>
-          <a:xfrm>
-            <a:off x="8730254" y="3125883"/>
-            <a:ext cx="547256" cy="547256"/>
-          </a:xfrm>
-          <a:prstGeom prst="ellipse">
-            <a:avLst/>
-          </a:prstGeom>
-          <a:solidFill>
-            <a:srgbClr val="0077FF"/>
-          </a:solidFill>
-          <a:ln>
-            <a:noFill/>
-          </a:ln>
-        </p:spPr>
-        <p:style>
-          <a:lnRef idx="1">
-            <a:schemeClr val="accent1"/>
-          </a:lnRef>
-          <a:fillRef idx="3">
-            <a:schemeClr val="accent1"/>
-          </a:fillRef>
-          <a:effectRef idx="2">
-            <a:schemeClr val="accent1"/>
-          </a:effectRef>
-          <a:fontRef idx="minor">
-            <a:schemeClr val="lt1"/>
-          </a:fontRef>
-        </p:style>
-        <p:txBody>
-          <a:bodyPr rtlCol="0" anchor="ctr"/>
-          <a:lstStyle/>
-          <a:p>
-            <a:pPr algn="ctr"/>
-          </a:p>
-        </p:txBody>
-      </p:sp>
-      <p:sp>
-        <p:nvSpPr>
-          <p:cNvPr id="7" name="TextBox 6"/>
+          <p:cNvPr id="886" name="body"/>
           <p:cNvSpPr txBox="1"/>
           <p:nvPr/>
         </p:nvSpPr>
         <p:spPr>
           <a:xfrm>
-            <a:off x="7635742" y="3886549"/>
-            <a:ext cx="2736281" cy="1525549"/>
+            <a:off x="427817" y="2258389"/>
+            <a:ext cx="11312347" cy="1290320"/>
           </a:xfrm>
           <a:prstGeom prst="rect">
             <a:avLst/>
@@ -8679,13 +12588,16 @@
           <a:noFill/>
         </p:spPr>
         <p:txBody>
-          <a:bodyPr wrap="square" lIns="12700" rIns="12700" tIns="12700" bIns="12700">
+          <a:bodyPr wrap="square" lIns="76200" rIns="76200" tIns="50800" bIns="50800">
             <a:spAutoFit/>
           </a:bodyPr>
           <a:lstStyle/>
           <a:p>
-            <a:pPr algn="ctr">
-              <a:defRPr sz="1400" b="0">
+            <a:pPr algn="l">
+              <a:spcAft>
+                <a:spcPts val="300"/>
+              </a:spcAft>
+              <a:defRPr sz="2400" b="1">
                 <a:solidFill>
                   <a:srgbClr val="FFFFFF"/>
                 </a:solidFill>
@@ -8695,7 +12607,7 @@
               </a:defRPr>
             </a:pPr>
             <a:r>
-              <a:rPr sz="1400" b="0">
+              <a:rPr sz="2400" b="1">
                 <a:solidFill>
                   <a:srgbClr val="FFFFFF"/>
                 </a:solidFill>
@@ -8703,78 +12615,15 @@
                 <a:ea typeface="Play"/>
                 <a:cs typeface="Play"/>
               </a:rPr>
-              <a:t>Четвёртый квартал 2026: доступ для всей компании</a:t>
+              <a:t>• Попросим решение о запуске на всю компанию</a:t>
             </a:r>
           </a:p>
-        </p:txBody>
-      </p:sp>
-      <p:sp>
-        <p:nvSpPr>
-          <p:cNvPr id="8" name="Oval 7"/>
-          <p:cNvSpPr/>
-          <p:nvPr/>
-        </p:nvSpPr>
-        <p:spPr>
-          <a:xfrm>
-            <a:off x="10554442" y="3125883"/>
-            <a:ext cx="547256" cy="547256"/>
-          </a:xfrm>
-          <a:prstGeom prst="ellipse">
-            <a:avLst/>
-          </a:prstGeom>
-          <a:solidFill>
-            <a:srgbClr val="0077FF"/>
-          </a:solidFill>
-          <a:ln>
-            <a:noFill/>
-          </a:ln>
-        </p:spPr>
-        <p:style>
-          <a:lnRef idx="1">
-            <a:schemeClr val="accent1"/>
-          </a:lnRef>
-          <a:fillRef idx="3">
-            <a:schemeClr val="accent1"/>
-          </a:fillRef>
-          <a:effectRef idx="2">
-            <a:schemeClr val="accent1"/>
-          </a:effectRef>
-          <a:fontRef idx="minor">
-            <a:schemeClr val="lt1"/>
-          </a:fontRef>
-        </p:style>
-        <p:txBody>
-          <a:bodyPr rtlCol="0" anchor="ctr"/>
-          <a:lstStyle/>
           <a:p>
-            <a:pPr algn="ctr"/>
-          </a:p>
-        </p:txBody>
-      </p:sp>
-      <p:sp>
-        <p:nvSpPr>
-          <p:cNvPr id="9" name="TextBox 8"/>
-          <p:cNvSpPr txBox="1"/>
-          <p:nvPr/>
-        </p:nvSpPr>
-        <p:spPr>
-          <a:xfrm>
-            <a:off x="9003883" y="1492575"/>
-            <a:ext cx="2736281" cy="1525549"/>
-          </a:xfrm>
-          <a:prstGeom prst="rect">
-            <a:avLst/>
-          </a:prstGeom>
-          <a:noFill/>
-        </p:spPr>
-        <p:txBody>
-          <a:bodyPr wrap="square" lIns="12700" rIns="12700" tIns="12700" bIns="12700">
-            <a:spAutoFit/>
-          </a:bodyPr>
-          <a:lstStyle/>
-          <a:p>
-            <a:pPr algn="ctr">
-              <a:defRPr sz="1400" b="0">
+            <a:pPr algn="l">
+              <a:spcAft>
+                <a:spcPts val="300"/>
+              </a:spcAft>
+              <a:defRPr sz="2400" b="1">
                 <a:solidFill>
                   <a:srgbClr val="FFFFFF"/>
                 </a:solidFill>
@@ -8784,7 +12633,7 @@
               </a:defRPr>
             </a:pPr>
             <a:r>
-              <a:rPr sz="1400" b="0">
+              <a:rPr sz="2400" b="1">
                 <a:solidFill>
                   <a:srgbClr val="FFFFFF"/>
                 </a:solidFill>
@@ -8792,7 +12641,33 @@
                 <a:ea typeface="Play"/>
                 <a:cs typeface="Play"/>
               </a:rPr>
-              <a:t>Первый квартал 2027: генерация иллюстраций</a:t>
+              <a:t>• Ожидаем одобрения руководства</a:t>
+            </a:r>
+          </a:p>
+          <a:p>
+            <a:pPr algn="l">
+              <a:spcAft>
+                <a:spcPts val="300"/>
+              </a:spcAft>
+              <a:defRPr sz="2400" b="1">
+                <a:solidFill>
+                  <a:srgbClr val="FFFFFF"/>
+                </a:solidFill>
+                <a:latin typeface="Play"/>
+                <a:ea typeface="Play"/>
+                <a:cs typeface="Play"/>
+              </a:defRPr>
+            </a:pPr>
+            <a:r>
+              <a:rPr sz="2400" b="1">
+                <a:solidFill>
+                  <a:srgbClr val="FFFFFF"/>
+                </a:solidFill>
+                <a:latin typeface="Play"/>
+                <a:ea typeface="Play"/>
+                <a:cs typeface="Play"/>
+              </a:rPr>
+              <a:t>• Готовы к масштабированию</a:t>
             </a:r>
           </a:p>
         </p:txBody>

--- a/samples/VK_WorkSpace_Клиентская_конференция_Шабл__split.pptx
+++ b/samples/VK_WorkSpace_Клиентская_конференция_Шабл__split.pptx
@@ -304,7 +304,7 @@
               <c:strCache>
                 <c:ptCount val="1"/>
                 <c:pt idx="0">
-                  <c:v>Текущее</c:v>
+                  <c:v>Время</c:v>
                 </c:pt>
               </c:strCache>
             </c:strRef>
@@ -321,35 +321,29 @@
           </c:spPr>
           <c:cat>
             <c:strRef>
-              <c:f>Sheet1!$A$2:$A$4</c:f>
+              <c:f>Sheet1!$A$2:$A$3</c:f>
               <c:strCache>
-                <c:ptCount val="3"/>
+                <c:ptCount val="2"/>
                 <c:pt idx="0">
                   <c:v>Сборка</c:v>
                 </c:pt>
                 <c:pt idx="1">
                   <c:v>Правки</c:v>
                 </c:pt>
-                <c:pt idx="2">
-                  <c:v>Ожидание</c:v>
-                </c:pt>
               </c:strCache>
             </c:strRef>
           </c:cat>
           <c:val>
             <c:numRef>
-              <c:f>Sheet1!$B$2:$B$4</c:f>
+              <c:f>Sheet1!$B$2:$B$3</c:f>
               <c:numCache>
                 <c:formatCode>General</c:formatCode>
-                <c:ptCount val="3"/>
+                <c:ptCount val="2"/>
                 <c:pt idx="0">
                   <c:v>186.0</c:v>
                 </c:pt>
                 <c:pt idx="1">
                   <c:v>74.0</c:v>
-                </c:pt>
-                <c:pt idx="2">
-                  <c:v>6.0</c:v>
                 </c:pt>
               </c:numCache>
             </c:numRef>
@@ -450,7 +444,7 @@
                   </a:defRPr>
                 </a:pPr>
                 <a:r>
-                  <a:t>Текущее, мин</a:t>
+                  <a:t>Время, мин</a:t>
                 </a:r>
               </a:p>
             </c:rich>
@@ -524,7 +518,7 @@
               <c:strCache>
                 <c:ptCount val="1"/>
                 <c:pt idx="0">
-                  <c:v>До</c:v>
+                  <c:v>Текущее</c:v>
                 </c:pt>
               </c:strCache>
             </c:strRef>
@@ -541,41 +535,29 @@
           </c:spPr>
           <c:cat>
             <c:strRef>
-              <c:f>Sheet1!$A$2:$A$5</c:f>
+              <c:f>Sheet1!$A$2:$A$3</c:f>
               <c:strCache>
-                <c:ptCount val="4"/>
+                <c:ptCount val="2"/>
                 <c:pt idx="0">
-                  <c:v>Время сборки</c:v>
+                  <c:v>Сборка</c:v>
                 </c:pt>
                 <c:pt idx="1">
-                  <c:v>Время до первой версии</c:v>
-                </c:pt>
-                <c:pt idx="2">
-                  <c:v>Нарушения стиля</c:v>
-                </c:pt>
-                <c:pt idx="3">
-                  <c:v>Запросы закрыты</c:v>
+                  <c:v>Первая версия</c:v>
                 </c:pt>
               </c:strCache>
             </c:strRef>
           </c:cat>
           <c:val>
             <c:numRef>
-              <c:f>Sheet1!$B$2:$B$5</c:f>
+              <c:f>Sheet1!$B$2:$B$3</c:f>
               <c:numCache>
                 <c:formatCode>General</c:formatCode>
-                <c:ptCount val="4"/>
+                <c:ptCount val="2"/>
                 <c:pt idx="0">
                   <c:v>186.0</c:v>
                 </c:pt>
                 <c:pt idx="1">
                   <c:v>6.0</c:v>
-                </c:pt>
-                <c:pt idx="2">
-                  <c:v>19.0</c:v>
-                </c:pt>
-                <c:pt idx="3">
-                  <c:v>11.0</c:v>
                 </c:pt>
               </c:numCache>
             </c:numRef>
@@ -590,7 +572,7 @@
               <c:strCache>
                 <c:ptCount val="1"/>
                 <c:pt idx="0">
-                  <c:v>После</c:v>
+                  <c:v>Пилот</c:v>
                 </c:pt>
               </c:strCache>
             </c:strRef>
@@ -607,48 +589,36 @@
           </c:spPr>
           <c:cat>
             <c:strRef>
-              <c:f>Sheet1!$A$2:$A$5</c:f>
+              <c:f>Sheet1!$A$2:$A$3</c:f>
               <c:strCache>
-                <c:ptCount val="4"/>
+                <c:ptCount val="2"/>
                 <c:pt idx="0">
-                  <c:v>Время сборки</c:v>
+                  <c:v>Сборка</c:v>
                 </c:pt>
                 <c:pt idx="1">
-                  <c:v>Время до первой версии</c:v>
-                </c:pt>
-                <c:pt idx="2">
-                  <c:v>Нарушения стиля</c:v>
-                </c:pt>
-                <c:pt idx="3">
-                  <c:v>Запросы закрыты</c:v>
+                  <c:v>Первая версия</c:v>
                 </c:pt>
               </c:strCache>
             </c:strRef>
           </c:cat>
           <c:val>
             <c:numRef>
-              <c:f>Sheet1!$C$2:$C$5</c:f>
+              <c:f>Sheet1!$C$2:$C$3</c:f>
               <c:numCache>
                 <c:formatCode>General</c:formatCode>
-                <c:ptCount val="4"/>
+                <c:ptCount val="2"/>
                 <c:pt idx="0">
                   <c:v>4.0</c:v>
                 </c:pt>
                 <c:pt idx="1">
                   <c:v>1.0</c:v>
                 </c:pt>
-                <c:pt idx="2">
-                  <c:v>2.0</c:v>
-                </c:pt>
-                <c:pt idx="3">
-                  <c:v>38.0</c:v>
-                </c:pt>
               </c:numCache>
             </c:numRef>
           </c:val>
         </c:ser>
         <c:dLbls>
-          <c:numFmt formatCode="0" sourceLinked="0"/>
+          <c:numFmt formatCode="0&quot; мин&quot;" sourceLinked="0"/>
           <c:txPr>
             <a:bodyPr wrap="none"/>
             <a:lstStyle/>
@@ -725,6 +695,31 @@
             </a:ln>
           </c:spPr>
         </c:majorGridlines>
+        <c:title>
+          <c:tx>
+            <c:rich>
+              <a:bodyPr rot="0" vert="horz"/>
+              <a:lstStyle/>
+              <a:p>
+                <a:pPr>
+                  <a:defRPr sz="1100" b="0">
+                    <a:solidFill>
+                      <a:srgbClr val="FFFFFF"/>
+                    </a:solidFill>
+                    <a:latin typeface="Play"/>
+                    <a:ea typeface="Play"/>
+                    <a:cs typeface="Play"/>
+                  </a:defRPr>
+                </a:pPr>
+                <a:r>
+                  <a:t>мин</a:t>
+                </a:r>
+              </a:p>
+            </c:rich>
+          </c:tx>
+          <c:layout/>
+          <c:overlay val="0"/>
+        </c:title>
         <c:majorTickMark val="out"/>
         <c:minorTickMark val="none"/>
         <c:tickLblPos val="nextTo"/>
@@ -752,6 +747,220 @@
       <c:legendPos val="b"/>
       <c:overlay val="0"/>
     </c:legend>
+    <c:dispBlanksAs val="gap"/>
+  </c:chart>
+  <c:txPr>
+    <a:bodyPr/>
+    <a:lstStyle/>
+    <a:p>
+      <a:pPr>
+        <a:defRPr sz="1200" b="0">
+          <a:solidFill>
+            <a:srgbClr val="FFFFFF"/>
+          </a:solidFill>
+          <a:latin typeface="Play"/>
+          <a:ea typeface="Play"/>
+          <a:cs typeface="Play"/>
+        </a:defRPr>
+      </a:pPr>
+      <a:endParaRPr lang="en-US"/>
+    </a:p>
+  </c:txPr>
+  <c:externalData r:id="rId1">
+    <c:autoUpdate val="0"/>
+  </c:externalData>
+</c:chartSpace>
+</file>
+
+<file path=ppt/charts/chart3.xml><?xml version="1.0" encoding="utf-8"?>
+<c:chartSpace xmlns:c="http://schemas.openxmlformats.org/drawingml/2006/chart" xmlns:a="http://schemas.openxmlformats.org/drawingml/2006/main" xmlns:r="http://schemas.openxmlformats.org/officeDocument/2006/relationships">
+  <c:date1904 val="0"/>
+  <c:chart>
+    <c:autoTitleDeleted val="1"/>
+    <c:plotArea>
+      <c:barChart>
+        <c:barDir val="col"/>
+        <c:grouping val="clustered"/>
+        <c:ser>
+          <c:idx val="0"/>
+          <c:order val="0"/>
+          <c:tx>
+            <c:strRef>
+              <c:f>Sheet1!$B$1</c:f>
+              <c:strCache>
+                <c:ptCount val="1"/>
+                <c:pt idx="0">
+                  <c:v>Запросы</c:v>
+                </c:pt>
+              </c:strCache>
+            </c:strRef>
+          </c:tx>
+          <c:spPr>
+            <a:solidFill>
+              <a:srgbClr val="0077FF"/>
+            </a:solidFill>
+            <a:ln>
+              <a:solidFill>
+                <a:srgbClr val="0077FF"/>
+              </a:solidFill>
+            </a:ln>
+          </c:spPr>
+          <c:cat>
+            <c:strRef>
+              <c:f>Sheet1!$A$2:$A$3</c:f>
+              <c:strCache>
+                <c:ptCount val="2"/>
+                <c:pt idx="0">
+                  <c:v>Текущая</c:v>
+                </c:pt>
+                <c:pt idx="1">
+                  <c:v>Пилот</c:v>
+                </c:pt>
+              </c:strCache>
+            </c:strRef>
+          </c:cat>
+          <c:val>
+            <c:numRef>
+              <c:f>Sheet1!$B$2:$B$3</c:f>
+              <c:numCache>
+                <c:formatCode>General</c:formatCode>
+                <c:ptCount val="2"/>
+                <c:pt idx="0">
+                  <c:v>11.0</c:v>
+                </c:pt>
+                <c:pt idx="1">
+                  <c:v>38.0</c:v>
+                </c:pt>
+              </c:numCache>
+            </c:numRef>
+          </c:val>
+        </c:ser>
+        <c:dLbls>
+          <c:numFmt formatCode="0&quot; запросов&quot;" sourceLinked="0"/>
+          <c:txPr>
+            <a:bodyPr wrap="none"/>
+            <a:lstStyle/>
+            <a:p>
+              <a:pPr>
+                <a:defRPr sz="1100" b="0">
+                  <a:solidFill>
+                    <a:srgbClr val="FFFFFF"/>
+                  </a:solidFill>
+                  <a:latin typeface="Play"/>
+                  <a:ea typeface="Play"/>
+                  <a:cs typeface="Play"/>
+                </a:defRPr>
+              </a:pPr>
+            </a:p>
+          </c:txPr>
+          <c:dLblPos val="outEnd"/>
+          <c:showLegendKey val="0"/>
+          <c:showVal val="1"/>
+          <c:showCatName val="0"/>
+          <c:showSerName val="0"/>
+          <c:showPercent val="0"/>
+          <c:showBubbleSize val="0"/>
+          <c:showLeaderLines val="1"/>
+        </c:dLbls>
+        <c:gapWidth val="60"/>
+        <c:axId val="-2068027336"/>
+        <c:axId val="-2113994440"/>
+      </c:barChart>
+      <c:catAx>
+        <c:axId val="-2068027336"/>
+        <c:scaling>
+          <c:orientation val="minMax"/>
+        </c:scaling>
+        <c:delete val="0"/>
+        <c:axPos val="b"/>
+        <c:majorTickMark val="out"/>
+        <c:minorTickMark val="none"/>
+        <c:tickLblPos val="nextTo"/>
+        <c:txPr>
+          <a:bodyPr/>
+          <a:lstStyle/>
+          <a:p>
+            <a:pPr>
+              <a:defRPr sz="1100" b="0">
+                <a:solidFill>
+                  <a:srgbClr val="FFFFFF"/>
+                </a:solidFill>
+                <a:latin typeface="Play"/>
+                <a:ea typeface="Play"/>
+                <a:cs typeface="Play"/>
+              </a:defRPr>
+            </a:pPr>
+          </a:p>
+        </c:txPr>
+        <c:crossAx val="-2113994440"/>
+        <c:crosses val="autoZero"/>
+        <c:auto val="1"/>
+        <c:lblAlgn val="ctr"/>
+        <c:lblOffset val="100"/>
+        <c:noMultiLvlLbl val="0"/>
+      </c:catAx>
+      <c:valAx>
+        <c:axId val="-2113994440"/>
+        <c:scaling/>
+        <c:delete val="0"/>
+        <c:axPos val="l"/>
+        <c:majorGridlines>
+          <c:spPr>
+            <a:ln w="9525">
+              <a:solidFill>
+                <a:srgbClr val="3C3C3C"/>
+              </a:solidFill>
+            </a:ln>
+          </c:spPr>
+        </c:majorGridlines>
+        <c:title>
+          <c:tx>
+            <c:rich>
+              <a:bodyPr rot="0" vert="horz"/>
+              <a:lstStyle/>
+              <a:p>
+                <a:pPr>
+                  <a:defRPr sz="1100" b="0">
+                    <a:solidFill>
+                      <a:srgbClr val="FFFFFF"/>
+                    </a:solidFill>
+                    <a:latin typeface="Play"/>
+                    <a:ea typeface="Play"/>
+                    <a:cs typeface="Play"/>
+                  </a:defRPr>
+                </a:pPr>
+                <a:r>
+                  <a:t>Запросы, запросов</a:t>
+                </a:r>
+              </a:p>
+            </c:rich>
+          </c:tx>
+          <c:layout/>
+          <c:overlay val="0"/>
+        </c:title>
+        <c:majorTickMark val="out"/>
+        <c:minorTickMark val="none"/>
+        <c:tickLblPos val="nextTo"/>
+        <c:txPr>
+          <a:bodyPr/>
+          <a:lstStyle/>
+          <a:p>
+            <a:pPr>
+              <a:defRPr sz="1100" b="0">
+                <a:solidFill>
+                  <a:srgbClr val="FFFFFF"/>
+                </a:solidFill>
+                <a:latin typeface="Play"/>
+                <a:ea typeface="Play"/>
+                <a:cs typeface="Play"/>
+              </a:defRPr>
+            </a:pPr>
+          </a:p>
+        </c:txPr>
+        <c:crossAx val="-2068027336"/>
+        <c:crosses val="autoZero"/>
+      </c:valAx>
+    </c:plotArea>
     <c:dispBlanksAs val="gap"/>
   </c:chart>
   <c:txPr>
@@ -6990,799 +7199,6 @@
 </p:sldLayout>
 </file>
 
-<file path=ppt/slideLayouts/slideLayout9.xml><?xml version="1.0" encoding="utf-8"?>
-<p:sldLayout xmlns:a="http://schemas.openxmlformats.org/drawingml/2006/main" xmlns:r="http://schemas.openxmlformats.org/officeDocument/2006/relationships" xmlns:mc="http://schemas.openxmlformats.org/markup-compatibility/2006" xmlns:mv="urn:schemas-microsoft-com:mac:vml" xmlns:p="http://schemas.openxmlformats.org/presentationml/2006/main" xmlns:c="http://schemas.openxmlformats.org/drawingml/2006/chart" xmlns:dgm="http://schemas.openxmlformats.org/drawingml/2006/diagram" xmlns:o="urn:schemas-microsoft-com:office:office" xmlns:v="urn:schemas-microsoft-com:vml" xmlns:pvml="urn:schemas-microsoft-com:office:powerpoint" xmlns:com="http://schemas.openxmlformats.org/drawingml/2006/compatibility" xmlns:p14="http://schemas.microsoft.com/office/powerpoint/2010/main" xmlns:p15="http://schemas.microsoft.com/office/powerpoint/2012/main" xmlns:ahyp="http://schemas.microsoft.com/office/drawing/2018/hyperlinkcolor" matchingName="14_Титульный слайд">
-  <p:cSld name="14_Титульный слайд">
-    <p:bg>
-      <p:bgPr>
-        <a:solidFill>
-          <a:schemeClr val="dk1"/>
-        </a:solidFill>
-      </p:bgPr>
-    </p:bg>
-    <p:spTree>
-      <p:nvGrpSpPr>
-        <p:cNvPr id="234" name="Shape 234"/>
-        <p:cNvGrpSpPr/>
-        <p:nvPr/>
-      </p:nvGrpSpPr>
-      <p:grpSpPr>
-        <a:xfrm>
-          <a:off x="0" y="0"/>
-          <a:ext cx="0" cy="0"/>
-          <a:chOff x="0" y="0"/>
-          <a:chExt cx="0" cy="0"/>
-        </a:xfrm>
-      </p:grpSpPr>
-      <p:pic>
-        <p:nvPicPr>
-          <p:cNvPr descr=" " id="235" name="Google Shape;235;p10"/>
-          <p:cNvPicPr preferRelativeResize="0"/>
-          <p:nvPr/>
-        </p:nvPicPr>
-        <p:blipFill rotWithShape="1">
-          <a:blip r:embed="rId2">
-            <a:alphaModFix/>
-          </a:blip>
-          <a:srcRect b="0" l="0" r="0" t="0"/>
-          <a:stretch/>
-        </p:blipFill>
-        <p:spPr>
-          <a:xfrm>
-            <a:off x="6096000" y="5844358"/>
-            <a:ext cx="6096000" cy="1013642"/>
-          </a:xfrm>
-          <a:prstGeom prst="rect">
-            <a:avLst/>
-          </a:prstGeom>
-          <a:noFill/>
-          <a:ln>
-            <a:noFill/>
-          </a:ln>
-        </p:spPr>
-      </p:pic>
-      <p:grpSp>
-        <p:nvGrpSpPr>
-          <p:cNvPr id="236" name="Google Shape;236;p10"/>
-          <p:cNvGrpSpPr/>
-          <p:nvPr/>
-        </p:nvGrpSpPr>
-        <p:grpSpPr>
-          <a:xfrm>
-            <a:off x="224842" y="-74145"/>
-            <a:ext cx="12188171" cy="64326"/>
-            <a:chOff x="-2" y="-2"/>
-            <a:chExt cx="12188169" cy="64324"/>
-          </a:xfrm>
-        </p:grpSpPr>
-        <p:cxnSp>
-          <p:nvCxnSpPr>
-            <p:cNvPr id="237" name="Google Shape;237;p10"/>
-            <p:cNvCxnSpPr/>
-            <p:nvPr/>
-          </p:nvCxnSpPr>
-          <p:spPr>
-            <a:xfrm flipH="1">
-              <a:off x="-2" y="-2"/>
-              <a:ext cx="7" cy="64324"/>
-            </a:xfrm>
-            <a:prstGeom prst="straightConnector1">
-              <a:avLst/>
-            </a:prstGeom>
-            <a:noFill/>
-            <a:ln cap="flat" cmpd="sng" w="9525">
-              <a:solidFill>
-                <a:srgbClr val="808080"/>
-              </a:solidFill>
-              <a:prstDash val="solid"/>
-              <a:miter lim="8000"/>
-              <a:headEnd len="sm" w="sm" type="none"/>
-              <a:tailEnd len="sm" w="sm" type="none"/>
-            </a:ln>
-          </p:spPr>
-        </p:cxnSp>
-        <p:cxnSp>
-          <p:nvCxnSpPr>
-            <p:cNvPr id="238" name="Google Shape;238;p10"/>
-            <p:cNvCxnSpPr/>
-            <p:nvPr/>
-          </p:nvCxnSpPr>
-          <p:spPr>
-            <a:xfrm>
-              <a:off x="677118" y="-2"/>
-              <a:ext cx="7" cy="64324"/>
-            </a:xfrm>
-            <a:prstGeom prst="straightConnector1">
-              <a:avLst/>
-            </a:prstGeom>
-            <a:noFill/>
-            <a:ln cap="flat" cmpd="sng" w="9525">
-              <a:solidFill>
-                <a:srgbClr val="808080"/>
-              </a:solidFill>
-              <a:prstDash val="solid"/>
-              <a:miter lim="8000"/>
-              <a:headEnd len="sm" w="sm" type="none"/>
-              <a:tailEnd len="sm" w="sm" type="none"/>
-            </a:ln>
-          </p:spPr>
-        </p:cxnSp>
-        <p:cxnSp>
-          <p:nvCxnSpPr>
-            <p:cNvPr id="239" name="Google Shape;239;p10"/>
-            <p:cNvCxnSpPr/>
-            <p:nvPr/>
-          </p:nvCxnSpPr>
-          <p:spPr>
-            <a:xfrm>
-              <a:off x="1354241" y="-2"/>
-              <a:ext cx="7" cy="64324"/>
-            </a:xfrm>
-            <a:prstGeom prst="straightConnector1">
-              <a:avLst/>
-            </a:prstGeom>
-            <a:noFill/>
-            <a:ln cap="flat" cmpd="sng" w="9525">
-              <a:solidFill>
-                <a:srgbClr val="808080"/>
-              </a:solidFill>
-              <a:prstDash val="solid"/>
-              <a:miter lim="8000"/>
-              <a:headEnd len="sm" w="sm" type="none"/>
-              <a:tailEnd len="sm" w="sm" type="none"/>
-            </a:ln>
-          </p:spPr>
-        </p:cxnSp>
-        <p:cxnSp>
-          <p:nvCxnSpPr>
-            <p:cNvPr id="240" name="Google Shape;240;p10"/>
-            <p:cNvCxnSpPr/>
-            <p:nvPr/>
-          </p:nvCxnSpPr>
-          <p:spPr>
-            <a:xfrm>
-              <a:off x="2031360" y="-2"/>
-              <a:ext cx="7" cy="64324"/>
-            </a:xfrm>
-            <a:prstGeom prst="straightConnector1">
-              <a:avLst/>
-            </a:prstGeom>
-            <a:noFill/>
-            <a:ln cap="flat" cmpd="sng" w="9525">
-              <a:solidFill>
-                <a:srgbClr val="808080"/>
-              </a:solidFill>
-              <a:prstDash val="solid"/>
-              <a:miter lim="8000"/>
-              <a:headEnd len="sm" w="sm" type="none"/>
-              <a:tailEnd len="sm" w="sm" type="none"/>
-            </a:ln>
-          </p:spPr>
-        </p:cxnSp>
-        <p:cxnSp>
-          <p:nvCxnSpPr>
-            <p:cNvPr id="241" name="Google Shape;241;p10"/>
-            <p:cNvCxnSpPr/>
-            <p:nvPr/>
-          </p:nvCxnSpPr>
-          <p:spPr>
-            <a:xfrm>
-              <a:off x="2708479" y="-2"/>
-              <a:ext cx="7" cy="64324"/>
-            </a:xfrm>
-            <a:prstGeom prst="straightConnector1">
-              <a:avLst/>
-            </a:prstGeom>
-            <a:noFill/>
-            <a:ln cap="flat" cmpd="sng" w="9525">
-              <a:solidFill>
-                <a:srgbClr val="808080"/>
-              </a:solidFill>
-              <a:prstDash val="solid"/>
-              <a:miter lim="8000"/>
-              <a:headEnd len="sm" w="sm" type="none"/>
-              <a:tailEnd len="sm" w="sm" type="none"/>
-            </a:ln>
-          </p:spPr>
-        </p:cxnSp>
-        <p:cxnSp>
-          <p:nvCxnSpPr>
-            <p:cNvPr id="242" name="Google Shape;242;p10"/>
-            <p:cNvCxnSpPr/>
-            <p:nvPr/>
-          </p:nvCxnSpPr>
-          <p:spPr>
-            <a:xfrm>
-              <a:off x="3385598" y="-2"/>
-              <a:ext cx="7" cy="64324"/>
-            </a:xfrm>
-            <a:prstGeom prst="straightConnector1">
-              <a:avLst/>
-            </a:prstGeom>
-            <a:noFill/>
-            <a:ln cap="flat" cmpd="sng" w="9525">
-              <a:solidFill>
-                <a:srgbClr val="808080"/>
-              </a:solidFill>
-              <a:prstDash val="solid"/>
-              <a:miter lim="8000"/>
-              <a:headEnd len="sm" w="sm" type="none"/>
-              <a:tailEnd len="sm" w="sm" type="none"/>
-            </a:ln>
-          </p:spPr>
-        </p:cxnSp>
-        <p:cxnSp>
-          <p:nvCxnSpPr>
-            <p:cNvPr id="243" name="Google Shape;243;p10"/>
-            <p:cNvCxnSpPr/>
-            <p:nvPr/>
-          </p:nvCxnSpPr>
-          <p:spPr>
-            <a:xfrm>
-              <a:off x="4062717" y="-2"/>
-              <a:ext cx="7" cy="64324"/>
-            </a:xfrm>
-            <a:prstGeom prst="straightConnector1">
-              <a:avLst/>
-            </a:prstGeom>
-            <a:noFill/>
-            <a:ln cap="flat" cmpd="sng" w="9525">
-              <a:solidFill>
-                <a:srgbClr val="808080"/>
-              </a:solidFill>
-              <a:prstDash val="solid"/>
-              <a:miter lim="8000"/>
-              <a:headEnd len="sm" w="sm" type="none"/>
-              <a:tailEnd len="sm" w="sm" type="none"/>
-            </a:ln>
-          </p:spPr>
-        </p:cxnSp>
-        <p:cxnSp>
-          <p:nvCxnSpPr>
-            <p:cNvPr id="244" name="Google Shape;244;p10"/>
-            <p:cNvCxnSpPr/>
-            <p:nvPr/>
-          </p:nvCxnSpPr>
-          <p:spPr>
-            <a:xfrm>
-              <a:off x="4739836" y="-2"/>
-              <a:ext cx="7" cy="64324"/>
-            </a:xfrm>
-            <a:prstGeom prst="straightConnector1">
-              <a:avLst/>
-            </a:prstGeom>
-            <a:noFill/>
-            <a:ln cap="flat" cmpd="sng" w="9525">
-              <a:solidFill>
-                <a:srgbClr val="808080"/>
-              </a:solidFill>
-              <a:prstDash val="solid"/>
-              <a:miter lim="8000"/>
-              <a:headEnd len="sm" w="sm" type="none"/>
-              <a:tailEnd len="sm" w="sm" type="none"/>
-            </a:ln>
-          </p:spPr>
-        </p:cxnSp>
-        <p:cxnSp>
-          <p:nvCxnSpPr>
-            <p:cNvPr id="245" name="Google Shape;245;p10"/>
-            <p:cNvCxnSpPr/>
-            <p:nvPr/>
-          </p:nvCxnSpPr>
-          <p:spPr>
-            <a:xfrm>
-              <a:off x="5416955" y="-2"/>
-              <a:ext cx="7" cy="64324"/>
-            </a:xfrm>
-            <a:prstGeom prst="straightConnector1">
-              <a:avLst/>
-            </a:prstGeom>
-            <a:noFill/>
-            <a:ln cap="flat" cmpd="sng" w="9525">
-              <a:solidFill>
-                <a:srgbClr val="808080"/>
-              </a:solidFill>
-              <a:prstDash val="solid"/>
-              <a:miter lim="8000"/>
-              <a:headEnd len="sm" w="sm" type="none"/>
-              <a:tailEnd len="sm" w="sm" type="none"/>
-            </a:ln>
-          </p:spPr>
-        </p:cxnSp>
-        <p:cxnSp>
-          <p:nvCxnSpPr>
-            <p:cNvPr id="246" name="Google Shape;246;p10"/>
-            <p:cNvCxnSpPr/>
-            <p:nvPr/>
-          </p:nvCxnSpPr>
-          <p:spPr>
-            <a:xfrm>
-              <a:off x="6094077" y="-2"/>
-              <a:ext cx="7" cy="64324"/>
-            </a:xfrm>
-            <a:prstGeom prst="straightConnector1">
-              <a:avLst/>
-            </a:prstGeom>
-            <a:noFill/>
-            <a:ln cap="flat" cmpd="sng" w="9525">
-              <a:solidFill>
-                <a:srgbClr val="808080"/>
-              </a:solidFill>
-              <a:prstDash val="solid"/>
-              <a:miter lim="8000"/>
-              <a:headEnd len="sm" w="sm" type="none"/>
-              <a:tailEnd len="sm" w="sm" type="none"/>
-            </a:ln>
-          </p:spPr>
-        </p:cxnSp>
-        <p:cxnSp>
-          <p:nvCxnSpPr>
-            <p:cNvPr id="247" name="Google Shape;247;p10"/>
-            <p:cNvCxnSpPr/>
-            <p:nvPr/>
-          </p:nvCxnSpPr>
-          <p:spPr>
-            <a:xfrm>
-              <a:off x="6771195" y="-2"/>
-              <a:ext cx="7" cy="64324"/>
-            </a:xfrm>
-            <a:prstGeom prst="straightConnector1">
-              <a:avLst/>
-            </a:prstGeom>
-            <a:noFill/>
-            <a:ln cap="flat" cmpd="sng" w="9525">
-              <a:solidFill>
-                <a:srgbClr val="808080"/>
-              </a:solidFill>
-              <a:prstDash val="solid"/>
-              <a:miter lim="8000"/>
-              <a:headEnd len="sm" w="sm" type="none"/>
-              <a:tailEnd len="sm" w="sm" type="none"/>
-            </a:ln>
-          </p:spPr>
-        </p:cxnSp>
-        <p:cxnSp>
-          <p:nvCxnSpPr>
-            <p:cNvPr id="248" name="Google Shape;248;p10"/>
-            <p:cNvCxnSpPr/>
-            <p:nvPr/>
-          </p:nvCxnSpPr>
-          <p:spPr>
-            <a:xfrm>
-              <a:off x="7448315" y="-2"/>
-              <a:ext cx="7" cy="64324"/>
-            </a:xfrm>
-            <a:prstGeom prst="straightConnector1">
-              <a:avLst/>
-            </a:prstGeom>
-            <a:noFill/>
-            <a:ln cap="flat" cmpd="sng" w="9525">
-              <a:solidFill>
-                <a:srgbClr val="808080"/>
-              </a:solidFill>
-              <a:prstDash val="solid"/>
-              <a:miter lim="8000"/>
-              <a:headEnd len="sm" w="sm" type="none"/>
-              <a:tailEnd len="sm" w="sm" type="none"/>
-            </a:ln>
-          </p:spPr>
-        </p:cxnSp>
-        <p:cxnSp>
-          <p:nvCxnSpPr>
-            <p:cNvPr id="249" name="Google Shape;249;p10"/>
-            <p:cNvCxnSpPr/>
-            <p:nvPr/>
-          </p:nvCxnSpPr>
-          <p:spPr>
-            <a:xfrm>
-              <a:off x="8125435" y="-2"/>
-              <a:ext cx="7" cy="64324"/>
-            </a:xfrm>
-            <a:prstGeom prst="straightConnector1">
-              <a:avLst/>
-            </a:prstGeom>
-            <a:noFill/>
-            <a:ln cap="flat" cmpd="sng" w="9525">
-              <a:solidFill>
-                <a:srgbClr val="808080"/>
-              </a:solidFill>
-              <a:prstDash val="solid"/>
-              <a:miter lim="8000"/>
-              <a:headEnd len="sm" w="sm" type="none"/>
-              <a:tailEnd len="sm" w="sm" type="none"/>
-            </a:ln>
-          </p:spPr>
-        </p:cxnSp>
-        <p:cxnSp>
-          <p:nvCxnSpPr>
-            <p:cNvPr id="250" name="Google Shape;250;p10"/>
-            <p:cNvCxnSpPr/>
-            <p:nvPr/>
-          </p:nvCxnSpPr>
-          <p:spPr>
-            <a:xfrm>
-              <a:off x="8802554" y="-2"/>
-              <a:ext cx="7" cy="64324"/>
-            </a:xfrm>
-            <a:prstGeom prst="straightConnector1">
-              <a:avLst/>
-            </a:prstGeom>
-            <a:noFill/>
-            <a:ln cap="flat" cmpd="sng" w="9525">
-              <a:solidFill>
-                <a:srgbClr val="808080"/>
-              </a:solidFill>
-              <a:prstDash val="solid"/>
-              <a:miter lim="8000"/>
-              <a:headEnd len="sm" w="sm" type="none"/>
-              <a:tailEnd len="sm" w="sm" type="none"/>
-            </a:ln>
-          </p:spPr>
-        </p:cxnSp>
-        <p:cxnSp>
-          <p:nvCxnSpPr>
-            <p:cNvPr id="251" name="Google Shape;251;p10"/>
-            <p:cNvCxnSpPr/>
-            <p:nvPr/>
-          </p:nvCxnSpPr>
-          <p:spPr>
-            <a:xfrm>
-              <a:off x="9479673" y="-2"/>
-              <a:ext cx="7" cy="64324"/>
-            </a:xfrm>
-            <a:prstGeom prst="straightConnector1">
-              <a:avLst/>
-            </a:prstGeom>
-            <a:noFill/>
-            <a:ln cap="flat" cmpd="sng" w="9525">
-              <a:solidFill>
-                <a:srgbClr val="808080"/>
-              </a:solidFill>
-              <a:prstDash val="solid"/>
-              <a:miter lim="8000"/>
-              <a:headEnd len="sm" w="sm" type="none"/>
-              <a:tailEnd len="sm" w="sm" type="none"/>
-            </a:ln>
-          </p:spPr>
-        </p:cxnSp>
-        <p:cxnSp>
-          <p:nvCxnSpPr>
-            <p:cNvPr id="252" name="Google Shape;252;p10"/>
-            <p:cNvCxnSpPr/>
-            <p:nvPr/>
-          </p:nvCxnSpPr>
-          <p:spPr>
-            <a:xfrm>
-              <a:off x="10156792" y="-2"/>
-              <a:ext cx="7" cy="64324"/>
-            </a:xfrm>
-            <a:prstGeom prst="straightConnector1">
-              <a:avLst/>
-            </a:prstGeom>
-            <a:noFill/>
-            <a:ln cap="flat" cmpd="sng" w="9525">
-              <a:solidFill>
-                <a:srgbClr val="808080"/>
-              </a:solidFill>
-              <a:prstDash val="solid"/>
-              <a:miter lim="8000"/>
-              <a:headEnd len="sm" w="sm" type="none"/>
-              <a:tailEnd len="sm" w="sm" type="none"/>
-            </a:ln>
-          </p:spPr>
-        </p:cxnSp>
-        <p:cxnSp>
-          <p:nvCxnSpPr>
-            <p:cNvPr id="253" name="Google Shape;253;p10"/>
-            <p:cNvCxnSpPr/>
-            <p:nvPr/>
-          </p:nvCxnSpPr>
-          <p:spPr>
-            <a:xfrm>
-              <a:off x="10833914" y="-2"/>
-              <a:ext cx="7" cy="64324"/>
-            </a:xfrm>
-            <a:prstGeom prst="straightConnector1">
-              <a:avLst/>
-            </a:prstGeom>
-            <a:noFill/>
-            <a:ln cap="flat" cmpd="sng" w="9525">
-              <a:solidFill>
-                <a:srgbClr val="808080"/>
-              </a:solidFill>
-              <a:prstDash val="solid"/>
-              <a:miter lim="8000"/>
-              <a:headEnd len="sm" w="sm" type="none"/>
-              <a:tailEnd len="sm" w="sm" type="none"/>
-            </a:ln>
-          </p:spPr>
-        </p:cxnSp>
-        <p:cxnSp>
-          <p:nvCxnSpPr>
-            <p:cNvPr id="254" name="Google Shape;254;p10"/>
-            <p:cNvCxnSpPr/>
-            <p:nvPr/>
-          </p:nvCxnSpPr>
-          <p:spPr>
-            <a:xfrm>
-              <a:off x="11511034" y="-2"/>
-              <a:ext cx="7" cy="64324"/>
-            </a:xfrm>
-            <a:prstGeom prst="straightConnector1">
-              <a:avLst/>
-            </a:prstGeom>
-            <a:noFill/>
-            <a:ln cap="flat" cmpd="sng" w="9525">
-              <a:solidFill>
-                <a:srgbClr val="808080"/>
-              </a:solidFill>
-              <a:prstDash val="solid"/>
-              <a:miter lim="8000"/>
-              <a:headEnd len="sm" w="sm" type="none"/>
-              <a:tailEnd len="sm" w="sm" type="none"/>
-            </a:ln>
-          </p:spPr>
-        </p:cxnSp>
-        <p:cxnSp>
-          <p:nvCxnSpPr>
-            <p:cNvPr id="255" name="Google Shape;255;p10"/>
-            <p:cNvCxnSpPr/>
-            <p:nvPr/>
-          </p:nvCxnSpPr>
-          <p:spPr>
-            <a:xfrm>
-              <a:off x="12188160" y="-2"/>
-              <a:ext cx="7" cy="64324"/>
-            </a:xfrm>
-            <a:prstGeom prst="straightConnector1">
-              <a:avLst/>
-            </a:prstGeom>
-            <a:noFill/>
-            <a:ln cap="flat" cmpd="sng" w="9525">
-              <a:solidFill>
-                <a:srgbClr val="808080"/>
-              </a:solidFill>
-              <a:prstDash val="solid"/>
-              <a:miter lim="8000"/>
-              <a:headEnd len="sm" w="sm" type="none"/>
-              <a:tailEnd len="sm" w="sm" type="none"/>
-            </a:ln>
-          </p:spPr>
-        </p:cxnSp>
-      </p:grpSp>
-      <p:sp>
-        <p:nvSpPr>
-          <p:cNvPr id="256" name="Google Shape;256;p10"/>
-          <p:cNvSpPr txBox="1"/>
-          <p:nvPr>
-            <p:ph type="title"/>
-          </p:nvPr>
-        </p:nvSpPr>
-        <p:spPr>
-          <a:xfrm>
-            <a:off x="429253" y="424691"/>
-            <a:ext cx="7827311" cy="1167572"/>
-          </a:xfrm>
-          <a:prstGeom prst="rect">
-            <a:avLst/>
-          </a:prstGeom>
-          <a:noFill/>
-          <a:ln>
-            <a:noFill/>
-          </a:ln>
-        </p:spPr>
-        <p:txBody>
-          <a:bodyPr anchorCtr="0" anchor="t" bIns="0" lIns="0" spcFirstLastPara="1" rIns="0" wrap="square" tIns="0">
-            <a:noAutofit/>
-          </a:bodyPr>
-          <a:lstStyle>
-            <a:lvl1pPr lvl="0" algn="l">
-              <a:lnSpc>
-                <a:spcPct val="90000"/>
-              </a:lnSpc>
-              <a:spcBef>
-                <a:spcPts val="0"/>
-              </a:spcBef>
-              <a:spcAft>
-                <a:spcPts val="0"/>
-              </a:spcAft>
-              <a:buClr>
-                <a:schemeClr val="lt1"/>
-              </a:buClr>
-              <a:buSzPts val="3600"/>
-              <a:buFont typeface="Play"/>
-              <a:buNone/>
-              <a:defRPr b="0" i="0" sz="3600">
-                <a:solidFill>
-                  <a:schemeClr val="lt1"/>
-                </a:solidFill>
-                <a:latin typeface="Play"/>
-                <a:ea typeface="Play"/>
-                <a:cs typeface="Play"/>
-                <a:sym typeface="Play"/>
-              </a:defRPr>
-            </a:lvl1pPr>
-            <a:lvl2pPr lvl="1">
-              <a:spcBef>
-                <a:spcPts val="0"/>
-              </a:spcBef>
-              <a:spcAft>
-                <a:spcPts val="0"/>
-              </a:spcAft>
-              <a:buSzPts val="1400"/>
-              <a:buNone/>
-              <a:defRPr/>
-            </a:lvl2pPr>
-            <a:lvl3pPr lvl="2">
-              <a:spcBef>
-                <a:spcPts val="0"/>
-              </a:spcBef>
-              <a:spcAft>
-                <a:spcPts val="0"/>
-              </a:spcAft>
-              <a:buSzPts val="1400"/>
-              <a:buNone/>
-              <a:defRPr/>
-            </a:lvl3pPr>
-            <a:lvl4pPr lvl="3">
-              <a:spcBef>
-                <a:spcPts val="0"/>
-              </a:spcBef>
-              <a:spcAft>
-                <a:spcPts val="0"/>
-              </a:spcAft>
-              <a:buSzPts val="1400"/>
-              <a:buNone/>
-              <a:defRPr/>
-            </a:lvl4pPr>
-            <a:lvl5pPr lvl="4">
-              <a:spcBef>
-                <a:spcPts val="0"/>
-              </a:spcBef>
-              <a:spcAft>
-                <a:spcPts val="0"/>
-              </a:spcAft>
-              <a:buSzPts val="1400"/>
-              <a:buNone/>
-              <a:defRPr/>
-            </a:lvl5pPr>
-            <a:lvl6pPr lvl="5">
-              <a:spcBef>
-                <a:spcPts val="0"/>
-              </a:spcBef>
-              <a:spcAft>
-                <a:spcPts val="0"/>
-              </a:spcAft>
-              <a:buSzPts val="1400"/>
-              <a:buNone/>
-              <a:defRPr/>
-            </a:lvl6pPr>
-            <a:lvl7pPr lvl="6">
-              <a:spcBef>
-                <a:spcPts val="0"/>
-              </a:spcBef>
-              <a:spcAft>
-                <a:spcPts val="0"/>
-              </a:spcAft>
-              <a:buSzPts val="1400"/>
-              <a:buNone/>
-              <a:defRPr/>
-            </a:lvl7pPr>
-            <a:lvl8pPr lvl="7">
-              <a:spcBef>
-                <a:spcPts val="0"/>
-              </a:spcBef>
-              <a:spcAft>
-                <a:spcPts val="0"/>
-              </a:spcAft>
-              <a:buSzPts val="1400"/>
-              <a:buNone/>
-              <a:defRPr/>
-            </a:lvl8pPr>
-            <a:lvl9pPr lvl="8">
-              <a:spcBef>
-                <a:spcPts val="0"/>
-              </a:spcBef>
-              <a:spcAft>
-                <a:spcPts val="0"/>
-              </a:spcAft>
-              <a:buSzPts val="1400"/>
-              <a:buNone/>
-              <a:defRPr/>
-            </a:lvl9pPr>
-          </a:lstStyle>
-          <a:p/>
-        </p:txBody>
-      </p:sp>
-      <p:pic>
-        <p:nvPicPr>
-          <p:cNvPr id="257" name="Google Shape;257;p10"/>
-          <p:cNvPicPr preferRelativeResize="0"/>
-          <p:nvPr/>
-        </p:nvPicPr>
-        <p:blipFill rotWithShape="1">
-          <a:blip r:embed="rId3">
-            <a:alphaModFix/>
-          </a:blip>
-          <a:srcRect b="0" l="0" r="0" t="0"/>
-          <a:stretch/>
-        </p:blipFill>
-        <p:spPr>
-          <a:xfrm>
-            <a:off x="398723" y="6160516"/>
-            <a:ext cx="1857481" cy="292671"/>
-          </a:xfrm>
-          <a:prstGeom prst="rect">
-            <a:avLst/>
-          </a:prstGeom>
-          <a:noFill/>
-          <a:ln>
-            <a:noFill/>
-          </a:ln>
-        </p:spPr>
-      </p:pic>
-      <p:pic>
-        <p:nvPicPr>
-          <p:cNvPr descr=" " id="258" name="Google Shape;258;p10"/>
-          <p:cNvPicPr preferRelativeResize="0"/>
-          <p:nvPr/>
-        </p:nvPicPr>
-        <p:blipFill rotWithShape="1">
-          <a:blip r:embed="rId4">
-            <a:alphaModFix/>
-          </a:blip>
-          <a:srcRect b="0" l="0" r="0" t="0"/>
-          <a:stretch/>
-        </p:blipFill>
-        <p:spPr>
-          <a:xfrm>
-            <a:off x="10866292" y="0"/>
-            <a:ext cx="1325708" cy="3723972"/>
-          </a:xfrm>
-          <a:prstGeom prst="rect">
-            <a:avLst/>
-          </a:prstGeom>
-          <a:noFill/>
-          <a:ln>
-            <a:noFill/>
-          </a:ln>
-        </p:spPr>
-      </p:pic>
-      <p:pic>
-        <p:nvPicPr>
-          <p:cNvPr descr=" " id="259" name="Google Shape;259;p10"/>
-          <p:cNvPicPr preferRelativeResize="0"/>
-          <p:nvPr/>
-        </p:nvPicPr>
-        <p:blipFill rotWithShape="1">
-          <a:blip r:embed="rId5">
-            <a:alphaModFix/>
-          </a:blip>
-          <a:srcRect b="0" l="0" r="0" t="0"/>
-          <a:stretch/>
-        </p:blipFill>
-        <p:spPr>
-          <a:xfrm>
-            <a:off x="11093496" y="6238282"/>
-            <a:ext cx="690517" cy="216000"/>
-          </a:xfrm>
-          <a:prstGeom prst="rect">
-            <a:avLst/>
-          </a:prstGeom>
-          <a:noFill/>
-          <a:ln>
-            <a:noFill/>
-          </a:ln>
-        </p:spPr>
-      </p:pic>
-    </p:spTree>
-  </p:cSld>
-  <p:clrMapOvr>
-    <a:masterClrMapping/>
-  </p:clrMapOvr>
-</p:sldLayout>
-</file>
-
 <file path=ppt/slideMasters/slideMaster1.xml><?xml version="1.0" encoding="utf-8"?>
 <p:sldMaster xmlns:a="http://schemas.openxmlformats.org/drawingml/2006/main" xmlns:r="http://schemas.openxmlformats.org/officeDocument/2006/relationships" xmlns:mc="http://schemas.openxmlformats.org/markup-compatibility/2006" xmlns:mv="urn:schemas-microsoft-com:mac:vml" xmlns:p="http://schemas.openxmlformats.org/presentationml/2006/main" xmlns:c="http://schemas.openxmlformats.org/drawingml/2006/chart" xmlns:dgm="http://schemas.openxmlformats.org/drawingml/2006/diagram" xmlns:o="urn:schemas-microsoft-com:office:office" xmlns:v="urn:schemas-microsoft-com:vml" xmlns:pvml="urn:schemas-microsoft-com:office:powerpoint" xmlns:com="http://schemas.openxmlformats.org/drawingml/2006/compatibility" xmlns:p14="http://schemas.microsoft.com/office/powerpoint/2010/main" xmlns:p15="http://schemas.microsoft.com/office/powerpoint/2012/main" xmlns:ahyp="http://schemas.microsoft.com/office/drawing/2018/hyperlinkcolor">
   <p:cSld>
@@ -9469,7 +8885,6 @@
     <p:sldLayoutId id="2147483652" r:id="rId6"/>
     <p:sldLayoutId id="2147483653" r:id="rId7"/>
     <p:sldLayoutId id="2147483655" r:id="rId9"/>
-    <p:sldLayoutId id="2147483656" r:id="rId10"/>
     <p:sldLayoutId id="2147483661" r:id="rId15"/>
   </p:sldLayoutIdLst>
   <p:hf dt="0" ftr="0" hdr="0" sldNum="0"/>
@@ -10313,7 +9728,7 @@
               <a:spcAft>
                 <a:spcPts val="300"/>
               </a:spcAft>
-              <a:defRPr sz="5400" b="0">
+              <a:defRPr sz="3200" b="0">
                 <a:solidFill>
                   <a:srgbClr val="FFFFFF"/>
                 </a:solidFill>
@@ -10323,7 +9738,7 @@
               </a:defRPr>
             </a:pPr>
             <a:r>
-              <a:rPr sz="5400" b="0">
+              <a:rPr sz="3200" b="0">
                 <a:solidFill>
                   <a:srgbClr val="FFFFFF"/>
                 </a:solidFill>
@@ -10331,7 +9746,7 @@
                 <a:ea typeface="Play"/>
                 <a:cs typeface="Play"/>
               </a:rPr>
-              <a:t>Защита инициативы</a:t>
+              <a:t>Защита инициативы: сервис автоматической вёрстки презентаций</a:t>
             </a:r>
           </a:p>
         </p:txBody>
@@ -10447,7 +9862,7 @@
                 <a:ea typeface="Play"/>
                 <a:cs typeface="Play"/>
               </a:rPr>
-              <a:t>• Сборка 12-слайдной колоды занимает 186 мин</a:t>
+              <a:t>• Сборка одной презентации занимает 186 минут</a:t>
             </a:r>
           </a:p>
           <a:p>
@@ -10473,7 +9888,7 @@
                 <a:ea typeface="Play"/>
                 <a:cs typeface="Play"/>
               </a:rPr>
-              <a:t>• Правки после ревью добавляют 74 мин</a:t>
+              <a:t>• Правки после ревью добавляют 74 минуты</a:t>
             </a:r>
           </a:p>
           <a:p>
@@ -10499,7 +9914,59 @@
                 <a:ea typeface="Play"/>
                 <a:cs typeface="Play"/>
               </a:rPr>
-              <a:t>• Средний срок ожидания 6 дней</a:t>
+              <a:t>• 19 из 42 колод нарушают фирменный стиль</a:t>
+            </a:r>
+          </a:p>
+          <a:p>
+            <a:pPr algn="l">
+              <a:spcAft>
+                <a:spcPts val="300"/>
+              </a:spcAft>
+              <a:defRPr sz="1600">
+                <a:solidFill>
+                  <a:srgbClr val="FFFFFF"/>
+                </a:solidFill>
+                <a:latin typeface="Play"/>
+                <a:ea typeface="Play"/>
+                <a:cs typeface="Play"/>
+              </a:defRPr>
+            </a:pPr>
+            <a:r>
+              <a:rPr sz="1600">
+                <a:solidFill>
+                  <a:srgbClr val="FFFFFF"/>
+                </a:solidFill>
+                <a:latin typeface="Play"/>
+                <a:ea typeface="Play"/>
+                <a:cs typeface="Play"/>
+              </a:rPr>
+              <a:t>• Дизайн-отдел закрывает 11 запросов в неделю из 27</a:t>
+            </a:r>
+          </a:p>
+          <a:p>
+            <a:pPr algn="l">
+              <a:spcAft>
+                <a:spcPts val="300"/>
+              </a:spcAft>
+              <a:defRPr sz="1600">
+                <a:solidFill>
+                  <a:srgbClr val="FFFFFF"/>
+                </a:solidFill>
+                <a:latin typeface="Play"/>
+                <a:ea typeface="Play"/>
+                <a:cs typeface="Play"/>
+              </a:defRPr>
+            </a:pPr>
+            <a:r>
+              <a:rPr sz="1600">
+                <a:solidFill>
+                  <a:srgbClr val="FFFFFF"/>
+                </a:solidFill>
+                <a:latin typeface="Play"/>
+                <a:ea typeface="Play"/>
+                <a:cs typeface="Play"/>
+              </a:rPr>
+              <a:t>• Средний срок ожидания 6 рабочих дней</a:t>
             </a:r>
           </a:p>
         </p:txBody>
@@ -10549,148 +10016,6 @@
         <p:spPr>
           <a:xfrm>
             <a:off x="429280" y="424715"/>
-            <a:ext cx="7827264" cy="647052"/>
-          </a:xfrm>
-          <a:prstGeom prst="rect">
-            <a:avLst/>
-          </a:prstGeom>
-          <a:noFill/>
-        </p:spPr>
-        <p:txBody>
-          <a:bodyPr wrap="square" lIns="76200" rIns="76200" tIns="50800" bIns="50800">
-            <a:spAutoFit/>
-          </a:bodyPr>
-          <a:lstStyle/>
-          <a:p>
-            <a:pPr algn="l">
-              <a:spcAft>
-                <a:spcPts val="300"/>
-              </a:spcAft>
-              <a:defRPr sz="2800">
-                <a:solidFill>
-                  <a:srgbClr val="FFFFFF"/>
-                </a:solidFill>
-                <a:latin typeface="Play"/>
-                <a:ea typeface="Play"/>
-                <a:cs typeface="Play"/>
-              </a:defRPr>
-            </a:pPr>
-            <a:r>
-              <a:rPr sz="2800">
-                <a:solidFill>
-                  <a:srgbClr val="FFFFFF"/>
-                </a:solidFill>
-                <a:latin typeface="Play"/>
-                <a:ea typeface="Play"/>
-                <a:cs typeface="Play"/>
-              </a:rPr>
-              <a:t>Текущая нагрузка дизайна</a:t>
-            </a:r>
-          </a:p>
-        </p:txBody>
-      </p:sp>
-      <p:sp>
-        <p:nvSpPr>
-          <p:cNvPr id="3" name="body"/>
-          <p:cNvSpPr txBox="1"/>
-          <p:nvPr/>
-        </p:nvSpPr>
-        <p:spPr>
-          <a:xfrm>
-            <a:off x="429280" y="3826832"/>
-            <a:ext cx="11310884" cy="1026160"/>
-          </a:xfrm>
-          <a:prstGeom prst="rect">
-            <a:avLst/>
-          </a:prstGeom>
-          <a:noFill/>
-        </p:spPr>
-        <p:txBody>
-          <a:bodyPr wrap="square" lIns="76200" rIns="76200" tIns="50800" bIns="50800">
-            <a:spAutoFit/>
-          </a:bodyPr>
-          <a:lstStyle/>
-          <a:p>
-            <a:pPr algn="l">
-              <a:spcAft>
-                <a:spcPts val="300"/>
-              </a:spcAft>
-              <a:defRPr sz="2800">
-                <a:solidFill>
-                  <a:srgbClr val="FFFFFF"/>
-                </a:solidFill>
-                <a:latin typeface="Play"/>
-                <a:ea typeface="Play"/>
-                <a:cs typeface="Play"/>
-              </a:defRPr>
-            </a:pPr>
-            <a:r>
-              <a:rPr sz="2800">
-                <a:solidFill>
-                  <a:srgbClr val="FFFFFF"/>
-                </a:solidFill>
-                <a:latin typeface="Play"/>
-                <a:ea typeface="Play"/>
-                <a:cs typeface="Play"/>
-              </a:rPr>
-              <a:t>• Дизайн-отдел закрывает 11 запросов в неделю из 27</a:t>
-            </a:r>
-          </a:p>
-          <a:p>
-            <a:pPr algn="l">
-              <a:spcAft>
-                <a:spcPts val="300"/>
-              </a:spcAft>
-              <a:defRPr sz="2800">
-                <a:solidFill>
-                  <a:srgbClr val="FFFFFF"/>
-                </a:solidFill>
-                <a:latin typeface="Play"/>
-                <a:ea typeface="Play"/>
-                <a:cs typeface="Play"/>
-              </a:defRPr>
-            </a:pPr>
-            <a:r>
-              <a:rPr sz="2800">
-                <a:solidFill>
-                  <a:srgbClr val="FFFFFF"/>
-                </a:solidFill>
-                <a:latin typeface="Play"/>
-                <a:ea typeface="Play"/>
-                <a:cs typeface="Play"/>
-              </a:rPr>
-              <a:t>• Средний срок ожидания 6 дней</a:t>
-            </a:r>
-          </a:p>
-        </p:txBody>
-      </p:sp>
-    </p:spTree>
-  </p:cSld>
-  <p:clrMapOvr>
-    <a:masterClrMapping/>
-  </p:clrMapOvr>
-</p:sld>
-</file>
-
-<file path=ppt/slides/slide33.xml><?xml version="1.0" encoding="utf-8"?>
-<p:sld xmlns:a="http://schemas.openxmlformats.org/drawingml/2006/main" xmlns:p="http://schemas.openxmlformats.org/presentationml/2006/main" xmlns:r="http://schemas.openxmlformats.org/officeDocument/2006/relationships">
-  <p:cSld>
-    <p:spTree>
-      <p:nvGrpSpPr>
-        <p:cNvPr id="1" name=""/>
-        <p:cNvGrpSpPr/>
-        <p:nvPr/>
-      </p:nvGrpSpPr>
-      <p:grpSpPr/>
-      <p:sp>
-        <p:nvSpPr>
-          <p:cNvPr id="2" name="title"/>
-          <p:cNvSpPr txBox="1"/>
-          <p:nvPr/>
-        </p:nvSpPr>
-        <p:spPr>
-          <a:xfrm>
-            <a:off x="429280" y="424715"/>
             <a:ext cx="7827264" cy="822960"/>
           </a:xfrm>
           <a:prstGeom prst="rect">
@@ -10726,7 +10051,7 @@
                 <a:ea typeface="Play"/>
                 <a:cs typeface="Play"/>
               </a:rPr>
-              <a:t>Ожидаемый эффект пилота</a:t>
+              <a:t>Предложение</a:t>
             </a:r>
           </a:p>
         </p:txBody>
@@ -10775,7 +10100,7 @@
                 <a:ea typeface="Play"/>
                 <a:cs typeface="Play"/>
               </a:rPr>
-              <a:t>• Средняя сборка колоды 12 слайдов — 4 мин вместо 186</a:t>
+              <a:t>• Сервис принимает шаблон pptx и материалы</a:t>
             </a:r>
           </a:p>
           <a:p>
@@ -10801,7 +10126,7 @@
                 <a:ea typeface="Play"/>
                 <a:cs typeface="Play"/>
               </a:rPr>
-              <a:t>• Время до первой версии сократилось с 6 дней до 1</a:t>
+              <a:t>• Автоматически формирует дизайн-систему и план колоды</a:t>
             </a:r>
           </a:p>
           <a:p>
@@ -10827,7 +10152,7 @@
                 <a:ea typeface="Play"/>
                 <a:cs typeface="Play"/>
               </a:rPr>
-              <a:t>• Нарушений стиля 2 из 68, исправлены автоматически</a:t>
+              <a:t>• Экспорт в pptx, pdf, html с редактируемыми слайдами</a:t>
             </a:r>
           </a:p>
           <a:p>
@@ -10853,29 +10178,389 @@
                 <a:ea typeface="Play"/>
                 <a:cs typeface="Play"/>
               </a:rPr>
-              <a:t>• Дизайнеры закрыли 38 запросов вместо 11</a:t>
+              <a:t>• Аудит качества проверяет все данные до выдачи</a:t>
             </a:r>
           </a:p>
         </p:txBody>
       </p:sp>
-      <p:graphicFrame>
-        <p:nvGraphicFramePr>
-          <p:cNvPr id="4" name="Chart 3"/>
-          <p:cNvGraphicFramePr>
-            <a:graphicFrameLocks noGrp="1"/>
-          </p:cNvGraphicFramePr>
+      <p:sp>
+        <p:nvSpPr>
+          <p:cNvPr id="4" name="Pentagon 3"/>
+          <p:cNvSpPr/>
           <p:nvPr/>
-        </p:nvGraphicFramePr>
-        <p:xfrm>
-          <a:off x="6267602" y="1592290"/>
-          <a:ext cx="5472562" cy="4181322"/>
-        </p:xfrm>
-        <a:graphic>
-          <a:graphicData uri="http://schemas.openxmlformats.org/drawingml/2006/chart">
-            <c:chart xmlns:c="http://schemas.openxmlformats.org/drawingml/2006/chart" r:id="rId2"/>
-          </a:graphicData>
-        </a:graphic>
-      </p:graphicFrame>
+        </p:nvSpPr>
+        <p:spPr>
+          <a:xfrm>
+            <a:off x="6267602" y="1641072"/>
+            <a:ext cx="5472562" cy="599322"/>
+          </a:xfrm>
+          <a:prstGeom prst="homePlate">
+            <a:avLst/>
+          </a:prstGeom>
+          <a:solidFill>
+            <a:srgbClr val="0077FF"/>
+          </a:solidFill>
+          <a:ln>
+            <a:noFill/>
+          </a:ln>
+        </p:spPr>
+        <p:style>
+          <a:lnRef idx="1">
+            <a:schemeClr val="accent1"/>
+          </a:lnRef>
+          <a:fillRef idx="3">
+            <a:schemeClr val="accent1"/>
+          </a:fillRef>
+          <a:effectRef idx="2">
+            <a:schemeClr val="accent1"/>
+          </a:effectRef>
+          <a:fontRef idx="minor">
+            <a:schemeClr val="lt1"/>
+          </a:fontRef>
+        </p:style>
+        <p:txBody>
+          <a:bodyPr rtlCol="0" anchor="ctr" wrap="square" lIns="12700" rIns="12700" tIns="12700" bIns="12700"/>
+          <a:lstStyle/>
+          <a:p>
+            <a:pPr algn="ctr">
+              <a:defRPr sz="1400" b="0">
+                <a:solidFill>
+                  <a:srgbClr val="FFFFFF"/>
+                </a:solidFill>
+                <a:latin typeface="Play"/>
+                <a:ea typeface="Play"/>
+                <a:cs typeface="Play"/>
+              </a:defRPr>
+            </a:pPr>
+            <a:r>
+              <a:rPr sz="1400" b="0">
+                <a:solidFill>
+                  <a:srgbClr val="FFFFFF"/>
+                </a:solidFill>
+                <a:latin typeface="Play"/>
+                <a:ea typeface="Play"/>
+                <a:cs typeface="Play"/>
+              </a:rPr>
+              <a:t>Шаблон</a:t>
+            </a:r>
+          </a:p>
+        </p:txBody>
+      </p:sp>
+      <p:sp>
+        <p:nvSpPr>
+          <p:cNvPr id="5" name="Chevron 4"/>
+          <p:cNvSpPr/>
+          <p:nvPr/>
+        </p:nvSpPr>
+        <p:spPr>
+          <a:xfrm>
+            <a:off x="6267602" y="2337959"/>
+            <a:ext cx="5472562" cy="599322"/>
+          </a:xfrm>
+          <a:prstGeom prst="chevron">
+            <a:avLst/>
+          </a:prstGeom>
+          <a:solidFill>
+            <a:srgbClr val="0077FF"/>
+          </a:solidFill>
+          <a:ln>
+            <a:noFill/>
+          </a:ln>
+        </p:spPr>
+        <p:style>
+          <a:lnRef idx="1">
+            <a:schemeClr val="accent1"/>
+          </a:lnRef>
+          <a:fillRef idx="3">
+            <a:schemeClr val="accent1"/>
+          </a:fillRef>
+          <a:effectRef idx="2">
+            <a:schemeClr val="accent1"/>
+          </a:effectRef>
+          <a:fontRef idx="minor">
+            <a:schemeClr val="lt1"/>
+          </a:fontRef>
+        </p:style>
+        <p:txBody>
+          <a:bodyPr rtlCol="0" anchor="ctr" wrap="square" lIns="12700" rIns="12700" tIns="12700" bIns="12700"/>
+          <a:lstStyle/>
+          <a:p>
+            <a:pPr algn="ctr">
+              <a:defRPr sz="1400" b="0">
+                <a:solidFill>
+                  <a:srgbClr val="FFFFFF"/>
+                </a:solidFill>
+                <a:latin typeface="Play"/>
+                <a:ea typeface="Play"/>
+                <a:cs typeface="Play"/>
+              </a:defRPr>
+            </a:pPr>
+            <a:r>
+              <a:rPr sz="1400" b="0">
+                <a:solidFill>
+                  <a:srgbClr val="FFFFFF"/>
+                </a:solidFill>
+                <a:latin typeface="Play"/>
+                <a:ea typeface="Play"/>
+                <a:cs typeface="Play"/>
+              </a:rPr>
+              <a:t>Дизайн-система</a:t>
+            </a:r>
+          </a:p>
+        </p:txBody>
+      </p:sp>
+      <p:sp>
+        <p:nvSpPr>
+          <p:cNvPr id="6" name="Chevron 5"/>
+          <p:cNvSpPr/>
+          <p:nvPr/>
+        </p:nvSpPr>
+        <p:spPr>
+          <a:xfrm>
+            <a:off x="6267602" y="3034846"/>
+            <a:ext cx="5472562" cy="599322"/>
+          </a:xfrm>
+          <a:prstGeom prst="chevron">
+            <a:avLst/>
+          </a:prstGeom>
+          <a:solidFill>
+            <a:srgbClr val="0077FF"/>
+          </a:solidFill>
+          <a:ln>
+            <a:noFill/>
+          </a:ln>
+        </p:spPr>
+        <p:style>
+          <a:lnRef idx="1">
+            <a:schemeClr val="accent1"/>
+          </a:lnRef>
+          <a:fillRef idx="3">
+            <a:schemeClr val="accent1"/>
+          </a:fillRef>
+          <a:effectRef idx="2">
+            <a:schemeClr val="accent1"/>
+          </a:effectRef>
+          <a:fontRef idx="minor">
+            <a:schemeClr val="lt1"/>
+          </a:fontRef>
+        </p:style>
+        <p:txBody>
+          <a:bodyPr rtlCol="0" anchor="ctr" wrap="square" lIns="12700" rIns="12700" tIns="12700" bIns="12700"/>
+          <a:lstStyle/>
+          <a:p>
+            <a:pPr algn="ctr">
+              <a:defRPr sz="1400" b="0">
+                <a:solidFill>
+                  <a:srgbClr val="FFFFFF"/>
+                </a:solidFill>
+                <a:latin typeface="Play"/>
+                <a:ea typeface="Play"/>
+                <a:cs typeface="Play"/>
+              </a:defRPr>
+            </a:pPr>
+            <a:r>
+              <a:rPr sz="1400" b="0">
+                <a:solidFill>
+                  <a:srgbClr val="FFFFFF"/>
+                </a:solidFill>
+                <a:latin typeface="Play"/>
+                <a:ea typeface="Play"/>
+                <a:cs typeface="Play"/>
+              </a:rPr>
+              <a:t>План колоды</a:t>
+            </a:r>
+          </a:p>
+        </p:txBody>
+      </p:sp>
+      <p:sp>
+        <p:nvSpPr>
+          <p:cNvPr id="7" name="Chevron 6"/>
+          <p:cNvSpPr/>
+          <p:nvPr/>
+        </p:nvSpPr>
+        <p:spPr>
+          <a:xfrm>
+            <a:off x="6267602" y="3731733"/>
+            <a:ext cx="5472562" cy="599322"/>
+          </a:xfrm>
+          <a:prstGeom prst="chevron">
+            <a:avLst/>
+          </a:prstGeom>
+          <a:solidFill>
+            <a:srgbClr val="0077FF"/>
+          </a:solidFill>
+          <a:ln>
+            <a:noFill/>
+          </a:ln>
+        </p:spPr>
+        <p:style>
+          <a:lnRef idx="1">
+            <a:schemeClr val="accent1"/>
+          </a:lnRef>
+          <a:fillRef idx="3">
+            <a:schemeClr val="accent1"/>
+          </a:fillRef>
+          <a:effectRef idx="2">
+            <a:schemeClr val="accent1"/>
+          </a:effectRef>
+          <a:fontRef idx="minor">
+            <a:schemeClr val="lt1"/>
+          </a:fontRef>
+        </p:style>
+        <p:txBody>
+          <a:bodyPr rtlCol="0" anchor="ctr" wrap="square" lIns="12700" rIns="12700" tIns="12700" bIns="12700"/>
+          <a:lstStyle/>
+          <a:p>
+            <a:pPr algn="ctr">
+              <a:defRPr sz="1400" b="0">
+                <a:solidFill>
+                  <a:srgbClr val="FFFFFF"/>
+                </a:solidFill>
+                <a:latin typeface="Play"/>
+                <a:ea typeface="Play"/>
+                <a:cs typeface="Play"/>
+              </a:defRPr>
+            </a:pPr>
+            <a:r>
+              <a:rPr sz="1400" b="0">
+                <a:solidFill>
+                  <a:srgbClr val="FFFFFF"/>
+                </a:solidFill>
+                <a:latin typeface="Play"/>
+                <a:ea typeface="Play"/>
+                <a:cs typeface="Play"/>
+              </a:rPr>
+              <a:t>Вёрстка</a:t>
+            </a:r>
+          </a:p>
+        </p:txBody>
+      </p:sp>
+      <p:sp>
+        <p:nvSpPr>
+          <p:cNvPr id="8" name="Chevron 7"/>
+          <p:cNvSpPr/>
+          <p:nvPr/>
+        </p:nvSpPr>
+        <p:spPr>
+          <a:xfrm>
+            <a:off x="6267602" y="4428620"/>
+            <a:ext cx="5472562" cy="599322"/>
+          </a:xfrm>
+          <a:prstGeom prst="chevron">
+            <a:avLst/>
+          </a:prstGeom>
+          <a:solidFill>
+            <a:srgbClr val="0077FF"/>
+          </a:solidFill>
+          <a:ln>
+            <a:noFill/>
+          </a:ln>
+        </p:spPr>
+        <p:style>
+          <a:lnRef idx="1">
+            <a:schemeClr val="accent1"/>
+          </a:lnRef>
+          <a:fillRef idx="3">
+            <a:schemeClr val="accent1"/>
+          </a:fillRef>
+          <a:effectRef idx="2">
+            <a:schemeClr val="accent1"/>
+          </a:effectRef>
+          <a:fontRef idx="minor">
+            <a:schemeClr val="lt1"/>
+          </a:fontRef>
+        </p:style>
+        <p:txBody>
+          <a:bodyPr rtlCol="0" anchor="ctr" wrap="square" lIns="12700" rIns="12700" tIns="12700" bIns="12700"/>
+          <a:lstStyle/>
+          <a:p>
+            <a:pPr algn="ctr">
+              <a:defRPr sz="1400" b="0">
+                <a:solidFill>
+                  <a:srgbClr val="FFFFFF"/>
+                </a:solidFill>
+                <a:latin typeface="Play"/>
+                <a:ea typeface="Play"/>
+                <a:cs typeface="Play"/>
+              </a:defRPr>
+            </a:pPr>
+            <a:r>
+              <a:rPr sz="1400" b="0">
+                <a:solidFill>
+                  <a:srgbClr val="FFFFFF"/>
+                </a:solidFill>
+                <a:latin typeface="Play"/>
+                <a:ea typeface="Play"/>
+                <a:cs typeface="Play"/>
+              </a:rPr>
+              <a:t>Аудит</a:t>
+            </a:r>
+          </a:p>
+        </p:txBody>
+      </p:sp>
+      <p:sp>
+        <p:nvSpPr>
+          <p:cNvPr id="9" name="Chevron 8"/>
+          <p:cNvSpPr/>
+          <p:nvPr/>
+        </p:nvSpPr>
+        <p:spPr>
+          <a:xfrm>
+            <a:off x="6267602" y="5125507"/>
+            <a:ext cx="5472562" cy="599322"/>
+          </a:xfrm>
+          <a:prstGeom prst="chevron">
+            <a:avLst/>
+          </a:prstGeom>
+          <a:solidFill>
+            <a:srgbClr val="0077FF"/>
+          </a:solidFill>
+          <a:ln>
+            <a:noFill/>
+          </a:ln>
+        </p:spPr>
+        <p:style>
+          <a:lnRef idx="1">
+            <a:schemeClr val="accent1"/>
+          </a:lnRef>
+          <a:fillRef idx="3">
+            <a:schemeClr val="accent1"/>
+          </a:fillRef>
+          <a:effectRef idx="2">
+            <a:schemeClr val="accent1"/>
+          </a:effectRef>
+          <a:fontRef idx="minor">
+            <a:schemeClr val="lt1"/>
+          </a:fontRef>
+        </p:style>
+        <p:txBody>
+          <a:bodyPr rtlCol="0" anchor="ctr" wrap="square" lIns="12700" rIns="12700" tIns="12700" bIns="12700"/>
+          <a:lstStyle/>
+          <a:p>
+            <a:pPr algn="ctr">
+              <a:defRPr sz="1400" b="0">
+                <a:solidFill>
+                  <a:srgbClr val="FFFFFF"/>
+                </a:solidFill>
+                <a:latin typeface="Play"/>
+                <a:ea typeface="Play"/>
+                <a:cs typeface="Play"/>
+              </a:defRPr>
+            </a:pPr>
+            <a:r>
+              <a:rPr sz="1400" b="0">
+                <a:solidFill>
+                  <a:srgbClr val="FFFFFF"/>
+                </a:solidFill>
+                <a:latin typeface="Play"/>
+                <a:ea typeface="Play"/>
+                <a:cs typeface="Play"/>
+              </a:rPr>
+              <a:t>Экспорт</a:t>
+            </a:r>
+          </a:p>
+        </p:txBody>
+      </p:sp>
     </p:spTree>
   </p:cSld>
   <p:clrMapOvr>
@@ -10884,7 +10569,7 @@
 </p:sld>
 </file>
 
-<file path=ppt/slides/slide34.xml><?xml version="1.0" encoding="utf-8"?>
+<file path=ppt/slides/slide33.xml><?xml version="1.0" encoding="utf-8"?>
 <p:sld xmlns:a="http://schemas.openxmlformats.org/drawingml/2006/main" xmlns:p="http://schemas.openxmlformats.org/presentationml/2006/main" xmlns:r="http://schemas.openxmlformats.org/officeDocument/2006/relationships">
   <p:cSld>
     <p:spTree>
@@ -10968,762 +10653,6 @@
           <a:xfrm>
             <a:off x="300817" y="297715"/>
             <a:ext cx="11566347" cy="5758505"/>
-          </a:xfrm>
-          <a:prstGeom prst="roundRect">
-            <a:avLst/>
-          </a:prstGeom>
-          <a:solidFill>
-            <a:srgbClr val="111111">
-              <a:alpha val="85000"/>
-            </a:srgbClr>
-          </a:solidFill>
-          <a:ln>
-            <a:noFill/>
-          </a:ln>
-          <a:effectLst/>
-        </p:spPr>
-        <p:style>
-          <a:lnRef idx="1">
-            <a:schemeClr val="accent1"/>
-          </a:lnRef>
-          <a:fillRef idx="3">
-            <a:schemeClr val="accent1"/>
-          </a:fillRef>
-          <a:effectRef idx="2">
-            <a:schemeClr val="accent1"/>
-          </a:effectRef>
-          <a:fontRef idx="minor">
-            <a:schemeClr val="lt1"/>
-          </a:fontRef>
-        </p:style>
-        <p:txBody>
-          <a:bodyPr rtlCol="0" anchor="ctr"/>
-          <a:lstStyle/>
-          <a:p>
-            <a:pPr algn="ctr"/>
-          </a:p>
-        </p:txBody>
-      </p:sp>
-      <p:sp>
-        <p:nvSpPr>
-          <p:cNvPr id="681" name="title"/>
-          <p:cNvSpPr txBox="1"/>
-          <p:nvPr/>
-        </p:nvSpPr>
-        <p:spPr>
-          <a:xfrm>
-            <a:off x="427817" y="424715"/>
-            <a:ext cx="7827264" cy="1183640"/>
-          </a:xfrm>
-          <a:prstGeom prst="rect">
-            <a:avLst/>
-          </a:prstGeom>
-          <a:noFill/>
-        </p:spPr>
-        <p:txBody>
-          <a:bodyPr wrap="square" lIns="76200" rIns="76200" tIns="50800" bIns="50800">
-            <a:spAutoFit/>
-          </a:bodyPr>
-          <a:lstStyle/>
-          <a:p>
-            <a:pPr algn="l">
-              <a:spcAft>
-                <a:spcPts val="300"/>
-              </a:spcAft>
-              <a:defRPr sz="3200">
-                <a:solidFill>
-                  <a:srgbClr val="FFFFFF"/>
-                </a:solidFill>
-                <a:latin typeface="Play"/>
-                <a:ea typeface="Play"/>
-                <a:cs typeface="Play"/>
-              </a:defRPr>
-            </a:pPr>
-            <a:r>
-              <a:rPr sz="3200">
-                <a:solidFill>
-                  <a:srgbClr val="FFFFFF"/>
-                </a:solidFill>
-                <a:latin typeface="Play"/>
-                <a:ea typeface="Play"/>
-                <a:cs typeface="Play"/>
-              </a:rPr>
-              <a:t>Что потребуется: ресурсы и сроки</a:t>
-            </a:r>
-          </a:p>
-        </p:txBody>
-      </p:sp>
-      <p:sp>
-        <p:nvSpPr>
-          <p:cNvPr id="682" name="body"/>
-          <p:cNvSpPr txBox="1"/>
-          <p:nvPr/>
-        </p:nvSpPr>
-        <p:spPr>
-          <a:xfrm>
-            <a:off x="427817" y="1837052"/>
-            <a:ext cx="5473293" cy="4092168"/>
-          </a:xfrm>
-          <a:prstGeom prst="rect">
-            <a:avLst/>
-          </a:prstGeom>
-          <a:noFill/>
-        </p:spPr>
-        <p:txBody>
-          <a:bodyPr wrap="square" lIns="76200" rIns="76200" tIns="50800" bIns="50800">
-            <a:spAutoFit/>
-          </a:bodyPr>
-          <a:lstStyle/>
-          <a:p>
-            <a:pPr algn="l">
-              <a:spcAft>
-                <a:spcPts val="300"/>
-              </a:spcAft>
-              <a:defRPr sz="1600">
-                <a:solidFill>
-                  <a:srgbClr val="FFFFFF"/>
-                </a:solidFill>
-                <a:latin typeface="Play"/>
-                <a:ea typeface="Play"/>
-                <a:cs typeface="Play"/>
-              </a:defRPr>
-            </a:pPr>
-            <a:r>
-              <a:rPr sz="1600">
-                <a:solidFill>
-                  <a:srgbClr val="FFFFFF"/>
-                </a:solidFill>
-                <a:latin typeface="Play"/>
-                <a:ea typeface="Play"/>
-                <a:cs typeface="Play"/>
-              </a:rPr>
-              <a:t>• Сервис работает на 2 vCPU / 2 ГБ RAM</a:t>
-            </a:r>
-          </a:p>
-          <a:p>
-            <a:pPr algn="l">
-              <a:spcAft>
-                <a:spcPts val="300"/>
-              </a:spcAft>
-              <a:defRPr sz="1600">
-                <a:solidFill>
-                  <a:srgbClr val="FFFFFF"/>
-                </a:solidFill>
-                <a:latin typeface="Play"/>
-                <a:ea typeface="Play"/>
-                <a:cs typeface="Play"/>
-              </a:defRPr>
-            </a:pPr>
-            <a:r>
-              <a:rPr sz="1600">
-                <a:solidFill>
-                  <a:srgbClr val="FFFFFF"/>
-                </a:solidFill>
-                <a:latin typeface="Play"/>
-                <a:ea typeface="Play"/>
-                <a:cs typeface="Play"/>
-              </a:rPr>
-              <a:t>• Инференс за 6 недель 1 400 руб</a:t>
-            </a:r>
-          </a:p>
-          <a:p>
-            <a:pPr algn="l">
-              <a:spcAft>
-                <a:spcPts val="300"/>
-              </a:spcAft>
-              <a:defRPr sz="1600">
-                <a:solidFill>
-                  <a:srgbClr val="FFFFFF"/>
-                </a:solidFill>
-                <a:latin typeface="Play"/>
-                <a:ea typeface="Play"/>
-                <a:cs typeface="Play"/>
-              </a:defRPr>
-            </a:pPr>
-            <a:r>
-              <a:rPr sz="1600">
-                <a:solidFill>
-                  <a:srgbClr val="FFFFFF"/>
-                </a:solidFill>
-                <a:latin typeface="Play"/>
-                <a:ea typeface="Play"/>
-                <a:cs typeface="Play"/>
-              </a:rPr>
-              <a:t>• Модель gpt-oss-20b подключается по OpenAI-совместимому протоколу</a:t>
-            </a:r>
-          </a:p>
-        </p:txBody>
-      </p:sp>
-      <p:sp>
-        <p:nvSpPr>
-          <p:cNvPr id="683" name="Rectangle 682"/>
-          <p:cNvSpPr/>
-          <p:nvPr/>
-        </p:nvSpPr>
-        <p:spPr>
-          <a:xfrm>
-            <a:off x="6266870" y="3719449"/>
-            <a:ext cx="5473293" cy="122765"/>
-          </a:xfrm>
-          <a:prstGeom prst="rect">
-            <a:avLst/>
-          </a:prstGeom>
-          <a:solidFill>
-            <a:srgbClr val="0077FF"/>
-          </a:solidFill>
-          <a:ln>
-            <a:noFill/>
-          </a:ln>
-        </p:spPr>
-        <p:style>
-          <a:lnRef idx="1">
-            <a:schemeClr val="accent1"/>
-          </a:lnRef>
-          <a:fillRef idx="3">
-            <a:schemeClr val="accent1"/>
-          </a:fillRef>
-          <a:effectRef idx="2">
-            <a:schemeClr val="accent1"/>
-          </a:effectRef>
-          <a:fontRef idx="minor">
-            <a:schemeClr val="lt1"/>
-          </a:fontRef>
-        </p:style>
-        <p:txBody>
-          <a:bodyPr rtlCol="0" anchor="ctr"/>
-          <a:lstStyle/>
-          <a:p>
-            <a:pPr algn="ctr"/>
-          </a:p>
-        </p:txBody>
-      </p:sp>
-      <p:sp>
-        <p:nvSpPr>
-          <p:cNvPr id="684" name="Oval 683"/>
-          <p:cNvSpPr/>
-          <p:nvPr/>
-        </p:nvSpPr>
-        <p:spPr>
-          <a:xfrm>
-            <a:off x="6905420" y="3507167"/>
-            <a:ext cx="547329" cy="547329"/>
-          </a:xfrm>
-          <a:prstGeom prst="ellipse">
-            <a:avLst/>
-          </a:prstGeom>
-          <a:solidFill>
-            <a:srgbClr val="0077FF"/>
-          </a:solidFill>
-          <a:ln>
-            <a:noFill/>
-          </a:ln>
-        </p:spPr>
-        <p:style>
-          <a:lnRef idx="1">
-            <a:schemeClr val="accent1"/>
-          </a:lnRef>
-          <a:fillRef idx="3">
-            <a:schemeClr val="accent1"/>
-          </a:fillRef>
-          <a:effectRef idx="2">
-            <a:schemeClr val="accent1"/>
-          </a:effectRef>
-          <a:fontRef idx="minor">
-            <a:schemeClr val="lt1"/>
-          </a:fontRef>
-        </p:style>
-        <p:txBody>
-          <a:bodyPr rtlCol="0" anchor="ctr"/>
-          <a:lstStyle/>
-          <a:p>
-            <a:pPr algn="ctr"/>
-          </a:p>
-        </p:txBody>
-      </p:sp>
-      <p:sp>
-        <p:nvSpPr>
-          <p:cNvPr id="685" name="TextBox 684"/>
-          <p:cNvSpPr txBox="1"/>
-          <p:nvPr/>
-        </p:nvSpPr>
-        <p:spPr>
-          <a:xfrm>
-            <a:off x="6266870" y="1837052"/>
-            <a:ext cx="2736646" cy="1555023"/>
-          </a:xfrm>
-          <a:prstGeom prst="rect">
-            <a:avLst/>
-          </a:prstGeom>
-          <a:noFill/>
-        </p:spPr>
-        <p:txBody>
-          <a:bodyPr wrap="square" lIns="12700" rIns="12700" tIns="12700" bIns="12700">
-            <a:spAutoFit/>
-          </a:bodyPr>
-          <a:lstStyle/>
-          <a:p>
-            <a:pPr algn="ctr">
-              <a:defRPr sz="1400" b="0">
-                <a:solidFill>
-                  <a:srgbClr val="FFFFFF"/>
-                </a:solidFill>
-                <a:latin typeface="Play"/>
-                <a:ea typeface="Play"/>
-                <a:cs typeface="Play"/>
-              </a:defRPr>
-            </a:pPr>
-            <a:r>
-              <a:rPr sz="1400" b="0">
-                <a:solidFill>
-                  <a:srgbClr val="FFFFFF"/>
-                </a:solidFill>
-                <a:latin typeface="Play"/>
-                <a:ea typeface="Play"/>
-                <a:cs typeface="Play"/>
-              </a:rPr>
-              <a:t>Третий квартал 2026 подключение 4 команд</a:t>
-            </a:r>
-          </a:p>
-        </p:txBody>
-      </p:sp>
-      <p:sp>
-        <p:nvSpPr>
-          <p:cNvPr id="686" name="Oval 685"/>
-          <p:cNvSpPr/>
-          <p:nvPr/>
-        </p:nvSpPr>
-        <p:spPr>
-          <a:xfrm>
-            <a:off x="8729851" y="3507167"/>
-            <a:ext cx="547329" cy="547329"/>
-          </a:xfrm>
-          <a:prstGeom prst="ellipse">
-            <a:avLst/>
-          </a:prstGeom>
-          <a:solidFill>
-            <a:srgbClr val="0077FF"/>
-          </a:solidFill>
-          <a:ln>
-            <a:noFill/>
-          </a:ln>
-        </p:spPr>
-        <p:style>
-          <a:lnRef idx="1">
-            <a:schemeClr val="accent1"/>
-          </a:lnRef>
-          <a:fillRef idx="3">
-            <a:schemeClr val="accent1"/>
-          </a:fillRef>
-          <a:effectRef idx="2">
-            <a:schemeClr val="accent1"/>
-          </a:effectRef>
-          <a:fontRef idx="minor">
-            <a:schemeClr val="lt1"/>
-          </a:fontRef>
-        </p:style>
-        <p:txBody>
-          <a:bodyPr rtlCol="0" anchor="ctr"/>
-          <a:lstStyle/>
-          <a:p>
-            <a:pPr algn="ctr"/>
-          </a:p>
-        </p:txBody>
-      </p:sp>
-      <p:sp>
-        <p:nvSpPr>
-          <p:cNvPr id="687" name="TextBox 686"/>
-          <p:cNvSpPr txBox="1"/>
-          <p:nvPr/>
-        </p:nvSpPr>
-        <p:spPr>
-          <a:xfrm>
-            <a:off x="7635193" y="4266778"/>
-            <a:ext cx="2736646" cy="1555023"/>
-          </a:xfrm>
-          <a:prstGeom prst="rect">
-            <a:avLst/>
-          </a:prstGeom>
-          <a:noFill/>
-        </p:spPr>
-        <p:txBody>
-          <a:bodyPr wrap="square" lIns="12700" rIns="12700" tIns="12700" bIns="12700">
-            <a:spAutoFit/>
-          </a:bodyPr>
-          <a:lstStyle/>
-          <a:p>
-            <a:pPr algn="ctr">
-              <a:defRPr sz="1400" b="0">
-                <a:solidFill>
-                  <a:srgbClr val="FFFFFF"/>
-                </a:solidFill>
-                <a:latin typeface="Play"/>
-                <a:ea typeface="Play"/>
-                <a:cs typeface="Play"/>
-              </a:defRPr>
-            </a:pPr>
-            <a:r>
-              <a:rPr sz="1400" b="0">
-                <a:solidFill>
-                  <a:srgbClr val="FFFFFF"/>
-                </a:solidFill>
-                <a:latin typeface="Play"/>
-                <a:ea typeface="Play"/>
-                <a:cs typeface="Play"/>
-              </a:rPr>
-              <a:t>Четвёртый квартал 2026 доступ для всей компании</a:t>
-            </a:r>
-          </a:p>
-        </p:txBody>
-      </p:sp>
-      <p:sp>
-        <p:nvSpPr>
-          <p:cNvPr id="688" name="Oval 687"/>
-          <p:cNvSpPr/>
-          <p:nvPr/>
-        </p:nvSpPr>
-        <p:spPr>
-          <a:xfrm>
-            <a:off x="10554282" y="3507167"/>
-            <a:ext cx="547329" cy="547329"/>
-          </a:xfrm>
-          <a:prstGeom prst="ellipse">
-            <a:avLst/>
-          </a:prstGeom>
-          <a:solidFill>
-            <a:srgbClr val="0077FF"/>
-          </a:solidFill>
-          <a:ln>
-            <a:noFill/>
-          </a:ln>
-        </p:spPr>
-        <p:style>
-          <a:lnRef idx="1">
-            <a:schemeClr val="accent1"/>
-          </a:lnRef>
-          <a:fillRef idx="3">
-            <a:schemeClr val="accent1"/>
-          </a:fillRef>
-          <a:effectRef idx="2">
-            <a:schemeClr val="accent1"/>
-          </a:effectRef>
-          <a:fontRef idx="minor">
-            <a:schemeClr val="lt1"/>
-          </a:fontRef>
-        </p:style>
-        <p:txBody>
-          <a:bodyPr rtlCol="0" anchor="ctr"/>
-          <a:lstStyle/>
-          <a:p>
-            <a:pPr algn="ctr"/>
-          </a:p>
-        </p:txBody>
-      </p:sp>
-      <p:sp>
-        <p:nvSpPr>
-          <p:cNvPr id="689" name="TextBox 688"/>
-          <p:cNvSpPr txBox="1"/>
-          <p:nvPr/>
-        </p:nvSpPr>
-        <p:spPr>
-          <a:xfrm>
-            <a:off x="9003516" y="1837052"/>
-            <a:ext cx="2736646" cy="1555023"/>
-          </a:xfrm>
-          <a:prstGeom prst="rect">
-            <a:avLst/>
-          </a:prstGeom>
-          <a:noFill/>
-        </p:spPr>
-        <p:txBody>
-          <a:bodyPr wrap="square" lIns="12700" rIns="12700" tIns="12700" bIns="12700">
-            <a:spAutoFit/>
-          </a:bodyPr>
-          <a:lstStyle/>
-          <a:p>
-            <a:pPr algn="ctr">
-              <a:defRPr sz="1400" b="0">
-                <a:solidFill>
-                  <a:srgbClr val="FFFFFF"/>
-                </a:solidFill>
-                <a:latin typeface="Play"/>
-                <a:ea typeface="Play"/>
-                <a:cs typeface="Play"/>
-              </a:defRPr>
-            </a:pPr>
-            <a:r>
-              <a:rPr sz="1400" b="0">
-                <a:solidFill>
-                  <a:srgbClr val="FFFFFF"/>
-                </a:solidFill>
-                <a:latin typeface="Play"/>
-                <a:ea typeface="Play"/>
-                <a:cs typeface="Play"/>
-              </a:rPr>
-              <a:t>Первый квартал 2027 генерация иллюстраций</a:t>
-            </a:r>
-          </a:p>
-        </p:txBody>
-      </p:sp>
-    </p:spTree>
-  </p:cSld>
-  <p:clrMapOvr>
-    <a:masterClrMapping/>
-  </p:clrMapOvr>
-</p:sld>
-</file>
-
-<file path=ppt/slides/slide35.xml><?xml version="1.0" encoding="utf-8"?>
-<p:sld xmlns:a="http://schemas.openxmlformats.org/drawingml/2006/main" xmlns:p="http://schemas.openxmlformats.org/presentationml/2006/main" xmlns:r="http://schemas.openxmlformats.org/officeDocument/2006/relationships">
-  <p:cSld>
-    <p:spTree>
-      <p:nvGrpSpPr>
-        <p:cNvPr id="1" name=""/>
-        <p:cNvGrpSpPr/>
-        <p:nvPr/>
-      </p:nvGrpSpPr>
-      <p:grpSpPr/>
-      <p:sp>
-        <p:nvSpPr>
-          <p:cNvPr id="2" name="title"/>
-          <p:cNvSpPr txBox="1"/>
-          <p:nvPr/>
-        </p:nvSpPr>
-        <p:spPr>
-          <a:xfrm>
-            <a:off x="429280" y="424715"/>
-            <a:ext cx="7827264" cy="822960"/>
-          </a:xfrm>
-          <a:prstGeom prst="rect">
-            <a:avLst/>
-          </a:prstGeom>
-          <a:noFill/>
-        </p:spPr>
-        <p:txBody>
-          <a:bodyPr wrap="square" lIns="76200" rIns="76200" tIns="50800" bIns="50800">
-            <a:spAutoFit/>
-          </a:bodyPr>
-          <a:lstStyle/>
-          <a:p>
-            <a:pPr algn="l">
-              <a:spcAft>
-                <a:spcPts val="300"/>
-              </a:spcAft>
-              <a:defRPr sz="3200">
-                <a:solidFill>
-                  <a:srgbClr val="FFFFFF"/>
-                </a:solidFill>
-                <a:latin typeface="Play"/>
-                <a:ea typeface="Play"/>
-                <a:cs typeface="Play"/>
-              </a:defRPr>
-            </a:pPr>
-            <a:r>
-              <a:rPr sz="3200">
-                <a:solidFill>
-                  <a:srgbClr val="FFFFFF"/>
-                </a:solidFill>
-                <a:latin typeface="Play"/>
-                <a:ea typeface="Play"/>
-                <a:cs typeface="Play"/>
-              </a:rPr>
-              <a:t>Риски</a:t>
-            </a:r>
-          </a:p>
-        </p:txBody>
-      </p:sp>
-      <p:sp>
-        <p:nvSpPr>
-          <p:cNvPr id="3" name="body"/>
-          <p:cNvSpPr txBox="1"/>
-          <p:nvPr/>
-        </p:nvSpPr>
-        <p:spPr>
-          <a:xfrm>
-            <a:off x="429280" y="1666494"/>
-            <a:ext cx="11310884" cy="3525012"/>
-          </a:xfrm>
-          <a:prstGeom prst="rect">
-            <a:avLst/>
-          </a:prstGeom>
-          <a:noFill/>
-        </p:spPr>
-        <p:txBody>
-          <a:bodyPr wrap="square" lIns="76200" rIns="76200" tIns="50800" bIns="50800">
-            <a:spAutoFit/>
-          </a:bodyPr>
-          <a:lstStyle/>
-          <a:p>
-            <a:pPr algn="l">
-              <a:spcAft>
-                <a:spcPts val="300"/>
-              </a:spcAft>
-              <a:defRPr sz="2800">
-                <a:solidFill>
-                  <a:srgbClr val="FFFFFF"/>
-                </a:solidFill>
-                <a:latin typeface="Play"/>
-                <a:ea typeface="Play"/>
-                <a:cs typeface="Play"/>
-              </a:defRPr>
-            </a:pPr>
-            <a:r>
-              <a:rPr sz="2800">
-                <a:solidFill>
-                  <a:srgbClr val="FFFFFF"/>
-                </a:solidFill>
-                <a:latin typeface="Play"/>
-                <a:ea typeface="Play"/>
-                <a:cs typeface="Play"/>
-              </a:rPr>
-              <a:t>• Слабая модель может выдумать цифру, аудит проверяет каждое число</a:t>
-            </a:r>
-          </a:p>
-          <a:p>
-            <a:pPr algn="l">
-              <a:spcAft>
-                <a:spcPts val="300"/>
-              </a:spcAft>
-              <a:defRPr sz="2800">
-                <a:solidFill>
-                  <a:srgbClr val="FFFFFF"/>
-                </a:solidFill>
-                <a:latin typeface="Play"/>
-                <a:ea typeface="Play"/>
-                <a:cs typeface="Play"/>
-              </a:defRPr>
-            </a:pPr>
-            <a:r>
-              <a:rPr sz="2800">
-                <a:solidFill>
-                  <a:srgbClr val="FFFFFF"/>
-                </a:solidFill>
-                <a:latin typeface="Play"/>
-                <a:ea typeface="Play"/>
-                <a:cs typeface="Play"/>
-              </a:rPr>
-              <a:t>• Незнакомый шаблон может быть плохо сделанным, сервис использует рабочую область</a:t>
-            </a:r>
-          </a:p>
-          <a:p>
-            <a:pPr algn="l">
-              <a:spcAft>
-                <a:spcPts val="300"/>
-              </a:spcAft>
-              <a:defRPr sz="2800">
-                <a:solidFill>
-                  <a:srgbClr val="FFFFFF"/>
-                </a:solidFill>
-                <a:latin typeface="Play"/>
-                <a:ea typeface="Play"/>
-                <a:cs typeface="Play"/>
-              </a:defRPr>
-            </a:pPr>
-            <a:r>
-              <a:rPr sz="2800">
-                <a:solidFill>
-                  <a:srgbClr val="FFFFFF"/>
-                </a:solidFill>
-                <a:latin typeface="Play"/>
-                <a:ea typeface="Play"/>
-                <a:cs typeface="Play"/>
-              </a:rPr>
-              <a:t>• Нагрузка выше 20 задач требует внешней очереди</a:t>
-            </a:r>
-          </a:p>
-        </p:txBody>
-      </p:sp>
-    </p:spTree>
-  </p:cSld>
-  <p:clrMapOvr>
-    <a:masterClrMapping/>
-  </p:clrMapOvr>
-</p:sld>
-</file>
-
-<file path=ppt/slides/slide36.xml><?xml version="1.0" encoding="utf-8"?>
-<p:sld xmlns:a="http://schemas.openxmlformats.org/drawingml/2006/main" xmlns:p="http://schemas.openxmlformats.org/presentationml/2006/main" xmlns:r="http://schemas.openxmlformats.org/officeDocument/2006/relationships">
-  <p:cSld>
-    <p:spTree>
-      <p:nvGrpSpPr>
-        <p:cNvPr id="1" name=""/>
-        <p:cNvGrpSpPr/>
-        <p:nvPr/>
-      </p:nvGrpSpPr>
-      <p:grpSpPr/>
-      <p:sp>
-        <p:nvSpPr>
-          <p:cNvPr id="679" name="Google Shape;679;p31"/>
-          <p:cNvSpPr/>
-          <p:nvPr/>
-        </p:nvSpPr>
-        <p:spPr>
-          <a:xfrm>
-            <a:off x="0" y="4748271"/>
-            <a:ext cx="12192000" cy="2109730"/>
-          </a:xfrm>
-          <a:prstGeom prst="rect">
-            <a:avLst/>
-          </a:prstGeom>
-          <a:gradFill>
-            <a:gsLst>
-              <a:gs pos="0">
-                <a:srgbClr val="0077FF">
-                  <a:alpha val="61961"/>
-                </a:srgbClr>
-              </a:gs>
-              <a:gs pos="99000">
-                <a:srgbClr val="00AEE8"/>
-              </a:gs>
-              <a:gs pos="100000">
-                <a:srgbClr val="00AEE8"/>
-              </a:gs>
-            </a:gsLst>
-            <a:lin ang="14400000" scaled="0"/>
-          </a:gradFill>
-          <a:ln>
-            <a:noFill/>
-          </a:ln>
-        </p:spPr>
-        <p:txBody>
-          <a:bodyPr anchorCtr="0" anchor="ctr" bIns="0" lIns="108000" spcFirstLastPara="1" rIns="91425" wrap="square" tIns="0">
-            <a:noAutofit/>
-          </a:bodyPr>
-          <a:lstStyle/>
-          <a:p>
-            <a:pPr indent="0" lvl="0" marL="0" marR="0" rtl="0" algn="l">
-              <a:spcBef>
-                <a:spcPts val="0"/>
-              </a:spcBef>
-              <a:spcAft>
-                <a:spcPts val="0"/>
-              </a:spcAft>
-              <a:buNone/>
-            </a:pPr>
-            <a:r>
-              <a:t/>
-            </a:r>
-            <a:endParaRPr sz="1100">
-              <a:solidFill>
-                <a:schemeClr val="lt1"/>
-              </a:solidFill>
-              <a:latin typeface="Play"/>
-              <a:ea typeface="Play"/>
-              <a:cs typeface="Play"/>
-              <a:sym typeface="Play"/>
-            </a:endParaRPr>
-          </a:p>
-        </p:txBody>
-      </p:sp>
-      <p:sp>
-        <p:nvSpPr>
-          <p:cNvPr id="680" name="Rounded Rectangle 679"/>
-          <p:cNvSpPr/>
-          <p:nvPr/>
-        </p:nvSpPr>
-        <p:spPr>
-          <a:xfrm>
-            <a:off x="300817" y="297715"/>
-            <a:ext cx="11566347" cy="4079336"/>
           </a:xfrm>
           <a:prstGeom prst="roundRect">
             <a:avLst/>
@@ -11804,7 +10733,7 @@
                 <a:ea typeface="Play"/>
                 <a:cs typeface="Play"/>
               </a:rPr>
-              <a:t>План пилота</a:t>
+              <a:t>Результаты пилота: время</a:t>
             </a:r>
           </a:p>
         </p:txBody>
@@ -11818,7 +10747,7 @@
         <p:spPr>
           <a:xfrm>
             <a:off x="427817" y="1837052"/>
-            <a:ext cx="11312347" cy="4092168"/>
+            <a:ext cx="5473293" cy="4092168"/>
           </a:xfrm>
           <a:prstGeom prst="rect">
             <a:avLst/>
@@ -11835,6 +10764,406 @@
               <a:spcAft>
                 <a:spcPts val="300"/>
               </a:spcAft>
+              <a:defRPr sz="1600">
+                <a:solidFill>
+                  <a:srgbClr val="FFFFFF"/>
+                </a:solidFill>
+                <a:latin typeface="Play"/>
+                <a:ea typeface="Play"/>
+                <a:cs typeface="Play"/>
+              </a:defRPr>
+            </a:pPr>
+            <a:r>
+              <a:rPr sz="1600">
+                <a:solidFill>
+                  <a:srgbClr val="FFFFFF"/>
+                </a:solidFill>
+                <a:latin typeface="Play"/>
+                <a:ea typeface="Play"/>
+                <a:cs typeface="Play"/>
+              </a:rPr>
+              <a:t>• 68 презентаций собраны за 6 недель</a:t>
+            </a:r>
+          </a:p>
+          <a:p>
+            <a:pPr algn="l">
+              <a:spcAft>
+                <a:spcPts val="300"/>
+              </a:spcAft>
+              <a:defRPr sz="1600">
+                <a:solidFill>
+                  <a:srgbClr val="FFFFFF"/>
+                </a:solidFill>
+                <a:latin typeface="Play"/>
+                <a:ea typeface="Play"/>
+                <a:cs typeface="Play"/>
+              </a:defRPr>
+            </a:pPr>
+            <a:r>
+              <a:rPr sz="1600">
+                <a:solidFill>
+                  <a:srgbClr val="FFFFFF"/>
+                </a:solidFill>
+                <a:latin typeface="Play"/>
+                <a:ea typeface="Play"/>
+                <a:cs typeface="Play"/>
+              </a:rPr>
+              <a:t>• Средняя сборка 4 минуты вместо 186</a:t>
+            </a:r>
+          </a:p>
+          <a:p>
+            <a:pPr algn="l">
+              <a:spcAft>
+                <a:spcPts val="300"/>
+              </a:spcAft>
+              <a:defRPr sz="1600">
+                <a:solidFill>
+                  <a:srgbClr val="FFFFFF"/>
+                </a:solidFill>
+                <a:latin typeface="Play"/>
+                <a:ea typeface="Play"/>
+                <a:cs typeface="Play"/>
+              </a:defRPr>
+            </a:pPr>
+            <a:r>
+              <a:rPr sz="1600">
+                <a:solidFill>
+                  <a:srgbClr val="FFFFFF"/>
+                </a:solidFill>
+                <a:latin typeface="Play"/>
+                <a:ea typeface="Play"/>
+                <a:cs typeface="Play"/>
+              </a:rPr>
+              <a:t>• Время до первой версии сократилось с 6 дней до 1</a:t>
+            </a:r>
+          </a:p>
+        </p:txBody>
+      </p:sp>
+      <p:graphicFrame>
+        <p:nvGraphicFramePr>
+          <p:cNvPr id="683" name="Chart 682"/>
+          <p:cNvGraphicFramePr>
+            <a:graphicFrameLocks noGrp="1"/>
+          </p:cNvGraphicFramePr>
+          <p:nvPr/>
+        </p:nvGraphicFramePr>
+        <p:xfrm>
+          <a:off x="6266870" y="1837052"/>
+          <a:ext cx="5473293" cy="4092168"/>
+        </p:xfrm>
+        <a:graphic>
+          <a:graphicData uri="http://schemas.openxmlformats.org/drawingml/2006/chart">
+            <c:chart xmlns:c="http://schemas.openxmlformats.org/drawingml/2006/chart" r:id="rId2"/>
+          </a:graphicData>
+        </a:graphic>
+      </p:graphicFrame>
+    </p:spTree>
+  </p:cSld>
+  <p:clrMapOvr>
+    <a:masterClrMapping/>
+  </p:clrMapOvr>
+</p:sld>
+</file>
+
+<file path=ppt/slides/slide34.xml><?xml version="1.0" encoding="utf-8"?>
+<p:sld xmlns:a="http://schemas.openxmlformats.org/drawingml/2006/main" xmlns:p="http://schemas.openxmlformats.org/presentationml/2006/main" xmlns:r="http://schemas.openxmlformats.org/officeDocument/2006/relationships">
+  <p:cSld>
+    <p:spTree>
+      <p:nvGrpSpPr>
+        <p:cNvPr id="1" name=""/>
+        <p:cNvGrpSpPr/>
+        <p:nvPr/>
+      </p:nvGrpSpPr>
+      <p:grpSpPr/>
+      <p:pic>
+        <p:nvPicPr>
+          <p:cNvPr id="620" name="Google Shape;620;p28"/>
+          <p:cNvPicPr preferRelativeResize="0"/>
+          <p:nvPr/>
+        </p:nvPicPr>
+        <p:blipFill rotWithShape="1">
+          <a:blip r:embed="rId3">
+            <a:alphaModFix/>
+          </a:blip>
+          <a:srcRect b="0" l="0" r="0" t="0"/>
+          <a:stretch/>
+        </p:blipFill>
+        <p:spPr>
+          <a:xfrm>
+            <a:off x="398723" y="6160516"/>
+            <a:ext cx="1857481" cy="292671"/>
+          </a:xfrm>
+          <a:prstGeom prst="rect">
+            <a:avLst/>
+          </a:prstGeom>
+          <a:noFill/>
+          <a:ln>
+            <a:noFill/>
+          </a:ln>
+        </p:spPr>
+      </p:pic>
+      <p:pic>
+        <p:nvPicPr>
+          <p:cNvPr descr=" " id="621" name="Google Shape;621;p28"/>
+          <p:cNvPicPr preferRelativeResize="0"/>
+          <p:nvPr/>
+        </p:nvPicPr>
+        <p:blipFill rotWithShape="1">
+          <a:blip r:embed="rId4">
+            <a:alphaModFix/>
+          </a:blip>
+          <a:srcRect b="0" l="0" r="0" t="0"/>
+          <a:stretch/>
+        </p:blipFill>
+        <p:spPr>
+          <a:xfrm>
+            <a:off x="11093496" y="6238282"/>
+            <a:ext cx="690517" cy="216000"/>
+          </a:xfrm>
+          <a:prstGeom prst="rect">
+            <a:avLst/>
+          </a:prstGeom>
+          <a:noFill/>
+          <a:ln>
+            <a:noFill/>
+          </a:ln>
+        </p:spPr>
+      </p:pic>
+      <p:sp>
+        <p:nvSpPr>
+          <p:cNvPr id="622" name="title"/>
+          <p:cNvSpPr txBox="1"/>
+          <p:nvPr/>
+        </p:nvSpPr>
+        <p:spPr>
+          <a:xfrm>
+            <a:off x="429280" y="424715"/>
+            <a:ext cx="7827264" cy="1183640"/>
+          </a:xfrm>
+          <a:prstGeom prst="rect">
+            <a:avLst/>
+          </a:prstGeom>
+          <a:noFill/>
+        </p:spPr>
+        <p:txBody>
+          <a:bodyPr wrap="square" lIns="76200" rIns="76200" tIns="50800" bIns="50800">
+            <a:spAutoFit/>
+          </a:bodyPr>
+          <a:lstStyle/>
+          <a:p>
+            <a:pPr algn="l">
+              <a:spcAft>
+                <a:spcPts val="300"/>
+              </a:spcAft>
+              <a:defRPr sz="3200">
+                <a:solidFill>
+                  <a:srgbClr val="FFFFFF"/>
+                </a:solidFill>
+                <a:latin typeface="Play"/>
+                <a:ea typeface="Play"/>
+                <a:cs typeface="Play"/>
+              </a:defRPr>
+            </a:pPr>
+            <a:r>
+              <a:rPr sz="3200">
+                <a:solidFill>
+                  <a:srgbClr val="FFFFFF"/>
+                </a:solidFill>
+                <a:latin typeface="Play"/>
+                <a:ea typeface="Play"/>
+                <a:cs typeface="Play"/>
+              </a:rPr>
+              <a:t>Результаты пилота: качество и нагрузка</a:t>
+            </a:r>
+          </a:p>
+        </p:txBody>
+      </p:sp>
+      <p:sp>
+        <p:nvSpPr>
+          <p:cNvPr id="623" name="body"/>
+          <p:cNvSpPr txBox="1"/>
+          <p:nvPr/>
+        </p:nvSpPr>
+        <p:spPr>
+          <a:xfrm>
+            <a:off x="429280" y="1745515"/>
+            <a:ext cx="5472562" cy="3665377"/>
+          </a:xfrm>
+          <a:prstGeom prst="rect">
+            <a:avLst/>
+          </a:prstGeom>
+          <a:noFill/>
+        </p:spPr>
+        <p:txBody>
+          <a:bodyPr wrap="square" lIns="76200" rIns="76200" tIns="50800" bIns="50800">
+            <a:spAutoFit/>
+          </a:bodyPr>
+          <a:lstStyle/>
+          <a:p>
+            <a:pPr algn="l">
+              <a:spcAft>
+                <a:spcPts val="300"/>
+              </a:spcAft>
+              <a:defRPr sz="2000">
+                <a:solidFill>
+                  <a:srgbClr val="FFFFFF"/>
+                </a:solidFill>
+                <a:latin typeface="Play"/>
+                <a:ea typeface="Play"/>
+                <a:cs typeface="Play"/>
+              </a:defRPr>
+            </a:pPr>
+            <a:r>
+              <a:rPr sz="2000">
+                <a:solidFill>
+                  <a:srgbClr val="FFFFFF"/>
+                </a:solidFill>
+                <a:latin typeface="Play"/>
+                <a:ea typeface="Play"/>
+                <a:cs typeface="Play"/>
+              </a:rPr>
+              <a:t>• Нарушений фирменного стиля 2 из 68 колод</a:t>
+            </a:r>
+          </a:p>
+          <a:p>
+            <a:pPr algn="l">
+              <a:spcAft>
+                <a:spcPts val="300"/>
+              </a:spcAft>
+              <a:defRPr sz="2000">
+                <a:solidFill>
+                  <a:srgbClr val="FFFFFF"/>
+                </a:solidFill>
+                <a:latin typeface="Play"/>
+                <a:ea typeface="Play"/>
+                <a:cs typeface="Play"/>
+              </a:defRPr>
+            </a:pPr>
+            <a:r>
+              <a:rPr sz="2000">
+                <a:solidFill>
+                  <a:srgbClr val="FFFFFF"/>
+                </a:solidFill>
+                <a:latin typeface="Play"/>
+                <a:ea typeface="Play"/>
+                <a:cs typeface="Play"/>
+              </a:rPr>
+              <a:t>• Дизайнеры закрыли 38 запросов вместо 11 в неделю</a:t>
+            </a:r>
+          </a:p>
+        </p:txBody>
+      </p:sp>
+      <p:graphicFrame>
+        <p:nvGraphicFramePr>
+          <p:cNvPr id="624" name="Chart 623"/>
+          <p:cNvGraphicFramePr>
+            <a:graphicFrameLocks noGrp="1"/>
+          </p:cNvGraphicFramePr>
+          <p:nvPr/>
+        </p:nvGraphicFramePr>
+        <p:xfrm>
+          <a:off x="6267602" y="1745515"/>
+          <a:ext cx="5472562" cy="3665377"/>
+        </p:xfrm>
+        <a:graphic>
+          <a:graphicData uri="http://schemas.openxmlformats.org/drawingml/2006/chart">
+            <c:chart xmlns:c="http://schemas.openxmlformats.org/drawingml/2006/chart" r:id="rId5"/>
+          </a:graphicData>
+        </a:graphic>
+      </p:graphicFrame>
+    </p:spTree>
+  </p:cSld>
+  <p:clrMapOvr>
+    <a:masterClrMapping/>
+  </p:clrMapOvr>
+</p:sld>
+</file>
+
+<file path=ppt/slides/slide35.xml><?xml version="1.0" encoding="utf-8"?>
+<p:sld xmlns:a="http://schemas.openxmlformats.org/drawingml/2006/main" xmlns:p="http://schemas.openxmlformats.org/presentationml/2006/main" xmlns:r="http://schemas.openxmlformats.org/officeDocument/2006/relationships">
+  <p:cSld>
+    <p:spTree>
+      <p:nvGrpSpPr>
+        <p:cNvPr id="1" name=""/>
+        <p:cNvGrpSpPr/>
+        <p:nvPr/>
+      </p:nvGrpSpPr>
+      <p:grpSpPr/>
+      <p:sp>
+        <p:nvSpPr>
+          <p:cNvPr id="2" name="title"/>
+          <p:cNvSpPr txBox="1"/>
+          <p:nvPr/>
+        </p:nvSpPr>
+        <p:spPr>
+          <a:xfrm>
+            <a:off x="429280" y="424715"/>
+            <a:ext cx="7827264" cy="822960"/>
+          </a:xfrm>
+          <a:prstGeom prst="rect">
+            <a:avLst/>
+          </a:prstGeom>
+          <a:noFill/>
+        </p:spPr>
+        <p:txBody>
+          <a:bodyPr wrap="square" lIns="76200" rIns="76200" tIns="50800" bIns="50800">
+            <a:spAutoFit/>
+          </a:bodyPr>
+          <a:lstStyle/>
+          <a:p>
+            <a:pPr algn="l">
+              <a:spcAft>
+                <a:spcPts val="300"/>
+              </a:spcAft>
+              <a:defRPr sz="3200">
+                <a:solidFill>
+                  <a:srgbClr val="FFFFFF"/>
+                </a:solidFill>
+                <a:latin typeface="Play"/>
+                <a:ea typeface="Play"/>
+                <a:cs typeface="Play"/>
+              </a:defRPr>
+            </a:pPr>
+            <a:r>
+              <a:rPr sz="3200">
+                <a:solidFill>
+                  <a:srgbClr val="FFFFFF"/>
+                </a:solidFill>
+                <a:latin typeface="Play"/>
+                <a:ea typeface="Play"/>
+                <a:cs typeface="Play"/>
+              </a:rPr>
+              <a:t>Стоимость и ресурсы</a:t>
+            </a:r>
+          </a:p>
+        </p:txBody>
+      </p:sp>
+      <p:sp>
+        <p:nvSpPr>
+          <p:cNvPr id="3" name="body"/>
+          <p:cNvSpPr txBox="1"/>
+          <p:nvPr/>
+        </p:nvSpPr>
+        <p:spPr>
+          <a:xfrm>
+            <a:off x="429280" y="1666494"/>
+            <a:ext cx="11310884" cy="3525012"/>
+          </a:xfrm>
+          <a:prstGeom prst="rect">
+            <a:avLst/>
+          </a:prstGeom>
+          <a:noFill/>
+        </p:spPr>
+        <p:txBody>
+          <a:bodyPr wrap="square" lIns="76200" rIns="76200" tIns="50800" bIns="50800">
+            <a:spAutoFit/>
+          </a:bodyPr>
+          <a:lstStyle/>
+          <a:p>
+            <a:pPr algn="l">
+              <a:spcAft>
+                <a:spcPts val="300"/>
+              </a:spcAft>
               <a:defRPr sz="2800">
                 <a:solidFill>
                   <a:srgbClr val="FFFFFF"/>
@@ -11853,7 +11182,7 @@
                 <a:ea typeface="Play"/>
                 <a:cs typeface="Play"/>
               </a:rPr>
-              <a:t>• Третий квартал 2026 подключение 4 команд, домен и HTTPS</a:t>
+              <a:t>• Сервис работает на 2 vCPU / 2 ГБ RAM</a:t>
             </a:r>
           </a:p>
           <a:p>
@@ -11879,7 +11208,7 @@
                 <a:ea typeface="Play"/>
                 <a:cs typeface="Play"/>
               </a:rPr>
-              <a:t>• Четвёртый квартал 2026 доступ для всей компании, интеграция с хранилищем</a:t>
+              <a:t>• Модель gpt-oss-20b подключается по OpenAI-совместимому протоколу</a:t>
             </a:r>
           </a:p>
           <a:p>
@@ -11905,7 +11234,614 @@
                 <a:ea typeface="Play"/>
                 <a:cs typeface="Play"/>
               </a:rPr>
-              <a:t>• Первый квартал 2027 генерация иллюстраций под стиль шаблона</a:t>
+              <a:t>• Стоимость инференса за 6 недель 1 400 рублей</a:t>
+            </a:r>
+          </a:p>
+        </p:txBody>
+      </p:sp>
+    </p:spTree>
+  </p:cSld>
+  <p:clrMapOvr>
+    <a:masterClrMapping/>
+  </p:clrMapOvr>
+</p:sld>
+</file>
+
+<file path=ppt/slides/slide36.xml><?xml version="1.0" encoding="utf-8"?>
+<p:sld xmlns:a="http://schemas.openxmlformats.org/drawingml/2006/main" xmlns:p="http://schemas.openxmlformats.org/presentationml/2006/main" xmlns:r="http://schemas.openxmlformats.org/officeDocument/2006/relationships">
+  <p:cSld>
+    <p:spTree>
+      <p:nvGrpSpPr>
+        <p:cNvPr id="1" name=""/>
+        <p:cNvGrpSpPr/>
+        <p:nvPr/>
+      </p:nvGrpSpPr>
+      <p:grpSpPr/>
+      <p:sp>
+        <p:nvSpPr>
+          <p:cNvPr id="2" name="title"/>
+          <p:cNvSpPr txBox="1"/>
+          <p:nvPr/>
+        </p:nvSpPr>
+        <p:spPr>
+          <a:xfrm>
+            <a:off x="429280" y="424715"/>
+            <a:ext cx="7827264" cy="822960"/>
+          </a:xfrm>
+          <a:prstGeom prst="rect">
+            <a:avLst/>
+          </a:prstGeom>
+          <a:noFill/>
+        </p:spPr>
+        <p:txBody>
+          <a:bodyPr wrap="square" lIns="76200" rIns="76200" tIns="50800" bIns="50800">
+            <a:spAutoFit/>
+          </a:bodyPr>
+          <a:lstStyle/>
+          <a:p>
+            <a:pPr algn="l">
+              <a:spcAft>
+                <a:spcPts val="300"/>
+              </a:spcAft>
+              <a:defRPr sz="3200">
+                <a:solidFill>
+                  <a:srgbClr val="FFFFFF"/>
+                </a:solidFill>
+                <a:latin typeface="Play"/>
+                <a:ea typeface="Play"/>
+                <a:cs typeface="Play"/>
+              </a:defRPr>
+            </a:pPr>
+            <a:r>
+              <a:rPr sz="3200">
+                <a:solidFill>
+                  <a:srgbClr val="FFFFFF"/>
+                </a:solidFill>
+                <a:latin typeface="Play"/>
+                <a:ea typeface="Play"/>
+                <a:cs typeface="Play"/>
+              </a:rPr>
+              <a:t>Риски</a:t>
+            </a:r>
+          </a:p>
+        </p:txBody>
+      </p:sp>
+      <p:sp>
+        <p:nvSpPr>
+          <p:cNvPr id="3" name="body"/>
+          <p:cNvSpPr txBox="1"/>
+          <p:nvPr/>
+        </p:nvSpPr>
+        <p:spPr>
+          <a:xfrm>
+            <a:off x="429280" y="1492575"/>
+            <a:ext cx="5472562" cy="4014604"/>
+          </a:xfrm>
+          <a:prstGeom prst="rect">
+            <a:avLst/>
+          </a:prstGeom>
+          <a:noFill/>
+        </p:spPr>
+        <p:txBody>
+          <a:bodyPr wrap="square" lIns="76200" rIns="76200" tIns="50800" bIns="50800">
+            <a:spAutoFit/>
+          </a:bodyPr>
+          <a:lstStyle/>
+          <a:p>
+            <a:pPr algn="l">
+              <a:spcAft>
+                <a:spcPts val="300"/>
+              </a:spcAft>
+              <a:defRPr sz="1600">
+                <a:solidFill>
+                  <a:srgbClr val="FFFFFF"/>
+                </a:solidFill>
+                <a:latin typeface="Play"/>
+                <a:ea typeface="Play"/>
+                <a:cs typeface="Play"/>
+              </a:defRPr>
+            </a:pPr>
+            <a:r>
+              <a:rPr sz="1600">
+                <a:solidFill>
+                  <a:srgbClr val="FFFFFF"/>
+                </a:solidFill>
+                <a:latin typeface="Play"/>
+                <a:ea typeface="Play"/>
+                <a:cs typeface="Play"/>
+              </a:rPr>
+              <a:t>• Модель может выдумать цифры, аудит проверяет каждое число</a:t>
+            </a:r>
+          </a:p>
+          <a:p>
+            <a:pPr algn="l">
+              <a:spcAft>
+                <a:spcPts val="300"/>
+              </a:spcAft>
+              <a:defRPr sz="1600">
+                <a:solidFill>
+                  <a:srgbClr val="FFFFFF"/>
+                </a:solidFill>
+                <a:latin typeface="Play"/>
+                <a:ea typeface="Play"/>
+                <a:cs typeface="Play"/>
+              </a:defRPr>
+            </a:pPr>
+            <a:r>
+              <a:rPr sz="1600">
+                <a:solidFill>
+                  <a:srgbClr val="FFFFFF"/>
+                </a:solidFill>
+                <a:latin typeface="Play"/>
+                <a:ea typeface="Play"/>
+                <a:cs typeface="Play"/>
+              </a:rPr>
+              <a:t>• Плохой шаблон приводит к использованию рабочей области</a:t>
+            </a:r>
+          </a:p>
+          <a:p>
+            <a:pPr algn="l">
+              <a:spcAft>
+                <a:spcPts val="300"/>
+              </a:spcAft>
+              <a:defRPr sz="1600">
+                <a:solidFill>
+                  <a:srgbClr val="FFFFFF"/>
+                </a:solidFill>
+                <a:latin typeface="Play"/>
+                <a:ea typeface="Play"/>
+                <a:cs typeface="Play"/>
+              </a:defRPr>
+            </a:pPr>
+            <a:r>
+              <a:rPr sz="1600">
+                <a:solidFill>
+                  <a:srgbClr val="FFFFFF"/>
+                </a:solidFill>
+                <a:latin typeface="Play"/>
+                <a:ea typeface="Play"/>
+                <a:cs typeface="Play"/>
+              </a:rPr>
+              <a:t>• Нагрузка выше 20 задач требует внешней очереди</a:t>
+            </a:r>
+          </a:p>
+        </p:txBody>
+      </p:sp>
+      <p:sp>
+        <p:nvSpPr>
+          <p:cNvPr id="4" name="Oval 3"/>
+          <p:cNvSpPr/>
+          <p:nvPr/>
+        </p:nvSpPr>
+        <p:spPr>
+          <a:xfrm>
+            <a:off x="6671005" y="1558625"/>
+            <a:ext cx="968735" cy="968735"/>
+          </a:xfrm>
+          <a:prstGeom prst="ellipse">
+            <a:avLst/>
+          </a:prstGeom>
+          <a:solidFill>
+            <a:srgbClr val="0077FF"/>
+          </a:solidFill>
+          <a:ln>
+            <a:noFill/>
+          </a:ln>
+        </p:spPr>
+        <p:style>
+          <a:lnRef idx="1">
+            <a:schemeClr val="accent1"/>
+          </a:lnRef>
+          <a:fillRef idx="3">
+            <a:schemeClr val="accent1"/>
+          </a:fillRef>
+          <a:effectRef idx="2">
+            <a:schemeClr val="accent1"/>
+          </a:effectRef>
+          <a:fontRef idx="minor">
+            <a:schemeClr val="lt1"/>
+          </a:fontRef>
+        </p:style>
+        <p:txBody>
+          <a:bodyPr rtlCol="0" anchor="ctr"/>
+          <a:lstStyle/>
+          <a:p>
+            <a:pPr algn="ctr"/>
+          </a:p>
+        </p:txBody>
+      </p:sp>
+      <p:sp>
+        <p:nvSpPr>
+          <p:cNvPr id="5" name="Oval 4"/>
+          <p:cNvSpPr/>
+          <p:nvPr/>
+        </p:nvSpPr>
+        <p:spPr>
+          <a:xfrm>
+            <a:off x="6825122" y="1712742"/>
+            <a:ext cx="660501" cy="660501"/>
+          </a:xfrm>
+          <a:prstGeom prst="ellipse">
+            <a:avLst/>
+          </a:prstGeom>
+          <a:solidFill>
+            <a:srgbClr val="111111"/>
+          </a:solidFill>
+          <a:ln>
+            <a:noFill/>
+          </a:ln>
+        </p:spPr>
+        <p:style>
+          <a:lnRef idx="1">
+            <a:schemeClr val="accent1"/>
+          </a:lnRef>
+          <a:fillRef idx="3">
+            <a:schemeClr val="accent1"/>
+          </a:fillRef>
+          <a:effectRef idx="2">
+            <a:schemeClr val="accent1"/>
+          </a:effectRef>
+          <a:fontRef idx="minor">
+            <a:schemeClr val="lt1"/>
+          </a:fontRef>
+        </p:style>
+        <p:txBody>
+          <a:bodyPr rtlCol="0" anchor="ctr"/>
+          <a:lstStyle/>
+          <a:p>
+            <a:pPr algn="ctr"/>
+          </a:p>
+        </p:txBody>
+      </p:sp>
+      <p:sp>
+        <p:nvSpPr>
+          <p:cNvPr id="6" name="Oval 5"/>
+          <p:cNvSpPr/>
+          <p:nvPr/>
+        </p:nvSpPr>
+        <p:spPr>
+          <a:xfrm>
+            <a:off x="7001256" y="1888876"/>
+            <a:ext cx="308234" cy="308234"/>
+          </a:xfrm>
+          <a:prstGeom prst="ellipse">
+            <a:avLst/>
+          </a:prstGeom>
+          <a:solidFill>
+            <a:srgbClr val="0077FF"/>
+          </a:solidFill>
+          <a:ln>
+            <a:noFill/>
+          </a:ln>
+        </p:spPr>
+        <p:style>
+          <a:lnRef idx="1">
+            <a:schemeClr val="accent1"/>
+          </a:lnRef>
+          <a:fillRef idx="3">
+            <a:schemeClr val="accent1"/>
+          </a:fillRef>
+          <a:effectRef idx="2">
+            <a:schemeClr val="accent1"/>
+          </a:effectRef>
+          <a:fontRef idx="minor">
+            <a:schemeClr val="lt1"/>
+          </a:fontRef>
+        </p:style>
+        <p:txBody>
+          <a:bodyPr rtlCol="0" anchor="ctr"/>
+          <a:lstStyle/>
+          <a:p>
+            <a:pPr algn="ctr"/>
+          </a:p>
+        </p:txBody>
+      </p:sp>
+      <p:sp>
+        <p:nvSpPr>
+          <p:cNvPr id="7" name="TextBox 6"/>
+          <p:cNvSpPr txBox="1"/>
+          <p:nvPr/>
+        </p:nvSpPr>
+        <p:spPr>
+          <a:xfrm>
+            <a:off x="6267602" y="2834287"/>
+            <a:ext cx="1775542" cy="2672891"/>
+          </a:xfrm>
+          <a:prstGeom prst="rect">
+            <a:avLst/>
+          </a:prstGeom>
+          <a:noFill/>
+        </p:spPr>
+        <p:txBody>
+          <a:bodyPr wrap="square" lIns="12700" rIns="12700" tIns="12700" bIns="12700">
+            <a:spAutoFit/>
+          </a:bodyPr>
+          <a:lstStyle/>
+          <a:p>
+            <a:pPr algn="ctr">
+              <a:defRPr sz="1400" b="0">
+                <a:solidFill>
+                  <a:srgbClr val="FFFFFF"/>
+                </a:solidFill>
+                <a:latin typeface="Play"/>
+                <a:ea typeface="Play"/>
+                <a:cs typeface="Play"/>
+              </a:defRPr>
+            </a:pPr>
+            <a:r>
+              <a:rPr sz="1400" b="0">
+                <a:solidFill>
+                  <a:srgbClr val="FFFFFF"/>
+                </a:solidFill>
+                <a:latin typeface="Play"/>
+                <a:ea typeface="Play"/>
+                <a:cs typeface="Play"/>
+              </a:rPr>
+              <a:t>Выдумка</a:t>
+            </a:r>
+          </a:p>
+        </p:txBody>
+      </p:sp>
+      <p:sp>
+        <p:nvSpPr>
+          <p:cNvPr id="8" name="Document 7"/>
+          <p:cNvSpPr/>
+          <p:nvPr/>
+        </p:nvSpPr>
+        <p:spPr>
+          <a:xfrm>
+            <a:off x="8585565" y="1580641"/>
+            <a:ext cx="836635" cy="924702"/>
+          </a:xfrm>
+          <a:prstGeom prst="flowChartDocument">
+            <a:avLst/>
+          </a:prstGeom>
+          <a:solidFill>
+            <a:srgbClr val="0077FF"/>
+          </a:solidFill>
+          <a:ln>
+            <a:noFill/>
+          </a:ln>
+        </p:spPr>
+        <p:style>
+          <a:lnRef idx="1">
+            <a:schemeClr val="accent1"/>
+          </a:lnRef>
+          <a:fillRef idx="3">
+            <a:schemeClr val="accent1"/>
+          </a:fillRef>
+          <a:effectRef idx="2">
+            <a:schemeClr val="accent1"/>
+          </a:effectRef>
+          <a:fontRef idx="minor">
+            <a:schemeClr val="lt1"/>
+          </a:fontRef>
+        </p:style>
+        <p:txBody>
+          <a:bodyPr rtlCol="0" anchor="ctr"/>
+          <a:lstStyle/>
+          <a:p>
+            <a:pPr algn="ctr"/>
+          </a:p>
+        </p:txBody>
+      </p:sp>
+      <p:sp>
+        <p:nvSpPr>
+          <p:cNvPr id="9" name="TextBox 8"/>
+          <p:cNvSpPr txBox="1"/>
+          <p:nvPr/>
+        </p:nvSpPr>
+        <p:spPr>
+          <a:xfrm>
+            <a:off x="8116111" y="2834287"/>
+            <a:ext cx="1775542" cy="2672891"/>
+          </a:xfrm>
+          <a:prstGeom prst="rect">
+            <a:avLst/>
+          </a:prstGeom>
+          <a:noFill/>
+        </p:spPr>
+        <p:txBody>
+          <a:bodyPr wrap="square" lIns="12700" rIns="12700" tIns="12700" bIns="12700">
+            <a:spAutoFit/>
+          </a:bodyPr>
+          <a:lstStyle/>
+          <a:p>
+            <a:pPr algn="ctr">
+              <a:defRPr sz="1400" b="0">
+                <a:solidFill>
+                  <a:srgbClr val="FFFFFF"/>
+                </a:solidFill>
+                <a:latin typeface="Play"/>
+                <a:ea typeface="Play"/>
+                <a:cs typeface="Play"/>
+              </a:defRPr>
+            </a:pPr>
+            <a:r>
+              <a:rPr sz="1400" b="0">
+                <a:solidFill>
+                  <a:srgbClr val="FFFFFF"/>
+                </a:solidFill>
+                <a:latin typeface="Play"/>
+                <a:ea typeface="Play"/>
+                <a:cs typeface="Play"/>
+              </a:rPr>
+              <a:t>Плохой шаблон</a:t>
+            </a:r>
+          </a:p>
+        </p:txBody>
+      </p:sp>
+      <p:sp>
+        <p:nvSpPr>
+          <p:cNvPr id="10" name="Oval 9"/>
+          <p:cNvSpPr/>
+          <p:nvPr/>
+        </p:nvSpPr>
+        <p:spPr>
+          <a:xfrm>
+            <a:off x="10368024" y="1558625"/>
+            <a:ext cx="968735" cy="968735"/>
+          </a:xfrm>
+          <a:prstGeom prst="ellipse">
+            <a:avLst/>
+          </a:prstGeom>
+          <a:solidFill>
+            <a:srgbClr val="0077FF"/>
+          </a:solidFill>
+          <a:ln>
+            <a:noFill/>
+          </a:ln>
+        </p:spPr>
+        <p:style>
+          <a:lnRef idx="1">
+            <a:schemeClr val="accent1"/>
+          </a:lnRef>
+          <a:fillRef idx="3">
+            <a:schemeClr val="accent1"/>
+          </a:fillRef>
+          <a:effectRef idx="2">
+            <a:schemeClr val="accent1"/>
+          </a:effectRef>
+          <a:fontRef idx="minor">
+            <a:schemeClr val="lt1"/>
+          </a:fontRef>
+        </p:style>
+        <p:txBody>
+          <a:bodyPr rtlCol="0" anchor="ctr"/>
+          <a:lstStyle/>
+          <a:p>
+            <a:pPr algn="ctr"/>
+          </a:p>
+        </p:txBody>
+      </p:sp>
+      <p:sp>
+        <p:nvSpPr>
+          <p:cNvPr id="11" name="Oval 10"/>
+          <p:cNvSpPr/>
+          <p:nvPr/>
+        </p:nvSpPr>
+        <p:spPr>
+          <a:xfrm>
+            <a:off x="10522141" y="1712742"/>
+            <a:ext cx="660501" cy="660501"/>
+          </a:xfrm>
+          <a:prstGeom prst="ellipse">
+            <a:avLst/>
+          </a:prstGeom>
+          <a:solidFill>
+            <a:srgbClr val="111111"/>
+          </a:solidFill>
+          <a:ln>
+            <a:noFill/>
+          </a:ln>
+        </p:spPr>
+        <p:style>
+          <a:lnRef idx="1">
+            <a:schemeClr val="accent1"/>
+          </a:lnRef>
+          <a:fillRef idx="3">
+            <a:schemeClr val="accent1"/>
+          </a:fillRef>
+          <a:effectRef idx="2">
+            <a:schemeClr val="accent1"/>
+          </a:effectRef>
+          <a:fontRef idx="minor">
+            <a:schemeClr val="lt1"/>
+          </a:fontRef>
+        </p:style>
+        <p:txBody>
+          <a:bodyPr rtlCol="0" anchor="ctr"/>
+          <a:lstStyle/>
+          <a:p>
+            <a:pPr algn="ctr"/>
+          </a:p>
+        </p:txBody>
+      </p:sp>
+      <p:sp>
+        <p:nvSpPr>
+          <p:cNvPr id="12" name="Oval 11"/>
+          <p:cNvSpPr/>
+          <p:nvPr/>
+        </p:nvSpPr>
+        <p:spPr>
+          <a:xfrm>
+            <a:off x="10698275" y="1888876"/>
+            <a:ext cx="308234" cy="308234"/>
+          </a:xfrm>
+          <a:prstGeom prst="ellipse">
+            <a:avLst/>
+          </a:prstGeom>
+          <a:solidFill>
+            <a:srgbClr val="0077FF"/>
+          </a:solidFill>
+          <a:ln>
+            <a:noFill/>
+          </a:ln>
+        </p:spPr>
+        <p:style>
+          <a:lnRef idx="1">
+            <a:schemeClr val="accent1"/>
+          </a:lnRef>
+          <a:fillRef idx="3">
+            <a:schemeClr val="accent1"/>
+          </a:fillRef>
+          <a:effectRef idx="2">
+            <a:schemeClr val="accent1"/>
+          </a:effectRef>
+          <a:fontRef idx="minor">
+            <a:schemeClr val="lt1"/>
+          </a:fontRef>
+        </p:style>
+        <p:txBody>
+          <a:bodyPr rtlCol="0" anchor="ctr"/>
+          <a:lstStyle/>
+          <a:p>
+            <a:pPr algn="ctr"/>
+          </a:p>
+        </p:txBody>
+      </p:sp>
+      <p:sp>
+        <p:nvSpPr>
+          <p:cNvPr id="13" name="TextBox 12"/>
+          <p:cNvSpPr txBox="1"/>
+          <p:nvPr/>
+        </p:nvSpPr>
+        <p:spPr>
+          <a:xfrm>
+            <a:off x="9964621" y="2834287"/>
+            <a:ext cx="1775542" cy="2672891"/>
+          </a:xfrm>
+          <a:prstGeom prst="rect">
+            <a:avLst/>
+          </a:prstGeom>
+          <a:noFill/>
+        </p:spPr>
+        <p:txBody>
+          <a:bodyPr wrap="square" lIns="12700" rIns="12700" tIns="12700" bIns="12700">
+            <a:spAutoFit/>
+          </a:bodyPr>
+          <a:lstStyle/>
+          <a:p>
+            <a:pPr algn="ctr">
+              <a:defRPr sz="1400" b="0">
+                <a:solidFill>
+                  <a:srgbClr val="FFFFFF"/>
+                </a:solidFill>
+                <a:latin typeface="Play"/>
+                <a:ea typeface="Play"/>
+                <a:cs typeface="Play"/>
+              </a:defRPr>
+            </a:pPr>
+            <a:r>
+              <a:rPr sz="1400" b="0">
+                <a:solidFill>
+                  <a:srgbClr val="FFFFFF"/>
+                </a:solidFill>
+                <a:latin typeface="Play"/>
+                <a:ea typeface="Play"/>
+                <a:cs typeface="Play"/>
+              </a:rPr>
+              <a:t>Перегрузка</a:t>
             </a:r>
           </a:p>
         </p:txBody>
@@ -11972,7 +11908,7 @@
                 <a:ea typeface="Play"/>
                 <a:cs typeface="Play"/>
               </a:rPr>
-              <a:t>Пилотные результаты</a:t>
+              <a:t>План</a:t>
             </a:r>
           </a:p>
         </p:txBody>
@@ -11985,8 +11921,8 @@
         </p:nvSpPr>
         <p:spPr>
           <a:xfrm>
-            <a:off x="429280" y="1666494"/>
-            <a:ext cx="11310884" cy="3525012"/>
+            <a:off x="429280" y="1664162"/>
+            <a:ext cx="5472562" cy="3753589"/>
           </a:xfrm>
           <a:prstGeom prst="rect">
             <a:avLst/>
@@ -12003,7 +11939,7 @@
               <a:spcAft>
                 <a:spcPts val="300"/>
               </a:spcAft>
-              <a:defRPr sz="2800">
+              <a:defRPr sz="1600">
                 <a:solidFill>
                   <a:srgbClr val="FFFFFF"/>
                 </a:solidFill>
@@ -12013,7 +11949,7 @@
               </a:defRPr>
             </a:pPr>
             <a:r>
-              <a:rPr sz="2800">
+              <a:rPr sz="1600">
                 <a:solidFill>
                   <a:srgbClr val="FFFFFF"/>
                 </a:solidFill>
@@ -12021,7 +11957,7 @@
                 <a:ea typeface="Play"/>
                 <a:cs typeface="Play"/>
               </a:rPr>
-              <a:t>• Пилот шёл 6 недель на двух командах, собрал 68 презентаций</a:t>
+              <a:t>• Q3 2026: подключение 4 команд, домен и HTTPS</a:t>
             </a:r>
           </a:p>
           <a:p>
@@ -12029,7 +11965,7 @@
               <a:spcAft>
                 <a:spcPts val="300"/>
               </a:spcAft>
-              <a:defRPr sz="2800">
+              <a:defRPr sz="1600">
                 <a:solidFill>
                   <a:srgbClr val="FFFFFF"/>
                 </a:solidFill>
@@ -12039,7 +11975,7 @@
               </a:defRPr>
             </a:pPr>
             <a:r>
-              <a:rPr sz="2800">
+              <a:rPr sz="1600">
                 <a:solidFill>
                   <a:srgbClr val="FFFFFF"/>
                 </a:solidFill>
@@ -12047,7 +11983,7 @@
                 <a:ea typeface="Play"/>
                 <a:cs typeface="Play"/>
               </a:rPr>
-              <a:t>• Сервис ускорил сборку с 186 до 4 мин</a:t>
+              <a:t>• Q4 2026: доступ для всей компании, интеграция с хранилищем</a:t>
             </a:r>
           </a:p>
           <a:p>
@@ -12055,7 +11991,7 @@
               <a:spcAft>
                 <a:spcPts val="300"/>
               </a:spcAft>
-              <a:defRPr sz="2800">
+              <a:defRPr sz="1600">
                 <a:solidFill>
                   <a:srgbClr val="FFFFFF"/>
                 </a:solidFill>
@@ -12065,7 +12001,7 @@
               </a:defRPr>
             </a:pPr>
             <a:r>
-              <a:rPr sz="2800">
+              <a:rPr sz="1600">
                 <a:solidFill>
                   <a:srgbClr val="FFFFFF"/>
                 </a:solidFill>
@@ -12073,7 +12009,317 @@
                 <a:ea typeface="Play"/>
                 <a:cs typeface="Play"/>
               </a:rPr>
-              <a:t>• Нарушения стиля 2 из 68, исправлены автоматически</a:t>
+              <a:t>• Q1 2027: генерация иллюстраций под стиль шаблона</a:t>
+            </a:r>
+          </a:p>
+        </p:txBody>
+      </p:sp>
+      <p:sp>
+        <p:nvSpPr>
+          <p:cNvPr id="4" name="Rectangle 3"/>
+          <p:cNvSpPr/>
+          <p:nvPr/>
+        </p:nvSpPr>
+        <p:spPr>
+          <a:xfrm>
+            <a:off x="6267602" y="3390812"/>
+            <a:ext cx="5472562" cy="112607"/>
+          </a:xfrm>
+          <a:prstGeom prst="rect">
+            <a:avLst/>
+          </a:prstGeom>
+          <a:solidFill>
+            <a:srgbClr val="0077FF"/>
+          </a:solidFill>
+          <a:ln>
+            <a:noFill/>
+          </a:ln>
+        </p:spPr>
+        <p:style>
+          <a:lnRef idx="1">
+            <a:schemeClr val="accent1"/>
+          </a:lnRef>
+          <a:fillRef idx="3">
+            <a:schemeClr val="accent1"/>
+          </a:fillRef>
+          <a:effectRef idx="2">
+            <a:schemeClr val="accent1"/>
+          </a:effectRef>
+          <a:fontRef idx="minor">
+            <a:schemeClr val="lt1"/>
+          </a:fontRef>
+        </p:style>
+        <p:txBody>
+          <a:bodyPr rtlCol="0" anchor="ctr"/>
+          <a:lstStyle/>
+          <a:p>
+            <a:pPr algn="ctr"/>
+          </a:p>
+        </p:txBody>
+      </p:sp>
+      <p:sp>
+        <p:nvSpPr>
+          <p:cNvPr id="5" name="Oval 4"/>
+          <p:cNvSpPr/>
+          <p:nvPr/>
+        </p:nvSpPr>
+        <p:spPr>
+          <a:xfrm>
+            <a:off x="6906067" y="3173488"/>
+            <a:ext cx="547256" cy="547256"/>
+          </a:xfrm>
+          <a:prstGeom prst="ellipse">
+            <a:avLst/>
+          </a:prstGeom>
+          <a:solidFill>
+            <a:srgbClr val="0077FF"/>
+          </a:solidFill>
+          <a:ln>
+            <a:noFill/>
+          </a:ln>
+        </p:spPr>
+        <p:style>
+          <a:lnRef idx="1">
+            <a:schemeClr val="accent1"/>
+          </a:lnRef>
+          <a:fillRef idx="3">
+            <a:schemeClr val="accent1"/>
+          </a:fillRef>
+          <a:effectRef idx="2">
+            <a:schemeClr val="accent1"/>
+          </a:effectRef>
+          <a:fontRef idx="minor">
+            <a:schemeClr val="lt1"/>
+          </a:fontRef>
+        </p:style>
+        <p:txBody>
+          <a:bodyPr rtlCol="0" anchor="ctr"/>
+          <a:lstStyle/>
+          <a:p>
+            <a:pPr algn="ctr"/>
+          </a:p>
+        </p:txBody>
+      </p:sp>
+      <p:sp>
+        <p:nvSpPr>
+          <p:cNvPr id="6" name="TextBox 5"/>
+          <p:cNvSpPr txBox="1"/>
+          <p:nvPr/>
+        </p:nvSpPr>
+        <p:spPr>
+          <a:xfrm>
+            <a:off x="6267602" y="1664162"/>
+            <a:ext cx="2736281" cy="1426363"/>
+          </a:xfrm>
+          <a:prstGeom prst="rect">
+            <a:avLst/>
+          </a:prstGeom>
+          <a:noFill/>
+        </p:spPr>
+        <p:txBody>
+          <a:bodyPr wrap="square" lIns="12700" rIns="12700" tIns="12700" bIns="12700">
+            <a:spAutoFit/>
+          </a:bodyPr>
+          <a:lstStyle/>
+          <a:p>
+            <a:pPr algn="ctr">
+              <a:defRPr sz="1400" b="0">
+                <a:solidFill>
+                  <a:srgbClr val="FFFFFF"/>
+                </a:solidFill>
+                <a:latin typeface="Play"/>
+                <a:ea typeface="Play"/>
+                <a:cs typeface="Play"/>
+              </a:defRPr>
+            </a:pPr>
+            <a:r>
+              <a:rPr sz="1400" b="0">
+                <a:solidFill>
+                  <a:srgbClr val="FFFFFF"/>
+                </a:solidFill>
+                <a:latin typeface="Play"/>
+                <a:ea typeface="Play"/>
+                <a:cs typeface="Play"/>
+              </a:rPr>
+              <a:t>Подключение 4 команд</a:t>
+            </a:r>
+          </a:p>
+        </p:txBody>
+      </p:sp>
+      <p:sp>
+        <p:nvSpPr>
+          <p:cNvPr id="7" name="Oval 6"/>
+          <p:cNvSpPr/>
+          <p:nvPr/>
+        </p:nvSpPr>
+        <p:spPr>
+          <a:xfrm>
+            <a:off x="8730254" y="3173488"/>
+            <a:ext cx="547256" cy="547256"/>
+          </a:xfrm>
+          <a:prstGeom prst="ellipse">
+            <a:avLst/>
+          </a:prstGeom>
+          <a:solidFill>
+            <a:srgbClr val="0077FF"/>
+          </a:solidFill>
+          <a:ln>
+            <a:noFill/>
+          </a:ln>
+        </p:spPr>
+        <p:style>
+          <a:lnRef idx="1">
+            <a:schemeClr val="accent1"/>
+          </a:lnRef>
+          <a:fillRef idx="3">
+            <a:schemeClr val="accent1"/>
+          </a:fillRef>
+          <a:effectRef idx="2">
+            <a:schemeClr val="accent1"/>
+          </a:effectRef>
+          <a:fontRef idx="minor">
+            <a:schemeClr val="lt1"/>
+          </a:fontRef>
+        </p:style>
+        <p:txBody>
+          <a:bodyPr rtlCol="0" anchor="ctr"/>
+          <a:lstStyle/>
+          <a:p>
+            <a:pPr algn="ctr"/>
+          </a:p>
+        </p:txBody>
+      </p:sp>
+      <p:sp>
+        <p:nvSpPr>
+          <p:cNvPr id="8" name="TextBox 7"/>
+          <p:cNvSpPr txBox="1"/>
+          <p:nvPr/>
+        </p:nvSpPr>
+        <p:spPr>
+          <a:xfrm>
+            <a:off x="7635742" y="3938069"/>
+            <a:ext cx="2736281" cy="1426363"/>
+          </a:xfrm>
+          <a:prstGeom prst="rect">
+            <a:avLst/>
+          </a:prstGeom>
+          <a:noFill/>
+        </p:spPr>
+        <p:txBody>
+          <a:bodyPr wrap="square" lIns="12700" rIns="12700" tIns="12700" bIns="12700">
+            <a:spAutoFit/>
+          </a:bodyPr>
+          <a:lstStyle/>
+          <a:p>
+            <a:pPr algn="ctr">
+              <a:defRPr sz="1400" b="0">
+                <a:solidFill>
+                  <a:srgbClr val="FFFFFF"/>
+                </a:solidFill>
+                <a:latin typeface="Play"/>
+                <a:ea typeface="Play"/>
+                <a:cs typeface="Play"/>
+              </a:defRPr>
+            </a:pPr>
+            <a:r>
+              <a:rPr sz="1400" b="0">
+                <a:solidFill>
+                  <a:srgbClr val="FFFFFF"/>
+                </a:solidFill>
+                <a:latin typeface="Play"/>
+                <a:ea typeface="Play"/>
+                <a:cs typeface="Play"/>
+              </a:rPr>
+              <a:t>Доступ для всей компании</a:t>
+            </a:r>
+          </a:p>
+        </p:txBody>
+      </p:sp>
+      <p:sp>
+        <p:nvSpPr>
+          <p:cNvPr id="9" name="Oval 8"/>
+          <p:cNvSpPr/>
+          <p:nvPr/>
+        </p:nvSpPr>
+        <p:spPr>
+          <a:xfrm>
+            <a:off x="10554442" y="3173488"/>
+            <a:ext cx="547256" cy="547256"/>
+          </a:xfrm>
+          <a:prstGeom prst="ellipse">
+            <a:avLst/>
+          </a:prstGeom>
+          <a:solidFill>
+            <a:srgbClr val="0077FF"/>
+          </a:solidFill>
+          <a:ln>
+            <a:noFill/>
+          </a:ln>
+        </p:spPr>
+        <p:style>
+          <a:lnRef idx="1">
+            <a:schemeClr val="accent1"/>
+          </a:lnRef>
+          <a:fillRef idx="3">
+            <a:schemeClr val="accent1"/>
+          </a:fillRef>
+          <a:effectRef idx="2">
+            <a:schemeClr val="accent1"/>
+          </a:effectRef>
+          <a:fontRef idx="minor">
+            <a:schemeClr val="lt1"/>
+          </a:fontRef>
+        </p:style>
+        <p:txBody>
+          <a:bodyPr rtlCol="0" anchor="ctr"/>
+          <a:lstStyle/>
+          <a:p>
+            <a:pPr algn="ctr"/>
+          </a:p>
+        </p:txBody>
+      </p:sp>
+      <p:sp>
+        <p:nvSpPr>
+          <p:cNvPr id="10" name="TextBox 9"/>
+          <p:cNvSpPr txBox="1"/>
+          <p:nvPr/>
+        </p:nvSpPr>
+        <p:spPr>
+          <a:xfrm>
+            <a:off x="9003883" y="1664162"/>
+            <a:ext cx="2736281" cy="1426363"/>
+          </a:xfrm>
+          <a:prstGeom prst="rect">
+            <a:avLst/>
+          </a:prstGeom>
+          <a:noFill/>
+        </p:spPr>
+        <p:txBody>
+          <a:bodyPr wrap="square" lIns="12700" rIns="12700" tIns="12700" bIns="12700">
+            <a:spAutoFit/>
+          </a:bodyPr>
+          <a:lstStyle/>
+          <a:p>
+            <a:pPr algn="ctr">
+              <a:defRPr sz="1400" b="0">
+                <a:solidFill>
+                  <a:srgbClr val="FFFFFF"/>
+                </a:solidFill>
+                <a:latin typeface="Play"/>
+                <a:ea typeface="Play"/>
+                <a:cs typeface="Play"/>
+              </a:defRPr>
+            </a:pPr>
+            <a:r>
+              <a:rPr sz="1400" b="0">
+                <a:solidFill>
+                  <a:srgbClr val="FFFFFF"/>
+                </a:solidFill>
+                <a:latin typeface="Play"/>
+                <a:ea typeface="Play"/>
+                <a:cs typeface="Play"/>
+              </a:rPr>
+              <a:t>Генерация иллюстраций</a:t>
             </a:r>
           </a:p>
         </p:txBody>
@@ -12250,7 +12496,7 @@
                 <a:ea typeface="Play"/>
                 <a:cs typeface="Play"/>
               </a:rPr>
-              <a:t>Показатели после пилота</a:t>
+              <a:t>Что мы просим решить</a:t>
             </a:r>
           </a:p>
         </p:txBody>
@@ -12299,7 +12545,7 @@
                 <a:ea typeface="Play"/>
                 <a:cs typeface="Play"/>
               </a:rPr>
-              <a:t>• Запросы закрыты 38 вместо 11, рутина ушла в сервис</a:t>
+              <a:t>• Запуск сервиса на всю компанию</a:t>
             </a:r>
           </a:p>
           <a:p>
@@ -12325,7 +12571,7 @@
                 <a:ea typeface="Play"/>
                 <a:cs typeface="Play"/>
               </a:rPr>
-              <a:t>• Время до первой версии сократилось с 6 дней до 1</a:t>
+              <a:t>• Выделение бюджета на поддержку и развитие</a:t>
             </a:r>
           </a:p>
           <a:p>
@@ -12351,7 +12597,7 @@
                 <a:ea typeface="Play"/>
                 <a:cs typeface="Play"/>
               </a:rPr>
-              <a:t>• Сервис работает на 2 vCPU / 2 ГБ RAM</a:t>
+              <a:t>• Поддержка интеграции с корпоративными системами</a:t>
             </a:r>
           </a:p>
         </p:txBody>
@@ -12484,8 +12730,8 @@
         </p:nvSpPr>
         <p:spPr>
           <a:xfrm>
-            <a:off x="300817" y="297715"/>
-            <a:ext cx="11566347" cy="3377993"/>
+            <a:off x="302280" y="2164394"/>
+            <a:ext cx="8081385" cy="1247140"/>
           </a:xfrm>
           <a:prstGeom prst="roundRect">
             <a:avLst/>
@@ -12530,8 +12776,8 @@
         </p:nvSpPr>
         <p:spPr>
           <a:xfrm>
-            <a:off x="427817" y="424715"/>
-            <a:ext cx="11312347" cy="1018540"/>
+            <a:off x="429280" y="2291394"/>
+            <a:ext cx="7827385" cy="1018540"/>
           </a:xfrm>
           <a:prstGeom prst="rect">
             <a:avLst/>
@@ -12566,108 +12812,7 @@
                 <a:ea typeface="Play"/>
                 <a:cs typeface="Play"/>
               </a:rPr>
-              <a:t>Что мы просим решить</a:t>
-            </a:r>
-          </a:p>
-        </p:txBody>
-      </p:sp>
-      <p:sp>
-        <p:nvSpPr>
-          <p:cNvPr id="886" name="body"/>
-          <p:cNvSpPr txBox="1"/>
-          <p:nvPr/>
-        </p:nvSpPr>
-        <p:spPr>
-          <a:xfrm>
-            <a:off x="427817" y="2258389"/>
-            <a:ext cx="11312347" cy="1290320"/>
-          </a:xfrm>
-          <a:prstGeom prst="rect">
-            <a:avLst/>
-          </a:prstGeom>
-          <a:noFill/>
-        </p:spPr>
-        <p:txBody>
-          <a:bodyPr wrap="square" lIns="76200" rIns="76200" tIns="50800" bIns="50800">
-            <a:spAutoFit/>
-          </a:bodyPr>
-          <a:lstStyle/>
-          <a:p>
-            <a:pPr algn="l">
-              <a:spcAft>
-                <a:spcPts val="300"/>
-              </a:spcAft>
-              <a:defRPr sz="2400" b="1">
-                <a:solidFill>
-                  <a:srgbClr val="FFFFFF"/>
-                </a:solidFill>
-                <a:latin typeface="Play"/>
-                <a:ea typeface="Play"/>
-                <a:cs typeface="Play"/>
-              </a:defRPr>
-            </a:pPr>
-            <a:r>
-              <a:rPr sz="2400" b="1">
-                <a:solidFill>
-                  <a:srgbClr val="FFFFFF"/>
-                </a:solidFill>
-                <a:latin typeface="Play"/>
-                <a:ea typeface="Play"/>
-                <a:cs typeface="Play"/>
-              </a:rPr>
-              <a:t>• Попросим решение о запуске на всю компанию</a:t>
-            </a:r>
-          </a:p>
-          <a:p>
-            <a:pPr algn="l">
-              <a:spcAft>
-                <a:spcPts val="300"/>
-              </a:spcAft>
-              <a:defRPr sz="2400" b="1">
-                <a:solidFill>
-                  <a:srgbClr val="FFFFFF"/>
-                </a:solidFill>
-                <a:latin typeface="Play"/>
-                <a:ea typeface="Play"/>
-                <a:cs typeface="Play"/>
-              </a:defRPr>
-            </a:pPr>
-            <a:r>
-              <a:rPr sz="2400" b="1">
-                <a:solidFill>
-                  <a:srgbClr val="FFFFFF"/>
-                </a:solidFill>
-                <a:latin typeface="Play"/>
-                <a:ea typeface="Play"/>
-                <a:cs typeface="Play"/>
-              </a:rPr>
-              <a:t>• Ожидаем одобрения руководства</a:t>
-            </a:r>
-          </a:p>
-          <a:p>
-            <a:pPr algn="l">
-              <a:spcAft>
-                <a:spcPts val="300"/>
-              </a:spcAft>
-              <a:defRPr sz="2400" b="1">
-                <a:solidFill>
-                  <a:srgbClr val="FFFFFF"/>
-                </a:solidFill>
-                <a:latin typeface="Play"/>
-                <a:ea typeface="Play"/>
-                <a:cs typeface="Play"/>
-              </a:defRPr>
-            </a:pPr>
-            <a:r>
-              <a:rPr sz="2400" b="1">
-                <a:solidFill>
-                  <a:srgbClr val="FFFFFF"/>
-                </a:solidFill>
-                <a:latin typeface="Play"/>
-                <a:ea typeface="Play"/>
-                <a:cs typeface="Play"/>
-              </a:rPr>
-              <a:t>• Готовы к масштабированию</a:t>
+              <a:t>Вопросы?</a:t>
             </a:r>
           </a:p>
         </p:txBody>

--- a/samples/VK_WorkSpace_Клиентская_конференция_Шабл__split.pptx
+++ b/samples/VK_WorkSpace_Клиентская_конференция_Шабл__split.pptx
@@ -18,6 +18,8 @@
     <p:sldId id="292" r:id="rId45"/>
     <p:sldId id="293" r:id="rId46"/>
     <p:sldId id="294" r:id="rId47"/>
+    <p:sldId id="295" r:id="rId48"/>
+    <p:sldId id="296" r:id="rId49"/>
   </p:sldIdLst>
   <p:sldSz cy="6858000" cx="12192000"/>
   <p:notesSz cx="6858000" cy="9144000"/>
@@ -284,706 +286,6 @@
     </p:ext>
   </p:extLst>
 </p:presentation>
-</file>
-
-<file path=ppt/charts/chart1.xml><?xml version="1.0" encoding="utf-8"?>
-<c:chartSpace xmlns:c="http://schemas.openxmlformats.org/drawingml/2006/chart" xmlns:a="http://schemas.openxmlformats.org/drawingml/2006/main" xmlns:r="http://schemas.openxmlformats.org/officeDocument/2006/relationships">
-  <c:date1904 val="0"/>
-  <c:chart>
-    <c:autoTitleDeleted val="1"/>
-    <c:plotArea>
-      <c:barChart>
-        <c:barDir val="col"/>
-        <c:grouping val="clustered"/>
-        <c:ser>
-          <c:idx val="0"/>
-          <c:order val="0"/>
-          <c:tx>
-            <c:strRef>
-              <c:f>Sheet1!$B$1</c:f>
-              <c:strCache>
-                <c:ptCount val="1"/>
-                <c:pt idx="0">
-                  <c:v>Время</c:v>
-                </c:pt>
-              </c:strCache>
-            </c:strRef>
-          </c:tx>
-          <c:spPr>
-            <a:solidFill>
-              <a:srgbClr val="0077FF"/>
-            </a:solidFill>
-            <a:ln>
-              <a:solidFill>
-                <a:srgbClr val="0077FF"/>
-              </a:solidFill>
-            </a:ln>
-          </c:spPr>
-          <c:cat>
-            <c:strRef>
-              <c:f>Sheet1!$A$2:$A$3</c:f>
-              <c:strCache>
-                <c:ptCount val="2"/>
-                <c:pt idx="0">
-                  <c:v>Сборка</c:v>
-                </c:pt>
-                <c:pt idx="1">
-                  <c:v>Правки</c:v>
-                </c:pt>
-              </c:strCache>
-            </c:strRef>
-          </c:cat>
-          <c:val>
-            <c:numRef>
-              <c:f>Sheet1!$B$2:$B$3</c:f>
-              <c:numCache>
-                <c:formatCode>General</c:formatCode>
-                <c:ptCount val="2"/>
-                <c:pt idx="0">
-                  <c:v>186.0</c:v>
-                </c:pt>
-                <c:pt idx="1">
-                  <c:v>74.0</c:v>
-                </c:pt>
-              </c:numCache>
-            </c:numRef>
-          </c:val>
-        </c:ser>
-        <c:dLbls>
-          <c:numFmt formatCode="0&quot; мин&quot;" sourceLinked="0"/>
-          <c:txPr>
-            <a:bodyPr wrap="none"/>
-            <a:lstStyle/>
-            <a:p>
-              <a:pPr>
-                <a:defRPr sz="1100" b="0">
-                  <a:solidFill>
-                    <a:srgbClr val="FFFFFF"/>
-                  </a:solidFill>
-                  <a:latin typeface="Play"/>
-                  <a:ea typeface="Play"/>
-                  <a:cs typeface="Play"/>
-                </a:defRPr>
-              </a:pPr>
-            </a:p>
-          </c:txPr>
-          <c:dLblPos val="outEnd"/>
-          <c:showLegendKey val="0"/>
-          <c:showVal val="1"/>
-          <c:showCatName val="0"/>
-          <c:showSerName val="0"/>
-          <c:showPercent val="0"/>
-          <c:showBubbleSize val="0"/>
-          <c:showLeaderLines val="1"/>
-        </c:dLbls>
-        <c:gapWidth val="60"/>
-        <c:axId val="-2068027336"/>
-        <c:axId val="-2113994440"/>
-      </c:barChart>
-      <c:catAx>
-        <c:axId val="-2068027336"/>
-        <c:scaling>
-          <c:orientation val="minMax"/>
-        </c:scaling>
-        <c:delete val="0"/>
-        <c:axPos val="b"/>
-        <c:majorTickMark val="out"/>
-        <c:minorTickMark val="none"/>
-        <c:tickLblPos val="nextTo"/>
-        <c:txPr>
-          <a:bodyPr/>
-          <a:lstStyle/>
-          <a:p>
-            <a:pPr>
-              <a:defRPr sz="1100" b="0">
-                <a:solidFill>
-                  <a:srgbClr val="FFFFFF"/>
-                </a:solidFill>
-                <a:latin typeface="Play"/>
-                <a:ea typeface="Play"/>
-                <a:cs typeface="Play"/>
-              </a:defRPr>
-            </a:pPr>
-          </a:p>
-        </c:txPr>
-        <c:crossAx val="-2113994440"/>
-        <c:crosses val="autoZero"/>
-        <c:auto val="1"/>
-        <c:lblAlgn val="ctr"/>
-        <c:lblOffset val="100"/>
-        <c:noMultiLvlLbl val="0"/>
-      </c:catAx>
-      <c:valAx>
-        <c:axId val="-2113994440"/>
-        <c:scaling/>
-        <c:delete val="0"/>
-        <c:axPos val="l"/>
-        <c:majorGridlines>
-          <c:spPr>
-            <a:ln w="9525">
-              <a:solidFill>
-                <a:srgbClr val="3C3C3C"/>
-              </a:solidFill>
-            </a:ln>
-          </c:spPr>
-        </c:majorGridlines>
-        <c:title>
-          <c:tx>
-            <c:rich>
-              <a:bodyPr rot="0" vert="horz"/>
-              <a:lstStyle/>
-              <a:p>
-                <a:pPr>
-                  <a:defRPr sz="1100" b="0">
-                    <a:solidFill>
-                      <a:srgbClr val="FFFFFF"/>
-                    </a:solidFill>
-                    <a:latin typeface="Play"/>
-                    <a:ea typeface="Play"/>
-                    <a:cs typeface="Play"/>
-                  </a:defRPr>
-                </a:pPr>
-                <a:r>
-                  <a:t>Время, мин</a:t>
-                </a:r>
-              </a:p>
-            </c:rich>
-          </c:tx>
-          <c:layout/>
-          <c:overlay val="0"/>
-        </c:title>
-        <c:majorTickMark val="out"/>
-        <c:minorTickMark val="none"/>
-        <c:tickLblPos val="nextTo"/>
-        <c:txPr>
-          <a:bodyPr/>
-          <a:lstStyle/>
-          <a:p>
-            <a:pPr>
-              <a:defRPr sz="1100" b="0">
-                <a:solidFill>
-                  <a:srgbClr val="FFFFFF"/>
-                </a:solidFill>
-                <a:latin typeface="Play"/>
-                <a:ea typeface="Play"/>
-                <a:cs typeface="Play"/>
-              </a:defRPr>
-            </a:pPr>
-          </a:p>
-        </c:txPr>
-        <c:crossAx val="-2068027336"/>
-        <c:crosses val="autoZero"/>
-      </c:valAx>
-    </c:plotArea>
-    <c:dispBlanksAs val="gap"/>
-  </c:chart>
-  <c:txPr>
-    <a:bodyPr/>
-    <a:lstStyle/>
-    <a:p>
-      <a:pPr>
-        <a:defRPr sz="1200" b="0">
-          <a:solidFill>
-            <a:srgbClr val="FFFFFF"/>
-          </a:solidFill>
-          <a:latin typeface="Play"/>
-          <a:ea typeface="Play"/>
-          <a:cs typeface="Play"/>
-        </a:defRPr>
-      </a:pPr>
-      <a:endParaRPr lang="en-US"/>
-    </a:p>
-  </c:txPr>
-  <c:externalData r:id="rId1">
-    <c:autoUpdate val="0"/>
-  </c:externalData>
-</c:chartSpace>
-</file>
-
-<file path=ppt/charts/chart2.xml><?xml version="1.0" encoding="utf-8"?>
-<c:chartSpace xmlns:c="http://schemas.openxmlformats.org/drawingml/2006/chart" xmlns:a="http://schemas.openxmlformats.org/drawingml/2006/main" xmlns:r="http://schemas.openxmlformats.org/officeDocument/2006/relationships">
-  <c:date1904 val="0"/>
-  <c:chart>
-    <c:autoTitleDeleted val="1"/>
-    <c:plotArea>
-      <c:barChart>
-        <c:barDir val="col"/>
-        <c:grouping val="clustered"/>
-        <c:ser>
-          <c:idx val="0"/>
-          <c:order val="0"/>
-          <c:tx>
-            <c:strRef>
-              <c:f>Sheet1!$B$1</c:f>
-              <c:strCache>
-                <c:ptCount val="1"/>
-                <c:pt idx="0">
-                  <c:v>Текущее</c:v>
-                </c:pt>
-              </c:strCache>
-            </c:strRef>
-          </c:tx>
-          <c:spPr>
-            <a:solidFill>
-              <a:srgbClr val="0077FF"/>
-            </a:solidFill>
-            <a:ln>
-              <a:solidFill>
-                <a:srgbClr val="0077FF"/>
-              </a:solidFill>
-            </a:ln>
-          </c:spPr>
-          <c:cat>
-            <c:strRef>
-              <c:f>Sheet1!$A$2:$A$3</c:f>
-              <c:strCache>
-                <c:ptCount val="2"/>
-                <c:pt idx="0">
-                  <c:v>Сборка</c:v>
-                </c:pt>
-                <c:pt idx="1">
-                  <c:v>Первая версия</c:v>
-                </c:pt>
-              </c:strCache>
-            </c:strRef>
-          </c:cat>
-          <c:val>
-            <c:numRef>
-              <c:f>Sheet1!$B$2:$B$3</c:f>
-              <c:numCache>
-                <c:formatCode>General</c:formatCode>
-                <c:ptCount val="2"/>
-                <c:pt idx="0">
-                  <c:v>186.0</c:v>
-                </c:pt>
-                <c:pt idx="1">
-                  <c:v>6.0</c:v>
-                </c:pt>
-              </c:numCache>
-            </c:numRef>
-          </c:val>
-        </c:ser>
-        <c:ser>
-          <c:idx val="1"/>
-          <c:order val="1"/>
-          <c:tx>
-            <c:strRef>
-              <c:f>Sheet1!$C$1</c:f>
-              <c:strCache>
-                <c:ptCount val="1"/>
-                <c:pt idx="0">
-                  <c:v>Пилот</c:v>
-                </c:pt>
-              </c:strCache>
-            </c:strRef>
-          </c:tx>
-          <c:spPr>
-            <a:solidFill>
-              <a:srgbClr val="6DBCFF"/>
-            </a:solidFill>
-            <a:ln>
-              <a:solidFill>
-                <a:srgbClr val="6DBCFF"/>
-              </a:solidFill>
-            </a:ln>
-          </c:spPr>
-          <c:cat>
-            <c:strRef>
-              <c:f>Sheet1!$A$2:$A$3</c:f>
-              <c:strCache>
-                <c:ptCount val="2"/>
-                <c:pt idx="0">
-                  <c:v>Сборка</c:v>
-                </c:pt>
-                <c:pt idx="1">
-                  <c:v>Первая версия</c:v>
-                </c:pt>
-              </c:strCache>
-            </c:strRef>
-          </c:cat>
-          <c:val>
-            <c:numRef>
-              <c:f>Sheet1!$C$2:$C$3</c:f>
-              <c:numCache>
-                <c:formatCode>General</c:formatCode>
-                <c:ptCount val="2"/>
-                <c:pt idx="0">
-                  <c:v>4.0</c:v>
-                </c:pt>
-                <c:pt idx="1">
-                  <c:v>1.0</c:v>
-                </c:pt>
-              </c:numCache>
-            </c:numRef>
-          </c:val>
-        </c:ser>
-        <c:dLbls>
-          <c:numFmt formatCode="0&quot; мин&quot;" sourceLinked="0"/>
-          <c:txPr>
-            <a:bodyPr wrap="none"/>
-            <a:lstStyle/>
-            <a:p>
-              <a:pPr>
-                <a:defRPr sz="1100" b="0">
-                  <a:solidFill>
-                    <a:srgbClr val="FFFFFF"/>
-                  </a:solidFill>
-                  <a:latin typeface="Play"/>
-                  <a:ea typeface="Play"/>
-                  <a:cs typeface="Play"/>
-                </a:defRPr>
-              </a:pPr>
-            </a:p>
-          </c:txPr>
-          <c:dLblPos val="outEnd"/>
-          <c:showLegendKey val="0"/>
-          <c:showVal val="1"/>
-          <c:showCatName val="0"/>
-          <c:showSerName val="0"/>
-          <c:showPercent val="0"/>
-          <c:showBubbleSize val="0"/>
-          <c:showLeaderLines val="1"/>
-        </c:dLbls>
-        <c:gapWidth val="60"/>
-        <c:axId val="-2068027336"/>
-        <c:axId val="-2113994440"/>
-      </c:barChart>
-      <c:catAx>
-        <c:axId val="-2068027336"/>
-        <c:scaling>
-          <c:orientation val="minMax"/>
-        </c:scaling>
-        <c:delete val="0"/>
-        <c:axPos val="b"/>
-        <c:majorTickMark val="out"/>
-        <c:minorTickMark val="none"/>
-        <c:tickLblPos val="nextTo"/>
-        <c:txPr>
-          <a:bodyPr/>
-          <a:lstStyle/>
-          <a:p>
-            <a:pPr>
-              <a:defRPr sz="1100" b="0">
-                <a:solidFill>
-                  <a:srgbClr val="FFFFFF"/>
-                </a:solidFill>
-                <a:latin typeface="Play"/>
-                <a:ea typeface="Play"/>
-                <a:cs typeface="Play"/>
-              </a:defRPr>
-            </a:pPr>
-          </a:p>
-        </c:txPr>
-        <c:crossAx val="-2113994440"/>
-        <c:crosses val="autoZero"/>
-        <c:auto val="1"/>
-        <c:lblAlgn val="ctr"/>
-        <c:lblOffset val="100"/>
-        <c:noMultiLvlLbl val="0"/>
-      </c:catAx>
-      <c:valAx>
-        <c:axId val="-2113994440"/>
-        <c:scaling/>
-        <c:delete val="0"/>
-        <c:axPos val="l"/>
-        <c:majorGridlines>
-          <c:spPr>
-            <a:ln w="9525">
-              <a:solidFill>
-                <a:srgbClr val="3C3C3C"/>
-              </a:solidFill>
-            </a:ln>
-          </c:spPr>
-        </c:majorGridlines>
-        <c:title>
-          <c:tx>
-            <c:rich>
-              <a:bodyPr rot="0" vert="horz"/>
-              <a:lstStyle/>
-              <a:p>
-                <a:pPr>
-                  <a:defRPr sz="1100" b="0">
-                    <a:solidFill>
-                      <a:srgbClr val="FFFFFF"/>
-                    </a:solidFill>
-                    <a:latin typeface="Play"/>
-                    <a:ea typeface="Play"/>
-                    <a:cs typeface="Play"/>
-                  </a:defRPr>
-                </a:pPr>
-                <a:r>
-                  <a:t>мин</a:t>
-                </a:r>
-              </a:p>
-            </c:rich>
-          </c:tx>
-          <c:layout/>
-          <c:overlay val="0"/>
-        </c:title>
-        <c:majorTickMark val="out"/>
-        <c:minorTickMark val="none"/>
-        <c:tickLblPos val="nextTo"/>
-        <c:txPr>
-          <a:bodyPr/>
-          <a:lstStyle/>
-          <a:p>
-            <a:pPr>
-              <a:defRPr sz="1100" b="0">
-                <a:solidFill>
-                  <a:srgbClr val="FFFFFF"/>
-                </a:solidFill>
-                <a:latin typeface="Play"/>
-                <a:ea typeface="Play"/>
-                <a:cs typeface="Play"/>
-              </a:defRPr>
-            </a:pPr>
-          </a:p>
-        </c:txPr>
-        <c:crossAx val="-2068027336"/>
-        <c:crosses val="autoZero"/>
-      </c:valAx>
-    </c:plotArea>
-    <c:legend>
-      <c:legendPos val="b"/>
-      <c:overlay val="0"/>
-    </c:legend>
-    <c:dispBlanksAs val="gap"/>
-  </c:chart>
-  <c:txPr>
-    <a:bodyPr/>
-    <a:lstStyle/>
-    <a:p>
-      <a:pPr>
-        <a:defRPr sz="1200" b="0">
-          <a:solidFill>
-            <a:srgbClr val="FFFFFF"/>
-          </a:solidFill>
-          <a:latin typeface="Play"/>
-          <a:ea typeface="Play"/>
-          <a:cs typeface="Play"/>
-        </a:defRPr>
-      </a:pPr>
-      <a:endParaRPr lang="en-US"/>
-    </a:p>
-  </c:txPr>
-  <c:externalData r:id="rId1">
-    <c:autoUpdate val="0"/>
-  </c:externalData>
-</c:chartSpace>
-</file>
-
-<file path=ppt/charts/chart3.xml><?xml version="1.0" encoding="utf-8"?>
-<c:chartSpace xmlns:c="http://schemas.openxmlformats.org/drawingml/2006/chart" xmlns:a="http://schemas.openxmlformats.org/drawingml/2006/main" xmlns:r="http://schemas.openxmlformats.org/officeDocument/2006/relationships">
-  <c:date1904 val="0"/>
-  <c:chart>
-    <c:autoTitleDeleted val="1"/>
-    <c:plotArea>
-      <c:barChart>
-        <c:barDir val="col"/>
-        <c:grouping val="clustered"/>
-        <c:ser>
-          <c:idx val="0"/>
-          <c:order val="0"/>
-          <c:tx>
-            <c:strRef>
-              <c:f>Sheet1!$B$1</c:f>
-              <c:strCache>
-                <c:ptCount val="1"/>
-                <c:pt idx="0">
-                  <c:v>Запросы</c:v>
-                </c:pt>
-              </c:strCache>
-            </c:strRef>
-          </c:tx>
-          <c:spPr>
-            <a:solidFill>
-              <a:srgbClr val="0077FF"/>
-            </a:solidFill>
-            <a:ln>
-              <a:solidFill>
-                <a:srgbClr val="0077FF"/>
-              </a:solidFill>
-            </a:ln>
-          </c:spPr>
-          <c:cat>
-            <c:strRef>
-              <c:f>Sheet1!$A$2:$A$3</c:f>
-              <c:strCache>
-                <c:ptCount val="2"/>
-                <c:pt idx="0">
-                  <c:v>Текущая</c:v>
-                </c:pt>
-                <c:pt idx="1">
-                  <c:v>Пилот</c:v>
-                </c:pt>
-              </c:strCache>
-            </c:strRef>
-          </c:cat>
-          <c:val>
-            <c:numRef>
-              <c:f>Sheet1!$B$2:$B$3</c:f>
-              <c:numCache>
-                <c:formatCode>General</c:formatCode>
-                <c:ptCount val="2"/>
-                <c:pt idx="0">
-                  <c:v>11.0</c:v>
-                </c:pt>
-                <c:pt idx="1">
-                  <c:v>38.0</c:v>
-                </c:pt>
-              </c:numCache>
-            </c:numRef>
-          </c:val>
-        </c:ser>
-        <c:dLbls>
-          <c:numFmt formatCode="0&quot; запросов&quot;" sourceLinked="0"/>
-          <c:txPr>
-            <a:bodyPr wrap="none"/>
-            <a:lstStyle/>
-            <a:p>
-              <a:pPr>
-                <a:defRPr sz="1100" b="0">
-                  <a:solidFill>
-                    <a:srgbClr val="FFFFFF"/>
-                  </a:solidFill>
-                  <a:latin typeface="Play"/>
-                  <a:ea typeface="Play"/>
-                  <a:cs typeface="Play"/>
-                </a:defRPr>
-              </a:pPr>
-            </a:p>
-          </c:txPr>
-          <c:dLblPos val="outEnd"/>
-          <c:showLegendKey val="0"/>
-          <c:showVal val="1"/>
-          <c:showCatName val="0"/>
-          <c:showSerName val="0"/>
-          <c:showPercent val="0"/>
-          <c:showBubbleSize val="0"/>
-          <c:showLeaderLines val="1"/>
-        </c:dLbls>
-        <c:gapWidth val="60"/>
-        <c:axId val="-2068027336"/>
-        <c:axId val="-2113994440"/>
-      </c:barChart>
-      <c:catAx>
-        <c:axId val="-2068027336"/>
-        <c:scaling>
-          <c:orientation val="minMax"/>
-        </c:scaling>
-        <c:delete val="0"/>
-        <c:axPos val="b"/>
-        <c:majorTickMark val="out"/>
-        <c:minorTickMark val="none"/>
-        <c:tickLblPos val="nextTo"/>
-        <c:txPr>
-          <a:bodyPr/>
-          <a:lstStyle/>
-          <a:p>
-            <a:pPr>
-              <a:defRPr sz="1100" b="0">
-                <a:solidFill>
-                  <a:srgbClr val="FFFFFF"/>
-                </a:solidFill>
-                <a:latin typeface="Play"/>
-                <a:ea typeface="Play"/>
-                <a:cs typeface="Play"/>
-              </a:defRPr>
-            </a:pPr>
-          </a:p>
-        </c:txPr>
-        <c:crossAx val="-2113994440"/>
-        <c:crosses val="autoZero"/>
-        <c:auto val="1"/>
-        <c:lblAlgn val="ctr"/>
-        <c:lblOffset val="100"/>
-        <c:noMultiLvlLbl val="0"/>
-      </c:catAx>
-      <c:valAx>
-        <c:axId val="-2113994440"/>
-        <c:scaling/>
-        <c:delete val="0"/>
-        <c:axPos val="l"/>
-        <c:majorGridlines>
-          <c:spPr>
-            <a:ln w="9525">
-              <a:solidFill>
-                <a:srgbClr val="3C3C3C"/>
-              </a:solidFill>
-            </a:ln>
-          </c:spPr>
-        </c:majorGridlines>
-        <c:title>
-          <c:tx>
-            <c:rich>
-              <a:bodyPr rot="0" vert="horz"/>
-              <a:lstStyle/>
-              <a:p>
-                <a:pPr>
-                  <a:defRPr sz="1100" b="0">
-                    <a:solidFill>
-                      <a:srgbClr val="FFFFFF"/>
-                    </a:solidFill>
-                    <a:latin typeface="Play"/>
-                    <a:ea typeface="Play"/>
-                    <a:cs typeface="Play"/>
-                  </a:defRPr>
-                </a:pPr>
-                <a:r>
-                  <a:t>Запросы, запросов</a:t>
-                </a:r>
-              </a:p>
-            </c:rich>
-          </c:tx>
-          <c:layout/>
-          <c:overlay val="0"/>
-        </c:title>
-        <c:majorTickMark val="out"/>
-        <c:minorTickMark val="none"/>
-        <c:tickLblPos val="nextTo"/>
-        <c:txPr>
-          <a:bodyPr/>
-          <a:lstStyle/>
-          <a:p>
-            <a:pPr>
-              <a:defRPr sz="1100" b="0">
-                <a:solidFill>
-                  <a:srgbClr val="FFFFFF"/>
-                </a:solidFill>
-                <a:latin typeface="Play"/>
-                <a:ea typeface="Play"/>
-                <a:cs typeface="Play"/>
-              </a:defRPr>
-            </a:pPr>
-          </a:p>
-        </c:txPr>
-        <c:crossAx val="-2068027336"/>
-        <c:crosses val="autoZero"/>
-      </c:valAx>
-    </c:plotArea>
-    <c:dispBlanksAs val="gap"/>
-  </c:chart>
-  <c:txPr>
-    <a:bodyPr/>
-    <a:lstStyle/>
-    <a:p>
-      <a:pPr>
-        <a:defRPr sz="1200" b="0">
-          <a:solidFill>
-            <a:srgbClr val="FFFFFF"/>
-          </a:solidFill>
-          <a:latin typeface="Play"/>
-          <a:ea typeface="Play"/>
-          <a:cs typeface="Play"/>
-        </a:defRPr>
-      </a:pPr>
-      <a:endParaRPr lang="en-US"/>
-    </a:p>
-  </c:txPr>
-  <c:externalData r:id="rId1">
-    <c:autoUpdate val="0"/>
-  </c:externalData>
-</c:chartSpace>
 </file>
 
 <file path=ppt/notesMasters/notesMaster1.xml><?xml version="1.0" encoding="utf-8"?>
@@ -2814,6 +2116,138 @@
 </p:notes>
 </file>
 
+<file path=ppt/notesSlides/notesSlide40.xml><?xml version="1.0" encoding="utf-8"?>
+<p:notes xmlns:a="http://schemas.openxmlformats.org/drawingml/2006/main" xmlns:p="http://schemas.openxmlformats.org/presentationml/2006/main" xmlns:r="http://schemas.openxmlformats.org/officeDocument/2006/relationships">
+  <p:cSld>
+    <p:spTree>
+      <p:nvGrpSpPr>
+        <p:cNvPr id="1" name=""/>
+        <p:cNvGrpSpPr/>
+        <p:nvPr/>
+      </p:nvGrpSpPr>
+      <p:grpSpPr>
+        <a:xfrm>
+          <a:off x="0" y="0"/>
+          <a:ext cx="0" cy="0"/>
+          <a:chOff x="0" y="0"/>
+          <a:chExt cx="0" cy="0"/>
+        </a:xfrm>
+      </p:grpSpPr>
+      <p:sp>
+        <p:nvSpPr>
+          <p:cNvPr id="2" name="Slide Image Placeholder 1"/>
+          <p:cNvSpPr>
+            <a:spLocks noGrp="1"/>
+          </p:cNvSpPr>
+          <p:nvPr>
+            <p:ph type="sldImg" idx="3"/>
+          </p:nvPr>
+        </p:nvSpPr>
+        <p:spPr/>
+      </p:sp>
+      <p:sp>
+        <p:nvSpPr>
+          <p:cNvPr id="3" name="Notes Placeholder 2"/>
+          <p:cNvSpPr>
+            <a:spLocks noGrp="1"/>
+          </p:cNvSpPr>
+          <p:nvPr>
+            <p:ph type="body" idx="1"/>
+          </p:nvPr>
+        </p:nvSpPr>
+        <p:spPr/>
+        <p:txBody>
+          <a:bodyPr/>
+          <a:lstStyle/>
+          <a:p/>
+        </p:txBody>
+      </p:sp>
+      <p:sp>
+        <p:nvSpPr>
+          <p:cNvPr id="4" name="Slide Number Placeholder 3"/>
+          <p:cNvSpPr>
+            <a:spLocks noGrp="1"/>
+          </p:cNvSpPr>
+          <p:nvPr>
+            <p:ph type="sldNum" idx="12"/>
+          </p:nvPr>
+        </p:nvSpPr>
+        <p:spPr/>
+      </p:sp>
+    </p:spTree>
+  </p:cSld>
+  <p:clrMapOvr>
+    <a:masterClrMapping/>
+  </p:clrMapOvr>
+</p:notes>
+</file>
+
+<file path=ppt/notesSlides/notesSlide41.xml><?xml version="1.0" encoding="utf-8"?>
+<p:notes xmlns:a="http://schemas.openxmlformats.org/drawingml/2006/main" xmlns:p="http://schemas.openxmlformats.org/presentationml/2006/main" xmlns:r="http://schemas.openxmlformats.org/officeDocument/2006/relationships">
+  <p:cSld>
+    <p:spTree>
+      <p:nvGrpSpPr>
+        <p:cNvPr id="1" name=""/>
+        <p:cNvGrpSpPr/>
+        <p:nvPr/>
+      </p:nvGrpSpPr>
+      <p:grpSpPr>
+        <a:xfrm>
+          <a:off x="0" y="0"/>
+          <a:ext cx="0" cy="0"/>
+          <a:chOff x="0" y="0"/>
+          <a:chExt cx="0" cy="0"/>
+        </a:xfrm>
+      </p:grpSpPr>
+      <p:sp>
+        <p:nvSpPr>
+          <p:cNvPr id="2" name="Slide Image Placeholder 1"/>
+          <p:cNvSpPr>
+            <a:spLocks noGrp="1"/>
+          </p:cNvSpPr>
+          <p:nvPr>
+            <p:ph type="sldImg" idx="3"/>
+          </p:nvPr>
+        </p:nvSpPr>
+        <p:spPr/>
+      </p:sp>
+      <p:sp>
+        <p:nvSpPr>
+          <p:cNvPr id="3" name="Notes Placeholder 2"/>
+          <p:cNvSpPr>
+            <a:spLocks noGrp="1"/>
+          </p:cNvSpPr>
+          <p:nvPr>
+            <p:ph type="body" idx="1"/>
+          </p:nvPr>
+        </p:nvSpPr>
+        <p:spPr/>
+        <p:txBody>
+          <a:bodyPr/>
+          <a:lstStyle/>
+          <a:p/>
+        </p:txBody>
+      </p:sp>
+      <p:sp>
+        <p:nvSpPr>
+          <p:cNvPr id="4" name="Slide Number Placeholder 3"/>
+          <p:cNvSpPr>
+            <a:spLocks noGrp="1"/>
+          </p:cNvSpPr>
+          <p:nvPr>
+            <p:ph type="sldNum" idx="12"/>
+          </p:nvPr>
+        </p:nvSpPr>
+        <p:spPr/>
+      </p:sp>
+    </p:spTree>
+  </p:cSld>
+  <p:clrMapOvr>
+    <a:masterClrMapping/>
+  </p:clrMapOvr>
+</p:notes>
+</file>
+
 <file path=ppt/slideLayouts/slideLayout1.xml><?xml version="1.0" encoding="utf-8"?>
 <p:sldLayout xmlns:a="http://schemas.openxmlformats.org/drawingml/2006/main" xmlns:r="http://schemas.openxmlformats.org/officeDocument/2006/relationships" xmlns:mc="http://schemas.openxmlformats.org/markup-compatibility/2006" xmlns:mv="urn:schemas-microsoft-com:mac:vml" xmlns:p="http://schemas.openxmlformats.org/presentationml/2006/main" xmlns:c="http://schemas.openxmlformats.org/drawingml/2006/chart" xmlns:dgm="http://schemas.openxmlformats.org/drawingml/2006/diagram" xmlns:o="urn:schemas-microsoft-com:office:office" xmlns:v="urn:schemas-microsoft-com:vml" xmlns:pvml="urn:schemas-microsoft-com:office:powerpoint" xmlns:com="http://schemas.openxmlformats.org/drawingml/2006/compatibility" xmlns:p14="http://schemas.microsoft.com/office/powerpoint/2010/main" xmlns:p15="http://schemas.microsoft.com/office/powerpoint/2012/main" xmlns:ahyp="http://schemas.microsoft.com/office/drawing/2018/hyperlinkcolor" matchingName="7_Титульный слайд">
   <p:cSld name="7_Титульный слайд">
@@ -9826,8 +9260,8 @@
         </p:nvSpPr>
         <p:spPr>
           <a:xfrm>
-            <a:off x="429280" y="1664162"/>
-            <a:ext cx="5472562" cy="3753589"/>
+            <a:off x="429280" y="1783080"/>
+            <a:ext cx="5472562" cy="4114800"/>
           </a:xfrm>
           <a:prstGeom prst="rect">
             <a:avLst/>
@@ -9940,52 +9374,595 @@
                 <a:ea typeface="Play"/>
                 <a:cs typeface="Play"/>
               </a:rPr>
-              <a:t>• Дизайн-отдел закрывает 11 запросов в неделю из 27</a:t>
-            </a:r>
-          </a:p>
-          <a:p>
-            <a:pPr algn="l">
-              <a:spcAft>
-                <a:spcPts val="300"/>
-              </a:spcAft>
-              <a:defRPr sz="1600">
-                <a:solidFill>
-                  <a:srgbClr val="FFFFFF"/>
-                </a:solidFill>
-                <a:latin typeface="Play"/>
-                <a:ea typeface="Play"/>
-                <a:cs typeface="Play"/>
-              </a:defRPr>
-            </a:pPr>
-            <a:r>
-              <a:rPr sz="1600">
-                <a:solidFill>
-                  <a:srgbClr val="FFFFFF"/>
-                </a:solidFill>
-                <a:latin typeface="Play"/>
-                <a:ea typeface="Play"/>
-                <a:cs typeface="Play"/>
-              </a:rPr>
-              <a:t>• Средний срок ожидания 6 рабочих дней</a:t>
+              <a:t>• Дизайн-отдел из 4 человек обслуживает 11 запросов в неделю</a:t>
             </a:r>
           </a:p>
         </p:txBody>
       </p:sp>
       <p:graphicFrame>
         <p:nvGraphicFramePr>
-          <p:cNvPr id="4" name="Chart 3"/>
+          <p:cNvPr id="4" name="Table 3"/>
           <p:cNvGraphicFramePr>
             <a:graphicFrameLocks noGrp="1"/>
           </p:cNvGraphicFramePr>
           <p:nvPr/>
         </p:nvGraphicFramePr>
         <p:xfrm>
-          <a:off x="6267602" y="1664162"/>
-          <a:ext cx="5472562" cy="3753589"/>
+          <a:off x="6267602" y="1783080"/>
+          <a:ext cx="5472562" cy="4114800"/>
         </p:xfrm>
         <a:graphic>
-          <a:graphicData uri="http://schemas.openxmlformats.org/drawingml/2006/chart">
-            <c:chart xmlns:c="http://schemas.openxmlformats.org/drawingml/2006/chart" r:id="rId2"/>
+          <a:graphicData uri="http://schemas.openxmlformats.org/drawingml/2006/table">
+            <a:tbl>
+              <a:tblPr firstRow="1" bandRow="1">
+                <a:tableStyleId>{5C22544A-7EE6-4342-B048-85BDC9FD1C3A}</a:tableStyleId>
+              </a:tblPr>
+              <a:tblGrid>
+                <a:gridCol w="1824187"/>
+                <a:gridCol w="1824187"/>
+                <a:gridCol w="1824188"/>
+              </a:tblGrid>
+              <a:tr h="587828">
+                <a:tc>
+                  <a:txBody>
+                    <a:bodyPr/>
+                    <a:lstStyle/>
+                    <a:p>
+                      <a:pPr>
+                        <a:defRPr sz="1300" b="1">
+                          <a:solidFill>
+                            <a:srgbClr val="FFFFFF"/>
+                          </a:solidFill>
+                          <a:latin typeface="Play"/>
+                          <a:ea typeface="Play"/>
+                          <a:cs typeface="Play"/>
+                        </a:defRPr>
+                      </a:pPr>
+                      <a:r>
+                        <a:t>Метрика</a:t>
+                      </a:r>
+                    </a:p>
+                  </a:txBody>
+                  <a:tcPr>
+                    <a:solidFill>
+                      <a:srgbClr val="0077FF"/>
+                    </a:solidFill>
+                  </a:tcPr>
+                </a:tc>
+                <a:tc>
+                  <a:txBody>
+                    <a:bodyPr/>
+                    <a:lstStyle/>
+                    <a:p>
+                      <a:pPr>
+                        <a:defRPr sz="1300" b="1">
+                          <a:solidFill>
+                            <a:srgbClr val="FFFFFF"/>
+                          </a:solidFill>
+                          <a:latin typeface="Play"/>
+                          <a:ea typeface="Play"/>
+                          <a:cs typeface="Play"/>
+                        </a:defRPr>
+                      </a:pPr>
+                      <a:r>
+                        <a:t>Значение</a:t>
+                      </a:r>
+                    </a:p>
+                  </a:txBody>
+                  <a:tcPr>
+                    <a:solidFill>
+                      <a:srgbClr val="0077FF"/>
+                    </a:solidFill>
+                  </a:tcPr>
+                </a:tc>
+                <a:tc>
+                  <a:txBody>
+                    <a:bodyPr/>
+                    <a:lstStyle/>
+                    <a:p>
+                      <a:pPr>
+                        <a:defRPr sz="1300" b="1">
+                          <a:solidFill>
+                            <a:srgbClr val="FFFFFF"/>
+                          </a:solidFill>
+                          <a:latin typeface="Play"/>
+                          <a:ea typeface="Play"/>
+                          <a:cs typeface="Play"/>
+                        </a:defRPr>
+                      </a:pPr>
+                      <a:r>
+                        <a:t>Единица</a:t>
+                      </a:r>
+                    </a:p>
+                  </a:txBody>
+                  <a:tcPr>
+                    <a:solidFill>
+                      <a:srgbClr val="0077FF"/>
+                    </a:solidFill>
+                  </a:tcPr>
+                </a:tc>
+              </a:tr>
+              <a:tr h="587828">
+                <a:tc>
+                  <a:txBody>
+                    <a:bodyPr/>
+                    <a:lstStyle/>
+                    <a:p>
+                      <a:pPr>
+                        <a:defRPr sz="1300" b="0">
+                          <a:solidFill>
+                            <a:srgbClr val="FFFFFF"/>
+                          </a:solidFill>
+                          <a:latin typeface="Play"/>
+                          <a:ea typeface="Play"/>
+                          <a:cs typeface="Play"/>
+                        </a:defRPr>
+                      </a:pPr>
+                      <a:r>
+                        <a:t>Время сборки</a:t>
+                      </a:r>
+                    </a:p>
+                  </a:txBody>
+                  <a:tcPr>
+                    <a:solidFill>
+                      <a:srgbClr val="111111"/>
+                    </a:solidFill>
+                  </a:tcPr>
+                </a:tc>
+                <a:tc>
+                  <a:txBody>
+                    <a:bodyPr/>
+                    <a:lstStyle/>
+                    <a:p>
+                      <a:pPr>
+                        <a:defRPr sz="1300" b="0">
+                          <a:solidFill>
+                            <a:srgbClr val="FFFFFF"/>
+                          </a:solidFill>
+                          <a:latin typeface="Play"/>
+                          <a:ea typeface="Play"/>
+                          <a:cs typeface="Play"/>
+                        </a:defRPr>
+                      </a:pPr>
+                      <a:r>
+                        <a:t>186</a:t>
+                      </a:r>
+                    </a:p>
+                  </a:txBody>
+                  <a:tcPr>
+                    <a:solidFill>
+                      <a:srgbClr val="111111"/>
+                    </a:solidFill>
+                  </a:tcPr>
+                </a:tc>
+                <a:tc>
+                  <a:txBody>
+                    <a:bodyPr/>
+                    <a:lstStyle/>
+                    <a:p>
+                      <a:pPr>
+                        <a:defRPr sz="1300" b="0">
+                          <a:solidFill>
+                            <a:srgbClr val="FFFFFF"/>
+                          </a:solidFill>
+                          <a:latin typeface="Play"/>
+                          <a:ea typeface="Play"/>
+                          <a:cs typeface="Play"/>
+                        </a:defRPr>
+                      </a:pPr>
+                      <a:r>
+                        <a:t>мин</a:t>
+                      </a:r>
+                    </a:p>
+                  </a:txBody>
+                  <a:tcPr>
+                    <a:solidFill>
+                      <a:srgbClr val="111111"/>
+                    </a:solidFill>
+                  </a:tcPr>
+                </a:tc>
+              </a:tr>
+              <a:tr h="587828">
+                <a:tc>
+                  <a:txBody>
+                    <a:bodyPr/>
+                    <a:lstStyle/>
+                    <a:p>
+                      <a:pPr>
+                        <a:defRPr sz="1300" b="0">
+                          <a:solidFill>
+                            <a:srgbClr val="FFFFFF"/>
+                          </a:solidFill>
+                          <a:latin typeface="Play"/>
+                          <a:ea typeface="Play"/>
+                          <a:cs typeface="Play"/>
+                        </a:defRPr>
+                      </a:pPr>
+                      <a:r>
+                        <a:t>Время правок</a:t>
+                      </a:r>
+                    </a:p>
+                  </a:txBody>
+                  <a:tcPr>
+                    <a:solidFill>
+                      <a:srgbClr val="111111"/>
+                    </a:solidFill>
+                  </a:tcPr>
+                </a:tc>
+                <a:tc>
+                  <a:txBody>
+                    <a:bodyPr/>
+                    <a:lstStyle/>
+                    <a:p>
+                      <a:pPr>
+                        <a:defRPr sz="1300" b="0">
+                          <a:solidFill>
+                            <a:srgbClr val="FFFFFF"/>
+                          </a:solidFill>
+                          <a:latin typeface="Play"/>
+                          <a:ea typeface="Play"/>
+                          <a:cs typeface="Play"/>
+                        </a:defRPr>
+                      </a:pPr>
+                      <a:r>
+                        <a:t>74</a:t>
+                      </a:r>
+                    </a:p>
+                  </a:txBody>
+                  <a:tcPr>
+                    <a:solidFill>
+                      <a:srgbClr val="111111"/>
+                    </a:solidFill>
+                  </a:tcPr>
+                </a:tc>
+                <a:tc>
+                  <a:txBody>
+                    <a:bodyPr/>
+                    <a:lstStyle/>
+                    <a:p>
+                      <a:pPr>
+                        <a:defRPr sz="1300" b="0">
+                          <a:solidFill>
+                            <a:srgbClr val="FFFFFF"/>
+                          </a:solidFill>
+                          <a:latin typeface="Play"/>
+                          <a:ea typeface="Play"/>
+                          <a:cs typeface="Play"/>
+                        </a:defRPr>
+                      </a:pPr>
+                      <a:r>
+                        <a:t>мин</a:t>
+                      </a:r>
+                    </a:p>
+                  </a:txBody>
+                  <a:tcPr>
+                    <a:solidFill>
+                      <a:srgbClr val="111111"/>
+                    </a:solidFill>
+                  </a:tcPr>
+                </a:tc>
+              </a:tr>
+              <a:tr h="587828">
+                <a:tc>
+                  <a:txBody>
+                    <a:bodyPr/>
+                    <a:lstStyle/>
+                    <a:p>
+                      <a:pPr>
+                        <a:defRPr sz="1300" b="0">
+                          <a:solidFill>
+                            <a:srgbClr val="FFFFFF"/>
+                          </a:solidFill>
+                          <a:latin typeface="Play"/>
+                          <a:ea typeface="Play"/>
+                          <a:cs typeface="Play"/>
+                        </a:defRPr>
+                      </a:pPr>
+                      <a:r>
+                        <a:t>Нарушения стиля</a:t>
+                      </a:r>
+                    </a:p>
+                  </a:txBody>
+                  <a:tcPr>
+                    <a:solidFill>
+                      <a:srgbClr val="111111"/>
+                    </a:solidFill>
+                  </a:tcPr>
+                </a:tc>
+                <a:tc>
+                  <a:txBody>
+                    <a:bodyPr/>
+                    <a:lstStyle/>
+                    <a:p>
+                      <a:pPr>
+                        <a:defRPr sz="1300" b="0">
+                          <a:solidFill>
+                            <a:srgbClr val="FFFFFF"/>
+                          </a:solidFill>
+                          <a:latin typeface="Play"/>
+                          <a:ea typeface="Play"/>
+                          <a:cs typeface="Play"/>
+                        </a:defRPr>
+                      </a:pPr>
+                      <a:r>
+                        <a:t>19/42</a:t>
+                      </a:r>
+                    </a:p>
+                  </a:txBody>
+                  <a:tcPr>
+                    <a:solidFill>
+                      <a:srgbClr val="111111"/>
+                    </a:solidFill>
+                  </a:tcPr>
+                </a:tc>
+                <a:tc>
+                  <a:txBody>
+                    <a:bodyPr/>
+                    <a:lstStyle/>
+                    <a:p>
+                      <a:pPr>
+                        <a:defRPr sz="1300" b="0">
+                          <a:solidFill>
+                            <a:srgbClr val="FFFFFF"/>
+                          </a:solidFill>
+                          <a:latin typeface="Play"/>
+                          <a:ea typeface="Play"/>
+                          <a:cs typeface="Play"/>
+                        </a:defRPr>
+                      </a:pPr>
+                      <a:r>
+                        <a:t>шт</a:t>
+                      </a:r>
+                    </a:p>
+                  </a:txBody>
+                  <a:tcPr>
+                    <a:solidFill>
+                      <a:srgbClr val="111111"/>
+                    </a:solidFill>
+                  </a:tcPr>
+                </a:tc>
+              </a:tr>
+              <a:tr h="587828">
+                <a:tc>
+                  <a:txBody>
+                    <a:bodyPr/>
+                    <a:lstStyle/>
+                    <a:p>
+                      <a:pPr>
+                        <a:defRPr sz="1300" b="0">
+                          <a:solidFill>
+                            <a:srgbClr val="FFFFFF"/>
+                          </a:solidFill>
+                          <a:latin typeface="Play"/>
+                          <a:ea typeface="Play"/>
+                          <a:cs typeface="Play"/>
+                        </a:defRPr>
+                      </a:pPr>
+                      <a:r>
+                        <a:t>Размер команды</a:t>
+                      </a:r>
+                    </a:p>
+                  </a:txBody>
+                  <a:tcPr>
+                    <a:solidFill>
+                      <a:srgbClr val="111111"/>
+                    </a:solidFill>
+                  </a:tcPr>
+                </a:tc>
+                <a:tc>
+                  <a:txBody>
+                    <a:bodyPr/>
+                    <a:lstStyle/>
+                    <a:p>
+                      <a:pPr>
+                        <a:defRPr sz="1300" b="0">
+                          <a:solidFill>
+                            <a:srgbClr val="FFFFFF"/>
+                          </a:solidFill>
+                          <a:latin typeface="Play"/>
+                          <a:ea typeface="Play"/>
+                          <a:cs typeface="Play"/>
+                        </a:defRPr>
+                      </a:pPr>
+                      <a:r>
+                        <a:t>4</a:t>
+                      </a:r>
+                    </a:p>
+                  </a:txBody>
+                  <a:tcPr>
+                    <a:solidFill>
+                      <a:srgbClr val="111111"/>
+                    </a:solidFill>
+                  </a:tcPr>
+                </a:tc>
+                <a:tc>
+                  <a:txBody>
+                    <a:bodyPr/>
+                    <a:lstStyle/>
+                    <a:p>
+                      <a:pPr>
+                        <a:defRPr sz="1300" b="0">
+                          <a:solidFill>
+                            <a:srgbClr val="FFFFFF"/>
+                          </a:solidFill>
+                          <a:latin typeface="Play"/>
+                          <a:ea typeface="Play"/>
+                          <a:cs typeface="Play"/>
+                        </a:defRPr>
+                      </a:pPr>
+                      <a:r>
+                        <a:t>чел</a:t>
+                      </a:r>
+                    </a:p>
+                  </a:txBody>
+                  <a:tcPr>
+                    <a:solidFill>
+                      <a:srgbClr val="111111"/>
+                    </a:solidFill>
+                  </a:tcPr>
+                </a:tc>
+              </a:tr>
+              <a:tr h="587828">
+                <a:tc>
+                  <a:txBody>
+                    <a:bodyPr/>
+                    <a:lstStyle/>
+                    <a:p>
+                      <a:pPr>
+                        <a:defRPr sz="1300" b="0">
+                          <a:solidFill>
+                            <a:srgbClr val="FFFFFF"/>
+                          </a:solidFill>
+                          <a:latin typeface="Play"/>
+                          <a:ea typeface="Play"/>
+                          <a:cs typeface="Play"/>
+                        </a:defRPr>
+                      </a:pPr>
+                      <a:r>
+                        <a:t>Запросы в неделю</a:t>
+                      </a:r>
+                    </a:p>
+                  </a:txBody>
+                  <a:tcPr>
+                    <a:solidFill>
+                      <a:srgbClr val="111111"/>
+                    </a:solidFill>
+                  </a:tcPr>
+                </a:tc>
+                <a:tc>
+                  <a:txBody>
+                    <a:bodyPr/>
+                    <a:lstStyle/>
+                    <a:p>
+                      <a:pPr>
+                        <a:defRPr sz="1300" b="0">
+                          <a:solidFill>
+                            <a:srgbClr val="FFFFFF"/>
+                          </a:solidFill>
+                          <a:latin typeface="Play"/>
+                          <a:ea typeface="Play"/>
+                          <a:cs typeface="Play"/>
+                        </a:defRPr>
+                      </a:pPr>
+                      <a:r>
+                        <a:t>11/27</a:t>
+                      </a:r>
+                    </a:p>
+                  </a:txBody>
+                  <a:tcPr>
+                    <a:solidFill>
+                      <a:srgbClr val="111111"/>
+                    </a:solidFill>
+                  </a:tcPr>
+                </a:tc>
+                <a:tc>
+                  <a:txBody>
+                    <a:bodyPr/>
+                    <a:lstStyle/>
+                    <a:p>
+                      <a:pPr>
+                        <a:defRPr sz="1300" b="0">
+                          <a:solidFill>
+                            <a:srgbClr val="FFFFFF"/>
+                          </a:solidFill>
+                          <a:latin typeface="Play"/>
+                          <a:ea typeface="Play"/>
+                          <a:cs typeface="Play"/>
+                        </a:defRPr>
+                      </a:pPr>
+                      <a:r>
+                        <a:t>запросов</a:t>
+                      </a:r>
+                    </a:p>
+                  </a:txBody>
+                  <a:tcPr>
+                    <a:solidFill>
+                      <a:srgbClr val="111111"/>
+                    </a:solidFill>
+                  </a:tcPr>
+                </a:tc>
+              </a:tr>
+              <a:tr h="587832">
+                <a:tc>
+                  <a:txBody>
+                    <a:bodyPr/>
+                    <a:lstStyle/>
+                    <a:p>
+                      <a:pPr>
+                        <a:defRPr sz="1300" b="0">
+                          <a:solidFill>
+                            <a:srgbClr val="FFFFFF"/>
+                          </a:solidFill>
+                          <a:latin typeface="Play"/>
+                          <a:ea typeface="Play"/>
+                          <a:cs typeface="Play"/>
+                        </a:defRPr>
+                      </a:pPr>
+                      <a:r>
+                        <a:t>Срок ожидания</a:t>
+                      </a:r>
+                    </a:p>
+                  </a:txBody>
+                  <a:tcPr>
+                    <a:solidFill>
+                      <a:srgbClr val="111111"/>
+                    </a:solidFill>
+                  </a:tcPr>
+                </a:tc>
+                <a:tc>
+                  <a:txBody>
+                    <a:bodyPr/>
+                    <a:lstStyle/>
+                    <a:p>
+                      <a:pPr>
+                        <a:defRPr sz="1300" b="0">
+                          <a:solidFill>
+                            <a:srgbClr val="FFFFFF"/>
+                          </a:solidFill>
+                          <a:latin typeface="Play"/>
+                          <a:ea typeface="Play"/>
+                          <a:cs typeface="Play"/>
+                        </a:defRPr>
+                      </a:pPr>
+                      <a:r>
+                        <a:t>6</a:t>
+                      </a:r>
+                    </a:p>
+                  </a:txBody>
+                  <a:tcPr>
+                    <a:solidFill>
+                      <a:srgbClr val="111111"/>
+                    </a:solidFill>
+                  </a:tcPr>
+                </a:tc>
+                <a:tc>
+                  <a:txBody>
+                    <a:bodyPr/>
+                    <a:lstStyle/>
+                    <a:p>
+                      <a:pPr>
+                        <a:defRPr sz="1300" b="0">
+                          <a:solidFill>
+                            <a:srgbClr val="FFFFFF"/>
+                          </a:solidFill>
+                          <a:latin typeface="Play"/>
+                          <a:ea typeface="Play"/>
+                          <a:cs typeface="Play"/>
+                        </a:defRPr>
+                      </a:pPr>
+                      <a:r>
+                        <a:t>дней</a:t>
+                      </a:r>
+                    </a:p>
+                  </a:txBody>
+                  <a:tcPr>
+                    <a:solidFill>
+                      <a:srgbClr val="111111"/>
+                    </a:solidFill>
+                  </a:tcPr>
+                </a:tc>
+              </a:tr>
+            </a:tbl>
           </a:graphicData>
         </a:graphic>
       </p:graphicFrame>
@@ -10064,8 +10041,8 @@
         </p:nvSpPr>
         <p:spPr>
           <a:xfrm>
-            <a:off x="429280" y="1592290"/>
-            <a:ext cx="5472562" cy="4181322"/>
+            <a:off x="429280" y="1783080"/>
+            <a:ext cx="5472562" cy="4114800"/>
           </a:xfrm>
           <a:prstGeom prst="rect">
             <a:avLst/>
@@ -10126,7 +10103,7 @@
                 <a:ea typeface="Play"/>
                 <a:cs typeface="Play"/>
               </a:rPr>
-              <a:t>• Автоматически формирует дизайн-систему и план колоды</a:t>
+              <a:t>• Шаблон преобразуется в дизайн-систему</a:t>
             </a:r>
           </a:p>
           <a:p>
@@ -10152,7 +10129,7 @@
                 <a:ea typeface="Play"/>
                 <a:cs typeface="Play"/>
               </a:rPr>
-              <a:t>• Экспорт в pptx, pdf, html с редактируемыми слайдами</a:t>
+              <a:t>• Автоматически формируется план колоды</a:t>
             </a:r>
           </a:p>
           <a:p>
@@ -10178,7 +10155,33 @@
                 <a:ea typeface="Play"/>
                 <a:cs typeface="Play"/>
               </a:rPr>
-              <a:t>• Аудит качества проверяет все данные до выдачи</a:t>
+              <a:t>• Вёрстка выполняется по правилам дизайна</a:t>
+            </a:r>
+          </a:p>
+          <a:p>
+            <a:pPr algn="l">
+              <a:spcAft>
+                <a:spcPts val="300"/>
+              </a:spcAft>
+              <a:defRPr sz="1600">
+                <a:solidFill>
+                  <a:srgbClr val="FFFFFF"/>
+                </a:solidFill>
+                <a:latin typeface="Play"/>
+                <a:ea typeface="Play"/>
+                <a:cs typeface="Play"/>
+              </a:defRPr>
+            </a:pPr>
+            <a:r>
+              <a:rPr sz="1600">
+                <a:solidFill>
+                  <a:srgbClr val="FFFFFF"/>
+                </a:solidFill>
+                <a:latin typeface="Play"/>
+                <a:ea typeface="Play"/>
+                <a:cs typeface="Play"/>
+              </a:rPr>
+              <a:t>• Проводится аудит качества до публикации</a:t>
             </a:r>
           </a:p>
         </p:txBody>
@@ -10191,8 +10194,8 @@
         </p:nvSpPr>
         <p:spPr>
           <a:xfrm>
-            <a:off x="6267602" y="1641072"/>
-            <a:ext cx="5472562" cy="599322"/>
+            <a:off x="6267602" y="1831086"/>
+            <a:ext cx="5472562" cy="589788"/>
           </a:xfrm>
           <a:prstGeom prst="homePlate">
             <a:avLst/>
@@ -10241,7 +10244,7 @@
                 <a:ea typeface="Play"/>
                 <a:cs typeface="Play"/>
               </a:rPr>
-              <a:t>Шаблон</a:t>
+              <a:t>Загрузить шаблон</a:t>
             </a:r>
           </a:p>
         </p:txBody>
@@ -10254,8 +10257,8 @@
         </p:nvSpPr>
         <p:spPr>
           <a:xfrm>
-            <a:off x="6267602" y="2337959"/>
-            <a:ext cx="5472562" cy="599322"/>
+            <a:off x="6267602" y="2516886"/>
+            <a:ext cx="5472562" cy="589788"/>
           </a:xfrm>
           <a:prstGeom prst="chevron">
             <a:avLst/>
@@ -10304,7 +10307,7 @@
                 <a:ea typeface="Play"/>
                 <a:cs typeface="Play"/>
               </a:rPr>
-              <a:t>Дизайн-система</a:t>
+              <a:t>Разобрать дизайн-систему</a:t>
             </a:r>
           </a:p>
         </p:txBody>
@@ -10317,8 +10320,8 @@
         </p:nvSpPr>
         <p:spPr>
           <a:xfrm>
-            <a:off x="6267602" y="3034846"/>
-            <a:ext cx="5472562" cy="599322"/>
+            <a:off x="6267602" y="3202686"/>
+            <a:ext cx="5472562" cy="589788"/>
           </a:xfrm>
           <a:prstGeom prst="chevron">
             <a:avLst/>
@@ -10367,7 +10370,7 @@
                 <a:ea typeface="Play"/>
                 <a:cs typeface="Play"/>
               </a:rPr>
-              <a:t>План колоды</a:t>
+              <a:t>Сформировать план колоды</a:t>
             </a:r>
           </a:p>
         </p:txBody>
@@ -10380,8 +10383,8 @@
         </p:nvSpPr>
         <p:spPr>
           <a:xfrm>
-            <a:off x="6267602" y="3731733"/>
-            <a:ext cx="5472562" cy="599322"/>
+            <a:off x="6267602" y="3888486"/>
+            <a:ext cx="5472562" cy="589788"/>
           </a:xfrm>
           <a:prstGeom prst="chevron">
             <a:avLst/>
@@ -10430,7 +10433,7 @@
                 <a:ea typeface="Play"/>
                 <a:cs typeface="Play"/>
               </a:rPr>
-              <a:t>Вёрстка</a:t>
+              <a:t>Автоматически вёрстать</a:t>
             </a:r>
           </a:p>
         </p:txBody>
@@ -10443,8 +10446,8 @@
         </p:nvSpPr>
         <p:spPr>
           <a:xfrm>
-            <a:off x="6267602" y="4428620"/>
-            <a:ext cx="5472562" cy="599322"/>
+            <a:off x="6267602" y="4574286"/>
+            <a:ext cx="5472562" cy="589788"/>
           </a:xfrm>
           <a:prstGeom prst="chevron">
             <a:avLst/>
@@ -10493,7 +10496,7 @@
                 <a:ea typeface="Play"/>
                 <a:cs typeface="Play"/>
               </a:rPr>
-              <a:t>Аудит</a:t>
+              <a:t>Провести аудит качества</a:t>
             </a:r>
           </a:p>
         </p:txBody>
@@ -10506,8 +10509,8 @@
         </p:nvSpPr>
         <p:spPr>
           <a:xfrm>
-            <a:off x="6267602" y="5125507"/>
-            <a:ext cx="5472562" cy="599322"/>
+            <a:off x="6267602" y="5260086"/>
+            <a:ext cx="5472562" cy="589788"/>
           </a:xfrm>
           <a:prstGeom prst="chevron">
             <a:avLst/>
@@ -10556,7 +10559,7 @@
                 <a:ea typeface="Play"/>
                 <a:cs typeface="Play"/>
               </a:rPr>
-              <a:t>Экспорт</a:t>
+              <a:t>Экспортировать pptx/pdf/html</a:t>
             </a:r>
           </a:p>
         </p:txBody>
@@ -10652,7 +10655,7 @@
         <p:spPr>
           <a:xfrm>
             <a:off x="300817" y="297715"/>
-            <a:ext cx="11566347" cy="5758505"/>
+            <a:ext cx="11566347" cy="5727164"/>
           </a:xfrm>
           <a:prstGeom prst="roundRect">
             <a:avLst/>
@@ -10733,7 +10736,7 @@
                 <a:ea typeface="Play"/>
                 <a:cs typeface="Play"/>
               </a:rPr>
-              <a:t>Результаты пилота: время</a:t>
+              <a:t>Ожидаемый эффект</a:t>
             </a:r>
           </a:p>
         </p:txBody>
@@ -10746,8 +10749,8 @@
         </p:nvSpPr>
         <p:spPr>
           <a:xfrm>
-            <a:off x="427817" y="1837052"/>
-            <a:ext cx="5473293" cy="4092168"/>
+            <a:off x="427817" y="1783080"/>
+            <a:ext cx="5473293" cy="4114800"/>
           </a:xfrm>
           <a:prstGeom prst="rect">
             <a:avLst/>
@@ -10782,7 +10785,7 @@
                 <a:ea typeface="Play"/>
                 <a:cs typeface="Play"/>
               </a:rPr>
-              <a:t>• 68 презентаций собраны за 6 недель</a:t>
+              <a:t>• Время сборки колоды сократилось с 186 до 4 минут</a:t>
             </a:r>
           </a:p>
           <a:p>
@@ -10808,7 +10811,7 @@
                 <a:ea typeface="Play"/>
                 <a:cs typeface="Play"/>
               </a:rPr>
-              <a:t>• Средняя сборка 4 минуты вместо 186</a:t>
+              <a:t>• Первый готовый вариант появился за 1 день вместо 6</a:t>
             </a:r>
           </a:p>
           <a:p>
@@ -10834,26 +10837,461 @@
                 <a:ea typeface="Play"/>
                 <a:cs typeface="Play"/>
               </a:rPr>
-              <a:t>• Время до первой версии сократилось с 6 дней до 1</a:t>
+              <a:t>• Нарушения стиля уменьшились до 2 из 68 колод</a:t>
+            </a:r>
+          </a:p>
+          <a:p>
+            <a:pPr algn="l">
+              <a:spcAft>
+                <a:spcPts val="300"/>
+              </a:spcAft>
+              <a:defRPr sz="1600">
+                <a:solidFill>
+                  <a:srgbClr val="FFFFFF"/>
+                </a:solidFill>
+                <a:latin typeface="Play"/>
+                <a:ea typeface="Play"/>
+                <a:cs typeface="Play"/>
+              </a:defRPr>
+            </a:pPr>
+            <a:r>
+              <a:rPr sz="1600">
+                <a:solidFill>
+                  <a:srgbClr val="FFFFFF"/>
+                </a:solidFill>
+                <a:latin typeface="Play"/>
+                <a:ea typeface="Play"/>
+                <a:cs typeface="Play"/>
+              </a:rPr>
+              <a:t>• Дизайнеры закрыли 38 запросов вместо 11 в неделю</a:t>
             </a:r>
           </a:p>
         </p:txBody>
       </p:sp>
       <p:graphicFrame>
         <p:nvGraphicFramePr>
-          <p:cNvPr id="683" name="Chart 682"/>
+          <p:cNvPr id="683" name="Table 682"/>
           <p:cNvGraphicFramePr>
             <a:graphicFrameLocks noGrp="1"/>
           </p:cNvGraphicFramePr>
           <p:nvPr/>
         </p:nvGraphicFramePr>
         <p:xfrm>
-          <a:off x="6266870" y="1837052"/>
-          <a:ext cx="5473293" cy="4092168"/>
+          <a:off x="6266870" y="1783080"/>
+          <a:ext cx="5473293" cy="4114800"/>
         </p:xfrm>
         <a:graphic>
-          <a:graphicData uri="http://schemas.openxmlformats.org/drawingml/2006/chart">
-            <c:chart xmlns:c="http://schemas.openxmlformats.org/drawingml/2006/chart" r:id="rId2"/>
+          <a:graphicData uri="http://schemas.openxmlformats.org/drawingml/2006/table">
+            <a:tbl>
+              <a:tblPr firstRow="1" bandRow="1">
+                <a:tableStyleId>{5C22544A-7EE6-4342-B048-85BDC9FD1C3A}</a:tableStyleId>
+              </a:tblPr>
+              <a:tblGrid>
+                <a:gridCol w="1824431"/>
+                <a:gridCol w="1824431"/>
+                <a:gridCol w="1824431"/>
+              </a:tblGrid>
+              <a:tr h="822960">
+                <a:tc>
+                  <a:txBody>
+                    <a:bodyPr/>
+                    <a:lstStyle/>
+                    <a:p>
+                      <a:pPr>
+                        <a:defRPr sz="1300" b="1">
+                          <a:solidFill>
+                            <a:srgbClr val="FFFFFF"/>
+                          </a:solidFill>
+                          <a:latin typeface="Play"/>
+                          <a:ea typeface="Play"/>
+                          <a:cs typeface="Play"/>
+                        </a:defRPr>
+                      </a:pPr>
+                      <a:r>
+                        <a:t>Метрика</a:t>
+                      </a:r>
+                    </a:p>
+                  </a:txBody>
+                  <a:tcPr>
+                    <a:solidFill>
+                      <a:srgbClr val="0077FF"/>
+                    </a:solidFill>
+                  </a:tcPr>
+                </a:tc>
+                <a:tc>
+                  <a:txBody>
+                    <a:bodyPr/>
+                    <a:lstStyle/>
+                    <a:p>
+                      <a:pPr>
+                        <a:defRPr sz="1300" b="1">
+                          <a:solidFill>
+                            <a:srgbClr val="FFFFFF"/>
+                          </a:solidFill>
+                          <a:latin typeface="Play"/>
+                          <a:ea typeface="Play"/>
+                          <a:cs typeface="Play"/>
+                        </a:defRPr>
+                      </a:pPr>
+                      <a:r>
+                        <a:t>До</a:t>
+                      </a:r>
+                    </a:p>
+                  </a:txBody>
+                  <a:tcPr>
+                    <a:solidFill>
+                      <a:srgbClr val="0077FF"/>
+                    </a:solidFill>
+                  </a:tcPr>
+                </a:tc>
+                <a:tc>
+                  <a:txBody>
+                    <a:bodyPr/>
+                    <a:lstStyle/>
+                    <a:p>
+                      <a:pPr>
+                        <a:defRPr sz="1300" b="1">
+                          <a:solidFill>
+                            <a:srgbClr val="FFFFFF"/>
+                          </a:solidFill>
+                          <a:latin typeface="Play"/>
+                          <a:ea typeface="Play"/>
+                          <a:cs typeface="Play"/>
+                        </a:defRPr>
+                      </a:pPr>
+                      <a:r>
+                        <a:t>После</a:t>
+                      </a:r>
+                    </a:p>
+                  </a:txBody>
+                  <a:tcPr>
+                    <a:solidFill>
+                      <a:srgbClr val="0077FF"/>
+                    </a:solidFill>
+                  </a:tcPr>
+                </a:tc>
+              </a:tr>
+              <a:tr h="822960">
+                <a:tc>
+                  <a:txBody>
+                    <a:bodyPr/>
+                    <a:lstStyle/>
+                    <a:p>
+                      <a:pPr>
+                        <a:defRPr sz="1300" b="0">
+                          <a:solidFill>
+                            <a:srgbClr val="FFFFFF"/>
+                          </a:solidFill>
+                          <a:latin typeface="Play"/>
+                          <a:ea typeface="Play"/>
+                          <a:cs typeface="Play"/>
+                        </a:defRPr>
+                      </a:pPr>
+                      <a:r>
+                        <a:t>Время сборки</a:t>
+                      </a:r>
+                    </a:p>
+                  </a:txBody>
+                  <a:tcPr>
+                    <a:solidFill>
+                      <a:srgbClr val="111111"/>
+                    </a:solidFill>
+                  </a:tcPr>
+                </a:tc>
+                <a:tc>
+                  <a:txBody>
+                    <a:bodyPr/>
+                    <a:lstStyle/>
+                    <a:p>
+                      <a:pPr>
+                        <a:defRPr sz="1300" b="0">
+                          <a:solidFill>
+                            <a:srgbClr val="FFFFFF"/>
+                          </a:solidFill>
+                          <a:latin typeface="Play"/>
+                          <a:ea typeface="Play"/>
+                          <a:cs typeface="Play"/>
+                        </a:defRPr>
+                      </a:pPr>
+                      <a:r>
+                        <a:t>186</a:t>
+                      </a:r>
+                    </a:p>
+                  </a:txBody>
+                  <a:tcPr>
+                    <a:solidFill>
+                      <a:srgbClr val="111111"/>
+                    </a:solidFill>
+                  </a:tcPr>
+                </a:tc>
+                <a:tc>
+                  <a:txBody>
+                    <a:bodyPr/>
+                    <a:lstStyle/>
+                    <a:p>
+                      <a:pPr>
+                        <a:defRPr sz="1300" b="0">
+                          <a:solidFill>
+                            <a:srgbClr val="FFFFFF"/>
+                          </a:solidFill>
+                          <a:latin typeface="Play"/>
+                          <a:ea typeface="Play"/>
+                          <a:cs typeface="Play"/>
+                        </a:defRPr>
+                      </a:pPr>
+                      <a:r>
+                        <a:t>4</a:t>
+                      </a:r>
+                    </a:p>
+                  </a:txBody>
+                  <a:tcPr>
+                    <a:solidFill>
+                      <a:srgbClr val="111111"/>
+                    </a:solidFill>
+                  </a:tcPr>
+                </a:tc>
+              </a:tr>
+              <a:tr h="822960">
+                <a:tc>
+                  <a:txBody>
+                    <a:bodyPr/>
+                    <a:lstStyle/>
+                    <a:p>
+                      <a:pPr>
+                        <a:defRPr sz="1300" b="0">
+                          <a:solidFill>
+                            <a:srgbClr val="FFFFFF"/>
+                          </a:solidFill>
+                          <a:latin typeface="Play"/>
+                          <a:ea typeface="Play"/>
+                          <a:cs typeface="Play"/>
+                        </a:defRPr>
+                      </a:pPr>
+                      <a:r>
+                        <a:t>Первый вариант</a:t>
+                      </a:r>
+                    </a:p>
+                  </a:txBody>
+                  <a:tcPr>
+                    <a:solidFill>
+                      <a:srgbClr val="111111"/>
+                    </a:solidFill>
+                  </a:tcPr>
+                </a:tc>
+                <a:tc>
+                  <a:txBody>
+                    <a:bodyPr/>
+                    <a:lstStyle/>
+                    <a:p>
+                      <a:pPr>
+                        <a:defRPr sz="1300" b="0">
+                          <a:solidFill>
+                            <a:srgbClr val="FFFFFF"/>
+                          </a:solidFill>
+                          <a:latin typeface="Play"/>
+                          <a:ea typeface="Play"/>
+                          <a:cs typeface="Play"/>
+                        </a:defRPr>
+                      </a:pPr>
+                      <a:r>
+                        <a:t>6</a:t>
+                      </a:r>
+                    </a:p>
+                  </a:txBody>
+                  <a:tcPr>
+                    <a:solidFill>
+                      <a:srgbClr val="111111"/>
+                    </a:solidFill>
+                  </a:tcPr>
+                </a:tc>
+                <a:tc>
+                  <a:txBody>
+                    <a:bodyPr/>
+                    <a:lstStyle/>
+                    <a:p>
+                      <a:pPr>
+                        <a:defRPr sz="1300" b="0">
+                          <a:solidFill>
+                            <a:srgbClr val="FFFFFF"/>
+                          </a:solidFill>
+                          <a:latin typeface="Play"/>
+                          <a:ea typeface="Play"/>
+                          <a:cs typeface="Play"/>
+                        </a:defRPr>
+                      </a:pPr>
+                      <a:r>
+                        <a:t>1</a:t>
+                      </a:r>
+                    </a:p>
+                  </a:txBody>
+                  <a:tcPr>
+                    <a:solidFill>
+                      <a:srgbClr val="111111"/>
+                    </a:solidFill>
+                  </a:tcPr>
+                </a:tc>
+              </a:tr>
+              <a:tr h="822960">
+                <a:tc>
+                  <a:txBody>
+                    <a:bodyPr/>
+                    <a:lstStyle/>
+                    <a:p>
+                      <a:pPr>
+                        <a:defRPr sz="1300" b="0">
+                          <a:solidFill>
+                            <a:srgbClr val="FFFFFF"/>
+                          </a:solidFill>
+                          <a:latin typeface="Play"/>
+                          <a:ea typeface="Play"/>
+                          <a:cs typeface="Play"/>
+                        </a:defRPr>
+                      </a:pPr>
+                      <a:r>
+                        <a:t>Нарушения стиля</a:t>
+                      </a:r>
+                    </a:p>
+                  </a:txBody>
+                  <a:tcPr>
+                    <a:solidFill>
+                      <a:srgbClr val="111111"/>
+                    </a:solidFill>
+                  </a:tcPr>
+                </a:tc>
+                <a:tc>
+                  <a:txBody>
+                    <a:bodyPr/>
+                    <a:lstStyle/>
+                    <a:p>
+                      <a:pPr>
+                        <a:defRPr sz="1300" b="0">
+                          <a:solidFill>
+                            <a:srgbClr val="FFFFFF"/>
+                          </a:solidFill>
+                          <a:latin typeface="Play"/>
+                          <a:ea typeface="Play"/>
+                          <a:cs typeface="Play"/>
+                        </a:defRPr>
+                      </a:pPr>
+                      <a:r>
+                        <a:t>19/42</a:t>
+                      </a:r>
+                    </a:p>
+                  </a:txBody>
+                  <a:tcPr>
+                    <a:solidFill>
+                      <a:srgbClr val="111111"/>
+                    </a:solidFill>
+                  </a:tcPr>
+                </a:tc>
+                <a:tc>
+                  <a:txBody>
+                    <a:bodyPr/>
+                    <a:lstStyle/>
+                    <a:p>
+                      <a:pPr>
+                        <a:defRPr sz="1300" b="0">
+                          <a:solidFill>
+                            <a:srgbClr val="FFFFFF"/>
+                          </a:solidFill>
+                          <a:latin typeface="Play"/>
+                          <a:ea typeface="Play"/>
+                          <a:cs typeface="Play"/>
+                        </a:defRPr>
+                      </a:pPr>
+                      <a:r>
+                        <a:t>2/68</a:t>
+                      </a:r>
+                    </a:p>
+                  </a:txBody>
+                  <a:tcPr>
+                    <a:solidFill>
+                      <a:srgbClr val="111111"/>
+                    </a:solidFill>
+                  </a:tcPr>
+                </a:tc>
+              </a:tr>
+              <a:tr h="822960">
+                <a:tc>
+                  <a:txBody>
+                    <a:bodyPr/>
+                    <a:lstStyle/>
+                    <a:p>
+                      <a:pPr>
+                        <a:defRPr sz="1300" b="0">
+                          <a:solidFill>
+                            <a:srgbClr val="FFFFFF"/>
+                          </a:solidFill>
+                          <a:latin typeface="Play"/>
+                          <a:ea typeface="Play"/>
+                          <a:cs typeface="Play"/>
+                        </a:defRPr>
+                      </a:pPr>
+                      <a:r>
+                        <a:t>Загрузка дизайнеров</a:t>
+                      </a:r>
+                    </a:p>
+                  </a:txBody>
+                  <a:tcPr>
+                    <a:solidFill>
+                      <a:srgbClr val="111111"/>
+                    </a:solidFill>
+                  </a:tcPr>
+                </a:tc>
+                <a:tc>
+                  <a:txBody>
+                    <a:bodyPr/>
+                    <a:lstStyle/>
+                    <a:p>
+                      <a:pPr>
+                        <a:defRPr sz="1300" b="0">
+                          <a:solidFill>
+                            <a:srgbClr val="FFFFFF"/>
+                          </a:solidFill>
+                          <a:latin typeface="Play"/>
+                          <a:ea typeface="Play"/>
+                          <a:cs typeface="Play"/>
+                        </a:defRPr>
+                      </a:pPr>
+                      <a:r>
+                        <a:t>11/нед</a:t>
+                      </a:r>
+                    </a:p>
+                  </a:txBody>
+                  <a:tcPr>
+                    <a:solidFill>
+                      <a:srgbClr val="111111"/>
+                    </a:solidFill>
+                  </a:tcPr>
+                </a:tc>
+                <a:tc>
+                  <a:txBody>
+                    <a:bodyPr/>
+                    <a:lstStyle/>
+                    <a:p>
+                      <a:pPr>
+                        <a:defRPr sz="1300" b="0">
+                          <a:solidFill>
+                            <a:srgbClr val="FFFFFF"/>
+                          </a:solidFill>
+                          <a:latin typeface="Play"/>
+                          <a:ea typeface="Play"/>
+                          <a:cs typeface="Play"/>
+                        </a:defRPr>
+                      </a:pPr>
+                      <a:r>
+                        <a:t>38/нед</a:t>
+                      </a:r>
+                    </a:p>
+                  </a:txBody>
+                  <a:tcPr>
+                    <a:solidFill>
+                      <a:srgbClr val="111111"/>
+                    </a:solidFill>
+                  </a:tcPr>
+                </a:tc>
+              </a:tr>
+            </a:tbl>
           </a:graphicData>
         </a:graphic>
       </p:graphicFrame>
@@ -10938,7 +11376,7 @@
         <p:spPr>
           <a:xfrm>
             <a:off x="429280" y="424715"/>
-            <a:ext cx="7827264" cy="1183640"/>
+            <a:ext cx="7827264" cy="822960"/>
           </a:xfrm>
           <a:prstGeom prst="rect">
             <a:avLst/>
@@ -10973,7 +11411,7 @@
                 <a:ea typeface="Play"/>
                 <a:cs typeface="Play"/>
               </a:rPr>
-              <a:t>Результаты пилота: качество и нагрузка</a:t>
+              <a:t>Ресурсы и сроки</a:t>
             </a:r>
           </a:p>
         </p:txBody>
@@ -10986,8 +11424,8 @@
         </p:nvSpPr>
         <p:spPr>
           <a:xfrm>
-            <a:off x="429280" y="1745515"/>
-            <a:ext cx="5472562" cy="3665377"/>
+            <a:off x="429280" y="1783080"/>
+            <a:ext cx="5472562" cy="4114800"/>
           </a:xfrm>
           <a:prstGeom prst="rect">
             <a:avLst/>
@@ -11022,7 +11460,7 @@
                 <a:ea typeface="Play"/>
                 <a:cs typeface="Play"/>
               </a:rPr>
-              <a:t>• Нарушений фирменного стиля 2 из 68 колод</a:t>
+              <a:t>• Сервис работает на 2 vCPU / 2 ГБ RAM</a:t>
             </a:r>
           </a:p>
           <a:p>
@@ -11048,29 +11486,347 @@
                 <a:ea typeface="Play"/>
                 <a:cs typeface="Play"/>
               </a:rPr>
-              <a:t>• Дизайнеры закрыли 38 запросов вместо 11 в неделю</a:t>
+              <a:t>• Инференс gpt-oss-20b стоит 1 400 рублей за 6 недель</a:t>
+            </a:r>
+          </a:p>
+          <a:p>
+            <a:pPr algn="l">
+              <a:spcAft>
+                <a:spcPts val="300"/>
+              </a:spcAft>
+              <a:defRPr sz="2000">
+                <a:solidFill>
+                  <a:srgbClr val="FFFFFF"/>
+                </a:solidFill>
+                <a:latin typeface="Play"/>
+                <a:ea typeface="Play"/>
+                <a:cs typeface="Play"/>
+              </a:defRPr>
+            </a:pPr>
+            <a:r>
+              <a:rPr sz="2000">
+                <a:solidFill>
+                  <a:srgbClr val="FFFFFF"/>
+                </a:solidFill>
+                <a:latin typeface="Play"/>
+                <a:ea typeface="Play"/>
+                <a:cs typeface="Play"/>
+              </a:rPr>
+              <a:t>• План запуска: Q3 2026 подключение 4 команд, Q4 2026 доступ компании, Q1 2027 генерация иллюстраций</a:t>
             </a:r>
           </a:p>
         </p:txBody>
       </p:sp>
-      <p:graphicFrame>
-        <p:nvGraphicFramePr>
-          <p:cNvPr id="624" name="Chart 623"/>
-          <p:cNvGraphicFramePr>
-            <a:graphicFrameLocks noGrp="1"/>
-          </p:cNvGraphicFramePr>
+      <p:sp>
+        <p:nvSpPr>
+          <p:cNvPr id="624" name="Rectangle 623"/>
+          <p:cNvSpPr/>
           <p:nvPr/>
-        </p:nvGraphicFramePr>
-        <p:xfrm>
-          <a:off x="6267602" y="1745515"/>
-          <a:ext cx="5472562" cy="3665377"/>
-        </p:xfrm>
-        <a:graphic>
-          <a:graphicData uri="http://schemas.openxmlformats.org/drawingml/2006/chart">
-            <c:chart xmlns:c="http://schemas.openxmlformats.org/drawingml/2006/chart" r:id="rId5"/>
-          </a:graphicData>
-        </a:graphic>
-      </p:graphicFrame>
+        </p:nvSpPr>
+        <p:spPr>
+          <a:xfrm>
+            <a:off x="6267602" y="3675888"/>
+            <a:ext cx="5472562" cy="123444"/>
+          </a:xfrm>
+          <a:prstGeom prst="rect">
+            <a:avLst/>
+          </a:prstGeom>
+          <a:solidFill>
+            <a:srgbClr val="0077FF"/>
+          </a:solidFill>
+          <a:ln>
+            <a:noFill/>
+          </a:ln>
+        </p:spPr>
+        <p:style>
+          <a:lnRef idx="1">
+            <a:schemeClr val="accent1"/>
+          </a:lnRef>
+          <a:fillRef idx="3">
+            <a:schemeClr val="accent1"/>
+          </a:fillRef>
+          <a:effectRef idx="2">
+            <a:schemeClr val="accent1"/>
+          </a:effectRef>
+          <a:fontRef idx="minor">
+            <a:schemeClr val="lt1"/>
+          </a:fontRef>
+        </p:style>
+        <p:txBody>
+          <a:bodyPr rtlCol="0" anchor="ctr"/>
+          <a:lstStyle/>
+          <a:p>
+            <a:pPr algn="ctr"/>
+          </a:p>
+        </p:txBody>
+      </p:sp>
+      <p:sp>
+        <p:nvSpPr>
+          <p:cNvPr id="625" name="Oval 624"/>
+          <p:cNvSpPr/>
+          <p:nvPr/>
+        </p:nvSpPr>
+        <p:spPr>
+          <a:xfrm>
+            <a:off x="6906067" y="3463981"/>
+            <a:ext cx="547256" cy="547256"/>
+          </a:xfrm>
+          <a:prstGeom prst="ellipse">
+            <a:avLst/>
+          </a:prstGeom>
+          <a:solidFill>
+            <a:srgbClr val="0077FF"/>
+          </a:solidFill>
+          <a:ln>
+            <a:noFill/>
+          </a:ln>
+        </p:spPr>
+        <p:style>
+          <a:lnRef idx="1">
+            <a:schemeClr val="accent1"/>
+          </a:lnRef>
+          <a:fillRef idx="3">
+            <a:schemeClr val="accent1"/>
+          </a:fillRef>
+          <a:effectRef idx="2">
+            <a:schemeClr val="accent1"/>
+          </a:effectRef>
+          <a:fontRef idx="minor">
+            <a:schemeClr val="lt1"/>
+          </a:fontRef>
+        </p:style>
+        <p:txBody>
+          <a:bodyPr rtlCol="0" anchor="ctr"/>
+          <a:lstStyle/>
+          <a:p>
+            <a:pPr algn="ctr"/>
+          </a:p>
+        </p:txBody>
+      </p:sp>
+      <p:sp>
+        <p:nvSpPr>
+          <p:cNvPr id="626" name="TextBox 625"/>
+          <p:cNvSpPr txBox="1"/>
+          <p:nvPr/>
+        </p:nvSpPr>
+        <p:spPr>
+          <a:xfrm>
+            <a:off x="6267602" y="1783080"/>
+            <a:ext cx="2736281" cy="1563624"/>
+          </a:xfrm>
+          <a:prstGeom prst="rect">
+            <a:avLst/>
+          </a:prstGeom>
+          <a:noFill/>
+        </p:spPr>
+        <p:txBody>
+          <a:bodyPr wrap="square" lIns="12700" rIns="12700" tIns="12700" bIns="12700">
+            <a:spAutoFit/>
+          </a:bodyPr>
+          <a:lstStyle/>
+          <a:p>
+            <a:pPr algn="ctr">
+              <a:defRPr sz="1400" b="0">
+                <a:solidFill>
+                  <a:srgbClr val="FFFFFF"/>
+                </a:solidFill>
+                <a:latin typeface="Play"/>
+                <a:ea typeface="Play"/>
+                <a:cs typeface="Play"/>
+              </a:defRPr>
+            </a:pPr>
+            <a:r>
+              <a:rPr sz="1400" b="0">
+                <a:solidFill>
+                  <a:srgbClr val="FFFFFF"/>
+                </a:solidFill>
+                <a:latin typeface="Play"/>
+                <a:ea typeface="Play"/>
+                <a:cs typeface="Play"/>
+              </a:rPr>
+              <a:t>Q3 2026: подключение 4 команд</a:t>
+            </a:r>
+          </a:p>
+        </p:txBody>
+      </p:sp>
+      <p:sp>
+        <p:nvSpPr>
+          <p:cNvPr id="627" name="Oval 626"/>
+          <p:cNvSpPr/>
+          <p:nvPr/>
+        </p:nvSpPr>
+        <p:spPr>
+          <a:xfrm>
+            <a:off x="8730254" y="3463981"/>
+            <a:ext cx="547256" cy="547256"/>
+          </a:xfrm>
+          <a:prstGeom prst="ellipse">
+            <a:avLst/>
+          </a:prstGeom>
+          <a:solidFill>
+            <a:srgbClr val="0077FF"/>
+          </a:solidFill>
+          <a:ln>
+            <a:noFill/>
+          </a:ln>
+        </p:spPr>
+        <p:style>
+          <a:lnRef idx="1">
+            <a:schemeClr val="accent1"/>
+          </a:lnRef>
+          <a:fillRef idx="3">
+            <a:schemeClr val="accent1"/>
+          </a:fillRef>
+          <a:effectRef idx="2">
+            <a:schemeClr val="accent1"/>
+          </a:effectRef>
+          <a:fontRef idx="minor">
+            <a:schemeClr val="lt1"/>
+          </a:fontRef>
+        </p:style>
+        <p:txBody>
+          <a:bodyPr rtlCol="0" anchor="ctr"/>
+          <a:lstStyle/>
+          <a:p>
+            <a:pPr algn="ctr"/>
+          </a:p>
+        </p:txBody>
+      </p:sp>
+      <p:sp>
+        <p:nvSpPr>
+          <p:cNvPr id="628" name="TextBox 627"/>
+          <p:cNvSpPr txBox="1"/>
+          <p:nvPr/>
+        </p:nvSpPr>
+        <p:spPr>
+          <a:xfrm>
+            <a:off x="7635742" y="4223144"/>
+            <a:ext cx="2736281" cy="1563624"/>
+          </a:xfrm>
+          <a:prstGeom prst="rect">
+            <a:avLst/>
+          </a:prstGeom>
+          <a:noFill/>
+        </p:spPr>
+        <p:txBody>
+          <a:bodyPr wrap="square" lIns="12700" rIns="12700" tIns="12700" bIns="12700">
+            <a:spAutoFit/>
+          </a:bodyPr>
+          <a:lstStyle/>
+          <a:p>
+            <a:pPr algn="ctr">
+              <a:defRPr sz="1400" b="0">
+                <a:solidFill>
+                  <a:srgbClr val="FFFFFF"/>
+                </a:solidFill>
+                <a:latin typeface="Play"/>
+                <a:ea typeface="Play"/>
+                <a:cs typeface="Play"/>
+              </a:defRPr>
+            </a:pPr>
+            <a:r>
+              <a:rPr sz="1400" b="0">
+                <a:solidFill>
+                  <a:srgbClr val="FFFFFF"/>
+                </a:solidFill>
+                <a:latin typeface="Play"/>
+                <a:ea typeface="Play"/>
+                <a:cs typeface="Play"/>
+              </a:rPr>
+              <a:t>Q4 2026: доступ для всей компании</a:t>
+            </a:r>
+          </a:p>
+        </p:txBody>
+      </p:sp>
+      <p:sp>
+        <p:nvSpPr>
+          <p:cNvPr id="629" name="Oval 628"/>
+          <p:cNvSpPr/>
+          <p:nvPr/>
+        </p:nvSpPr>
+        <p:spPr>
+          <a:xfrm>
+            <a:off x="10554442" y="3463981"/>
+            <a:ext cx="547256" cy="547256"/>
+          </a:xfrm>
+          <a:prstGeom prst="ellipse">
+            <a:avLst/>
+          </a:prstGeom>
+          <a:solidFill>
+            <a:srgbClr val="0077FF"/>
+          </a:solidFill>
+          <a:ln>
+            <a:noFill/>
+          </a:ln>
+        </p:spPr>
+        <p:style>
+          <a:lnRef idx="1">
+            <a:schemeClr val="accent1"/>
+          </a:lnRef>
+          <a:fillRef idx="3">
+            <a:schemeClr val="accent1"/>
+          </a:fillRef>
+          <a:effectRef idx="2">
+            <a:schemeClr val="accent1"/>
+          </a:effectRef>
+          <a:fontRef idx="minor">
+            <a:schemeClr val="lt1"/>
+          </a:fontRef>
+        </p:style>
+        <p:txBody>
+          <a:bodyPr rtlCol="0" anchor="ctr"/>
+          <a:lstStyle/>
+          <a:p>
+            <a:pPr algn="ctr"/>
+          </a:p>
+        </p:txBody>
+      </p:sp>
+      <p:sp>
+        <p:nvSpPr>
+          <p:cNvPr id="630" name="TextBox 629"/>
+          <p:cNvSpPr txBox="1"/>
+          <p:nvPr/>
+        </p:nvSpPr>
+        <p:spPr>
+          <a:xfrm>
+            <a:off x="9003883" y="1783080"/>
+            <a:ext cx="2736281" cy="1563624"/>
+          </a:xfrm>
+          <a:prstGeom prst="rect">
+            <a:avLst/>
+          </a:prstGeom>
+          <a:noFill/>
+        </p:spPr>
+        <p:txBody>
+          <a:bodyPr wrap="square" lIns="12700" rIns="12700" tIns="12700" bIns="12700">
+            <a:spAutoFit/>
+          </a:bodyPr>
+          <a:lstStyle/>
+          <a:p>
+            <a:pPr algn="ctr">
+              <a:defRPr sz="1400" b="0">
+                <a:solidFill>
+                  <a:srgbClr val="FFFFFF"/>
+                </a:solidFill>
+                <a:latin typeface="Play"/>
+                <a:ea typeface="Play"/>
+                <a:cs typeface="Play"/>
+              </a:defRPr>
+            </a:pPr>
+            <a:r>
+              <a:rPr sz="1400" b="0">
+                <a:solidFill>
+                  <a:srgbClr val="FFFFFF"/>
+                </a:solidFill>
+                <a:latin typeface="Play"/>
+                <a:ea typeface="Play"/>
+                <a:cs typeface="Play"/>
+              </a:rPr>
+              <a:t>Q1 2027: генерация иллюстраций</a:t>
+            </a:r>
+          </a:p>
+        </p:txBody>
+      </p:sp>
     </p:spTree>
   </p:cSld>
   <p:clrMapOvr>
@@ -11133,21 +11889,21 @@
                 <a:ea typeface="Play"/>
                 <a:cs typeface="Play"/>
               </a:rPr>
-              <a:t>Стоимость и ресурсы</a:t>
+              <a:t>План пилота</a:t>
             </a:r>
           </a:p>
         </p:txBody>
       </p:sp>
       <p:sp>
         <p:nvSpPr>
-          <p:cNvPr id="3" name="body"/>
+          <p:cNvPr id="3" name="body_left"/>
           <p:cNvSpPr txBox="1"/>
           <p:nvPr/>
         </p:nvSpPr>
         <p:spPr>
           <a:xfrm>
-            <a:off x="429280" y="1666494"/>
-            <a:ext cx="11310884" cy="3525012"/>
+            <a:off x="429280" y="1592290"/>
+            <a:ext cx="5472562" cy="4181322"/>
           </a:xfrm>
           <a:prstGeom prst="rect">
             <a:avLst/>
@@ -11182,7 +11938,7 @@
                 <a:ea typeface="Play"/>
                 <a:cs typeface="Play"/>
               </a:rPr>
-              <a:t>• Сервис работает на 2 vCPU / 2 ГБ RAM</a:t>
+              <a:t>• Пилот длился 6 недель на двух командах</a:t>
             </a:r>
           </a:p>
           <a:p>
@@ -11208,7 +11964,7 @@
                 <a:ea typeface="Play"/>
                 <a:cs typeface="Play"/>
               </a:rPr>
-              <a:t>• Модель gpt-oss-20b подключается по OpenAI-совместимому протоколу</a:t>
+              <a:t>• Собрано 68 презентаций</a:t>
             </a:r>
           </a:p>
           <a:p>
@@ -11234,7 +11990,82 @@
                 <a:ea typeface="Play"/>
                 <a:cs typeface="Play"/>
               </a:rPr>
-              <a:t>• Стоимость инференса за 6 недель 1 400 рублей</a:t>
+              <a:t>• Среднее время сборки 4 минуты</a:t>
+            </a:r>
+          </a:p>
+        </p:txBody>
+      </p:sp>
+      <p:sp>
+        <p:nvSpPr>
+          <p:cNvPr id="4" name="body_right"/>
+          <p:cNvSpPr txBox="1"/>
+          <p:nvPr/>
+        </p:nvSpPr>
+        <p:spPr>
+          <a:xfrm>
+            <a:off x="6267602" y="1592290"/>
+            <a:ext cx="5472562" cy="4181322"/>
+          </a:xfrm>
+          <a:prstGeom prst="rect">
+            <a:avLst/>
+          </a:prstGeom>
+          <a:noFill/>
+        </p:spPr>
+        <p:txBody>
+          <a:bodyPr wrap="square" lIns="76200" rIns="76200" tIns="50800" bIns="50800">
+            <a:spAutoFit/>
+          </a:bodyPr>
+          <a:lstStyle/>
+          <a:p>
+            <a:pPr algn="l">
+              <a:spcAft>
+                <a:spcPts val="300"/>
+              </a:spcAft>
+              <a:defRPr sz="2800">
+                <a:solidFill>
+                  <a:srgbClr val="FFFFFF"/>
+                </a:solidFill>
+                <a:latin typeface="Play"/>
+                <a:ea typeface="Play"/>
+                <a:cs typeface="Play"/>
+              </a:defRPr>
+            </a:pPr>
+            <a:r>
+              <a:rPr sz="2800">
+                <a:solidFill>
+                  <a:srgbClr val="FFFFFF"/>
+                </a:solidFill>
+                <a:latin typeface="Play"/>
+                <a:ea typeface="Play"/>
+                <a:cs typeface="Play"/>
+              </a:rPr>
+              <a:t>• Первый вариант готов за 1 день</a:t>
+            </a:r>
+          </a:p>
+          <a:p>
+            <a:pPr algn="l">
+              <a:spcAft>
+                <a:spcPts val="300"/>
+              </a:spcAft>
+              <a:defRPr sz="2800">
+                <a:solidFill>
+                  <a:srgbClr val="FFFFFF"/>
+                </a:solidFill>
+                <a:latin typeface="Play"/>
+                <a:ea typeface="Play"/>
+                <a:cs typeface="Play"/>
+              </a:defRPr>
+            </a:pPr>
+            <a:r>
+              <a:rPr sz="2800">
+                <a:solidFill>
+                  <a:srgbClr val="FFFFFF"/>
+                </a:solidFill>
+                <a:latin typeface="Play"/>
+                <a:ea typeface="Play"/>
+                <a:cs typeface="Play"/>
+              </a:rPr>
+              <a:t>• Нарушения стиля 2 из 68, исправлены автоматически</a:t>
             </a:r>
           </a:p>
         </p:txBody>
@@ -11301,7 +12132,7 @@
                 <a:ea typeface="Play"/>
                 <a:cs typeface="Play"/>
               </a:rPr>
-              <a:t>Риски</a:t>
+              <a:t>Что мы просим решить</a:t>
             </a:r>
           </a:p>
         </p:txBody>
@@ -11314,8 +12145,8 @@
         </p:nvSpPr>
         <p:spPr>
           <a:xfrm>
-            <a:off x="429280" y="1492575"/>
-            <a:ext cx="5472562" cy="4014604"/>
+            <a:off x="429280" y="2600960"/>
+            <a:ext cx="6129269" cy="2479040"/>
           </a:xfrm>
           <a:prstGeom prst="rect">
             <a:avLst/>
@@ -11332,7 +12163,7 @@
               <a:spcAft>
                 <a:spcPts val="300"/>
               </a:spcAft>
-              <a:defRPr sz="1600">
+              <a:defRPr sz="2400">
                 <a:solidFill>
                   <a:srgbClr val="FFFFFF"/>
                 </a:solidFill>
@@ -11342,7 +12173,7 @@
               </a:defRPr>
             </a:pPr>
             <a:r>
-              <a:rPr sz="1600">
+              <a:rPr sz="2400">
                 <a:solidFill>
                   <a:srgbClr val="FFFFFF"/>
                 </a:solidFill>
@@ -11350,7 +12181,7 @@
                 <a:ea typeface="Play"/>
                 <a:cs typeface="Play"/>
               </a:rPr>
-              <a:t>• Модель может выдумать цифры, аудит проверяет каждое число</a:t>
+              <a:t>• Одобрить запуск сервиса на всю компанию</a:t>
             </a:r>
           </a:p>
           <a:p>
@@ -11358,7 +12189,7 @@
               <a:spcAft>
                 <a:spcPts val="300"/>
               </a:spcAft>
-              <a:defRPr sz="1600">
+              <a:defRPr sz="2400">
                 <a:solidFill>
                   <a:srgbClr val="FFFFFF"/>
                 </a:solidFill>
@@ -11368,7 +12199,7 @@
               </a:defRPr>
             </a:pPr>
             <a:r>
-              <a:rPr sz="1600">
+              <a:rPr sz="2400">
                 <a:solidFill>
                   <a:srgbClr val="FFFFFF"/>
                 </a:solidFill>
@@ -11376,7 +12207,7 @@
                 <a:ea typeface="Play"/>
                 <a:cs typeface="Play"/>
               </a:rPr>
-              <a:t>• Плохой шаблон приводит к использованию рабочей области</a:t>
+              <a:t>• Выделить бюджет на интеграцию и поддержку</a:t>
             </a:r>
           </a:p>
           <a:p>
@@ -11384,7 +12215,7 @@
               <a:spcAft>
                 <a:spcPts val="300"/>
               </a:spcAft>
-              <a:defRPr sz="1600">
+              <a:defRPr sz="2400">
                 <a:solidFill>
                   <a:srgbClr val="FFFFFF"/>
                 </a:solidFill>
@@ -11394,7 +12225,7 @@
               </a:defRPr>
             </a:pPr>
             <a:r>
-              <a:rPr sz="1600">
+              <a:rPr sz="2400">
                 <a:solidFill>
                   <a:srgbClr val="FFFFFF"/>
                 </a:solidFill>
@@ -11402,450 +12233,640 @@
                 <a:ea typeface="Play"/>
                 <a:cs typeface="Play"/>
               </a:rPr>
-              <a:t>• Нагрузка выше 20 задач требует внешней очереди</a:t>
+              <a:t>• Согласовать сроки и ответственных за расширение</a:t>
             </a:r>
           </a:p>
         </p:txBody>
       </p:sp>
-      <p:sp>
-        <p:nvSpPr>
-          <p:cNvPr id="4" name="Oval 3"/>
-          <p:cNvSpPr/>
+      <p:grpSp>
+        <p:nvGrpSpPr>
+          <p:cNvPr id="4" name="illustration:builtin-discussion"/>
+          <p:cNvGrpSpPr/>
           <p:nvPr/>
-        </p:nvSpPr>
-        <p:spPr>
+        </p:nvGrpSpPr>
+        <p:grpSpPr>
           <a:xfrm>
-            <a:off x="6671005" y="1558625"/>
-            <a:ext cx="968735" cy="968735"/>
+            <a:off x="7718924" y="2323485"/>
+            <a:ext cx="3226623" cy="3033988"/>
+            <a:chOff x="7718924" y="2323485"/>
+            <a:chExt cx="3226623" cy="3033988"/>
           </a:xfrm>
-          <a:prstGeom prst="ellipse">
-            <a:avLst/>
-          </a:prstGeom>
-          <a:solidFill>
-            <a:srgbClr val="0077FF"/>
-          </a:solidFill>
-          <a:ln>
-            <a:noFill/>
-          </a:ln>
-        </p:spPr>
-        <p:style>
-          <a:lnRef idx="1">
-            <a:schemeClr val="accent1"/>
-          </a:lnRef>
-          <a:fillRef idx="3">
-            <a:schemeClr val="accent1"/>
-          </a:fillRef>
-          <a:effectRef idx="2">
-            <a:schemeClr val="accent1"/>
-          </a:effectRef>
-          <a:fontRef idx="minor">
-            <a:schemeClr val="lt1"/>
-          </a:fontRef>
-        </p:style>
-        <p:txBody>
-          <a:bodyPr rtlCol="0" anchor="ctr"/>
-          <a:lstStyle/>
-          <a:p>
-            <a:pPr algn="ctr"/>
-          </a:p>
-        </p:txBody>
-      </p:sp>
-      <p:sp>
-        <p:nvSpPr>
-          <p:cNvPr id="5" name="Oval 4"/>
-          <p:cNvSpPr/>
-          <p:nvPr/>
-        </p:nvSpPr>
-        <p:spPr>
-          <a:xfrm>
-            <a:off x="6825122" y="1712742"/>
-            <a:ext cx="660501" cy="660501"/>
-          </a:xfrm>
-          <a:prstGeom prst="ellipse">
-            <a:avLst/>
-          </a:prstGeom>
-          <a:solidFill>
-            <a:srgbClr val="111111"/>
-          </a:solidFill>
-          <a:ln>
-            <a:noFill/>
-          </a:ln>
-        </p:spPr>
-        <p:style>
-          <a:lnRef idx="1">
-            <a:schemeClr val="accent1"/>
-          </a:lnRef>
-          <a:fillRef idx="3">
-            <a:schemeClr val="accent1"/>
-          </a:fillRef>
-          <a:effectRef idx="2">
-            <a:schemeClr val="accent1"/>
-          </a:effectRef>
-          <a:fontRef idx="minor">
-            <a:schemeClr val="lt1"/>
-          </a:fontRef>
-        </p:style>
-        <p:txBody>
-          <a:bodyPr rtlCol="0" anchor="ctr"/>
-          <a:lstStyle/>
-          <a:p>
-            <a:pPr algn="ctr"/>
-          </a:p>
-        </p:txBody>
-      </p:sp>
-      <p:sp>
-        <p:nvSpPr>
-          <p:cNvPr id="6" name="Oval 5"/>
-          <p:cNvSpPr/>
-          <p:nvPr/>
-        </p:nvSpPr>
-        <p:spPr>
-          <a:xfrm>
-            <a:off x="7001256" y="1888876"/>
-            <a:ext cx="308234" cy="308234"/>
-          </a:xfrm>
-          <a:prstGeom prst="ellipse">
-            <a:avLst/>
-          </a:prstGeom>
-          <a:solidFill>
-            <a:srgbClr val="0077FF"/>
-          </a:solidFill>
-          <a:ln>
-            <a:noFill/>
-          </a:ln>
-        </p:spPr>
-        <p:style>
-          <a:lnRef idx="1">
-            <a:schemeClr val="accent1"/>
-          </a:lnRef>
-          <a:fillRef idx="3">
-            <a:schemeClr val="accent1"/>
-          </a:fillRef>
-          <a:effectRef idx="2">
-            <a:schemeClr val="accent1"/>
-          </a:effectRef>
-          <a:fontRef idx="minor">
-            <a:schemeClr val="lt1"/>
-          </a:fontRef>
-        </p:style>
-        <p:txBody>
-          <a:bodyPr rtlCol="0" anchor="ctr"/>
-          <a:lstStyle/>
-          <a:p>
-            <a:pPr algn="ctr"/>
-          </a:p>
-        </p:txBody>
-      </p:sp>
-      <p:sp>
-        <p:nvSpPr>
-          <p:cNvPr id="7" name="TextBox 6"/>
-          <p:cNvSpPr txBox="1"/>
-          <p:nvPr/>
-        </p:nvSpPr>
-        <p:spPr>
-          <a:xfrm>
-            <a:off x="6267602" y="2834287"/>
-            <a:ext cx="1775542" cy="2672891"/>
-          </a:xfrm>
-          <a:prstGeom prst="rect">
-            <a:avLst/>
-          </a:prstGeom>
-          <a:noFill/>
-        </p:spPr>
-        <p:txBody>
-          <a:bodyPr wrap="square" lIns="12700" rIns="12700" tIns="12700" bIns="12700">
-            <a:spAutoFit/>
-          </a:bodyPr>
-          <a:lstStyle/>
-          <a:p>
-            <a:pPr algn="ctr">
-              <a:defRPr sz="1400" b="0">
-                <a:solidFill>
-                  <a:srgbClr val="FFFFFF"/>
-                </a:solidFill>
-                <a:latin typeface="Play"/>
-                <a:ea typeface="Play"/>
-                <a:cs typeface="Play"/>
-              </a:defRPr>
-            </a:pPr>
-            <a:r>
-              <a:rPr sz="1400" b="0">
-                <a:solidFill>
-                  <a:srgbClr val="FFFFFF"/>
-                </a:solidFill>
-                <a:latin typeface="Play"/>
-                <a:ea typeface="Play"/>
-                <a:cs typeface="Play"/>
-              </a:rPr>
-              <a:t>Выдумка</a:t>
-            </a:r>
-          </a:p>
-        </p:txBody>
-      </p:sp>
-      <p:sp>
-        <p:nvSpPr>
-          <p:cNvPr id="8" name="Document 7"/>
-          <p:cNvSpPr/>
-          <p:nvPr/>
-        </p:nvSpPr>
-        <p:spPr>
-          <a:xfrm>
-            <a:off x="8585565" y="1580641"/>
-            <a:ext cx="836635" cy="924702"/>
-          </a:xfrm>
-          <a:prstGeom prst="flowChartDocument">
-            <a:avLst/>
-          </a:prstGeom>
-          <a:solidFill>
-            <a:srgbClr val="0077FF"/>
-          </a:solidFill>
-          <a:ln>
-            <a:noFill/>
-          </a:ln>
-        </p:spPr>
-        <p:style>
-          <a:lnRef idx="1">
-            <a:schemeClr val="accent1"/>
-          </a:lnRef>
-          <a:fillRef idx="3">
-            <a:schemeClr val="accent1"/>
-          </a:fillRef>
-          <a:effectRef idx="2">
-            <a:schemeClr val="accent1"/>
-          </a:effectRef>
-          <a:fontRef idx="minor">
-            <a:schemeClr val="lt1"/>
-          </a:fontRef>
-        </p:style>
-        <p:txBody>
-          <a:bodyPr rtlCol="0" anchor="ctr"/>
-          <a:lstStyle/>
-          <a:p>
-            <a:pPr algn="ctr"/>
-          </a:p>
-        </p:txBody>
-      </p:sp>
-      <p:sp>
-        <p:nvSpPr>
-          <p:cNvPr id="9" name="TextBox 8"/>
-          <p:cNvSpPr txBox="1"/>
-          <p:nvPr/>
-        </p:nvSpPr>
-        <p:spPr>
-          <a:xfrm>
-            <a:off x="8116111" y="2834287"/>
-            <a:ext cx="1775542" cy="2672891"/>
-          </a:xfrm>
-          <a:prstGeom prst="rect">
-            <a:avLst/>
-          </a:prstGeom>
-          <a:noFill/>
-        </p:spPr>
-        <p:txBody>
-          <a:bodyPr wrap="square" lIns="12700" rIns="12700" tIns="12700" bIns="12700">
-            <a:spAutoFit/>
-          </a:bodyPr>
-          <a:lstStyle/>
-          <a:p>
-            <a:pPr algn="ctr">
-              <a:defRPr sz="1400" b="0">
-                <a:solidFill>
-                  <a:srgbClr val="FFFFFF"/>
-                </a:solidFill>
-                <a:latin typeface="Play"/>
-                <a:ea typeface="Play"/>
-                <a:cs typeface="Play"/>
-              </a:defRPr>
-            </a:pPr>
-            <a:r>
-              <a:rPr sz="1400" b="0">
-                <a:solidFill>
-                  <a:srgbClr val="FFFFFF"/>
-                </a:solidFill>
-                <a:latin typeface="Play"/>
-                <a:ea typeface="Play"/>
-                <a:cs typeface="Play"/>
-              </a:rPr>
-              <a:t>Плохой шаблон</a:t>
-            </a:r>
-          </a:p>
-        </p:txBody>
-      </p:sp>
-      <p:sp>
-        <p:nvSpPr>
-          <p:cNvPr id="10" name="Oval 9"/>
-          <p:cNvSpPr/>
-          <p:nvPr/>
-        </p:nvSpPr>
-        <p:spPr>
-          <a:xfrm>
-            <a:off x="10368024" y="1558625"/>
-            <a:ext cx="968735" cy="968735"/>
-          </a:xfrm>
-          <a:prstGeom prst="ellipse">
-            <a:avLst/>
-          </a:prstGeom>
-          <a:solidFill>
-            <a:srgbClr val="0077FF"/>
-          </a:solidFill>
-          <a:ln>
-            <a:noFill/>
-          </a:ln>
-        </p:spPr>
-        <p:style>
-          <a:lnRef idx="1">
-            <a:schemeClr val="accent1"/>
-          </a:lnRef>
-          <a:fillRef idx="3">
-            <a:schemeClr val="accent1"/>
-          </a:fillRef>
-          <a:effectRef idx="2">
-            <a:schemeClr val="accent1"/>
-          </a:effectRef>
-          <a:fontRef idx="minor">
-            <a:schemeClr val="lt1"/>
-          </a:fontRef>
-        </p:style>
-        <p:txBody>
-          <a:bodyPr rtlCol="0" anchor="ctr"/>
-          <a:lstStyle/>
-          <a:p>
-            <a:pPr algn="ctr"/>
-          </a:p>
-        </p:txBody>
-      </p:sp>
-      <p:sp>
-        <p:nvSpPr>
-          <p:cNvPr id="11" name="Oval 10"/>
-          <p:cNvSpPr/>
-          <p:nvPr/>
-        </p:nvSpPr>
-        <p:spPr>
-          <a:xfrm>
-            <a:off x="10522141" y="1712742"/>
-            <a:ext cx="660501" cy="660501"/>
-          </a:xfrm>
-          <a:prstGeom prst="ellipse">
-            <a:avLst/>
-          </a:prstGeom>
-          <a:solidFill>
-            <a:srgbClr val="111111"/>
-          </a:solidFill>
-          <a:ln>
-            <a:noFill/>
-          </a:ln>
-        </p:spPr>
-        <p:style>
-          <a:lnRef idx="1">
-            <a:schemeClr val="accent1"/>
-          </a:lnRef>
-          <a:fillRef idx="3">
-            <a:schemeClr val="accent1"/>
-          </a:fillRef>
-          <a:effectRef idx="2">
-            <a:schemeClr val="accent1"/>
-          </a:effectRef>
-          <a:fontRef idx="minor">
-            <a:schemeClr val="lt1"/>
-          </a:fontRef>
-        </p:style>
-        <p:txBody>
-          <a:bodyPr rtlCol="0" anchor="ctr"/>
-          <a:lstStyle/>
-          <a:p>
-            <a:pPr algn="ctr"/>
-          </a:p>
-        </p:txBody>
-      </p:sp>
-      <p:sp>
-        <p:nvSpPr>
-          <p:cNvPr id="12" name="Oval 11"/>
-          <p:cNvSpPr/>
-          <p:nvPr/>
-        </p:nvSpPr>
-        <p:spPr>
-          <a:xfrm>
-            <a:off x="10698275" y="1888876"/>
-            <a:ext cx="308234" cy="308234"/>
-          </a:xfrm>
-          <a:prstGeom prst="ellipse">
-            <a:avLst/>
-          </a:prstGeom>
-          <a:solidFill>
-            <a:srgbClr val="0077FF"/>
-          </a:solidFill>
-          <a:ln>
-            <a:noFill/>
-          </a:ln>
-        </p:spPr>
-        <p:style>
-          <a:lnRef idx="1">
-            <a:schemeClr val="accent1"/>
-          </a:lnRef>
-          <a:fillRef idx="3">
-            <a:schemeClr val="accent1"/>
-          </a:fillRef>
-          <a:effectRef idx="2">
-            <a:schemeClr val="accent1"/>
-          </a:effectRef>
-          <a:fontRef idx="minor">
-            <a:schemeClr val="lt1"/>
-          </a:fontRef>
-        </p:style>
-        <p:txBody>
-          <a:bodyPr rtlCol="0" anchor="ctr"/>
-          <a:lstStyle/>
-          <a:p>
-            <a:pPr algn="ctr"/>
-          </a:p>
-        </p:txBody>
-      </p:sp>
-      <p:sp>
-        <p:nvSpPr>
-          <p:cNvPr id="13" name="TextBox 12"/>
-          <p:cNvSpPr txBox="1"/>
-          <p:nvPr/>
-        </p:nvSpPr>
-        <p:spPr>
-          <a:xfrm>
-            <a:off x="9964621" y="2834287"/>
-            <a:ext cx="1775542" cy="2672891"/>
-          </a:xfrm>
-          <a:prstGeom prst="rect">
-            <a:avLst/>
-          </a:prstGeom>
-          <a:noFill/>
-        </p:spPr>
-        <p:txBody>
-          <a:bodyPr wrap="square" lIns="12700" rIns="12700" tIns="12700" bIns="12700">
-            <a:spAutoFit/>
-          </a:bodyPr>
-          <a:lstStyle/>
-          <a:p>
-            <a:pPr algn="ctr">
-              <a:defRPr sz="1400" b="0">
-                <a:solidFill>
-                  <a:srgbClr val="FFFFFF"/>
-                </a:solidFill>
-                <a:latin typeface="Play"/>
-                <a:ea typeface="Play"/>
-                <a:cs typeface="Play"/>
-              </a:defRPr>
-            </a:pPr>
-            <a:r>
-              <a:rPr sz="1400" b="0">
-                <a:solidFill>
-                  <a:srgbClr val="FFFFFF"/>
-                </a:solidFill>
-                <a:latin typeface="Play"/>
-                <a:ea typeface="Play"/>
-                <a:cs typeface="Play"/>
-              </a:rPr>
-              <a:t>Перегрузка</a:t>
-            </a:r>
-          </a:p>
-        </p:txBody>
-      </p:sp>
+        </p:grpSpPr>
+        <p:sp>
+          <p:nvSpPr>
+            <p:cNvPr id="5" name="Oval 4"/>
+            <p:cNvSpPr/>
+            <p:nvPr/>
+          </p:nvSpPr>
+          <p:spPr>
+            <a:xfrm>
+              <a:off x="7815241" y="2323485"/>
+              <a:ext cx="3033988" cy="3033988"/>
+            </a:xfrm>
+            <a:prstGeom prst="ellipse">
+              <a:avLst/>
+            </a:prstGeom>
+            <a:solidFill>
+              <a:srgbClr val="0E2137"/>
+            </a:solidFill>
+            <a:ln>
+              <a:noFill/>
+            </a:ln>
+            <a:effectLst/>
+          </p:spPr>
+          <p:style>
+            <a:lnRef idx="1">
+              <a:schemeClr val="accent1"/>
+            </a:lnRef>
+            <a:fillRef idx="3">
+              <a:schemeClr val="accent1"/>
+            </a:fillRef>
+            <a:effectRef idx="2">
+              <a:schemeClr val="accent1"/>
+            </a:effectRef>
+            <a:fontRef idx="minor">
+              <a:schemeClr val="lt1"/>
+            </a:fontRef>
+          </p:style>
+          <p:txBody>
+            <a:bodyPr rtlCol="0" anchor="ctr"/>
+            <a:lstStyle/>
+            <a:p>
+              <a:pPr algn="ctr"/>
+            </a:p>
+          </p:txBody>
+        </p:sp>
+        <p:sp>
+          <p:nvSpPr>
+            <p:cNvPr id="6" name="Freeform 5"/>
+            <p:cNvSpPr/>
+            <p:nvPr/>
+          </p:nvSpPr>
+          <p:spPr>
+            <a:xfrm>
+              <a:off x="7718924" y="2877308"/>
+              <a:ext cx="2239373" cy="1709628"/>
+            </a:xfrm>
+            <a:custGeom>
+              <a:avLst/>
+              <a:gdLst/>
+              <a:ahLst/>
+              <a:cxnLst/>
+              <a:rect l="l" t="t" r="r" b="b"/>
+              <a:pathLst>
+                <a:path w="2239373" h="1709628">
+                  <a:moveTo>
+                    <a:pt x="216714" y="0"/>
+                  </a:moveTo>
+                  <a:lnTo>
+                    <a:pt x="2022659" y="0"/>
+                  </a:lnTo>
+                  <a:lnTo>
+                    <a:pt x="2064942" y="4166"/>
+                  </a:lnTo>
+                  <a:lnTo>
+                    <a:pt x="2105588" y="16494"/>
+                  </a:lnTo>
+                  <a:lnTo>
+                    <a:pt x="2143055" y="36528"/>
+                  </a:lnTo>
+                  <a:lnTo>
+                    <a:pt x="2175900" y="63473"/>
+                  </a:lnTo>
+                  <a:lnTo>
+                    <a:pt x="2202844" y="96317"/>
+                  </a:lnTo>
+                  <a:lnTo>
+                    <a:pt x="2222878" y="133785"/>
+                  </a:lnTo>
+                  <a:lnTo>
+                    <a:pt x="2235207" y="174430"/>
+                  </a:lnTo>
+                  <a:lnTo>
+                    <a:pt x="2239373" y="216714"/>
+                  </a:lnTo>
+                  <a:lnTo>
+                    <a:pt x="2239373" y="1107647"/>
+                  </a:lnTo>
+                  <a:lnTo>
+                    <a:pt x="2235207" y="1149930"/>
+                  </a:lnTo>
+                  <a:lnTo>
+                    <a:pt x="2222878" y="1190576"/>
+                  </a:lnTo>
+                  <a:lnTo>
+                    <a:pt x="2202844" y="1228043"/>
+                  </a:lnTo>
+                  <a:lnTo>
+                    <a:pt x="2175900" y="1260887"/>
+                  </a:lnTo>
+                  <a:lnTo>
+                    <a:pt x="2143055" y="1287832"/>
+                  </a:lnTo>
+                  <a:lnTo>
+                    <a:pt x="2105588" y="1307866"/>
+                  </a:lnTo>
+                  <a:lnTo>
+                    <a:pt x="2064942" y="1320194"/>
+                  </a:lnTo>
+                  <a:lnTo>
+                    <a:pt x="2022659" y="1324360"/>
+                  </a:lnTo>
+                  <a:lnTo>
+                    <a:pt x="866854" y="1324360"/>
+                  </a:lnTo>
+                  <a:lnTo>
+                    <a:pt x="385269" y="1709628"/>
+                  </a:lnTo>
+                  <a:lnTo>
+                    <a:pt x="385269" y="1324360"/>
+                  </a:lnTo>
+                  <a:lnTo>
+                    <a:pt x="216714" y="1324360"/>
+                  </a:lnTo>
+                  <a:lnTo>
+                    <a:pt x="174431" y="1320194"/>
+                  </a:lnTo>
+                  <a:lnTo>
+                    <a:pt x="133785" y="1307866"/>
+                  </a:lnTo>
+                  <a:lnTo>
+                    <a:pt x="96317" y="1287832"/>
+                  </a:lnTo>
+                  <a:lnTo>
+                    <a:pt x="63473" y="1260887"/>
+                  </a:lnTo>
+                  <a:lnTo>
+                    <a:pt x="36529" y="1228043"/>
+                  </a:lnTo>
+                  <a:lnTo>
+                    <a:pt x="16495" y="1190576"/>
+                  </a:lnTo>
+                  <a:lnTo>
+                    <a:pt x="4166" y="1149930"/>
+                  </a:lnTo>
+                  <a:lnTo>
+                    <a:pt x="0" y="1107647"/>
+                  </a:lnTo>
+                  <a:lnTo>
+                    <a:pt x="0" y="216714"/>
+                  </a:lnTo>
+                  <a:lnTo>
+                    <a:pt x="4166" y="174430"/>
+                  </a:lnTo>
+                  <a:lnTo>
+                    <a:pt x="16495" y="133785"/>
+                  </a:lnTo>
+                  <a:lnTo>
+                    <a:pt x="36529" y="96317"/>
+                  </a:lnTo>
+                  <a:lnTo>
+                    <a:pt x="63473" y="63473"/>
+                  </a:lnTo>
+                  <a:lnTo>
+                    <a:pt x="96317" y="36528"/>
+                  </a:lnTo>
+                  <a:lnTo>
+                    <a:pt x="133785" y="16494"/>
+                  </a:lnTo>
+                  <a:lnTo>
+                    <a:pt x="174431" y="4166"/>
+                  </a:lnTo>
+                  <a:lnTo>
+                    <a:pt x="216714" y="0"/>
+                  </a:lnTo>
+                  <a:close/>
+                </a:path>
+              </a:pathLst>
+            </a:custGeom>
+            <a:solidFill>
+              <a:srgbClr val="0077FF"/>
+            </a:solidFill>
+            <a:ln>
+              <a:noFill/>
+            </a:ln>
+            <a:effectLst/>
+          </p:spPr>
+          <p:style>
+            <a:lnRef idx="1">
+              <a:schemeClr val="accent1"/>
+            </a:lnRef>
+            <a:fillRef idx="3">
+              <a:schemeClr val="accent1"/>
+            </a:fillRef>
+            <a:effectRef idx="2">
+              <a:schemeClr val="accent1"/>
+            </a:effectRef>
+            <a:fontRef idx="minor">
+              <a:schemeClr val="lt1"/>
+            </a:fontRef>
+          </p:style>
+          <p:txBody>
+            <a:bodyPr rtlCol="0" anchor="ctr"/>
+            <a:lstStyle/>
+            <a:p>
+              <a:pPr algn="ctr"/>
+            </a:p>
+          </p:txBody>
+        </p:sp>
+        <p:sp>
+          <p:nvSpPr>
+            <p:cNvPr id="7" name="Oval 6"/>
+            <p:cNvSpPr/>
+            <p:nvPr/>
+          </p:nvSpPr>
+          <p:spPr>
+            <a:xfrm>
+              <a:off x="8272748" y="3431131"/>
+              <a:ext cx="240792" cy="240792"/>
+            </a:xfrm>
+            <a:prstGeom prst="ellipse">
+              <a:avLst/>
+            </a:prstGeom>
+            <a:solidFill>
+              <a:srgbClr val="111111"/>
+            </a:solidFill>
+            <a:ln>
+              <a:noFill/>
+            </a:ln>
+            <a:effectLst/>
+          </p:spPr>
+          <p:style>
+            <a:lnRef idx="1">
+              <a:schemeClr val="accent1"/>
+            </a:lnRef>
+            <a:fillRef idx="3">
+              <a:schemeClr val="accent1"/>
+            </a:fillRef>
+            <a:effectRef idx="2">
+              <a:schemeClr val="accent1"/>
+            </a:effectRef>
+            <a:fontRef idx="minor">
+              <a:schemeClr val="lt1"/>
+            </a:fontRef>
+          </p:style>
+          <p:txBody>
+            <a:bodyPr rtlCol="0" anchor="ctr"/>
+            <a:lstStyle/>
+            <a:p>
+              <a:pPr algn="ctr"/>
+            </a:p>
+          </p:txBody>
+        </p:sp>
+        <p:sp>
+          <p:nvSpPr>
+            <p:cNvPr id="8" name="Oval 7"/>
+            <p:cNvSpPr/>
+            <p:nvPr/>
+          </p:nvSpPr>
+          <p:spPr>
+            <a:xfrm>
+              <a:off x="8706174" y="3431131"/>
+              <a:ext cx="240792" cy="240792"/>
+            </a:xfrm>
+            <a:prstGeom prst="ellipse">
+              <a:avLst/>
+            </a:prstGeom>
+            <a:solidFill>
+              <a:srgbClr val="111111"/>
+            </a:solidFill>
+            <a:ln>
+              <a:noFill/>
+            </a:ln>
+            <a:effectLst/>
+          </p:spPr>
+          <p:style>
+            <a:lnRef idx="1">
+              <a:schemeClr val="accent1"/>
+            </a:lnRef>
+            <a:fillRef idx="3">
+              <a:schemeClr val="accent1"/>
+            </a:fillRef>
+            <a:effectRef idx="2">
+              <a:schemeClr val="accent1"/>
+            </a:effectRef>
+            <a:fontRef idx="minor">
+              <a:schemeClr val="lt1"/>
+            </a:fontRef>
+          </p:style>
+          <p:txBody>
+            <a:bodyPr rtlCol="0" anchor="ctr"/>
+            <a:lstStyle/>
+            <a:p>
+              <a:pPr algn="ctr"/>
+            </a:p>
+          </p:txBody>
+        </p:sp>
+        <p:sp>
+          <p:nvSpPr>
+            <p:cNvPr id="9" name="Oval 8"/>
+            <p:cNvSpPr/>
+            <p:nvPr/>
+          </p:nvSpPr>
+          <p:spPr>
+            <a:xfrm>
+              <a:off x="9139601" y="3431131"/>
+              <a:ext cx="240792" cy="240792"/>
+            </a:xfrm>
+            <a:prstGeom prst="ellipse">
+              <a:avLst/>
+            </a:prstGeom>
+            <a:solidFill>
+              <a:srgbClr val="111111"/>
+            </a:solidFill>
+            <a:ln>
+              <a:noFill/>
+            </a:ln>
+            <a:effectLst/>
+          </p:spPr>
+          <p:style>
+            <a:lnRef idx="1">
+              <a:schemeClr val="accent1"/>
+            </a:lnRef>
+            <a:fillRef idx="3">
+              <a:schemeClr val="accent1"/>
+            </a:fillRef>
+            <a:effectRef idx="2">
+              <a:schemeClr val="accent1"/>
+            </a:effectRef>
+            <a:fontRef idx="minor">
+              <a:schemeClr val="lt1"/>
+            </a:fontRef>
+          </p:style>
+          <p:txBody>
+            <a:bodyPr rtlCol="0" anchor="ctr"/>
+            <a:lstStyle/>
+            <a:p>
+              <a:pPr algn="ctr"/>
+            </a:p>
+          </p:txBody>
+        </p:sp>
+        <p:sp>
+          <p:nvSpPr>
+            <p:cNvPr id="10" name="Freeform 9"/>
+            <p:cNvSpPr/>
+            <p:nvPr/>
+          </p:nvSpPr>
+          <p:spPr>
+            <a:xfrm>
+              <a:off x="9500790" y="3623766"/>
+              <a:ext cx="1444757" cy="1396597"/>
+            </a:xfrm>
+            <a:custGeom>
+              <a:avLst/>
+              <a:gdLst/>
+              <a:ahLst/>
+              <a:cxnLst/>
+              <a:rect l="l" t="t" r="r" b="b"/>
+              <a:pathLst>
+                <a:path w="1444757" h="1396597">
+                  <a:moveTo>
+                    <a:pt x="1228043" y="0"/>
+                  </a:moveTo>
+                  <a:lnTo>
+                    <a:pt x="192635" y="0"/>
+                  </a:lnTo>
+                  <a:lnTo>
+                    <a:pt x="155059" y="3696"/>
+                  </a:lnTo>
+                  <a:lnTo>
+                    <a:pt x="118916" y="14664"/>
+                  </a:lnTo>
+                  <a:lnTo>
+                    <a:pt x="85614" y="32458"/>
+                  </a:lnTo>
+                  <a:lnTo>
+                    <a:pt x="56418" y="56417"/>
+                  </a:lnTo>
+                  <a:lnTo>
+                    <a:pt x="32459" y="85613"/>
+                  </a:lnTo>
+                  <a:lnTo>
+                    <a:pt x="14665" y="118915"/>
+                  </a:lnTo>
+                  <a:lnTo>
+                    <a:pt x="3697" y="155058"/>
+                  </a:lnTo>
+                  <a:lnTo>
+                    <a:pt x="0" y="192634"/>
+                  </a:lnTo>
+                  <a:lnTo>
+                    <a:pt x="0" y="890933"/>
+                  </a:lnTo>
+                  <a:lnTo>
+                    <a:pt x="3697" y="928508"/>
+                  </a:lnTo>
+                  <a:lnTo>
+                    <a:pt x="14665" y="964651"/>
+                  </a:lnTo>
+                  <a:lnTo>
+                    <a:pt x="32459" y="997953"/>
+                  </a:lnTo>
+                  <a:lnTo>
+                    <a:pt x="56418" y="1027149"/>
+                  </a:lnTo>
+                  <a:lnTo>
+                    <a:pt x="85614" y="1051108"/>
+                  </a:lnTo>
+                  <a:lnTo>
+                    <a:pt x="118916" y="1068902"/>
+                  </a:lnTo>
+                  <a:lnTo>
+                    <a:pt x="155059" y="1079871"/>
+                  </a:lnTo>
+                  <a:lnTo>
+                    <a:pt x="192635" y="1083567"/>
+                  </a:lnTo>
+                  <a:lnTo>
+                    <a:pt x="1035409" y="1083567"/>
+                  </a:lnTo>
+                  <a:lnTo>
+                    <a:pt x="1444757" y="1396597"/>
+                  </a:lnTo>
+                  <a:lnTo>
+                    <a:pt x="1444757" y="1083567"/>
+                  </a:lnTo>
+                  <a:lnTo>
+                    <a:pt x="1228043" y="1083567"/>
+                  </a:lnTo>
+                  <a:lnTo>
+                    <a:pt x="1265619" y="1079871"/>
+                  </a:lnTo>
+                  <a:lnTo>
+                    <a:pt x="1301762" y="1068902"/>
+                  </a:lnTo>
+                  <a:lnTo>
+                    <a:pt x="1335063" y="1051108"/>
+                  </a:lnTo>
+                  <a:lnTo>
+                    <a:pt x="1364260" y="1027149"/>
+                  </a:lnTo>
+                  <a:lnTo>
+                    <a:pt x="1388218" y="997953"/>
+                  </a:lnTo>
+                  <a:lnTo>
+                    <a:pt x="1406013" y="964651"/>
+                  </a:lnTo>
+                  <a:lnTo>
+                    <a:pt x="1416981" y="928508"/>
+                  </a:lnTo>
+                  <a:lnTo>
+                    <a:pt x="1420677" y="890933"/>
+                  </a:lnTo>
+                  <a:lnTo>
+                    <a:pt x="1420677" y="192634"/>
+                  </a:lnTo>
+                  <a:lnTo>
+                    <a:pt x="1416981" y="155058"/>
+                  </a:lnTo>
+                  <a:lnTo>
+                    <a:pt x="1406013" y="118915"/>
+                  </a:lnTo>
+                  <a:lnTo>
+                    <a:pt x="1388218" y="85613"/>
+                  </a:lnTo>
+                  <a:lnTo>
+                    <a:pt x="1364260" y="56417"/>
+                  </a:lnTo>
+                  <a:lnTo>
+                    <a:pt x="1335063" y="32458"/>
+                  </a:lnTo>
+                  <a:lnTo>
+                    <a:pt x="1301762" y="14664"/>
+                  </a:lnTo>
+                  <a:lnTo>
+                    <a:pt x="1265619" y="3696"/>
+                  </a:lnTo>
+                  <a:lnTo>
+                    <a:pt x="1228043" y="0"/>
+                  </a:lnTo>
+                  <a:close/>
+                </a:path>
+              </a:pathLst>
+            </a:custGeom>
+            <a:solidFill>
+              <a:srgbClr val="6DBCFF"/>
+            </a:solidFill>
+            <a:ln>
+              <a:noFill/>
+            </a:ln>
+            <a:effectLst/>
+          </p:spPr>
+          <p:style>
+            <a:lnRef idx="1">
+              <a:schemeClr val="accent1"/>
+            </a:lnRef>
+            <a:fillRef idx="3">
+              <a:schemeClr val="accent1"/>
+            </a:fillRef>
+            <a:effectRef idx="2">
+              <a:schemeClr val="accent1"/>
+            </a:effectRef>
+            <a:fontRef idx="minor">
+              <a:schemeClr val="lt1"/>
+            </a:fontRef>
+          </p:style>
+          <p:txBody>
+            <a:bodyPr rtlCol="0" anchor="ctr"/>
+            <a:lstStyle/>
+            <a:p>
+              <a:pPr algn="ctr"/>
+            </a:p>
+          </p:txBody>
+        </p:sp>
+        <p:sp>
+          <p:nvSpPr>
+            <p:cNvPr id="11" name="Rounded Rectangle 10"/>
+            <p:cNvSpPr/>
+            <p:nvPr/>
+          </p:nvSpPr>
+          <p:spPr>
+            <a:xfrm>
+              <a:off x="9765662" y="3984955"/>
+              <a:ext cx="746457" cy="120396"/>
+            </a:xfrm>
+            <a:prstGeom prst="roundRect">
+              <a:avLst>
+                <a:gd name="adj" fmla="val 50000"/>
+              </a:avLst>
+            </a:prstGeom>
+            <a:solidFill>
+              <a:srgbClr val="111111"/>
+            </a:solidFill>
+            <a:ln>
+              <a:noFill/>
+            </a:ln>
+            <a:effectLst/>
+          </p:spPr>
+          <p:style>
+            <a:lnRef idx="1">
+              <a:schemeClr val="accent1"/>
+            </a:lnRef>
+            <a:fillRef idx="3">
+              <a:schemeClr val="accent1"/>
+            </a:fillRef>
+            <a:effectRef idx="2">
+              <a:schemeClr val="accent1"/>
+            </a:effectRef>
+            <a:fontRef idx="minor">
+              <a:schemeClr val="lt1"/>
+            </a:fontRef>
+          </p:style>
+          <p:txBody>
+            <a:bodyPr rtlCol="0" anchor="ctr"/>
+            <a:lstStyle/>
+            <a:p>
+              <a:pPr algn="ctr"/>
+            </a:p>
+          </p:txBody>
+        </p:sp>
+        <p:sp>
+          <p:nvSpPr>
+            <p:cNvPr id="12" name="Rounded Rectangle 11"/>
+            <p:cNvSpPr/>
+            <p:nvPr/>
+          </p:nvSpPr>
+          <p:spPr>
+            <a:xfrm>
+              <a:off x="9765662" y="4225747"/>
+              <a:ext cx="505664" cy="120396"/>
+            </a:xfrm>
+            <a:prstGeom prst="roundRect">
+              <a:avLst>
+                <a:gd name="adj" fmla="val 50000"/>
+              </a:avLst>
+            </a:prstGeom>
+            <a:solidFill>
+              <a:srgbClr val="111111"/>
+            </a:solidFill>
+            <a:ln>
+              <a:noFill/>
+            </a:ln>
+            <a:effectLst/>
+          </p:spPr>
+          <p:style>
+            <a:lnRef idx="1">
+              <a:schemeClr val="accent1"/>
+            </a:lnRef>
+            <a:fillRef idx="3">
+              <a:schemeClr val="accent1"/>
+            </a:fillRef>
+            <a:effectRef idx="2">
+              <a:schemeClr val="accent1"/>
+            </a:effectRef>
+            <a:fontRef idx="minor">
+              <a:schemeClr val="lt1"/>
+            </a:fontRef>
+          </p:style>
+          <p:txBody>
+            <a:bodyPr rtlCol="0" anchor="ctr"/>
+            <a:lstStyle/>
+            <a:p>
+              <a:pPr algn="ctr"/>
+            </a:p>
+          </p:txBody>
+        </p:sp>
+      </p:grpSp>
     </p:spTree>
   </p:cSld>
   <p:clrMapOvr>
@@ -11908,7 +12929,7 @@
                 <a:ea typeface="Play"/>
                 <a:cs typeface="Play"/>
               </a:rPr>
-              <a:t>План</a:t>
+              <a:t>Риски</a:t>
             </a:r>
           </a:p>
         </p:txBody>
@@ -11921,8 +12942,8 @@
         </p:nvSpPr>
         <p:spPr>
           <a:xfrm>
-            <a:off x="429280" y="1664162"/>
-            <a:ext cx="5472562" cy="3753589"/>
+            <a:off x="429280" y="2431298"/>
+            <a:ext cx="5472562" cy="3466581"/>
           </a:xfrm>
           <a:prstGeom prst="rect">
             <a:avLst/>
@@ -11939,7 +12960,7 @@
               <a:spcAft>
                 <a:spcPts val="300"/>
               </a:spcAft>
-              <a:defRPr sz="1600">
+              <a:defRPr sz="2000">
                 <a:solidFill>
                   <a:srgbClr val="FFFFFF"/>
                 </a:solidFill>
@@ -11949,7 +12970,7 @@
               </a:defRPr>
             </a:pPr>
             <a:r>
-              <a:rPr sz="1600">
+              <a:rPr sz="2000">
                 <a:solidFill>
                   <a:srgbClr val="FFFFFF"/>
                 </a:solidFill>
@@ -11957,7 +12978,7 @@
                 <a:ea typeface="Play"/>
                 <a:cs typeface="Play"/>
               </a:rPr>
-              <a:t>• Q3 2026: подключение 4 команд, домен и HTTPS</a:t>
+              <a:t>• Модель может выдумать цифры, которые не подтверждены</a:t>
             </a:r>
           </a:p>
           <a:p>
@@ -11965,7 +12986,7 @@
               <a:spcAft>
                 <a:spcPts val="300"/>
               </a:spcAft>
-              <a:defRPr sz="1600">
+              <a:defRPr sz="2000">
                 <a:solidFill>
                   <a:srgbClr val="FFFFFF"/>
                 </a:solidFill>
@@ -11975,7 +12996,7 @@
               </a:defRPr>
             </a:pPr>
             <a:r>
-              <a:rPr sz="1600">
+              <a:rPr sz="2000">
                 <a:solidFill>
                   <a:srgbClr val="FFFFFF"/>
                 </a:solidFill>
@@ -11983,7 +13004,7 @@
                 <a:ea typeface="Play"/>
                 <a:cs typeface="Play"/>
               </a:rPr>
-              <a:t>• Q4 2026: доступ для всей компании, интеграция с хранилищем</a:t>
+              <a:t>• Неправильный шаблон может привести к некорректной вёрстке</a:t>
             </a:r>
           </a:p>
           <a:p>
@@ -11991,7 +13012,7 @@
               <a:spcAft>
                 <a:spcPts val="300"/>
               </a:spcAft>
-              <a:defRPr sz="1600">
+              <a:defRPr sz="2000">
                 <a:solidFill>
                   <a:srgbClr val="FFFFFF"/>
                 </a:solidFill>
@@ -12001,7 +13022,7 @@
               </a:defRPr>
             </a:pPr>
             <a:r>
-              <a:rPr sz="1600">
+              <a:rPr sz="2000">
                 <a:solidFill>
                   <a:srgbClr val="FFFFFF"/>
                 </a:solidFill>
@@ -12009,21 +13030,924 @@
                 <a:ea typeface="Play"/>
                 <a:cs typeface="Play"/>
               </a:rPr>
-              <a:t>• Q1 2027: генерация иллюстраций под стиль шаблона</a:t>
+              <a:t>• Нагрузка выше 20 одновременных задач требует внешней очереди</a:t>
+            </a:r>
+          </a:p>
+        </p:txBody>
+      </p:sp>
+      <p:grpSp>
+        <p:nvGrpSpPr>
+          <p:cNvPr id="4" name="icon:builtin-sparkles"/>
+          <p:cNvGrpSpPr/>
+          <p:nvPr/>
+        </p:nvGrpSpPr>
+        <p:grpSpPr>
+          <a:xfrm>
+            <a:off x="6834295" y="2568902"/>
+            <a:ext cx="743065" cy="710957"/>
+            <a:chOff x="6834295" y="2568902"/>
+            <a:chExt cx="743065" cy="710957"/>
+          </a:xfrm>
+        </p:grpSpPr>
+        <p:sp>
+          <p:nvSpPr>
+            <p:cNvPr id="5" name="Freeform 4"/>
+            <p:cNvSpPr/>
+            <p:nvPr/>
+          </p:nvSpPr>
+          <p:spPr>
+            <a:xfrm>
+              <a:off x="6834295" y="2568902"/>
+              <a:ext cx="550418" cy="550418"/>
+            </a:xfrm>
+            <a:custGeom>
+              <a:avLst/>
+              <a:gdLst/>
+              <a:ahLst/>
+              <a:cxnLst/>
+              <a:rect l="l" t="t" r="r" b="b"/>
+              <a:pathLst>
+                <a:path w="550418" h="550418">
+                  <a:moveTo>
+                    <a:pt x="275209" y="0"/>
+                  </a:moveTo>
+                  <a:lnTo>
+                    <a:pt x="283557" y="51693"/>
+                  </a:lnTo>
+                  <a:lnTo>
+                    <a:pt x="295024" y="96874"/>
+                  </a:lnTo>
+                  <a:lnTo>
+                    <a:pt x="310069" y="135999"/>
+                  </a:lnTo>
+                  <a:lnTo>
+                    <a:pt x="329150" y="169529"/>
+                  </a:lnTo>
+                  <a:lnTo>
+                    <a:pt x="352635" y="197784"/>
+                  </a:lnTo>
+                  <a:lnTo>
+                    <a:pt x="380890" y="221268"/>
+                  </a:lnTo>
+                  <a:lnTo>
+                    <a:pt x="414373" y="240303"/>
+                  </a:lnTo>
+                  <a:lnTo>
+                    <a:pt x="453545" y="255394"/>
+                  </a:lnTo>
+                  <a:lnTo>
+                    <a:pt x="498725" y="266907"/>
+                  </a:lnTo>
+                  <a:lnTo>
+                    <a:pt x="550418" y="275209"/>
+                  </a:lnTo>
+                  <a:lnTo>
+                    <a:pt x="498725" y="283557"/>
+                  </a:lnTo>
+                  <a:lnTo>
+                    <a:pt x="453545" y="295024"/>
+                  </a:lnTo>
+                  <a:lnTo>
+                    <a:pt x="414373" y="310069"/>
+                  </a:lnTo>
+                  <a:lnTo>
+                    <a:pt x="380890" y="329150"/>
+                  </a:lnTo>
+                  <a:lnTo>
+                    <a:pt x="352635" y="352634"/>
+                  </a:lnTo>
+                  <a:lnTo>
+                    <a:pt x="329150" y="380889"/>
+                  </a:lnTo>
+                  <a:lnTo>
+                    <a:pt x="310069" y="414373"/>
+                  </a:lnTo>
+                  <a:lnTo>
+                    <a:pt x="295024" y="453544"/>
+                  </a:lnTo>
+                  <a:lnTo>
+                    <a:pt x="283557" y="498770"/>
+                  </a:lnTo>
+                  <a:lnTo>
+                    <a:pt x="275209" y="550418"/>
+                  </a:lnTo>
+                  <a:lnTo>
+                    <a:pt x="266907" y="498770"/>
+                  </a:lnTo>
+                  <a:lnTo>
+                    <a:pt x="255394" y="453544"/>
+                  </a:lnTo>
+                  <a:lnTo>
+                    <a:pt x="240304" y="414373"/>
+                  </a:lnTo>
+                  <a:lnTo>
+                    <a:pt x="221268" y="380889"/>
+                  </a:lnTo>
+                  <a:lnTo>
+                    <a:pt x="197784" y="352634"/>
+                  </a:lnTo>
+                  <a:lnTo>
+                    <a:pt x="169529" y="329150"/>
+                  </a:lnTo>
+                  <a:lnTo>
+                    <a:pt x="135999" y="310115"/>
+                  </a:lnTo>
+                  <a:lnTo>
+                    <a:pt x="96874" y="295024"/>
+                  </a:lnTo>
+                  <a:lnTo>
+                    <a:pt x="51694" y="283511"/>
+                  </a:lnTo>
+                  <a:lnTo>
+                    <a:pt x="0" y="275209"/>
+                  </a:lnTo>
+                  <a:lnTo>
+                    <a:pt x="51694" y="266907"/>
+                  </a:lnTo>
+                  <a:lnTo>
+                    <a:pt x="96874" y="255394"/>
+                  </a:lnTo>
+                  <a:lnTo>
+                    <a:pt x="135999" y="240303"/>
+                  </a:lnTo>
+                  <a:lnTo>
+                    <a:pt x="169529" y="221268"/>
+                  </a:lnTo>
+                  <a:lnTo>
+                    <a:pt x="197784" y="197784"/>
+                  </a:lnTo>
+                  <a:lnTo>
+                    <a:pt x="221268" y="169529"/>
+                  </a:lnTo>
+                  <a:lnTo>
+                    <a:pt x="240304" y="136045"/>
+                  </a:lnTo>
+                  <a:lnTo>
+                    <a:pt x="255394" y="96874"/>
+                  </a:lnTo>
+                  <a:lnTo>
+                    <a:pt x="266907" y="51693"/>
+                  </a:lnTo>
+                  <a:lnTo>
+                    <a:pt x="275209" y="0"/>
+                  </a:lnTo>
+                  <a:close/>
+                </a:path>
+              </a:pathLst>
+            </a:custGeom>
+            <a:noFill/>
+            <a:ln w="91736" cap="rnd">
+              <a:solidFill>
+                <a:srgbClr val="0077FF"/>
+              </a:solidFill>
+              <a:round/>
+            </a:ln>
+            <a:effectLst/>
+          </p:spPr>
+          <p:style>
+            <a:lnRef idx="1">
+              <a:schemeClr val="accent1"/>
+            </a:lnRef>
+            <a:fillRef idx="3">
+              <a:schemeClr val="accent1"/>
+            </a:fillRef>
+            <a:effectRef idx="2">
+              <a:schemeClr val="accent1"/>
+            </a:effectRef>
+            <a:fontRef idx="minor">
+              <a:schemeClr val="lt1"/>
+            </a:fontRef>
+          </p:style>
+          <p:txBody>
+            <a:bodyPr rtlCol="0" anchor="ctr"/>
+            <a:lstStyle/>
+            <a:p>
+              <a:pPr algn="ctr"/>
+            </a:p>
+          </p:txBody>
+        </p:sp>
+        <p:sp>
+          <p:nvSpPr>
+            <p:cNvPr id="6" name="Freeform 5"/>
+            <p:cNvSpPr/>
+            <p:nvPr/>
+          </p:nvSpPr>
+          <p:spPr>
+            <a:xfrm>
+              <a:off x="7375540" y="3073452"/>
+              <a:ext cx="201820" cy="206407"/>
+            </a:xfrm>
+            <a:custGeom>
+              <a:avLst/>
+              <a:gdLst/>
+              <a:ahLst/>
+              <a:cxnLst/>
+              <a:rect l="l" t="t" r="r" b="b"/>
+              <a:pathLst>
+                <a:path w="201820" h="206407">
+                  <a:moveTo>
+                    <a:pt x="100910" y="0"/>
+                  </a:moveTo>
+                  <a:lnTo>
+                    <a:pt x="104212" y="19448"/>
+                  </a:lnTo>
+                  <a:lnTo>
+                    <a:pt x="108753" y="36511"/>
+                  </a:lnTo>
+                  <a:lnTo>
+                    <a:pt x="114624" y="51372"/>
+                  </a:lnTo>
+                  <a:lnTo>
+                    <a:pt x="121917" y="64215"/>
+                  </a:lnTo>
+                  <a:lnTo>
+                    <a:pt x="130724" y="75132"/>
+                  </a:lnTo>
+                  <a:lnTo>
+                    <a:pt x="141182" y="84214"/>
+                  </a:lnTo>
+                  <a:lnTo>
+                    <a:pt x="153429" y="91644"/>
+                  </a:lnTo>
+                  <a:lnTo>
+                    <a:pt x="167556" y="97607"/>
+                  </a:lnTo>
+                  <a:lnTo>
+                    <a:pt x="183656" y="102148"/>
+                  </a:lnTo>
+                  <a:lnTo>
+                    <a:pt x="201820" y="105497"/>
+                  </a:lnTo>
+                  <a:lnTo>
+                    <a:pt x="183656" y="108799"/>
+                  </a:lnTo>
+                  <a:lnTo>
+                    <a:pt x="167556" y="113340"/>
+                  </a:lnTo>
+                  <a:lnTo>
+                    <a:pt x="153429" y="119211"/>
+                  </a:lnTo>
+                  <a:lnTo>
+                    <a:pt x="141182" y="126504"/>
+                  </a:lnTo>
+                  <a:lnTo>
+                    <a:pt x="130724" y="135311"/>
+                  </a:lnTo>
+                  <a:lnTo>
+                    <a:pt x="121917" y="145769"/>
+                  </a:lnTo>
+                  <a:lnTo>
+                    <a:pt x="114624" y="158016"/>
+                  </a:lnTo>
+                  <a:lnTo>
+                    <a:pt x="108753" y="172143"/>
+                  </a:lnTo>
+                  <a:lnTo>
+                    <a:pt x="104212" y="188243"/>
+                  </a:lnTo>
+                  <a:lnTo>
+                    <a:pt x="100910" y="206407"/>
+                  </a:lnTo>
+                  <a:lnTo>
+                    <a:pt x="97607" y="188243"/>
+                  </a:lnTo>
+                  <a:lnTo>
+                    <a:pt x="93066" y="172143"/>
+                  </a:lnTo>
+                  <a:lnTo>
+                    <a:pt x="87195" y="158016"/>
+                  </a:lnTo>
+                  <a:lnTo>
+                    <a:pt x="79902" y="145769"/>
+                  </a:lnTo>
+                  <a:lnTo>
+                    <a:pt x="71095" y="135311"/>
+                  </a:lnTo>
+                  <a:lnTo>
+                    <a:pt x="60637" y="126504"/>
+                  </a:lnTo>
+                  <a:lnTo>
+                    <a:pt x="48391" y="119211"/>
+                  </a:lnTo>
+                  <a:lnTo>
+                    <a:pt x="34263" y="113340"/>
+                  </a:lnTo>
+                  <a:lnTo>
+                    <a:pt x="18163" y="108799"/>
+                  </a:lnTo>
+                  <a:lnTo>
+                    <a:pt x="0" y="105497"/>
+                  </a:lnTo>
+                  <a:lnTo>
+                    <a:pt x="18163" y="102194"/>
+                  </a:lnTo>
+                  <a:lnTo>
+                    <a:pt x="34263" y="97607"/>
+                  </a:lnTo>
+                  <a:lnTo>
+                    <a:pt x="48391" y="91644"/>
+                  </a:lnTo>
+                  <a:lnTo>
+                    <a:pt x="60637" y="84214"/>
+                  </a:lnTo>
+                  <a:lnTo>
+                    <a:pt x="71095" y="75132"/>
+                  </a:lnTo>
+                  <a:lnTo>
+                    <a:pt x="79902" y="64215"/>
+                  </a:lnTo>
+                  <a:lnTo>
+                    <a:pt x="87195" y="51372"/>
+                  </a:lnTo>
+                  <a:lnTo>
+                    <a:pt x="93066" y="36511"/>
+                  </a:lnTo>
+                  <a:lnTo>
+                    <a:pt x="97607" y="19448"/>
+                  </a:lnTo>
+                  <a:lnTo>
+                    <a:pt x="100910" y="0"/>
+                  </a:lnTo>
+                  <a:close/>
+                </a:path>
+              </a:pathLst>
+            </a:custGeom>
+            <a:noFill/>
+            <a:ln w="91736" cap="rnd">
+              <a:solidFill>
+                <a:srgbClr val="0077FF"/>
+              </a:solidFill>
+              <a:round/>
+            </a:ln>
+            <a:effectLst/>
+          </p:spPr>
+          <p:style>
+            <a:lnRef idx="1">
+              <a:schemeClr val="accent1"/>
+            </a:lnRef>
+            <a:fillRef idx="3">
+              <a:schemeClr val="accent1"/>
+            </a:fillRef>
+            <a:effectRef idx="2">
+              <a:schemeClr val="accent1"/>
+            </a:effectRef>
+            <a:fontRef idx="minor">
+              <a:schemeClr val="lt1"/>
+            </a:fontRef>
+          </p:style>
+          <p:txBody>
+            <a:bodyPr rtlCol="0" anchor="ctr"/>
+            <a:lstStyle/>
+            <a:p>
+              <a:pPr algn="ctr"/>
+            </a:p>
+          </p:txBody>
+        </p:sp>
+      </p:grpSp>
+      <p:sp>
+        <p:nvSpPr>
+          <p:cNvPr id="7" name="TextBox 6"/>
+          <p:cNvSpPr txBox="1"/>
+          <p:nvPr/>
+        </p:nvSpPr>
+        <p:spPr>
+          <a:xfrm>
+            <a:off x="6267602" y="3740129"/>
+            <a:ext cx="1775542" cy="2157749"/>
+          </a:xfrm>
+          <a:prstGeom prst="rect">
+            <a:avLst/>
+          </a:prstGeom>
+          <a:noFill/>
+        </p:spPr>
+        <p:txBody>
+          <a:bodyPr wrap="square" lIns="12700" rIns="12700" tIns="12700" bIns="12700">
+            <a:spAutoFit/>
+          </a:bodyPr>
+          <a:lstStyle/>
+          <a:p>
+            <a:pPr algn="ctr">
+              <a:defRPr sz="1400" b="0">
+                <a:solidFill>
+                  <a:srgbClr val="FFFFFF"/>
+                </a:solidFill>
+                <a:latin typeface="Play"/>
+                <a:ea typeface="Play"/>
+                <a:cs typeface="Play"/>
+              </a:defRPr>
+            </a:pPr>
+            <a:r>
+              <a:rPr sz="1400" b="0">
+                <a:solidFill>
+                  <a:srgbClr val="FFFFFF"/>
+                </a:solidFill>
+                <a:latin typeface="Play"/>
+                <a:ea typeface="Play"/>
+                <a:cs typeface="Play"/>
+              </a:rPr>
+              <a:t>Модель может выдумать цифры</a:t>
+            </a:r>
+          </a:p>
+        </p:txBody>
+      </p:sp>
+      <p:grpSp>
+        <p:nvGrpSpPr>
+          <p:cNvPr id="8" name="icon:builtin-layout"/>
+          <p:cNvGrpSpPr/>
+          <p:nvPr/>
+        </p:nvGrpSpPr>
+        <p:grpSpPr>
+          <a:xfrm>
+            <a:off x="8591068" y="2568902"/>
+            <a:ext cx="825627" cy="825627"/>
+            <a:chOff x="8591068" y="2568902"/>
+            <a:chExt cx="825627" cy="825627"/>
+          </a:xfrm>
+        </p:grpSpPr>
+        <p:sp>
+          <p:nvSpPr>
+            <p:cNvPr id="9" name="Rounded Rectangle 8"/>
+            <p:cNvSpPr/>
+            <p:nvPr/>
+          </p:nvSpPr>
+          <p:spPr>
+            <a:xfrm>
+              <a:off x="8591068" y="2568902"/>
+              <a:ext cx="825627" cy="825627"/>
+            </a:xfrm>
+            <a:prstGeom prst="roundRect">
+              <a:avLst>
+                <a:gd name="adj" fmla="val 11111"/>
+              </a:avLst>
+            </a:prstGeom>
+            <a:noFill/>
+            <a:ln w="91736" cap="rnd">
+              <a:solidFill>
+                <a:srgbClr val="0077FF"/>
+              </a:solidFill>
+              <a:round/>
+            </a:ln>
+            <a:effectLst/>
+          </p:spPr>
+          <p:style>
+            <a:lnRef idx="1">
+              <a:schemeClr val="accent1"/>
+            </a:lnRef>
+            <a:fillRef idx="3">
+              <a:schemeClr val="accent1"/>
+            </a:fillRef>
+            <a:effectRef idx="2">
+              <a:schemeClr val="accent1"/>
+            </a:effectRef>
+            <a:fontRef idx="minor">
+              <a:schemeClr val="lt1"/>
+            </a:fontRef>
+          </p:style>
+          <p:txBody>
+            <a:bodyPr rtlCol="0" anchor="ctr"/>
+            <a:lstStyle/>
+            <a:p>
+              <a:pPr algn="ctr"/>
+            </a:p>
+          </p:txBody>
+        </p:sp>
+        <p:sp>
+          <p:nvSpPr>
+            <p:cNvPr id="10" name="Freeform 9"/>
+            <p:cNvSpPr/>
+            <p:nvPr/>
+          </p:nvSpPr>
+          <p:spPr>
+            <a:xfrm>
+              <a:off x="8591068" y="2844111"/>
+              <a:ext cx="825627" cy="0"/>
+            </a:xfrm>
+            <a:custGeom>
+              <a:avLst/>
+              <a:gdLst/>
+              <a:ahLst/>
+              <a:cxnLst/>
+              <a:rect l="l" t="t" r="r" b="b"/>
+              <a:pathLst>
+                <a:path w="825627" h="0">
+                  <a:moveTo>
+                    <a:pt x="0" y="0"/>
+                  </a:moveTo>
+                  <a:lnTo>
+                    <a:pt x="825627" y="0"/>
+                  </a:lnTo>
+                </a:path>
+              </a:pathLst>
+            </a:custGeom>
+            <a:noFill/>
+            <a:ln w="91736" cap="rnd">
+              <a:solidFill>
+                <a:srgbClr val="0077FF"/>
+              </a:solidFill>
+              <a:round/>
+            </a:ln>
+            <a:effectLst/>
+          </p:spPr>
+          <p:style>
+            <a:lnRef idx="1">
+              <a:schemeClr val="accent1"/>
+            </a:lnRef>
+            <a:fillRef idx="3">
+              <a:schemeClr val="accent1"/>
+            </a:fillRef>
+            <a:effectRef idx="2">
+              <a:schemeClr val="accent1"/>
+            </a:effectRef>
+            <a:fontRef idx="minor">
+              <a:schemeClr val="lt1"/>
+            </a:fontRef>
+          </p:style>
+          <p:txBody>
+            <a:bodyPr rtlCol="0" anchor="ctr"/>
+            <a:lstStyle/>
+            <a:p>
+              <a:pPr algn="ctr"/>
+            </a:p>
+          </p:txBody>
+        </p:sp>
+        <p:sp>
+          <p:nvSpPr>
+            <p:cNvPr id="11" name="Freeform 10"/>
+            <p:cNvSpPr/>
+            <p:nvPr/>
+          </p:nvSpPr>
+          <p:spPr>
+            <a:xfrm>
+              <a:off x="8866277" y="2844111"/>
+              <a:ext cx="0" cy="550418"/>
+            </a:xfrm>
+            <a:custGeom>
+              <a:avLst/>
+              <a:gdLst/>
+              <a:ahLst/>
+              <a:cxnLst/>
+              <a:rect l="l" t="t" r="r" b="b"/>
+              <a:pathLst>
+                <a:path w="0" h="550418">
+                  <a:moveTo>
+                    <a:pt x="0" y="0"/>
+                  </a:moveTo>
+                  <a:lnTo>
+                    <a:pt x="0" y="550418"/>
+                  </a:lnTo>
+                </a:path>
+              </a:pathLst>
+            </a:custGeom>
+            <a:noFill/>
+            <a:ln w="91736" cap="rnd">
+              <a:solidFill>
+                <a:srgbClr val="0077FF"/>
+              </a:solidFill>
+              <a:round/>
+            </a:ln>
+            <a:effectLst/>
+          </p:spPr>
+          <p:style>
+            <a:lnRef idx="1">
+              <a:schemeClr val="accent1"/>
+            </a:lnRef>
+            <a:fillRef idx="3">
+              <a:schemeClr val="accent1"/>
+            </a:fillRef>
+            <a:effectRef idx="2">
+              <a:schemeClr val="accent1"/>
+            </a:effectRef>
+            <a:fontRef idx="minor">
+              <a:schemeClr val="lt1"/>
+            </a:fontRef>
+          </p:style>
+          <p:txBody>
+            <a:bodyPr rtlCol="0" anchor="ctr"/>
+            <a:lstStyle/>
+            <a:p>
+              <a:pPr algn="ctr"/>
+            </a:p>
+          </p:txBody>
+        </p:sp>
+      </p:grpSp>
+      <p:sp>
+        <p:nvSpPr>
+          <p:cNvPr id="12" name="TextBox 11"/>
+          <p:cNvSpPr txBox="1"/>
+          <p:nvPr/>
+        </p:nvSpPr>
+        <p:spPr>
+          <a:xfrm>
+            <a:off x="8116111" y="3740129"/>
+            <a:ext cx="1775542" cy="2157749"/>
+          </a:xfrm>
+          <a:prstGeom prst="rect">
+            <a:avLst/>
+          </a:prstGeom>
+          <a:noFill/>
+        </p:spPr>
+        <p:txBody>
+          <a:bodyPr wrap="square" lIns="12700" rIns="12700" tIns="12700" bIns="12700">
+            <a:spAutoFit/>
+          </a:bodyPr>
+          <a:lstStyle/>
+          <a:p>
+            <a:pPr algn="ctr">
+              <a:defRPr sz="1400" b="0">
+                <a:solidFill>
+                  <a:srgbClr val="FFFFFF"/>
+                </a:solidFill>
+                <a:latin typeface="Play"/>
+                <a:ea typeface="Play"/>
+                <a:cs typeface="Play"/>
+              </a:defRPr>
+            </a:pPr>
+            <a:r>
+              <a:rPr sz="1400" b="0">
+                <a:solidFill>
+                  <a:srgbClr val="FFFFFF"/>
+                </a:solidFill>
+                <a:latin typeface="Play"/>
+                <a:ea typeface="Play"/>
+                <a:cs typeface="Play"/>
+              </a:rPr>
+              <a:t>Неправильный шаблон</a:t>
+            </a:r>
+          </a:p>
+        </p:txBody>
+      </p:sp>
+      <p:grpSp>
+        <p:nvGrpSpPr>
+          <p:cNvPr id="13" name="icon:builtin-target"/>
+          <p:cNvGrpSpPr/>
+          <p:nvPr/>
+        </p:nvGrpSpPr>
+        <p:grpSpPr>
+          <a:xfrm>
+            <a:off x="10439578" y="2568902"/>
+            <a:ext cx="825627" cy="825627"/>
+            <a:chOff x="10439578" y="2568902"/>
+            <a:chExt cx="825627" cy="825627"/>
+          </a:xfrm>
+        </p:grpSpPr>
+        <p:sp>
+          <p:nvSpPr>
+            <p:cNvPr id="14" name="Oval 13"/>
+            <p:cNvSpPr/>
+            <p:nvPr/>
+          </p:nvSpPr>
+          <p:spPr>
+            <a:xfrm>
+              <a:off x="10439578" y="2568902"/>
+              <a:ext cx="825627" cy="825627"/>
+            </a:xfrm>
+            <a:prstGeom prst="ellipse">
+              <a:avLst/>
+            </a:prstGeom>
+            <a:noFill/>
+            <a:ln w="91736" cap="rnd">
+              <a:solidFill>
+                <a:srgbClr val="0077FF"/>
+              </a:solidFill>
+              <a:round/>
+            </a:ln>
+            <a:effectLst/>
+          </p:spPr>
+          <p:style>
+            <a:lnRef idx="1">
+              <a:schemeClr val="accent1"/>
+            </a:lnRef>
+            <a:fillRef idx="3">
+              <a:schemeClr val="accent1"/>
+            </a:fillRef>
+            <a:effectRef idx="2">
+              <a:schemeClr val="accent1"/>
+            </a:effectRef>
+            <a:fontRef idx="minor">
+              <a:schemeClr val="lt1"/>
+            </a:fontRef>
+          </p:style>
+          <p:txBody>
+            <a:bodyPr rtlCol="0" anchor="ctr"/>
+            <a:lstStyle/>
+            <a:p>
+              <a:pPr algn="ctr"/>
+            </a:p>
+          </p:txBody>
+        </p:sp>
+        <p:sp>
+          <p:nvSpPr>
+            <p:cNvPr id="15" name="Oval 14"/>
+            <p:cNvSpPr/>
+            <p:nvPr/>
+          </p:nvSpPr>
+          <p:spPr>
+            <a:xfrm>
+              <a:off x="10623051" y="2752375"/>
+              <a:ext cx="458681" cy="458681"/>
+            </a:xfrm>
+            <a:prstGeom prst="ellipse">
+              <a:avLst/>
+            </a:prstGeom>
+            <a:noFill/>
+            <a:ln w="91736" cap="rnd">
+              <a:solidFill>
+                <a:srgbClr val="0077FF"/>
+              </a:solidFill>
+              <a:round/>
+            </a:ln>
+            <a:effectLst/>
+          </p:spPr>
+          <p:style>
+            <a:lnRef idx="1">
+              <a:schemeClr val="accent1"/>
+            </a:lnRef>
+            <a:fillRef idx="3">
+              <a:schemeClr val="accent1"/>
+            </a:fillRef>
+            <a:effectRef idx="2">
+              <a:schemeClr val="accent1"/>
+            </a:effectRef>
+            <a:fontRef idx="minor">
+              <a:schemeClr val="lt1"/>
+            </a:fontRef>
+          </p:style>
+          <p:txBody>
+            <a:bodyPr rtlCol="0" anchor="ctr"/>
+            <a:lstStyle/>
+            <a:p>
+              <a:pPr algn="ctr"/>
+            </a:p>
+          </p:txBody>
+        </p:sp>
+        <p:sp>
+          <p:nvSpPr>
+            <p:cNvPr id="16" name="Oval 15"/>
+            <p:cNvSpPr/>
+            <p:nvPr/>
+          </p:nvSpPr>
+          <p:spPr>
+            <a:xfrm>
+              <a:off x="10788176" y="2917500"/>
+              <a:ext cx="128430" cy="128430"/>
+            </a:xfrm>
+            <a:prstGeom prst="ellipse">
+              <a:avLst/>
+            </a:prstGeom>
+            <a:solidFill>
+              <a:srgbClr val="0077FF"/>
+            </a:solidFill>
+            <a:ln>
+              <a:noFill/>
+            </a:ln>
+            <a:effectLst/>
+          </p:spPr>
+          <p:style>
+            <a:lnRef idx="1">
+              <a:schemeClr val="accent1"/>
+            </a:lnRef>
+            <a:fillRef idx="3">
+              <a:schemeClr val="accent1"/>
+            </a:fillRef>
+            <a:effectRef idx="2">
+              <a:schemeClr val="accent1"/>
+            </a:effectRef>
+            <a:fontRef idx="minor">
+              <a:schemeClr val="lt1"/>
+            </a:fontRef>
+          </p:style>
+          <p:txBody>
+            <a:bodyPr rtlCol="0" anchor="ctr"/>
+            <a:lstStyle/>
+            <a:p>
+              <a:pPr algn="ctr"/>
+            </a:p>
+          </p:txBody>
+        </p:sp>
+      </p:grpSp>
+      <p:sp>
+        <p:nvSpPr>
+          <p:cNvPr id="17" name="TextBox 16"/>
+          <p:cNvSpPr txBox="1"/>
+          <p:nvPr/>
+        </p:nvSpPr>
+        <p:spPr>
+          <a:xfrm>
+            <a:off x="9964621" y="3740129"/>
+            <a:ext cx="1775542" cy="2157749"/>
+          </a:xfrm>
+          <a:prstGeom prst="rect">
+            <a:avLst/>
+          </a:prstGeom>
+          <a:noFill/>
+        </p:spPr>
+        <p:txBody>
+          <a:bodyPr wrap="square" lIns="12700" rIns="12700" tIns="12700" bIns="12700">
+            <a:spAutoFit/>
+          </a:bodyPr>
+          <a:lstStyle/>
+          <a:p>
+            <a:pPr algn="ctr">
+              <a:defRPr sz="1400" b="0">
+                <a:solidFill>
+                  <a:srgbClr val="FFFFFF"/>
+                </a:solidFill>
+                <a:latin typeface="Play"/>
+                <a:ea typeface="Play"/>
+                <a:cs typeface="Play"/>
+              </a:defRPr>
+            </a:pPr>
+            <a:r>
+              <a:rPr sz="1400" b="0">
+                <a:solidFill>
+                  <a:srgbClr val="FFFFFF"/>
+                </a:solidFill>
+                <a:latin typeface="Play"/>
+                <a:ea typeface="Play"/>
+                <a:cs typeface="Play"/>
+              </a:rPr>
+              <a:t>Нагрузка &gt;20 задач</a:t>
+            </a:r>
+          </a:p>
+        </p:txBody>
+      </p:sp>
+    </p:spTree>
+  </p:cSld>
+  <p:clrMapOvr>
+    <a:masterClrMapping/>
+  </p:clrMapOvr>
+</p:sld>
+</file>
+
+<file path=ppt/slides/slide38.xml><?xml version="1.0" encoding="utf-8"?>
+<p:sld xmlns:a="http://schemas.openxmlformats.org/drawingml/2006/main" xmlns:p="http://schemas.openxmlformats.org/presentationml/2006/main" xmlns:r="http://schemas.openxmlformats.org/officeDocument/2006/relationships">
+  <p:cSld>
+    <p:spTree>
+      <p:nvGrpSpPr>
+        <p:cNvPr id="1" name=""/>
+        <p:cNvGrpSpPr/>
+        <p:nvPr/>
+      </p:nvGrpSpPr>
+      <p:grpSpPr/>
+      <p:sp>
+        <p:nvSpPr>
+          <p:cNvPr id="2" name="title"/>
+          <p:cNvSpPr txBox="1"/>
+          <p:nvPr/>
+        </p:nvSpPr>
+        <p:spPr>
+          <a:xfrm>
+            <a:off x="429280" y="424715"/>
+            <a:ext cx="7827264" cy="822960"/>
+          </a:xfrm>
+          <a:prstGeom prst="rect">
+            <a:avLst/>
+          </a:prstGeom>
+          <a:noFill/>
+        </p:spPr>
+        <p:txBody>
+          <a:bodyPr wrap="square" lIns="76200" rIns="76200" tIns="50800" bIns="50800">
+            <a:spAutoFit/>
+          </a:bodyPr>
+          <a:lstStyle/>
+          <a:p>
+            <a:pPr algn="l">
+              <a:spcAft>
+                <a:spcPts val="300"/>
+              </a:spcAft>
+              <a:defRPr sz="3200">
+                <a:solidFill>
+                  <a:srgbClr val="FFFFFF"/>
+                </a:solidFill>
+                <a:latin typeface="Play"/>
+                <a:ea typeface="Play"/>
+                <a:cs typeface="Play"/>
+              </a:defRPr>
+            </a:pPr>
+            <a:r>
+              <a:rPr sz="3200">
+                <a:solidFill>
+                  <a:srgbClr val="FFFFFF"/>
+                </a:solidFill>
+                <a:latin typeface="Play"/>
+                <a:ea typeface="Play"/>
+                <a:cs typeface="Play"/>
+              </a:rPr>
+              <a:t>Итоги</a:t>
             </a:r>
           </a:p>
         </p:txBody>
       </p:sp>
       <p:sp>
         <p:nvSpPr>
-          <p:cNvPr id="4" name="Rectangle 3"/>
+          <p:cNvPr id="3" name="stat_0:bar"/>
           <p:cNvSpPr/>
           <p:nvPr/>
         </p:nvSpPr>
         <p:spPr>
           <a:xfrm>
-            <a:off x="6267602" y="3390812"/>
-            <a:ext cx="5472562" cy="112607"/>
+            <a:off x="429280" y="1906524"/>
+            <a:ext cx="50800" cy="1627886"/>
           </a:xfrm>
           <a:prstGeom prst="rect">
             <a:avLst/>
@@ -12034,6 +13958,7 @@
           <a:ln>
             <a:noFill/>
           </a:ln>
+          <a:effectLst/>
         </p:spPr>
         <p:style>
           <a:lnRef idx="1">
@@ -12059,16 +13984,94 @@
       </p:sp>
       <p:sp>
         <p:nvSpPr>
-          <p:cNvPr id="5" name="Oval 4"/>
+          <p:cNvPr id="4" name="stat_0"/>
+          <p:cNvSpPr txBox="1"/>
+          <p:nvPr/>
+        </p:nvSpPr>
+        <p:spPr>
+          <a:xfrm>
+            <a:off x="607080" y="1783080"/>
+            <a:ext cx="5251424" cy="1751330"/>
+          </a:xfrm>
+          <a:prstGeom prst="rect">
+            <a:avLst/>
+          </a:prstGeom>
+          <a:noFill/>
+        </p:spPr>
+        <p:txBody>
+          <a:bodyPr wrap="square" lIns="76200" rIns="76200" tIns="0" bIns="0">
+            <a:spAutoFit/>
+          </a:bodyPr>
+          <a:lstStyle/>
+          <a:p>
+            <a:pPr>
+              <a:lnSpc>
+                <a:spcPct val="100000"/>
+              </a:lnSpc>
+              <a:spcAft>
+                <a:spcPts val="200"/>
+              </a:spcAft>
+              <a:defRPr sz="5400" b="1">
+                <a:solidFill>
+                  <a:srgbClr val="0077FF"/>
+                </a:solidFill>
+                <a:latin typeface="Play"/>
+                <a:ea typeface="Play"/>
+                <a:cs typeface="Play"/>
+              </a:defRPr>
+            </a:pPr>
+            <a:r>
+              <a:rPr sz="5400" b="1">
+                <a:solidFill>
+                  <a:srgbClr val="0077FF"/>
+                </a:solidFill>
+                <a:latin typeface="Play"/>
+                <a:ea typeface="Play"/>
+                <a:cs typeface="Play"/>
+              </a:rPr>
+              <a:t>4 мин</a:t>
+            </a:r>
+          </a:p>
+          <a:p>
+            <a:pPr>
+              <a:spcAft>
+                <a:spcPts val="300"/>
+              </a:spcAft>
+              <a:defRPr sz="2400" b="0">
+                <a:solidFill>
+                  <a:srgbClr val="FFFFFF"/>
+                </a:solidFill>
+                <a:latin typeface="Play"/>
+                <a:ea typeface="Play"/>
+                <a:cs typeface="Play"/>
+              </a:defRPr>
+            </a:pPr>
+            <a:r>
+              <a:rPr sz="2400" b="0">
+                <a:solidFill>
+                  <a:srgbClr val="FFFFFF"/>
+                </a:solidFill>
+                <a:latin typeface="Play"/>
+                <a:ea typeface="Play"/>
+                <a:cs typeface="Play"/>
+              </a:rPr>
+              <a:t>Время сборки сократилось с 186 до 4 минут</a:t>
+            </a:r>
+          </a:p>
+        </p:txBody>
+      </p:sp>
+      <p:sp>
+        <p:nvSpPr>
+          <p:cNvPr id="5" name="stat_1:bar"/>
           <p:cNvSpPr/>
           <p:nvPr/>
         </p:nvSpPr>
         <p:spPr>
           <a:xfrm>
-            <a:off x="6906067" y="3173488"/>
-            <a:ext cx="547256" cy="547256"/>
+            <a:off x="6310940" y="1906524"/>
+            <a:ext cx="50800" cy="1627886"/>
           </a:xfrm>
-          <a:prstGeom prst="ellipse">
+          <a:prstGeom prst="rect">
             <a:avLst/>
           </a:prstGeom>
           <a:solidFill>
@@ -12077,6 +14080,7 @@
           <a:ln>
             <a:noFill/>
           </a:ln>
+          <a:effectLst/>
         </p:spPr>
         <p:style>
           <a:lnRef idx="1">
@@ -12102,14 +14106,14 @@
       </p:sp>
       <p:sp>
         <p:nvSpPr>
-          <p:cNvPr id="6" name="TextBox 5"/>
+          <p:cNvPr id="6" name="stat_1"/>
           <p:cNvSpPr txBox="1"/>
           <p:nvPr/>
         </p:nvSpPr>
         <p:spPr>
           <a:xfrm>
-            <a:off x="6267602" y="1664162"/>
-            <a:ext cx="2736281" cy="1426363"/>
+            <a:off x="6488740" y="1783080"/>
+            <a:ext cx="5251424" cy="1751330"/>
           </a:xfrm>
           <a:prstGeom prst="rect">
             <a:avLst/>
@@ -12117,15 +14121,21 @@
           <a:noFill/>
         </p:spPr>
         <p:txBody>
-          <a:bodyPr wrap="square" lIns="12700" rIns="12700" tIns="12700" bIns="12700">
+          <a:bodyPr wrap="square" lIns="76200" rIns="76200" tIns="0" bIns="0">
             <a:spAutoFit/>
           </a:bodyPr>
           <a:lstStyle/>
           <a:p>
-            <a:pPr algn="ctr">
-              <a:defRPr sz="1400" b="0">
-                <a:solidFill>
-                  <a:srgbClr val="FFFFFF"/>
+            <a:pPr>
+              <a:lnSpc>
+                <a:spcPct val="100000"/>
+              </a:lnSpc>
+              <a:spcAft>
+                <a:spcPts val="200"/>
+              </a:spcAft>
+              <a:defRPr sz="5400" b="1">
+                <a:solidFill>
+                  <a:srgbClr val="0077FF"/>
                 </a:solidFill>
                 <a:latin typeface="Play"/>
                 <a:ea typeface="Play"/>
@@ -12133,31 +14143,57 @@
               </a:defRPr>
             </a:pPr>
             <a:r>
-              <a:rPr sz="1400" b="0">
-                <a:solidFill>
-                  <a:srgbClr val="FFFFFF"/>
+              <a:rPr sz="5400" b="1">
+                <a:solidFill>
+                  <a:srgbClr val="0077FF"/>
                 </a:solidFill>
                 <a:latin typeface="Play"/>
                 <a:ea typeface="Play"/>
                 <a:cs typeface="Play"/>
               </a:rPr>
-              <a:t>Подключение 4 команд</a:t>
+              <a:t>1 день</a:t>
+            </a:r>
+          </a:p>
+          <a:p>
+            <a:pPr>
+              <a:spcAft>
+                <a:spcPts val="300"/>
+              </a:spcAft>
+              <a:defRPr sz="2400" b="0">
+                <a:solidFill>
+                  <a:srgbClr val="FFFFFF"/>
+                </a:solidFill>
+                <a:latin typeface="Play"/>
+                <a:ea typeface="Play"/>
+                <a:cs typeface="Play"/>
+              </a:defRPr>
+            </a:pPr>
+            <a:r>
+              <a:rPr sz="2400" b="0">
+                <a:solidFill>
+                  <a:srgbClr val="FFFFFF"/>
+                </a:solidFill>
+                <a:latin typeface="Play"/>
+                <a:ea typeface="Play"/>
+                <a:cs typeface="Play"/>
+              </a:rPr>
+              <a:t>Первый вариант появился за 1 день вместо 6</a:t>
             </a:r>
           </a:p>
         </p:txBody>
       </p:sp>
       <p:sp>
         <p:nvSpPr>
-          <p:cNvPr id="7" name="Oval 6"/>
+          <p:cNvPr id="7" name="stat_2:bar"/>
           <p:cNvSpPr/>
           <p:nvPr/>
         </p:nvSpPr>
         <p:spPr>
           <a:xfrm>
-            <a:off x="8730254" y="3173488"/>
-            <a:ext cx="547256" cy="547256"/>
+            <a:off x="429280" y="4101083"/>
+            <a:ext cx="50800" cy="1627886"/>
           </a:xfrm>
-          <a:prstGeom prst="ellipse">
+          <a:prstGeom prst="rect">
             <a:avLst/>
           </a:prstGeom>
           <a:solidFill>
@@ -12166,6 +14202,7 @@
           <a:ln>
             <a:noFill/>
           </a:ln>
+          <a:effectLst/>
         </p:spPr>
         <p:style>
           <a:lnRef idx="1">
@@ -12191,14 +14228,14 @@
       </p:sp>
       <p:sp>
         <p:nvSpPr>
-          <p:cNvPr id="8" name="TextBox 7"/>
+          <p:cNvPr id="8" name="stat_2"/>
           <p:cNvSpPr txBox="1"/>
           <p:nvPr/>
         </p:nvSpPr>
         <p:spPr>
           <a:xfrm>
-            <a:off x="7635742" y="3938069"/>
-            <a:ext cx="2736281" cy="1426363"/>
+            <a:off x="607080" y="3977640"/>
+            <a:ext cx="5251424" cy="1751330"/>
           </a:xfrm>
           <a:prstGeom prst="rect">
             <a:avLst/>
@@ -12206,15 +14243,21 @@
           <a:noFill/>
         </p:spPr>
         <p:txBody>
-          <a:bodyPr wrap="square" lIns="12700" rIns="12700" tIns="12700" bIns="12700">
+          <a:bodyPr wrap="square" lIns="76200" rIns="76200" tIns="0" bIns="0">
             <a:spAutoFit/>
           </a:bodyPr>
           <a:lstStyle/>
           <a:p>
-            <a:pPr algn="ctr">
-              <a:defRPr sz="1400" b="0">
-                <a:solidFill>
-                  <a:srgbClr val="FFFFFF"/>
+            <a:pPr>
+              <a:lnSpc>
+                <a:spcPct val="100000"/>
+              </a:lnSpc>
+              <a:spcAft>
+                <a:spcPts val="200"/>
+              </a:spcAft>
+              <a:defRPr sz="5400" b="1">
+                <a:solidFill>
+                  <a:srgbClr val="0077FF"/>
                 </a:solidFill>
                 <a:latin typeface="Play"/>
                 <a:ea typeface="Play"/>
@@ -12222,31 +14265,57 @@
               </a:defRPr>
             </a:pPr>
             <a:r>
-              <a:rPr sz="1400" b="0">
-                <a:solidFill>
-                  <a:srgbClr val="FFFFFF"/>
+              <a:rPr sz="5400" b="1">
+                <a:solidFill>
+                  <a:srgbClr val="0077FF"/>
                 </a:solidFill>
                 <a:latin typeface="Play"/>
                 <a:ea typeface="Play"/>
                 <a:cs typeface="Play"/>
               </a:rPr>
-              <a:t>Доступ для всей компании</a:t>
+              <a:t>2 из 68</a:t>
+            </a:r>
+          </a:p>
+          <a:p>
+            <a:pPr>
+              <a:spcAft>
+                <a:spcPts val="300"/>
+              </a:spcAft>
+              <a:defRPr sz="2400" b="0">
+                <a:solidFill>
+                  <a:srgbClr val="FFFFFF"/>
+                </a:solidFill>
+                <a:latin typeface="Play"/>
+                <a:ea typeface="Play"/>
+                <a:cs typeface="Play"/>
+              </a:defRPr>
+            </a:pPr>
+            <a:r>
+              <a:rPr sz="2400" b="0">
+                <a:solidFill>
+                  <a:srgbClr val="FFFFFF"/>
+                </a:solidFill>
+                <a:latin typeface="Play"/>
+                <a:ea typeface="Play"/>
+                <a:cs typeface="Play"/>
+              </a:rPr>
+              <a:t>Нарушения стиля уменьшились до 2 из 68</a:t>
             </a:r>
           </a:p>
         </p:txBody>
       </p:sp>
       <p:sp>
         <p:nvSpPr>
-          <p:cNvPr id="9" name="Oval 8"/>
+          <p:cNvPr id="9" name="stat_3:bar"/>
           <p:cNvSpPr/>
           <p:nvPr/>
         </p:nvSpPr>
         <p:spPr>
           <a:xfrm>
-            <a:off x="10554442" y="3173488"/>
-            <a:ext cx="547256" cy="547256"/>
+            <a:off x="6310940" y="4101083"/>
+            <a:ext cx="50800" cy="1627886"/>
           </a:xfrm>
-          <a:prstGeom prst="ellipse">
+          <a:prstGeom prst="rect">
             <a:avLst/>
           </a:prstGeom>
           <a:solidFill>
@@ -12255,6 +14324,7 @@
           <a:ln>
             <a:noFill/>
           </a:ln>
+          <a:effectLst/>
         </p:spPr>
         <p:style>
           <a:lnRef idx="1">
@@ -12280,14 +14350,14 @@
       </p:sp>
       <p:sp>
         <p:nvSpPr>
-          <p:cNvPr id="10" name="TextBox 9"/>
+          <p:cNvPr id="10" name="stat_3"/>
           <p:cNvSpPr txBox="1"/>
           <p:nvPr/>
         </p:nvSpPr>
         <p:spPr>
           <a:xfrm>
-            <a:off x="9003883" y="1664162"/>
-            <a:ext cx="2736281" cy="1426363"/>
+            <a:off x="6488740" y="3977640"/>
+            <a:ext cx="5251424" cy="1751330"/>
           </a:xfrm>
           <a:prstGeom prst="rect">
             <a:avLst/>
@@ -12295,15 +14365,21 @@
           <a:noFill/>
         </p:spPr>
         <p:txBody>
-          <a:bodyPr wrap="square" lIns="12700" rIns="12700" tIns="12700" bIns="12700">
+          <a:bodyPr wrap="square" lIns="76200" rIns="76200" tIns="0" bIns="0">
             <a:spAutoFit/>
           </a:bodyPr>
           <a:lstStyle/>
           <a:p>
-            <a:pPr algn="ctr">
-              <a:defRPr sz="1400" b="0">
-                <a:solidFill>
-                  <a:srgbClr val="FFFFFF"/>
+            <a:pPr>
+              <a:lnSpc>
+                <a:spcPct val="100000"/>
+              </a:lnSpc>
+              <a:spcAft>
+                <a:spcPts val="200"/>
+              </a:spcAft>
+              <a:defRPr sz="5400" b="1">
+                <a:solidFill>
+                  <a:srgbClr val="0077FF"/>
                 </a:solidFill>
                 <a:latin typeface="Play"/>
                 <a:ea typeface="Play"/>
@@ -12311,15 +14387,41 @@
               </a:defRPr>
             </a:pPr>
             <a:r>
-              <a:rPr sz="1400" b="0">
-                <a:solidFill>
-                  <a:srgbClr val="FFFFFF"/>
+              <a:rPr sz="5400" b="1">
+                <a:solidFill>
+                  <a:srgbClr val="0077FF"/>
                 </a:solidFill>
                 <a:latin typeface="Play"/>
                 <a:ea typeface="Play"/>
                 <a:cs typeface="Play"/>
               </a:rPr>
-              <a:t>Генерация иллюстраций</a:t>
+              <a:t>38</a:t>
+            </a:r>
+          </a:p>
+          <a:p>
+            <a:pPr>
+              <a:spcAft>
+                <a:spcPts val="300"/>
+              </a:spcAft>
+              <a:defRPr sz="2400" b="0">
+                <a:solidFill>
+                  <a:srgbClr val="FFFFFF"/>
+                </a:solidFill>
+                <a:latin typeface="Play"/>
+                <a:ea typeface="Play"/>
+                <a:cs typeface="Play"/>
+              </a:defRPr>
+            </a:pPr>
+            <a:r>
+              <a:rPr sz="2400" b="0">
+                <a:solidFill>
+                  <a:srgbClr val="FFFFFF"/>
+                </a:solidFill>
+                <a:latin typeface="Play"/>
+                <a:ea typeface="Play"/>
+                <a:cs typeface="Play"/>
+              </a:rPr>
+              <a:t>Дизайнеры закрыли 38 запросов вместо 11 в неделю</a:t>
             </a:r>
           </a:p>
         </p:txBody>
@@ -12332,7 +14434,7 @@
 </p:sld>
 </file>
 
-<file path=ppt/slides/slide38.xml><?xml version="1.0" encoding="utf-8"?>
+<file path=ppt/slides/slide39.xml><?xml version="1.0" encoding="utf-8"?>
 <p:sld xmlns:a="http://schemas.openxmlformats.org/drawingml/2006/main" xmlns:p="http://schemas.openxmlformats.org/presentationml/2006/main" xmlns:r="http://schemas.openxmlformats.org/officeDocument/2006/relationships">
   <p:cSld>
     <p:spTree>
@@ -12415,7 +14517,7 @@
         <p:spPr>
           <a:xfrm>
             <a:off x="300817" y="297715"/>
-            <a:ext cx="11566347" cy="4022686"/>
+            <a:ext cx="11566347" cy="5727164"/>
           </a:xfrm>
           <a:prstGeom prst="roundRect">
             <a:avLst/>
@@ -12496,7 +14598,7 @@
                 <a:ea typeface="Play"/>
                 <a:cs typeface="Play"/>
               </a:rPr>
-              <a:t>Что мы просим решить</a:t>
+              <a:t>Следующие шаги</a:t>
             </a:r>
           </a:p>
         </p:txBody>
@@ -12509,8 +14611,8 @@
         </p:nvSpPr>
         <p:spPr>
           <a:xfrm>
-            <a:off x="427817" y="2704961"/>
-            <a:ext cx="11312347" cy="1488440"/>
+            <a:off x="427817" y="1783080"/>
+            <a:ext cx="5473293" cy="4114800"/>
           </a:xfrm>
           <a:prstGeom prst="rect">
             <a:avLst/>
@@ -12527,7 +14629,7 @@
               <a:spcAft>
                 <a:spcPts val="300"/>
               </a:spcAft>
-              <a:defRPr sz="2800">
+              <a:defRPr sz="1600">
                 <a:solidFill>
                   <a:srgbClr val="FFFFFF"/>
                 </a:solidFill>
@@ -12537,7 +14639,7 @@
               </a:defRPr>
             </a:pPr>
             <a:r>
-              <a:rPr sz="2800">
+              <a:rPr sz="1600">
                 <a:solidFill>
                   <a:srgbClr val="FFFFFF"/>
                 </a:solidFill>
@@ -12545,7 +14647,7 @@
                 <a:ea typeface="Play"/>
                 <a:cs typeface="Play"/>
               </a:rPr>
-              <a:t>• Запуск сервиса на всю компанию</a:t>
+              <a:t>• Согласовать бюджет и ресурсы</a:t>
             </a:r>
           </a:p>
           <a:p>
@@ -12553,7 +14655,7 @@
               <a:spcAft>
                 <a:spcPts val="300"/>
               </a:spcAft>
-              <a:defRPr sz="2800">
+              <a:defRPr sz="1600">
                 <a:solidFill>
                   <a:srgbClr val="FFFFFF"/>
                 </a:solidFill>
@@ -12563,7 +14665,7 @@
               </a:defRPr>
             </a:pPr>
             <a:r>
-              <a:rPr sz="2800">
+              <a:rPr sz="1600">
                 <a:solidFill>
                   <a:srgbClr val="FFFFFF"/>
                 </a:solidFill>
@@ -12571,7 +14673,7 @@
                 <a:ea typeface="Play"/>
                 <a:cs typeface="Play"/>
               </a:rPr>
-              <a:t>• Выделение бюджета на поддержку и развитие</a:t>
+              <a:t>• Интегрировать сервис с корпоративным хранилищем</a:t>
             </a:r>
           </a:p>
           <a:p>
@@ -12579,7 +14681,7 @@
               <a:spcAft>
                 <a:spcPts val="300"/>
               </a:spcAft>
-              <a:defRPr sz="2800">
+              <a:defRPr sz="1600">
                 <a:solidFill>
                   <a:srgbClr val="FFFFFF"/>
                 </a:solidFill>
@@ -12589,7 +14691,7 @@
               </a:defRPr>
             </a:pPr>
             <a:r>
-              <a:rPr sz="2800">
+              <a:rPr sz="1600">
                 <a:solidFill>
                   <a:srgbClr val="FFFFFF"/>
                 </a:solidFill>
@@ -12597,7 +14699,196 @@
                 <a:ea typeface="Play"/>
                 <a:cs typeface="Play"/>
               </a:rPr>
-              <a:t>• Поддержка интеграции с корпоративными системами</a:t>
+              <a:t>• Расширить команды до 8 в Q3 2026</a:t>
+            </a:r>
+          </a:p>
+        </p:txBody>
+      </p:sp>
+      <p:sp>
+        <p:nvSpPr>
+          <p:cNvPr id="683" name="Pentagon 682"/>
+          <p:cNvSpPr/>
+          <p:nvPr/>
+        </p:nvSpPr>
+        <p:spPr>
+          <a:xfrm>
+            <a:off x="6266870" y="1879092"/>
+            <a:ext cx="5473293" cy="1179576"/>
+          </a:xfrm>
+          <a:prstGeom prst="homePlate">
+            <a:avLst/>
+          </a:prstGeom>
+          <a:solidFill>
+            <a:srgbClr val="0077FF"/>
+          </a:solidFill>
+          <a:ln>
+            <a:noFill/>
+          </a:ln>
+        </p:spPr>
+        <p:style>
+          <a:lnRef idx="1">
+            <a:schemeClr val="accent1"/>
+          </a:lnRef>
+          <a:fillRef idx="3">
+            <a:schemeClr val="accent1"/>
+          </a:fillRef>
+          <a:effectRef idx="2">
+            <a:schemeClr val="accent1"/>
+          </a:effectRef>
+          <a:fontRef idx="minor">
+            <a:schemeClr val="lt1"/>
+          </a:fontRef>
+        </p:style>
+        <p:txBody>
+          <a:bodyPr rtlCol="0" anchor="ctr" wrap="square" lIns="12700" rIns="12700" tIns="12700" bIns="12700"/>
+          <a:lstStyle/>
+          <a:p>
+            <a:pPr algn="ctr">
+              <a:defRPr sz="1400" b="0">
+                <a:solidFill>
+                  <a:srgbClr val="FFFFFF"/>
+                </a:solidFill>
+                <a:latin typeface="Play"/>
+                <a:ea typeface="Play"/>
+                <a:cs typeface="Play"/>
+              </a:defRPr>
+            </a:pPr>
+            <a:r>
+              <a:rPr sz="1400" b="0">
+                <a:solidFill>
+                  <a:srgbClr val="FFFFFF"/>
+                </a:solidFill>
+                <a:latin typeface="Play"/>
+                <a:ea typeface="Play"/>
+                <a:cs typeface="Play"/>
+              </a:rPr>
+              <a:t>Согласовать бюджет</a:t>
+            </a:r>
+          </a:p>
+        </p:txBody>
+      </p:sp>
+      <p:sp>
+        <p:nvSpPr>
+          <p:cNvPr id="684" name="Chevron 683"/>
+          <p:cNvSpPr/>
+          <p:nvPr/>
+        </p:nvSpPr>
+        <p:spPr>
+          <a:xfrm>
+            <a:off x="6266870" y="3250692"/>
+            <a:ext cx="5473293" cy="1179576"/>
+          </a:xfrm>
+          <a:prstGeom prst="chevron">
+            <a:avLst/>
+          </a:prstGeom>
+          <a:solidFill>
+            <a:srgbClr val="0077FF"/>
+          </a:solidFill>
+          <a:ln>
+            <a:noFill/>
+          </a:ln>
+        </p:spPr>
+        <p:style>
+          <a:lnRef idx="1">
+            <a:schemeClr val="accent1"/>
+          </a:lnRef>
+          <a:fillRef idx="3">
+            <a:schemeClr val="accent1"/>
+          </a:fillRef>
+          <a:effectRef idx="2">
+            <a:schemeClr val="accent1"/>
+          </a:effectRef>
+          <a:fontRef idx="minor">
+            <a:schemeClr val="lt1"/>
+          </a:fontRef>
+        </p:style>
+        <p:txBody>
+          <a:bodyPr rtlCol="0" anchor="ctr" wrap="square" lIns="12700" rIns="12700" tIns="12700" bIns="12700"/>
+          <a:lstStyle/>
+          <a:p>
+            <a:pPr algn="ctr">
+              <a:defRPr sz="1400" b="0">
+                <a:solidFill>
+                  <a:srgbClr val="FFFFFF"/>
+                </a:solidFill>
+                <a:latin typeface="Play"/>
+                <a:ea typeface="Play"/>
+                <a:cs typeface="Play"/>
+              </a:defRPr>
+            </a:pPr>
+            <a:r>
+              <a:rPr sz="1400" b="0">
+                <a:solidFill>
+                  <a:srgbClr val="FFFFFF"/>
+                </a:solidFill>
+                <a:latin typeface="Play"/>
+                <a:ea typeface="Play"/>
+                <a:cs typeface="Play"/>
+              </a:rPr>
+              <a:t>Интеграция с хранилищем</a:t>
+            </a:r>
+          </a:p>
+        </p:txBody>
+      </p:sp>
+      <p:sp>
+        <p:nvSpPr>
+          <p:cNvPr id="685" name="Chevron 684"/>
+          <p:cNvSpPr/>
+          <p:nvPr/>
+        </p:nvSpPr>
+        <p:spPr>
+          <a:xfrm>
+            <a:off x="6266870" y="4622292"/>
+            <a:ext cx="5473293" cy="1179576"/>
+          </a:xfrm>
+          <a:prstGeom prst="chevron">
+            <a:avLst/>
+          </a:prstGeom>
+          <a:solidFill>
+            <a:srgbClr val="0077FF"/>
+          </a:solidFill>
+          <a:ln>
+            <a:noFill/>
+          </a:ln>
+        </p:spPr>
+        <p:style>
+          <a:lnRef idx="1">
+            <a:schemeClr val="accent1"/>
+          </a:lnRef>
+          <a:fillRef idx="3">
+            <a:schemeClr val="accent1"/>
+          </a:fillRef>
+          <a:effectRef idx="2">
+            <a:schemeClr val="accent1"/>
+          </a:effectRef>
+          <a:fontRef idx="minor">
+            <a:schemeClr val="lt1"/>
+          </a:fontRef>
+        </p:style>
+        <p:txBody>
+          <a:bodyPr rtlCol="0" anchor="ctr" wrap="square" lIns="12700" rIns="12700" tIns="12700" bIns="12700"/>
+          <a:lstStyle/>
+          <a:p>
+            <a:pPr algn="ctr">
+              <a:defRPr sz="1400" b="0">
+                <a:solidFill>
+                  <a:srgbClr val="FFFFFF"/>
+                </a:solidFill>
+                <a:latin typeface="Play"/>
+                <a:ea typeface="Play"/>
+                <a:cs typeface="Play"/>
+              </a:defRPr>
+            </a:pPr>
+            <a:r>
+              <a:rPr sz="1400" b="0">
+                <a:solidFill>
+                  <a:srgbClr val="FFFFFF"/>
+                </a:solidFill>
+                <a:latin typeface="Play"/>
+                <a:ea typeface="Play"/>
+                <a:cs typeface="Play"/>
+              </a:rPr>
+              <a:t>Расширить команды</a:t>
             </a:r>
           </a:p>
         </p:txBody>
@@ -12610,7 +14901,128 @@
 </p:sld>
 </file>
 
-<file path=ppt/slides/slide39.xml><?xml version="1.0" encoding="utf-8"?>
+<file path=ppt/slides/slide40.xml><?xml version="1.0" encoding="utf-8"?>
+<p:sld xmlns:a="http://schemas.openxmlformats.org/drawingml/2006/main" xmlns:p="http://schemas.openxmlformats.org/presentationml/2006/main" xmlns:r="http://schemas.openxmlformats.org/officeDocument/2006/relationships">
+  <p:cSld>
+    <p:spTree>
+      <p:nvGrpSpPr>
+        <p:cNvPr id="1" name=""/>
+        <p:cNvGrpSpPr/>
+        <p:nvPr/>
+      </p:nvGrpSpPr>
+      <p:grpSpPr/>
+      <p:pic>
+        <p:nvPicPr>
+          <p:cNvPr id="620" name="Google Shape;620;p28"/>
+          <p:cNvPicPr preferRelativeResize="0"/>
+          <p:nvPr/>
+        </p:nvPicPr>
+        <p:blipFill rotWithShape="1">
+          <a:blip r:embed="rId3">
+            <a:alphaModFix/>
+          </a:blip>
+          <a:srcRect b="0" l="0" r="0" t="0"/>
+          <a:stretch/>
+        </p:blipFill>
+        <p:spPr>
+          <a:xfrm>
+            <a:off x="398723" y="6160516"/>
+            <a:ext cx="1857481" cy="292671"/>
+          </a:xfrm>
+          <a:prstGeom prst="rect">
+            <a:avLst/>
+          </a:prstGeom>
+          <a:noFill/>
+          <a:ln>
+            <a:noFill/>
+          </a:ln>
+        </p:spPr>
+      </p:pic>
+      <p:pic>
+        <p:nvPicPr>
+          <p:cNvPr descr=" " id="621" name="Google Shape;621;p28"/>
+          <p:cNvPicPr preferRelativeResize="0"/>
+          <p:nvPr/>
+        </p:nvPicPr>
+        <p:blipFill rotWithShape="1">
+          <a:blip r:embed="rId4">
+            <a:alphaModFix/>
+          </a:blip>
+          <a:srcRect b="0" l="0" r="0" t="0"/>
+          <a:stretch/>
+        </p:blipFill>
+        <p:spPr>
+          <a:xfrm>
+            <a:off x="11093496" y="6238282"/>
+            <a:ext cx="690517" cy="216000"/>
+          </a:xfrm>
+          <a:prstGeom prst="rect">
+            <a:avLst/>
+          </a:prstGeom>
+          <a:noFill/>
+          <a:ln>
+            <a:noFill/>
+          </a:ln>
+        </p:spPr>
+      </p:pic>
+      <p:sp>
+        <p:nvSpPr>
+          <p:cNvPr id="622" name="title"/>
+          <p:cNvSpPr txBox="1"/>
+          <p:nvPr/>
+        </p:nvSpPr>
+        <p:spPr>
+          <a:xfrm>
+            <a:off x="429280" y="424715"/>
+            <a:ext cx="7827264" cy="822960"/>
+          </a:xfrm>
+          <a:prstGeom prst="rect">
+            <a:avLst/>
+          </a:prstGeom>
+          <a:noFill/>
+        </p:spPr>
+        <p:txBody>
+          <a:bodyPr wrap="square" lIns="76200" rIns="76200" tIns="50800" bIns="50800">
+            <a:spAutoFit/>
+          </a:bodyPr>
+          <a:lstStyle/>
+          <a:p>
+            <a:pPr algn="l">
+              <a:spcAft>
+                <a:spcPts val="300"/>
+              </a:spcAft>
+              <a:defRPr sz="3200">
+                <a:solidFill>
+                  <a:srgbClr val="FFFFFF"/>
+                </a:solidFill>
+                <a:latin typeface="Play"/>
+                <a:ea typeface="Play"/>
+                <a:cs typeface="Play"/>
+              </a:defRPr>
+            </a:pPr>
+            <a:r>
+              <a:rPr sz="3200">
+                <a:solidFill>
+                  <a:srgbClr val="FFFFFF"/>
+                </a:solidFill>
+                <a:latin typeface="Play"/>
+                <a:ea typeface="Play"/>
+                <a:cs typeface="Play"/>
+              </a:rPr>
+              <a:t>Вопросы и ответы</a:t>
+            </a:r>
+          </a:p>
+        </p:txBody>
+      </p:sp>
+    </p:spTree>
+  </p:cSld>
+  <p:clrMapOvr>
+    <a:masterClrMapping/>
+  </p:clrMapOvr>
+</p:sld>
+</file>
+
+<file path=ppt/slides/slide41.xml><?xml version="1.0" encoding="utf-8"?>
 <p:sld xmlns:a="http://schemas.openxmlformats.org/drawingml/2006/main" xmlns:p="http://schemas.openxmlformats.org/presentationml/2006/main" xmlns:r="http://schemas.openxmlformats.org/officeDocument/2006/relationships">
   <p:cSld>
     <p:spTree>
@@ -12731,7 +15143,7 @@
         <p:spPr>
           <a:xfrm>
             <a:off x="302280" y="2164394"/>
-            <a:ext cx="8081385" cy="1247140"/>
+            <a:ext cx="11564884" cy="2540741"/>
           </a:xfrm>
           <a:prstGeom prst="roundRect">
             <a:avLst/>
@@ -12777,7 +15189,7 @@
         <p:spPr>
           <a:xfrm>
             <a:off x="429280" y="2291394"/>
-            <a:ext cx="7827385" cy="1018540"/>
+            <a:ext cx="7827385" cy="822960"/>
           </a:xfrm>
           <a:prstGeom prst="rect">
             <a:avLst/>
@@ -12794,7 +15206,7 @@
               <a:spcAft>
                 <a:spcPts val="300"/>
               </a:spcAft>
-              <a:defRPr sz="5400">
+              <a:defRPr sz="4000">
                 <a:solidFill>
                   <a:srgbClr val="FFFFFF"/>
                 </a:solidFill>
@@ -12804,7 +15216,7 @@
               </a:defRPr>
             </a:pPr>
             <a:r>
-              <a:rPr sz="5400">
+              <a:rPr sz="4000">
                 <a:solidFill>
                   <a:srgbClr val="FFFFFF"/>
                 </a:solidFill>
@@ -12812,7 +15224,56 @@
                 <a:ea typeface="Play"/>
                 <a:cs typeface="Play"/>
               </a:rPr>
-              <a:t>Вопросы?</a:t>
+              <a:t>Контактная информация</a:t>
+            </a:r>
+          </a:p>
+        </p:txBody>
+      </p:sp>
+      <p:sp>
+        <p:nvSpPr>
+          <p:cNvPr id="886" name="body"/>
+          <p:cNvSpPr txBox="1"/>
+          <p:nvPr/>
+        </p:nvSpPr>
+        <p:spPr>
+          <a:xfrm>
+            <a:off x="429280" y="4014256"/>
+            <a:ext cx="11310884" cy="563880"/>
+          </a:xfrm>
+          <a:prstGeom prst="rect">
+            <a:avLst/>
+          </a:prstGeom>
+          <a:noFill/>
+        </p:spPr>
+        <p:txBody>
+          <a:bodyPr wrap="square" lIns="76200" rIns="76200" tIns="50800" bIns="50800">
+            <a:spAutoFit/>
+          </a:bodyPr>
+          <a:lstStyle/>
+          <a:p>
+            <a:pPr algn="ctr">
+              <a:spcAft>
+                <a:spcPts val="300"/>
+              </a:spcAft>
+              <a:defRPr sz="2800" b="1">
+                <a:solidFill>
+                  <a:srgbClr val="FFFFFF"/>
+                </a:solidFill>
+                <a:latin typeface="Play"/>
+                <a:ea typeface="Play"/>
+                <a:cs typeface="Play"/>
+              </a:defRPr>
+            </a:pPr>
+            <a:r>
+              <a:rPr sz="2800" b="1">
+                <a:solidFill>
+                  <a:srgbClr val="FFFFFF"/>
+                </a:solidFill>
+                <a:latin typeface="Play"/>
+                <a:ea typeface="Play"/>
+                <a:cs typeface="Play"/>
+              </a:rPr>
+              <a:t>Email: support@example.com</a:t>
             </a:r>
           </a:p>
         </p:txBody>

--- a/samples/VK_WorkSpace_Клиентская_конференция_Шабл__split.pptx
+++ b/samples/VK_WorkSpace_Клиентская_конференция_Шабл__split.pptx
@@ -286,6 +286,434 @@
     </p:ext>
   </p:extLst>
 </p:presentation>
+</file>
+
+<file path=ppt/charts/chart1.xml><?xml version="1.0" encoding="utf-8"?>
+<c:chartSpace xmlns:c="http://schemas.openxmlformats.org/drawingml/2006/chart" xmlns:a="http://schemas.openxmlformats.org/drawingml/2006/main" xmlns:r="http://schemas.openxmlformats.org/officeDocument/2006/relationships">
+  <c:date1904 val="0"/>
+  <c:chart>
+    <c:autoTitleDeleted val="1"/>
+    <c:plotArea>
+      <c:barChart>
+        <c:barDir val="col"/>
+        <c:grouping val="clustered"/>
+        <c:ser>
+          <c:idx val="0"/>
+          <c:order val="0"/>
+          <c:tx>
+            <c:strRef>
+              <c:f>Sheet1!$B$1</c:f>
+              <c:strCache>
+                <c:ptCount val="1"/>
+                <c:pt idx="0">
+                  <c:v>Время (мин)</c:v>
+                </c:pt>
+              </c:strCache>
+            </c:strRef>
+          </c:tx>
+          <c:spPr>
+            <a:solidFill>
+              <a:srgbClr val="0077FF"/>
+            </a:solidFill>
+            <a:ln>
+              <a:solidFill>
+                <a:srgbClr val="0077FF"/>
+              </a:solidFill>
+            </a:ln>
+          </c:spPr>
+          <c:cat>
+            <c:strRef>
+              <c:f>Sheet1!$A$2:$A$3</c:f>
+              <c:strCache>
+                <c:ptCount val="2"/>
+                <c:pt idx="0">
+                  <c:v>До</c:v>
+                </c:pt>
+                <c:pt idx="1">
+                  <c:v>После</c:v>
+                </c:pt>
+              </c:strCache>
+            </c:strRef>
+          </c:cat>
+          <c:val>
+            <c:numRef>
+              <c:f>Sheet1!$B$2:$B$3</c:f>
+              <c:numCache>
+                <c:formatCode>General</c:formatCode>
+                <c:ptCount val="2"/>
+                <c:pt idx="0">
+                  <c:v>186.0</c:v>
+                </c:pt>
+                <c:pt idx="1">
+                  <c:v>4.0</c:v>
+                </c:pt>
+              </c:numCache>
+            </c:numRef>
+          </c:val>
+        </c:ser>
+        <c:dLbls>
+          <c:numFmt formatCode="0&quot; мин&quot;" sourceLinked="0"/>
+          <c:txPr>
+            <a:bodyPr wrap="none"/>
+            <a:lstStyle/>
+            <a:p>
+              <a:pPr>
+                <a:defRPr sz="1100" b="0">
+                  <a:solidFill>
+                    <a:srgbClr val="FFFFFF"/>
+                  </a:solidFill>
+                  <a:latin typeface="Play"/>
+                  <a:ea typeface="Play"/>
+                  <a:cs typeface="Play"/>
+                </a:defRPr>
+              </a:pPr>
+            </a:p>
+          </c:txPr>
+          <c:dLblPos val="outEnd"/>
+          <c:showLegendKey val="0"/>
+          <c:showVal val="1"/>
+          <c:showCatName val="0"/>
+          <c:showSerName val="0"/>
+          <c:showPercent val="0"/>
+          <c:showBubbleSize val="0"/>
+          <c:showLeaderLines val="1"/>
+        </c:dLbls>
+        <c:gapWidth val="60"/>
+        <c:axId val="-2068027336"/>
+        <c:axId val="-2113994440"/>
+      </c:barChart>
+      <c:catAx>
+        <c:axId val="-2068027336"/>
+        <c:scaling>
+          <c:orientation val="minMax"/>
+        </c:scaling>
+        <c:delete val="0"/>
+        <c:axPos val="b"/>
+        <c:majorTickMark val="out"/>
+        <c:minorTickMark val="none"/>
+        <c:tickLblPos val="nextTo"/>
+        <c:txPr>
+          <a:bodyPr/>
+          <a:lstStyle/>
+          <a:p>
+            <a:pPr>
+              <a:defRPr sz="1100" b="0">
+                <a:solidFill>
+                  <a:srgbClr val="FFFFFF"/>
+                </a:solidFill>
+                <a:latin typeface="Play"/>
+                <a:ea typeface="Play"/>
+                <a:cs typeface="Play"/>
+              </a:defRPr>
+            </a:pPr>
+          </a:p>
+        </c:txPr>
+        <c:crossAx val="-2113994440"/>
+        <c:crosses val="autoZero"/>
+        <c:auto val="1"/>
+        <c:lblAlgn val="ctr"/>
+        <c:lblOffset val="100"/>
+        <c:noMultiLvlLbl val="0"/>
+      </c:catAx>
+      <c:valAx>
+        <c:axId val="-2113994440"/>
+        <c:scaling/>
+        <c:delete val="0"/>
+        <c:axPos val="l"/>
+        <c:majorGridlines>
+          <c:spPr>
+            <a:ln w="9525">
+              <a:solidFill>
+                <a:srgbClr val="3C3C3C"/>
+              </a:solidFill>
+            </a:ln>
+          </c:spPr>
+        </c:majorGridlines>
+        <c:title>
+          <c:tx>
+            <c:rich>
+              <a:bodyPr rot="0" vert="horz"/>
+              <a:lstStyle/>
+              <a:p>
+                <a:pPr>
+                  <a:defRPr sz="1100" b="0">
+                    <a:solidFill>
+                      <a:srgbClr val="FFFFFF"/>
+                    </a:solidFill>
+                    <a:latin typeface="Play"/>
+                    <a:ea typeface="Play"/>
+                    <a:cs typeface="Play"/>
+                  </a:defRPr>
+                </a:pPr>
+                <a:r>
+                  <a:t>Время (мин), мин</a:t>
+                </a:r>
+              </a:p>
+            </c:rich>
+          </c:tx>
+          <c:layout/>
+          <c:overlay val="0"/>
+        </c:title>
+        <c:majorTickMark val="out"/>
+        <c:minorTickMark val="none"/>
+        <c:tickLblPos val="nextTo"/>
+        <c:txPr>
+          <a:bodyPr/>
+          <a:lstStyle/>
+          <a:p>
+            <a:pPr>
+              <a:defRPr sz="1100" b="0">
+                <a:solidFill>
+                  <a:srgbClr val="FFFFFF"/>
+                </a:solidFill>
+                <a:latin typeface="Play"/>
+                <a:ea typeface="Play"/>
+                <a:cs typeface="Play"/>
+              </a:defRPr>
+            </a:pPr>
+          </a:p>
+        </c:txPr>
+        <c:crossAx val="-2068027336"/>
+        <c:crosses val="autoZero"/>
+      </c:valAx>
+    </c:plotArea>
+    <c:dispBlanksAs val="gap"/>
+  </c:chart>
+  <c:txPr>
+    <a:bodyPr/>
+    <a:lstStyle/>
+    <a:p>
+      <a:pPr>
+        <a:defRPr sz="1200" b="0">
+          <a:solidFill>
+            <a:srgbClr val="FFFFFF"/>
+          </a:solidFill>
+          <a:latin typeface="Play"/>
+          <a:ea typeface="Play"/>
+          <a:cs typeface="Play"/>
+        </a:defRPr>
+      </a:pPr>
+      <a:endParaRPr lang="en-US"/>
+    </a:p>
+  </c:txPr>
+  <c:externalData r:id="rId1">
+    <c:autoUpdate val="0"/>
+  </c:externalData>
+</c:chartSpace>
+</file>
+
+<file path=ppt/charts/chart2.xml><?xml version="1.0" encoding="utf-8"?>
+<c:chartSpace xmlns:c="http://schemas.openxmlformats.org/drawingml/2006/chart" xmlns:a="http://schemas.openxmlformats.org/drawingml/2006/main" xmlns:r="http://schemas.openxmlformats.org/officeDocument/2006/relationships">
+  <c:date1904 val="0"/>
+  <c:chart>
+    <c:autoTitleDeleted val="1"/>
+    <c:plotArea>
+      <c:barChart>
+        <c:barDir val="col"/>
+        <c:grouping val="clustered"/>
+        <c:ser>
+          <c:idx val="0"/>
+          <c:order val="0"/>
+          <c:tx>
+            <c:strRef>
+              <c:f>Sheet1!$B$1</c:f>
+              <c:strCache>
+                <c:ptCount val="1"/>
+                <c:pt idx="0">
+                  <c:v>Нарушения</c:v>
+                </c:pt>
+              </c:strCache>
+            </c:strRef>
+          </c:tx>
+          <c:spPr>
+            <a:solidFill>
+              <a:srgbClr val="0077FF"/>
+            </a:solidFill>
+            <a:ln>
+              <a:solidFill>
+                <a:srgbClr val="0077FF"/>
+              </a:solidFill>
+            </a:ln>
+          </c:spPr>
+          <c:cat>
+            <c:strRef>
+              <c:f>Sheet1!$A$2:$A$3</c:f>
+              <c:strCache>
+                <c:ptCount val="2"/>
+                <c:pt idx="0">
+                  <c:v>До</c:v>
+                </c:pt>
+                <c:pt idx="1">
+                  <c:v>После</c:v>
+                </c:pt>
+              </c:strCache>
+            </c:strRef>
+          </c:cat>
+          <c:val>
+            <c:numRef>
+              <c:f>Sheet1!$B$2:$B$3</c:f>
+              <c:numCache>
+                <c:formatCode>General</c:formatCode>
+                <c:ptCount val="2"/>
+                <c:pt idx="0">
+                  <c:v>19.0</c:v>
+                </c:pt>
+                <c:pt idx="1">
+                  <c:v>2.0</c:v>
+                </c:pt>
+              </c:numCache>
+            </c:numRef>
+          </c:val>
+        </c:ser>
+        <c:dLbls>
+          <c:numFmt formatCode="0&quot; колод&quot;" sourceLinked="0"/>
+          <c:txPr>
+            <a:bodyPr wrap="none"/>
+            <a:lstStyle/>
+            <a:p>
+              <a:pPr>
+                <a:defRPr sz="1100" b="0">
+                  <a:solidFill>
+                    <a:srgbClr val="FFFFFF"/>
+                  </a:solidFill>
+                  <a:latin typeface="Play"/>
+                  <a:ea typeface="Play"/>
+                  <a:cs typeface="Play"/>
+                </a:defRPr>
+              </a:pPr>
+            </a:p>
+          </c:txPr>
+          <c:dLblPos val="outEnd"/>
+          <c:showLegendKey val="0"/>
+          <c:showVal val="1"/>
+          <c:showCatName val="0"/>
+          <c:showSerName val="0"/>
+          <c:showPercent val="0"/>
+          <c:showBubbleSize val="0"/>
+          <c:showLeaderLines val="1"/>
+        </c:dLbls>
+        <c:gapWidth val="60"/>
+        <c:axId val="-2068027336"/>
+        <c:axId val="-2113994440"/>
+      </c:barChart>
+      <c:catAx>
+        <c:axId val="-2068027336"/>
+        <c:scaling>
+          <c:orientation val="minMax"/>
+        </c:scaling>
+        <c:delete val="0"/>
+        <c:axPos val="b"/>
+        <c:majorTickMark val="out"/>
+        <c:minorTickMark val="none"/>
+        <c:tickLblPos val="nextTo"/>
+        <c:txPr>
+          <a:bodyPr/>
+          <a:lstStyle/>
+          <a:p>
+            <a:pPr>
+              <a:defRPr sz="1100" b="0">
+                <a:solidFill>
+                  <a:srgbClr val="FFFFFF"/>
+                </a:solidFill>
+                <a:latin typeface="Play"/>
+                <a:ea typeface="Play"/>
+                <a:cs typeface="Play"/>
+              </a:defRPr>
+            </a:pPr>
+          </a:p>
+        </c:txPr>
+        <c:crossAx val="-2113994440"/>
+        <c:crosses val="autoZero"/>
+        <c:auto val="1"/>
+        <c:lblAlgn val="ctr"/>
+        <c:lblOffset val="100"/>
+        <c:noMultiLvlLbl val="0"/>
+      </c:catAx>
+      <c:valAx>
+        <c:axId val="-2113994440"/>
+        <c:scaling/>
+        <c:delete val="0"/>
+        <c:axPos val="l"/>
+        <c:majorGridlines>
+          <c:spPr>
+            <a:ln w="9525">
+              <a:solidFill>
+                <a:srgbClr val="3C3C3C"/>
+              </a:solidFill>
+            </a:ln>
+          </c:spPr>
+        </c:majorGridlines>
+        <c:title>
+          <c:tx>
+            <c:rich>
+              <a:bodyPr rot="0" vert="horz"/>
+              <a:lstStyle/>
+              <a:p>
+                <a:pPr>
+                  <a:defRPr sz="1100" b="0">
+                    <a:solidFill>
+                      <a:srgbClr val="FFFFFF"/>
+                    </a:solidFill>
+                    <a:latin typeface="Play"/>
+                    <a:ea typeface="Play"/>
+                    <a:cs typeface="Play"/>
+                  </a:defRPr>
+                </a:pPr>
+                <a:r>
+                  <a:t>Нарушения, колод</a:t>
+                </a:r>
+              </a:p>
+            </c:rich>
+          </c:tx>
+          <c:layout/>
+          <c:overlay val="0"/>
+        </c:title>
+        <c:majorTickMark val="out"/>
+        <c:minorTickMark val="none"/>
+        <c:tickLblPos val="nextTo"/>
+        <c:txPr>
+          <a:bodyPr/>
+          <a:lstStyle/>
+          <a:p>
+            <a:pPr>
+              <a:defRPr sz="1100" b="0">
+                <a:solidFill>
+                  <a:srgbClr val="FFFFFF"/>
+                </a:solidFill>
+                <a:latin typeface="Play"/>
+                <a:ea typeface="Play"/>
+                <a:cs typeface="Play"/>
+              </a:defRPr>
+            </a:pPr>
+          </a:p>
+        </c:txPr>
+        <c:crossAx val="-2068027336"/>
+        <c:crosses val="autoZero"/>
+      </c:valAx>
+    </c:plotArea>
+    <c:dispBlanksAs val="gap"/>
+  </c:chart>
+  <c:txPr>
+    <a:bodyPr/>
+    <a:lstStyle/>
+    <a:p>
+      <a:pPr>
+        <a:defRPr sz="1200" b="0">
+          <a:solidFill>
+            <a:srgbClr val="FFFFFF"/>
+          </a:solidFill>
+          <a:latin typeface="Play"/>
+          <a:ea typeface="Play"/>
+          <a:cs typeface="Play"/>
+        </a:defRPr>
+      </a:pPr>
+      <a:endParaRPr lang="en-US"/>
+    </a:p>
+  </c:txPr>
+  <c:externalData r:id="rId1">
+    <c:autoUpdate val="0"/>
+  </c:externalData>
+</c:chartSpace>
 </file>
 
 <file path=ppt/notesMasters/notesMaster1.xml><?xml version="1.0" encoding="utf-8"?>
@@ -9145,7 +9573,7 @@
         <p:spPr>
           <a:xfrm>
             <a:off x="429280" y="2490551"/>
-            <a:ext cx="7827385" cy="1876897"/>
+            <a:ext cx="7827385" cy="1884680"/>
           </a:xfrm>
           <a:prstGeom prst="rect">
             <a:avLst/>
@@ -9162,7 +9590,7 @@
               <a:spcAft>
                 <a:spcPts val="300"/>
               </a:spcAft>
-              <a:defRPr sz="3200" b="0">
+              <a:defRPr sz="5400" b="0">
                 <a:solidFill>
                   <a:srgbClr val="FFFFFF"/>
                 </a:solidFill>
@@ -9172,7 +9600,7 @@
               </a:defRPr>
             </a:pPr>
             <a:r>
-              <a:rPr sz="3200" b="0">
+              <a:rPr sz="5400" b="0">
                 <a:solidFill>
                   <a:srgbClr val="FFFFFF"/>
                 </a:solidFill>
@@ -9180,7 +9608,7 @@
                 <a:ea typeface="Play"/>
                 <a:cs typeface="Play"/>
               </a:rPr>
-              <a:t>Защита инициативы: сервис автоматической вёрстки презентаций</a:t>
+              <a:t>Автоматическая вёрстка презентаций</a:t>
             </a:r>
           </a:p>
         </p:txBody>
@@ -9212,7 +9640,7 @@
         <p:spPr>
           <a:xfrm>
             <a:off x="429280" y="424715"/>
-            <a:ext cx="7827264" cy="822960"/>
+            <a:ext cx="7827264" cy="1183640"/>
           </a:xfrm>
           <a:prstGeom prst="rect">
             <a:avLst/>
@@ -9247,7 +9675,7 @@
                 <a:ea typeface="Play"/>
                 <a:cs typeface="Play"/>
               </a:rPr>
-              <a:t>Контекст и возможность</a:t>
+              <a:t>42 колоды в первом квартале 2026 года</a:t>
             </a:r>
           </a:p>
         </p:txBody>
@@ -9260,8 +9688,8 @@
         </p:nvSpPr>
         <p:spPr>
           <a:xfrm>
-            <a:off x="429280" y="1783080"/>
-            <a:ext cx="5472562" cy="4114800"/>
+            <a:off x="429280" y="1848385"/>
+            <a:ext cx="5472562" cy="4049494"/>
           </a:xfrm>
           <a:prstGeom prst="rect">
             <a:avLst/>
@@ -9296,7 +9724,7 @@
                 <a:ea typeface="Play"/>
                 <a:cs typeface="Play"/>
               </a:rPr>
-              <a:t>• Сборка одной презентации занимает 186 минут</a:t>
+              <a:t>• Средняя сборка 186 мин</a:t>
             </a:r>
           </a:p>
           <a:p>
@@ -9322,7 +9750,7 @@
                 <a:ea typeface="Play"/>
                 <a:cs typeface="Play"/>
               </a:rPr>
-              <a:t>• Правки после ревью добавляют 74 минуты</a:t>
+              <a:t>• 74 мин на правки</a:t>
             </a:r>
           </a:p>
           <a:p>
@@ -9348,33 +9776,7 @@
                 <a:ea typeface="Play"/>
                 <a:cs typeface="Play"/>
               </a:rPr>
-              <a:t>• 19 из 42 колод нарушают фирменный стиль</a:t>
-            </a:r>
-          </a:p>
-          <a:p>
-            <a:pPr algn="l">
-              <a:spcAft>
-                <a:spcPts val="300"/>
-              </a:spcAft>
-              <a:defRPr sz="1600">
-                <a:solidFill>
-                  <a:srgbClr val="FFFFFF"/>
-                </a:solidFill>
-                <a:latin typeface="Play"/>
-                <a:ea typeface="Play"/>
-                <a:cs typeface="Play"/>
-              </a:defRPr>
-            </a:pPr>
-            <a:r>
-              <a:rPr sz="1600">
-                <a:solidFill>
-                  <a:srgbClr val="FFFFFF"/>
-                </a:solidFill>
-                <a:latin typeface="Play"/>
-                <a:ea typeface="Play"/>
-                <a:cs typeface="Play"/>
-              </a:rPr>
-              <a:t>• Дизайн-отдел из 4 человек обслуживает 11 запросов в неделю</a:t>
+              <a:t>• 19 колод нарушили стиль</a:t>
             </a:r>
           </a:p>
         </p:txBody>
@@ -9388,8 +9790,8 @@
           <p:nvPr/>
         </p:nvGraphicFramePr>
         <p:xfrm>
-          <a:off x="6267602" y="1783080"/>
-          <a:ext cx="5472562" cy="4114800"/>
+          <a:off x="6267602" y="1848385"/>
+          <a:ext cx="5472562" cy="4049494"/>
         </p:xfrm>
         <a:graphic>
           <a:graphicData uri="http://schemas.openxmlformats.org/drawingml/2006/table">
@@ -9398,11 +9800,10 @@
                 <a:tableStyleId>{5C22544A-7EE6-4342-B048-85BDC9FD1C3A}</a:tableStyleId>
               </a:tblPr>
               <a:tblGrid>
-                <a:gridCol w="1824187"/>
-                <a:gridCol w="1824187"/>
-                <a:gridCol w="1824188"/>
+                <a:gridCol w="2736281"/>
+                <a:gridCol w="2736281"/>
               </a:tblGrid>
-              <a:tr h="587828">
+              <a:tr h="809898">
                 <a:tc>
                   <a:txBody>
                     <a:bodyPr/>
@@ -9455,34 +9856,8 @@
                     </a:solidFill>
                   </a:tcPr>
                 </a:tc>
-                <a:tc>
-                  <a:txBody>
-                    <a:bodyPr/>
-                    <a:lstStyle/>
-                    <a:p>
-                      <a:pPr>
-                        <a:defRPr sz="1300" b="1">
-                          <a:solidFill>
-                            <a:srgbClr val="FFFFFF"/>
-                          </a:solidFill>
-                          <a:latin typeface="Play"/>
-                          <a:ea typeface="Play"/>
-                          <a:cs typeface="Play"/>
-                        </a:defRPr>
-                      </a:pPr>
-                      <a:r>
-                        <a:t>Единица</a:t>
-                      </a:r>
-                    </a:p>
-                  </a:txBody>
-                  <a:tcPr>
-                    <a:solidFill>
-                      <a:srgbClr val="0077FF"/>
-                    </a:solidFill>
-                  </a:tcPr>
-                </a:tc>
               </a:tr>
-              <a:tr h="587828">
+              <a:tr h="809898">
                 <a:tc>
                   <a:txBody>
                     <a:bodyPr/>
@@ -9499,7 +9874,61 @@
                         </a:defRPr>
                       </a:pPr>
                       <a:r>
-                        <a:t>Время сборки</a:t>
+                        <a:t>Колоды</a:t>
+                      </a:r>
+                    </a:p>
+                  </a:txBody>
+                  <a:tcPr>
+                    <a:solidFill>
+                      <a:srgbClr val="111111"/>
+                    </a:solidFill>
+                  </a:tcPr>
+                </a:tc>
+                <a:tc>
+                  <a:txBody>
+                    <a:bodyPr/>
+                    <a:lstStyle/>
+                    <a:p>
+                      <a:pPr>
+                        <a:defRPr sz="1300" b="0">
+                          <a:solidFill>
+                            <a:srgbClr val="FFFFFF"/>
+                          </a:solidFill>
+                          <a:latin typeface="Play"/>
+                          <a:ea typeface="Play"/>
+                          <a:cs typeface="Play"/>
+                        </a:defRPr>
+                      </a:pPr>
+                      <a:r>
+                        <a:t>42</a:t>
+                      </a:r>
+                    </a:p>
+                  </a:txBody>
+                  <a:tcPr>
+                    <a:solidFill>
+                      <a:srgbClr val="111111"/>
+                    </a:solidFill>
+                  </a:tcPr>
+                </a:tc>
+              </a:tr>
+              <a:tr h="809898">
+                <a:tc>
+                  <a:txBody>
+                    <a:bodyPr/>
+                    <a:lstStyle/>
+                    <a:p>
+                      <a:pPr>
+                        <a:defRPr sz="1300" b="0">
+                          <a:solidFill>
+                            <a:srgbClr val="FFFFFF"/>
+                          </a:solidFill>
+                          <a:latin typeface="Play"/>
+                          <a:ea typeface="Play"/>
+                          <a:cs typeface="Play"/>
+                        </a:defRPr>
+                      </a:pPr>
+                      <a:r>
+                        <a:t>Средняя сборка (мин)</a:t>
                       </a:r>
                     </a:p>
                   </a:txBody>
@@ -9535,6 +9964,8 @@
                     </a:solidFill>
                   </a:tcPr>
                 </a:tc>
+              </a:tr>
+              <a:tr h="809898">
                 <a:tc>
                   <a:txBody>
                     <a:bodyPr/>
@@ -9551,35 +9982,7 @@
                         </a:defRPr>
                       </a:pPr>
                       <a:r>
-                        <a:t>мин</a:t>
-                      </a:r>
-                    </a:p>
-                  </a:txBody>
-                  <a:tcPr>
-                    <a:solidFill>
-                      <a:srgbClr val="111111"/>
-                    </a:solidFill>
-                  </a:tcPr>
-                </a:tc>
-              </a:tr>
-              <a:tr h="587828">
-                <a:tc>
-                  <a:txBody>
-                    <a:bodyPr/>
-                    <a:lstStyle/>
-                    <a:p>
-                      <a:pPr>
-                        <a:defRPr sz="1300" b="0">
-                          <a:solidFill>
-                            <a:srgbClr val="FFFFFF"/>
-                          </a:solidFill>
-                          <a:latin typeface="Play"/>
-                          <a:ea typeface="Play"/>
-                          <a:cs typeface="Play"/>
-                        </a:defRPr>
-                      </a:pPr>
-                      <a:r>
-                        <a:t>Время правок</a:t>
+                        <a:t>Правки (мин)</a:t>
                       </a:r>
                     </a:p>
                   </a:txBody>
@@ -9615,6 +10018,8 @@
                     </a:solidFill>
                   </a:tcPr>
                 </a:tc>
+              </a:tr>
+              <a:tr h="809902">
                 <a:tc>
                   <a:txBody>
                     <a:bodyPr/>
@@ -9631,35 +10036,7 @@
                         </a:defRPr>
                       </a:pPr>
                       <a:r>
-                        <a:t>мин</a:t>
-                      </a:r>
-                    </a:p>
-                  </a:txBody>
-                  <a:tcPr>
-                    <a:solidFill>
-                      <a:srgbClr val="111111"/>
-                    </a:solidFill>
-                  </a:tcPr>
-                </a:tc>
-              </a:tr>
-              <a:tr h="587828">
-                <a:tc>
-                  <a:txBody>
-                    <a:bodyPr/>
-                    <a:lstStyle/>
-                    <a:p>
-                      <a:pPr>
-                        <a:defRPr sz="1300" b="0">
-                          <a:solidFill>
-                            <a:srgbClr val="FFFFFF"/>
-                          </a:solidFill>
-                          <a:latin typeface="Play"/>
-                          <a:ea typeface="Play"/>
-                          <a:cs typeface="Play"/>
-                        </a:defRPr>
-                      </a:pPr>
-                      <a:r>
-                        <a:t>Нарушения стиля</a:t>
+                        <a:t>Нарушения</a:t>
                       </a:r>
                     </a:p>
                   </a:txBody>
@@ -9685,273 +10062,7 @@
                         </a:defRPr>
                       </a:pPr>
                       <a:r>
-                        <a:t>19/42</a:t>
-                      </a:r>
-                    </a:p>
-                  </a:txBody>
-                  <a:tcPr>
-                    <a:solidFill>
-                      <a:srgbClr val="111111"/>
-                    </a:solidFill>
-                  </a:tcPr>
-                </a:tc>
-                <a:tc>
-                  <a:txBody>
-                    <a:bodyPr/>
-                    <a:lstStyle/>
-                    <a:p>
-                      <a:pPr>
-                        <a:defRPr sz="1300" b="0">
-                          <a:solidFill>
-                            <a:srgbClr val="FFFFFF"/>
-                          </a:solidFill>
-                          <a:latin typeface="Play"/>
-                          <a:ea typeface="Play"/>
-                          <a:cs typeface="Play"/>
-                        </a:defRPr>
-                      </a:pPr>
-                      <a:r>
-                        <a:t>шт</a:t>
-                      </a:r>
-                    </a:p>
-                  </a:txBody>
-                  <a:tcPr>
-                    <a:solidFill>
-                      <a:srgbClr val="111111"/>
-                    </a:solidFill>
-                  </a:tcPr>
-                </a:tc>
-              </a:tr>
-              <a:tr h="587828">
-                <a:tc>
-                  <a:txBody>
-                    <a:bodyPr/>
-                    <a:lstStyle/>
-                    <a:p>
-                      <a:pPr>
-                        <a:defRPr sz="1300" b="0">
-                          <a:solidFill>
-                            <a:srgbClr val="FFFFFF"/>
-                          </a:solidFill>
-                          <a:latin typeface="Play"/>
-                          <a:ea typeface="Play"/>
-                          <a:cs typeface="Play"/>
-                        </a:defRPr>
-                      </a:pPr>
-                      <a:r>
-                        <a:t>Размер команды</a:t>
-                      </a:r>
-                    </a:p>
-                  </a:txBody>
-                  <a:tcPr>
-                    <a:solidFill>
-                      <a:srgbClr val="111111"/>
-                    </a:solidFill>
-                  </a:tcPr>
-                </a:tc>
-                <a:tc>
-                  <a:txBody>
-                    <a:bodyPr/>
-                    <a:lstStyle/>
-                    <a:p>
-                      <a:pPr>
-                        <a:defRPr sz="1300" b="0">
-                          <a:solidFill>
-                            <a:srgbClr val="FFFFFF"/>
-                          </a:solidFill>
-                          <a:latin typeface="Play"/>
-                          <a:ea typeface="Play"/>
-                          <a:cs typeface="Play"/>
-                        </a:defRPr>
-                      </a:pPr>
-                      <a:r>
-                        <a:t>4</a:t>
-                      </a:r>
-                    </a:p>
-                  </a:txBody>
-                  <a:tcPr>
-                    <a:solidFill>
-                      <a:srgbClr val="111111"/>
-                    </a:solidFill>
-                  </a:tcPr>
-                </a:tc>
-                <a:tc>
-                  <a:txBody>
-                    <a:bodyPr/>
-                    <a:lstStyle/>
-                    <a:p>
-                      <a:pPr>
-                        <a:defRPr sz="1300" b="0">
-                          <a:solidFill>
-                            <a:srgbClr val="FFFFFF"/>
-                          </a:solidFill>
-                          <a:latin typeface="Play"/>
-                          <a:ea typeface="Play"/>
-                          <a:cs typeface="Play"/>
-                        </a:defRPr>
-                      </a:pPr>
-                      <a:r>
-                        <a:t>чел</a:t>
-                      </a:r>
-                    </a:p>
-                  </a:txBody>
-                  <a:tcPr>
-                    <a:solidFill>
-                      <a:srgbClr val="111111"/>
-                    </a:solidFill>
-                  </a:tcPr>
-                </a:tc>
-              </a:tr>
-              <a:tr h="587828">
-                <a:tc>
-                  <a:txBody>
-                    <a:bodyPr/>
-                    <a:lstStyle/>
-                    <a:p>
-                      <a:pPr>
-                        <a:defRPr sz="1300" b="0">
-                          <a:solidFill>
-                            <a:srgbClr val="FFFFFF"/>
-                          </a:solidFill>
-                          <a:latin typeface="Play"/>
-                          <a:ea typeface="Play"/>
-                          <a:cs typeface="Play"/>
-                        </a:defRPr>
-                      </a:pPr>
-                      <a:r>
-                        <a:t>Запросы в неделю</a:t>
-                      </a:r>
-                    </a:p>
-                  </a:txBody>
-                  <a:tcPr>
-                    <a:solidFill>
-                      <a:srgbClr val="111111"/>
-                    </a:solidFill>
-                  </a:tcPr>
-                </a:tc>
-                <a:tc>
-                  <a:txBody>
-                    <a:bodyPr/>
-                    <a:lstStyle/>
-                    <a:p>
-                      <a:pPr>
-                        <a:defRPr sz="1300" b="0">
-                          <a:solidFill>
-                            <a:srgbClr val="FFFFFF"/>
-                          </a:solidFill>
-                          <a:latin typeface="Play"/>
-                          <a:ea typeface="Play"/>
-                          <a:cs typeface="Play"/>
-                        </a:defRPr>
-                      </a:pPr>
-                      <a:r>
-                        <a:t>11/27</a:t>
-                      </a:r>
-                    </a:p>
-                  </a:txBody>
-                  <a:tcPr>
-                    <a:solidFill>
-                      <a:srgbClr val="111111"/>
-                    </a:solidFill>
-                  </a:tcPr>
-                </a:tc>
-                <a:tc>
-                  <a:txBody>
-                    <a:bodyPr/>
-                    <a:lstStyle/>
-                    <a:p>
-                      <a:pPr>
-                        <a:defRPr sz="1300" b="0">
-                          <a:solidFill>
-                            <a:srgbClr val="FFFFFF"/>
-                          </a:solidFill>
-                          <a:latin typeface="Play"/>
-                          <a:ea typeface="Play"/>
-                          <a:cs typeface="Play"/>
-                        </a:defRPr>
-                      </a:pPr>
-                      <a:r>
-                        <a:t>запросов</a:t>
-                      </a:r>
-                    </a:p>
-                  </a:txBody>
-                  <a:tcPr>
-                    <a:solidFill>
-                      <a:srgbClr val="111111"/>
-                    </a:solidFill>
-                  </a:tcPr>
-                </a:tc>
-              </a:tr>
-              <a:tr h="587832">
-                <a:tc>
-                  <a:txBody>
-                    <a:bodyPr/>
-                    <a:lstStyle/>
-                    <a:p>
-                      <a:pPr>
-                        <a:defRPr sz="1300" b="0">
-                          <a:solidFill>
-                            <a:srgbClr val="FFFFFF"/>
-                          </a:solidFill>
-                          <a:latin typeface="Play"/>
-                          <a:ea typeface="Play"/>
-                          <a:cs typeface="Play"/>
-                        </a:defRPr>
-                      </a:pPr>
-                      <a:r>
-                        <a:t>Срок ожидания</a:t>
-                      </a:r>
-                    </a:p>
-                  </a:txBody>
-                  <a:tcPr>
-                    <a:solidFill>
-                      <a:srgbClr val="111111"/>
-                    </a:solidFill>
-                  </a:tcPr>
-                </a:tc>
-                <a:tc>
-                  <a:txBody>
-                    <a:bodyPr/>
-                    <a:lstStyle/>
-                    <a:p>
-                      <a:pPr>
-                        <a:defRPr sz="1300" b="0">
-                          <a:solidFill>
-                            <a:srgbClr val="FFFFFF"/>
-                          </a:solidFill>
-                          <a:latin typeface="Play"/>
-                          <a:ea typeface="Play"/>
-                          <a:cs typeface="Play"/>
-                        </a:defRPr>
-                      </a:pPr>
-                      <a:r>
-                        <a:t>6</a:t>
-                      </a:r>
-                    </a:p>
-                  </a:txBody>
-                  <a:tcPr>
-                    <a:solidFill>
-                      <a:srgbClr val="111111"/>
-                    </a:solidFill>
-                  </a:tcPr>
-                </a:tc>
-                <a:tc>
-                  <a:txBody>
-                    <a:bodyPr/>
-                    <a:lstStyle/>
-                    <a:p>
-                      <a:pPr>
-                        <a:defRPr sz="1300" b="0">
-                          <a:solidFill>
-                            <a:srgbClr val="FFFFFF"/>
-                          </a:solidFill>
-                          <a:latin typeface="Play"/>
-                          <a:ea typeface="Play"/>
-                          <a:cs typeface="Play"/>
-                        </a:defRPr>
-                      </a:pPr>
-                      <a:r>
-                        <a:t>дней</a:t>
+                        <a:t>19</a:t>
                       </a:r>
                     </a:p>
                   </a:txBody>
@@ -9993,7 +10104,7 @@
         <p:spPr>
           <a:xfrm>
             <a:off x="429280" y="424715"/>
-            <a:ext cx="7827264" cy="822960"/>
+            <a:ext cx="7827264" cy="1183640"/>
           </a:xfrm>
           <a:prstGeom prst="rect">
             <a:avLst/>
@@ -10028,7 +10139,7 @@
                 <a:ea typeface="Play"/>
                 <a:cs typeface="Play"/>
               </a:rPr>
-              <a:t>Предложение</a:t>
+              <a:t>Сборка одной презентации занимает 186 мин</a:t>
             </a:r>
           </a:p>
         </p:txBody>
@@ -10041,8 +10152,8 @@
         </p:nvSpPr>
         <p:spPr>
           <a:xfrm>
-            <a:off x="429280" y="1783080"/>
-            <a:ext cx="5472562" cy="4114800"/>
+            <a:off x="429280" y="1848385"/>
+            <a:ext cx="5472562" cy="4049494"/>
           </a:xfrm>
           <a:prstGeom prst="rect">
             <a:avLst/>
@@ -10077,7 +10188,7 @@
                 <a:ea typeface="Play"/>
                 <a:cs typeface="Play"/>
               </a:rPr>
-              <a:t>• Сервис принимает шаблон pptx и материалы</a:t>
+              <a:t>• 12 слайдов</a:t>
             </a:r>
           </a:p>
           <a:p>
@@ -10103,467 +10214,253 @@
                 <a:ea typeface="Play"/>
                 <a:cs typeface="Play"/>
               </a:rPr>
-              <a:t>• Шаблон преобразуется в дизайн-систему</a:t>
-            </a:r>
-          </a:p>
-          <a:p>
-            <a:pPr algn="l">
-              <a:spcAft>
-                <a:spcPts val="300"/>
-              </a:spcAft>
-              <a:defRPr sz="1600">
-                <a:solidFill>
-                  <a:srgbClr val="FFFFFF"/>
-                </a:solidFill>
-                <a:latin typeface="Play"/>
-                <a:ea typeface="Play"/>
-                <a:cs typeface="Play"/>
-              </a:defRPr>
-            </a:pPr>
-            <a:r>
-              <a:rPr sz="1600">
-                <a:solidFill>
-                  <a:srgbClr val="FFFFFF"/>
-                </a:solidFill>
-                <a:latin typeface="Play"/>
-                <a:ea typeface="Play"/>
-                <a:cs typeface="Play"/>
-              </a:rPr>
-              <a:t>• Автоматически формируется план колоды</a:t>
-            </a:r>
-          </a:p>
-          <a:p>
-            <a:pPr algn="l">
-              <a:spcAft>
-                <a:spcPts val="300"/>
-              </a:spcAft>
-              <a:defRPr sz="1600">
-                <a:solidFill>
-                  <a:srgbClr val="FFFFFF"/>
-                </a:solidFill>
-                <a:latin typeface="Play"/>
-                <a:ea typeface="Play"/>
-                <a:cs typeface="Play"/>
-              </a:defRPr>
-            </a:pPr>
-            <a:r>
-              <a:rPr sz="1600">
-                <a:solidFill>
-                  <a:srgbClr val="FFFFFF"/>
-                </a:solidFill>
-                <a:latin typeface="Play"/>
-                <a:ea typeface="Play"/>
-                <a:cs typeface="Play"/>
-              </a:rPr>
-              <a:t>• Вёрстка выполняется по правилам дизайна</a:t>
-            </a:r>
-          </a:p>
-          <a:p>
-            <a:pPr algn="l">
-              <a:spcAft>
-                <a:spcPts val="300"/>
-              </a:spcAft>
-              <a:defRPr sz="1600">
-                <a:solidFill>
-                  <a:srgbClr val="FFFFFF"/>
-                </a:solidFill>
-                <a:latin typeface="Play"/>
-                <a:ea typeface="Play"/>
-                <a:cs typeface="Play"/>
-              </a:defRPr>
-            </a:pPr>
-            <a:r>
-              <a:rPr sz="1600">
-                <a:solidFill>
-                  <a:srgbClr val="FFFFFF"/>
-                </a:solidFill>
-                <a:latin typeface="Play"/>
-                <a:ea typeface="Play"/>
-                <a:cs typeface="Play"/>
-              </a:rPr>
-              <a:t>• Проводится аудит качества до публикации</a:t>
+              <a:t>• 6 дней ожидания</a:t>
             </a:r>
           </a:p>
         </p:txBody>
       </p:sp>
-      <p:sp>
-        <p:nvSpPr>
-          <p:cNvPr id="4" name="Pentagon 3"/>
-          <p:cNvSpPr/>
+      <p:graphicFrame>
+        <p:nvGraphicFramePr>
+          <p:cNvPr id="4" name="Table 3"/>
+          <p:cNvGraphicFramePr>
+            <a:graphicFrameLocks noGrp="1"/>
+          </p:cNvGraphicFramePr>
           <p:nvPr/>
-        </p:nvSpPr>
-        <p:spPr>
-          <a:xfrm>
-            <a:off x="6267602" y="1831086"/>
-            <a:ext cx="5472562" cy="589788"/>
-          </a:xfrm>
-          <a:prstGeom prst="homePlate">
-            <a:avLst/>
-          </a:prstGeom>
-          <a:solidFill>
-            <a:srgbClr val="0077FF"/>
-          </a:solidFill>
-          <a:ln>
-            <a:noFill/>
-          </a:ln>
-        </p:spPr>
-        <p:style>
-          <a:lnRef idx="1">
-            <a:schemeClr val="accent1"/>
-          </a:lnRef>
-          <a:fillRef idx="3">
-            <a:schemeClr val="accent1"/>
-          </a:fillRef>
-          <a:effectRef idx="2">
-            <a:schemeClr val="accent1"/>
-          </a:effectRef>
-          <a:fontRef idx="minor">
-            <a:schemeClr val="lt1"/>
-          </a:fontRef>
-        </p:style>
-        <p:txBody>
-          <a:bodyPr rtlCol="0" anchor="ctr" wrap="square" lIns="12700" rIns="12700" tIns="12700" bIns="12700"/>
-          <a:lstStyle/>
-          <a:p>
-            <a:pPr algn="ctr">
-              <a:defRPr sz="1400" b="0">
-                <a:solidFill>
-                  <a:srgbClr val="FFFFFF"/>
-                </a:solidFill>
-                <a:latin typeface="Play"/>
-                <a:ea typeface="Play"/>
-                <a:cs typeface="Play"/>
-              </a:defRPr>
-            </a:pPr>
-            <a:r>
-              <a:rPr sz="1400" b="0">
-                <a:solidFill>
-                  <a:srgbClr val="FFFFFF"/>
-                </a:solidFill>
-                <a:latin typeface="Play"/>
-                <a:ea typeface="Play"/>
-                <a:cs typeface="Play"/>
-              </a:rPr>
-              <a:t>Загрузить шаблон</a:t>
-            </a:r>
-          </a:p>
-        </p:txBody>
-      </p:sp>
-      <p:sp>
-        <p:nvSpPr>
-          <p:cNvPr id="5" name="Chevron 4"/>
-          <p:cNvSpPr/>
-          <p:nvPr/>
-        </p:nvSpPr>
-        <p:spPr>
-          <a:xfrm>
-            <a:off x="6267602" y="2516886"/>
-            <a:ext cx="5472562" cy="589788"/>
-          </a:xfrm>
-          <a:prstGeom prst="chevron">
-            <a:avLst/>
-          </a:prstGeom>
-          <a:solidFill>
-            <a:srgbClr val="0077FF"/>
-          </a:solidFill>
-          <a:ln>
-            <a:noFill/>
-          </a:ln>
-        </p:spPr>
-        <p:style>
-          <a:lnRef idx="1">
-            <a:schemeClr val="accent1"/>
-          </a:lnRef>
-          <a:fillRef idx="3">
-            <a:schemeClr val="accent1"/>
-          </a:fillRef>
-          <a:effectRef idx="2">
-            <a:schemeClr val="accent1"/>
-          </a:effectRef>
-          <a:fontRef idx="minor">
-            <a:schemeClr val="lt1"/>
-          </a:fontRef>
-        </p:style>
-        <p:txBody>
-          <a:bodyPr rtlCol="0" anchor="ctr" wrap="square" lIns="12700" rIns="12700" tIns="12700" bIns="12700"/>
-          <a:lstStyle/>
-          <a:p>
-            <a:pPr algn="ctr">
-              <a:defRPr sz="1400" b="0">
-                <a:solidFill>
-                  <a:srgbClr val="FFFFFF"/>
-                </a:solidFill>
-                <a:latin typeface="Play"/>
-                <a:ea typeface="Play"/>
-                <a:cs typeface="Play"/>
-              </a:defRPr>
-            </a:pPr>
-            <a:r>
-              <a:rPr sz="1400" b="0">
-                <a:solidFill>
-                  <a:srgbClr val="FFFFFF"/>
-                </a:solidFill>
-                <a:latin typeface="Play"/>
-                <a:ea typeface="Play"/>
-                <a:cs typeface="Play"/>
-              </a:rPr>
-              <a:t>Разобрать дизайн-систему</a:t>
-            </a:r>
-          </a:p>
-        </p:txBody>
-      </p:sp>
-      <p:sp>
-        <p:nvSpPr>
-          <p:cNvPr id="6" name="Chevron 5"/>
-          <p:cNvSpPr/>
-          <p:nvPr/>
-        </p:nvSpPr>
-        <p:spPr>
-          <a:xfrm>
-            <a:off x="6267602" y="3202686"/>
-            <a:ext cx="5472562" cy="589788"/>
-          </a:xfrm>
-          <a:prstGeom prst="chevron">
-            <a:avLst/>
-          </a:prstGeom>
-          <a:solidFill>
-            <a:srgbClr val="0077FF"/>
-          </a:solidFill>
-          <a:ln>
-            <a:noFill/>
-          </a:ln>
-        </p:spPr>
-        <p:style>
-          <a:lnRef idx="1">
-            <a:schemeClr val="accent1"/>
-          </a:lnRef>
-          <a:fillRef idx="3">
-            <a:schemeClr val="accent1"/>
-          </a:fillRef>
-          <a:effectRef idx="2">
-            <a:schemeClr val="accent1"/>
-          </a:effectRef>
-          <a:fontRef idx="minor">
-            <a:schemeClr val="lt1"/>
-          </a:fontRef>
-        </p:style>
-        <p:txBody>
-          <a:bodyPr rtlCol="0" anchor="ctr" wrap="square" lIns="12700" rIns="12700" tIns="12700" bIns="12700"/>
-          <a:lstStyle/>
-          <a:p>
-            <a:pPr algn="ctr">
-              <a:defRPr sz="1400" b="0">
-                <a:solidFill>
-                  <a:srgbClr val="FFFFFF"/>
-                </a:solidFill>
-                <a:latin typeface="Play"/>
-                <a:ea typeface="Play"/>
-                <a:cs typeface="Play"/>
-              </a:defRPr>
-            </a:pPr>
-            <a:r>
-              <a:rPr sz="1400" b="0">
-                <a:solidFill>
-                  <a:srgbClr val="FFFFFF"/>
-                </a:solidFill>
-                <a:latin typeface="Play"/>
-                <a:ea typeface="Play"/>
-                <a:cs typeface="Play"/>
-              </a:rPr>
-              <a:t>Сформировать план колоды</a:t>
-            </a:r>
-          </a:p>
-        </p:txBody>
-      </p:sp>
-      <p:sp>
-        <p:nvSpPr>
-          <p:cNvPr id="7" name="Chevron 6"/>
-          <p:cNvSpPr/>
-          <p:nvPr/>
-        </p:nvSpPr>
-        <p:spPr>
-          <a:xfrm>
-            <a:off x="6267602" y="3888486"/>
-            <a:ext cx="5472562" cy="589788"/>
-          </a:xfrm>
-          <a:prstGeom prst="chevron">
-            <a:avLst/>
-          </a:prstGeom>
-          <a:solidFill>
-            <a:srgbClr val="0077FF"/>
-          </a:solidFill>
-          <a:ln>
-            <a:noFill/>
-          </a:ln>
-        </p:spPr>
-        <p:style>
-          <a:lnRef idx="1">
-            <a:schemeClr val="accent1"/>
-          </a:lnRef>
-          <a:fillRef idx="3">
-            <a:schemeClr val="accent1"/>
-          </a:fillRef>
-          <a:effectRef idx="2">
-            <a:schemeClr val="accent1"/>
-          </a:effectRef>
-          <a:fontRef idx="minor">
-            <a:schemeClr val="lt1"/>
-          </a:fontRef>
-        </p:style>
-        <p:txBody>
-          <a:bodyPr rtlCol="0" anchor="ctr" wrap="square" lIns="12700" rIns="12700" tIns="12700" bIns="12700"/>
-          <a:lstStyle/>
-          <a:p>
-            <a:pPr algn="ctr">
-              <a:defRPr sz="1400" b="0">
-                <a:solidFill>
-                  <a:srgbClr val="FFFFFF"/>
-                </a:solidFill>
-                <a:latin typeface="Play"/>
-                <a:ea typeface="Play"/>
-                <a:cs typeface="Play"/>
-              </a:defRPr>
-            </a:pPr>
-            <a:r>
-              <a:rPr sz="1400" b="0">
-                <a:solidFill>
-                  <a:srgbClr val="FFFFFF"/>
-                </a:solidFill>
-                <a:latin typeface="Play"/>
-                <a:ea typeface="Play"/>
-                <a:cs typeface="Play"/>
-              </a:rPr>
-              <a:t>Автоматически вёрстать</a:t>
-            </a:r>
-          </a:p>
-        </p:txBody>
-      </p:sp>
-      <p:sp>
-        <p:nvSpPr>
-          <p:cNvPr id="8" name="Chevron 7"/>
-          <p:cNvSpPr/>
-          <p:nvPr/>
-        </p:nvSpPr>
-        <p:spPr>
-          <a:xfrm>
-            <a:off x="6267602" y="4574286"/>
-            <a:ext cx="5472562" cy="589788"/>
-          </a:xfrm>
-          <a:prstGeom prst="chevron">
-            <a:avLst/>
-          </a:prstGeom>
-          <a:solidFill>
-            <a:srgbClr val="0077FF"/>
-          </a:solidFill>
-          <a:ln>
-            <a:noFill/>
-          </a:ln>
-        </p:spPr>
-        <p:style>
-          <a:lnRef idx="1">
-            <a:schemeClr val="accent1"/>
-          </a:lnRef>
-          <a:fillRef idx="3">
-            <a:schemeClr val="accent1"/>
-          </a:fillRef>
-          <a:effectRef idx="2">
-            <a:schemeClr val="accent1"/>
-          </a:effectRef>
-          <a:fontRef idx="minor">
-            <a:schemeClr val="lt1"/>
-          </a:fontRef>
-        </p:style>
-        <p:txBody>
-          <a:bodyPr rtlCol="0" anchor="ctr" wrap="square" lIns="12700" rIns="12700" tIns="12700" bIns="12700"/>
-          <a:lstStyle/>
-          <a:p>
-            <a:pPr algn="ctr">
-              <a:defRPr sz="1400" b="0">
-                <a:solidFill>
-                  <a:srgbClr val="FFFFFF"/>
-                </a:solidFill>
-                <a:latin typeface="Play"/>
-                <a:ea typeface="Play"/>
-                <a:cs typeface="Play"/>
-              </a:defRPr>
-            </a:pPr>
-            <a:r>
-              <a:rPr sz="1400" b="0">
-                <a:solidFill>
-                  <a:srgbClr val="FFFFFF"/>
-                </a:solidFill>
-                <a:latin typeface="Play"/>
-                <a:ea typeface="Play"/>
-                <a:cs typeface="Play"/>
-              </a:rPr>
-              <a:t>Провести аудит качества</a:t>
-            </a:r>
-          </a:p>
-        </p:txBody>
-      </p:sp>
-      <p:sp>
-        <p:nvSpPr>
-          <p:cNvPr id="9" name="Chevron 8"/>
-          <p:cNvSpPr/>
-          <p:nvPr/>
-        </p:nvSpPr>
-        <p:spPr>
-          <a:xfrm>
-            <a:off x="6267602" y="5260086"/>
-            <a:ext cx="5472562" cy="589788"/>
-          </a:xfrm>
-          <a:prstGeom prst="chevron">
-            <a:avLst/>
-          </a:prstGeom>
-          <a:solidFill>
-            <a:srgbClr val="0077FF"/>
-          </a:solidFill>
-          <a:ln>
-            <a:noFill/>
-          </a:ln>
-        </p:spPr>
-        <p:style>
-          <a:lnRef idx="1">
-            <a:schemeClr val="accent1"/>
-          </a:lnRef>
-          <a:fillRef idx="3">
-            <a:schemeClr val="accent1"/>
-          </a:fillRef>
-          <a:effectRef idx="2">
-            <a:schemeClr val="accent1"/>
-          </a:effectRef>
-          <a:fontRef idx="minor">
-            <a:schemeClr val="lt1"/>
-          </a:fontRef>
-        </p:style>
-        <p:txBody>
-          <a:bodyPr rtlCol="0" anchor="ctr" wrap="square" lIns="12700" rIns="12700" tIns="12700" bIns="12700"/>
-          <a:lstStyle/>
-          <a:p>
-            <a:pPr algn="ctr">
-              <a:defRPr sz="1400" b="0">
-                <a:solidFill>
-                  <a:srgbClr val="FFFFFF"/>
-                </a:solidFill>
-                <a:latin typeface="Play"/>
-                <a:ea typeface="Play"/>
-                <a:cs typeface="Play"/>
-              </a:defRPr>
-            </a:pPr>
-            <a:r>
-              <a:rPr sz="1400" b="0">
-                <a:solidFill>
-                  <a:srgbClr val="FFFFFF"/>
-                </a:solidFill>
-                <a:latin typeface="Play"/>
-                <a:ea typeface="Play"/>
-                <a:cs typeface="Play"/>
-              </a:rPr>
-              <a:t>Экспортировать pptx/pdf/html</a:t>
-            </a:r>
-          </a:p>
-        </p:txBody>
-      </p:sp>
+        </p:nvGraphicFramePr>
+        <p:xfrm>
+          <a:off x="6267602" y="1848385"/>
+          <a:ext cx="5472562" cy="4049494"/>
+        </p:xfrm>
+        <a:graphic>
+          <a:graphicData uri="http://schemas.openxmlformats.org/drawingml/2006/table">
+            <a:tbl>
+              <a:tblPr firstRow="1" bandRow="1">
+                <a:tableStyleId>{5C22544A-7EE6-4342-B048-85BDC9FD1C3A}</a:tableStyleId>
+              </a:tblPr>
+              <a:tblGrid>
+                <a:gridCol w="2736281"/>
+                <a:gridCol w="2736281"/>
+              </a:tblGrid>
+              <a:tr h="1012373">
+                <a:tc>
+                  <a:txBody>
+                    <a:bodyPr/>
+                    <a:lstStyle/>
+                    <a:p>
+                      <a:pPr>
+                        <a:defRPr sz="1300" b="1">
+                          <a:solidFill>
+                            <a:srgbClr val="FFFFFF"/>
+                          </a:solidFill>
+                          <a:latin typeface="Play"/>
+                          <a:ea typeface="Play"/>
+                          <a:cs typeface="Play"/>
+                        </a:defRPr>
+                      </a:pPr>
+                      <a:r>
+                        <a:t>Показатель</a:t>
+                      </a:r>
+                    </a:p>
+                  </a:txBody>
+                  <a:tcPr>
+                    <a:solidFill>
+                      <a:srgbClr val="0077FF"/>
+                    </a:solidFill>
+                  </a:tcPr>
+                </a:tc>
+                <a:tc>
+                  <a:txBody>
+                    <a:bodyPr/>
+                    <a:lstStyle/>
+                    <a:p>
+                      <a:pPr>
+                        <a:defRPr sz="1300" b="1">
+                          <a:solidFill>
+                            <a:srgbClr val="FFFFFF"/>
+                          </a:solidFill>
+                          <a:latin typeface="Play"/>
+                          <a:ea typeface="Play"/>
+                          <a:cs typeface="Play"/>
+                        </a:defRPr>
+                      </a:pPr>
+                      <a:r>
+                        <a:t>Значение</a:t>
+                      </a:r>
+                    </a:p>
+                  </a:txBody>
+                  <a:tcPr>
+                    <a:solidFill>
+                      <a:srgbClr val="0077FF"/>
+                    </a:solidFill>
+                  </a:tcPr>
+                </a:tc>
+              </a:tr>
+              <a:tr h="1012373">
+                <a:tc>
+                  <a:txBody>
+                    <a:bodyPr/>
+                    <a:lstStyle/>
+                    <a:p>
+                      <a:pPr>
+                        <a:defRPr sz="1300" b="0">
+                          <a:solidFill>
+                            <a:srgbClr val="FFFFFF"/>
+                          </a:solidFill>
+                          <a:latin typeface="Play"/>
+                          <a:ea typeface="Play"/>
+                          <a:cs typeface="Play"/>
+                        </a:defRPr>
+                      </a:pPr>
+                      <a:r>
+                        <a:t>Слайдов</a:t>
+                      </a:r>
+                    </a:p>
+                  </a:txBody>
+                  <a:tcPr>
+                    <a:solidFill>
+                      <a:srgbClr val="111111"/>
+                    </a:solidFill>
+                  </a:tcPr>
+                </a:tc>
+                <a:tc>
+                  <a:txBody>
+                    <a:bodyPr/>
+                    <a:lstStyle/>
+                    <a:p>
+                      <a:pPr>
+                        <a:defRPr sz="1300" b="0">
+                          <a:solidFill>
+                            <a:srgbClr val="FFFFFF"/>
+                          </a:solidFill>
+                          <a:latin typeface="Play"/>
+                          <a:ea typeface="Play"/>
+                          <a:cs typeface="Play"/>
+                        </a:defRPr>
+                      </a:pPr>
+                      <a:r>
+                        <a:t>12</a:t>
+                      </a:r>
+                    </a:p>
+                  </a:txBody>
+                  <a:tcPr>
+                    <a:solidFill>
+                      <a:srgbClr val="111111"/>
+                    </a:solidFill>
+                  </a:tcPr>
+                </a:tc>
+              </a:tr>
+              <a:tr h="1012373">
+                <a:tc>
+                  <a:txBody>
+                    <a:bodyPr/>
+                    <a:lstStyle/>
+                    <a:p>
+                      <a:pPr>
+                        <a:defRPr sz="1300" b="0">
+                          <a:solidFill>
+                            <a:srgbClr val="FFFFFF"/>
+                          </a:solidFill>
+                          <a:latin typeface="Play"/>
+                          <a:ea typeface="Play"/>
+                          <a:cs typeface="Play"/>
+                        </a:defRPr>
+                      </a:pPr>
+                      <a:r>
+                        <a:t>Правки (мин)</a:t>
+                      </a:r>
+                    </a:p>
+                  </a:txBody>
+                  <a:tcPr>
+                    <a:solidFill>
+                      <a:srgbClr val="111111"/>
+                    </a:solidFill>
+                  </a:tcPr>
+                </a:tc>
+                <a:tc>
+                  <a:txBody>
+                    <a:bodyPr/>
+                    <a:lstStyle/>
+                    <a:p>
+                      <a:pPr>
+                        <a:defRPr sz="1300" b="0">
+                          <a:solidFill>
+                            <a:srgbClr val="FFFFFF"/>
+                          </a:solidFill>
+                          <a:latin typeface="Play"/>
+                          <a:ea typeface="Play"/>
+                          <a:cs typeface="Play"/>
+                        </a:defRPr>
+                      </a:pPr>
+                      <a:r>
+                        <a:t>74</a:t>
+                      </a:r>
+                    </a:p>
+                  </a:txBody>
+                  <a:tcPr>
+                    <a:solidFill>
+                      <a:srgbClr val="111111"/>
+                    </a:solidFill>
+                  </a:tcPr>
+                </a:tc>
+              </a:tr>
+              <a:tr h="1012375">
+                <a:tc>
+                  <a:txBody>
+                    <a:bodyPr/>
+                    <a:lstStyle/>
+                    <a:p>
+                      <a:pPr>
+                        <a:defRPr sz="1300" b="0">
+                          <a:solidFill>
+                            <a:srgbClr val="FFFFFF"/>
+                          </a:solidFill>
+                          <a:latin typeface="Play"/>
+                          <a:ea typeface="Play"/>
+                          <a:cs typeface="Play"/>
+                        </a:defRPr>
+                      </a:pPr>
+                      <a:r>
+                        <a:t>Ожидание (дней)</a:t>
+                      </a:r>
+                    </a:p>
+                  </a:txBody>
+                  <a:tcPr>
+                    <a:solidFill>
+                      <a:srgbClr val="111111"/>
+                    </a:solidFill>
+                  </a:tcPr>
+                </a:tc>
+                <a:tc>
+                  <a:txBody>
+                    <a:bodyPr/>
+                    <a:lstStyle/>
+                    <a:p>
+                      <a:pPr>
+                        <a:defRPr sz="1300" b="0">
+                          <a:solidFill>
+                            <a:srgbClr val="FFFFFF"/>
+                          </a:solidFill>
+                          <a:latin typeface="Play"/>
+                          <a:ea typeface="Play"/>
+                          <a:cs typeface="Play"/>
+                        </a:defRPr>
+                      </a:pPr>
+                      <a:r>
+                        <a:t>6</a:t>
+                      </a:r>
+                    </a:p>
+                  </a:txBody>
+                  <a:tcPr>
+                    <a:solidFill>
+                      <a:srgbClr val="111111"/>
+                    </a:solidFill>
+                  </a:tcPr>
+                </a:tc>
+              </a:tr>
+            </a:tbl>
+          </a:graphicData>
+        </a:graphic>
+      </p:graphicFrame>
     </p:spTree>
   </p:cSld>
   <p:clrMapOvr>
@@ -10701,7 +10598,7 @@
         <p:spPr>
           <a:xfrm>
             <a:off x="427817" y="424715"/>
-            <a:ext cx="7827264" cy="822960"/>
+            <a:ext cx="7827264" cy="1183640"/>
           </a:xfrm>
           <a:prstGeom prst="rect">
             <a:avLst/>
@@ -10736,38 +10633,52 @@
                 <a:ea typeface="Play"/>
                 <a:cs typeface="Play"/>
               </a:rPr>
-              <a:t>Ожидаемый эффект</a:t>
+              <a:t>Сервис автоматической вёрстки: как это работает</a:t>
             </a:r>
           </a:p>
         </p:txBody>
       </p:sp>
       <p:sp>
         <p:nvSpPr>
-          <p:cNvPr id="682" name="body"/>
-          <p:cNvSpPr txBox="1"/>
+          <p:cNvPr id="682" name="Pentagon 681"/>
+          <p:cNvSpPr/>
           <p:nvPr/>
         </p:nvSpPr>
         <p:spPr>
           <a:xfrm>
-            <a:off x="427817" y="1783080"/>
-            <a:ext cx="5473293" cy="4114800"/>
+            <a:off x="6266870" y="1895629"/>
+            <a:ext cx="5473293" cy="580427"/>
           </a:xfrm>
-          <a:prstGeom prst="rect">
+          <a:prstGeom prst="homePlate">
             <a:avLst/>
           </a:prstGeom>
-          <a:noFill/>
+          <a:solidFill>
+            <a:srgbClr val="0077FF"/>
+          </a:solidFill>
+          <a:ln>
+            <a:noFill/>
+          </a:ln>
         </p:spPr>
+        <p:style>
+          <a:lnRef idx="1">
+            <a:schemeClr val="accent1"/>
+          </a:lnRef>
+          <a:fillRef idx="3">
+            <a:schemeClr val="accent1"/>
+          </a:fillRef>
+          <a:effectRef idx="2">
+            <a:schemeClr val="accent1"/>
+          </a:effectRef>
+          <a:fontRef idx="minor">
+            <a:schemeClr val="lt1"/>
+          </a:fontRef>
+        </p:style>
         <p:txBody>
-          <a:bodyPr wrap="square" lIns="76200" rIns="76200" tIns="50800" bIns="50800">
-            <a:spAutoFit/>
-          </a:bodyPr>
+          <a:bodyPr rtlCol="0" anchor="ctr" wrap="square" lIns="12700" rIns="12700" tIns="12700" bIns="12700"/>
           <a:lstStyle/>
           <a:p>
-            <a:pPr algn="l">
-              <a:spcAft>
-                <a:spcPts val="300"/>
-              </a:spcAft>
-              <a:defRPr sz="1600">
+            <a:pPr algn="ctr">
+              <a:defRPr sz="1400" b="0">
                 <a:solidFill>
                   <a:srgbClr val="FFFFFF"/>
                 </a:solidFill>
@@ -10777,7 +10688,7 @@
               </a:defRPr>
             </a:pPr>
             <a:r>
-              <a:rPr sz="1600">
+              <a:rPr sz="1400" b="0">
                 <a:solidFill>
                   <a:srgbClr val="FFFFFF"/>
                 </a:solidFill>
@@ -10785,15 +10696,52 @@
                 <a:ea typeface="Play"/>
                 <a:cs typeface="Play"/>
               </a:rPr>
-              <a:t>• Время сборки колоды сократилось с 186 до 4 минут</a:t>
+              <a:t>Ввод</a:t>
             </a:r>
           </a:p>
+        </p:txBody>
+      </p:sp>
+      <p:sp>
+        <p:nvSpPr>
+          <p:cNvPr id="683" name="Chevron 682"/>
+          <p:cNvSpPr/>
+          <p:nvPr/>
+        </p:nvSpPr>
+        <p:spPr>
+          <a:xfrm>
+            <a:off x="6266870" y="2570544"/>
+            <a:ext cx="5473293" cy="580427"/>
+          </a:xfrm>
+          <a:prstGeom prst="chevron">
+            <a:avLst/>
+          </a:prstGeom>
+          <a:solidFill>
+            <a:srgbClr val="0077FF"/>
+          </a:solidFill>
+          <a:ln>
+            <a:noFill/>
+          </a:ln>
+        </p:spPr>
+        <p:style>
+          <a:lnRef idx="1">
+            <a:schemeClr val="accent1"/>
+          </a:lnRef>
+          <a:fillRef idx="3">
+            <a:schemeClr val="accent1"/>
+          </a:fillRef>
+          <a:effectRef idx="2">
+            <a:schemeClr val="accent1"/>
+          </a:effectRef>
+          <a:fontRef idx="minor">
+            <a:schemeClr val="lt1"/>
+          </a:fontRef>
+        </p:style>
+        <p:txBody>
+          <a:bodyPr rtlCol="0" anchor="ctr" wrap="square" lIns="12700" rIns="12700" tIns="12700" bIns="12700"/>
+          <a:lstStyle/>
           <a:p>
-            <a:pPr algn="l">
-              <a:spcAft>
-                <a:spcPts val="300"/>
-              </a:spcAft>
-              <a:defRPr sz="1600">
+            <a:pPr algn="ctr">
+              <a:defRPr sz="1400" b="0">
                 <a:solidFill>
                   <a:srgbClr val="FFFFFF"/>
                 </a:solidFill>
@@ -10803,7 +10751,7 @@
               </a:defRPr>
             </a:pPr>
             <a:r>
-              <a:rPr sz="1600">
+              <a:rPr sz="1400" b="0">
                 <a:solidFill>
                   <a:srgbClr val="FFFFFF"/>
                 </a:solidFill>
@@ -10811,15 +10759,52 @@
                 <a:ea typeface="Play"/>
                 <a:cs typeface="Play"/>
               </a:rPr>
-              <a:t>• Первый готовый вариант появился за 1 день вместо 6</a:t>
+              <a:t>Парсинг</a:t>
             </a:r>
           </a:p>
+        </p:txBody>
+      </p:sp>
+      <p:sp>
+        <p:nvSpPr>
+          <p:cNvPr id="684" name="Chevron 683"/>
+          <p:cNvSpPr/>
+          <p:nvPr/>
+        </p:nvSpPr>
+        <p:spPr>
+          <a:xfrm>
+            <a:off x="6266870" y="3245460"/>
+            <a:ext cx="5473293" cy="580427"/>
+          </a:xfrm>
+          <a:prstGeom prst="chevron">
+            <a:avLst/>
+          </a:prstGeom>
+          <a:solidFill>
+            <a:srgbClr val="0077FF"/>
+          </a:solidFill>
+          <a:ln>
+            <a:noFill/>
+          </a:ln>
+        </p:spPr>
+        <p:style>
+          <a:lnRef idx="1">
+            <a:schemeClr val="accent1"/>
+          </a:lnRef>
+          <a:fillRef idx="3">
+            <a:schemeClr val="accent1"/>
+          </a:fillRef>
+          <a:effectRef idx="2">
+            <a:schemeClr val="accent1"/>
+          </a:effectRef>
+          <a:fontRef idx="minor">
+            <a:schemeClr val="lt1"/>
+          </a:fontRef>
+        </p:style>
+        <p:txBody>
+          <a:bodyPr rtlCol="0" anchor="ctr" wrap="square" lIns="12700" rIns="12700" tIns="12700" bIns="12700"/>
+          <a:lstStyle/>
           <a:p>
-            <a:pPr algn="l">
-              <a:spcAft>
-                <a:spcPts val="300"/>
-              </a:spcAft>
-              <a:defRPr sz="1600">
+            <a:pPr algn="ctr">
+              <a:defRPr sz="1400" b="0">
                 <a:solidFill>
                   <a:srgbClr val="FFFFFF"/>
                 </a:solidFill>
@@ -10829,7 +10814,7 @@
               </a:defRPr>
             </a:pPr>
             <a:r>
-              <a:rPr sz="1600">
+              <a:rPr sz="1400" b="0">
                 <a:solidFill>
                   <a:srgbClr val="FFFFFF"/>
                 </a:solidFill>
@@ -10837,15 +10822,52 @@
                 <a:ea typeface="Play"/>
                 <a:cs typeface="Play"/>
               </a:rPr>
-              <a:t>• Нарушения стиля уменьшились до 2 из 68 колод</a:t>
+              <a:t>Дизайн-система</a:t>
             </a:r>
           </a:p>
+        </p:txBody>
+      </p:sp>
+      <p:sp>
+        <p:nvSpPr>
+          <p:cNvPr id="685" name="Chevron 684"/>
+          <p:cNvSpPr/>
+          <p:nvPr/>
+        </p:nvSpPr>
+        <p:spPr>
+          <a:xfrm>
+            <a:off x="6266870" y="3920376"/>
+            <a:ext cx="5473293" cy="580427"/>
+          </a:xfrm>
+          <a:prstGeom prst="chevron">
+            <a:avLst/>
+          </a:prstGeom>
+          <a:solidFill>
+            <a:srgbClr val="0077FF"/>
+          </a:solidFill>
+          <a:ln>
+            <a:noFill/>
+          </a:ln>
+        </p:spPr>
+        <p:style>
+          <a:lnRef idx="1">
+            <a:schemeClr val="accent1"/>
+          </a:lnRef>
+          <a:fillRef idx="3">
+            <a:schemeClr val="accent1"/>
+          </a:fillRef>
+          <a:effectRef idx="2">
+            <a:schemeClr val="accent1"/>
+          </a:effectRef>
+          <a:fontRef idx="minor">
+            <a:schemeClr val="lt1"/>
+          </a:fontRef>
+        </p:style>
+        <p:txBody>
+          <a:bodyPr rtlCol="0" anchor="ctr" wrap="square" lIns="12700" rIns="12700" tIns="12700" bIns="12700"/>
+          <a:lstStyle/>
           <a:p>
-            <a:pPr algn="l">
-              <a:spcAft>
-                <a:spcPts val="300"/>
-              </a:spcAft>
-              <a:defRPr sz="1600">
+            <a:pPr algn="ctr">
+              <a:defRPr sz="1400" b="0">
                 <a:solidFill>
                   <a:srgbClr val="FFFFFF"/>
                 </a:solidFill>
@@ -10855,7 +10877,7 @@
               </a:defRPr>
             </a:pPr>
             <a:r>
-              <a:rPr sz="1600">
+              <a:rPr sz="1400" b="0">
                 <a:solidFill>
                   <a:srgbClr val="FFFFFF"/>
                 </a:solidFill>
@@ -10863,438 +10885,137 @@
                 <a:ea typeface="Play"/>
                 <a:cs typeface="Play"/>
               </a:rPr>
-              <a:t>• Дизайнеры закрыли 38 запросов вместо 11 в неделю</a:t>
+              <a:t>Вёрстка</a:t>
             </a:r>
           </a:p>
         </p:txBody>
       </p:sp>
-      <p:graphicFrame>
-        <p:nvGraphicFramePr>
-          <p:cNvPr id="683" name="Table 682"/>
-          <p:cNvGraphicFramePr>
-            <a:graphicFrameLocks noGrp="1"/>
-          </p:cNvGraphicFramePr>
+      <p:sp>
+        <p:nvSpPr>
+          <p:cNvPr id="686" name="Chevron 685"/>
+          <p:cNvSpPr/>
           <p:nvPr/>
-        </p:nvGraphicFramePr>
-        <p:xfrm>
-          <a:off x="6266870" y="1783080"/>
-          <a:ext cx="5473293" cy="4114800"/>
-        </p:xfrm>
-        <a:graphic>
-          <a:graphicData uri="http://schemas.openxmlformats.org/drawingml/2006/table">
-            <a:tbl>
-              <a:tblPr firstRow="1" bandRow="1">
-                <a:tableStyleId>{5C22544A-7EE6-4342-B048-85BDC9FD1C3A}</a:tableStyleId>
-              </a:tblPr>
-              <a:tblGrid>
-                <a:gridCol w="1824431"/>
-                <a:gridCol w="1824431"/>
-                <a:gridCol w="1824431"/>
-              </a:tblGrid>
-              <a:tr h="822960">
-                <a:tc>
-                  <a:txBody>
-                    <a:bodyPr/>
-                    <a:lstStyle/>
-                    <a:p>
-                      <a:pPr>
-                        <a:defRPr sz="1300" b="1">
-                          <a:solidFill>
-                            <a:srgbClr val="FFFFFF"/>
-                          </a:solidFill>
-                          <a:latin typeface="Play"/>
-                          <a:ea typeface="Play"/>
-                          <a:cs typeface="Play"/>
-                        </a:defRPr>
-                      </a:pPr>
-                      <a:r>
-                        <a:t>Метрика</a:t>
-                      </a:r>
-                    </a:p>
-                  </a:txBody>
-                  <a:tcPr>
-                    <a:solidFill>
-                      <a:srgbClr val="0077FF"/>
-                    </a:solidFill>
-                  </a:tcPr>
-                </a:tc>
-                <a:tc>
-                  <a:txBody>
-                    <a:bodyPr/>
-                    <a:lstStyle/>
-                    <a:p>
-                      <a:pPr>
-                        <a:defRPr sz="1300" b="1">
-                          <a:solidFill>
-                            <a:srgbClr val="FFFFFF"/>
-                          </a:solidFill>
-                          <a:latin typeface="Play"/>
-                          <a:ea typeface="Play"/>
-                          <a:cs typeface="Play"/>
-                        </a:defRPr>
-                      </a:pPr>
-                      <a:r>
-                        <a:t>До</a:t>
-                      </a:r>
-                    </a:p>
-                  </a:txBody>
-                  <a:tcPr>
-                    <a:solidFill>
-                      <a:srgbClr val="0077FF"/>
-                    </a:solidFill>
-                  </a:tcPr>
-                </a:tc>
-                <a:tc>
-                  <a:txBody>
-                    <a:bodyPr/>
-                    <a:lstStyle/>
-                    <a:p>
-                      <a:pPr>
-                        <a:defRPr sz="1300" b="1">
-                          <a:solidFill>
-                            <a:srgbClr val="FFFFFF"/>
-                          </a:solidFill>
-                          <a:latin typeface="Play"/>
-                          <a:ea typeface="Play"/>
-                          <a:cs typeface="Play"/>
-                        </a:defRPr>
-                      </a:pPr>
-                      <a:r>
-                        <a:t>После</a:t>
-                      </a:r>
-                    </a:p>
-                  </a:txBody>
-                  <a:tcPr>
-                    <a:solidFill>
-                      <a:srgbClr val="0077FF"/>
-                    </a:solidFill>
-                  </a:tcPr>
-                </a:tc>
-              </a:tr>
-              <a:tr h="822960">
-                <a:tc>
-                  <a:txBody>
-                    <a:bodyPr/>
-                    <a:lstStyle/>
-                    <a:p>
-                      <a:pPr>
-                        <a:defRPr sz="1300" b="0">
-                          <a:solidFill>
-                            <a:srgbClr val="FFFFFF"/>
-                          </a:solidFill>
-                          <a:latin typeface="Play"/>
-                          <a:ea typeface="Play"/>
-                          <a:cs typeface="Play"/>
-                        </a:defRPr>
-                      </a:pPr>
-                      <a:r>
-                        <a:t>Время сборки</a:t>
-                      </a:r>
-                    </a:p>
-                  </a:txBody>
-                  <a:tcPr>
-                    <a:solidFill>
-                      <a:srgbClr val="111111"/>
-                    </a:solidFill>
-                  </a:tcPr>
-                </a:tc>
-                <a:tc>
-                  <a:txBody>
-                    <a:bodyPr/>
-                    <a:lstStyle/>
-                    <a:p>
-                      <a:pPr>
-                        <a:defRPr sz="1300" b="0">
-                          <a:solidFill>
-                            <a:srgbClr val="FFFFFF"/>
-                          </a:solidFill>
-                          <a:latin typeface="Play"/>
-                          <a:ea typeface="Play"/>
-                          <a:cs typeface="Play"/>
-                        </a:defRPr>
-                      </a:pPr>
-                      <a:r>
-                        <a:t>186</a:t>
-                      </a:r>
-                    </a:p>
-                  </a:txBody>
-                  <a:tcPr>
-                    <a:solidFill>
-                      <a:srgbClr val="111111"/>
-                    </a:solidFill>
-                  </a:tcPr>
-                </a:tc>
-                <a:tc>
-                  <a:txBody>
-                    <a:bodyPr/>
-                    <a:lstStyle/>
-                    <a:p>
-                      <a:pPr>
-                        <a:defRPr sz="1300" b="0">
-                          <a:solidFill>
-                            <a:srgbClr val="FFFFFF"/>
-                          </a:solidFill>
-                          <a:latin typeface="Play"/>
-                          <a:ea typeface="Play"/>
-                          <a:cs typeface="Play"/>
-                        </a:defRPr>
-                      </a:pPr>
-                      <a:r>
-                        <a:t>4</a:t>
-                      </a:r>
-                    </a:p>
-                  </a:txBody>
-                  <a:tcPr>
-                    <a:solidFill>
-                      <a:srgbClr val="111111"/>
-                    </a:solidFill>
-                  </a:tcPr>
-                </a:tc>
-              </a:tr>
-              <a:tr h="822960">
-                <a:tc>
-                  <a:txBody>
-                    <a:bodyPr/>
-                    <a:lstStyle/>
-                    <a:p>
-                      <a:pPr>
-                        <a:defRPr sz="1300" b="0">
-                          <a:solidFill>
-                            <a:srgbClr val="FFFFFF"/>
-                          </a:solidFill>
-                          <a:latin typeface="Play"/>
-                          <a:ea typeface="Play"/>
-                          <a:cs typeface="Play"/>
-                        </a:defRPr>
-                      </a:pPr>
-                      <a:r>
-                        <a:t>Первый вариант</a:t>
-                      </a:r>
-                    </a:p>
-                  </a:txBody>
-                  <a:tcPr>
-                    <a:solidFill>
-                      <a:srgbClr val="111111"/>
-                    </a:solidFill>
-                  </a:tcPr>
-                </a:tc>
-                <a:tc>
-                  <a:txBody>
-                    <a:bodyPr/>
-                    <a:lstStyle/>
-                    <a:p>
-                      <a:pPr>
-                        <a:defRPr sz="1300" b="0">
-                          <a:solidFill>
-                            <a:srgbClr val="FFFFFF"/>
-                          </a:solidFill>
-                          <a:latin typeface="Play"/>
-                          <a:ea typeface="Play"/>
-                          <a:cs typeface="Play"/>
-                        </a:defRPr>
-                      </a:pPr>
-                      <a:r>
-                        <a:t>6</a:t>
-                      </a:r>
-                    </a:p>
-                  </a:txBody>
-                  <a:tcPr>
-                    <a:solidFill>
-                      <a:srgbClr val="111111"/>
-                    </a:solidFill>
-                  </a:tcPr>
-                </a:tc>
-                <a:tc>
-                  <a:txBody>
-                    <a:bodyPr/>
-                    <a:lstStyle/>
-                    <a:p>
-                      <a:pPr>
-                        <a:defRPr sz="1300" b="0">
-                          <a:solidFill>
-                            <a:srgbClr val="FFFFFF"/>
-                          </a:solidFill>
-                          <a:latin typeface="Play"/>
-                          <a:ea typeface="Play"/>
-                          <a:cs typeface="Play"/>
-                        </a:defRPr>
-                      </a:pPr>
-                      <a:r>
-                        <a:t>1</a:t>
-                      </a:r>
-                    </a:p>
-                  </a:txBody>
-                  <a:tcPr>
-                    <a:solidFill>
-                      <a:srgbClr val="111111"/>
-                    </a:solidFill>
-                  </a:tcPr>
-                </a:tc>
-              </a:tr>
-              <a:tr h="822960">
-                <a:tc>
-                  <a:txBody>
-                    <a:bodyPr/>
-                    <a:lstStyle/>
-                    <a:p>
-                      <a:pPr>
-                        <a:defRPr sz="1300" b="0">
-                          <a:solidFill>
-                            <a:srgbClr val="FFFFFF"/>
-                          </a:solidFill>
-                          <a:latin typeface="Play"/>
-                          <a:ea typeface="Play"/>
-                          <a:cs typeface="Play"/>
-                        </a:defRPr>
-                      </a:pPr>
-                      <a:r>
-                        <a:t>Нарушения стиля</a:t>
-                      </a:r>
-                    </a:p>
-                  </a:txBody>
-                  <a:tcPr>
-                    <a:solidFill>
-                      <a:srgbClr val="111111"/>
-                    </a:solidFill>
-                  </a:tcPr>
-                </a:tc>
-                <a:tc>
-                  <a:txBody>
-                    <a:bodyPr/>
-                    <a:lstStyle/>
-                    <a:p>
-                      <a:pPr>
-                        <a:defRPr sz="1300" b="0">
-                          <a:solidFill>
-                            <a:srgbClr val="FFFFFF"/>
-                          </a:solidFill>
-                          <a:latin typeface="Play"/>
-                          <a:ea typeface="Play"/>
-                          <a:cs typeface="Play"/>
-                        </a:defRPr>
-                      </a:pPr>
-                      <a:r>
-                        <a:t>19/42</a:t>
-                      </a:r>
-                    </a:p>
-                  </a:txBody>
-                  <a:tcPr>
-                    <a:solidFill>
-                      <a:srgbClr val="111111"/>
-                    </a:solidFill>
-                  </a:tcPr>
-                </a:tc>
-                <a:tc>
-                  <a:txBody>
-                    <a:bodyPr/>
-                    <a:lstStyle/>
-                    <a:p>
-                      <a:pPr>
-                        <a:defRPr sz="1300" b="0">
-                          <a:solidFill>
-                            <a:srgbClr val="FFFFFF"/>
-                          </a:solidFill>
-                          <a:latin typeface="Play"/>
-                          <a:ea typeface="Play"/>
-                          <a:cs typeface="Play"/>
-                        </a:defRPr>
-                      </a:pPr>
-                      <a:r>
-                        <a:t>2/68</a:t>
-                      </a:r>
-                    </a:p>
-                  </a:txBody>
-                  <a:tcPr>
-                    <a:solidFill>
-                      <a:srgbClr val="111111"/>
-                    </a:solidFill>
-                  </a:tcPr>
-                </a:tc>
-              </a:tr>
-              <a:tr h="822960">
-                <a:tc>
-                  <a:txBody>
-                    <a:bodyPr/>
-                    <a:lstStyle/>
-                    <a:p>
-                      <a:pPr>
-                        <a:defRPr sz="1300" b="0">
-                          <a:solidFill>
-                            <a:srgbClr val="FFFFFF"/>
-                          </a:solidFill>
-                          <a:latin typeface="Play"/>
-                          <a:ea typeface="Play"/>
-                          <a:cs typeface="Play"/>
-                        </a:defRPr>
-                      </a:pPr>
-                      <a:r>
-                        <a:t>Загрузка дизайнеров</a:t>
-                      </a:r>
-                    </a:p>
-                  </a:txBody>
-                  <a:tcPr>
-                    <a:solidFill>
-                      <a:srgbClr val="111111"/>
-                    </a:solidFill>
-                  </a:tcPr>
-                </a:tc>
-                <a:tc>
-                  <a:txBody>
-                    <a:bodyPr/>
-                    <a:lstStyle/>
-                    <a:p>
-                      <a:pPr>
-                        <a:defRPr sz="1300" b="0">
-                          <a:solidFill>
-                            <a:srgbClr val="FFFFFF"/>
-                          </a:solidFill>
-                          <a:latin typeface="Play"/>
-                          <a:ea typeface="Play"/>
-                          <a:cs typeface="Play"/>
-                        </a:defRPr>
-                      </a:pPr>
-                      <a:r>
-                        <a:t>11/нед</a:t>
-                      </a:r>
-                    </a:p>
-                  </a:txBody>
-                  <a:tcPr>
-                    <a:solidFill>
-                      <a:srgbClr val="111111"/>
-                    </a:solidFill>
-                  </a:tcPr>
-                </a:tc>
-                <a:tc>
-                  <a:txBody>
-                    <a:bodyPr/>
-                    <a:lstStyle/>
-                    <a:p>
-                      <a:pPr>
-                        <a:defRPr sz="1300" b="0">
-                          <a:solidFill>
-                            <a:srgbClr val="FFFFFF"/>
-                          </a:solidFill>
-                          <a:latin typeface="Play"/>
-                          <a:ea typeface="Play"/>
-                          <a:cs typeface="Play"/>
-                        </a:defRPr>
-                      </a:pPr>
-                      <a:r>
-                        <a:t>38/нед</a:t>
-                      </a:r>
-                    </a:p>
-                  </a:txBody>
-                  <a:tcPr>
-                    <a:solidFill>
-                      <a:srgbClr val="111111"/>
-                    </a:solidFill>
-                  </a:tcPr>
-                </a:tc>
-              </a:tr>
-            </a:tbl>
-          </a:graphicData>
-        </a:graphic>
-      </p:graphicFrame>
+        </p:nvSpPr>
+        <p:spPr>
+          <a:xfrm>
+            <a:off x="6266870" y="4595291"/>
+            <a:ext cx="5473293" cy="580427"/>
+          </a:xfrm>
+          <a:prstGeom prst="chevron">
+            <a:avLst/>
+          </a:prstGeom>
+          <a:solidFill>
+            <a:srgbClr val="0077FF"/>
+          </a:solidFill>
+          <a:ln>
+            <a:noFill/>
+          </a:ln>
+        </p:spPr>
+        <p:style>
+          <a:lnRef idx="1">
+            <a:schemeClr val="accent1"/>
+          </a:lnRef>
+          <a:fillRef idx="3">
+            <a:schemeClr val="accent1"/>
+          </a:fillRef>
+          <a:effectRef idx="2">
+            <a:schemeClr val="accent1"/>
+          </a:effectRef>
+          <a:fontRef idx="minor">
+            <a:schemeClr val="lt1"/>
+          </a:fontRef>
+        </p:style>
+        <p:txBody>
+          <a:bodyPr rtlCol="0" anchor="ctr" wrap="square" lIns="12700" rIns="12700" tIns="12700" bIns="12700"/>
+          <a:lstStyle/>
+          <a:p>
+            <a:pPr algn="ctr">
+              <a:defRPr sz="1400" b="0">
+                <a:solidFill>
+                  <a:srgbClr val="FFFFFF"/>
+                </a:solidFill>
+                <a:latin typeface="Play"/>
+                <a:ea typeface="Play"/>
+                <a:cs typeface="Play"/>
+              </a:defRPr>
+            </a:pPr>
+            <a:r>
+              <a:rPr sz="1400" b="0">
+                <a:solidFill>
+                  <a:srgbClr val="FFFFFF"/>
+                </a:solidFill>
+                <a:latin typeface="Play"/>
+                <a:ea typeface="Play"/>
+                <a:cs typeface="Play"/>
+              </a:rPr>
+              <a:t>Аудит</a:t>
+            </a:r>
+          </a:p>
+        </p:txBody>
+      </p:sp>
+      <p:sp>
+        <p:nvSpPr>
+          <p:cNvPr id="687" name="Chevron 686"/>
+          <p:cNvSpPr/>
+          <p:nvPr/>
+        </p:nvSpPr>
+        <p:spPr>
+          <a:xfrm>
+            <a:off x="6266870" y="5270207"/>
+            <a:ext cx="5473293" cy="580427"/>
+          </a:xfrm>
+          <a:prstGeom prst="chevron">
+            <a:avLst/>
+          </a:prstGeom>
+          <a:solidFill>
+            <a:srgbClr val="0077FF"/>
+          </a:solidFill>
+          <a:ln>
+            <a:noFill/>
+          </a:ln>
+        </p:spPr>
+        <p:style>
+          <a:lnRef idx="1">
+            <a:schemeClr val="accent1"/>
+          </a:lnRef>
+          <a:fillRef idx="3">
+            <a:schemeClr val="accent1"/>
+          </a:fillRef>
+          <a:effectRef idx="2">
+            <a:schemeClr val="accent1"/>
+          </a:effectRef>
+          <a:fontRef idx="minor">
+            <a:schemeClr val="lt1"/>
+          </a:fontRef>
+        </p:style>
+        <p:txBody>
+          <a:bodyPr rtlCol="0" anchor="ctr" wrap="square" lIns="12700" rIns="12700" tIns="12700" bIns="12700"/>
+          <a:lstStyle/>
+          <a:p>
+            <a:pPr algn="ctr">
+              <a:defRPr sz="1400" b="0">
+                <a:solidFill>
+                  <a:srgbClr val="FFFFFF"/>
+                </a:solidFill>
+                <a:latin typeface="Play"/>
+                <a:ea typeface="Play"/>
+                <a:cs typeface="Play"/>
+              </a:defRPr>
+            </a:pPr>
+            <a:r>
+              <a:rPr sz="1400" b="0">
+                <a:solidFill>
+                  <a:srgbClr val="FFFFFF"/>
+                </a:solidFill>
+                <a:latin typeface="Play"/>
+                <a:ea typeface="Play"/>
+                <a:cs typeface="Play"/>
+              </a:rPr>
+              <a:t>Экспорт</a:t>
+            </a:r>
+          </a:p>
+        </p:txBody>
+      </p:sp>
     </p:spTree>
   </p:cSld>
   <p:clrMapOvr>
@@ -11376,7 +11097,7 @@
         <p:spPr>
           <a:xfrm>
             <a:off x="429280" y="424715"/>
-            <a:ext cx="7827264" cy="822960"/>
+            <a:ext cx="7827264" cy="1183640"/>
           </a:xfrm>
           <a:prstGeom prst="rect">
             <a:avLst/>
@@ -11411,7 +11132,7 @@
                 <a:ea typeface="Play"/>
                 <a:cs typeface="Play"/>
               </a:rPr>
-              <a:t>Ресурсы и сроки</a:t>
+              <a:t>Сервис принимает шаблон pptx и материалы</a:t>
             </a:r>
           </a:p>
         </p:txBody>
@@ -11424,8 +11145,8 @@
         </p:nvSpPr>
         <p:spPr>
           <a:xfrm>
-            <a:off x="429280" y="1783080"/>
-            <a:ext cx="5472562" cy="4114800"/>
+            <a:off x="429280" y="3029852"/>
+            <a:ext cx="6129269" cy="1686560"/>
           </a:xfrm>
           <a:prstGeom prst="rect">
             <a:avLst/>
@@ -11442,7 +11163,7 @@
               <a:spcAft>
                 <a:spcPts val="300"/>
               </a:spcAft>
-              <a:defRPr sz="2000">
+              <a:defRPr sz="2400">
                 <a:solidFill>
                   <a:srgbClr val="FFFFFF"/>
                 </a:solidFill>
@@ -11452,7 +11173,7 @@
               </a:defRPr>
             </a:pPr>
             <a:r>
-              <a:rPr sz="2000">
+              <a:rPr sz="2400">
                 <a:solidFill>
                   <a:srgbClr val="FFFFFF"/>
                 </a:solidFill>
@@ -11460,7 +11181,7 @@
                 <a:ea typeface="Play"/>
                 <a:cs typeface="Play"/>
               </a:rPr>
-              <a:t>• Сервис работает на 2 vCPU / 2 ГБ RAM</a:t>
+              <a:t>• Разбирает дизайн-систему</a:t>
             </a:r>
           </a:p>
           <a:p>
@@ -11468,7 +11189,7 @@
               <a:spcAft>
                 <a:spcPts val="300"/>
               </a:spcAft>
-              <a:defRPr sz="2000">
+              <a:defRPr sz="2400">
                 <a:solidFill>
                   <a:srgbClr val="FFFFFF"/>
                 </a:solidFill>
@@ -11478,7 +11199,7 @@
               </a:defRPr>
             </a:pPr>
             <a:r>
-              <a:rPr sz="2000">
+              <a:rPr sz="2400">
                 <a:solidFill>
                   <a:srgbClr val="FFFFFF"/>
                 </a:solidFill>
@@ -11486,7 +11207,7 @@
                 <a:ea typeface="Play"/>
                 <a:cs typeface="Play"/>
               </a:rPr>
-              <a:t>• Инференс gpt-oss-20b стоит 1 400 рублей за 6 недель</a:t>
+              <a:t>• Собирает план колоды</a:t>
             </a:r>
           </a:p>
           <a:p>
@@ -11494,7 +11215,7 @@
               <a:spcAft>
                 <a:spcPts val="300"/>
               </a:spcAft>
-              <a:defRPr sz="2000">
+              <a:defRPr sz="2400">
                 <a:solidFill>
                   <a:srgbClr val="FFFFFF"/>
                 </a:solidFill>
@@ -11504,7 +11225,7 @@
               </a:defRPr>
             </a:pPr>
             <a:r>
-              <a:rPr sz="2000">
+              <a:rPr sz="2400">
                 <a:solidFill>
                   <a:srgbClr val="FFFFFF"/>
                 </a:solidFill>
@@ -11512,121 +11233,15 @@
                 <a:ea typeface="Play"/>
                 <a:cs typeface="Play"/>
               </a:rPr>
-              <a:t>• План запуска: Q3 2026 подключение 4 команд, Q4 2026 доступ компании, Q1 2027 генерация иллюстраций</a:t>
+              <a:t>• Вёрстка по системе</a:t>
             </a:r>
           </a:p>
-        </p:txBody>
-      </p:sp>
-      <p:sp>
-        <p:nvSpPr>
-          <p:cNvPr id="624" name="Rectangle 623"/>
-          <p:cNvSpPr/>
-          <p:nvPr/>
-        </p:nvSpPr>
-        <p:spPr>
-          <a:xfrm>
-            <a:off x="6267602" y="3675888"/>
-            <a:ext cx="5472562" cy="123444"/>
-          </a:xfrm>
-          <a:prstGeom prst="rect">
-            <a:avLst/>
-          </a:prstGeom>
-          <a:solidFill>
-            <a:srgbClr val="0077FF"/>
-          </a:solidFill>
-          <a:ln>
-            <a:noFill/>
-          </a:ln>
-        </p:spPr>
-        <p:style>
-          <a:lnRef idx="1">
-            <a:schemeClr val="accent1"/>
-          </a:lnRef>
-          <a:fillRef idx="3">
-            <a:schemeClr val="accent1"/>
-          </a:fillRef>
-          <a:effectRef idx="2">
-            <a:schemeClr val="accent1"/>
-          </a:effectRef>
-          <a:fontRef idx="minor">
-            <a:schemeClr val="lt1"/>
-          </a:fontRef>
-        </p:style>
-        <p:txBody>
-          <a:bodyPr rtlCol="0" anchor="ctr"/>
-          <a:lstStyle/>
           <a:p>
-            <a:pPr algn="ctr"/>
-          </a:p>
-        </p:txBody>
-      </p:sp>
-      <p:sp>
-        <p:nvSpPr>
-          <p:cNvPr id="625" name="Oval 624"/>
-          <p:cNvSpPr/>
-          <p:nvPr/>
-        </p:nvSpPr>
-        <p:spPr>
-          <a:xfrm>
-            <a:off x="6906067" y="3463981"/>
-            <a:ext cx="547256" cy="547256"/>
-          </a:xfrm>
-          <a:prstGeom prst="ellipse">
-            <a:avLst/>
-          </a:prstGeom>
-          <a:solidFill>
-            <a:srgbClr val="0077FF"/>
-          </a:solidFill>
-          <a:ln>
-            <a:noFill/>
-          </a:ln>
-        </p:spPr>
-        <p:style>
-          <a:lnRef idx="1">
-            <a:schemeClr val="accent1"/>
-          </a:lnRef>
-          <a:fillRef idx="3">
-            <a:schemeClr val="accent1"/>
-          </a:fillRef>
-          <a:effectRef idx="2">
-            <a:schemeClr val="accent1"/>
-          </a:effectRef>
-          <a:fontRef idx="minor">
-            <a:schemeClr val="lt1"/>
-          </a:fontRef>
-        </p:style>
-        <p:txBody>
-          <a:bodyPr rtlCol="0" anchor="ctr"/>
-          <a:lstStyle/>
-          <a:p>
-            <a:pPr algn="ctr"/>
-          </a:p>
-        </p:txBody>
-      </p:sp>
-      <p:sp>
-        <p:nvSpPr>
-          <p:cNvPr id="626" name="TextBox 625"/>
-          <p:cNvSpPr txBox="1"/>
-          <p:nvPr/>
-        </p:nvSpPr>
-        <p:spPr>
-          <a:xfrm>
-            <a:off x="6267602" y="1783080"/>
-            <a:ext cx="2736281" cy="1563624"/>
-          </a:xfrm>
-          <a:prstGeom prst="rect">
-            <a:avLst/>
-          </a:prstGeom>
-          <a:noFill/>
-        </p:spPr>
-        <p:txBody>
-          <a:bodyPr wrap="square" lIns="12700" rIns="12700" tIns="12700" bIns="12700">
-            <a:spAutoFit/>
-          </a:bodyPr>
-          <a:lstStyle/>
-          <a:p>
-            <a:pPr algn="ctr">
-              <a:defRPr sz="1400" b="0">
+            <a:pPr algn="l">
+              <a:spcAft>
+                <a:spcPts val="300"/>
+              </a:spcAft>
+              <a:defRPr sz="2400">
                 <a:solidFill>
                   <a:srgbClr val="FFFFFF"/>
                 </a:solidFill>
@@ -11636,7 +11251,7 @@
               </a:defRPr>
             </a:pPr>
             <a:r>
-              <a:rPr sz="1400" b="0">
+              <a:rPr sz="2400">
                 <a:solidFill>
                   <a:srgbClr val="FFFFFF"/>
                 </a:solidFill>
@@ -11644,189 +11259,618 @@
                 <a:ea typeface="Play"/>
                 <a:cs typeface="Play"/>
               </a:rPr>
-              <a:t>Q3 2026: подключение 4 команд</a:t>
+              <a:t>• Аудит качества</a:t>
             </a:r>
           </a:p>
         </p:txBody>
       </p:sp>
-      <p:sp>
-        <p:nvSpPr>
-          <p:cNvPr id="627" name="Oval 626"/>
-          <p:cNvSpPr/>
+      <p:grpSp>
+        <p:nvGrpSpPr>
+          <p:cNvPr id="2" name="illustration:builtin-presentation"/>
+          <p:cNvGrpSpPr/>
           <p:nvPr/>
-        </p:nvSpPr>
-        <p:spPr>
+        </p:nvGrpSpPr>
+        <p:grpSpPr>
           <a:xfrm>
-            <a:off x="8730254" y="3463981"/>
-            <a:ext cx="547256" cy="547256"/>
+            <a:off x="7815241" y="2356138"/>
+            <a:ext cx="3033988" cy="3033988"/>
+            <a:chOff x="7815241" y="2356138"/>
+            <a:chExt cx="3033988" cy="3033988"/>
           </a:xfrm>
-          <a:prstGeom prst="ellipse">
-            <a:avLst/>
-          </a:prstGeom>
-          <a:solidFill>
-            <a:srgbClr val="0077FF"/>
-          </a:solidFill>
-          <a:ln>
-            <a:noFill/>
-          </a:ln>
-        </p:spPr>
-        <p:style>
-          <a:lnRef idx="1">
-            <a:schemeClr val="accent1"/>
-          </a:lnRef>
-          <a:fillRef idx="3">
-            <a:schemeClr val="accent1"/>
-          </a:fillRef>
-          <a:effectRef idx="2">
-            <a:schemeClr val="accent1"/>
-          </a:effectRef>
-          <a:fontRef idx="minor">
-            <a:schemeClr val="lt1"/>
-          </a:fontRef>
-        </p:style>
-        <p:txBody>
-          <a:bodyPr rtlCol="0" anchor="ctr"/>
-          <a:lstStyle/>
-          <a:p>
-            <a:pPr algn="ctr"/>
-          </a:p>
-        </p:txBody>
-      </p:sp>
-      <p:sp>
-        <p:nvSpPr>
-          <p:cNvPr id="628" name="TextBox 627"/>
-          <p:cNvSpPr txBox="1"/>
-          <p:nvPr/>
-        </p:nvSpPr>
-        <p:spPr>
-          <a:xfrm>
-            <a:off x="7635742" y="4223144"/>
-            <a:ext cx="2736281" cy="1563624"/>
-          </a:xfrm>
-          <a:prstGeom prst="rect">
-            <a:avLst/>
-          </a:prstGeom>
-          <a:noFill/>
-        </p:spPr>
-        <p:txBody>
-          <a:bodyPr wrap="square" lIns="12700" rIns="12700" tIns="12700" bIns="12700">
-            <a:spAutoFit/>
-          </a:bodyPr>
-          <a:lstStyle/>
-          <a:p>
-            <a:pPr algn="ctr">
-              <a:defRPr sz="1400" b="0">
-                <a:solidFill>
-                  <a:srgbClr val="FFFFFF"/>
-                </a:solidFill>
-                <a:latin typeface="Play"/>
-                <a:ea typeface="Play"/>
-                <a:cs typeface="Play"/>
-              </a:defRPr>
-            </a:pPr>
-            <a:r>
-              <a:rPr sz="1400" b="0">
-                <a:solidFill>
-                  <a:srgbClr val="FFFFFF"/>
-                </a:solidFill>
-                <a:latin typeface="Play"/>
-                <a:ea typeface="Play"/>
-                <a:cs typeface="Play"/>
-              </a:rPr>
-              <a:t>Q4 2026: доступ для всей компании</a:t>
-            </a:r>
-          </a:p>
-        </p:txBody>
-      </p:sp>
-      <p:sp>
-        <p:nvSpPr>
-          <p:cNvPr id="629" name="Oval 628"/>
-          <p:cNvSpPr/>
-          <p:nvPr/>
-        </p:nvSpPr>
-        <p:spPr>
-          <a:xfrm>
-            <a:off x="10554442" y="3463981"/>
-            <a:ext cx="547256" cy="547256"/>
-          </a:xfrm>
-          <a:prstGeom prst="ellipse">
-            <a:avLst/>
-          </a:prstGeom>
-          <a:solidFill>
-            <a:srgbClr val="0077FF"/>
-          </a:solidFill>
-          <a:ln>
-            <a:noFill/>
-          </a:ln>
-        </p:spPr>
-        <p:style>
-          <a:lnRef idx="1">
-            <a:schemeClr val="accent1"/>
-          </a:lnRef>
-          <a:fillRef idx="3">
-            <a:schemeClr val="accent1"/>
-          </a:fillRef>
-          <a:effectRef idx="2">
-            <a:schemeClr val="accent1"/>
-          </a:effectRef>
-          <a:fontRef idx="minor">
-            <a:schemeClr val="lt1"/>
-          </a:fontRef>
-        </p:style>
-        <p:txBody>
-          <a:bodyPr rtlCol="0" anchor="ctr"/>
-          <a:lstStyle/>
-          <a:p>
-            <a:pPr algn="ctr"/>
-          </a:p>
-        </p:txBody>
-      </p:sp>
-      <p:sp>
-        <p:nvSpPr>
-          <p:cNvPr id="630" name="TextBox 629"/>
-          <p:cNvSpPr txBox="1"/>
-          <p:nvPr/>
-        </p:nvSpPr>
-        <p:spPr>
-          <a:xfrm>
-            <a:off x="9003883" y="1783080"/>
-            <a:ext cx="2736281" cy="1563624"/>
-          </a:xfrm>
-          <a:prstGeom prst="rect">
-            <a:avLst/>
-          </a:prstGeom>
-          <a:noFill/>
-        </p:spPr>
-        <p:txBody>
-          <a:bodyPr wrap="square" lIns="12700" rIns="12700" tIns="12700" bIns="12700">
-            <a:spAutoFit/>
-          </a:bodyPr>
-          <a:lstStyle/>
-          <a:p>
-            <a:pPr algn="ctr">
-              <a:defRPr sz="1400" b="0">
-                <a:solidFill>
-                  <a:srgbClr val="FFFFFF"/>
-                </a:solidFill>
-                <a:latin typeface="Play"/>
-                <a:ea typeface="Play"/>
-                <a:cs typeface="Play"/>
-              </a:defRPr>
-            </a:pPr>
-            <a:r>
-              <a:rPr sz="1400" b="0">
-                <a:solidFill>
-                  <a:srgbClr val="FFFFFF"/>
-                </a:solidFill>
-                <a:latin typeface="Play"/>
-                <a:ea typeface="Play"/>
-                <a:cs typeface="Play"/>
-              </a:rPr>
-              <a:t>Q1 2027: генерация иллюстраций</a:t>
-            </a:r>
-          </a:p>
-        </p:txBody>
-      </p:sp>
+        </p:grpSpPr>
+        <p:sp>
+          <p:nvSpPr>
+            <p:cNvPr id="624" name="Oval 623"/>
+            <p:cNvSpPr/>
+            <p:nvPr/>
+          </p:nvSpPr>
+          <p:spPr>
+            <a:xfrm>
+              <a:off x="7815241" y="2356138"/>
+              <a:ext cx="3033988" cy="3033988"/>
+            </a:xfrm>
+            <a:prstGeom prst="ellipse">
+              <a:avLst/>
+            </a:prstGeom>
+            <a:solidFill>
+              <a:srgbClr val="0E2137"/>
+            </a:solidFill>
+            <a:ln>
+              <a:noFill/>
+            </a:ln>
+            <a:effectLst/>
+          </p:spPr>
+          <p:style>
+            <a:lnRef idx="1">
+              <a:schemeClr val="accent1"/>
+            </a:lnRef>
+            <a:fillRef idx="3">
+              <a:schemeClr val="accent1"/>
+            </a:fillRef>
+            <a:effectRef idx="2">
+              <a:schemeClr val="accent1"/>
+            </a:effectRef>
+            <a:fontRef idx="minor">
+              <a:schemeClr val="lt1"/>
+            </a:fontRef>
+          </p:style>
+          <p:txBody>
+            <a:bodyPr rtlCol="0" anchor="ctr"/>
+            <a:lstStyle/>
+            <a:p>
+              <a:pPr algn="ctr"/>
+            </a:p>
+          </p:txBody>
+        </p:sp>
+        <p:sp>
+          <p:nvSpPr>
+            <p:cNvPr id="625" name="Rounded Rectangle 624"/>
+            <p:cNvSpPr/>
+            <p:nvPr/>
+          </p:nvSpPr>
+          <p:spPr>
+            <a:xfrm>
+              <a:off x="7935638" y="2765486"/>
+              <a:ext cx="2793195" cy="1805945"/>
+            </a:xfrm>
+            <a:prstGeom prst="roundRect">
+              <a:avLst>
+                <a:gd name="adj" fmla="val 9333"/>
+              </a:avLst>
+            </a:prstGeom>
+            <a:solidFill>
+              <a:srgbClr val="111111"/>
+            </a:solidFill>
+            <a:ln>
+              <a:noFill/>
+            </a:ln>
+            <a:effectLst/>
+          </p:spPr>
+          <p:style>
+            <a:lnRef idx="1">
+              <a:schemeClr val="accent1"/>
+            </a:lnRef>
+            <a:fillRef idx="3">
+              <a:schemeClr val="accent1"/>
+            </a:fillRef>
+            <a:effectRef idx="2">
+              <a:schemeClr val="accent1"/>
+            </a:effectRef>
+            <a:fontRef idx="minor">
+              <a:schemeClr val="lt1"/>
+            </a:fontRef>
+          </p:style>
+          <p:txBody>
+            <a:bodyPr rtlCol="0" anchor="ctr"/>
+            <a:lstStyle/>
+            <a:p>
+              <a:pPr algn="ctr"/>
+            </a:p>
+          </p:txBody>
+        </p:sp>
+        <p:sp>
+          <p:nvSpPr>
+            <p:cNvPr id="626" name="Rounded Rectangle 625"/>
+            <p:cNvSpPr/>
+            <p:nvPr/>
+          </p:nvSpPr>
+          <p:spPr>
+            <a:xfrm>
+              <a:off x="7935638" y="2765486"/>
+              <a:ext cx="2793195" cy="361189"/>
+            </a:xfrm>
+            <a:prstGeom prst="roundRect">
+              <a:avLst>
+                <a:gd name="adj" fmla="val 46666"/>
+              </a:avLst>
+            </a:prstGeom>
+            <a:solidFill>
+              <a:srgbClr val="0077FF"/>
+            </a:solidFill>
+            <a:ln>
+              <a:noFill/>
+            </a:ln>
+            <a:effectLst/>
+          </p:spPr>
+          <p:style>
+            <a:lnRef idx="1">
+              <a:schemeClr val="accent1"/>
+            </a:lnRef>
+            <a:fillRef idx="3">
+              <a:schemeClr val="accent1"/>
+            </a:fillRef>
+            <a:effectRef idx="2">
+              <a:schemeClr val="accent1"/>
+            </a:effectRef>
+            <a:fontRef idx="minor">
+              <a:schemeClr val="lt1"/>
+            </a:fontRef>
+          </p:style>
+          <p:txBody>
+            <a:bodyPr rtlCol="0" anchor="ctr"/>
+            <a:lstStyle/>
+            <a:p>
+              <a:pPr algn="ctr"/>
+            </a:p>
+          </p:txBody>
+        </p:sp>
+        <p:sp>
+          <p:nvSpPr>
+            <p:cNvPr id="627" name="Rectangle 626"/>
+            <p:cNvSpPr/>
+            <p:nvPr/>
+          </p:nvSpPr>
+          <p:spPr>
+            <a:xfrm>
+              <a:off x="7935638" y="2958120"/>
+              <a:ext cx="2793195" cy="168554"/>
+            </a:xfrm>
+            <a:prstGeom prst="rect">
+              <a:avLst/>
+            </a:prstGeom>
+            <a:solidFill>
+              <a:srgbClr val="0077FF"/>
+            </a:solidFill>
+            <a:ln>
+              <a:noFill/>
+            </a:ln>
+            <a:effectLst/>
+          </p:spPr>
+          <p:style>
+            <a:lnRef idx="1">
+              <a:schemeClr val="accent1"/>
+            </a:lnRef>
+            <a:fillRef idx="3">
+              <a:schemeClr val="accent1"/>
+            </a:fillRef>
+            <a:effectRef idx="2">
+              <a:schemeClr val="accent1"/>
+            </a:effectRef>
+            <a:fontRef idx="minor">
+              <a:schemeClr val="lt1"/>
+            </a:fontRef>
+          </p:style>
+          <p:txBody>
+            <a:bodyPr rtlCol="0" anchor="ctr"/>
+            <a:lstStyle/>
+            <a:p>
+              <a:pPr algn="ctr"/>
+            </a:p>
+          </p:txBody>
+        </p:sp>
+        <p:sp>
+          <p:nvSpPr>
+            <p:cNvPr id="628" name="Rounded Rectangle 627"/>
+            <p:cNvSpPr/>
+            <p:nvPr/>
+          </p:nvSpPr>
+          <p:spPr>
+            <a:xfrm>
+              <a:off x="8224589" y="3367467"/>
+              <a:ext cx="1011329" cy="120396"/>
+            </a:xfrm>
+            <a:prstGeom prst="roundRect">
+              <a:avLst>
+                <a:gd name="adj" fmla="val 50000"/>
+              </a:avLst>
+            </a:prstGeom>
+            <a:solidFill>
+              <a:srgbClr val="FFFFFF"/>
+            </a:solidFill>
+            <a:ln>
+              <a:noFill/>
+            </a:ln>
+            <a:effectLst/>
+          </p:spPr>
+          <p:style>
+            <a:lnRef idx="1">
+              <a:schemeClr val="accent1"/>
+            </a:lnRef>
+            <a:fillRef idx="3">
+              <a:schemeClr val="accent1"/>
+            </a:fillRef>
+            <a:effectRef idx="2">
+              <a:schemeClr val="accent1"/>
+            </a:effectRef>
+            <a:fontRef idx="minor">
+              <a:schemeClr val="lt1"/>
+            </a:fontRef>
+          </p:style>
+          <p:txBody>
+            <a:bodyPr rtlCol="0" anchor="ctr"/>
+            <a:lstStyle/>
+            <a:p>
+              <a:pPr algn="ctr"/>
+            </a:p>
+          </p:txBody>
+        </p:sp>
+        <p:sp>
+          <p:nvSpPr>
+            <p:cNvPr id="629" name="Rounded Rectangle 628"/>
+            <p:cNvSpPr/>
+            <p:nvPr/>
+          </p:nvSpPr>
+          <p:spPr>
+            <a:xfrm>
+              <a:off x="8224589" y="3608260"/>
+              <a:ext cx="770536" cy="96317"/>
+            </a:xfrm>
+            <a:prstGeom prst="roundRect">
+              <a:avLst>
+                <a:gd name="adj" fmla="val 50000"/>
+              </a:avLst>
+            </a:prstGeom>
+            <a:solidFill>
+              <a:srgbClr val="585858"/>
+            </a:solidFill>
+            <a:ln>
+              <a:noFill/>
+            </a:ln>
+            <a:effectLst/>
+          </p:spPr>
+          <p:style>
+            <a:lnRef idx="1">
+              <a:schemeClr val="accent1"/>
+            </a:lnRef>
+            <a:fillRef idx="3">
+              <a:schemeClr val="accent1"/>
+            </a:fillRef>
+            <a:effectRef idx="2">
+              <a:schemeClr val="accent1"/>
+            </a:effectRef>
+            <a:fontRef idx="minor">
+              <a:schemeClr val="lt1"/>
+            </a:fontRef>
+          </p:style>
+          <p:txBody>
+            <a:bodyPr rtlCol="0" anchor="ctr"/>
+            <a:lstStyle/>
+            <a:p>
+              <a:pPr algn="ctr"/>
+            </a:p>
+          </p:txBody>
+        </p:sp>
+        <p:sp>
+          <p:nvSpPr>
+            <p:cNvPr id="630" name="Rounded Rectangle 629"/>
+            <p:cNvSpPr/>
+            <p:nvPr/>
+          </p:nvSpPr>
+          <p:spPr>
+            <a:xfrm>
+              <a:off x="8224589" y="3800894"/>
+              <a:ext cx="890932" cy="96317"/>
+            </a:xfrm>
+            <a:prstGeom prst="roundRect">
+              <a:avLst>
+                <a:gd name="adj" fmla="val 50000"/>
+              </a:avLst>
+            </a:prstGeom>
+            <a:solidFill>
+              <a:srgbClr val="585858"/>
+            </a:solidFill>
+            <a:ln>
+              <a:noFill/>
+            </a:ln>
+            <a:effectLst/>
+          </p:spPr>
+          <p:style>
+            <a:lnRef idx="1">
+              <a:schemeClr val="accent1"/>
+            </a:lnRef>
+            <a:fillRef idx="3">
+              <a:schemeClr val="accent1"/>
+            </a:fillRef>
+            <a:effectRef idx="2">
+              <a:schemeClr val="accent1"/>
+            </a:effectRef>
+            <a:fontRef idx="minor">
+              <a:schemeClr val="lt1"/>
+            </a:fontRef>
+          </p:style>
+          <p:txBody>
+            <a:bodyPr rtlCol="0" anchor="ctr"/>
+            <a:lstStyle/>
+            <a:p>
+              <a:pPr algn="ctr"/>
+            </a:p>
+          </p:txBody>
+        </p:sp>
+        <p:sp>
+          <p:nvSpPr>
+            <p:cNvPr id="631" name="Rounded Rectangle 630"/>
+            <p:cNvSpPr/>
+            <p:nvPr/>
+          </p:nvSpPr>
+          <p:spPr>
+            <a:xfrm>
+              <a:off x="8224589" y="3993528"/>
+              <a:ext cx="674219" cy="96317"/>
+            </a:xfrm>
+            <a:prstGeom prst="roundRect">
+              <a:avLst>
+                <a:gd name="adj" fmla="val 50000"/>
+              </a:avLst>
+            </a:prstGeom>
+            <a:solidFill>
+              <a:srgbClr val="585858"/>
+            </a:solidFill>
+            <a:ln>
+              <a:noFill/>
+            </a:ln>
+            <a:effectLst/>
+          </p:spPr>
+          <p:style>
+            <a:lnRef idx="1">
+              <a:schemeClr val="accent1"/>
+            </a:lnRef>
+            <a:fillRef idx="3">
+              <a:schemeClr val="accent1"/>
+            </a:fillRef>
+            <a:effectRef idx="2">
+              <a:schemeClr val="accent1"/>
+            </a:effectRef>
+            <a:fontRef idx="minor">
+              <a:schemeClr val="lt1"/>
+            </a:fontRef>
+          </p:style>
+          <p:txBody>
+            <a:bodyPr rtlCol="0" anchor="ctr"/>
+            <a:lstStyle/>
+            <a:p>
+              <a:pPr algn="ctr"/>
+            </a:p>
+          </p:txBody>
+        </p:sp>
+        <p:sp>
+          <p:nvSpPr>
+            <p:cNvPr id="632" name="Rounded Rectangle 631"/>
+            <p:cNvSpPr/>
+            <p:nvPr/>
+          </p:nvSpPr>
+          <p:spPr>
+            <a:xfrm>
+              <a:off x="9500790" y="3873132"/>
+              <a:ext cx="216713" cy="457506"/>
+            </a:xfrm>
+            <a:prstGeom prst="roundRect">
+              <a:avLst>
+                <a:gd name="adj" fmla="val 22222"/>
+              </a:avLst>
+            </a:prstGeom>
+            <a:solidFill>
+              <a:srgbClr val="585858"/>
+            </a:solidFill>
+            <a:ln>
+              <a:noFill/>
+            </a:ln>
+            <a:effectLst/>
+          </p:spPr>
+          <p:style>
+            <a:lnRef idx="1">
+              <a:schemeClr val="accent1"/>
+            </a:lnRef>
+            <a:fillRef idx="3">
+              <a:schemeClr val="accent1"/>
+            </a:fillRef>
+            <a:effectRef idx="2">
+              <a:schemeClr val="accent1"/>
+            </a:effectRef>
+            <a:fontRef idx="minor">
+              <a:schemeClr val="lt1"/>
+            </a:fontRef>
+          </p:style>
+          <p:txBody>
+            <a:bodyPr rtlCol="0" anchor="ctr"/>
+            <a:lstStyle/>
+            <a:p>
+              <a:pPr algn="ctr"/>
+            </a:p>
+          </p:txBody>
+        </p:sp>
+        <p:sp>
+          <p:nvSpPr>
+            <p:cNvPr id="633" name="Rounded Rectangle 632"/>
+            <p:cNvSpPr/>
+            <p:nvPr/>
+          </p:nvSpPr>
+          <p:spPr>
+            <a:xfrm>
+              <a:off x="9813821" y="3632339"/>
+              <a:ext cx="216713" cy="698298"/>
+            </a:xfrm>
+            <a:prstGeom prst="roundRect">
+              <a:avLst>
+                <a:gd name="adj" fmla="val 22222"/>
+              </a:avLst>
+            </a:prstGeom>
+            <a:solidFill>
+              <a:srgbClr val="6DBCFF"/>
+            </a:solidFill>
+            <a:ln>
+              <a:noFill/>
+            </a:ln>
+            <a:effectLst/>
+          </p:spPr>
+          <p:style>
+            <a:lnRef idx="1">
+              <a:schemeClr val="accent1"/>
+            </a:lnRef>
+            <a:fillRef idx="3">
+              <a:schemeClr val="accent1"/>
+            </a:fillRef>
+            <a:effectRef idx="2">
+              <a:schemeClr val="accent1"/>
+            </a:effectRef>
+            <a:fontRef idx="minor">
+              <a:schemeClr val="lt1"/>
+            </a:fontRef>
+          </p:style>
+          <p:txBody>
+            <a:bodyPr rtlCol="0" anchor="ctr"/>
+            <a:lstStyle/>
+            <a:p>
+              <a:pPr algn="ctr"/>
+            </a:p>
+          </p:txBody>
+        </p:sp>
+        <p:sp>
+          <p:nvSpPr>
+            <p:cNvPr id="634" name="Rounded Rectangle 633"/>
+            <p:cNvSpPr/>
+            <p:nvPr/>
+          </p:nvSpPr>
+          <p:spPr>
+            <a:xfrm>
+              <a:off x="10126851" y="3391547"/>
+              <a:ext cx="216713" cy="939091"/>
+            </a:xfrm>
+            <a:prstGeom prst="roundRect">
+              <a:avLst>
+                <a:gd name="adj" fmla="val 22222"/>
+              </a:avLst>
+            </a:prstGeom>
+            <a:solidFill>
+              <a:srgbClr val="0077FF"/>
+            </a:solidFill>
+            <a:ln>
+              <a:noFill/>
+            </a:ln>
+            <a:effectLst/>
+          </p:spPr>
+          <p:style>
+            <a:lnRef idx="1">
+              <a:schemeClr val="accent1"/>
+            </a:lnRef>
+            <a:fillRef idx="3">
+              <a:schemeClr val="accent1"/>
+            </a:fillRef>
+            <a:effectRef idx="2">
+              <a:schemeClr val="accent1"/>
+            </a:effectRef>
+            <a:fontRef idx="minor">
+              <a:schemeClr val="lt1"/>
+            </a:fontRef>
+          </p:style>
+          <p:txBody>
+            <a:bodyPr rtlCol="0" anchor="ctr"/>
+            <a:lstStyle/>
+            <a:p>
+              <a:pPr algn="ctr"/>
+            </a:p>
+          </p:txBody>
+        </p:sp>
+        <p:sp>
+          <p:nvSpPr>
+            <p:cNvPr id="635" name="Rectangle 634"/>
+            <p:cNvSpPr/>
+            <p:nvPr/>
+          </p:nvSpPr>
+          <p:spPr>
+            <a:xfrm>
+              <a:off x="9259998" y="4571431"/>
+              <a:ext cx="144475" cy="433426"/>
+            </a:xfrm>
+            <a:prstGeom prst="rect">
+              <a:avLst/>
+            </a:prstGeom>
+            <a:solidFill>
+              <a:srgbClr val="FFFFFF"/>
+            </a:solidFill>
+            <a:ln>
+              <a:noFill/>
+            </a:ln>
+            <a:effectLst/>
+          </p:spPr>
+          <p:style>
+            <a:lnRef idx="1">
+              <a:schemeClr val="accent1"/>
+            </a:lnRef>
+            <a:fillRef idx="3">
+              <a:schemeClr val="accent1"/>
+            </a:fillRef>
+            <a:effectRef idx="2">
+              <a:schemeClr val="accent1"/>
+            </a:effectRef>
+            <a:fontRef idx="minor">
+              <a:schemeClr val="lt1"/>
+            </a:fontRef>
+          </p:style>
+          <p:txBody>
+            <a:bodyPr rtlCol="0" anchor="ctr"/>
+            <a:lstStyle/>
+            <a:p>
+              <a:pPr algn="ctr"/>
+            </a:p>
+          </p:txBody>
+        </p:sp>
+        <p:sp>
+          <p:nvSpPr>
+            <p:cNvPr id="636" name="Rounded Rectangle 635"/>
+            <p:cNvSpPr/>
+            <p:nvPr/>
+          </p:nvSpPr>
+          <p:spPr>
+            <a:xfrm>
+              <a:off x="8730254" y="4956699"/>
+              <a:ext cx="1203963" cy="144475"/>
+            </a:xfrm>
+            <a:prstGeom prst="roundRect">
+              <a:avLst>
+                <a:gd name="adj" fmla="val 50000"/>
+              </a:avLst>
+            </a:prstGeom>
+            <a:solidFill>
+              <a:srgbClr val="FFFFFF"/>
+            </a:solidFill>
+            <a:ln>
+              <a:noFill/>
+            </a:ln>
+            <a:effectLst/>
+          </p:spPr>
+          <p:style>
+            <a:lnRef idx="1">
+              <a:schemeClr val="accent1"/>
+            </a:lnRef>
+            <a:fillRef idx="3">
+              <a:schemeClr val="accent1"/>
+            </a:fillRef>
+            <a:effectRef idx="2">
+              <a:schemeClr val="accent1"/>
+            </a:effectRef>
+            <a:fontRef idx="minor">
+              <a:schemeClr val="lt1"/>
+            </a:fontRef>
+          </p:style>
+          <p:txBody>
+            <a:bodyPr rtlCol="0" anchor="ctr"/>
+            <a:lstStyle/>
+            <a:p>
+              <a:pPr algn="ctr"/>
+            </a:p>
+          </p:txBody>
+        </p:sp>
+      </p:grpSp>
     </p:spTree>
   </p:cSld>
   <p:clrMapOvr>
@@ -11854,7 +11898,7 @@
         <p:spPr>
           <a:xfrm>
             <a:off x="429280" y="424715"/>
-            <a:ext cx="7827264" cy="822960"/>
+            <a:ext cx="7827264" cy="1183640"/>
           </a:xfrm>
           <a:prstGeom prst="rect">
             <a:avLst/>
@@ -11889,187 +11933,29 @@
                 <a:ea typeface="Play"/>
                 <a:cs typeface="Play"/>
               </a:rPr>
-              <a:t>План пилота</a:t>
+              <a:t>Сокращение времени сборки до 4 мин</a:t>
             </a:r>
           </a:p>
         </p:txBody>
       </p:sp>
-      <p:sp>
-        <p:nvSpPr>
-          <p:cNvPr id="3" name="body_left"/>
-          <p:cNvSpPr txBox="1"/>
+      <p:graphicFrame>
+        <p:nvGraphicFramePr>
+          <p:cNvPr id="3" name="Chart 2"/>
+          <p:cNvGraphicFramePr>
+            <a:graphicFrameLocks noGrp="1"/>
+          </p:cNvGraphicFramePr>
           <p:nvPr/>
-        </p:nvSpPr>
-        <p:spPr>
-          <a:xfrm>
-            <a:off x="429280" y="1592290"/>
-            <a:ext cx="5472562" cy="4181322"/>
-          </a:xfrm>
-          <a:prstGeom prst="rect">
-            <a:avLst/>
-          </a:prstGeom>
-          <a:noFill/>
-        </p:spPr>
-        <p:txBody>
-          <a:bodyPr wrap="square" lIns="76200" rIns="76200" tIns="50800" bIns="50800">
-            <a:spAutoFit/>
-          </a:bodyPr>
-          <a:lstStyle/>
-          <a:p>
-            <a:pPr algn="l">
-              <a:spcAft>
-                <a:spcPts val="300"/>
-              </a:spcAft>
-              <a:defRPr sz="2800">
-                <a:solidFill>
-                  <a:srgbClr val="FFFFFF"/>
-                </a:solidFill>
-                <a:latin typeface="Play"/>
-                <a:ea typeface="Play"/>
-                <a:cs typeface="Play"/>
-              </a:defRPr>
-            </a:pPr>
-            <a:r>
-              <a:rPr sz="2800">
-                <a:solidFill>
-                  <a:srgbClr val="FFFFFF"/>
-                </a:solidFill>
-                <a:latin typeface="Play"/>
-                <a:ea typeface="Play"/>
-                <a:cs typeface="Play"/>
-              </a:rPr>
-              <a:t>• Пилот длился 6 недель на двух командах</a:t>
-            </a:r>
-          </a:p>
-          <a:p>
-            <a:pPr algn="l">
-              <a:spcAft>
-                <a:spcPts val="300"/>
-              </a:spcAft>
-              <a:defRPr sz="2800">
-                <a:solidFill>
-                  <a:srgbClr val="FFFFFF"/>
-                </a:solidFill>
-                <a:latin typeface="Play"/>
-                <a:ea typeface="Play"/>
-                <a:cs typeface="Play"/>
-              </a:defRPr>
-            </a:pPr>
-            <a:r>
-              <a:rPr sz="2800">
-                <a:solidFill>
-                  <a:srgbClr val="FFFFFF"/>
-                </a:solidFill>
-                <a:latin typeface="Play"/>
-                <a:ea typeface="Play"/>
-                <a:cs typeface="Play"/>
-              </a:rPr>
-              <a:t>• Собрано 68 презентаций</a:t>
-            </a:r>
-          </a:p>
-          <a:p>
-            <a:pPr algn="l">
-              <a:spcAft>
-                <a:spcPts val="300"/>
-              </a:spcAft>
-              <a:defRPr sz="2800">
-                <a:solidFill>
-                  <a:srgbClr val="FFFFFF"/>
-                </a:solidFill>
-                <a:latin typeface="Play"/>
-                <a:ea typeface="Play"/>
-                <a:cs typeface="Play"/>
-              </a:defRPr>
-            </a:pPr>
-            <a:r>
-              <a:rPr sz="2800">
-                <a:solidFill>
-                  <a:srgbClr val="FFFFFF"/>
-                </a:solidFill>
-                <a:latin typeface="Play"/>
-                <a:ea typeface="Play"/>
-                <a:cs typeface="Play"/>
-              </a:rPr>
-              <a:t>• Среднее время сборки 4 минуты</a:t>
-            </a:r>
-          </a:p>
-        </p:txBody>
-      </p:sp>
-      <p:sp>
-        <p:nvSpPr>
-          <p:cNvPr id="4" name="body_right"/>
-          <p:cNvSpPr txBox="1"/>
-          <p:nvPr/>
-        </p:nvSpPr>
-        <p:spPr>
-          <a:xfrm>
-            <a:off x="6267602" y="1592290"/>
-            <a:ext cx="5472562" cy="4181322"/>
-          </a:xfrm>
-          <a:prstGeom prst="rect">
-            <a:avLst/>
-          </a:prstGeom>
-          <a:noFill/>
-        </p:spPr>
-        <p:txBody>
-          <a:bodyPr wrap="square" lIns="76200" rIns="76200" tIns="50800" bIns="50800">
-            <a:spAutoFit/>
-          </a:bodyPr>
-          <a:lstStyle/>
-          <a:p>
-            <a:pPr algn="l">
-              <a:spcAft>
-                <a:spcPts val="300"/>
-              </a:spcAft>
-              <a:defRPr sz="2800">
-                <a:solidFill>
-                  <a:srgbClr val="FFFFFF"/>
-                </a:solidFill>
-                <a:latin typeface="Play"/>
-                <a:ea typeface="Play"/>
-                <a:cs typeface="Play"/>
-              </a:defRPr>
-            </a:pPr>
-            <a:r>
-              <a:rPr sz="2800">
-                <a:solidFill>
-                  <a:srgbClr val="FFFFFF"/>
-                </a:solidFill>
-                <a:latin typeface="Play"/>
-                <a:ea typeface="Play"/>
-                <a:cs typeface="Play"/>
-              </a:rPr>
-              <a:t>• Первый вариант готов за 1 день</a:t>
-            </a:r>
-          </a:p>
-          <a:p>
-            <a:pPr algn="l">
-              <a:spcAft>
-                <a:spcPts val="300"/>
-              </a:spcAft>
-              <a:defRPr sz="2800">
-                <a:solidFill>
-                  <a:srgbClr val="FFFFFF"/>
-                </a:solidFill>
-                <a:latin typeface="Play"/>
-                <a:ea typeface="Play"/>
-                <a:cs typeface="Play"/>
-              </a:defRPr>
-            </a:pPr>
-            <a:r>
-              <a:rPr sz="2800">
-                <a:solidFill>
-                  <a:srgbClr val="FFFFFF"/>
-                </a:solidFill>
-                <a:latin typeface="Play"/>
-                <a:ea typeface="Play"/>
-                <a:cs typeface="Play"/>
-              </a:rPr>
-              <a:t>• Нарушения стиля 2 из 68, исправлены автоматически</a:t>
-            </a:r>
-          </a:p>
-        </p:txBody>
-      </p:sp>
+        </p:nvGraphicFramePr>
+        <p:xfrm>
+          <a:off x="6267602" y="1848385"/>
+          <a:ext cx="5472562" cy="4049494"/>
+        </p:xfrm>
+        <a:graphic>
+          <a:graphicData uri="http://schemas.openxmlformats.org/drawingml/2006/chart">
+            <c:chart xmlns:c="http://schemas.openxmlformats.org/drawingml/2006/chart" r:id="rId4"/>
+          </a:graphicData>
+        </a:graphic>
+      </p:graphicFrame>
     </p:spTree>
   </p:cSld>
   <p:clrMapOvr>
@@ -12097,7 +11983,7 @@
         <p:spPr>
           <a:xfrm>
             <a:off x="429280" y="424715"/>
-            <a:ext cx="7827264" cy="822960"/>
+            <a:ext cx="7827264" cy="1183640"/>
           </a:xfrm>
           <a:prstGeom prst="rect">
             <a:avLst/>
@@ -12132,741 +12018,29 @@
                 <a:ea typeface="Play"/>
                 <a:cs typeface="Play"/>
               </a:rPr>
-              <a:t>Что мы просим решить</a:t>
+              <a:t>Нарушений фирменного стиля — 2 из 68</a:t>
             </a:r>
           </a:p>
         </p:txBody>
       </p:sp>
-      <p:sp>
-        <p:nvSpPr>
-          <p:cNvPr id="3" name="body"/>
-          <p:cNvSpPr txBox="1"/>
+      <p:graphicFrame>
+        <p:nvGraphicFramePr>
+          <p:cNvPr id="3" name="Chart 2"/>
+          <p:cNvGraphicFramePr>
+            <a:graphicFrameLocks noGrp="1"/>
+          </p:cNvGraphicFramePr>
           <p:nvPr/>
-        </p:nvSpPr>
-        <p:spPr>
-          <a:xfrm>
-            <a:off x="429280" y="2600960"/>
-            <a:ext cx="6129269" cy="2479040"/>
-          </a:xfrm>
-          <a:prstGeom prst="rect">
-            <a:avLst/>
-          </a:prstGeom>
-          <a:noFill/>
-        </p:spPr>
-        <p:txBody>
-          <a:bodyPr wrap="square" lIns="76200" rIns="76200" tIns="50800" bIns="50800">
-            <a:spAutoFit/>
-          </a:bodyPr>
-          <a:lstStyle/>
-          <a:p>
-            <a:pPr algn="l">
-              <a:spcAft>
-                <a:spcPts val="300"/>
-              </a:spcAft>
-              <a:defRPr sz="2400">
-                <a:solidFill>
-                  <a:srgbClr val="FFFFFF"/>
-                </a:solidFill>
-                <a:latin typeface="Play"/>
-                <a:ea typeface="Play"/>
-                <a:cs typeface="Play"/>
-              </a:defRPr>
-            </a:pPr>
-            <a:r>
-              <a:rPr sz="2400">
-                <a:solidFill>
-                  <a:srgbClr val="FFFFFF"/>
-                </a:solidFill>
-                <a:latin typeface="Play"/>
-                <a:ea typeface="Play"/>
-                <a:cs typeface="Play"/>
-              </a:rPr>
-              <a:t>• Одобрить запуск сервиса на всю компанию</a:t>
-            </a:r>
-          </a:p>
-          <a:p>
-            <a:pPr algn="l">
-              <a:spcAft>
-                <a:spcPts val="300"/>
-              </a:spcAft>
-              <a:defRPr sz="2400">
-                <a:solidFill>
-                  <a:srgbClr val="FFFFFF"/>
-                </a:solidFill>
-                <a:latin typeface="Play"/>
-                <a:ea typeface="Play"/>
-                <a:cs typeface="Play"/>
-              </a:defRPr>
-            </a:pPr>
-            <a:r>
-              <a:rPr sz="2400">
-                <a:solidFill>
-                  <a:srgbClr val="FFFFFF"/>
-                </a:solidFill>
-                <a:latin typeface="Play"/>
-                <a:ea typeface="Play"/>
-                <a:cs typeface="Play"/>
-              </a:rPr>
-              <a:t>• Выделить бюджет на интеграцию и поддержку</a:t>
-            </a:r>
-          </a:p>
-          <a:p>
-            <a:pPr algn="l">
-              <a:spcAft>
-                <a:spcPts val="300"/>
-              </a:spcAft>
-              <a:defRPr sz="2400">
-                <a:solidFill>
-                  <a:srgbClr val="FFFFFF"/>
-                </a:solidFill>
-                <a:latin typeface="Play"/>
-                <a:ea typeface="Play"/>
-                <a:cs typeface="Play"/>
-              </a:defRPr>
-            </a:pPr>
-            <a:r>
-              <a:rPr sz="2400">
-                <a:solidFill>
-                  <a:srgbClr val="FFFFFF"/>
-                </a:solidFill>
-                <a:latin typeface="Play"/>
-                <a:ea typeface="Play"/>
-                <a:cs typeface="Play"/>
-              </a:rPr>
-              <a:t>• Согласовать сроки и ответственных за расширение</a:t>
-            </a:r>
-          </a:p>
-        </p:txBody>
-      </p:sp>
-      <p:grpSp>
-        <p:nvGrpSpPr>
-          <p:cNvPr id="4" name="illustration:builtin-discussion"/>
-          <p:cNvGrpSpPr/>
-          <p:nvPr/>
-        </p:nvGrpSpPr>
-        <p:grpSpPr>
-          <a:xfrm>
-            <a:off x="7718924" y="2323485"/>
-            <a:ext cx="3226623" cy="3033988"/>
-            <a:chOff x="7718924" y="2323485"/>
-            <a:chExt cx="3226623" cy="3033988"/>
-          </a:xfrm>
-        </p:grpSpPr>
-        <p:sp>
-          <p:nvSpPr>
-            <p:cNvPr id="5" name="Oval 4"/>
-            <p:cNvSpPr/>
-            <p:nvPr/>
-          </p:nvSpPr>
-          <p:spPr>
-            <a:xfrm>
-              <a:off x="7815241" y="2323485"/>
-              <a:ext cx="3033988" cy="3033988"/>
-            </a:xfrm>
-            <a:prstGeom prst="ellipse">
-              <a:avLst/>
-            </a:prstGeom>
-            <a:solidFill>
-              <a:srgbClr val="0E2137"/>
-            </a:solidFill>
-            <a:ln>
-              <a:noFill/>
-            </a:ln>
-            <a:effectLst/>
-          </p:spPr>
-          <p:style>
-            <a:lnRef idx="1">
-              <a:schemeClr val="accent1"/>
-            </a:lnRef>
-            <a:fillRef idx="3">
-              <a:schemeClr val="accent1"/>
-            </a:fillRef>
-            <a:effectRef idx="2">
-              <a:schemeClr val="accent1"/>
-            </a:effectRef>
-            <a:fontRef idx="minor">
-              <a:schemeClr val="lt1"/>
-            </a:fontRef>
-          </p:style>
-          <p:txBody>
-            <a:bodyPr rtlCol="0" anchor="ctr"/>
-            <a:lstStyle/>
-            <a:p>
-              <a:pPr algn="ctr"/>
-            </a:p>
-          </p:txBody>
-        </p:sp>
-        <p:sp>
-          <p:nvSpPr>
-            <p:cNvPr id="6" name="Freeform 5"/>
-            <p:cNvSpPr/>
-            <p:nvPr/>
-          </p:nvSpPr>
-          <p:spPr>
-            <a:xfrm>
-              <a:off x="7718924" y="2877308"/>
-              <a:ext cx="2239373" cy="1709628"/>
-            </a:xfrm>
-            <a:custGeom>
-              <a:avLst/>
-              <a:gdLst/>
-              <a:ahLst/>
-              <a:cxnLst/>
-              <a:rect l="l" t="t" r="r" b="b"/>
-              <a:pathLst>
-                <a:path w="2239373" h="1709628">
-                  <a:moveTo>
-                    <a:pt x="216714" y="0"/>
-                  </a:moveTo>
-                  <a:lnTo>
-                    <a:pt x="2022659" y="0"/>
-                  </a:lnTo>
-                  <a:lnTo>
-                    <a:pt x="2064942" y="4166"/>
-                  </a:lnTo>
-                  <a:lnTo>
-                    <a:pt x="2105588" y="16494"/>
-                  </a:lnTo>
-                  <a:lnTo>
-                    <a:pt x="2143055" y="36528"/>
-                  </a:lnTo>
-                  <a:lnTo>
-                    <a:pt x="2175900" y="63473"/>
-                  </a:lnTo>
-                  <a:lnTo>
-                    <a:pt x="2202844" y="96317"/>
-                  </a:lnTo>
-                  <a:lnTo>
-                    <a:pt x="2222878" y="133785"/>
-                  </a:lnTo>
-                  <a:lnTo>
-                    <a:pt x="2235207" y="174430"/>
-                  </a:lnTo>
-                  <a:lnTo>
-                    <a:pt x="2239373" y="216714"/>
-                  </a:lnTo>
-                  <a:lnTo>
-                    <a:pt x="2239373" y="1107647"/>
-                  </a:lnTo>
-                  <a:lnTo>
-                    <a:pt x="2235207" y="1149930"/>
-                  </a:lnTo>
-                  <a:lnTo>
-                    <a:pt x="2222878" y="1190576"/>
-                  </a:lnTo>
-                  <a:lnTo>
-                    <a:pt x="2202844" y="1228043"/>
-                  </a:lnTo>
-                  <a:lnTo>
-                    <a:pt x="2175900" y="1260887"/>
-                  </a:lnTo>
-                  <a:lnTo>
-                    <a:pt x="2143055" y="1287832"/>
-                  </a:lnTo>
-                  <a:lnTo>
-                    <a:pt x="2105588" y="1307866"/>
-                  </a:lnTo>
-                  <a:lnTo>
-                    <a:pt x="2064942" y="1320194"/>
-                  </a:lnTo>
-                  <a:lnTo>
-                    <a:pt x="2022659" y="1324360"/>
-                  </a:lnTo>
-                  <a:lnTo>
-                    <a:pt x="866854" y="1324360"/>
-                  </a:lnTo>
-                  <a:lnTo>
-                    <a:pt x="385269" y="1709628"/>
-                  </a:lnTo>
-                  <a:lnTo>
-                    <a:pt x="385269" y="1324360"/>
-                  </a:lnTo>
-                  <a:lnTo>
-                    <a:pt x="216714" y="1324360"/>
-                  </a:lnTo>
-                  <a:lnTo>
-                    <a:pt x="174431" y="1320194"/>
-                  </a:lnTo>
-                  <a:lnTo>
-                    <a:pt x="133785" y="1307866"/>
-                  </a:lnTo>
-                  <a:lnTo>
-                    <a:pt x="96317" y="1287832"/>
-                  </a:lnTo>
-                  <a:lnTo>
-                    <a:pt x="63473" y="1260887"/>
-                  </a:lnTo>
-                  <a:lnTo>
-                    <a:pt x="36529" y="1228043"/>
-                  </a:lnTo>
-                  <a:lnTo>
-                    <a:pt x="16495" y="1190576"/>
-                  </a:lnTo>
-                  <a:lnTo>
-                    <a:pt x="4166" y="1149930"/>
-                  </a:lnTo>
-                  <a:lnTo>
-                    <a:pt x="0" y="1107647"/>
-                  </a:lnTo>
-                  <a:lnTo>
-                    <a:pt x="0" y="216714"/>
-                  </a:lnTo>
-                  <a:lnTo>
-                    <a:pt x="4166" y="174430"/>
-                  </a:lnTo>
-                  <a:lnTo>
-                    <a:pt x="16495" y="133785"/>
-                  </a:lnTo>
-                  <a:lnTo>
-                    <a:pt x="36529" y="96317"/>
-                  </a:lnTo>
-                  <a:lnTo>
-                    <a:pt x="63473" y="63473"/>
-                  </a:lnTo>
-                  <a:lnTo>
-                    <a:pt x="96317" y="36528"/>
-                  </a:lnTo>
-                  <a:lnTo>
-                    <a:pt x="133785" y="16494"/>
-                  </a:lnTo>
-                  <a:lnTo>
-                    <a:pt x="174431" y="4166"/>
-                  </a:lnTo>
-                  <a:lnTo>
-                    <a:pt x="216714" y="0"/>
-                  </a:lnTo>
-                  <a:close/>
-                </a:path>
-              </a:pathLst>
-            </a:custGeom>
-            <a:solidFill>
-              <a:srgbClr val="0077FF"/>
-            </a:solidFill>
-            <a:ln>
-              <a:noFill/>
-            </a:ln>
-            <a:effectLst/>
-          </p:spPr>
-          <p:style>
-            <a:lnRef idx="1">
-              <a:schemeClr val="accent1"/>
-            </a:lnRef>
-            <a:fillRef idx="3">
-              <a:schemeClr val="accent1"/>
-            </a:fillRef>
-            <a:effectRef idx="2">
-              <a:schemeClr val="accent1"/>
-            </a:effectRef>
-            <a:fontRef idx="minor">
-              <a:schemeClr val="lt1"/>
-            </a:fontRef>
-          </p:style>
-          <p:txBody>
-            <a:bodyPr rtlCol="0" anchor="ctr"/>
-            <a:lstStyle/>
-            <a:p>
-              <a:pPr algn="ctr"/>
-            </a:p>
-          </p:txBody>
-        </p:sp>
-        <p:sp>
-          <p:nvSpPr>
-            <p:cNvPr id="7" name="Oval 6"/>
-            <p:cNvSpPr/>
-            <p:nvPr/>
-          </p:nvSpPr>
-          <p:spPr>
-            <a:xfrm>
-              <a:off x="8272748" y="3431131"/>
-              <a:ext cx="240792" cy="240792"/>
-            </a:xfrm>
-            <a:prstGeom prst="ellipse">
-              <a:avLst/>
-            </a:prstGeom>
-            <a:solidFill>
-              <a:srgbClr val="111111"/>
-            </a:solidFill>
-            <a:ln>
-              <a:noFill/>
-            </a:ln>
-            <a:effectLst/>
-          </p:spPr>
-          <p:style>
-            <a:lnRef idx="1">
-              <a:schemeClr val="accent1"/>
-            </a:lnRef>
-            <a:fillRef idx="3">
-              <a:schemeClr val="accent1"/>
-            </a:fillRef>
-            <a:effectRef idx="2">
-              <a:schemeClr val="accent1"/>
-            </a:effectRef>
-            <a:fontRef idx="minor">
-              <a:schemeClr val="lt1"/>
-            </a:fontRef>
-          </p:style>
-          <p:txBody>
-            <a:bodyPr rtlCol="0" anchor="ctr"/>
-            <a:lstStyle/>
-            <a:p>
-              <a:pPr algn="ctr"/>
-            </a:p>
-          </p:txBody>
-        </p:sp>
-        <p:sp>
-          <p:nvSpPr>
-            <p:cNvPr id="8" name="Oval 7"/>
-            <p:cNvSpPr/>
-            <p:nvPr/>
-          </p:nvSpPr>
-          <p:spPr>
-            <a:xfrm>
-              <a:off x="8706174" y="3431131"/>
-              <a:ext cx="240792" cy="240792"/>
-            </a:xfrm>
-            <a:prstGeom prst="ellipse">
-              <a:avLst/>
-            </a:prstGeom>
-            <a:solidFill>
-              <a:srgbClr val="111111"/>
-            </a:solidFill>
-            <a:ln>
-              <a:noFill/>
-            </a:ln>
-            <a:effectLst/>
-          </p:spPr>
-          <p:style>
-            <a:lnRef idx="1">
-              <a:schemeClr val="accent1"/>
-            </a:lnRef>
-            <a:fillRef idx="3">
-              <a:schemeClr val="accent1"/>
-            </a:fillRef>
-            <a:effectRef idx="2">
-              <a:schemeClr val="accent1"/>
-            </a:effectRef>
-            <a:fontRef idx="minor">
-              <a:schemeClr val="lt1"/>
-            </a:fontRef>
-          </p:style>
-          <p:txBody>
-            <a:bodyPr rtlCol="0" anchor="ctr"/>
-            <a:lstStyle/>
-            <a:p>
-              <a:pPr algn="ctr"/>
-            </a:p>
-          </p:txBody>
-        </p:sp>
-        <p:sp>
-          <p:nvSpPr>
-            <p:cNvPr id="9" name="Oval 8"/>
-            <p:cNvSpPr/>
-            <p:nvPr/>
-          </p:nvSpPr>
-          <p:spPr>
-            <a:xfrm>
-              <a:off x="9139601" y="3431131"/>
-              <a:ext cx="240792" cy="240792"/>
-            </a:xfrm>
-            <a:prstGeom prst="ellipse">
-              <a:avLst/>
-            </a:prstGeom>
-            <a:solidFill>
-              <a:srgbClr val="111111"/>
-            </a:solidFill>
-            <a:ln>
-              <a:noFill/>
-            </a:ln>
-            <a:effectLst/>
-          </p:spPr>
-          <p:style>
-            <a:lnRef idx="1">
-              <a:schemeClr val="accent1"/>
-            </a:lnRef>
-            <a:fillRef idx="3">
-              <a:schemeClr val="accent1"/>
-            </a:fillRef>
-            <a:effectRef idx="2">
-              <a:schemeClr val="accent1"/>
-            </a:effectRef>
-            <a:fontRef idx="minor">
-              <a:schemeClr val="lt1"/>
-            </a:fontRef>
-          </p:style>
-          <p:txBody>
-            <a:bodyPr rtlCol="0" anchor="ctr"/>
-            <a:lstStyle/>
-            <a:p>
-              <a:pPr algn="ctr"/>
-            </a:p>
-          </p:txBody>
-        </p:sp>
-        <p:sp>
-          <p:nvSpPr>
-            <p:cNvPr id="10" name="Freeform 9"/>
-            <p:cNvSpPr/>
-            <p:nvPr/>
-          </p:nvSpPr>
-          <p:spPr>
-            <a:xfrm>
-              <a:off x="9500790" y="3623766"/>
-              <a:ext cx="1444757" cy="1396597"/>
-            </a:xfrm>
-            <a:custGeom>
-              <a:avLst/>
-              <a:gdLst/>
-              <a:ahLst/>
-              <a:cxnLst/>
-              <a:rect l="l" t="t" r="r" b="b"/>
-              <a:pathLst>
-                <a:path w="1444757" h="1396597">
-                  <a:moveTo>
-                    <a:pt x="1228043" y="0"/>
-                  </a:moveTo>
-                  <a:lnTo>
-                    <a:pt x="192635" y="0"/>
-                  </a:lnTo>
-                  <a:lnTo>
-                    <a:pt x="155059" y="3696"/>
-                  </a:lnTo>
-                  <a:lnTo>
-                    <a:pt x="118916" y="14664"/>
-                  </a:lnTo>
-                  <a:lnTo>
-                    <a:pt x="85614" y="32458"/>
-                  </a:lnTo>
-                  <a:lnTo>
-                    <a:pt x="56418" y="56417"/>
-                  </a:lnTo>
-                  <a:lnTo>
-                    <a:pt x="32459" y="85613"/>
-                  </a:lnTo>
-                  <a:lnTo>
-                    <a:pt x="14665" y="118915"/>
-                  </a:lnTo>
-                  <a:lnTo>
-                    <a:pt x="3697" y="155058"/>
-                  </a:lnTo>
-                  <a:lnTo>
-                    <a:pt x="0" y="192634"/>
-                  </a:lnTo>
-                  <a:lnTo>
-                    <a:pt x="0" y="890933"/>
-                  </a:lnTo>
-                  <a:lnTo>
-                    <a:pt x="3697" y="928508"/>
-                  </a:lnTo>
-                  <a:lnTo>
-                    <a:pt x="14665" y="964651"/>
-                  </a:lnTo>
-                  <a:lnTo>
-                    <a:pt x="32459" y="997953"/>
-                  </a:lnTo>
-                  <a:lnTo>
-                    <a:pt x="56418" y="1027149"/>
-                  </a:lnTo>
-                  <a:lnTo>
-                    <a:pt x="85614" y="1051108"/>
-                  </a:lnTo>
-                  <a:lnTo>
-                    <a:pt x="118916" y="1068902"/>
-                  </a:lnTo>
-                  <a:lnTo>
-                    <a:pt x="155059" y="1079871"/>
-                  </a:lnTo>
-                  <a:lnTo>
-                    <a:pt x="192635" y="1083567"/>
-                  </a:lnTo>
-                  <a:lnTo>
-                    <a:pt x="1035409" y="1083567"/>
-                  </a:lnTo>
-                  <a:lnTo>
-                    <a:pt x="1444757" y="1396597"/>
-                  </a:lnTo>
-                  <a:lnTo>
-                    <a:pt x="1444757" y="1083567"/>
-                  </a:lnTo>
-                  <a:lnTo>
-                    <a:pt x="1228043" y="1083567"/>
-                  </a:lnTo>
-                  <a:lnTo>
-                    <a:pt x="1265619" y="1079871"/>
-                  </a:lnTo>
-                  <a:lnTo>
-                    <a:pt x="1301762" y="1068902"/>
-                  </a:lnTo>
-                  <a:lnTo>
-                    <a:pt x="1335063" y="1051108"/>
-                  </a:lnTo>
-                  <a:lnTo>
-                    <a:pt x="1364260" y="1027149"/>
-                  </a:lnTo>
-                  <a:lnTo>
-                    <a:pt x="1388218" y="997953"/>
-                  </a:lnTo>
-                  <a:lnTo>
-                    <a:pt x="1406013" y="964651"/>
-                  </a:lnTo>
-                  <a:lnTo>
-                    <a:pt x="1416981" y="928508"/>
-                  </a:lnTo>
-                  <a:lnTo>
-                    <a:pt x="1420677" y="890933"/>
-                  </a:lnTo>
-                  <a:lnTo>
-                    <a:pt x="1420677" y="192634"/>
-                  </a:lnTo>
-                  <a:lnTo>
-                    <a:pt x="1416981" y="155058"/>
-                  </a:lnTo>
-                  <a:lnTo>
-                    <a:pt x="1406013" y="118915"/>
-                  </a:lnTo>
-                  <a:lnTo>
-                    <a:pt x="1388218" y="85613"/>
-                  </a:lnTo>
-                  <a:lnTo>
-                    <a:pt x="1364260" y="56417"/>
-                  </a:lnTo>
-                  <a:lnTo>
-                    <a:pt x="1335063" y="32458"/>
-                  </a:lnTo>
-                  <a:lnTo>
-                    <a:pt x="1301762" y="14664"/>
-                  </a:lnTo>
-                  <a:lnTo>
-                    <a:pt x="1265619" y="3696"/>
-                  </a:lnTo>
-                  <a:lnTo>
-                    <a:pt x="1228043" y="0"/>
-                  </a:lnTo>
-                  <a:close/>
-                </a:path>
-              </a:pathLst>
-            </a:custGeom>
-            <a:solidFill>
-              <a:srgbClr val="6DBCFF"/>
-            </a:solidFill>
-            <a:ln>
-              <a:noFill/>
-            </a:ln>
-            <a:effectLst/>
-          </p:spPr>
-          <p:style>
-            <a:lnRef idx="1">
-              <a:schemeClr val="accent1"/>
-            </a:lnRef>
-            <a:fillRef idx="3">
-              <a:schemeClr val="accent1"/>
-            </a:fillRef>
-            <a:effectRef idx="2">
-              <a:schemeClr val="accent1"/>
-            </a:effectRef>
-            <a:fontRef idx="minor">
-              <a:schemeClr val="lt1"/>
-            </a:fontRef>
-          </p:style>
-          <p:txBody>
-            <a:bodyPr rtlCol="0" anchor="ctr"/>
-            <a:lstStyle/>
-            <a:p>
-              <a:pPr algn="ctr"/>
-            </a:p>
-          </p:txBody>
-        </p:sp>
-        <p:sp>
-          <p:nvSpPr>
-            <p:cNvPr id="11" name="Rounded Rectangle 10"/>
-            <p:cNvSpPr/>
-            <p:nvPr/>
-          </p:nvSpPr>
-          <p:spPr>
-            <a:xfrm>
-              <a:off x="9765662" y="3984955"/>
-              <a:ext cx="746457" cy="120396"/>
-            </a:xfrm>
-            <a:prstGeom prst="roundRect">
-              <a:avLst>
-                <a:gd name="adj" fmla="val 50000"/>
-              </a:avLst>
-            </a:prstGeom>
-            <a:solidFill>
-              <a:srgbClr val="111111"/>
-            </a:solidFill>
-            <a:ln>
-              <a:noFill/>
-            </a:ln>
-            <a:effectLst/>
-          </p:spPr>
-          <p:style>
-            <a:lnRef idx="1">
-              <a:schemeClr val="accent1"/>
-            </a:lnRef>
-            <a:fillRef idx="3">
-              <a:schemeClr val="accent1"/>
-            </a:fillRef>
-            <a:effectRef idx="2">
-              <a:schemeClr val="accent1"/>
-            </a:effectRef>
-            <a:fontRef idx="minor">
-              <a:schemeClr val="lt1"/>
-            </a:fontRef>
-          </p:style>
-          <p:txBody>
-            <a:bodyPr rtlCol="0" anchor="ctr"/>
-            <a:lstStyle/>
-            <a:p>
-              <a:pPr algn="ctr"/>
-            </a:p>
-          </p:txBody>
-        </p:sp>
-        <p:sp>
-          <p:nvSpPr>
-            <p:cNvPr id="12" name="Rounded Rectangle 11"/>
-            <p:cNvSpPr/>
-            <p:nvPr/>
-          </p:nvSpPr>
-          <p:spPr>
-            <a:xfrm>
-              <a:off x="9765662" y="4225747"/>
-              <a:ext cx="505664" cy="120396"/>
-            </a:xfrm>
-            <a:prstGeom prst="roundRect">
-              <a:avLst>
-                <a:gd name="adj" fmla="val 50000"/>
-              </a:avLst>
-            </a:prstGeom>
-            <a:solidFill>
-              <a:srgbClr val="111111"/>
-            </a:solidFill>
-            <a:ln>
-              <a:noFill/>
-            </a:ln>
-            <a:effectLst/>
-          </p:spPr>
-          <p:style>
-            <a:lnRef idx="1">
-              <a:schemeClr val="accent1"/>
-            </a:lnRef>
-            <a:fillRef idx="3">
-              <a:schemeClr val="accent1"/>
-            </a:fillRef>
-            <a:effectRef idx="2">
-              <a:schemeClr val="accent1"/>
-            </a:effectRef>
-            <a:fontRef idx="minor">
-              <a:schemeClr val="lt1"/>
-            </a:fontRef>
-          </p:style>
-          <p:txBody>
-            <a:bodyPr rtlCol="0" anchor="ctr"/>
-            <a:lstStyle/>
-            <a:p>
-              <a:pPr algn="ctr"/>
-            </a:p>
-          </p:txBody>
-        </p:sp>
-      </p:grpSp>
+        </p:nvGraphicFramePr>
+        <p:xfrm>
+          <a:off x="6267602" y="2431298"/>
+          <a:ext cx="5472562" cy="3466581"/>
+        </p:xfrm>
+        <a:graphic>
+          <a:graphicData uri="http://schemas.openxmlformats.org/drawingml/2006/chart">
+            <c:chart xmlns:c="http://schemas.openxmlformats.org/drawingml/2006/chart" r:id="rId3"/>
+          </a:graphicData>
+        </a:graphic>
+      </p:graphicFrame>
     </p:spTree>
   </p:cSld>
   <p:clrMapOvr>
@@ -12929,948 +12103,199 @@
                 <a:ea typeface="Play"/>
                 <a:cs typeface="Play"/>
               </a:rPr>
-              <a:t>Риски</a:t>
+              <a:t>Ресурсы: 2 vCPU / 2 ГБ RAM</a:t>
             </a:r>
           </a:p>
         </p:txBody>
       </p:sp>
-      <p:sp>
-        <p:nvSpPr>
-          <p:cNvPr id="3" name="body"/>
-          <p:cNvSpPr txBox="1"/>
+      <p:graphicFrame>
+        <p:nvGraphicFramePr>
+          <p:cNvPr id="3" name="Table 2"/>
+          <p:cNvGraphicFramePr>
+            <a:graphicFrameLocks noGrp="1"/>
+          </p:cNvGraphicFramePr>
           <p:nvPr/>
-        </p:nvSpPr>
-        <p:spPr>
-          <a:xfrm>
-            <a:off x="429280" y="2431298"/>
-            <a:ext cx="5472562" cy="3466581"/>
-          </a:xfrm>
-          <a:prstGeom prst="rect">
-            <a:avLst/>
-          </a:prstGeom>
-          <a:noFill/>
-        </p:spPr>
-        <p:txBody>
-          <a:bodyPr wrap="square" lIns="76200" rIns="76200" tIns="50800" bIns="50800">
-            <a:spAutoFit/>
-          </a:bodyPr>
-          <a:lstStyle/>
-          <a:p>
-            <a:pPr algn="l">
-              <a:spcAft>
-                <a:spcPts val="300"/>
-              </a:spcAft>
-              <a:defRPr sz="2000">
-                <a:solidFill>
-                  <a:srgbClr val="FFFFFF"/>
-                </a:solidFill>
-                <a:latin typeface="Play"/>
-                <a:ea typeface="Play"/>
-                <a:cs typeface="Play"/>
-              </a:defRPr>
-            </a:pPr>
-            <a:r>
-              <a:rPr sz="2000">
-                <a:solidFill>
-                  <a:srgbClr val="FFFFFF"/>
-                </a:solidFill>
-                <a:latin typeface="Play"/>
-                <a:ea typeface="Play"/>
-                <a:cs typeface="Play"/>
-              </a:rPr>
-              <a:t>• Модель может выдумать цифры, которые не подтверждены</a:t>
-            </a:r>
-          </a:p>
-          <a:p>
-            <a:pPr algn="l">
-              <a:spcAft>
-                <a:spcPts val="300"/>
-              </a:spcAft>
-              <a:defRPr sz="2000">
-                <a:solidFill>
-                  <a:srgbClr val="FFFFFF"/>
-                </a:solidFill>
-                <a:latin typeface="Play"/>
-                <a:ea typeface="Play"/>
-                <a:cs typeface="Play"/>
-              </a:defRPr>
-            </a:pPr>
-            <a:r>
-              <a:rPr sz="2000">
-                <a:solidFill>
-                  <a:srgbClr val="FFFFFF"/>
-                </a:solidFill>
-                <a:latin typeface="Play"/>
-                <a:ea typeface="Play"/>
-                <a:cs typeface="Play"/>
-              </a:rPr>
-              <a:t>• Неправильный шаблон может привести к некорректной вёрстке</a:t>
-            </a:r>
-          </a:p>
-          <a:p>
-            <a:pPr algn="l">
-              <a:spcAft>
-                <a:spcPts val="300"/>
-              </a:spcAft>
-              <a:defRPr sz="2000">
-                <a:solidFill>
-                  <a:srgbClr val="FFFFFF"/>
-                </a:solidFill>
-                <a:latin typeface="Play"/>
-                <a:ea typeface="Play"/>
-                <a:cs typeface="Play"/>
-              </a:defRPr>
-            </a:pPr>
-            <a:r>
-              <a:rPr sz="2000">
-                <a:solidFill>
-                  <a:srgbClr val="FFFFFF"/>
-                </a:solidFill>
-                <a:latin typeface="Play"/>
-                <a:ea typeface="Play"/>
-                <a:cs typeface="Play"/>
-              </a:rPr>
-              <a:t>• Нагрузка выше 20 одновременных задач требует внешней очереди</a:t>
-            </a:r>
-          </a:p>
-        </p:txBody>
-      </p:sp>
-      <p:grpSp>
-        <p:nvGrpSpPr>
-          <p:cNvPr id="4" name="icon:builtin-sparkles"/>
-          <p:cNvGrpSpPr/>
-          <p:nvPr/>
-        </p:nvGrpSpPr>
-        <p:grpSpPr>
-          <a:xfrm>
-            <a:off x="6834295" y="2568902"/>
-            <a:ext cx="743065" cy="710957"/>
-            <a:chOff x="6834295" y="2568902"/>
-            <a:chExt cx="743065" cy="710957"/>
-          </a:xfrm>
-        </p:grpSpPr>
-        <p:sp>
-          <p:nvSpPr>
-            <p:cNvPr id="5" name="Freeform 4"/>
-            <p:cNvSpPr/>
-            <p:nvPr/>
-          </p:nvSpPr>
-          <p:spPr>
-            <a:xfrm>
-              <a:off x="6834295" y="2568902"/>
-              <a:ext cx="550418" cy="550418"/>
-            </a:xfrm>
-            <a:custGeom>
-              <a:avLst/>
-              <a:gdLst/>
-              <a:ahLst/>
-              <a:cxnLst/>
-              <a:rect l="l" t="t" r="r" b="b"/>
-              <a:pathLst>
-                <a:path w="550418" h="550418">
-                  <a:moveTo>
-                    <a:pt x="275209" y="0"/>
-                  </a:moveTo>
-                  <a:lnTo>
-                    <a:pt x="283557" y="51693"/>
-                  </a:lnTo>
-                  <a:lnTo>
-                    <a:pt x="295024" y="96874"/>
-                  </a:lnTo>
-                  <a:lnTo>
-                    <a:pt x="310069" y="135999"/>
-                  </a:lnTo>
-                  <a:lnTo>
-                    <a:pt x="329150" y="169529"/>
-                  </a:lnTo>
-                  <a:lnTo>
-                    <a:pt x="352635" y="197784"/>
-                  </a:lnTo>
-                  <a:lnTo>
-                    <a:pt x="380890" y="221268"/>
-                  </a:lnTo>
-                  <a:lnTo>
-                    <a:pt x="414373" y="240303"/>
-                  </a:lnTo>
-                  <a:lnTo>
-                    <a:pt x="453545" y="255394"/>
-                  </a:lnTo>
-                  <a:lnTo>
-                    <a:pt x="498725" y="266907"/>
-                  </a:lnTo>
-                  <a:lnTo>
-                    <a:pt x="550418" y="275209"/>
-                  </a:lnTo>
-                  <a:lnTo>
-                    <a:pt x="498725" y="283557"/>
-                  </a:lnTo>
-                  <a:lnTo>
-                    <a:pt x="453545" y="295024"/>
-                  </a:lnTo>
-                  <a:lnTo>
-                    <a:pt x="414373" y="310069"/>
-                  </a:lnTo>
-                  <a:lnTo>
-                    <a:pt x="380890" y="329150"/>
-                  </a:lnTo>
-                  <a:lnTo>
-                    <a:pt x="352635" y="352634"/>
-                  </a:lnTo>
-                  <a:lnTo>
-                    <a:pt x="329150" y="380889"/>
-                  </a:lnTo>
-                  <a:lnTo>
-                    <a:pt x="310069" y="414373"/>
-                  </a:lnTo>
-                  <a:lnTo>
-                    <a:pt x="295024" y="453544"/>
-                  </a:lnTo>
-                  <a:lnTo>
-                    <a:pt x="283557" y="498770"/>
-                  </a:lnTo>
-                  <a:lnTo>
-                    <a:pt x="275209" y="550418"/>
-                  </a:lnTo>
-                  <a:lnTo>
-                    <a:pt x="266907" y="498770"/>
-                  </a:lnTo>
-                  <a:lnTo>
-                    <a:pt x="255394" y="453544"/>
-                  </a:lnTo>
-                  <a:lnTo>
-                    <a:pt x="240304" y="414373"/>
-                  </a:lnTo>
-                  <a:lnTo>
-                    <a:pt x="221268" y="380889"/>
-                  </a:lnTo>
-                  <a:lnTo>
-                    <a:pt x="197784" y="352634"/>
-                  </a:lnTo>
-                  <a:lnTo>
-                    <a:pt x="169529" y="329150"/>
-                  </a:lnTo>
-                  <a:lnTo>
-                    <a:pt x="135999" y="310115"/>
-                  </a:lnTo>
-                  <a:lnTo>
-                    <a:pt x="96874" y="295024"/>
-                  </a:lnTo>
-                  <a:lnTo>
-                    <a:pt x="51694" y="283511"/>
-                  </a:lnTo>
-                  <a:lnTo>
-                    <a:pt x="0" y="275209"/>
-                  </a:lnTo>
-                  <a:lnTo>
-                    <a:pt x="51694" y="266907"/>
-                  </a:lnTo>
-                  <a:lnTo>
-                    <a:pt x="96874" y="255394"/>
-                  </a:lnTo>
-                  <a:lnTo>
-                    <a:pt x="135999" y="240303"/>
-                  </a:lnTo>
-                  <a:lnTo>
-                    <a:pt x="169529" y="221268"/>
-                  </a:lnTo>
-                  <a:lnTo>
-                    <a:pt x="197784" y="197784"/>
-                  </a:lnTo>
-                  <a:lnTo>
-                    <a:pt x="221268" y="169529"/>
-                  </a:lnTo>
-                  <a:lnTo>
-                    <a:pt x="240304" y="136045"/>
-                  </a:lnTo>
-                  <a:lnTo>
-                    <a:pt x="255394" y="96874"/>
-                  </a:lnTo>
-                  <a:lnTo>
-                    <a:pt x="266907" y="51693"/>
-                  </a:lnTo>
-                  <a:lnTo>
-                    <a:pt x="275209" y="0"/>
-                  </a:lnTo>
-                  <a:close/>
-                </a:path>
-              </a:pathLst>
-            </a:custGeom>
-            <a:noFill/>
-            <a:ln w="91736" cap="rnd">
-              <a:solidFill>
-                <a:srgbClr val="0077FF"/>
-              </a:solidFill>
-              <a:round/>
-            </a:ln>
-            <a:effectLst/>
-          </p:spPr>
-          <p:style>
-            <a:lnRef idx="1">
-              <a:schemeClr val="accent1"/>
-            </a:lnRef>
-            <a:fillRef idx="3">
-              <a:schemeClr val="accent1"/>
-            </a:fillRef>
-            <a:effectRef idx="2">
-              <a:schemeClr val="accent1"/>
-            </a:effectRef>
-            <a:fontRef idx="minor">
-              <a:schemeClr val="lt1"/>
-            </a:fontRef>
-          </p:style>
-          <p:txBody>
-            <a:bodyPr rtlCol="0" anchor="ctr"/>
-            <a:lstStyle/>
-            <a:p>
-              <a:pPr algn="ctr"/>
-            </a:p>
-          </p:txBody>
-        </p:sp>
-        <p:sp>
-          <p:nvSpPr>
-            <p:cNvPr id="6" name="Freeform 5"/>
-            <p:cNvSpPr/>
-            <p:nvPr/>
-          </p:nvSpPr>
-          <p:spPr>
-            <a:xfrm>
-              <a:off x="7375540" y="3073452"/>
-              <a:ext cx="201820" cy="206407"/>
-            </a:xfrm>
-            <a:custGeom>
-              <a:avLst/>
-              <a:gdLst/>
-              <a:ahLst/>
-              <a:cxnLst/>
-              <a:rect l="l" t="t" r="r" b="b"/>
-              <a:pathLst>
-                <a:path w="201820" h="206407">
-                  <a:moveTo>
-                    <a:pt x="100910" y="0"/>
-                  </a:moveTo>
-                  <a:lnTo>
-                    <a:pt x="104212" y="19448"/>
-                  </a:lnTo>
-                  <a:lnTo>
-                    <a:pt x="108753" y="36511"/>
-                  </a:lnTo>
-                  <a:lnTo>
-                    <a:pt x="114624" y="51372"/>
-                  </a:lnTo>
-                  <a:lnTo>
-                    <a:pt x="121917" y="64215"/>
-                  </a:lnTo>
-                  <a:lnTo>
-                    <a:pt x="130724" y="75132"/>
-                  </a:lnTo>
-                  <a:lnTo>
-                    <a:pt x="141182" y="84214"/>
-                  </a:lnTo>
-                  <a:lnTo>
-                    <a:pt x="153429" y="91644"/>
-                  </a:lnTo>
-                  <a:lnTo>
-                    <a:pt x="167556" y="97607"/>
-                  </a:lnTo>
-                  <a:lnTo>
-                    <a:pt x="183656" y="102148"/>
-                  </a:lnTo>
-                  <a:lnTo>
-                    <a:pt x="201820" y="105497"/>
-                  </a:lnTo>
-                  <a:lnTo>
-                    <a:pt x="183656" y="108799"/>
-                  </a:lnTo>
-                  <a:lnTo>
-                    <a:pt x="167556" y="113340"/>
-                  </a:lnTo>
-                  <a:lnTo>
-                    <a:pt x="153429" y="119211"/>
-                  </a:lnTo>
-                  <a:lnTo>
-                    <a:pt x="141182" y="126504"/>
-                  </a:lnTo>
-                  <a:lnTo>
-                    <a:pt x="130724" y="135311"/>
-                  </a:lnTo>
-                  <a:lnTo>
-                    <a:pt x="121917" y="145769"/>
-                  </a:lnTo>
-                  <a:lnTo>
-                    <a:pt x="114624" y="158016"/>
-                  </a:lnTo>
-                  <a:lnTo>
-                    <a:pt x="108753" y="172143"/>
-                  </a:lnTo>
-                  <a:lnTo>
-                    <a:pt x="104212" y="188243"/>
-                  </a:lnTo>
-                  <a:lnTo>
-                    <a:pt x="100910" y="206407"/>
-                  </a:lnTo>
-                  <a:lnTo>
-                    <a:pt x="97607" y="188243"/>
-                  </a:lnTo>
-                  <a:lnTo>
-                    <a:pt x="93066" y="172143"/>
-                  </a:lnTo>
-                  <a:lnTo>
-                    <a:pt x="87195" y="158016"/>
-                  </a:lnTo>
-                  <a:lnTo>
-                    <a:pt x="79902" y="145769"/>
-                  </a:lnTo>
-                  <a:lnTo>
-                    <a:pt x="71095" y="135311"/>
-                  </a:lnTo>
-                  <a:lnTo>
-                    <a:pt x="60637" y="126504"/>
-                  </a:lnTo>
-                  <a:lnTo>
-                    <a:pt x="48391" y="119211"/>
-                  </a:lnTo>
-                  <a:lnTo>
-                    <a:pt x="34263" y="113340"/>
-                  </a:lnTo>
-                  <a:lnTo>
-                    <a:pt x="18163" y="108799"/>
-                  </a:lnTo>
-                  <a:lnTo>
-                    <a:pt x="0" y="105497"/>
-                  </a:lnTo>
-                  <a:lnTo>
-                    <a:pt x="18163" y="102194"/>
-                  </a:lnTo>
-                  <a:lnTo>
-                    <a:pt x="34263" y="97607"/>
-                  </a:lnTo>
-                  <a:lnTo>
-                    <a:pt x="48391" y="91644"/>
-                  </a:lnTo>
-                  <a:lnTo>
-                    <a:pt x="60637" y="84214"/>
-                  </a:lnTo>
-                  <a:lnTo>
-                    <a:pt x="71095" y="75132"/>
-                  </a:lnTo>
-                  <a:lnTo>
-                    <a:pt x="79902" y="64215"/>
-                  </a:lnTo>
-                  <a:lnTo>
-                    <a:pt x="87195" y="51372"/>
-                  </a:lnTo>
-                  <a:lnTo>
-                    <a:pt x="93066" y="36511"/>
-                  </a:lnTo>
-                  <a:lnTo>
-                    <a:pt x="97607" y="19448"/>
-                  </a:lnTo>
-                  <a:lnTo>
-                    <a:pt x="100910" y="0"/>
-                  </a:lnTo>
-                  <a:close/>
-                </a:path>
-              </a:pathLst>
-            </a:custGeom>
-            <a:noFill/>
-            <a:ln w="91736" cap="rnd">
-              <a:solidFill>
-                <a:srgbClr val="0077FF"/>
-              </a:solidFill>
-              <a:round/>
-            </a:ln>
-            <a:effectLst/>
-          </p:spPr>
-          <p:style>
-            <a:lnRef idx="1">
-              <a:schemeClr val="accent1"/>
-            </a:lnRef>
-            <a:fillRef idx="3">
-              <a:schemeClr val="accent1"/>
-            </a:fillRef>
-            <a:effectRef idx="2">
-              <a:schemeClr val="accent1"/>
-            </a:effectRef>
-            <a:fontRef idx="minor">
-              <a:schemeClr val="lt1"/>
-            </a:fontRef>
-          </p:style>
-          <p:txBody>
-            <a:bodyPr rtlCol="0" anchor="ctr"/>
-            <a:lstStyle/>
-            <a:p>
-              <a:pPr algn="ctr"/>
-            </a:p>
-          </p:txBody>
-        </p:sp>
-      </p:grpSp>
-      <p:sp>
-        <p:nvSpPr>
-          <p:cNvPr id="7" name="TextBox 6"/>
-          <p:cNvSpPr txBox="1"/>
-          <p:nvPr/>
-        </p:nvSpPr>
-        <p:spPr>
-          <a:xfrm>
-            <a:off x="6267602" y="3740129"/>
-            <a:ext cx="1775542" cy="2157749"/>
-          </a:xfrm>
-          <a:prstGeom prst="rect">
-            <a:avLst/>
-          </a:prstGeom>
-          <a:noFill/>
-        </p:spPr>
-        <p:txBody>
-          <a:bodyPr wrap="square" lIns="12700" rIns="12700" tIns="12700" bIns="12700">
-            <a:spAutoFit/>
-          </a:bodyPr>
-          <a:lstStyle/>
-          <a:p>
-            <a:pPr algn="ctr">
-              <a:defRPr sz="1400" b="0">
-                <a:solidFill>
-                  <a:srgbClr val="FFFFFF"/>
-                </a:solidFill>
-                <a:latin typeface="Play"/>
-                <a:ea typeface="Play"/>
-                <a:cs typeface="Play"/>
-              </a:defRPr>
-            </a:pPr>
-            <a:r>
-              <a:rPr sz="1400" b="0">
-                <a:solidFill>
-                  <a:srgbClr val="FFFFFF"/>
-                </a:solidFill>
-                <a:latin typeface="Play"/>
-                <a:ea typeface="Play"/>
-                <a:cs typeface="Play"/>
-              </a:rPr>
-              <a:t>Модель может выдумать цифры</a:t>
-            </a:r>
-          </a:p>
-        </p:txBody>
-      </p:sp>
-      <p:grpSp>
-        <p:nvGrpSpPr>
-          <p:cNvPr id="8" name="icon:builtin-layout"/>
-          <p:cNvGrpSpPr/>
-          <p:nvPr/>
-        </p:nvGrpSpPr>
-        <p:grpSpPr>
-          <a:xfrm>
-            <a:off x="8591068" y="2568902"/>
-            <a:ext cx="825627" cy="825627"/>
-            <a:chOff x="8591068" y="2568902"/>
-            <a:chExt cx="825627" cy="825627"/>
-          </a:xfrm>
-        </p:grpSpPr>
-        <p:sp>
-          <p:nvSpPr>
-            <p:cNvPr id="9" name="Rounded Rectangle 8"/>
-            <p:cNvSpPr/>
-            <p:nvPr/>
-          </p:nvSpPr>
-          <p:spPr>
-            <a:xfrm>
-              <a:off x="8591068" y="2568902"/>
-              <a:ext cx="825627" cy="825627"/>
-            </a:xfrm>
-            <a:prstGeom prst="roundRect">
-              <a:avLst>
-                <a:gd name="adj" fmla="val 11111"/>
-              </a:avLst>
-            </a:prstGeom>
-            <a:noFill/>
-            <a:ln w="91736" cap="rnd">
-              <a:solidFill>
-                <a:srgbClr val="0077FF"/>
-              </a:solidFill>
-              <a:round/>
-            </a:ln>
-            <a:effectLst/>
-          </p:spPr>
-          <p:style>
-            <a:lnRef idx="1">
-              <a:schemeClr val="accent1"/>
-            </a:lnRef>
-            <a:fillRef idx="3">
-              <a:schemeClr val="accent1"/>
-            </a:fillRef>
-            <a:effectRef idx="2">
-              <a:schemeClr val="accent1"/>
-            </a:effectRef>
-            <a:fontRef idx="minor">
-              <a:schemeClr val="lt1"/>
-            </a:fontRef>
-          </p:style>
-          <p:txBody>
-            <a:bodyPr rtlCol="0" anchor="ctr"/>
-            <a:lstStyle/>
-            <a:p>
-              <a:pPr algn="ctr"/>
-            </a:p>
-          </p:txBody>
-        </p:sp>
-        <p:sp>
-          <p:nvSpPr>
-            <p:cNvPr id="10" name="Freeform 9"/>
-            <p:cNvSpPr/>
-            <p:nvPr/>
-          </p:nvSpPr>
-          <p:spPr>
-            <a:xfrm>
-              <a:off x="8591068" y="2844111"/>
-              <a:ext cx="825627" cy="0"/>
-            </a:xfrm>
-            <a:custGeom>
-              <a:avLst/>
-              <a:gdLst/>
-              <a:ahLst/>
-              <a:cxnLst/>
-              <a:rect l="l" t="t" r="r" b="b"/>
-              <a:pathLst>
-                <a:path w="825627" h="0">
-                  <a:moveTo>
-                    <a:pt x="0" y="0"/>
-                  </a:moveTo>
-                  <a:lnTo>
-                    <a:pt x="825627" y="0"/>
-                  </a:lnTo>
-                </a:path>
-              </a:pathLst>
-            </a:custGeom>
-            <a:noFill/>
-            <a:ln w="91736" cap="rnd">
-              <a:solidFill>
-                <a:srgbClr val="0077FF"/>
-              </a:solidFill>
-              <a:round/>
-            </a:ln>
-            <a:effectLst/>
-          </p:spPr>
-          <p:style>
-            <a:lnRef idx="1">
-              <a:schemeClr val="accent1"/>
-            </a:lnRef>
-            <a:fillRef idx="3">
-              <a:schemeClr val="accent1"/>
-            </a:fillRef>
-            <a:effectRef idx="2">
-              <a:schemeClr val="accent1"/>
-            </a:effectRef>
-            <a:fontRef idx="minor">
-              <a:schemeClr val="lt1"/>
-            </a:fontRef>
-          </p:style>
-          <p:txBody>
-            <a:bodyPr rtlCol="0" anchor="ctr"/>
-            <a:lstStyle/>
-            <a:p>
-              <a:pPr algn="ctr"/>
-            </a:p>
-          </p:txBody>
-        </p:sp>
-        <p:sp>
-          <p:nvSpPr>
-            <p:cNvPr id="11" name="Freeform 10"/>
-            <p:cNvSpPr/>
-            <p:nvPr/>
-          </p:nvSpPr>
-          <p:spPr>
-            <a:xfrm>
-              <a:off x="8866277" y="2844111"/>
-              <a:ext cx="0" cy="550418"/>
-            </a:xfrm>
-            <a:custGeom>
-              <a:avLst/>
-              <a:gdLst/>
-              <a:ahLst/>
-              <a:cxnLst/>
-              <a:rect l="l" t="t" r="r" b="b"/>
-              <a:pathLst>
-                <a:path w="0" h="550418">
-                  <a:moveTo>
-                    <a:pt x="0" y="0"/>
-                  </a:moveTo>
-                  <a:lnTo>
-                    <a:pt x="0" y="550418"/>
-                  </a:lnTo>
-                </a:path>
-              </a:pathLst>
-            </a:custGeom>
-            <a:noFill/>
-            <a:ln w="91736" cap="rnd">
-              <a:solidFill>
-                <a:srgbClr val="0077FF"/>
-              </a:solidFill>
-              <a:round/>
-            </a:ln>
-            <a:effectLst/>
-          </p:spPr>
-          <p:style>
-            <a:lnRef idx="1">
-              <a:schemeClr val="accent1"/>
-            </a:lnRef>
-            <a:fillRef idx="3">
-              <a:schemeClr val="accent1"/>
-            </a:fillRef>
-            <a:effectRef idx="2">
-              <a:schemeClr val="accent1"/>
-            </a:effectRef>
-            <a:fontRef idx="minor">
-              <a:schemeClr val="lt1"/>
-            </a:fontRef>
-          </p:style>
-          <p:txBody>
-            <a:bodyPr rtlCol="0" anchor="ctr"/>
-            <a:lstStyle/>
-            <a:p>
-              <a:pPr algn="ctr"/>
-            </a:p>
-          </p:txBody>
-        </p:sp>
-      </p:grpSp>
-      <p:sp>
-        <p:nvSpPr>
-          <p:cNvPr id="12" name="TextBox 11"/>
-          <p:cNvSpPr txBox="1"/>
-          <p:nvPr/>
-        </p:nvSpPr>
-        <p:spPr>
-          <a:xfrm>
-            <a:off x="8116111" y="3740129"/>
-            <a:ext cx="1775542" cy="2157749"/>
-          </a:xfrm>
-          <a:prstGeom prst="rect">
-            <a:avLst/>
-          </a:prstGeom>
-          <a:noFill/>
-        </p:spPr>
-        <p:txBody>
-          <a:bodyPr wrap="square" lIns="12700" rIns="12700" tIns="12700" bIns="12700">
-            <a:spAutoFit/>
-          </a:bodyPr>
-          <a:lstStyle/>
-          <a:p>
-            <a:pPr algn="ctr">
-              <a:defRPr sz="1400" b="0">
-                <a:solidFill>
-                  <a:srgbClr val="FFFFFF"/>
-                </a:solidFill>
-                <a:latin typeface="Play"/>
-                <a:ea typeface="Play"/>
-                <a:cs typeface="Play"/>
-              </a:defRPr>
-            </a:pPr>
-            <a:r>
-              <a:rPr sz="1400" b="0">
-                <a:solidFill>
-                  <a:srgbClr val="FFFFFF"/>
-                </a:solidFill>
-                <a:latin typeface="Play"/>
-                <a:ea typeface="Play"/>
-                <a:cs typeface="Play"/>
-              </a:rPr>
-              <a:t>Неправильный шаблон</a:t>
-            </a:r>
-          </a:p>
-        </p:txBody>
-      </p:sp>
-      <p:grpSp>
-        <p:nvGrpSpPr>
-          <p:cNvPr id="13" name="icon:builtin-target"/>
-          <p:cNvGrpSpPr/>
-          <p:nvPr/>
-        </p:nvGrpSpPr>
-        <p:grpSpPr>
-          <a:xfrm>
-            <a:off x="10439578" y="2568902"/>
-            <a:ext cx="825627" cy="825627"/>
-            <a:chOff x="10439578" y="2568902"/>
-            <a:chExt cx="825627" cy="825627"/>
-          </a:xfrm>
-        </p:grpSpPr>
-        <p:sp>
-          <p:nvSpPr>
-            <p:cNvPr id="14" name="Oval 13"/>
-            <p:cNvSpPr/>
-            <p:nvPr/>
-          </p:nvSpPr>
-          <p:spPr>
-            <a:xfrm>
-              <a:off x="10439578" y="2568902"/>
-              <a:ext cx="825627" cy="825627"/>
-            </a:xfrm>
-            <a:prstGeom prst="ellipse">
-              <a:avLst/>
-            </a:prstGeom>
-            <a:noFill/>
-            <a:ln w="91736" cap="rnd">
-              <a:solidFill>
-                <a:srgbClr val="0077FF"/>
-              </a:solidFill>
-              <a:round/>
-            </a:ln>
-            <a:effectLst/>
-          </p:spPr>
-          <p:style>
-            <a:lnRef idx="1">
-              <a:schemeClr val="accent1"/>
-            </a:lnRef>
-            <a:fillRef idx="3">
-              <a:schemeClr val="accent1"/>
-            </a:fillRef>
-            <a:effectRef idx="2">
-              <a:schemeClr val="accent1"/>
-            </a:effectRef>
-            <a:fontRef idx="minor">
-              <a:schemeClr val="lt1"/>
-            </a:fontRef>
-          </p:style>
-          <p:txBody>
-            <a:bodyPr rtlCol="0" anchor="ctr"/>
-            <a:lstStyle/>
-            <a:p>
-              <a:pPr algn="ctr"/>
-            </a:p>
-          </p:txBody>
-        </p:sp>
-        <p:sp>
-          <p:nvSpPr>
-            <p:cNvPr id="15" name="Oval 14"/>
-            <p:cNvSpPr/>
-            <p:nvPr/>
-          </p:nvSpPr>
-          <p:spPr>
-            <a:xfrm>
-              <a:off x="10623051" y="2752375"/>
-              <a:ext cx="458681" cy="458681"/>
-            </a:xfrm>
-            <a:prstGeom prst="ellipse">
-              <a:avLst/>
-            </a:prstGeom>
-            <a:noFill/>
-            <a:ln w="91736" cap="rnd">
-              <a:solidFill>
-                <a:srgbClr val="0077FF"/>
-              </a:solidFill>
-              <a:round/>
-            </a:ln>
-            <a:effectLst/>
-          </p:spPr>
-          <p:style>
-            <a:lnRef idx="1">
-              <a:schemeClr val="accent1"/>
-            </a:lnRef>
-            <a:fillRef idx="3">
-              <a:schemeClr val="accent1"/>
-            </a:fillRef>
-            <a:effectRef idx="2">
-              <a:schemeClr val="accent1"/>
-            </a:effectRef>
-            <a:fontRef idx="minor">
-              <a:schemeClr val="lt1"/>
-            </a:fontRef>
-          </p:style>
-          <p:txBody>
-            <a:bodyPr rtlCol="0" anchor="ctr"/>
-            <a:lstStyle/>
-            <a:p>
-              <a:pPr algn="ctr"/>
-            </a:p>
-          </p:txBody>
-        </p:sp>
-        <p:sp>
-          <p:nvSpPr>
-            <p:cNvPr id="16" name="Oval 15"/>
-            <p:cNvSpPr/>
-            <p:nvPr/>
-          </p:nvSpPr>
-          <p:spPr>
-            <a:xfrm>
-              <a:off x="10788176" y="2917500"/>
-              <a:ext cx="128430" cy="128430"/>
-            </a:xfrm>
-            <a:prstGeom prst="ellipse">
-              <a:avLst/>
-            </a:prstGeom>
-            <a:solidFill>
-              <a:srgbClr val="0077FF"/>
-            </a:solidFill>
-            <a:ln>
-              <a:noFill/>
-            </a:ln>
-            <a:effectLst/>
-          </p:spPr>
-          <p:style>
-            <a:lnRef idx="1">
-              <a:schemeClr val="accent1"/>
-            </a:lnRef>
-            <a:fillRef idx="3">
-              <a:schemeClr val="accent1"/>
-            </a:fillRef>
-            <a:effectRef idx="2">
-              <a:schemeClr val="accent1"/>
-            </a:effectRef>
-            <a:fontRef idx="minor">
-              <a:schemeClr val="lt1"/>
-            </a:fontRef>
-          </p:style>
-          <p:txBody>
-            <a:bodyPr rtlCol="0" anchor="ctr"/>
-            <a:lstStyle/>
-            <a:p>
-              <a:pPr algn="ctr"/>
-            </a:p>
-          </p:txBody>
-        </p:sp>
-      </p:grpSp>
-      <p:sp>
-        <p:nvSpPr>
-          <p:cNvPr id="17" name="TextBox 16"/>
-          <p:cNvSpPr txBox="1"/>
-          <p:nvPr/>
-        </p:nvSpPr>
-        <p:spPr>
-          <a:xfrm>
-            <a:off x="9964621" y="3740129"/>
-            <a:ext cx="1775542" cy="2157749"/>
-          </a:xfrm>
-          <a:prstGeom prst="rect">
-            <a:avLst/>
-          </a:prstGeom>
-          <a:noFill/>
-        </p:spPr>
-        <p:txBody>
-          <a:bodyPr wrap="square" lIns="12700" rIns="12700" tIns="12700" bIns="12700">
-            <a:spAutoFit/>
-          </a:bodyPr>
-          <a:lstStyle/>
-          <a:p>
-            <a:pPr algn="ctr">
-              <a:defRPr sz="1400" b="0">
-                <a:solidFill>
-                  <a:srgbClr val="FFFFFF"/>
-                </a:solidFill>
-                <a:latin typeface="Play"/>
-                <a:ea typeface="Play"/>
-                <a:cs typeface="Play"/>
-              </a:defRPr>
-            </a:pPr>
-            <a:r>
-              <a:rPr sz="1400" b="0">
-                <a:solidFill>
-                  <a:srgbClr val="FFFFFF"/>
-                </a:solidFill>
-                <a:latin typeface="Play"/>
-                <a:ea typeface="Play"/>
-                <a:cs typeface="Play"/>
-              </a:rPr>
-              <a:t>Нагрузка &gt;20 задач</a:t>
-            </a:r>
-          </a:p>
-        </p:txBody>
-      </p:sp>
+        </p:nvGraphicFramePr>
+        <p:xfrm>
+          <a:off x="6267602" y="1783080"/>
+          <a:ext cx="5472562" cy="4114800"/>
+        </p:xfrm>
+        <a:graphic>
+          <a:graphicData uri="http://schemas.openxmlformats.org/drawingml/2006/table">
+            <a:tbl>
+              <a:tblPr firstRow="1" bandRow="1">
+                <a:tableStyleId>{5C22544A-7EE6-4342-B048-85BDC9FD1C3A}</a:tableStyleId>
+              </a:tblPr>
+              <a:tblGrid>
+                <a:gridCol w="2736281"/>
+                <a:gridCol w="2736281"/>
+              </a:tblGrid>
+              <a:tr h="1371600">
+                <a:tc>
+                  <a:txBody>
+                    <a:bodyPr/>
+                    <a:lstStyle/>
+                    <a:p>
+                      <a:pPr>
+                        <a:defRPr sz="1300" b="1">
+                          <a:solidFill>
+                            <a:srgbClr val="FFFFFF"/>
+                          </a:solidFill>
+                          <a:latin typeface="Play"/>
+                          <a:ea typeface="Play"/>
+                          <a:cs typeface="Play"/>
+                        </a:defRPr>
+                      </a:pPr>
+                      <a:r>
+                        <a:t>Ресурс</a:t>
+                      </a:r>
+                    </a:p>
+                  </a:txBody>
+                  <a:tcPr>
+                    <a:solidFill>
+                      <a:srgbClr val="0077FF"/>
+                    </a:solidFill>
+                  </a:tcPr>
+                </a:tc>
+                <a:tc>
+                  <a:txBody>
+                    <a:bodyPr/>
+                    <a:lstStyle/>
+                    <a:p>
+                      <a:pPr>
+                        <a:defRPr sz="1300" b="1">
+                          <a:solidFill>
+                            <a:srgbClr val="FFFFFF"/>
+                          </a:solidFill>
+                          <a:latin typeface="Play"/>
+                          <a:ea typeface="Play"/>
+                          <a:cs typeface="Play"/>
+                        </a:defRPr>
+                      </a:pPr>
+                      <a:r>
+                        <a:t>Значение</a:t>
+                      </a:r>
+                    </a:p>
+                  </a:txBody>
+                  <a:tcPr>
+                    <a:solidFill>
+                      <a:srgbClr val="0077FF"/>
+                    </a:solidFill>
+                  </a:tcPr>
+                </a:tc>
+              </a:tr>
+              <a:tr h="1371600">
+                <a:tc>
+                  <a:txBody>
+                    <a:bodyPr/>
+                    <a:lstStyle/>
+                    <a:p>
+                      <a:pPr>
+                        <a:defRPr sz="1300" b="0">
+                          <a:solidFill>
+                            <a:srgbClr val="FFFFFF"/>
+                          </a:solidFill>
+                          <a:latin typeface="Play"/>
+                          <a:ea typeface="Play"/>
+                          <a:cs typeface="Play"/>
+                        </a:defRPr>
+                      </a:pPr>
+                      <a:r>
+                        <a:t>CPU</a:t>
+                      </a:r>
+                    </a:p>
+                  </a:txBody>
+                  <a:tcPr>
+                    <a:solidFill>
+                      <a:srgbClr val="111111"/>
+                    </a:solidFill>
+                  </a:tcPr>
+                </a:tc>
+                <a:tc>
+                  <a:txBody>
+                    <a:bodyPr/>
+                    <a:lstStyle/>
+                    <a:p>
+                      <a:pPr>
+                        <a:defRPr sz="1300" b="0">
+                          <a:solidFill>
+                            <a:srgbClr val="FFFFFF"/>
+                          </a:solidFill>
+                          <a:latin typeface="Play"/>
+                          <a:ea typeface="Play"/>
+                          <a:cs typeface="Play"/>
+                        </a:defRPr>
+                      </a:pPr>
+                      <a:r>
+                        <a:t>2 vCPU</a:t>
+                      </a:r>
+                    </a:p>
+                  </a:txBody>
+                  <a:tcPr>
+                    <a:solidFill>
+                      <a:srgbClr val="111111"/>
+                    </a:solidFill>
+                  </a:tcPr>
+                </a:tc>
+              </a:tr>
+              <a:tr h="1371600">
+                <a:tc>
+                  <a:txBody>
+                    <a:bodyPr/>
+                    <a:lstStyle/>
+                    <a:p>
+                      <a:pPr>
+                        <a:defRPr sz="1300" b="0">
+                          <a:solidFill>
+                            <a:srgbClr val="FFFFFF"/>
+                          </a:solidFill>
+                          <a:latin typeface="Play"/>
+                          <a:ea typeface="Play"/>
+                          <a:cs typeface="Play"/>
+                        </a:defRPr>
+                      </a:pPr>
+                      <a:r>
+                        <a:t>RAM</a:t>
+                      </a:r>
+                    </a:p>
+                  </a:txBody>
+                  <a:tcPr>
+                    <a:solidFill>
+                      <a:srgbClr val="111111"/>
+                    </a:solidFill>
+                  </a:tcPr>
+                </a:tc>
+                <a:tc>
+                  <a:txBody>
+                    <a:bodyPr/>
+                    <a:lstStyle/>
+                    <a:p>
+                      <a:pPr>
+                        <a:defRPr sz="1300" b="0">
+                          <a:solidFill>
+                            <a:srgbClr val="FFFFFF"/>
+                          </a:solidFill>
+                          <a:latin typeface="Play"/>
+                          <a:ea typeface="Play"/>
+                          <a:cs typeface="Play"/>
+                        </a:defRPr>
+                      </a:pPr>
+                      <a:r>
+                        <a:t>2 ГБ</a:t>
+                      </a:r>
+                    </a:p>
+                  </a:txBody>
+                  <a:tcPr>
+                    <a:solidFill>
+                      <a:srgbClr val="111111"/>
+                    </a:solidFill>
+                  </a:tcPr>
+                </a:tc>
+              </a:tr>
+            </a:tbl>
+          </a:graphicData>
+        </a:graphic>
+      </p:graphicFrame>
     </p:spTree>
   </p:cSld>
   <p:clrMapOvr>
@@ -13898,7 +12323,7 @@
         <p:spPr>
           <a:xfrm>
             <a:off x="429280" y="424715"/>
-            <a:ext cx="7827264" cy="822960"/>
+            <a:ext cx="7827264" cy="1183640"/>
           </a:xfrm>
           <a:prstGeom prst="rect">
             <a:avLst/>
@@ -13933,499 +12358,145 @@
                 <a:ea typeface="Play"/>
                 <a:cs typeface="Play"/>
               </a:rPr>
-              <a:t>Итоги</a:t>
+              <a:t>Стоимость инференса за 6 недель — 1 400 руб</a:t>
             </a:r>
           </a:p>
         </p:txBody>
       </p:sp>
-      <p:sp>
-        <p:nvSpPr>
-          <p:cNvPr id="3" name="stat_0:bar"/>
-          <p:cNvSpPr/>
+      <p:graphicFrame>
+        <p:nvGraphicFramePr>
+          <p:cNvPr id="3" name="Table 2"/>
+          <p:cNvGraphicFramePr>
+            <a:graphicFrameLocks noGrp="1"/>
+          </p:cNvGraphicFramePr>
           <p:nvPr/>
-        </p:nvSpPr>
-        <p:spPr>
-          <a:xfrm>
-            <a:off x="429280" y="1906524"/>
-            <a:ext cx="50800" cy="1627886"/>
-          </a:xfrm>
-          <a:prstGeom prst="rect">
-            <a:avLst/>
-          </a:prstGeom>
-          <a:solidFill>
-            <a:srgbClr val="0077FF"/>
-          </a:solidFill>
-          <a:ln>
-            <a:noFill/>
-          </a:ln>
-          <a:effectLst/>
-        </p:spPr>
-        <p:style>
-          <a:lnRef idx="1">
-            <a:schemeClr val="accent1"/>
-          </a:lnRef>
-          <a:fillRef idx="3">
-            <a:schemeClr val="accent1"/>
-          </a:fillRef>
-          <a:effectRef idx="2">
-            <a:schemeClr val="accent1"/>
-          </a:effectRef>
-          <a:fontRef idx="minor">
-            <a:schemeClr val="lt1"/>
-          </a:fontRef>
-        </p:style>
-        <p:txBody>
-          <a:bodyPr rtlCol="0" anchor="ctr"/>
-          <a:lstStyle/>
-          <a:p>
-            <a:pPr algn="ctr"/>
-          </a:p>
-        </p:txBody>
-      </p:sp>
-      <p:sp>
-        <p:nvSpPr>
-          <p:cNvPr id="4" name="stat_0"/>
-          <p:cNvSpPr txBox="1"/>
-          <p:nvPr/>
-        </p:nvSpPr>
-        <p:spPr>
-          <a:xfrm>
-            <a:off x="607080" y="1783080"/>
-            <a:ext cx="5251424" cy="1751330"/>
-          </a:xfrm>
-          <a:prstGeom prst="rect">
-            <a:avLst/>
-          </a:prstGeom>
-          <a:noFill/>
-        </p:spPr>
-        <p:txBody>
-          <a:bodyPr wrap="square" lIns="76200" rIns="76200" tIns="0" bIns="0">
-            <a:spAutoFit/>
-          </a:bodyPr>
-          <a:lstStyle/>
-          <a:p>
-            <a:pPr>
-              <a:lnSpc>
-                <a:spcPct val="100000"/>
-              </a:lnSpc>
-              <a:spcAft>
-                <a:spcPts val="200"/>
-              </a:spcAft>
-              <a:defRPr sz="5400" b="1">
-                <a:solidFill>
-                  <a:srgbClr val="0077FF"/>
-                </a:solidFill>
-                <a:latin typeface="Play"/>
-                <a:ea typeface="Play"/>
-                <a:cs typeface="Play"/>
-              </a:defRPr>
-            </a:pPr>
-            <a:r>
-              <a:rPr sz="5400" b="1">
-                <a:solidFill>
-                  <a:srgbClr val="0077FF"/>
-                </a:solidFill>
-                <a:latin typeface="Play"/>
-                <a:ea typeface="Play"/>
-                <a:cs typeface="Play"/>
-              </a:rPr>
-              <a:t>4 мин</a:t>
-            </a:r>
-          </a:p>
-          <a:p>
-            <a:pPr>
-              <a:spcAft>
-                <a:spcPts val="300"/>
-              </a:spcAft>
-              <a:defRPr sz="2400" b="0">
-                <a:solidFill>
-                  <a:srgbClr val="FFFFFF"/>
-                </a:solidFill>
-                <a:latin typeface="Play"/>
-                <a:ea typeface="Play"/>
-                <a:cs typeface="Play"/>
-              </a:defRPr>
-            </a:pPr>
-            <a:r>
-              <a:rPr sz="2400" b="0">
-                <a:solidFill>
-                  <a:srgbClr val="FFFFFF"/>
-                </a:solidFill>
-                <a:latin typeface="Play"/>
-                <a:ea typeface="Play"/>
-                <a:cs typeface="Play"/>
-              </a:rPr>
-              <a:t>Время сборки сократилось с 186 до 4 минут</a:t>
-            </a:r>
-          </a:p>
-        </p:txBody>
-      </p:sp>
-      <p:sp>
-        <p:nvSpPr>
-          <p:cNvPr id="5" name="stat_1:bar"/>
-          <p:cNvSpPr/>
-          <p:nvPr/>
-        </p:nvSpPr>
-        <p:spPr>
-          <a:xfrm>
-            <a:off x="6310940" y="1906524"/>
-            <a:ext cx="50800" cy="1627886"/>
-          </a:xfrm>
-          <a:prstGeom prst="rect">
-            <a:avLst/>
-          </a:prstGeom>
-          <a:solidFill>
-            <a:srgbClr val="0077FF"/>
-          </a:solidFill>
-          <a:ln>
-            <a:noFill/>
-          </a:ln>
-          <a:effectLst/>
-        </p:spPr>
-        <p:style>
-          <a:lnRef idx="1">
-            <a:schemeClr val="accent1"/>
-          </a:lnRef>
-          <a:fillRef idx="3">
-            <a:schemeClr val="accent1"/>
-          </a:fillRef>
-          <a:effectRef idx="2">
-            <a:schemeClr val="accent1"/>
-          </a:effectRef>
-          <a:fontRef idx="minor">
-            <a:schemeClr val="lt1"/>
-          </a:fontRef>
-        </p:style>
-        <p:txBody>
-          <a:bodyPr rtlCol="0" anchor="ctr"/>
-          <a:lstStyle/>
-          <a:p>
-            <a:pPr algn="ctr"/>
-          </a:p>
-        </p:txBody>
-      </p:sp>
-      <p:sp>
-        <p:nvSpPr>
-          <p:cNvPr id="6" name="stat_1"/>
-          <p:cNvSpPr txBox="1"/>
-          <p:nvPr/>
-        </p:nvSpPr>
-        <p:spPr>
-          <a:xfrm>
-            <a:off x="6488740" y="1783080"/>
-            <a:ext cx="5251424" cy="1751330"/>
-          </a:xfrm>
-          <a:prstGeom prst="rect">
-            <a:avLst/>
-          </a:prstGeom>
-          <a:noFill/>
-        </p:spPr>
-        <p:txBody>
-          <a:bodyPr wrap="square" lIns="76200" rIns="76200" tIns="0" bIns="0">
-            <a:spAutoFit/>
-          </a:bodyPr>
-          <a:lstStyle/>
-          <a:p>
-            <a:pPr>
-              <a:lnSpc>
-                <a:spcPct val="100000"/>
-              </a:lnSpc>
-              <a:spcAft>
-                <a:spcPts val="200"/>
-              </a:spcAft>
-              <a:defRPr sz="5400" b="1">
-                <a:solidFill>
-                  <a:srgbClr val="0077FF"/>
-                </a:solidFill>
-                <a:latin typeface="Play"/>
-                <a:ea typeface="Play"/>
-                <a:cs typeface="Play"/>
-              </a:defRPr>
-            </a:pPr>
-            <a:r>
-              <a:rPr sz="5400" b="1">
-                <a:solidFill>
-                  <a:srgbClr val="0077FF"/>
-                </a:solidFill>
-                <a:latin typeface="Play"/>
-                <a:ea typeface="Play"/>
-                <a:cs typeface="Play"/>
-              </a:rPr>
-              <a:t>1 день</a:t>
-            </a:r>
-          </a:p>
-          <a:p>
-            <a:pPr>
-              <a:spcAft>
-                <a:spcPts val="300"/>
-              </a:spcAft>
-              <a:defRPr sz="2400" b="0">
-                <a:solidFill>
-                  <a:srgbClr val="FFFFFF"/>
-                </a:solidFill>
-                <a:latin typeface="Play"/>
-                <a:ea typeface="Play"/>
-                <a:cs typeface="Play"/>
-              </a:defRPr>
-            </a:pPr>
-            <a:r>
-              <a:rPr sz="2400" b="0">
-                <a:solidFill>
-                  <a:srgbClr val="FFFFFF"/>
-                </a:solidFill>
-                <a:latin typeface="Play"/>
-                <a:ea typeface="Play"/>
-                <a:cs typeface="Play"/>
-              </a:rPr>
-              <a:t>Первый вариант появился за 1 день вместо 6</a:t>
-            </a:r>
-          </a:p>
-        </p:txBody>
-      </p:sp>
-      <p:sp>
-        <p:nvSpPr>
-          <p:cNvPr id="7" name="stat_2:bar"/>
-          <p:cNvSpPr/>
-          <p:nvPr/>
-        </p:nvSpPr>
-        <p:spPr>
-          <a:xfrm>
-            <a:off x="429280" y="4101083"/>
-            <a:ext cx="50800" cy="1627886"/>
-          </a:xfrm>
-          <a:prstGeom prst="rect">
-            <a:avLst/>
-          </a:prstGeom>
-          <a:solidFill>
-            <a:srgbClr val="0077FF"/>
-          </a:solidFill>
-          <a:ln>
-            <a:noFill/>
-          </a:ln>
-          <a:effectLst/>
-        </p:spPr>
-        <p:style>
-          <a:lnRef idx="1">
-            <a:schemeClr val="accent1"/>
-          </a:lnRef>
-          <a:fillRef idx="3">
-            <a:schemeClr val="accent1"/>
-          </a:fillRef>
-          <a:effectRef idx="2">
-            <a:schemeClr val="accent1"/>
-          </a:effectRef>
-          <a:fontRef idx="minor">
-            <a:schemeClr val="lt1"/>
-          </a:fontRef>
-        </p:style>
-        <p:txBody>
-          <a:bodyPr rtlCol="0" anchor="ctr"/>
-          <a:lstStyle/>
-          <a:p>
-            <a:pPr algn="ctr"/>
-          </a:p>
-        </p:txBody>
-      </p:sp>
-      <p:sp>
-        <p:nvSpPr>
-          <p:cNvPr id="8" name="stat_2"/>
-          <p:cNvSpPr txBox="1"/>
-          <p:nvPr/>
-        </p:nvSpPr>
-        <p:spPr>
-          <a:xfrm>
-            <a:off x="607080" y="3977640"/>
-            <a:ext cx="5251424" cy="1751330"/>
-          </a:xfrm>
-          <a:prstGeom prst="rect">
-            <a:avLst/>
-          </a:prstGeom>
-          <a:noFill/>
-        </p:spPr>
-        <p:txBody>
-          <a:bodyPr wrap="square" lIns="76200" rIns="76200" tIns="0" bIns="0">
-            <a:spAutoFit/>
-          </a:bodyPr>
-          <a:lstStyle/>
-          <a:p>
-            <a:pPr>
-              <a:lnSpc>
-                <a:spcPct val="100000"/>
-              </a:lnSpc>
-              <a:spcAft>
-                <a:spcPts val="200"/>
-              </a:spcAft>
-              <a:defRPr sz="5400" b="1">
-                <a:solidFill>
-                  <a:srgbClr val="0077FF"/>
-                </a:solidFill>
-                <a:latin typeface="Play"/>
-                <a:ea typeface="Play"/>
-                <a:cs typeface="Play"/>
-              </a:defRPr>
-            </a:pPr>
-            <a:r>
-              <a:rPr sz="5400" b="1">
-                <a:solidFill>
-                  <a:srgbClr val="0077FF"/>
-                </a:solidFill>
-                <a:latin typeface="Play"/>
-                <a:ea typeface="Play"/>
-                <a:cs typeface="Play"/>
-              </a:rPr>
-              <a:t>2 из 68</a:t>
-            </a:r>
-          </a:p>
-          <a:p>
-            <a:pPr>
-              <a:spcAft>
-                <a:spcPts val="300"/>
-              </a:spcAft>
-              <a:defRPr sz="2400" b="0">
-                <a:solidFill>
-                  <a:srgbClr val="FFFFFF"/>
-                </a:solidFill>
-                <a:latin typeface="Play"/>
-                <a:ea typeface="Play"/>
-                <a:cs typeface="Play"/>
-              </a:defRPr>
-            </a:pPr>
-            <a:r>
-              <a:rPr sz="2400" b="0">
-                <a:solidFill>
-                  <a:srgbClr val="FFFFFF"/>
-                </a:solidFill>
-                <a:latin typeface="Play"/>
-                <a:ea typeface="Play"/>
-                <a:cs typeface="Play"/>
-              </a:rPr>
-              <a:t>Нарушения стиля уменьшились до 2 из 68</a:t>
-            </a:r>
-          </a:p>
-        </p:txBody>
-      </p:sp>
-      <p:sp>
-        <p:nvSpPr>
-          <p:cNvPr id="9" name="stat_3:bar"/>
-          <p:cNvSpPr/>
-          <p:nvPr/>
-        </p:nvSpPr>
-        <p:spPr>
-          <a:xfrm>
-            <a:off x="6310940" y="4101083"/>
-            <a:ext cx="50800" cy="1627886"/>
-          </a:xfrm>
-          <a:prstGeom prst="rect">
-            <a:avLst/>
-          </a:prstGeom>
-          <a:solidFill>
-            <a:srgbClr val="0077FF"/>
-          </a:solidFill>
-          <a:ln>
-            <a:noFill/>
-          </a:ln>
-          <a:effectLst/>
-        </p:spPr>
-        <p:style>
-          <a:lnRef idx="1">
-            <a:schemeClr val="accent1"/>
-          </a:lnRef>
-          <a:fillRef idx="3">
-            <a:schemeClr val="accent1"/>
-          </a:fillRef>
-          <a:effectRef idx="2">
-            <a:schemeClr val="accent1"/>
-          </a:effectRef>
-          <a:fontRef idx="minor">
-            <a:schemeClr val="lt1"/>
-          </a:fontRef>
-        </p:style>
-        <p:txBody>
-          <a:bodyPr rtlCol="0" anchor="ctr"/>
-          <a:lstStyle/>
-          <a:p>
-            <a:pPr algn="ctr"/>
-          </a:p>
-        </p:txBody>
-      </p:sp>
-      <p:sp>
-        <p:nvSpPr>
-          <p:cNvPr id="10" name="stat_3"/>
-          <p:cNvSpPr txBox="1"/>
-          <p:nvPr/>
-        </p:nvSpPr>
-        <p:spPr>
-          <a:xfrm>
-            <a:off x="6488740" y="3977640"/>
-            <a:ext cx="5251424" cy="1751330"/>
-          </a:xfrm>
-          <a:prstGeom prst="rect">
-            <a:avLst/>
-          </a:prstGeom>
-          <a:noFill/>
-        </p:spPr>
-        <p:txBody>
-          <a:bodyPr wrap="square" lIns="76200" rIns="76200" tIns="0" bIns="0">
-            <a:spAutoFit/>
-          </a:bodyPr>
-          <a:lstStyle/>
-          <a:p>
-            <a:pPr>
-              <a:lnSpc>
-                <a:spcPct val="100000"/>
-              </a:lnSpc>
-              <a:spcAft>
-                <a:spcPts val="200"/>
-              </a:spcAft>
-              <a:defRPr sz="5400" b="1">
-                <a:solidFill>
-                  <a:srgbClr val="0077FF"/>
-                </a:solidFill>
-                <a:latin typeface="Play"/>
-                <a:ea typeface="Play"/>
-                <a:cs typeface="Play"/>
-              </a:defRPr>
-            </a:pPr>
-            <a:r>
-              <a:rPr sz="5400" b="1">
-                <a:solidFill>
-                  <a:srgbClr val="0077FF"/>
-                </a:solidFill>
-                <a:latin typeface="Play"/>
-                <a:ea typeface="Play"/>
-                <a:cs typeface="Play"/>
-              </a:rPr>
-              <a:t>38</a:t>
-            </a:r>
-          </a:p>
-          <a:p>
-            <a:pPr>
-              <a:spcAft>
-                <a:spcPts val="300"/>
-              </a:spcAft>
-              <a:defRPr sz="2400" b="0">
-                <a:solidFill>
-                  <a:srgbClr val="FFFFFF"/>
-                </a:solidFill>
-                <a:latin typeface="Play"/>
-                <a:ea typeface="Play"/>
-                <a:cs typeface="Play"/>
-              </a:defRPr>
-            </a:pPr>
-            <a:r>
-              <a:rPr sz="2400" b="0">
-                <a:solidFill>
-                  <a:srgbClr val="FFFFFF"/>
-                </a:solidFill>
-                <a:latin typeface="Play"/>
-                <a:ea typeface="Play"/>
-                <a:cs typeface="Play"/>
-              </a:rPr>
-              <a:t>Дизайнеры закрыли 38 запросов вместо 11 в неделю</a:t>
-            </a:r>
-          </a:p>
-        </p:txBody>
-      </p:sp>
+        </p:nvGraphicFramePr>
+        <p:xfrm>
+          <a:off x="6267602" y="1848385"/>
+          <a:ext cx="5472562" cy="4049494"/>
+        </p:xfrm>
+        <a:graphic>
+          <a:graphicData uri="http://schemas.openxmlformats.org/drawingml/2006/table">
+            <a:tbl>
+              <a:tblPr firstRow="1" bandRow="1">
+                <a:tableStyleId>{5C22544A-7EE6-4342-B048-85BDC9FD1C3A}</a:tableStyleId>
+              </a:tblPr>
+              <a:tblGrid>
+                <a:gridCol w="2736281"/>
+                <a:gridCol w="2736281"/>
+              </a:tblGrid>
+              <a:tr h="2024747">
+                <a:tc>
+                  <a:txBody>
+                    <a:bodyPr/>
+                    <a:lstStyle/>
+                    <a:p>
+                      <a:pPr>
+                        <a:defRPr sz="1300" b="1">
+                          <a:solidFill>
+                            <a:srgbClr val="FFFFFF"/>
+                          </a:solidFill>
+                          <a:latin typeface="Play"/>
+                          <a:ea typeface="Play"/>
+                          <a:cs typeface="Play"/>
+                        </a:defRPr>
+                      </a:pPr>
+                      <a:r>
+                        <a:t>Показатель</a:t>
+                      </a:r>
+                    </a:p>
+                  </a:txBody>
+                  <a:tcPr>
+                    <a:solidFill>
+                      <a:srgbClr val="0077FF"/>
+                    </a:solidFill>
+                  </a:tcPr>
+                </a:tc>
+                <a:tc>
+                  <a:txBody>
+                    <a:bodyPr/>
+                    <a:lstStyle/>
+                    <a:p>
+                      <a:pPr>
+                        <a:defRPr sz="1300" b="1">
+                          <a:solidFill>
+                            <a:srgbClr val="FFFFFF"/>
+                          </a:solidFill>
+                          <a:latin typeface="Play"/>
+                          <a:ea typeface="Play"/>
+                          <a:cs typeface="Play"/>
+                        </a:defRPr>
+                      </a:pPr>
+                      <a:r>
+                        <a:t>Значение</a:t>
+                      </a:r>
+                    </a:p>
+                  </a:txBody>
+                  <a:tcPr>
+                    <a:solidFill>
+                      <a:srgbClr val="0077FF"/>
+                    </a:solidFill>
+                  </a:tcPr>
+                </a:tc>
+              </a:tr>
+              <a:tr h="2024747">
+                <a:tc>
+                  <a:txBody>
+                    <a:bodyPr/>
+                    <a:lstStyle/>
+                    <a:p>
+                      <a:pPr>
+                        <a:defRPr sz="1300" b="0">
+                          <a:solidFill>
+                            <a:srgbClr val="FFFFFF"/>
+                          </a:solidFill>
+                          <a:latin typeface="Play"/>
+                          <a:ea typeface="Play"/>
+                          <a:cs typeface="Play"/>
+                        </a:defRPr>
+                      </a:pPr>
+                      <a:r>
+                        <a:t>Инференс</a:t>
+                      </a:r>
+                    </a:p>
+                  </a:txBody>
+                  <a:tcPr>
+                    <a:solidFill>
+                      <a:srgbClr val="111111"/>
+                    </a:solidFill>
+                  </a:tcPr>
+                </a:tc>
+                <a:tc>
+                  <a:txBody>
+                    <a:bodyPr/>
+                    <a:lstStyle/>
+                    <a:p>
+                      <a:pPr>
+                        <a:defRPr sz="1300" b="0">
+                          <a:solidFill>
+                            <a:srgbClr val="FFFFFF"/>
+                          </a:solidFill>
+                          <a:latin typeface="Play"/>
+                          <a:ea typeface="Play"/>
+                          <a:cs typeface="Play"/>
+                        </a:defRPr>
+                      </a:pPr>
+                      <a:r>
+                        <a:t>1 400 руб.</a:t>
+                      </a:r>
+                    </a:p>
+                  </a:txBody>
+                  <a:tcPr>
+                    <a:solidFill>
+                      <a:srgbClr val="111111"/>
+                    </a:solidFill>
+                  </a:tcPr>
+                </a:tc>
+              </a:tr>
+            </a:tbl>
+          </a:graphicData>
+        </a:graphic>
+      </p:graphicFrame>
     </p:spTree>
   </p:cSld>
   <p:clrMapOvr>
@@ -14517,7 +12588,7 @@
         <p:spPr>
           <a:xfrm>
             <a:off x="300817" y="297715"/>
-            <a:ext cx="11566347" cy="5727164"/>
+            <a:ext cx="11566347" cy="5508649"/>
           </a:xfrm>
           <a:prstGeom prst="roundRect">
             <a:avLst/>
@@ -14563,7 +12634,7 @@
         <p:spPr>
           <a:xfrm>
             <a:off x="427817" y="424715"/>
-            <a:ext cx="7827264" cy="822960"/>
+            <a:ext cx="7827264" cy="1183640"/>
           </a:xfrm>
           <a:prstGeom prst="rect">
             <a:avLst/>
@@ -14598,7 +12669,7 @@
                 <a:ea typeface="Play"/>
                 <a:cs typeface="Play"/>
               </a:rPr>
-              <a:t>Следующие шаги</a:t>
+              <a:t>Нагрузка выше 20 задач: главный риск</a:t>
             </a:r>
           </a:p>
         </p:txBody>
@@ -14611,8 +12682,8 @@
         </p:nvSpPr>
         <p:spPr>
           <a:xfrm>
-            <a:off x="427817" y="1783080"/>
-            <a:ext cx="5473293" cy="4114800"/>
+            <a:off x="427817" y="3360052"/>
+            <a:ext cx="6130088" cy="1026160"/>
           </a:xfrm>
           <a:prstGeom prst="rect">
             <a:avLst/>
@@ -14629,7 +12700,7 @@
               <a:spcAft>
                 <a:spcPts val="300"/>
               </a:spcAft>
-              <a:defRPr sz="1600">
+              <a:defRPr sz="2800">
                 <a:solidFill>
                   <a:srgbClr val="FFFFFF"/>
                 </a:solidFill>
@@ -14639,7 +12710,7 @@
               </a:defRPr>
             </a:pPr>
             <a:r>
-              <a:rPr sz="1600">
+              <a:rPr sz="2800">
                 <a:solidFill>
                   <a:srgbClr val="FFFFFF"/>
                 </a:solidFill>
@@ -14647,7 +12718,7 @@
                 <a:ea typeface="Play"/>
                 <a:cs typeface="Play"/>
               </a:rPr>
-              <a:t>• Согласовать бюджет и ресурсы</a:t>
+              <a:t>• Требуется внешняя очередь</a:t>
             </a:r>
           </a:p>
           <a:p>
@@ -14655,7 +12726,7 @@
               <a:spcAft>
                 <a:spcPts val="300"/>
               </a:spcAft>
-              <a:defRPr sz="1600">
+              <a:defRPr sz="2800">
                 <a:solidFill>
                   <a:srgbClr val="FFFFFF"/>
                 </a:solidFill>
@@ -14665,7 +12736,7 @@
               </a:defRPr>
             </a:pPr>
             <a:r>
-              <a:rPr sz="1600">
+              <a:rPr sz="2800">
                 <a:solidFill>
                   <a:srgbClr val="FFFFFF"/>
                 </a:solidFill>
@@ -14673,226 +12744,431 @@
                 <a:ea typeface="Play"/>
                 <a:cs typeface="Play"/>
               </a:rPr>
-              <a:t>• Интегрировать сервис с корпоративным хранилищем</a:t>
-            </a:r>
-          </a:p>
-          <a:p>
-            <a:pPr algn="l">
-              <a:spcAft>
-                <a:spcPts val="300"/>
-              </a:spcAft>
-              <a:defRPr sz="1600">
-                <a:solidFill>
-                  <a:srgbClr val="FFFFFF"/>
-                </a:solidFill>
-                <a:latin typeface="Play"/>
-                <a:ea typeface="Play"/>
-                <a:cs typeface="Play"/>
-              </a:defRPr>
-            </a:pPr>
-            <a:r>
-              <a:rPr sz="1600">
-                <a:solidFill>
-                  <a:srgbClr val="FFFFFF"/>
-                </a:solidFill>
-                <a:latin typeface="Play"/>
-                <a:ea typeface="Play"/>
-                <a:cs typeface="Play"/>
-              </a:rPr>
-              <a:t>• Расширить команды до 8 в Q3 2026</a:t>
+              <a:t>• Модель может выдумать цифры</a:t>
             </a:r>
           </a:p>
         </p:txBody>
       </p:sp>
-      <p:sp>
-        <p:nvSpPr>
-          <p:cNvPr id="683" name="Pentagon 682"/>
-          <p:cNvSpPr/>
+      <p:grpSp>
+        <p:nvGrpSpPr>
+          <p:cNvPr id="2" name="illustration:builtin-target"/>
+          <p:cNvGrpSpPr/>
           <p:nvPr/>
-        </p:nvSpPr>
-        <p:spPr>
+        </p:nvGrpSpPr>
+        <p:grpSpPr>
           <a:xfrm>
-            <a:off x="6266870" y="1879092"/>
-            <a:ext cx="5473293" cy="1179576"/>
+            <a:off x="7814718" y="2355935"/>
+            <a:ext cx="3034393" cy="3034393"/>
+            <a:chOff x="7814718" y="2355935"/>
+            <a:chExt cx="3034393" cy="3034393"/>
           </a:xfrm>
-          <a:prstGeom prst="homePlate">
-            <a:avLst/>
-          </a:prstGeom>
-          <a:solidFill>
-            <a:srgbClr val="0077FF"/>
-          </a:solidFill>
-          <a:ln>
-            <a:noFill/>
-          </a:ln>
-        </p:spPr>
-        <p:style>
-          <a:lnRef idx="1">
-            <a:schemeClr val="accent1"/>
-          </a:lnRef>
-          <a:fillRef idx="3">
-            <a:schemeClr val="accent1"/>
-          </a:fillRef>
-          <a:effectRef idx="2">
-            <a:schemeClr val="accent1"/>
-          </a:effectRef>
-          <a:fontRef idx="minor">
-            <a:schemeClr val="lt1"/>
-          </a:fontRef>
-        </p:style>
-        <p:txBody>
-          <a:bodyPr rtlCol="0" anchor="ctr" wrap="square" lIns="12700" rIns="12700" tIns="12700" bIns="12700"/>
-          <a:lstStyle/>
-          <a:p>
-            <a:pPr algn="ctr">
-              <a:defRPr sz="1400" b="0">
-                <a:solidFill>
-                  <a:srgbClr val="FFFFFF"/>
-                </a:solidFill>
-                <a:latin typeface="Play"/>
-                <a:ea typeface="Play"/>
-                <a:cs typeface="Play"/>
-              </a:defRPr>
-            </a:pPr>
-            <a:r>
-              <a:rPr sz="1400" b="0">
-                <a:solidFill>
-                  <a:srgbClr val="FFFFFF"/>
-                </a:solidFill>
-                <a:latin typeface="Play"/>
-                <a:ea typeface="Play"/>
-                <a:cs typeface="Play"/>
-              </a:rPr>
-              <a:t>Согласовать бюджет</a:t>
-            </a:r>
-          </a:p>
-        </p:txBody>
-      </p:sp>
-      <p:sp>
-        <p:nvSpPr>
-          <p:cNvPr id="684" name="Chevron 683"/>
-          <p:cNvSpPr/>
-          <p:nvPr/>
-        </p:nvSpPr>
-        <p:spPr>
-          <a:xfrm>
-            <a:off x="6266870" y="3250692"/>
-            <a:ext cx="5473293" cy="1179576"/>
-          </a:xfrm>
-          <a:prstGeom prst="chevron">
-            <a:avLst/>
-          </a:prstGeom>
-          <a:solidFill>
-            <a:srgbClr val="0077FF"/>
-          </a:solidFill>
-          <a:ln>
-            <a:noFill/>
-          </a:ln>
-        </p:spPr>
-        <p:style>
-          <a:lnRef idx="1">
-            <a:schemeClr val="accent1"/>
-          </a:lnRef>
-          <a:fillRef idx="3">
-            <a:schemeClr val="accent1"/>
-          </a:fillRef>
-          <a:effectRef idx="2">
-            <a:schemeClr val="accent1"/>
-          </a:effectRef>
-          <a:fontRef idx="minor">
-            <a:schemeClr val="lt1"/>
-          </a:fontRef>
-        </p:style>
-        <p:txBody>
-          <a:bodyPr rtlCol="0" anchor="ctr" wrap="square" lIns="12700" rIns="12700" tIns="12700" bIns="12700"/>
-          <a:lstStyle/>
-          <a:p>
-            <a:pPr algn="ctr">
-              <a:defRPr sz="1400" b="0">
-                <a:solidFill>
-                  <a:srgbClr val="FFFFFF"/>
-                </a:solidFill>
-                <a:latin typeface="Play"/>
-                <a:ea typeface="Play"/>
-                <a:cs typeface="Play"/>
-              </a:defRPr>
-            </a:pPr>
-            <a:r>
-              <a:rPr sz="1400" b="0">
-                <a:solidFill>
-                  <a:srgbClr val="FFFFFF"/>
-                </a:solidFill>
-                <a:latin typeface="Play"/>
-                <a:ea typeface="Play"/>
-                <a:cs typeface="Play"/>
-              </a:rPr>
-              <a:t>Интеграция с хранилищем</a:t>
-            </a:r>
-          </a:p>
-        </p:txBody>
-      </p:sp>
-      <p:sp>
-        <p:nvSpPr>
-          <p:cNvPr id="685" name="Chevron 684"/>
-          <p:cNvSpPr/>
-          <p:nvPr/>
-        </p:nvSpPr>
-        <p:spPr>
-          <a:xfrm>
-            <a:off x="6266870" y="4622292"/>
-            <a:ext cx="5473293" cy="1179576"/>
-          </a:xfrm>
-          <a:prstGeom prst="chevron">
-            <a:avLst/>
-          </a:prstGeom>
-          <a:solidFill>
-            <a:srgbClr val="0077FF"/>
-          </a:solidFill>
-          <a:ln>
-            <a:noFill/>
-          </a:ln>
-        </p:spPr>
-        <p:style>
-          <a:lnRef idx="1">
-            <a:schemeClr val="accent1"/>
-          </a:lnRef>
-          <a:fillRef idx="3">
-            <a:schemeClr val="accent1"/>
-          </a:fillRef>
-          <a:effectRef idx="2">
-            <a:schemeClr val="accent1"/>
-          </a:effectRef>
-          <a:fontRef idx="minor">
-            <a:schemeClr val="lt1"/>
-          </a:fontRef>
-        </p:style>
-        <p:txBody>
-          <a:bodyPr rtlCol="0" anchor="ctr" wrap="square" lIns="12700" rIns="12700" tIns="12700" bIns="12700"/>
-          <a:lstStyle/>
-          <a:p>
-            <a:pPr algn="ctr">
-              <a:defRPr sz="1400" b="0">
-                <a:solidFill>
-                  <a:srgbClr val="FFFFFF"/>
-                </a:solidFill>
-                <a:latin typeface="Play"/>
-                <a:ea typeface="Play"/>
-                <a:cs typeface="Play"/>
-              </a:defRPr>
-            </a:pPr>
-            <a:r>
-              <a:rPr sz="1400" b="0">
-                <a:solidFill>
-                  <a:srgbClr val="FFFFFF"/>
-                </a:solidFill>
-                <a:latin typeface="Play"/>
-                <a:ea typeface="Play"/>
-                <a:cs typeface="Play"/>
-              </a:rPr>
-              <a:t>Расширить команды</a:t>
-            </a:r>
-          </a:p>
-        </p:txBody>
-      </p:sp>
+        </p:grpSpPr>
+        <p:sp>
+          <p:nvSpPr>
+            <p:cNvPr id="683" name="Oval 682"/>
+            <p:cNvSpPr/>
+            <p:nvPr/>
+          </p:nvSpPr>
+          <p:spPr>
+            <a:xfrm>
+              <a:off x="7814718" y="2355935"/>
+              <a:ext cx="3034393" cy="3034393"/>
+            </a:xfrm>
+            <a:prstGeom prst="ellipse">
+              <a:avLst/>
+            </a:prstGeom>
+            <a:solidFill>
+              <a:srgbClr val="0E2137"/>
+            </a:solidFill>
+            <a:ln>
+              <a:noFill/>
+            </a:ln>
+            <a:effectLst/>
+          </p:spPr>
+          <p:style>
+            <a:lnRef idx="1">
+              <a:schemeClr val="accent1"/>
+            </a:lnRef>
+            <a:fillRef idx="3">
+              <a:schemeClr val="accent1"/>
+            </a:fillRef>
+            <a:effectRef idx="2">
+              <a:schemeClr val="accent1"/>
+            </a:effectRef>
+            <a:fontRef idx="minor">
+              <a:schemeClr val="lt1"/>
+            </a:fontRef>
+          </p:style>
+          <p:txBody>
+            <a:bodyPr rtlCol="0" anchor="ctr"/>
+            <a:lstStyle/>
+            <a:p>
+              <a:pPr algn="ctr"/>
+            </a:p>
+          </p:txBody>
+        </p:sp>
+        <p:sp>
+          <p:nvSpPr>
+            <p:cNvPr id="684" name="Oval 683"/>
+            <p:cNvSpPr/>
+            <p:nvPr/>
+          </p:nvSpPr>
+          <p:spPr>
+            <a:xfrm>
+              <a:off x="8055543" y="2837584"/>
+              <a:ext cx="2311919" cy="2311919"/>
+            </a:xfrm>
+            <a:prstGeom prst="ellipse">
+              <a:avLst/>
+            </a:prstGeom>
+            <a:solidFill>
+              <a:srgbClr val="111111"/>
+            </a:solidFill>
+            <a:ln>
+              <a:noFill/>
+            </a:ln>
+            <a:effectLst/>
+          </p:spPr>
+          <p:style>
+            <a:lnRef idx="1">
+              <a:schemeClr val="accent1"/>
+            </a:lnRef>
+            <a:fillRef idx="3">
+              <a:schemeClr val="accent1"/>
+            </a:fillRef>
+            <a:effectRef idx="2">
+              <a:schemeClr val="accent1"/>
+            </a:effectRef>
+            <a:fontRef idx="minor">
+              <a:schemeClr val="lt1"/>
+            </a:fontRef>
+          </p:style>
+          <p:txBody>
+            <a:bodyPr rtlCol="0" anchor="ctr"/>
+            <a:lstStyle/>
+            <a:p>
+              <a:pPr algn="ctr"/>
+            </a:p>
+          </p:txBody>
+        </p:sp>
+        <p:sp>
+          <p:nvSpPr>
+            <p:cNvPr id="685" name="Oval 684"/>
+            <p:cNvSpPr/>
+            <p:nvPr/>
+          </p:nvSpPr>
+          <p:spPr>
+            <a:xfrm>
+              <a:off x="8344532" y="3126574"/>
+              <a:ext cx="1733939" cy="1733939"/>
+            </a:xfrm>
+            <a:prstGeom prst="ellipse">
+              <a:avLst/>
+            </a:prstGeom>
+            <a:solidFill>
+              <a:srgbClr val="0077FF"/>
+            </a:solidFill>
+            <a:ln>
+              <a:noFill/>
+            </a:ln>
+            <a:effectLst/>
+          </p:spPr>
+          <p:style>
+            <a:lnRef idx="1">
+              <a:schemeClr val="accent1"/>
+            </a:lnRef>
+            <a:fillRef idx="3">
+              <a:schemeClr val="accent1"/>
+            </a:fillRef>
+            <a:effectRef idx="2">
+              <a:schemeClr val="accent1"/>
+            </a:effectRef>
+            <a:fontRef idx="minor">
+              <a:schemeClr val="lt1"/>
+            </a:fontRef>
+          </p:style>
+          <p:txBody>
+            <a:bodyPr rtlCol="0" anchor="ctr"/>
+            <a:lstStyle/>
+            <a:p>
+              <a:pPr algn="ctr"/>
+            </a:p>
+          </p:txBody>
+        </p:sp>
+        <p:sp>
+          <p:nvSpPr>
+            <p:cNvPr id="686" name="Oval 685"/>
+            <p:cNvSpPr/>
+            <p:nvPr/>
+          </p:nvSpPr>
+          <p:spPr>
+            <a:xfrm>
+              <a:off x="8633522" y="3415564"/>
+              <a:ext cx="1155959" cy="1155959"/>
+            </a:xfrm>
+            <a:prstGeom prst="ellipse">
+              <a:avLst/>
+            </a:prstGeom>
+            <a:solidFill>
+              <a:srgbClr val="111111"/>
+            </a:solidFill>
+            <a:ln>
+              <a:noFill/>
+            </a:ln>
+            <a:effectLst/>
+          </p:spPr>
+          <p:style>
+            <a:lnRef idx="1">
+              <a:schemeClr val="accent1"/>
+            </a:lnRef>
+            <a:fillRef idx="3">
+              <a:schemeClr val="accent1"/>
+            </a:fillRef>
+            <a:effectRef idx="2">
+              <a:schemeClr val="accent1"/>
+            </a:effectRef>
+            <a:fontRef idx="minor">
+              <a:schemeClr val="lt1"/>
+            </a:fontRef>
+          </p:style>
+          <p:txBody>
+            <a:bodyPr rtlCol="0" anchor="ctr"/>
+            <a:lstStyle/>
+            <a:p>
+              <a:pPr algn="ctr"/>
+            </a:p>
+          </p:txBody>
+        </p:sp>
+        <p:sp>
+          <p:nvSpPr>
+            <p:cNvPr id="687" name="Oval 686"/>
+            <p:cNvSpPr/>
+            <p:nvPr/>
+          </p:nvSpPr>
+          <p:spPr>
+            <a:xfrm>
+              <a:off x="8922512" y="3704554"/>
+              <a:ext cx="577979" cy="577979"/>
+            </a:xfrm>
+            <a:prstGeom prst="ellipse">
+              <a:avLst/>
+            </a:prstGeom>
+            <a:solidFill>
+              <a:srgbClr val="6DBCFF"/>
+            </a:solidFill>
+            <a:ln>
+              <a:noFill/>
+            </a:ln>
+            <a:effectLst/>
+          </p:spPr>
+          <p:style>
+            <a:lnRef idx="1">
+              <a:schemeClr val="accent1"/>
+            </a:lnRef>
+            <a:fillRef idx="3">
+              <a:schemeClr val="accent1"/>
+            </a:fillRef>
+            <a:effectRef idx="2">
+              <a:schemeClr val="accent1"/>
+            </a:effectRef>
+            <a:fontRef idx="minor">
+              <a:schemeClr val="lt1"/>
+            </a:fontRef>
+          </p:style>
+          <p:txBody>
+            <a:bodyPr rtlCol="0" anchor="ctr"/>
+            <a:lstStyle/>
+            <a:p>
+              <a:pPr algn="ctr"/>
+            </a:p>
+          </p:txBody>
+        </p:sp>
+        <p:sp>
+          <p:nvSpPr>
+            <p:cNvPr id="3" name="Freeform 2"/>
+            <p:cNvSpPr/>
+            <p:nvPr/>
+          </p:nvSpPr>
+          <p:spPr>
+            <a:xfrm>
+              <a:off x="9283750" y="2669007"/>
+              <a:ext cx="1252289" cy="1252289"/>
+            </a:xfrm>
+            <a:custGeom>
+              <a:avLst/>
+              <a:gdLst/>
+              <a:ahLst/>
+              <a:cxnLst/>
+              <a:rect l="l" t="t" r="r" b="b"/>
+              <a:pathLst>
+                <a:path w="1252289" h="1252289">
+                  <a:moveTo>
+                    <a:pt x="0" y="1252289"/>
+                  </a:moveTo>
+                  <a:lnTo>
+                    <a:pt x="1252289" y="0"/>
+                  </a:lnTo>
+                </a:path>
+              </a:pathLst>
+            </a:custGeom>
+            <a:solidFill>
+              <a:srgbClr val="000000"/>
+            </a:solidFill>
+            <a:ln w="96329" cap="rnd">
+              <a:solidFill>
+                <a:srgbClr val="FFFFFF"/>
+              </a:solidFill>
+              <a:round/>
+            </a:ln>
+            <a:effectLst/>
+          </p:spPr>
+          <p:style>
+            <a:lnRef idx="1">
+              <a:schemeClr val="accent1"/>
+            </a:lnRef>
+            <a:fillRef idx="3">
+              <a:schemeClr val="accent1"/>
+            </a:fillRef>
+            <a:effectRef idx="2">
+              <a:schemeClr val="accent1"/>
+            </a:effectRef>
+            <a:fontRef idx="minor">
+              <a:schemeClr val="lt1"/>
+            </a:fontRef>
+          </p:style>
+          <p:txBody>
+            <a:bodyPr rtlCol="0" anchor="ctr"/>
+            <a:lstStyle/>
+            <a:p>
+              <a:pPr algn="ctr"/>
+            </a:p>
+          </p:txBody>
+        </p:sp>
+        <p:sp>
+          <p:nvSpPr>
+            <p:cNvPr id="4" name="Freeform 3"/>
+            <p:cNvSpPr/>
+            <p:nvPr/>
+          </p:nvSpPr>
+          <p:spPr>
+            <a:xfrm>
+              <a:off x="10536039" y="2355935"/>
+              <a:ext cx="313072" cy="409402"/>
+            </a:xfrm>
+            <a:custGeom>
+              <a:avLst/>
+              <a:gdLst/>
+              <a:ahLst/>
+              <a:cxnLst/>
+              <a:rect l="l" t="t" r="r" b="b"/>
+              <a:pathLst>
+                <a:path w="313072" h="409402">
+                  <a:moveTo>
+                    <a:pt x="0" y="313072"/>
+                  </a:moveTo>
+                  <a:lnTo>
+                    <a:pt x="216742" y="0"/>
+                  </a:lnTo>
+                  <a:lnTo>
+                    <a:pt x="313072" y="409402"/>
+                  </a:lnTo>
+                  <a:close/>
+                </a:path>
+              </a:pathLst>
+            </a:custGeom>
+            <a:solidFill>
+              <a:srgbClr val="FFFFFF"/>
+            </a:solidFill>
+            <a:ln>
+              <a:noFill/>
+            </a:ln>
+            <a:effectLst/>
+          </p:spPr>
+          <p:style>
+            <a:lnRef idx="1">
+              <a:schemeClr val="accent1"/>
+            </a:lnRef>
+            <a:fillRef idx="3">
+              <a:schemeClr val="accent1"/>
+            </a:fillRef>
+            <a:effectRef idx="2">
+              <a:schemeClr val="accent1"/>
+            </a:effectRef>
+            <a:fontRef idx="minor">
+              <a:schemeClr val="lt1"/>
+            </a:fontRef>
+          </p:style>
+          <p:txBody>
+            <a:bodyPr rtlCol="0" anchor="ctr"/>
+            <a:lstStyle/>
+            <a:p>
+              <a:pPr algn="ctr"/>
+            </a:p>
+          </p:txBody>
+        </p:sp>
+        <p:sp>
+          <p:nvSpPr>
+            <p:cNvPr id="5" name="Freeform 4"/>
+            <p:cNvSpPr/>
+            <p:nvPr/>
+          </p:nvSpPr>
+          <p:spPr>
+            <a:xfrm>
+              <a:off x="10247049" y="2452265"/>
+              <a:ext cx="409402" cy="216742"/>
+            </a:xfrm>
+            <a:custGeom>
+              <a:avLst/>
+              <a:gdLst/>
+              <a:ahLst/>
+              <a:cxnLst/>
+              <a:rect l="l" t="t" r="r" b="b"/>
+              <a:pathLst>
+                <a:path w="409402" h="216742">
+                  <a:moveTo>
+                    <a:pt x="288990" y="216742"/>
+                  </a:moveTo>
+                  <a:lnTo>
+                    <a:pt x="0" y="120412"/>
+                  </a:lnTo>
+                  <a:lnTo>
+                    <a:pt x="409402" y="0"/>
+                  </a:lnTo>
+                  <a:close/>
+                </a:path>
+              </a:pathLst>
+            </a:custGeom>
+            <a:solidFill>
+              <a:srgbClr val="FFFFFF"/>
+            </a:solidFill>
+            <a:ln>
+              <a:noFill/>
+            </a:ln>
+            <a:effectLst/>
+          </p:spPr>
+          <p:style>
+            <a:lnRef idx="1">
+              <a:schemeClr val="accent1"/>
+            </a:lnRef>
+            <a:fillRef idx="3">
+              <a:schemeClr val="accent1"/>
+            </a:fillRef>
+            <a:effectRef idx="2">
+              <a:schemeClr val="accent1"/>
+            </a:effectRef>
+            <a:fontRef idx="minor">
+              <a:schemeClr val="lt1"/>
+            </a:fontRef>
+          </p:style>
+          <p:txBody>
+            <a:bodyPr rtlCol="0" anchor="ctr"/>
+            <a:lstStyle/>
+            <a:p>
+              <a:pPr algn="ctr"/>
+            </a:p>
+          </p:txBody>
+        </p:sp>
+      </p:grpSp>
     </p:spTree>
   </p:cSld>
   <p:clrMapOvr>
@@ -15009,11 +13285,199 @@
                 <a:ea typeface="Play"/>
                 <a:cs typeface="Play"/>
               </a:rPr>
-              <a:t>Вопросы и ответы</a:t>
+              <a:t>Пилот: 6 недель, 68 колод</a:t>
             </a:r>
           </a:p>
         </p:txBody>
       </p:sp>
+      <p:graphicFrame>
+        <p:nvGraphicFramePr>
+          <p:cNvPr id="623" name="Table 622"/>
+          <p:cNvGraphicFramePr>
+            <a:graphicFrameLocks noGrp="1"/>
+          </p:cNvGraphicFramePr>
+          <p:nvPr/>
+        </p:nvGraphicFramePr>
+        <p:xfrm>
+          <a:off x="6267602" y="1783080"/>
+          <a:ext cx="5472562" cy="4114800"/>
+        </p:xfrm>
+        <a:graphic>
+          <a:graphicData uri="http://schemas.openxmlformats.org/drawingml/2006/table">
+            <a:tbl>
+              <a:tblPr firstRow="1" bandRow="1">
+                <a:tableStyleId>{5C22544A-7EE6-4342-B048-85BDC9FD1C3A}</a:tableStyleId>
+              </a:tblPr>
+              <a:tblGrid>
+                <a:gridCol w="2736281"/>
+                <a:gridCol w="2736281"/>
+              </a:tblGrid>
+              <a:tr h="1371600">
+                <a:tc>
+                  <a:txBody>
+                    <a:bodyPr/>
+                    <a:lstStyle/>
+                    <a:p>
+                      <a:pPr>
+                        <a:defRPr sz="1300" b="1">
+                          <a:solidFill>
+                            <a:srgbClr val="FFFFFF"/>
+                          </a:solidFill>
+                          <a:latin typeface="Play"/>
+                          <a:ea typeface="Play"/>
+                          <a:cs typeface="Play"/>
+                        </a:defRPr>
+                      </a:pPr>
+                      <a:r>
+                        <a:t>Показатель</a:t>
+                      </a:r>
+                    </a:p>
+                  </a:txBody>
+                  <a:tcPr>
+                    <a:solidFill>
+                      <a:srgbClr val="0077FF"/>
+                    </a:solidFill>
+                  </a:tcPr>
+                </a:tc>
+                <a:tc>
+                  <a:txBody>
+                    <a:bodyPr/>
+                    <a:lstStyle/>
+                    <a:p>
+                      <a:pPr>
+                        <a:defRPr sz="1300" b="1">
+                          <a:solidFill>
+                            <a:srgbClr val="FFFFFF"/>
+                          </a:solidFill>
+                          <a:latin typeface="Play"/>
+                          <a:ea typeface="Play"/>
+                          <a:cs typeface="Play"/>
+                        </a:defRPr>
+                      </a:pPr>
+                      <a:r>
+                        <a:t>Значение</a:t>
+                      </a:r>
+                    </a:p>
+                  </a:txBody>
+                  <a:tcPr>
+                    <a:solidFill>
+                      <a:srgbClr val="0077FF"/>
+                    </a:solidFill>
+                  </a:tcPr>
+                </a:tc>
+              </a:tr>
+              <a:tr h="1371600">
+                <a:tc>
+                  <a:txBody>
+                    <a:bodyPr/>
+                    <a:lstStyle/>
+                    <a:p>
+                      <a:pPr>
+                        <a:defRPr sz="1300" b="0">
+                          <a:solidFill>
+                            <a:srgbClr val="FFFFFF"/>
+                          </a:solidFill>
+                          <a:latin typeface="Play"/>
+                          <a:ea typeface="Play"/>
+                          <a:cs typeface="Play"/>
+                        </a:defRPr>
+                      </a:pPr>
+                      <a:r>
+                        <a:t>Длительность</a:t>
+                      </a:r>
+                    </a:p>
+                  </a:txBody>
+                  <a:tcPr>
+                    <a:solidFill>
+                      <a:srgbClr val="111111"/>
+                    </a:solidFill>
+                  </a:tcPr>
+                </a:tc>
+                <a:tc>
+                  <a:txBody>
+                    <a:bodyPr/>
+                    <a:lstStyle/>
+                    <a:p>
+                      <a:pPr>
+                        <a:defRPr sz="1300" b="0">
+                          <a:solidFill>
+                            <a:srgbClr val="FFFFFF"/>
+                          </a:solidFill>
+                          <a:latin typeface="Play"/>
+                          <a:ea typeface="Play"/>
+                          <a:cs typeface="Play"/>
+                        </a:defRPr>
+                      </a:pPr>
+                      <a:r>
+                        <a:t>6 недель</a:t>
+                      </a:r>
+                    </a:p>
+                  </a:txBody>
+                  <a:tcPr>
+                    <a:solidFill>
+                      <a:srgbClr val="111111"/>
+                    </a:solidFill>
+                  </a:tcPr>
+                </a:tc>
+              </a:tr>
+              <a:tr h="1371600">
+                <a:tc>
+                  <a:txBody>
+                    <a:bodyPr/>
+                    <a:lstStyle/>
+                    <a:p>
+                      <a:pPr>
+                        <a:defRPr sz="1300" b="0">
+                          <a:solidFill>
+                            <a:srgbClr val="FFFFFF"/>
+                          </a:solidFill>
+                          <a:latin typeface="Play"/>
+                          <a:ea typeface="Play"/>
+                          <a:cs typeface="Play"/>
+                        </a:defRPr>
+                      </a:pPr>
+                      <a:r>
+                        <a:t>Колоды</a:t>
+                      </a:r>
+                    </a:p>
+                  </a:txBody>
+                  <a:tcPr>
+                    <a:solidFill>
+                      <a:srgbClr val="111111"/>
+                    </a:solidFill>
+                  </a:tcPr>
+                </a:tc>
+                <a:tc>
+                  <a:txBody>
+                    <a:bodyPr/>
+                    <a:lstStyle/>
+                    <a:p>
+                      <a:pPr>
+                        <a:defRPr sz="1300" b="0">
+                          <a:solidFill>
+                            <a:srgbClr val="FFFFFF"/>
+                          </a:solidFill>
+                          <a:latin typeface="Play"/>
+                          <a:ea typeface="Play"/>
+                          <a:cs typeface="Play"/>
+                        </a:defRPr>
+                      </a:pPr>
+                      <a:r>
+                        <a:t>68</a:t>
+                      </a:r>
+                    </a:p>
+                  </a:txBody>
+                  <a:tcPr>
+                    <a:solidFill>
+                      <a:srgbClr val="111111"/>
+                    </a:solidFill>
+                  </a:tcPr>
+                </a:tc>
+              </a:tr>
+            </a:tbl>
+          </a:graphicData>
+        </a:graphic>
+      </p:graphicFrame>
     </p:spTree>
   </p:cSld>
   <p:clrMapOvr>
@@ -15142,8 +13606,8 @@
         </p:nvSpPr>
         <p:spPr>
           <a:xfrm>
-            <a:off x="302280" y="2164394"/>
-            <a:ext cx="11564884" cy="2540741"/>
+            <a:off x="300817" y="297715"/>
+            <a:ext cx="11566347" cy="3377993"/>
           </a:xfrm>
           <a:prstGeom prst="roundRect">
             <a:avLst/>
@@ -15188,8 +13652,8 @@
         </p:nvSpPr>
         <p:spPr>
           <a:xfrm>
-            <a:off x="429280" y="2291394"/>
-            <a:ext cx="7827385" cy="822960"/>
+            <a:off x="427817" y="424715"/>
+            <a:ext cx="11312347" cy="1018540"/>
           </a:xfrm>
           <a:prstGeom prst="rect">
             <a:avLst/>
@@ -15206,7 +13670,7 @@
               <a:spcAft>
                 <a:spcPts val="300"/>
               </a:spcAft>
-              <a:defRPr sz="4000">
+              <a:defRPr sz="5400">
                 <a:solidFill>
                   <a:srgbClr val="FFFFFF"/>
                 </a:solidFill>
@@ -15216,7 +13680,7 @@
               </a:defRPr>
             </a:pPr>
             <a:r>
-              <a:rPr sz="4000">
+              <a:rPr sz="5400">
                 <a:solidFill>
                   <a:srgbClr val="FFFFFF"/>
                 </a:solidFill>
@@ -15224,7 +13688,7 @@
                 <a:ea typeface="Play"/>
                 <a:cs typeface="Play"/>
               </a:rPr>
-              <a:t>Контактная информация</a:t>
+              <a:t>Решение о полном запуске</a:t>
             </a:r>
           </a:p>
         </p:txBody>
@@ -15237,8 +13701,8 @@
         </p:nvSpPr>
         <p:spPr>
           <a:xfrm>
-            <a:off x="429280" y="4014256"/>
-            <a:ext cx="11310884" cy="563880"/>
+            <a:off x="427817" y="2258389"/>
+            <a:ext cx="11312347" cy="1290320"/>
           </a:xfrm>
           <a:prstGeom prst="rect">
             <a:avLst/>
@@ -15251,11 +13715,11 @@
           </a:bodyPr>
           <a:lstStyle/>
           <a:p>
-            <a:pPr algn="ctr">
+            <a:pPr algn="l">
               <a:spcAft>
                 <a:spcPts val="300"/>
               </a:spcAft>
-              <a:defRPr sz="2800" b="1">
+              <a:defRPr sz="2400" b="1">
                 <a:solidFill>
                   <a:srgbClr val="FFFFFF"/>
                 </a:solidFill>
@@ -15265,7 +13729,7 @@
               </a:defRPr>
             </a:pPr>
             <a:r>
-              <a:rPr sz="2800" b="1">
+              <a:rPr sz="2400" b="1">
                 <a:solidFill>
                   <a:srgbClr val="FFFFFF"/>
                 </a:solidFill>
@@ -15273,7 +13737,59 @@
                 <a:ea typeface="Play"/>
                 <a:cs typeface="Play"/>
               </a:rPr>
-              <a:t>Email: support@example.com</a:t>
+              <a:t>• Третий квартал 2026 подключение 4 команд</a:t>
+            </a:r>
+          </a:p>
+          <a:p>
+            <a:pPr algn="l">
+              <a:spcAft>
+                <a:spcPts val="300"/>
+              </a:spcAft>
+              <a:defRPr sz="2400" b="1">
+                <a:solidFill>
+                  <a:srgbClr val="FFFFFF"/>
+                </a:solidFill>
+                <a:latin typeface="Play"/>
+                <a:ea typeface="Play"/>
+                <a:cs typeface="Play"/>
+              </a:defRPr>
+            </a:pPr>
+            <a:r>
+              <a:rPr sz="2400" b="1">
+                <a:solidFill>
+                  <a:srgbClr val="FFFFFF"/>
+                </a:solidFill>
+                <a:latin typeface="Play"/>
+                <a:ea typeface="Play"/>
+                <a:cs typeface="Play"/>
+              </a:rPr>
+              <a:t>• Четвертый квартал 2026 доступ для всей компании</a:t>
+            </a:r>
+          </a:p>
+          <a:p>
+            <a:pPr algn="l">
+              <a:spcAft>
+                <a:spcPts val="300"/>
+              </a:spcAft>
+              <a:defRPr sz="2400" b="1">
+                <a:solidFill>
+                  <a:srgbClr val="FFFFFF"/>
+                </a:solidFill>
+                <a:latin typeface="Play"/>
+                <a:ea typeface="Play"/>
+                <a:cs typeface="Play"/>
+              </a:defRPr>
+            </a:pPr>
+            <a:r>
+              <a:rPr sz="2400" b="1">
+                <a:solidFill>
+                  <a:srgbClr val="FFFFFF"/>
+                </a:solidFill>
+                <a:latin typeface="Play"/>
+                <a:ea typeface="Play"/>
+                <a:cs typeface="Play"/>
+              </a:rPr>
+              <a:t>• Первый квартал 2027 генерация иллюстраций</a:t>
             </a:r>
           </a:p>
         </p:txBody>
